--- a/downloads/presentations/modules/ops-200.pptx
+++ b/downloads/presentations/modules/ops-200.pptx
@@ -614,7 +614,8 @@
               <a:rPr lang="en-US" dirty="0"/>
               <a:t>Public Health Example
 A health department may use AI to identify cases needing rapid follow-up. If demographic fields are missing more often for some populations, the model may be less reliable for those groups. If the data feed from certain clinics is delayed, the prioritization queue may reflect reporting timeliness rather than true need. A data quality review can reveal these issues before the tool is deployed.
-A community health assessment team may use AI to summarize survey comments and administrative data. If survey responses are not representative of residents with limited English proficiency, unstable housing, disability, or limited internet access, the AI-generated themes may miss important community needs. Data quality engineering should include equity and representativeness review.</a:t>
+A community health assessment team may use AI to summarize survey comments and administrative data. If survey responses are not representative of residents with limited English proficiency, unstable housing, disability, or limited internet access, the AI-generated themes may miss important community needs. Data quality engineering should include equity and representativeness review.
+Application guidance: Connect the concept to data quality, model performance, validation evidence, monitoring measures, and decisions that remain under human control.</a:t>
             </a:r>
             <a:endParaRPr lang="en-US" dirty="0"/>
           </a:p>
@@ -705,7 +706,8 @@
               <a:t>Technical Deep Dive
 Data quality engineering begins by defining required fields and acceptable thresholds for the intended use. For an AI-supported case triage workflow, required fields may include condition, lab evidence, onset date, specimen date, jurisdiction, age, pregnancy status, hospitalization, and contact information. The agency should decide which missing fields stop automated support, which trigger a warning, and which can be handled through human review.
 Quality measurement should include completeness, timeliness, validity, consistency, uniqueness, accuracy, and representativeness. Some dimensions can be measured automatically. Others require program knowledge, source review, or comparison to external benchmarks. Data quality should not be treated as a one-time predeployment activity. It should be monitored throughout the AI lifecycle.
-Documentation is essential. A data quality plan should describe known limitations, review thresholds, monitoring frequency, responsible owners, escalation criteria, and decisions about acceptable use. When data quality is insufficient, the correct response may be to restrict the use case, add human review, improve the data pipeline, delay deployment, or avoid AI use for that workflow.</a:t>
+Documentation is essential. A data quality plan should describe known limitations, review thresholds, monitoring frequency, responsible owners, escalation criteria, and decisions about acceptable use. When data quality is insufficient, the correct response may be to restrict the use case, add human review, improve the data pipeline, delay deployment, or avoid AI use for that workflow.
+Application guidance: Connect the concept to data quality, model performance, validation evidence, monitoring measures, and decisions that remain under human control.</a:t>
             </a:r>
             <a:endParaRPr lang="en-US" dirty="0"/>
           </a:p>
@@ -796,7 +798,8 @@
               <a:t>Risks, Failure Modes, and Guardrails
 Confident output from weak data. AI may produce polished outputs from incomplete or biased data. Guardrails include uncertainty labeling, source review, and limits on use.
 Fitness-for-use mismatch. Data suitable for one purpose may be unsafe for another. Guardrails include use-case-specific quality criteria and approval conditions.
-Unmonitored drift. Data patterns may change after deployment. Guardrails include drift indicators, periodic review, and retraining or recalibration triggers.</a:t>
+Unmonitored drift. Data patterns may change after deployment. Guardrails include drift indicators, periodic review, and retraining or recalibration triggers.
+Application guidance: Identify what could go wrong, who could be affected, what safeguards are needed, and what evidence should be reviewed before use expands.</a:t>
             </a:r>
             <a:endParaRPr lang="en-US" dirty="0"/>
           </a:p>
@@ -885,7 +888,8 @@
             <a:r>
               <a:rPr lang="en-US" dirty="0"/>
               <a:t>Risks, Failure Modes, and Guardrails
-Equity blind spots. Missingness and underrepresentation may affect some groups more than others. Guardrails include subgroup review, community context, and documentation of limitations.</a:t>
+Equity blind spots. Missingness and underrepresentation may affect some groups more than others. Guardrails include subgroup review, community context, and documentation of limitations.
+Application guidance: Identify what could go wrong, who could be affected, what safeguards are needed, and what evidence should be reviewed before use expands.</a:t>
             </a:r>
             <a:endParaRPr lang="en-US" dirty="0"/>
           </a:p>
@@ -974,7 +978,8 @@
             <a:r>
               <a:rPr lang="en-US" dirty="0"/>
               <a:t>Application to AI-Supported Workflows
-Generative AI may summarize datasets or records, but the output must reflect missingness and uncertainty. Predictive analytics depend heavily on feature quality, label quality, and representative training data. NLP may be affected by language variation, abbreviations, and documentation practices. RAG depends on document quality, metadata, and currency. Agentic AI should be blocked from acting automatically when required data are missing or quality thresholds are not met.</a:t>
+Generative AI may summarize datasets or records, but the output must reflect missingness and uncertainty. Predictive analytics depend heavily on feature quality, label quality, and representative training data. NLP may be affected by language variation, abbreviations, and documentation practices. RAG depends on document quality, metadata, and currency. Agentic AI should be blocked from acting automatically when required data are missing or quality thresholds are not met.
+Application guidance: Connect the concept to data quality, model performance, validation evidence, monitoring measures, and decisions that remain under human control.</a:t>
             </a:r>
             <a:endParaRPr lang="en-US" dirty="0"/>
           </a:p>
@@ -1065,7 +1070,8 @@
               <a:t>Reflection Questions
 Which data quality problems most often affect your program area?
 Which missing fields would make an AI output unsafe or unreliable?
-Which populations or settings may be underrepresented in the data?</a:t>
+Which populations or settings may be underrepresented in the data?
+Application guidance: Connect the concept to data quality, model performance, validation evidence, monitoring measures, and decisions that remain under human control.</a:t>
             </a:r>
             <a:endParaRPr lang="en-US" dirty="0"/>
           </a:p>
@@ -1155,7 +1161,8 @@
               <a:rPr lang="en-US" dirty="0"/>
               <a:t>Reflection Questions
 How would staff detect data drift?
-Who has authority to pause or limit AI use when data quality is insufficient?</a:t>
+Who has authority to pause or limit AI use when data quality is insufficient?
+Application guidance: Connect the concept to data quality, model performance, validation evidence, monitoring measures, and decisions that remain under human control.</a:t>
             </a:r>
             <a:endParaRPr lang="en-US" dirty="0"/>
           </a:p>
@@ -1244,7 +1251,8 @@
             <a:r>
               <a:rPr lang="en-US" dirty="0"/>
               <a:t>Practical Exercise
-Create a data quality review plan for one AI-supported workflow. Include the use case, required fields, quality dimensions, thresholds or review rules, known limitations, equity concerns, drift monitoring, documentation expectations, and escalation criteria.</a:t>
+Create a data quality review plan for one AI-supported workflow. Include the use case, required fields, quality dimensions, thresholds or review rules, known limitations, equity concerns, drift monitoring, documentation expectations, and escalation criteria.
+Application guidance: Use the assignment to test whether you can explain the concept, apply it to a realistic public health situation, and identify what would need review before the work moves forward.</a:t>
             </a:r>
             <a:endParaRPr lang="en-US" dirty="0"/>
           </a:p>
@@ -1335,7 +1343,8 @@
               <a:t>Expected Artifact or Evidence
 Data quality review plan
 Data quality checklist
-Thresholds or review criteria</a:t>
+Thresholds or review criteria
+Application guidance: Connect the concept to data quality, model performance, validation evidence, monitoring measures, and decisions that remain under human control.</a:t>
             </a:r>
             <a:endParaRPr lang="en-US" dirty="0"/>
           </a:p>
@@ -1424,7 +1433,8 @@
             <a:r>
               <a:rPr lang="en-US" dirty="0"/>
               <a:t>Expected Artifact or Evidence
-Known limitations statement</a:t>
+Known limitations statement
+Application guidance: Connect the concept to data quality, model performance, validation evidence, monitoring measures, and decisions that remain under human control.</a:t>
             </a:r>
             <a:endParaRPr lang="en-US" dirty="0"/>
           </a:p>
@@ -1608,7 +1618,8 @@
 Data quality review plan
 Data quality checklist
 Thresholds or review criteria
-Known limitations statement</a:t>
+Known limitations statement
+Application guidance: Use the assignment to test whether you can explain the concept, apply it to a realistic public health situation, and identify what would need review before the work moves forward.</a:t>
             </a:r>
             <a:endParaRPr lang="en-US" dirty="0"/>
           </a:p>
@@ -1701,7 +1712,8 @@
 2. Why can poor data quality be dangerous in AI-supported workflows?
 3. What is data drift?
 4. Which item belongs in a data quality review plan?
-5. When should an AI use case be paused or limited?</a:t>
+5. When should an AI use case be paused or limited?
+Application guidance: Use the assignment to test whether you can explain the concept, apply it to a realistic public health situation, and identify what would need review before the work moves forward.</a:t>
             </a:r>
             <a:endParaRPr lang="en-US" dirty="0"/>
           </a:p>
@@ -1793,7 +1805,8 @@
 CDC surveillance and data quality resources
 CDC Public Health Data Strategy: https://www.cdc.gov/public-health-data-strategy/php/about/index.html
 NIST AI Risk Management Framework: https://www.nist.gov/itl/ai-risk-management-framework
-Agency data governance policies</a:t>
+Agency data governance policies
+Application guidance: Connect the concept to data quality, model performance, validation evidence, monitoring measures, and decisions that remain under human control.</a:t>
             </a:r>
             <a:endParaRPr lang="en-US" dirty="0"/>
           </a:p>
@@ -2072,7 +2085,8 @@
 Explain the difference between general data quality and fitness for a specific use.
 Assess how missingness, timeliness, duplication, coding variation, and representativeness affect AI outputs.
 Define quality thresholds, review rules, and escalation criteria for a workflow.
-Produce a data quality review plan for an AI-supported use case.</a:t>
+Produce a data quality review plan for an AI-supported use case.
+Application guidance: Use the assignment to test whether you can explain the concept, apply it to a realistic public health situation, and identify what would need review before the work moves forward.</a:t>
             </a:r>
             <a:endParaRPr lang="en-US" dirty="0"/>
           </a:p>
@@ -2161,7 +2175,8 @@
             <a:r>
               <a:rPr lang="en-US" dirty="0"/>
               <a:t>Module Overview
-Data quality engineering is the practical work of defining, measuring, improving, and monitoring data quality so that data are fit for use. In public health AI, data quality is not a background concern. It directly affects whether AI outputs are accurate, equitable, timely, and safe enough to support public health work.</a:t>
+Data quality engineering is the practical work of defining, measuring, improving, and monitoring data quality so that data are fit for use. In public health AI, data quality is not a background concern. It directly affects whether AI outputs are accurate, equitable, timely, and safe enough to support public health work.
+Application guidance: Connect the concept to data quality, model performance, validation evidence, monitoring measures, and decisions that remain under human control.</a:t>
             </a:r>
             <a:endParaRPr lang="en-US" dirty="0"/>
           </a:p>
@@ -2252,7 +2267,8 @@
               <a:t>Why This Topic Matters for Public Health AI
 AI systems can create a false sense of precision when they produce polished outputs from weak data. A summary may sound authoritative even when key fields are missing. A risk score may look objective even when the data underrepresent communities with limited healthcare access. A classification model may appear efficient while encoding historical reporting patterns. Data quality engineering helps agencies identify these problems before they become operational decisions.
 Public health data quality should always be evaluated in relation to the intended use. A dataset may be adequate for annual descriptive reporting but inadequate for real-time triage. A field may be useful for aggregate trends but too incomplete for individual-level decision support. Fitness for use is therefore a public health judgment as well as a technical assessment.
-Data quality review also supports trust. Staff are more likely to use AI responsibly when they understand the limitations of the data behind the output. Leaders and communities are more likely to trust AI-supported workflows when limitations, uncertainty, and safeguards are documented.</a:t>
+Data quality review also supports trust. Staff are more likely to use AI responsibly when they understand the limitations of the data behind the output. Leaders and communities are more likely to trust AI-supported workflows when limitations, uncertainty, and safeguards are documented.
+Application guidance: Connect the concept to data quality, model performance, validation evidence, monitoring measures, and decisions that remain under human control.</a:t>
             </a:r>
             <a:endParaRPr lang="en-US" dirty="0"/>
           </a:p>
@@ -2343,7 +2359,8 @@
               <a:t>Core Concepts
 Completeness. Completeness refers to whether required data fields are present. Missing fields may affect case classification, risk prediction, subgroup analysis, and outreach planning.
 Timeliness. Timeliness refers to whether data are available quickly enough for the intended use. Delayed data may be acceptable for retrospective analysis but unsafe for urgent response.
-Validity. Validity refers to whether values follow expected formats, ranges, and rules. Invalid dates, codes, units, or categories can undermine AI performance.</a:t>
+Validity. Validity refers to whether values follow expected formats, ranges, and rules. Invalid dates, codes, units, or categories can undermine AI performance.
+Application guidance: Connect the concept to data quality, model performance, validation evidence, monitoring measures, and decisions that remain under human control.</a:t>
             </a:r>
             <a:endParaRPr lang="en-US" dirty="0"/>
           </a:p>
@@ -2433,7 +2450,8 @@
               <a:rPr lang="en-US" dirty="0"/>
               <a:t>Core Concepts
 Representativeness. Representativeness refers to whether data reflect the population, events, or settings relevant to the use case. Underrepresentation can produce biased or incomplete AI outputs.
-Data drift. Data drift is a change in data patterns over time. Drift can occur when reporting partners, testing practices, disease patterns, coding rules, or community behaviors change.</a:t>
+Data drift. Data drift is a change in data patterns over time. Drift can occur when reporting partners, testing practices, disease patterns, coding rules, or community behaviors change.
+Application guidance: Connect the concept to data quality, model performance, validation evidence, monitoring measures, and decisions that remain under human control.</a:t>
             </a:r>
             <a:endParaRPr lang="en-US" dirty="0"/>
           </a:p>
@@ -3204,8 +3222,8 @@
         </p:nvSpPr>
         <p:spPr>
           <a:xfrm>
-            <a:off x="9966960" y="6537960"/>
-            <a:ext cx="1645920" cy="201168"/>
+            <a:off x="9646920" y="6537960"/>
+            <a:ext cx="1965960" cy="201168"/>
           </a:xfrm>
           <a:prstGeom prst="rect">
             <a:avLst/>
@@ -3229,7 +3247,7 @@
                 <a:ea typeface="Aptos" pitchFamily="34" charset="-122"/>
                 <a:cs typeface="Aptos" pitchFamily="34" charset="-120"/>
               </a:rPr>
-              <a:t>Â© Paula Soper</a:t>
+              <a:t>Copyright Paula Soper</a:t>
             </a:r>
             <a:endParaRPr lang="en-US" sz="800" dirty="0"/>
           </a:p>
@@ -3276,77 +3294,13 @@
       </p:sp>
       <p:sp>
         <p:nvSpPr>
-          <p:cNvPr id="8" name="Shape 6"/>
+          <p:cNvPr id="8" name="Text 6"/>
           <p:cNvSpPr/>
           <p:nvPr/>
         </p:nvSpPr>
         <p:spPr>
           <a:xfrm>
             <a:off x="640080" y="658368"/>
-            <a:ext cx="420624" cy="420624"/>
-          </a:xfrm>
-          <a:prstGeom prst="ellipse">
-            <a:avLst/>
-          </a:prstGeom>
-          <a:solidFill>
-            <a:srgbClr val="0068B7"/>
-          </a:solidFill>
-          <a:ln w="12700">
-            <a:solidFill>
-              <a:srgbClr val="0068B7"/>
-            </a:solidFill>
-            <a:prstDash val="solid"/>
-          </a:ln>
-        </p:spPr>
-      </p:sp>
-      <p:sp>
-        <p:nvSpPr>
-          <p:cNvPr id="9" name="Text 7"/>
-          <p:cNvSpPr/>
-          <p:nvPr/>
-        </p:nvSpPr>
-        <p:spPr>
-          <a:xfrm>
-            <a:off x="640080" y="731520"/>
-            <a:ext cx="420624" cy="164592"/>
-          </a:xfrm>
-          <a:prstGeom prst="rect">
-            <a:avLst/>
-          </a:prstGeom>
-          <a:noFill/>
-          <a:ln/>
-        </p:spPr>
-        <p:txBody>
-          <a:bodyPr wrap="square" lIns="0" tIns="0" rIns="0" bIns="0" rtlCol="0" anchor="ctr"/>
-          <a:lstStyle/>
-          <a:p>
-            <a:pPr algn="ctr" indent="0" marL="0">
-              <a:buNone/>
-            </a:pPr>
-            <a:r>
-              <a:rPr lang="en-US" sz="1100" b="1" dirty="0">
-                <a:solidFill>
-                  <a:srgbClr val="FFFFFF"/>
-                </a:solidFill>
-                <a:latin typeface="Aptos" pitchFamily="34" charset="0"/>
-                <a:ea typeface="Aptos" pitchFamily="34" charset="-122"/>
-                <a:cs typeface="Aptos" pitchFamily="34" charset="-120"/>
-              </a:rPr>
-              <a:t>5</a:t>
-            </a:r>
-            <a:endParaRPr lang="en-US" sz="1100" dirty="0"/>
-          </a:p>
-        </p:txBody>
-      </p:sp>
-      <p:sp>
-        <p:nvSpPr>
-          <p:cNvPr id="10" name="Text 8"/>
-          <p:cNvSpPr/>
-          <p:nvPr/>
-        </p:nvSpPr>
-        <p:spPr>
-          <a:xfrm>
-            <a:off x="640080" y="621792"/>
             <a:ext cx="10881360" cy="713232"/>
           </a:xfrm>
           <a:prstGeom prst="rect">
@@ -3381,14 +3335,14 @@
       </p:sp>
       <p:sp>
         <p:nvSpPr>
-          <p:cNvPr id="11" name="Text 9"/>
+          <p:cNvPr id="9" name="Text 7"/>
           <p:cNvSpPr/>
           <p:nvPr/>
         </p:nvSpPr>
         <p:spPr>
           <a:xfrm>
             <a:off x="868680" y="1508760"/>
-            <a:ext cx="6537960" cy="4160520"/>
+            <a:ext cx="6309360" cy="4160520"/>
           </a:xfrm>
           <a:prstGeom prst="rect">
             <a:avLst/>
@@ -3447,18 +3401,18 @@
       </p:sp>
       <p:sp>
         <p:nvSpPr>
-          <p:cNvPr id="12" name="Shape 10"/>
-          <p:cNvSpPr/>
-          <p:nvPr/>
-        </p:nvSpPr>
-        <p:spPr>
-          <a:xfrm>
-            <a:off x="7909560" y="1417320"/>
-            <a:ext cx="3154680" cy="1828800"/>
+          <p:cNvPr id="10" name="Shape 8"/>
+          <p:cNvSpPr/>
+          <p:nvPr/>
+        </p:nvSpPr>
+        <p:spPr>
+          <a:xfrm>
+            <a:off x="7635240" y="1325880"/>
+            <a:ext cx="3474720" cy="1325880"/>
           </a:xfrm>
           <a:prstGeom prst="roundRect">
             <a:avLst>
-              <a:gd name="adj" fmla="val 6000"/>
+              <a:gd name="adj" fmla="val 8276"/>
             </a:avLst>
           </a:prstGeom>
           <a:solidFill>
@@ -3474,14 +3428,14 @@
       </p:sp>
       <p:sp>
         <p:nvSpPr>
-          <p:cNvPr id="13" name="Text 11"/>
-          <p:cNvSpPr/>
-          <p:nvPr/>
-        </p:nvSpPr>
-        <p:spPr>
-          <a:xfrm>
-            <a:off x="8074152" y="1563624"/>
-            <a:ext cx="2825496" cy="256032"/>
+          <p:cNvPr id="11" name="Text 9"/>
+          <p:cNvSpPr/>
+          <p:nvPr/>
+        </p:nvSpPr>
+        <p:spPr>
+          <a:xfrm>
+            <a:off x="7799832" y="1472184"/>
+            <a:ext cx="3145536" cy="256032"/>
           </a:xfrm>
           <a:prstGeom prst="rect">
             <a:avLst/>
@@ -3505,7 +3459,7 @@
                 <a:ea typeface="Aptos" pitchFamily="34" charset="-122"/>
                 <a:cs typeface="Aptos" pitchFamily="34" charset="-120"/>
               </a:rPr>
-              <a:t>Key idea</a:t>
+              <a:t>Data decision</a:t>
             </a:r>
             <a:endParaRPr lang="en-US" sz="1300" dirty="0"/>
           </a:p>
@@ -3513,14 +3467,14 @@
       </p:sp>
       <p:sp>
         <p:nvSpPr>
-          <p:cNvPr id="14" name="Text 12"/>
-          <p:cNvSpPr/>
-          <p:nvPr/>
-        </p:nvSpPr>
-        <p:spPr>
-          <a:xfrm>
-            <a:off x="8074152" y="1920240"/>
-            <a:ext cx="2825496" cy="1188720"/>
+          <p:cNvPr id="12" name="Text 10"/>
+          <p:cNvSpPr/>
+          <p:nvPr/>
+        </p:nvSpPr>
+        <p:spPr>
+          <a:xfrm>
+            <a:off x="7799832" y="1828800"/>
+            <a:ext cx="3145536" cy="685800"/>
           </a:xfrm>
           <a:prstGeom prst="rect">
             <a:avLst/>
@@ -3554,21 +3508,212 @@
       </p:sp>
       <p:sp>
         <p:nvSpPr>
-          <p:cNvPr id="15" name="Shape 13"/>
-          <p:cNvSpPr/>
-          <p:nvPr/>
-        </p:nvSpPr>
-        <p:spPr>
-          <a:xfrm>
-            <a:off x="7909560" y="3520440"/>
-            <a:ext cx="3154680" cy="1737360"/>
+          <p:cNvPr id="13" name="Shape 11"/>
+          <p:cNvSpPr/>
+          <p:nvPr/>
+        </p:nvSpPr>
+        <p:spPr>
+          <a:xfrm>
+            <a:off x="7635240" y="2788920"/>
+            <a:ext cx="3474720" cy="1536192"/>
           </a:xfrm>
           <a:prstGeom prst="roundRect">
             <a:avLst>
-              <a:gd name="adj" fmla="val 6316"/>
+              <a:gd name="adj" fmla="val 7143"/>
             </a:avLst>
           </a:prstGeom>
           <a:solidFill>
+            <a:srgbClr val="FFFFFF">
+              <a:alpha val="88000"/>
+            </a:srgbClr>
+          </a:solidFill>
+          <a:ln w="12700">
+            <a:solidFill>
+              <a:srgbClr val="D6E8F2"/>
+            </a:solidFill>
+            <a:prstDash val="solid"/>
+          </a:ln>
+        </p:spPr>
+      </p:sp>
+      <p:sp>
+        <p:nvSpPr>
+          <p:cNvPr id="14" name="Shape 12"/>
+          <p:cNvSpPr/>
+          <p:nvPr/>
+        </p:nvSpPr>
+        <p:spPr>
+          <a:xfrm>
+            <a:off x="8138160" y="3474720"/>
+            <a:ext cx="256032" cy="411480"/>
+          </a:xfrm>
+          <a:prstGeom prst="rect">
+            <a:avLst/>
+          </a:prstGeom>
+          <a:solidFill>
+            <a:srgbClr val="0068B7"/>
+          </a:solidFill>
+          <a:ln w="12700">
+            <a:solidFill>
+              <a:srgbClr val="0068B7"/>
+            </a:solidFill>
+            <a:prstDash val="solid"/>
+          </a:ln>
+        </p:spPr>
+      </p:sp>
+      <p:sp>
+        <p:nvSpPr>
+          <p:cNvPr id="15" name="Shape 13"/>
+          <p:cNvSpPr/>
+          <p:nvPr/>
+        </p:nvSpPr>
+        <p:spPr>
+          <a:xfrm>
+            <a:off x="8577072" y="3172968"/>
+            <a:ext cx="256032" cy="713232"/>
+          </a:xfrm>
+          <a:prstGeom prst="rect">
+            <a:avLst/>
+          </a:prstGeom>
+          <a:solidFill>
+            <a:srgbClr val="2F8A28"/>
+          </a:solidFill>
+          <a:ln w="12700">
+            <a:solidFill>
+              <a:srgbClr val="2F8A28"/>
+            </a:solidFill>
+            <a:prstDash val="solid"/>
+          </a:ln>
+        </p:spPr>
+      </p:sp>
+      <p:sp>
+        <p:nvSpPr>
+          <p:cNvPr id="16" name="Shape 14"/>
+          <p:cNvSpPr/>
+          <p:nvPr/>
+        </p:nvSpPr>
+        <p:spPr>
+          <a:xfrm>
+            <a:off x="9015984" y="2880360"/>
+            <a:ext cx="256032" cy="1005840"/>
+          </a:xfrm>
+          <a:prstGeom prst="rect">
+            <a:avLst/>
+          </a:prstGeom>
+          <a:solidFill>
+            <a:srgbClr val="D69A2D"/>
+          </a:solidFill>
+          <a:ln w="12700">
+            <a:solidFill>
+              <a:srgbClr val="D69A2D"/>
+            </a:solidFill>
+            <a:prstDash val="solid"/>
+          </a:ln>
+        </p:spPr>
+      </p:sp>
+      <p:sp>
+        <p:nvSpPr>
+          <p:cNvPr id="17" name="Shape 15"/>
+          <p:cNvSpPr/>
+          <p:nvPr/>
+        </p:nvSpPr>
+        <p:spPr>
+          <a:xfrm>
+            <a:off x="9454896" y="3319272"/>
+            <a:ext cx="256032" cy="566928"/>
+          </a:xfrm>
+          <a:prstGeom prst="rect">
+            <a:avLst/>
+          </a:prstGeom>
+          <a:solidFill>
+            <a:srgbClr val="6A4CA3"/>
+          </a:solidFill>
+          <a:ln w="12700">
+            <a:solidFill>
+              <a:srgbClr val="6A4CA3"/>
+            </a:solidFill>
+            <a:prstDash val="solid"/>
+          </a:ln>
+        </p:spPr>
+      </p:sp>
+      <p:sp>
+        <p:nvSpPr>
+          <p:cNvPr id="18" name="Shape 16"/>
+          <p:cNvSpPr/>
+          <p:nvPr/>
+        </p:nvSpPr>
+        <p:spPr>
+          <a:xfrm>
+            <a:off x="8019288" y="3886200"/>
+            <a:ext cx="2706624" cy="0"/>
+          </a:xfrm>
+          <a:prstGeom prst="line">
+            <a:avLst/>
+          </a:prstGeom>
+          <a:noFill/>
+          <a:ln w="15240">
+            <a:solidFill>
+              <a:srgbClr val="003A63"/>
+            </a:solidFill>
+            <a:prstDash val="solid"/>
+          </a:ln>
+        </p:spPr>
+      </p:sp>
+      <p:sp>
+        <p:nvSpPr>
+          <p:cNvPr id="19" name="Text 17"/>
+          <p:cNvSpPr/>
+          <p:nvPr/>
+        </p:nvSpPr>
+        <p:spPr>
+          <a:xfrm>
+            <a:off x="7863840" y="3017520"/>
+            <a:ext cx="3017520" cy="201168"/>
+          </a:xfrm>
+          <a:prstGeom prst="rect">
+            <a:avLst/>
+          </a:prstGeom>
+          <a:noFill/>
+          <a:ln/>
+        </p:spPr>
+        <p:txBody>
+          <a:bodyPr wrap="square" lIns="0" tIns="0" rIns="0" bIns="0" rtlCol="0" anchor="ctr"/>
+          <a:lstStyle/>
+          <a:p>
+            <a:pPr algn="ctr" indent="0" marL="0">
+              <a:buNone/>
+            </a:pPr>
+            <a:r>
+              <a:rPr lang="en-US" sz="1050" b="1" dirty="0">
+                <a:solidFill>
+                  <a:srgbClr val="003A63"/>
+                </a:solidFill>
+                <a:latin typeface="Aptos" pitchFamily="34" charset="0"/>
+                <a:ea typeface="Aptos" pitchFamily="34" charset="-122"/>
+                <a:cs typeface="Aptos" pitchFamily="34" charset="-120"/>
+              </a:rPr>
+              <a:t>Measure and monitor</a:t>
+            </a:r>
+            <a:endParaRPr lang="en-US" sz="1050" dirty="0"/>
+          </a:p>
+        </p:txBody>
+      </p:sp>
+      <p:sp>
+        <p:nvSpPr>
+          <p:cNvPr id="20" name="Shape 18"/>
+          <p:cNvSpPr/>
+          <p:nvPr/>
+        </p:nvSpPr>
+        <p:spPr>
+          <a:xfrm>
+            <a:off x="7635240" y="4498848"/>
+            <a:ext cx="3474720" cy="1143000"/>
+          </a:xfrm>
+          <a:prstGeom prst="roundRect">
+            <a:avLst>
+              <a:gd name="adj" fmla="val 9600"/>
+            </a:avLst>
+          </a:prstGeom>
+          <a:solidFill>
             <a:srgbClr val="EAF6F8"/>
           </a:solidFill>
           <a:ln w="12700">
@@ -3581,14 +3726,14 @@
       </p:sp>
       <p:sp>
         <p:nvSpPr>
-          <p:cNvPr id="16" name="Text 14"/>
-          <p:cNvSpPr/>
-          <p:nvPr/>
-        </p:nvSpPr>
-        <p:spPr>
-          <a:xfrm>
-            <a:off x="8074152" y="3666744"/>
-            <a:ext cx="2825496" cy="256032"/>
+          <p:cNvPr id="21" name="Text 19"/>
+          <p:cNvSpPr/>
+          <p:nvPr/>
+        </p:nvSpPr>
+        <p:spPr>
+          <a:xfrm>
+            <a:off x="7799832" y="4645152"/>
+            <a:ext cx="3145536" cy="256032"/>
           </a:xfrm>
           <a:prstGeom prst="rect">
             <a:avLst/>
@@ -3612,7 +3757,7 @@
                 <a:ea typeface="Aptos" pitchFamily="34" charset="-122"/>
                 <a:cs typeface="Aptos" pitchFamily="34" charset="-120"/>
               </a:rPr>
-              <a:t>Use this for</a:t>
+              <a:t>How to validate</a:t>
             </a:r>
             <a:endParaRPr lang="en-US" sz="1300" dirty="0"/>
           </a:p>
@@ -3620,14 +3765,14 @@
       </p:sp>
       <p:sp>
         <p:nvSpPr>
-          <p:cNvPr id="17" name="Text 15"/>
-          <p:cNvSpPr/>
-          <p:nvPr/>
-        </p:nvSpPr>
-        <p:spPr>
-          <a:xfrm>
-            <a:off x="8074152" y="4023360"/>
-            <a:ext cx="2825496" cy="1097280"/>
+          <p:cNvPr id="22" name="Text 20"/>
+          <p:cNvSpPr/>
+          <p:nvPr/>
+        </p:nvSpPr>
+        <p:spPr>
+          <a:xfrm>
+            <a:off x="7799832" y="5001768"/>
+            <a:ext cx="3145536" cy="502920"/>
           </a:xfrm>
           <a:prstGeom prst="rect">
             <a:avLst/>
@@ -3653,7 +3798,7 @@
                 <a:ea typeface="Aptos" pitchFamily="34" charset="-122"/>
                 <a:cs typeface="Aptos" pitchFamily="34" charset="-120"/>
               </a:rPr>
-              <a:t>Connect the concept to public health decisions, safeguards, documentation, or implementation work.</a:t>
+              <a:t>Connect the concept to data quality, model performance, validation evidence, monitoring measures, and decisions that remain under human control.</a:t>
             </a:r>
             <a:endParaRPr lang="en-US" sz="1550" dirty="0"/>
           </a:p>
@@ -3827,8 +3972,8 @@
         </p:nvSpPr>
         <p:spPr>
           <a:xfrm>
-            <a:off x="9966960" y="6537960"/>
-            <a:ext cx="1645920" cy="201168"/>
+            <a:off x="9646920" y="6537960"/>
+            <a:ext cx="1965960" cy="201168"/>
           </a:xfrm>
           <a:prstGeom prst="rect">
             <a:avLst/>
@@ -3852,7 +3997,7 @@
                 <a:ea typeface="Aptos" pitchFamily="34" charset="-122"/>
                 <a:cs typeface="Aptos" pitchFamily="34" charset="-120"/>
               </a:rPr>
-              <a:t>Â© Paula Soper</a:t>
+              <a:t>Copyright Paula Soper</a:t>
             </a:r>
             <a:endParaRPr lang="en-US" sz="800" dirty="0"/>
           </a:p>
@@ -3899,77 +4044,13 @@
       </p:sp>
       <p:sp>
         <p:nvSpPr>
-          <p:cNvPr id="8" name="Shape 6"/>
+          <p:cNvPr id="8" name="Text 6"/>
           <p:cNvSpPr/>
           <p:nvPr/>
         </p:nvSpPr>
         <p:spPr>
           <a:xfrm>
             <a:off x="640080" y="658368"/>
-            <a:ext cx="420624" cy="420624"/>
-          </a:xfrm>
-          <a:prstGeom prst="ellipse">
-            <a:avLst/>
-          </a:prstGeom>
-          <a:solidFill>
-            <a:srgbClr val="0068B7"/>
-          </a:solidFill>
-          <a:ln w="12700">
-            <a:solidFill>
-              <a:srgbClr val="0068B7"/>
-            </a:solidFill>
-            <a:prstDash val="solid"/>
-          </a:ln>
-        </p:spPr>
-      </p:sp>
-      <p:sp>
-        <p:nvSpPr>
-          <p:cNvPr id="9" name="Text 7"/>
-          <p:cNvSpPr/>
-          <p:nvPr/>
-        </p:nvSpPr>
-        <p:spPr>
-          <a:xfrm>
-            <a:off x="640080" y="731520"/>
-            <a:ext cx="420624" cy="164592"/>
-          </a:xfrm>
-          <a:prstGeom prst="rect">
-            <a:avLst/>
-          </a:prstGeom>
-          <a:noFill/>
-          <a:ln/>
-        </p:spPr>
-        <p:txBody>
-          <a:bodyPr wrap="square" lIns="0" tIns="0" rIns="0" bIns="0" rtlCol="0" anchor="ctr"/>
-          <a:lstStyle/>
-          <a:p>
-            <a:pPr algn="ctr" indent="0" marL="0">
-              <a:buNone/>
-            </a:pPr>
-            <a:r>
-              <a:rPr lang="en-US" sz="1100" b="1" dirty="0">
-                <a:solidFill>
-                  <a:srgbClr val="FFFFFF"/>
-                </a:solidFill>
-                <a:latin typeface="Aptos" pitchFamily="34" charset="0"/>
-                <a:ea typeface="Aptos" pitchFamily="34" charset="-122"/>
-                <a:cs typeface="Aptos" pitchFamily="34" charset="-120"/>
-              </a:rPr>
-              <a:t>6</a:t>
-            </a:r>
-            <a:endParaRPr lang="en-US" sz="1100" dirty="0"/>
-          </a:p>
-        </p:txBody>
-      </p:sp>
-      <p:sp>
-        <p:nvSpPr>
-          <p:cNvPr id="10" name="Text 8"/>
-          <p:cNvSpPr/>
-          <p:nvPr/>
-        </p:nvSpPr>
-        <p:spPr>
-          <a:xfrm>
-            <a:off x="640080" y="621792"/>
             <a:ext cx="10881360" cy="713232"/>
           </a:xfrm>
           <a:prstGeom prst="rect">
@@ -4004,14 +4085,14 @@
       </p:sp>
       <p:sp>
         <p:nvSpPr>
-          <p:cNvPr id="11" name="Text 9"/>
+          <p:cNvPr id="9" name="Text 7"/>
           <p:cNvSpPr/>
           <p:nvPr/>
         </p:nvSpPr>
         <p:spPr>
           <a:xfrm>
             <a:off x="868680" y="1508760"/>
-            <a:ext cx="6537960" cy="4160520"/>
+            <a:ext cx="6309360" cy="4160520"/>
           </a:xfrm>
           <a:prstGeom prst="rect">
             <a:avLst/>
@@ -4070,18 +4151,18 @@
       </p:sp>
       <p:sp>
         <p:nvSpPr>
-          <p:cNvPr id="12" name="Shape 10"/>
-          <p:cNvSpPr/>
-          <p:nvPr/>
-        </p:nvSpPr>
-        <p:spPr>
-          <a:xfrm>
-            <a:off x="7909560" y="1417320"/>
-            <a:ext cx="3154680" cy="1828800"/>
+          <p:cNvPr id="10" name="Shape 8"/>
+          <p:cNvSpPr/>
+          <p:nvPr/>
+        </p:nvSpPr>
+        <p:spPr>
+          <a:xfrm>
+            <a:off x="7635240" y="1325880"/>
+            <a:ext cx="3474720" cy="1325880"/>
           </a:xfrm>
           <a:prstGeom prst="roundRect">
             <a:avLst>
-              <a:gd name="adj" fmla="val 6000"/>
+              <a:gd name="adj" fmla="val 8276"/>
             </a:avLst>
           </a:prstGeom>
           <a:solidFill>
@@ -4097,14 +4178,14 @@
       </p:sp>
       <p:sp>
         <p:nvSpPr>
-          <p:cNvPr id="13" name="Text 11"/>
-          <p:cNvSpPr/>
-          <p:nvPr/>
-        </p:nvSpPr>
-        <p:spPr>
-          <a:xfrm>
-            <a:off x="8074152" y="1563624"/>
-            <a:ext cx="2825496" cy="256032"/>
+          <p:cNvPr id="11" name="Text 9"/>
+          <p:cNvSpPr/>
+          <p:nvPr/>
+        </p:nvSpPr>
+        <p:spPr>
+          <a:xfrm>
+            <a:off x="7799832" y="1472184"/>
+            <a:ext cx="3145536" cy="256032"/>
           </a:xfrm>
           <a:prstGeom prst="rect">
             <a:avLst/>
@@ -4128,7 +4209,7 @@
                 <a:ea typeface="Aptos" pitchFamily="34" charset="-122"/>
                 <a:cs typeface="Aptos" pitchFamily="34" charset="-120"/>
               </a:rPr>
-              <a:t>Key idea</a:t>
+              <a:t>Data decision</a:t>
             </a:r>
             <a:endParaRPr lang="en-US" sz="1300" dirty="0"/>
           </a:p>
@@ -4136,14 +4217,14 @@
       </p:sp>
       <p:sp>
         <p:nvSpPr>
-          <p:cNvPr id="14" name="Text 12"/>
-          <p:cNvSpPr/>
-          <p:nvPr/>
-        </p:nvSpPr>
-        <p:spPr>
-          <a:xfrm>
-            <a:off x="8074152" y="1920240"/>
-            <a:ext cx="2825496" cy="1188720"/>
+          <p:cNvPr id="12" name="Text 10"/>
+          <p:cNvSpPr/>
+          <p:nvPr/>
+        </p:nvSpPr>
+        <p:spPr>
+          <a:xfrm>
+            <a:off x="7799832" y="1828800"/>
+            <a:ext cx="3145536" cy="685800"/>
           </a:xfrm>
           <a:prstGeom prst="rect">
             <a:avLst/>
@@ -4177,21 +4258,212 @@
       </p:sp>
       <p:sp>
         <p:nvSpPr>
-          <p:cNvPr id="15" name="Shape 13"/>
-          <p:cNvSpPr/>
-          <p:nvPr/>
-        </p:nvSpPr>
-        <p:spPr>
-          <a:xfrm>
-            <a:off x="7909560" y="3520440"/>
-            <a:ext cx="3154680" cy="1737360"/>
+          <p:cNvPr id="13" name="Shape 11"/>
+          <p:cNvSpPr/>
+          <p:nvPr/>
+        </p:nvSpPr>
+        <p:spPr>
+          <a:xfrm>
+            <a:off x="7635240" y="2788920"/>
+            <a:ext cx="3474720" cy="1536192"/>
           </a:xfrm>
           <a:prstGeom prst="roundRect">
             <a:avLst>
-              <a:gd name="adj" fmla="val 6316"/>
+              <a:gd name="adj" fmla="val 7143"/>
             </a:avLst>
           </a:prstGeom>
           <a:solidFill>
+            <a:srgbClr val="FFFFFF">
+              <a:alpha val="88000"/>
+            </a:srgbClr>
+          </a:solidFill>
+          <a:ln w="12700">
+            <a:solidFill>
+              <a:srgbClr val="D6E8F2"/>
+            </a:solidFill>
+            <a:prstDash val="solid"/>
+          </a:ln>
+        </p:spPr>
+      </p:sp>
+      <p:sp>
+        <p:nvSpPr>
+          <p:cNvPr id="14" name="Shape 12"/>
+          <p:cNvSpPr/>
+          <p:nvPr/>
+        </p:nvSpPr>
+        <p:spPr>
+          <a:xfrm>
+            <a:off x="8138160" y="3474720"/>
+            <a:ext cx="256032" cy="411480"/>
+          </a:xfrm>
+          <a:prstGeom prst="rect">
+            <a:avLst/>
+          </a:prstGeom>
+          <a:solidFill>
+            <a:srgbClr val="0068B7"/>
+          </a:solidFill>
+          <a:ln w="12700">
+            <a:solidFill>
+              <a:srgbClr val="0068B7"/>
+            </a:solidFill>
+            <a:prstDash val="solid"/>
+          </a:ln>
+        </p:spPr>
+      </p:sp>
+      <p:sp>
+        <p:nvSpPr>
+          <p:cNvPr id="15" name="Shape 13"/>
+          <p:cNvSpPr/>
+          <p:nvPr/>
+        </p:nvSpPr>
+        <p:spPr>
+          <a:xfrm>
+            <a:off x="8577072" y="3172968"/>
+            <a:ext cx="256032" cy="713232"/>
+          </a:xfrm>
+          <a:prstGeom prst="rect">
+            <a:avLst/>
+          </a:prstGeom>
+          <a:solidFill>
+            <a:srgbClr val="2F8A28"/>
+          </a:solidFill>
+          <a:ln w="12700">
+            <a:solidFill>
+              <a:srgbClr val="2F8A28"/>
+            </a:solidFill>
+            <a:prstDash val="solid"/>
+          </a:ln>
+        </p:spPr>
+      </p:sp>
+      <p:sp>
+        <p:nvSpPr>
+          <p:cNvPr id="16" name="Shape 14"/>
+          <p:cNvSpPr/>
+          <p:nvPr/>
+        </p:nvSpPr>
+        <p:spPr>
+          <a:xfrm>
+            <a:off x="9015984" y="2880360"/>
+            <a:ext cx="256032" cy="1005840"/>
+          </a:xfrm>
+          <a:prstGeom prst="rect">
+            <a:avLst/>
+          </a:prstGeom>
+          <a:solidFill>
+            <a:srgbClr val="D69A2D"/>
+          </a:solidFill>
+          <a:ln w="12700">
+            <a:solidFill>
+              <a:srgbClr val="D69A2D"/>
+            </a:solidFill>
+            <a:prstDash val="solid"/>
+          </a:ln>
+        </p:spPr>
+      </p:sp>
+      <p:sp>
+        <p:nvSpPr>
+          <p:cNvPr id="17" name="Shape 15"/>
+          <p:cNvSpPr/>
+          <p:nvPr/>
+        </p:nvSpPr>
+        <p:spPr>
+          <a:xfrm>
+            <a:off x="9454896" y="3319272"/>
+            <a:ext cx="256032" cy="566928"/>
+          </a:xfrm>
+          <a:prstGeom prst="rect">
+            <a:avLst/>
+          </a:prstGeom>
+          <a:solidFill>
+            <a:srgbClr val="6A4CA3"/>
+          </a:solidFill>
+          <a:ln w="12700">
+            <a:solidFill>
+              <a:srgbClr val="6A4CA3"/>
+            </a:solidFill>
+            <a:prstDash val="solid"/>
+          </a:ln>
+        </p:spPr>
+      </p:sp>
+      <p:sp>
+        <p:nvSpPr>
+          <p:cNvPr id="18" name="Shape 16"/>
+          <p:cNvSpPr/>
+          <p:nvPr/>
+        </p:nvSpPr>
+        <p:spPr>
+          <a:xfrm>
+            <a:off x="8019288" y="3886200"/>
+            <a:ext cx="2706624" cy="0"/>
+          </a:xfrm>
+          <a:prstGeom prst="line">
+            <a:avLst/>
+          </a:prstGeom>
+          <a:noFill/>
+          <a:ln w="15240">
+            <a:solidFill>
+              <a:srgbClr val="003A63"/>
+            </a:solidFill>
+            <a:prstDash val="solid"/>
+          </a:ln>
+        </p:spPr>
+      </p:sp>
+      <p:sp>
+        <p:nvSpPr>
+          <p:cNvPr id="19" name="Text 17"/>
+          <p:cNvSpPr/>
+          <p:nvPr/>
+        </p:nvSpPr>
+        <p:spPr>
+          <a:xfrm>
+            <a:off x="7863840" y="3017520"/>
+            <a:ext cx="3017520" cy="201168"/>
+          </a:xfrm>
+          <a:prstGeom prst="rect">
+            <a:avLst/>
+          </a:prstGeom>
+          <a:noFill/>
+          <a:ln/>
+        </p:spPr>
+        <p:txBody>
+          <a:bodyPr wrap="square" lIns="0" tIns="0" rIns="0" bIns="0" rtlCol="0" anchor="ctr"/>
+          <a:lstStyle/>
+          <a:p>
+            <a:pPr algn="ctr" indent="0" marL="0">
+              <a:buNone/>
+            </a:pPr>
+            <a:r>
+              <a:rPr lang="en-US" sz="1050" b="1" dirty="0">
+                <a:solidFill>
+                  <a:srgbClr val="003A63"/>
+                </a:solidFill>
+                <a:latin typeface="Aptos" pitchFamily="34" charset="0"/>
+                <a:ea typeface="Aptos" pitchFamily="34" charset="-122"/>
+                <a:cs typeface="Aptos" pitchFamily="34" charset="-120"/>
+              </a:rPr>
+              <a:t>Measure and monitor</a:t>
+            </a:r>
+            <a:endParaRPr lang="en-US" sz="1050" dirty="0"/>
+          </a:p>
+        </p:txBody>
+      </p:sp>
+      <p:sp>
+        <p:nvSpPr>
+          <p:cNvPr id="20" name="Shape 18"/>
+          <p:cNvSpPr/>
+          <p:nvPr/>
+        </p:nvSpPr>
+        <p:spPr>
+          <a:xfrm>
+            <a:off x="7635240" y="4498848"/>
+            <a:ext cx="3474720" cy="1143000"/>
+          </a:xfrm>
+          <a:prstGeom prst="roundRect">
+            <a:avLst>
+              <a:gd name="adj" fmla="val 9600"/>
+            </a:avLst>
+          </a:prstGeom>
+          <a:solidFill>
             <a:srgbClr val="EAF6F8"/>
           </a:solidFill>
           <a:ln w="12700">
@@ -4204,14 +4476,14 @@
       </p:sp>
       <p:sp>
         <p:nvSpPr>
-          <p:cNvPr id="16" name="Text 14"/>
-          <p:cNvSpPr/>
-          <p:nvPr/>
-        </p:nvSpPr>
-        <p:spPr>
-          <a:xfrm>
-            <a:off x="8074152" y="3666744"/>
-            <a:ext cx="2825496" cy="256032"/>
+          <p:cNvPr id="21" name="Text 19"/>
+          <p:cNvSpPr/>
+          <p:nvPr/>
+        </p:nvSpPr>
+        <p:spPr>
+          <a:xfrm>
+            <a:off x="7799832" y="4645152"/>
+            <a:ext cx="3145536" cy="256032"/>
           </a:xfrm>
           <a:prstGeom prst="rect">
             <a:avLst/>
@@ -4235,7 +4507,7 @@
                 <a:ea typeface="Aptos" pitchFamily="34" charset="-122"/>
                 <a:cs typeface="Aptos" pitchFamily="34" charset="-120"/>
               </a:rPr>
-              <a:t>Use this for</a:t>
+              <a:t>How to validate</a:t>
             </a:r>
             <a:endParaRPr lang="en-US" sz="1300" dirty="0"/>
           </a:p>
@@ -4243,14 +4515,14 @@
       </p:sp>
       <p:sp>
         <p:nvSpPr>
-          <p:cNvPr id="17" name="Text 15"/>
-          <p:cNvSpPr/>
-          <p:nvPr/>
-        </p:nvSpPr>
-        <p:spPr>
-          <a:xfrm>
-            <a:off x="8074152" y="4023360"/>
-            <a:ext cx="2825496" cy="1097280"/>
+          <p:cNvPr id="22" name="Text 20"/>
+          <p:cNvSpPr/>
+          <p:nvPr/>
+        </p:nvSpPr>
+        <p:spPr>
+          <a:xfrm>
+            <a:off x="7799832" y="5001768"/>
+            <a:ext cx="3145536" cy="502920"/>
           </a:xfrm>
           <a:prstGeom prst="rect">
             <a:avLst/>
@@ -4276,7 +4548,7 @@
                 <a:ea typeface="Aptos" pitchFamily="34" charset="-122"/>
                 <a:cs typeface="Aptos" pitchFamily="34" charset="-120"/>
               </a:rPr>
-              <a:t>Connect the concept to public health decisions, safeguards, documentation, or implementation work.</a:t>
+              <a:t>Connect the concept to data quality, model performance, validation evidence, monitoring measures, and decisions that remain under human control.</a:t>
             </a:r>
             <a:endParaRPr lang="en-US" sz="1550" dirty="0"/>
           </a:p>
@@ -4450,8 +4722,8 @@
         </p:nvSpPr>
         <p:spPr>
           <a:xfrm>
-            <a:off x="9966960" y="6537960"/>
-            <a:ext cx="1645920" cy="201168"/>
+            <a:off x="9646920" y="6537960"/>
+            <a:ext cx="1965960" cy="201168"/>
           </a:xfrm>
           <a:prstGeom prst="rect">
             <a:avLst/>
@@ -4475,7 +4747,7 @@
                 <a:ea typeface="Aptos" pitchFamily="34" charset="-122"/>
                 <a:cs typeface="Aptos" pitchFamily="34" charset="-120"/>
               </a:rPr>
-              <a:t>Â© Paula Soper</a:t>
+              <a:t>Copyright Paula Soper</a:t>
             </a:r>
             <a:endParaRPr lang="en-US" sz="800" dirty="0"/>
           </a:p>
@@ -4522,77 +4794,13 @@
       </p:sp>
       <p:sp>
         <p:nvSpPr>
-          <p:cNvPr id="8" name="Shape 6"/>
+          <p:cNvPr id="8" name="Text 6"/>
           <p:cNvSpPr/>
           <p:nvPr/>
         </p:nvSpPr>
         <p:spPr>
           <a:xfrm>
             <a:off x="640080" y="658368"/>
-            <a:ext cx="420624" cy="420624"/>
-          </a:xfrm>
-          <a:prstGeom prst="ellipse">
-            <a:avLst/>
-          </a:prstGeom>
-          <a:solidFill>
-            <a:srgbClr val="0068B7"/>
-          </a:solidFill>
-          <a:ln w="12700">
-            <a:solidFill>
-              <a:srgbClr val="0068B7"/>
-            </a:solidFill>
-            <a:prstDash val="solid"/>
-          </a:ln>
-        </p:spPr>
-      </p:sp>
-      <p:sp>
-        <p:nvSpPr>
-          <p:cNvPr id="9" name="Text 7"/>
-          <p:cNvSpPr/>
-          <p:nvPr/>
-        </p:nvSpPr>
-        <p:spPr>
-          <a:xfrm>
-            <a:off x="640080" y="731520"/>
-            <a:ext cx="420624" cy="164592"/>
-          </a:xfrm>
-          <a:prstGeom prst="rect">
-            <a:avLst/>
-          </a:prstGeom>
-          <a:noFill/>
-          <a:ln/>
-        </p:spPr>
-        <p:txBody>
-          <a:bodyPr wrap="square" lIns="0" tIns="0" rIns="0" bIns="0" rtlCol="0" anchor="ctr"/>
-          <a:lstStyle/>
-          <a:p>
-            <a:pPr algn="ctr" indent="0" marL="0">
-              <a:buNone/>
-            </a:pPr>
-            <a:r>
-              <a:rPr lang="en-US" sz="1100" b="1" dirty="0">
-                <a:solidFill>
-                  <a:srgbClr val="FFFFFF"/>
-                </a:solidFill>
-                <a:latin typeface="Aptos" pitchFamily="34" charset="0"/>
-                <a:ea typeface="Aptos" pitchFamily="34" charset="-122"/>
-                <a:cs typeface="Aptos" pitchFamily="34" charset="-120"/>
-              </a:rPr>
-              <a:t>7</a:t>
-            </a:r>
-            <a:endParaRPr lang="en-US" sz="1100" dirty="0"/>
-          </a:p>
-        </p:txBody>
-      </p:sp>
-      <p:sp>
-        <p:nvSpPr>
-          <p:cNvPr id="10" name="Text 8"/>
-          <p:cNvSpPr/>
-          <p:nvPr/>
-        </p:nvSpPr>
-        <p:spPr>
-          <a:xfrm>
-            <a:off x="640080" y="621792"/>
             <a:ext cx="10881360" cy="713232"/>
           </a:xfrm>
           <a:prstGeom prst="rect">
@@ -4627,14 +4835,14 @@
       </p:sp>
       <p:sp>
         <p:nvSpPr>
-          <p:cNvPr id="11" name="Text 9"/>
+          <p:cNvPr id="9" name="Text 7"/>
           <p:cNvSpPr/>
           <p:nvPr/>
         </p:nvSpPr>
         <p:spPr>
           <a:xfrm>
             <a:off x="868680" y="1508760"/>
-            <a:ext cx="6537960" cy="4160520"/>
+            <a:ext cx="6309360" cy="4160520"/>
           </a:xfrm>
           <a:prstGeom prst="rect">
             <a:avLst/>
@@ -4693,18 +4901,18 @@
       </p:sp>
       <p:sp>
         <p:nvSpPr>
-          <p:cNvPr id="12" name="Shape 10"/>
-          <p:cNvSpPr/>
-          <p:nvPr/>
-        </p:nvSpPr>
-        <p:spPr>
-          <a:xfrm>
-            <a:off x="7909560" y="1417320"/>
-            <a:ext cx="3154680" cy="1828800"/>
+          <p:cNvPr id="10" name="Shape 8"/>
+          <p:cNvSpPr/>
+          <p:nvPr/>
+        </p:nvSpPr>
+        <p:spPr>
+          <a:xfrm>
+            <a:off x="7635240" y="1325880"/>
+            <a:ext cx="3474720" cy="1325880"/>
           </a:xfrm>
           <a:prstGeom prst="roundRect">
             <a:avLst>
-              <a:gd name="adj" fmla="val 6000"/>
+              <a:gd name="adj" fmla="val 8276"/>
             </a:avLst>
           </a:prstGeom>
           <a:solidFill>
@@ -4720,14 +4928,14 @@
       </p:sp>
       <p:sp>
         <p:nvSpPr>
-          <p:cNvPr id="13" name="Text 11"/>
-          <p:cNvSpPr/>
-          <p:nvPr/>
-        </p:nvSpPr>
-        <p:spPr>
-          <a:xfrm>
-            <a:off x="8074152" y="1563624"/>
-            <a:ext cx="2825496" cy="256032"/>
+          <p:cNvPr id="11" name="Text 9"/>
+          <p:cNvSpPr/>
+          <p:nvPr/>
+        </p:nvSpPr>
+        <p:spPr>
+          <a:xfrm>
+            <a:off x="7799832" y="1472184"/>
+            <a:ext cx="3145536" cy="256032"/>
           </a:xfrm>
           <a:prstGeom prst="rect">
             <a:avLst/>
@@ -4751,7 +4959,7 @@
                 <a:ea typeface="Aptos" pitchFamily="34" charset="-122"/>
                 <a:cs typeface="Aptos" pitchFamily="34" charset="-120"/>
               </a:rPr>
-              <a:t>Key idea</a:t>
+              <a:t>Risk check</a:t>
             </a:r>
             <a:endParaRPr lang="en-US" sz="1300" dirty="0"/>
           </a:p>
@@ -4759,14 +4967,14 @@
       </p:sp>
       <p:sp>
         <p:nvSpPr>
-          <p:cNvPr id="14" name="Text 12"/>
-          <p:cNvSpPr/>
-          <p:nvPr/>
-        </p:nvSpPr>
-        <p:spPr>
-          <a:xfrm>
-            <a:off x="8074152" y="1920240"/>
-            <a:ext cx="2825496" cy="1188720"/>
+          <p:cNvPr id="12" name="Text 10"/>
+          <p:cNvSpPr/>
+          <p:nvPr/>
+        </p:nvSpPr>
+        <p:spPr>
+          <a:xfrm>
+            <a:off x="7799832" y="1828800"/>
+            <a:ext cx="3145536" cy="685800"/>
           </a:xfrm>
           <a:prstGeom prst="rect">
             <a:avLst/>
@@ -4800,21 +5008,174 @@
       </p:sp>
       <p:sp>
         <p:nvSpPr>
-          <p:cNvPr id="15" name="Shape 13"/>
-          <p:cNvSpPr/>
-          <p:nvPr/>
-        </p:nvSpPr>
-        <p:spPr>
-          <a:xfrm>
-            <a:off x="7909560" y="3520440"/>
-            <a:ext cx="3154680" cy="1737360"/>
+          <p:cNvPr id="13" name="Shape 11"/>
+          <p:cNvSpPr/>
+          <p:nvPr/>
+        </p:nvSpPr>
+        <p:spPr>
+          <a:xfrm>
+            <a:off x="7635240" y="2788920"/>
+            <a:ext cx="3474720" cy="1536192"/>
           </a:xfrm>
           <a:prstGeom prst="roundRect">
             <a:avLst>
-              <a:gd name="adj" fmla="val 6316"/>
+              <a:gd name="adj" fmla="val 7143"/>
             </a:avLst>
           </a:prstGeom>
           <a:solidFill>
+            <a:srgbClr val="FFFFFF">
+              <a:alpha val="88000"/>
+            </a:srgbClr>
+          </a:solidFill>
+          <a:ln w="12700">
+            <a:solidFill>
+              <a:srgbClr val="D6E8F2"/>
+            </a:solidFill>
+            <a:prstDash val="solid"/>
+          </a:ln>
+        </p:spPr>
+      </p:sp>
+      <p:sp>
+        <p:nvSpPr>
+          <p:cNvPr id="14" name="Shape 12"/>
+          <p:cNvSpPr/>
+          <p:nvPr/>
+        </p:nvSpPr>
+        <p:spPr>
+          <a:xfrm>
+            <a:off x="8046720" y="3108960"/>
+            <a:ext cx="2651760" cy="896112"/>
+          </a:xfrm>
+          <a:prstGeom prst="arc">
+            <a:avLst/>
+          </a:prstGeom>
+          <a:noFill/>
+          <a:ln w="25400">
+            <a:solidFill>
+              <a:srgbClr val="0068B7"/>
+            </a:solidFill>
+            <a:prstDash val="solid"/>
+          </a:ln>
+        </p:spPr>
+      </p:sp>
+      <p:sp>
+        <p:nvSpPr>
+          <p:cNvPr id="15" name="Text 13"/>
+          <p:cNvSpPr/>
+          <p:nvPr/>
+        </p:nvSpPr>
+        <p:spPr>
+          <a:xfrm>
+            <a:off x="7909560" y="3099816"/>
+            <a:ext cx="2926080" cy="256032"/>
+          </a:xfrm>
+          <a:prstGeom prst="rect">
+            <a:avLst/>
+          </a:prstGeom>
+          <a:noFill/>
+          <a:ln/>
+        </p:spPr>
+        <p:txBody>
+          <a:bodyPr wrap="square" lIns="0" tIns="0" rIns="0" bIns="0" rtlCol="0" anchor="ctr"/>
+          <a:lstStyle/>
+          <a:p>
+            <a:pPr algn="ctr" indent="0" marL="0">
+              <a:buNone/>
+            </a:pPr>
+            <a:r>
+              <a:rPr lang="en-US" sz="1500" b="1" dirty="0">
+                <a:solidFill>
+                  <a:srgbClr val="003A63"/>
+                </a:solidFill>
+                <a:latin typeface="Aptos" pitchFamily="34" charset="0"/>
+                <a:ea typeface="Aptos" pitchFamily="34" charset="-122"/>
+                <a:cs typeface="Aptos" pitchFamily="34" charset="-120"/>
+              </a:rPr>
+              <a:t>Risk</a:t>
+            </a:r>
+            <a:endParaRPr lang="en-US" sz="1500" dirty="0"/>
+          </a:p>
+        </p:txBody>
+      </p:sp>
+      <p:sp>
+        <p:nvSpPr>
+          <p:cNvPr id="16" name="Shape 14"/>
+          <p:cNvSpPr/>
+          <p:nvPr/>
+        </p:nvSpPr>
+        <p:spPr>
+          <a:xfrm>
+            <a:off x="8366760" y="3639312"/>
+            <a:ext cx="2011680" cy="0"/>
+          </a:xfrm>
+          <a:prstGeom prst="line">
+            <a:avLst/>
+          </a:prstGeom>
+          <a:noFill/>
+          <a:ln w="63500">
+            <a:solidFill>
+              <a:srgbClr val="2F8A28"/>
+            </a:solidFill>
+            <a:prstDash val="solid"/>
+          </a:ln>
+        </p:spPr>
+      </p:sp>
+      <p:sp>
+        <p:nvSpPr>
+          <p:cNvPr id="17" name="Text 15"/>
+          <p:cNvSpPr/>
+          <p:nvPr/>
+        </p:nvSpPr>
+        <p:spPr>
+          <a:xfrm>
+            <a:off x="7909560" y="3849624"/>
+            <a:ext cx="2926080" cy="164592"/>
+          </a:xfrm>
+          <a:prstGeom prst="rect">
+            <a:avLst/>
+          </a:prstGeom>
+          <a:noFill/>
+          <a:ln/>
+        </p:spPr>
+        <p:txBody>
+          <a:bodyPr wrap="square" lIns="0" tIns="0" rIns="0" bIns="0" rtlCol="0" anchor="ctr"/>
+          <a:lstStyle/>
+          <a:p>
+            <a:pPr algn="ctr" indent="0" marL="0">
+              <a:buNone/>
+            </a:pPr>
+            <a:r>
+              <a:rPr lang="en-US" sz="900" dirty="0">
+                <a:solidFill>
+                  <a:srgbClr val="003A63"/>
+                </a:solidFill>
+                <a:latin typeface="Aptos" pitchFamily="34" charset="0"/>
+                <a:ea typeface="Aptos" pitchFamily="34" charset="-122"/>
+                <a:cs typeface="Aptos" pitchFamily="34" charset="-120"/>
+              </a:rPr>
+              <a:t>Human review</a:t>
+            </a:r>
+            <a:endParaRPr lang="en-US" sz="900" dirty="0"/>
+          </a:p>
+        </p:txBody>
+      </p:sp>
+      <p:sp>
+        <p:nvSpPr>
+          <p:cNvPr id="18" name="Shape 16"/>
+          <p:cNvSpPr/>
+          <p:nvPr/>
+        </p:nvSpPr>
+        <p:spPr>
+          <a:xfrm>
+            <a:off x="7635240" y="4498848"/>
+            <a:ext cx="3474720" cy="1143000"/>
+          </a:xfrm>
+          <a:prstGeom prst="roundRect">
+            <a:avLst>
+              <a:gd name="adj" fmla="val 9600"/>
+            </a:avLst>
+          </a:prstGeom>
+          <a:solidFill>
             <a:srgbClr val="EAF6F8"/>
           </a:solidFill>
           <a:ln w="12700">
@@ -4827,14 +5188,14 @@
       </p:sp>
       <p:sp>
         <p:nvSpPr>
-          <p:cNvPr id="16" name="Text 14"/>
-          <p:cNvSpPr/>
-          <p:nvPr/>
-        </p:nvSpPr>
-        <p:spPr>
-          <a:xfrm>
-            <a:off x="8074152" y="3666744"/>
-            <a:ext cx="2825496" cy="256032"/>
+          <p:cNvPr id="19" name="Text 17"/>
+          <p:cNvSpPr/>
+          <p:nvPr/>
+        </p:nvSpPr>
+        <p:spPr>
+          <a:xfrm>
+            <a:off x="7799832" y="4645152"/>
+            <a:ext cx="3145536" cy="256032"/>
           </a:xfrm>
           <a:prstGeom prst="rect">
             <a:avLst/>
@@ -4858,7 +5219,7 @@
                 <a:ea typeface="Aptos" pitchFamily="34" charset="-122"/>
                 <a:cs typeface="Aptos" pitchFamily="34" charset="-120"/>
               </a:rPr>
-              <a:t>Use this for</a:t>
+              <a:t>Safeguard to plan</a:t>
             </a:r>
             <a:endParaRPr lang="en-US" sz="1300" dirty="0"/>
           </a:p>
@@ -4866,14 +5227,14 @@
       </p:sp>
       <p:sp>
         <p:nvSpPr>
-          <p:cNvPr id="17" name="Text 15"/>
-          <p:cNvSpPr/>
-          <p:nvPr/>
-        </p:nvSpPr>
-        <p:spPr>
-          <a:xfrm>
-            <a:off x="8074152" y="4023360"/>
-            <a:ext cx="2825496" cy="1097280"/>
+          <p:cNvPr id="20" name="Text 18"/>
+          <p:cNvSpPr/>
+          <p:nvPr/>
+        </p:nvSpPr>
+        <p:spPr>
+          <a:xfrm>
+            <a:off x="7799832" y="5001768"/>
+            <a:ext cx="3145536" cy="502920"/>
           </a:xfrm>
           <a:prstGeom prst="rect">
             <a:avLst/>
@@ -4899,7 +5260,7 @@
                 <a:ea typeface="Aptos" pitchFamily="34" charset="-122"/>
                 <a:cs typeface="Aptos" pitchFamily="34" charset="-120"/>
               </a:rPr>
-              <a:t>Connect the concept to public health decisions, safeguards, documentation, or implementation work.</a:t>
+              <a:t>Identify what could go wrong, who could be affected, what safeguards are needed, and what evidence should be reviewed before use expands.</a:t>
             </a:r>
             <a:endParaRPr lang="en-US" sz="1550" dirty="0"/>
           </a:p>
@@ -5073,8 +5434,8 @@
         </p:nvSpPr>
         <p:spPr>
           <a:xfrm>
-            <a:off x="9966960" y="6537960"/>
-            <a:ext cx="1645920" cy="201168"/>
+            <a:off x="9646920" y="6537960"/>
+            <a:ext cx="1965960" cy="201168"/>
           </a:xfrm>
           <a:prstGeom prst="rect">
             <a:avLst/>
@@ -5098,7 +5459,7 @@
                 <a:ea typeface="Aptos" pitchFamily="34" charset="-122"/>
                 <a:cs typeface="Aptos" pitchFamily="34" charset="-120"/>
               </a:rPr>
-              <a:t>Â© Paula Soper</a:t>
+              <a:t>Copyright Paula Soper</a:t>
             </a:r>
             <a:endParaRPr lang="en-US" sz="800" dirty="0"/>
           </a:p>
@@ -5193,7 +5554,7 @@
         <p:spPr>
           <a:xfrm>
             <a:off x="868680" y="1508760"/>
-            <a:ext cx="6537960" cy="4160520"/>
+            <a:ext cx="6309360" cy="4160520"/>
           </a:xfrm>
           <a:prstGeom prst="rect">
             <a:avLst/>
@@ -5258,12 +5619,12 @@
         </p:nvSpPr>
         <p:spPr>
           <a:xfrm>
-            <a:off x="7909560" y="1417320"/>
-            <a:ext cx="3154680" cy="1828800"/>
+            <a:off x="7635240" y="1325880"/>
+            <a:ext cx="3474720" cy="1325880"/>
           </a:xfrm>
           <a:prstGeom prst="roundRect">
             <a:avLst>
-              <a:gd name="adj" fmla="val 6000"/>
+              <a:gd name="adj" fmla="val 8276"/>
             </a:avLst>
           </a:prstGeom>
           <a:solidFill>
@@ -5285,8 +5646,8 @@
         </p:nvSpPr>
         <p:spPr>
           <a:xfrm>
-            <a:off x="8074152" y="1563624"/>
-            <a:ext cx="2825496" cy="256032"/>
+            <a:off x="7799832" y="1472184"/>
+            <a:ext cx="3145536" cy="256032"/>
           </a:xfrm>
           <a:prstGeom prst="rect">
             <a:avLst/>
@@ -5310,7 +5671,7 @@
                 <a:ea typeface="Aptos" pitchFamily="34" charset="-122"/>
                 <a:cs typeface="Aptos" pitchFamily="34" charset="-120"/>
               </a:rPr>
-              <a:t>Key idea</a:t>
+              <a:t>Risk check</a:t>
             </a:r>
             <a:endParaRPr lang="en-US" sz="1300" dirty="0"/>
           </a:p>
@@ -5324,8 +5685,8 @@
         </p:nvSpPr>
         <p:spPr>
           <a:xfrm>
-            <a:off x="8074152" y="1920240"/>
-            <a:ext cx="2825496" cy="1188720"/>
+            <a:off x="7799832" y="1828800"/>
+            <a:ext cx="3145536" cy="685800"/>
           </a:xfrm>
           <a:prstGeom prst="rect">
             <a:avLst/>
@@ -5365,15 +5726,168 @@
         </p:nvSpPr>
         <p:spPr>
           <a:xfrm>
-            <a:off x="7909560" y="3520440"/>
-            <a:ext cx="3154680" cy="1737360"/>
+            <a:off x="7635240" y="2788920"/>
+            <a:ext cx="3474720" cy="1536192"/>
           </a:xfrm>
           <a:prstGeom prst="roundRect">
             <a:avLst>
-              <a:gd name="adj" fmla="val 6316"/>
+              <a:gd name="adj" fmla="val 7143"/>
             </a:avLst>
           </a:prstGeom>
           <a:solidFill>
+            <a:srgbClr val="FFFFFF">
+              <a:alpha val="88000"/>
+            </a:srgbClr>
+          </a:solidFill>
+          <a:ln w="12700">
+            <a:solidFill>
+              <a:srgbClr val="D6E8F2"/>
+            </a:solidFill>
+            <a:prstDash val="solid"/>
+          </a:ln>
+        </p:spPr>
+      </p:sp>
+      <p:sp>
+        <p:nvSpPr>
+          <p:cNvPr id="14" name="Shape 12"/>
+          <p:cNvSpPr/>
+          <p:nvPr/>
+        </p:nvSpPr>
+        <p:spPr>
+          <a:xfrm>
+            <a:off x="8046720" y="3108960"/>
+            <a:ext cx="2651760" cy="896112"/>
+          </a:xfrm>
+          <a:prstGeom prst="arc">
+            <a:avLst/>
+          </a:prstGeom>
+          <a:noFill/>
+          <a:ln w="25400">
+            <a:solidFill>
+              <a:srgbClr val="0068B7"/>
+            </a:solidFill>
+            <a:prstDash val="solid"/>
+          </a:ln>
+        </p:spPr>
+      </p:sp>
+      <p:sp>
+        <p:nvSpPr>
+          <p:cNvPr id="15" name="Text 13"/>
+          <p:cNvSpPr/>
+          <p:nvPr/>
+        </p:nvSpPr>
+        <p:spPr>
+          <a:xfrm>
+            <a:off x="7909560" y="3099816"/>
+            <a:ext cx="2926080" cy="256032"/>
+          </a:xfrm>
+          <a:prstGeom prst="rect">
+            <a:avLst/>
+          </a:prstGeom>
+          <a:noFill/>
+          <a:ln/>
+        </p:spPr>
+        <p:txBody>
+          <a:bodyPr wrap="square" lIns="0" tIns="0" rIns="0" bIns="0" rtlCol="0" anchor="ctr"/>
+          <a:lstStyle/>
+          <a:p>
+            <a:pPr algn="ctr" indent="0" marL="0">
+              <a:buNone/>
+            </a:pPr>
+            <a:r>
+              <a:rPr lang="en-US" sz="1500" b="1" dirty="0">
+                <a:solidFill>
+                  <a:srgbClr val="003A63"/>
+                </a:solidFill>
+                <a:latin typeface="Aptos" pitchFamily="34" charset="0"/>
+                <a:ea typeface="Aptos" pitchFamily="34" charset="-122"/>
+                <a:cs typeface="Aptos" pitchFamily="34" charset="-120"/>
+              </a:rPr>
+              <a:t>Risk</a:t>
+            </a:r>
+            <a:endParaRPr lang="en-US" sz="1500" dirty="0"/>
+          </a:p>
+        </p:txBody>
+      </p:sp>
+      <p:sp>
+        <p:nvSpPr>
+          <p:cNvPr id="16" name="Shape 14"/>
+          <p:cNvSpPr/>
+          <p:nvPr/>
+        </p:nvSpPr>
+        <p:spPr>
+          <a:xfrm>
+            <a:off x="8366760" y="3639312"/>
+            <a:ext cx="2011680" cy="0"/>
+          </a:xfrm>
+          <a:prstGeom prst="line">
+            <a:avLst/>
+          </a:prstGeom>
+          <a:noFill/>
+          <a:ln w="63500">
+            <a:solidFill>
+              <a:srgbClr val="2F8A28"/>
+            </a:solidFill>
+            <a:prstDash val="solid"/>
+          </a:ln>
+        </p:spPr>
+      </p:sp>
+      <p:sp>
+        <p:nvSpPr>
+          <p:cNvPr id="17" name="Text 15"/>
+          <p:cNvSpPr/>
+          <p:nvPr/>
+        </p:nvSpPr>
+        <p:spPr>
+          <a:xfrm>
+            <a:off x="7909560" y="3849624"/>
+            <a:ext cx="2926080" cy="164592"/>
+          </a:xfrm>
+          <a:prstGeom prst="rect">
+            <a:avLst/>
+          </a:prstGeom>
+          <a:noFill/>
+          <a:ln/>
+        </p:spPr>
+        <p:txBody>
+          <a:bodyPr wrap="square" lIns="0" tIns="0" rIns="0" bIns="0" rtlCol="0" anchor="ctr"/>
+          <a:lstStyle/>
+          <a:p>
+            <a:pPr algn="ctr" indent="0" marL="0">
+              <a:buNone/>
+            </a:pPr>
+            <a:r>
+              <a:rPr lang="en-US" sz="900" dirty="0">
+                <a:solidFill>
+                  <a:srgbClr val="003A63"/>
+                </a:solidFill>
+                <a:latin typeface="Aptos" pitchFamily="34" charset="0"/>
+                <a:ea typeface="Aptos" pitchFamily="34" charset="-122"/>
+                <a:cs typeface="Aptos" pitchFamily="34" charset="-120"/>
+              </a:rPr>
+              <a:t>Human review</a:t>
+            </a:r>
+            <a:endParaRPr lang="en-US" sz="900" dirty="0"/>
+          </a:p>
+        </p:txBody>
+      </p:sp>
+      <p:sp>
+        <p:nvSpPr>
+          <p:cNvPr id="18" name="Shape 16"/>
+          <p:cNvSpPr/>
+          <p:nvPr/>
+        </p:nvSpPr>
+        <p:spPr>
+          <a:xfrm>
+            <a:off x="7635240" y="4498848"/>
+            <a:ext cx="3474720" cy="1143000"/>
+          </a:xfrm>
+          <a:prstGeom prst="roundRect">
+            <a:avLst>
+              <a:gd name="adj" fmla="val 9600"/>
+            </a:avLst>
+          </a:prstGeom>
+          <a:solidFill>
             <a:srgbClr val="EAF6F8"/>
           </a:solidFill>
           <a:ln w="12700">
@@ -5386,14 +5900,14 @@
       </p:sp>
       <p:sp>
         <p:nvSpPr>
-          <p:cNvPr id="14" name="Text 12"/>
-          <p:cNvSpPr/>
-          <p:nvPr/>
-        </p:nvSpPr>
-        <p:spPr>
-          <a:xfrm>
-            <a:off x="8074152" y="3666744"/>
-            <a:ext cx="2825496" cy="256032"/>
+          <p:cNvPr id="19" name="Text 17"/>
+          <p:cNvSpPr/>
+          <p:nvPr/>
+        </p:nvSpPr>
+        <p:spPr>
+          <a:xfrm>
+            <a:off x="7799832" y="4645152"/>
+            <a:ext cx="3145536" cy="256032"/>
           </a:xfrm>
           <a:prstGeom prst="rect">
             <a:avLst/>
@@ -5417,7 +5931,7 @@
                 <a:ea typeface="Aptos" pitchFamily="34" charset="-122"/>
                 <a:cs typeface="Aptos" pitchFamily="34" charset="-120"/>
               </a:rPr>
-              <a:t>Use this for</a:t>
+              <a:t>Safeguard to plan</a:t>
             </a:r>
             <a:endParaRPr lang="en-US" sz="1300" dirty="0"/>
           </a:p>
@@ -5425,14 +5939,14 @@
       </p:sp>
       <p:sp>
         <p:nvSpPr>
-          <p:cNvPr id="15" name="Text 13"/>
-          <p:cNvSpPr/>
-          <p:nvPr/>
-        </p:nvSpPr>
-        <p:spPr>
-          <a:xfrm>
-            <a:off x="8074152" y="4023360"/>
-            <a:ext cx="2825496" cy="1097280"/>
+          <p:cNvPr id="20" name="Text 18"/>
+          <p:cNvSpPr/>
+          <p:nvPr/>
+        </p:nvSpPr>
+        <p:spPr>
+          <a:xfrm>
+            <a:off x="7799832" y="5001768"/>
+            <a:ext cx="3145536" cy="502920"/>
           </a:xfrm>
           <a:prstGeom prst="rect">
             <a:avLst/>
@@ -5458,7 +5972,7 @@
                 <a:ea typeface="Aptos" pitchFamily="34" charset="-122"/>
                 <a:cs typeface="Aptos" pitchFamily="34" charset="-120"/>
               </a:rPr>
-              <a:t>Connect the concept to public health decisions, safeguards, documentation, or implementation work.</a:t>
+              <a:t>Identify what could go wrong, who could be affected, what safeguards are needed, and what evidence should be reviewed before use expands.</a:t>
             </a:r>
             <a:endParaRPr lang="en-US" sz="1550" dirty="0"/>
           </a:p>
@@ -5632,8 +6146,8 @@
         </p:nvSpPr>
         <p:spPr>
           <a:xfrm>
-            <a:off x="9966960" y="6537960"/>
-            <a:ext cx="1645920" cy="201168"/>
+            <a:off x="9646920" y="6537960"/>
+            <a:ext cx="1965960" cy="201168"/>
           </a:xfrm>
           <a:prstGeom prst="rect">
             <a:avLst/>
@@ -5657,7 +6171,7 @@
                 <a:ea typeface="Aptos" pitchFamily="34" charset="-122"/>
                 <a:cs typeface="Aptos" pitchFamily="34" charset="-120"/>
               </a:rPr>
-              <a:t>Â© Paula Soper</a:t>
+              <a:t>Copyright Paula Soper</a:t>
             </a:r>
             <a:endParaRPr lang="en-US" sz="800" dirty="0"/>
           </a:p>
@@ -5704,77 +6218,13 @@
       </p:sp>
       <p:sp>
         <p:nvSpPr>
-          <p:cNvPr id="8" name="Shape 6"/>
+          <p:cNvPr id="8" name="Text 6"/>
           <p:cNvSpPr/>
           <p:nvPr/>
         </p:nvSpPr>
         <p:spPr>
           <a:xfrm>
             <a:off x="640080" y="658368"/>
-            <a:ext cx="420624" cy="420624"/>
-          </a:xfrm>
-          <a:prstGeom prst="ellipse">
-            <a:avLst/>
-          </a:prstGeom>
-          <a:solidFill>
-            <a:srgbClr val="0068B7"/>
-          </a:solidFill>
-          <a:ln w="12700">
-            <a:solidFill>
-              <a:srgbClr val="0068B7"/>
-            </a:solidFill>
-            <a:prstDash val="solid"/>
-          </a:ln>
-        </p:spPr>
-      </p:sp>
-      <p:sp>
-        <p:nvSpPr>
-          <p:cNvPr id="9" name="Text 7"/>
-          <p:cNvSpPr/>
-          <p:nvPr/>
-        </p:nvSpPr>
-        <p:spPr>
-          <a:xfrm>
-            <a:off x="640080" y="731520"/>
-            <a:ext cx="420624" cy="164592"/>
-          </a:xfrm>
-          <a:prstGeom prst="rect">
-            <a:avLst/>
-          </a:prstGeom>
-          <a:noFill/>
-          <a:ln/>
-        </p:spPr>
-        <p:txBody>
-          <a:bodyPr wrap="square" lIns="0" tIns="0" rIns="0" bIns="0" rtlCol="0" anchor="ctr"/>
-          <a:lstStyle/>
-          <a:p>
-            <a:pPr algn="ctr" indent="0" marL="0">
-              <a:buNone/>
-            </a:pPr>
-            <a:r>
-              <a:rPr lang="en-US" sz="1100" b="1" dirty="0">
-                <a:solidFill>
-                  <a:srgbClr val="FFFFFF"/>
-                </a:solidFill>
-                <a:latin typeface="Aptos" pitchFamily="34" charset="0"/>
-                <a:ea typeface="Aptos" pitchFamily="34" charset="-122"/>
-                <a:cs typeface="Aptos" pitchFamily="34" charset="-120"/>
-              </a:rPr>
-              <a:t>8</a:t>
-            </a:r>
-            <a:endParaRPr lang="en-US" sz="1100" dirty="0"/>
-          </a:p>
-        </p:txBody>
-      </p:sp>
-      <p:sp>
-        <p:nvSpPr>
-          <p:cNvPr id="10" name="Text 8"/>
-          <p:cNvSpPr/>
-          <p:nvPr/>
-        </p:nvSpPr>
-        <p:spPr>
-          <a:xfrm>
-            <a:off x="640080" y="621792"/>
             <a:ext cx="10881360" cy="713232"/>
           </a:xfrm>
           <a:prstGeom prst="rect">
@@ -5809,14 +6259,14 @@
       </p:sp>
       <p:sp>
         <p:nvSpPr>
-          <p:cNvPr id="11" name="Text 9"/>
+          <p:cNvPr id="9" name="Text 7"/>
           <p:cNvSpPr/>
           <p:nvPr/>
         </p:nvSpPr>
         <p:spPr>
           <a:xfrm>
             <a:off x="868680" y="1508760"/>
-            <a:ext cx="6537960" cy="4160520"/>
+            <a:ext cx="6309360" cy="4160520"/>
           </a:xfrm>
           <a:prstGeom prst="rect">
             <a:avLst/>
@@ -5875,18 +6325,18 @@
       </p:sp>
       <p:sp>
         <p:nvSpPr>
-          <p:cNvPr id="12" name="Shape 10"/>
-          <p:cNvSpPr/>
-          <p:nvPr/>
-        </p:nvSpPr>
-        <p:spPr>
-          <a:xfrm>
-            <a:off x="7909560" y="1417320"/>
-            <a:ext cx="3154680" cy="1828800"/>
+          <p:cNvPr id="10" name="Shape 8"/>
+          <p:cNvSpPr/>
+          <p:nvPr/>
+        </p:nvSpPr>
+        <p:spPr>
+          <a:xfrm>
+            <a:off x="7635240" y="1325880"/>
+            <a:ext cx="3474720" cy="1325880"/>
           </a:xfrm>
           <a:prstGeom prst="roundRect">
             <a:avLst>
-              <a:gd name="adj" fmla="val 6000"/>
+              <a:gd name="adj" fmla="val 8276"/>
             </a:avLst>
           </a:prstGeom>
           <a:solidFill>
@@ -5902,14 +6352,14 @@
       </p:sp>
       <p:sp>
         <p:nvSpPr>
-          <p:cNvPr id="13" name="Text 11"/>
-          <p:cNvSpPr/>
-          <p:nvPr/>
-        </p:nvSpPr>
-        <p:spPr>
-          <a:xfrm>
-            <a:off x="8074152" y="1563624"/>
-            <a:ext cx="2825496" cy="256032"/>
+          <p:cNvPr id="11" name="Text 9"/>
+          <p:cNvSpPr/>
+          <p:nvPr/>
+        </p:nvSpPr>
+        <p:spPr>
+          <a:xfrm>
+            <a:off x="7799832" y="1472184"/>
+            <a:ext cx="3145536" cy="256032"/>
           </a:xfrm>
           <a:prstGeom prst="rect">
             <a:avLst/>
@@ -5933,7 +6383,7 @@
                 <a:ea typeface="Aptos" pitchFamily="34" charset="-122"/>
                 <a:cs typeface="Aptos" pitchFamily="34" charset="-120"/>
               </a:rPr>
-              <a:t>Key idea</a:t>
+              <a:t>Data decision</a:t>
             </a:r>
             <a:endParaRPr lang="en-US" sz="1300" dirty="0"/>
           </a:p>
@@ -5941,14 +6391,14 @@
       </p:sp>
       <p:sp>
         <p:nvSpPr>
-          <p:cNvPr id="14" name="Text 12"/>
-          <p:cNvSpPr/>
-          <p:nvPr/>
-        </p:nvSpPr>
-        <p:spPr>
-          <a:xfrm>
-            <a:off x="8074152" y="1920240"/>
-            <a:ext cx="2825496" cy="1188720"/>
+          <p:cNvPr id="12" name="Text 10"/>
+          <p:cNvSpPr/>
+          <p:nvPr/>
+        </p:nvSpPr>
+        <p:spPr>
+          <a:xfrm>
+            <a:off x="7799832" y="1828800"/>
+            <a:ext cx="3145536" cy="685800"/>
           </a:xfrm>
           <a:prstGeom prst="rect">
             <a:avLst/>
@@ -5982,21 +6432,212 @@
       </p:sp>
       <p:sp>
         <p:nvSpPr>
-          <p:cNvPr id="15" name="Shape 13"/>
-          <p:cNvSpPr/>
-          <p:nvPr/>
-        </p:nvSpPr>
-        <p:spPr>
-          <a:xfrm>
-            <a:off x="7909560" y="3520440"/>
-            <a:ext cx="3154680" cy="1737360"/>
+          <p:cNvPr id="13" name="Shape 11"/>
+          <p:cNvSpPr/>
+          <p:nvPr/>
+        </p:nvSpPr>
+        <p:spPr>
+          <a:xfrm>
+            <a:off x="7635240" y="2788920"/>
+            <a:ext cx="3474720" cy="1536192"/>
           </a:xfrm>
           <a:prstGeom prst="roundRect">
             <a:avLst>
-              <a:gd name="adj" fmla="val 6316"/>
+              <a:gd name="adj" fmla="val 7143"/>
             </a:avLst>
           </a:prstGeom>
           <a:solidFill>
+            <a:srgbClr val="FFFFFF">
+              <a:alpha val="88000"/>
+            </a:srgbClr>
+          </a:solidFill>
+          <a:ln w="12700">
+            <a:solidFill>
+              <a:srgbClr val="D6E8F2"/>
+            </a:solidFill>
+            <a:prstDash val="solid"/>
+          </a:ln>
+        </p:spPr>
+      </p:sp>
+      <p:sp>
+        <p:nvSpPr>
+          <p:cNvPr id="14" name="Shape 12"/>
+          <p:cNvSpPr/>
+          <p:nvPr/>
+        </p:nvSpPr>
+        <p:spPr>
+          <a:xfrm>
+            <a:off x="8138160" y="3474720"/>
+            <a:ext cx="256032" cy="411480"/>
+          </a:xfrm>
+          <a:prstGeom prst="rect">
+            <a:avLst/>
+          </a:prstGeom>
+          <a:solidFill>
+            <a:srgbClr val="0068B7"/>
+          </a:solidFill>
+          <a:ln w="12700">
+            <a:solidFill>
+              <a:srgbClr val="0068B7"/>
+            </a:solidFill>
+            <a:prstDash val="solid"/>
+          </a:ln>
+        </p:spPr>
+      </p:sp>
+      <p:sp>
+        <p:nvSpPr>
+          <p:cNvPr id="15" name="Shape 13"/>
+          <p:cNvSpPr/>
+          <p:nvPr/>
+        </p:nvSpPr>
+        <p:spPr>
+          <a:xfrm>
+            <a:off x="8577072" y="3172968"/>
+            <a:ext cx="256032" cy="713232"/>
+          </a:xfrm>
+          <a:prstGeom prst="rect">
+            <a:avLst/>
+          </a:prstGeom>
+          <a:solidFill>
+            <a:srgbClr val="2F8A28"/>
+          </a:solidFill>
+          <a:ln w="12700">
+            <a:solidFill>
+              <a:srgbClr val="2F8A28"/>
+            </a:solidFill>
+            <a:prstDash val="solid"/>
+          </a:ln>
+        </p:spPr>
+      </p:sp>
+      <p:sp>
+        <p:nvSpPr>
+          <p:cNvPr id="16" name="Shape 14"/>
+          <p:cNvSpPr/>
+          <p:nvPr/>
+        </p:nvSpPr>
+        <p:spPr>
+          <a:xfrm>
+            <a:off x="9015984" y="2880360"/>
+            <a:ext cx="256032" cy="1005840"/>
+          </a:xfrm>
+          <a:prstGeom prst="rect">
+            <a:avLst/>
+          </a:prstGeom>
+          <a:solidFill>
+            <a:srgbClr val="D69A2D"/>
+          </a:solidFill>
+          <a:ln w="12700">
+            <a:solidFill>
+              <a:srgbClr val="D69A2D"/>
+            </a:solidFill>
+            <a:prstDash val="solid"/>
+          </a:ln>
+        </p:spPr>
+      </p:sp>
+      <p:sp>
+        <p:nvSpPr>
+          <p:cNvPr id="17" name="Shape 15"/>
+          <p:cNvSpPr/>
+          <p:nvPr/>
+        </p:nvSpPr>
+        <p:spPr>
+          <a:xfrm>
+            <a:off x="9454896" y="3319272"/>
+            <a:ext cx="256032" cy="566928"/>
+          </a:xfrm>
+          <a:prstGeom prst="rect">
+            <a:avLst/>
+          </a:prstGeom>
+          <a:solidFill>
+            <a:srgbClr val="6A4CA3"/>
+          </a:solidFill>
+          <a:ln w="12700">
+            <a:solidFill>
+              <a:srgbClr val="6A4CA3"/>
+            </a:solidFill>
+            <a:prstDash val="solid"/>
+          </a:ln>
+        </p:spPr>
+      </p:sp>
+      <p:sp>
+        <p:nvSpPr>
+          <p:cNvPr id="18" name="Shape 16"/>
+          <p:cNvSpPr/>
+          <p:nvPr/>
+        </p:nvSpPr>
+        <p:spPr>
+          <a:xfrm>
+            <a:off x="8019288" y="3886200"/>
+            <a:ext cx="2706624" cy="0"/>
+          </a:xfrm>
+          <a:prstGeom prst="line">
+            <a:avLst/>
+          </a:prstGeom>
+          <a:noFill/>
+          <a:ln w="15240">
+            <a:solidFill>
+              <a:srgbClr val="003A63"/>
+            </a:solidFill>
+            <a:prstDash val="solid"/>
+          </a:ln>
+        </p:spPr>
+      </p:sp>
+      <p:sp>
+        <p:nvSpPr>
+          <p:cNvPr id="19" name="Text 17"/>
+          <p:cNvSpPr/>
+          <p:nvPr/>
+        </p:nvSpPr>
+        <p:spPr>
+          <a:xfrm>
+            <a:off x="7863840" y="3017520"/>
+            <a:ext cx="3017520" cy="201168"/>
+          </a:xfrm>
+          <a:prstGeom prst="rect">
+            <a:avLst/>
+          </a:prstGeom>
+          <a:noFill/>
+          <a:ln/>
+        </p:spPr>
+        <p:txBody>
+          <a:bodyPr wrap="square" lIns="0" tIns="0" rIns="0" bIns="0" rtlCol="0" anchor="ctr"/>
+          <a:lstStyle/>
+          <a:p>
+            <a:pPr algn="ctr" indent="0" marL="0">
+              <a:buNone/>
+            </a:pPr>
+            <a:r>
+              <a:rPr lang="en-US" sz="1050" b="1" dirty="0">
+                <a:solidFill>
+                  <a:srgbClr val="003A63"/>
+                </a:solidFill>
+                <a:latin typeface="Aptos" pitchFamily="34" charset="0"/>
+                <a:ea typeface="Aptos" pitchFamily="34" charset="-122"/>
+                <a:cs typeface="Aptos" pitchFamily="34" charset="-120"/>
+              </a:rPr>
+              <a:t>Measure and monitor</a:t>
+            </a:r>
+            <a:endParaRPr lang="en-US" sz="1050" dirty="0"/>
+          </a:p>
+        </p:txBody>
+      </p:sp>
+      <p:sp>
+        <p:nvSpPr>
+          <p:cNvPr id="20" name="Shape 18"/>
+          <p:cNvSpPr/>
+          <p:nvPr/>
+        </p:nvSpPr>
+        <p:spPr>
+          <a:xfrm>
+            <a:off x="7635240" y="4498848"/>
+            <a:ext cx="3474720" cy="1143000"/>
+          </a:xfrm>
+          <a:prstGeom prst="roundRect">
+            <a:avLst>
+              <a:gd name="adj" fmla="val 9600"/>
+            </a:avLst>
+          </a:prstGeom>
+          <a:solidFill>
             <a:srgbClr val="EAF6F8"/>
           </a:solidFill>
           <a:ln w="12700">
@@ -6009,14 +6650,14 @@
       </p:sp>
       <p:sp>
         <p:nvSpPr>
-          <p:cNvPr id="16" name="Text 14"/>
-          <p:cNvSpPr/>
-          <p:nvPr/>
-        </p:nvSpPr>
-        <p:spPr>
-          <a:xfrm>
-            <a:off x="8074152" y="3666744"/>
-            <a:ext cx="2825496" cy="256032"/>
+          <p:cNvPr id="21" name="Text 19"/>
+          <p:cNvSpPr/>
+          <p:nvPr/>
+        </p:nvSpPr>
+        <p:spPr>
+          <a:xfrm>
+            <a:off x="7799832" y="4645152"/>
+            <a:ext cx="3145536" cy="256032"/>
           </a:xfrm>
           <a:prstGeom prst="rect">
             <a:avLst/>
@@ -6040,7 +6681,7 @@
                 <a:ea typeface="Aptos" pitchFamily="34" charset="-122"/>
                 <a:cs typeface="Aptos" pitchFamily="34" charset="-120"/>
               </a:rPr>
-              <a:t>Use this for</a:t>
+              <a:t>How to validate</a:t>
             </a:r>
             <a:endParaRPr lang="en-US" sz="1300" dirty="0"/>
           </a:p>
@@ -6048,14 +6689,14 @@
       </p:sp>
       <p:sp>
         <p:nvSpPr>
-          <p:cNvPr id="17" name="Text 15"/>
-          <p:cNvSpPr/>
-          <p:nvPr/>
-        </p:nvSpPr>
-        <p:spPr>
-          <a:xfrm>
-            <a:off x="8074152" y="4023360"/>
-            <a:ext cx="2825496" cy="1097280"/>
+          <p:cNvPr id="22" name="Text 20"/>
+          <p:cNvSpPr/>
+          <p:nvPr/>
+        </p:nvSpPr>
+        <p:spPr>
+          <a:xfrm>
+            <a:off x="7799832" y="5001768"/>
+            <a:ext cx="3145536" cy="502920"/>
           </a:xfrm>
           <a:prstGeom prst="rect">
             <a:avLst/>
@@ -6081,7 +6722,7 @@
                 <a:ea typeface="Aptos" pitchFamily="34" charset="-122"/>
                 <a:cs typeface="Aptos" pitchFamily="34" charset="-120"/>
               </a:rPr>
-              <a:t>Connect the concept to public health decisions, safeguards, documentation, or implementation work.</a:t>
+              <a:t>Connect the concept to data quality, model performance, validation evidence, monitoring measures, and decisions that remain under human control.</a:t>
             </a:r>
             <a:endParaRPr lang="en-US" sz="1550" dirty="0"/>
           </a:p>
@@ -6255,8 +6896,8 @@
         </p:nvSpPr>
         <p:spPr>
           <a:xfrm>
-            <a:off x="9966960" y="6537960"/>
-            <a:ext cx="1645920" cy="201168"/>
+            <a:off x="9646920" y="6537960"/>
+            <a:ext cx="1965960" cy="201168"/>
           </a:xfrm>
           <a:prstGeom prst="rect">
             <a:avLst/>
@@ -6280,7 +6921,7 @@
                 <a:ea typeface="Aptos" pitchFamily="34" charset="-122"/>
                 <a:cs typeface="Aptos" pitchFamily="34" charset="-120"/>
               </a:rPr>
-              <a:t>Â© Paula Soper</a:t>
+              <a:t>Copyright Paula Soper</a:t>
             </a:r>
             <a:endParaRPr lang="en-US" sz="800" dirty="0"/>
           </a:p>
@@ -6327,77 +6968,13 @@
       </p:sp>
       <p:sp>
         <p:nvSpPr>
-          <p:cNvPr id="8" name="Shape 6"/>
+          <p:cNvPr id="8" name="Text 6"/>
           <p:cNvSpPr/>
           <p:nvPr/>
         </p:nvSpPr>
         <p:spPr>
           <a:xfrm>
             <a:off x="640080" y="658368"/>
-            <a:ext cx="420624" cy="420624"/>
-          </a:xfrm>
-          <a:prstGeom prst="ellipse">
-            <a:avLst/>
-          </a:prstGeom>
-          <a:solidFill>
-            <a:srgbClr val="0068B7"/>
-          </a:solidFill>
-          <a:ln w="12700">
-            <a:solidFill>
-              <a:srgbClr val="0068B7"/>
-            </a:solidFill>
-            <a:prstDash val="solid"/>
-          </a:ln>
-        </p:spPr>
-      </p:sp>
-      <p:sp>
-        <p:nvSpPr>
-          <p:cNvPr id="9" name="Text 7"/>
-          <p:cNvSpPr/>
-          <p:nvPr/>
-        </p:nvSpPr>
-        <p:spPr>
-          <a:xfrm>
-            <a:off x="640080" y="731520"/>
-            <a:ext cx="420624" cy="164592"/>
-          </a:xfrm>
-          <a:prstGeom prst="rect">
-            <a:avLst/>
-          </a:prstGeom>
-          <a:noFill/>
-          <a:ln/>
-        </p:spPr>
-        <p:txBody>
-          <a:bodyPr wrap="square" lIns="0" tIns="0" rIns="0" bIns="0" rtlCol="0" anchor="ctr"/>
-          <a:lstStyle/>
-          <a:p>
-            <a:pPr algn="ctr" indent="0" marL="0">
-              <a:buNone/>
-            </a:pPr>
-            <a:r>
-              <a:rPr lang="en-US" sz="1100" b="1" dirty="0">
-                <a:solidFill>
-                  <a:srgbClr val="FFFFFF"/>
-                </a:solidFill>
-                <a:latin typeface="Aptos" pitchFamily="34" charset="0"/>
-                <a:ea typeface="Aptos" pitchFamily="34" charset="-122"/>
-                <a:cs typeface="Aptos" pitchFamily="34" charset="-120"/>
-              </a:rPr>
-              <a:t>9</a:t>
-            </a:r>
-            <a:endParaRPr lang="en-US" sz="1100" dirty="0"/>
-          </a:p>
-        </p:txBody>
-      </p:sp>
-      <p:sp>
-        <p:nvSpPr>
-          <p:cNvPr id="10" name="Text 8"/>
-          <p:cNvSpPr/>
-          <p:nvPr/>
-        </p:nvSpPr>
-        <p:spPr>
-          <a:xfrm>
-            <a:off x="640080" y="621792"/>
             <a:ext cx="10881360" cy="713232"/>
           </a:xfrm>
           <a:prstGeom prst="rect">
@@ -6432,14 +7009,14 @@
       </p:sp>
       <p:sp>
         <p:nvSpPr>
-          <p:cNvPr id="11" name="Text 9"/>
+          <p:cNvPr id="9" name="Text 7"/>
           <p:cNvSpPr/>
           <p:nvPr/>
         </p:nvSpPr>
         <p:spPr>
           <a:xfrm>
             <a:off x="868680" y="1508760"/>
-            <a:ext cx="6537960" cy="4160520"/>
+            <a:ext cx="6309360" cy="4160520"/>
           </a:xfrm>
           <a:prstGeom prst="rect">
             <a:avLst/>
@@ -6498,18 +7075,18 @@
       </p:sp>
       <p:sp>
         <p:nvSpPr>
-          <p:cNvPr id="12" name="Shape 10"/>
-          <p:cNvSpPr/>
-          <p:nvPr/>
-        </p:nvSpPr>
-        <p:spPr>
-          <a:xfrm>
-            <a:off x="7909560" y="1417320"/>
-            <a:ext cx="3154680" cy="1828800"/>
+          <p:cNvPr id="10" name="Shape 8"/>
+          <p:cNvSpPr/>
+          <p:nvPr/>
+        </p:nvSpPr>
+        <p:spPr>
+          <a:xfrm>
+            <a:off x="7635240" y="1325880"/>
+            <a:ext cx="3474720" cy="1325880"/>
           </a:xfrm>
           <a:prstGeom prst="roundRect">
             <a:avLst>
-              <a:gd name="adj" fmla="val 6000"/>
+              <a:gd name="adj" fmla="val 8276"/>
             </a:avLst>
           </a:prstGeom>
           <a:solidFill>
@@ -6525,14 +7102,14 @@
       </p:sp>
       <p:sp>
         <p:nvSpPr>
-          <p:cNvPr id="13" name="Text 11"/>
-          <p:cNvSpPr/>
-          <p:nvPr/>
-        </p:nvSpPr>
-        <p:spPr>
-          <a:xfrm>
-            <a:off x="8074152" y="1563624"/>
-            <a:ext cx="2825496" cy="256032"/>
+          <p:cNvPr id="11" name="Text 9"/>
+          <p:cNvSpPr/>
+          <p:nvPr/>
+        </p:nvSpPr>
+        <p:spPr>
+          <a:xfrm>
+            <a:off x="7799832" y="1472184"/>
+            <a:ext cx="3145536" cy="256032"/>
           </a:xfrm>
           <a:prstGeom prst="rect">
             <a:avLst/>
@@ -6556,7 +7133,7 @@
                 <a:ea typeface="Aptos" pitchFamily="34" charset="-122"/>
                 <a:cs typeface="Aptos" pitchFamily="34" charset="-120"/>
               </a:rPr>
-              <a:t>Key idea</a:t>
+              <a:t>Data decision</a:t>
             </a:r>
             <a:endParaRPr lang="en-US" sz="1300" dirty="0"/>
           </a:p>
@@ -6564,14 +7141,14 @@
       </p:sp>
       <p:sp>
         <p:nvSpPr>
-          <p:cNvPr id="14" name="Text 12"/>
-          <p:cNvSpPr/>
-          <p:nvPr/>
-        </p:nvSpPr>
-        <p:spPr>
-          <a:xfrm>
-            <a:off x="8074152" y="1920240"/>
-            <a:ext cx="2825496" cy="1188720"/>
+          <p:cNvPr id="12" name="Text 10"/>
+          <p:cNvSpPr/>
+          <p:nvPr/>
+        </p:nvSpPr>
+        <p:spPr>
+          <a:xfrm>
+            <a:off x="7799832" y="1828800"/>
+            <a:ext cx="3145536" cy="685800"/>
           </a:xfrm>
           <a:prstGeom prst="rect">
             <a:avLst/>
@@ -6605,21 +7182,212 @@
       </p:sp>
       <p:sp>
         <p:nvSpPr>
-          <p:cNvPr id="15" name="Shape 13"/>
-          <p:cNvSpPr/>
-          <p:nvPr/>
-        </p:nvSpPr>
-        <p:spPr>
-          <a:xfrm>
-            <a:off x="7909560" y="3520440"/>
-            <a:ext cx="3154680" cy="1737360"/>
+          <p:cNvPr id="13" name="Shape 11"/>
+          <p:cNvSpPr/>
+          <p:nvPr/>
+        </p:nvSpPr>
+        <p:spPr>
+          <a:xfrm>
+            <a:off x="7635240" y="2788920"/>
+            <a:ext cx="3474720" cy="1536192"/>
           </a:xfrm>
           <a:prstGeom prst="roundRect">
             <a:avLst>
-              <a:gd name="adj" fmla="val 6316"/>
+              <a:gd name="adj" fmla="val 7143"/>
             </a:avLst>
           </a:prstGeom>
           <a:solidFill>
+            <a:srgbClr val="FFFFFF">
+              <a:alpha val="88000"/>
+            </a:srgbClr>
+          </a:solidFill>
+          <a:ln w="12700">
+            <a:solidFill>
+              <a:srgbClr val="D6E8F2"/>
+            </a:solidFill>
+            <a:prstDash val="solid"/>
+          </a:ln>
+        </p:spPr>
+      </p:sp>
+      <p:sp>
+        <p:nvSpPr>
+          <p:cNvPr id="14" name="Shape 12"/>
+          <p:cNvSpPr/>
+          <p:nvPr/>
+        </p:nvSpPr>
+        <p:spPr>
+          <a:xfrm>
+            <a:off x="8138160" y="3474720"/>
+            <a:ext cx="256032" cy="411480"/>
+          </a:xfrm>
+          <a:prstGeom prst="rect">
+            <a:avLst/>
+          </a:prstGeom>
+          <a:solidFill>
+            <a:srgbClr val="0068B7"/>
+          </a:solidFill>
+          <a:ln w="12700">
+            <a:solidFill>
+              <a:srgbClr val="0068B7"/>
+            </a:solidFill>
+            <a:prstDash val="solid"/>
+          </a:ln>
+        </p:spPr>
+      </p:sp>
+      <p:sp>
+        <p:nvSpPr>
+          <p:cNvPr id="15" name="Shape 13"/>
+          <p:cNvSpPr/>
+          <p:nvPr/>
+        </p:nvSpPr>
+        <p:spPr>
+          <a:xfrm>
+            <a:off x="8577072" y="3172968"/>
+            <a:ext cx="256032" cy="713232"/>
+          </a:xfrm>
+          <a:prstGeom prst="rect">
+            <a:avLst/>
+          </a:prstGeom>
+          <a:solidFill>
+            <a:srgbClr val="2F8A28"/>
+          </a:solidFill>
+          <a:ln w="12700">
+            <a:solidFill>
+              <a:srgbClr val="2F8A28"/>
+            </a:solidFill>
+            <a:prstDash val="solid"/>
+          </a:ln>
+        </p:spPr>
+      </p:sp>
+      <p:sp>
+        <p:nvSpPr>
+          <p:cNvPr id="16" name="Shape 14"/>
+          <p:cNvSpPr/>
+          <p:nvPr/>
+        </p:nvSpPr>
+        <p:spPr>
+          <a:xfrm>
+            <a:off x="9015984" y="2880360"/>
+            <a:ext cx="256032" cy="1005840"/>
+          </a:xfrm>
+          <a:prstGeom prst="rect">
+            <a:avLst/>
+          </a:prstGeom>
+          <a:solidFill>
+            <a:srgbClr val="D69A2D"/>
+          </a:solidFill>
+          <a:ln w="12700">
+            <a:solidFill>
+              <a:srgbClr val="D69A2D"/>
+            </a:solidFill>
+            <a:prstDash val="solid"/>
+          </a:ln>
+        </p:spPr>
+      </p:sp>
+      <p:sp>
+        <p:nvSpPr>
+          <p:cNvPr id="17" name="Shape 15"/>
+          <p:cNvSpPr/>
+          <p:nvPr/>
+        </p:nvSpPr>
+        <p:spPr>
+          <a:xfrm>
+            <a:off x="9454896" y="3319272"/>
+            <a:ext cx="256032" cy="566928"/>
+          </a:xfrm>
+          <a:prstGeom prst="rect">
+            <a:avLst/>
+          </a:prstGeom>
+          <a:solidFill>
+            <a:srgbClr val="6A4CA3"/>
+          </a:solidFill>
+          <a:ln w="12700">
+            <a:solidFill>
+              <a:srgbClr val="6A4CA3"/>
+            </a:solidFill>
+            <a:prstDash val="solid"/>
+          </a:ln>
+        </p:spPr>
+      </p:sp>
+      <p:sp>
+        <p:nvSpPr>
+          <p:cNvPr id="18" name="Shape 16"/>
+          <p:cNvSpPr/>
+          <p:nvPr/>
+        </p:nvSpPr>
+        <p:spPr>
+          <a:xfrm>
+            <a:off x="8019288" y="3886200"/>
+            <a:ext cx="2706624" cy="0"/>
+          </a:xfrm>
+          <a:prstGeom prst="line">
+            <a:avLst/>
+          </a:prstGeom>
+          <a:noFill/>
+          <a:ln w="15240">
+            <a:solidFill>
+              <a:srgbClr val="003A63"/>
+            </a:solidFill>
+            <a:prstDash val="solid"/>
+          </a:ln>
+        </p:spPr>
+      </p:sp>
+      <p:sp>
+        <p:nvSpPr>
+          <p:cNvPr id="19" name="Text 17"/>
+          <p:cNvSpPr/>
+          <p:nvPr/>
+        </p:nvSpPr>
+        <p:spPr>
+          <a:xfrm>
+            <a:off x="7863840" y="3017520"/>
+            <a:ext cx="3017520" cy="201168"/>
+          </a:xfrm>
+          <a:prstGeom prst="rect">
+            <a:avLst/>
+          </a:prstGeom>
+          <a:noFill/>
+          <a:ln/>
+        </p:spPr>
+        <p:txBody>
+          <a:bodyPr wrap="square" lIns="0" tIns="0" rIns="0" bIns="0" rtlCol="0" anchor="ctr"/>
+          <a:lstStyle/>
+          <a:p>
+            <a:pPr algn="ctr" indent="0" marL="0">
+              <a:buNone/>
+            </a:pPr>
+            <a:r>
+              <a:rPr lang="en-US" sz="1050" b="1" dirty="0">
+                <a:solidFill>
+                  <a:srgbClr val="003A63"/>
+                </a:solidFill>
+                <a:latin typeface="Aptos" pitchFamily="34" charset="0"/>
+                <a:ea typeface="Aptos" pitchFamily="34" charset="-122"/>
+                <a:cs typeface="Aptos" pitchFamily="34" charset="-120"/>
+              </a:rPr>
+              <a:t>Measure and monitor</a:t>
+            </a:r>
+            <a:endParaRPr lang="en-US" sz="1050" dirty="0"/>
+          </a:p>
+        </p:txBody>
+      </p:sp>
+      <p:sp>
+        <p:nvSpPr>
+          <p:cNvPr id="20" name="Shape 18"/>
+          <p:cNvSpPr/>
+          <p:nvPr/>
+        </p:nvSpPr>
+        <p:spPr>
+          <a:xfrm>
+            <a:off x="7635240" y="4498848"/>
+            <a:ext cx="3474720" cy="1143000"/>
+          </a:xfrm>
+          <a:prstGeom prst="roundRect">
+            <a:avLst>
+              <a:gd name="adj" fmla="val 9600"/>
+            </a:avLst>
+          </a:prstGeom>
+          <a:solidFill>
             <a:srgbClr val="EAF6F8"/>
           </a:solidFill>
           <a:ln w="12700">
@@ -6632,14 +7400,14 @@
       </p:sp>
       <p:sp>
         <p:nvSpPr>
-          <p:cNvPr id="16" name="Text 14"/>
-          <p:cNvSpPr/>
-          <p:nvPr/>
-        </p:nvSpPr>
-        <p:spPr>
-          <a:xfrm>
-            <a:off x="8074152" y="3666744"/>
-            <a:ext cx="2825496" cy="256032"/>
+          <p:cNvPr id="21" name="Text 19"/>
+          <p:cNvSpPr/>
+          <p:nvPr/>
+        </p:nvSpPr>
+        <p:spPr>
+          <a:xfrm>
+            <a:off x="7799832" y="4645152"/>
+            <a:ext cx="3145536" cy="256032"/>
           </a:xfrm>
           <a:prstGeom prst="rect">
             <a:avLst/>
@@ -6663,7 +7431,7 @@
                 <a:ea typeface="Aptos" pitchFamily="34" charset="-122"/>
                 <a:cs typeface="Aptos" pitchFamily="34" charset="-120"/>
               </a:rPr>
-              <a:t>Use this for</a:t>
+              <a:t>How to validate</a:t>
             </a:r>
             <a:endParaRPr lang="en-US" sz="1300" dirty="0"/>
           </a:p>
@@ -6671,14 +7439,14 @@
       </p:sp>
       <p:sp>
         <p:nvSpPr>
-          <p:cNvPr id="17" name="Text 15"/>
-          <p:cNvSpPr/>
-          <p:nvPr/>
-        </p:nvSpPr>
-        <p:spPr>
-          <a:xfrm>
-            <a:off x="8074152" y="4023360"/>
-            <a:ext cx="2825496" cy="1097280"/>
+          <p:cNvPr id="22" name="Text 20"/>
+          <p:cNvSpPr/>
+          <p:nvPr/>
+        </p:nvSpPr>
+        <p:spPr>
+          <a:xfrm>
+            <a:off x="7799832" y="5001768"/>
+            <a:ext cx="3145536" cy="502920"/>
           </a:xfrm>
           <a:prstGeom prst="rect">
             <a:avLst/>
@@ -6704,7 +7472,7 @@
                 <a:ea typeface="Aptos" pitchFamily="34" charset="-122"/>
                 <a:cs typeface="Aptos" pitchFamily="34" charset="-120"/>
               </a:rPr>
-              <a:t>Connect the concept to public health decisions, safeguards, documentation, or implementation work.</a:t>
+              <a:t>Connect the concept to data quality, model performance, validation evidence, monitoring measures, and decisions that remain under human control.</a:t>
             </a:r>
             <a:endParaRPr lang="en-US" sz="1550" dirty="0"/>
           </a:p>
@@ -6878,8 +7646,8 @@
         </p:nvSpPr>
         <p:spPr>
           <a:xfrm>
-            <a:off x="9966960" y="6537960"/>
-            <a:ext cx="1645920" cy="201168"/>
+            <a:off x="9646920" y="6537960"/>
+            <a:ext cx="1965960" cy="201168"/>
           </a:xfrm>
           <a:prstGeom prst="rect">
             <a:avLst/>
@@ -6903,7 +7671,7 @@
                 <a:ea typeface="Aptos" pitchFamily="34" charset="-122"/>
                 <a:cs typeface="Aptos" pitchFamily="34" charset="-120"/>
               </a:rPr>
-              <a:t>Â© Paula Soper</a:t>
+              <a:t>Copyright Paula Soper</a:t>
             </a:r>
             <a:endParaRPr lang="en-US" sz="800" dirty="0"/>
           </a:p>
@@ -6998,7 +7766,7 @@
         <p:spPr>
           <a:xfrm>
             <a:off x="868680" y="1508760"/>
-            <a:ext cx="6537960" cy="4160520"/>
+            <a:ext cx="6309360" cy="4160520"/>
           </a:xfrm>
           <a:prstGeom prst="rect">
             <a:avLst/>
@@ -7049,12 +7817,12 @@
         </p:nvSpPr>
         <p:spPr>
           <a:xfrm>
-            <a:off x="7909560" y="1417320"/>
-            <a:ext cx="3154680" cy="1828800"/>
+            <a:off x="7635240" y="1325880"/>
+            <a:ext cx="3474720" cy="1325880"/>
           </a:xfrm>
           <a:prstGeom prst="roundRect">
             <a:avLst>
-              <a:gd name="adj" fmla="val 6000"/>
+              <a:gd name="adj" fmla="val 8276"/>
             </a:avLst>
           </a:prstGeom>
           <a:solidFill>
@@ -7076,8 +7844,8 @@
         </p:nvSpPr>
         <p:spPr>
           <a:xfrm>
-            <a:off x="8074152" y="1563624"/>
-            <a:ext cx="2825496" cy="256032"/>
+            <a:off x="7799832" y="1472184"/>
+            <a:ext cx="3145536" cy="256032"/>
           </a:xfrm>
           <a:prstGeom prst="rect">
             <a:avLst/>
@@ -7101,7 +7869,7 @@
                 <a:ea typeface="Aptos" pitchFamily="34" charset="-122"/>
                 <a:cs typeface="Aptos" pitchFamily="34" charset="-120"/>
               </a:rPr>
-              <a:t>Key idea</a:t>
+              <a:t>Data decision</a:t>
             </a:r>
             <a:endParaRPr lang="en-US" sz="1300" dirty="0"/>
           </a:p>
@@ -7115,8 +7883,8 @@
         </p:nvSpPr>
         <p:spPr>
           <a:xfrm>
-            <a:off x="8074152" y="1920240"/>
-            <a:ext cx="2825496" cy="1188720"/>
+            <a:off x="7799832" y="1828800"/>
+            <a:ext cx="3145536" cy="685800"/>
           </a:xfrm>
           <a:prstGeom prst="rect">
             <a:avLst/>
@@ -7156,15 +7924,206 @@
         </p:nvSpPr>
         <p:spPr>
           <a:xfrm>
-            <a:off x="7909560" y="3520440"/>
-            <a:ext cx="3154680" cy="1737360"/>
+            <a:off x="7635240" y="2788920"/>
+            <a:ext cx="3474720" cy="1536192"/>
           </a:xfrm>
           <a:prstGeom prst="roundRect">
             <a:avLst>
-              <a:gd name="adj" fmla="val 6316"/>
+              <a:gd name="adj" fmla="val 7143"/>
             </a:avLst>
           </a:prstGeom>
           <a:solidFill>
+            <a:srgbClr val="FFFFFF">
+              <a:alpha val="88000"/>
+            </a:srgbClr>
+          </a:solidFill>
+          <a:ln w="12700">
+            <a:solidFill>
+              <a:srgbClr val="D6E8F2"/>
+            </a:solidFill>
+            <a:prstDash val="solid"/>
+          </a:ln>
+        </p:spPr>
+      </p:sp>
+      <p:sp>
+        <p:nvSpPr>
+          <p:cNvPr id="14" name="Shape 12"/>
+          <p:cNvSpPr/>
+          <p:nvPr/>
+        </p:nvSpPr>
+        <p:spPr>
+          <a:xfrm>
+            <a:off x="8138160" y="3474720"/>
+            <a:ext cx="256032" cy="411480"/>
+          </a:xfrm>
+          <a:prstGeom prst="rect">
+            <a:avLst/>
+          </a:prstGeom>
+          <a:solidFill>
+            <a:srgbClr val="0068B7"/>
+          </a:solidFill>
+          <a:ln w="12700">
+            <a:solidFill>
+              <a:srgbClr val="0068B7"/>
+            </a:solidFill>
+            <a:prstDash val="solid"/>
+          </a:ln>
+        </p:spPr>
+      </p:sp>
+      <p:sp>
+        <p:nvSpPr>
+          <p:cNvPr id="15" name="Shape 13"/>
+          <p:cNvSpPr/>
+          <p:nvPr/>
+        </p:nvSpPr>
+        <p:spPr>
+          <a:xfrm>
+            <a:off x="8577072" y="3172968"/>
+            <a:ext cx="256032" cy="713232"/>
+          </a:xfrm>
+          <a:prstGeom prst="rect">
+            <a:avLst/>
+          </a:prstGeom>
+          <a:solidFill>
+            <a:srgbClr val="2F8A28"/>
+          </a:solidFill>
+          <a:ln w="12700">
+            <a:solidFill>
+              <a:srgbClr val="2F8A28"/>
+            </a:solidFill>
+            <a:prstDash val="solid"/>
+          </a:ln>
+        </p:spPr>
+      </p:sp>
+      <p:sp>
+        <p:nvSpPr>
+          <p:cNvPr id="16" name="Shape 14"/>
+          <p:cNvSpPr/>
+          <p:nvPr/>
+        </p:nvSpPr>
+        <p:spPr>
+          <a:xfrm>
+            <a:off x="9015984" y="2880360"/>
+            <a:ext cx="256032" cy="1005840"/>
+          </a:xfrm>
+          <a:prstGeom prst="rect">
+            <a:avLst/>
+          </a:prstGeom>
+          <a:solidFill>
+            <a:srgbClr val="D69A2D"/>
+          </a:solidFill>
+          <a:ln w="12700">
+            <a:solidFill>
+              <a:srgbClr val="D69A2D"/>
+            </a:solidFill>
+            <a:prstDash val="solid"/>
+          </a:ln>
+        </p:spPr>
+      </p:sp>
+      <p:sp>
+        <p:nvSpPr>
+          <p:cNvPr id="17" name="Shape 15"/>
+          <p:cNvSpPr/>
+          <p:nvPr/>
+        </p:nvSpPr>
+        <p:spPr>
+          <a:xfrm>
+            <a:off x="9454896" y="3319272"/>
+            <a:ext cx="256032" cy="566928"/>
+          </a:xfrm>
+          <a:prstGeom prst="rect">
+            <a:avLst/>
+          </a:prstGeom>
+          <a:solidFill>
+            <a:srgbClr val="6A4CA3"/>
+          </a:solidFill>
+          <a:ln w="12700">
+            <a:solidFill>
+              <a:srgbClr val="6A4CA3"/>
+            </a:solidFill>
+            <a:prstDash val="solid"/>
+          </a:ln>
+        </p:spPr>
+      </p:sp>
+      <p:sp>
+        <p:nvSpPr>
+          <p:cNvPr id="18" name="Shape 16"/>
+          <p:cNvSpPr/>
+          <p:nvPr/>
+        </p:nvSpPr>
+        <p:spPr>
+          <a:xfrm>
+            <a:off x="8019288" y="3886200"/>
+            <a:ext cx="2706624" cy="0"/>
+          </a:xfrm>
+          <a:prstGeom prst="line">
+            <a:avLst/>
+          </a:prstGeom>
+          <a:noFill/>
+          <a:ln w="15240">
+            <a:solidFill>
+              <a:srgbClr val="003A63"/>
+            </a:solidFill>
+            <a:prstDash val="solid"/>
+          </a:ln>
+        </p:spPr>
+      </p:sp>
+      <p:sp>
+        <p:nvSpPr>
+          <p:cNvPr id="19" name="Text 17"/>
+          <p:cNvSpPr/>
+          <p:nvPr/>
+        </p:nvSpPr>
+        <p:spPr>
+          <a:xfrm>
+            <a:off x="7863840" y="3017520"/>
+            <a:ext cx="3017520" cy="201168"/>
+          </a:xfrm>
+          <a:prstGeom prst="rect">
+            <a:avLst/>
+          </a:prstGeom>
+          <a:noFill/>
+          <a:ln/>
+        </p:spPr>
+        <p:txBody>
+          <a:bodyPr wrap="square" lIns="0" tIns="0" rIns="0" bIns="0" rtlCol="0" anchor="ctr"/>
+          <a:lstStyle/>
+          <a:p>
+            <a:pPr algn="ctr" indent="0" marL="0">
+              <a:buNone/>
+            </a:pPr>
+            <a:r>
+              <a:rPr lang="en-US" sz="1050" b="1" dirty="0">
+                <a:solidFill>
+                  <a:srgbClr val="003A63"/>
+                </a:solidFill>
+                <a:latin typeface="Aptos" pitchFamily="34" charset="0"/>
+                <a:ea typeface="Aptos" pitchFamily="34" charset="-122"/>
+                <a:cs typeface="Aptos" pitchFamily="34" charset="-120"/>
+              </a:rPr>
+              <a:t>Measure and monitor</a:t>
+            </a:r>
+            <a:endParaRPr lang="en-US" sz="1050" dirty="0"/>
+          </a:p>
+        </p:txBody>
+      </p:sp>
+      <p:sp>
+        <p:nvSpPr>
+          <p:cNvPr id="20" name="Shape 18"/>
+          <p:cNvSpPr/>
+          <p:nvPr/>
+        </p:nvSpPr>
+        <p:spPr>
+          <a:xfrm>
+            <a:off x="7635240" y="4498848"/>
+            <a:ext cx="3474720" cy="1143000"/>
+          </a:xfrm>
+          <a:prstGeom prst="roundRect">
+            <a:avLst>
+              <a:gd name="adj" fmla="val 9600"/>
+            </a:avLst>
+          </a:prstGeom>
+          <a:solidFill>
             <a:srgbClr val="EAF6F8"/>
           </a:solidFill>
           <a:ln w="12700">
@@ -7177,14 +8136,14 @@
       </p:sp>
       <p:sp>
         <p:nvSpPr>
-          <p:cNvPr id="14" name="Text 12"/>
-          <p:cNvSpPr/>
-          <p:nvPr/>
-        </p:nvSpPr>
-        <p:spPr>
-          <a:xfrm>
-            <a:off x="8074152" y="3666744"/>
-            <a:ext cx="2825496" cy="256032"/>
+          <p:cNvPr id="21" name="Text 19"/>
+          <p:cNvSpPr/>
+          <p:nvPr/>
+        </p:nvSpPr>
+        <p:spPr>
+          <a:xfrm>
+            <a:off x="7799832" y="4645152"/>
+            <a:ext cx="3145536" cy="256032"/>
           </a:xfrm>
           <a:prstGeom prst="rect">
             <a:avLst/>
@@ -7208,7 +8167,7 @@
                 <a:ea typeface="Aptos" pitchFamily="34" charset="-122"/>
                 <a:cs typeface="Aptos" pitchFamily="34" charset="-120"/>
               </a:rPr>
-              <a:t>Use this for</a:t>
+              <a:t>How to validate</a:t>
             </a:r>
             <a:endParaRPr lang="en-US" sz="1300" dirty="0"/>
           </a:p>
@@ -7216,14 +8175,14 @@
       </p:sp>
       <p:sp>
         <p:nvSpPr>
-          <p:cNvPr id="15" name="Text 13"/>
-          <p:cNvSpPr/>
-          <p:nvPr/>
-        </p:nvSpPr>
-        <p:spPr>
-          <a:xfrm>
-            <a:off x="8074152" y="4023360"/>
-            <a:ext cx="2825496" cy="1097280"/>
+          <p:cNvPr id="22" name="Text 20"/>
+          <p:cNvSpPr/>
+          <p:nvPr/>
+        </p:nvSpPr>
+        <p:spPr>
+          <a:xfrm>
+            <a:off x="7799832" y="5001768"/>
+            <a:ext cx="3145536" cy="502920"/>
           </a:xfrm>
           <a:prstGeom prst="rect">
             <a:avLst/>
@@ -7249,7 +8208,7 @@
                 <a:ea typeface="Aptos" pitchFamily="34" charset="-122"/>
                 <a:cs typeface="Aptos" pitchFamily="34" charset="-120"/>
               </a:rPr>
-              <a:t>Connect the concept to public health decisions, safeguards, documentation, or implementation work.</a:t>
+              <a:t>Connect the concept to data quality, model performance, validation evidence, monitoring measures, and decisions that remain under human control.</a:t>
             </a:r>
             <a:endParaRPr lang="en-US" sz="1550" dirty="0"/>
           </a:p>
@@ -7423,8 +8382,8 @@
         </p:nvSpPr>
         <p:spPr>
           <a:xfrm>
-            <a:off x="9966960" y="6537960"/>
-            <a:ext cx="1645920" cy="201168"/>
+            <a:off x="9646920" y="6537960"/>
+            <a:ext cx="1965960" cy="201168"/>
           </a:xfrm>
           <a:prstGeom prst="rect">
             <a:avLst/>
@@ -7448,7 +8407,7 @@
                 <a:ea typeface="Aptos" pitchFamily="34" charset="-122"/>
                 <a:cs typeface="Aptos" pitchFamily="34" charset="-120"/>
               </a:rPr>
-              <a:t>Â© Paula Soper</a:t>
+              <a:t>Copyright Paula Soper</a:t>
             </a:r>
             <a:endParaRPr lang="en-US" sz="800" dirty="0"/>
           </a:p>
@@ -7495,77 +8454,13 @@
       </p:sp>
       <p:sp>
         <p:nvSpPr>
-          <p:cNvPr id="8" name="Shape 6"/>
+          <p:cNvPr id="8" name="Text 6"/>
           <p:cNvSpPr/>
           <p:nvPr/>
         </p:nvSpPr>
         <p:spPr>
           <a:xfrm>
             <a:off x="640080" y="658368"/>
-            <a:ext cx="420624" cy="420624"/>
-          </a:xfrm>
-          <a:prstGeom prst="ellipse">
-            <a:avLst/>
-          </a:prstGeom>
-          <a:solidFill>
-            <a:srgbClr val="0068B7"/>
-          </a:solidFill>
-          <a:ln w="12700">
-            <a:solidFill>
-              <a:srgbClr val="0068B7"/>
-            </a:solidFill>
-            <a:prstDash val="solid"/>
-          </a:ln>
-        </p:spPr>
-      </p:sp>
-      <p:sp>
-        <p:nvSpPr>
-          <p:cNvPr id="9" name="Text 7"/>
-          <p:cNvSpPr/>
-          <p:nvPr/>
-        </p:nvSpPr>
-        <p:spPr>
-          <a:xfrm>
-            <a:off x="640080" y="731520"/>
-            <a:ext cx="420624" cy="164592"/>
-          </a:xfrm>
-          <a:prstGeom prst="rect">
-            <a:avLst/>
-          </a:prstGeom>
-          <a:noFill/>
-          <a:ln/>
-        </p:spPr>
-        <p:txBody>
-          <a:bodyPr wrap="square" lIns="0" tIns="0" rIns="0" bIns="0" rtlCol="0" anchor="ctr"/>
-          <a:lstStyle/>
-          <a:p>
-            <a:pPr algn="ctr" indent="0" marL="0">
-              <a:buNone/>
-            </a:pPr>
-            <a:r>
-              <a:rPr lang="en-US" sz="1100" b="1" dirty="0">
-                <a:solidFill>
-                  <a:srgbClr val="FFFFFF"/>
-                </a:solidFill>
-                <a:latin typeface="Aptos" pitchFamily="34" charset="0"/>
-                <a:ea typeface="Aptos" pitchFamily="34" charset="-122"/>
-                <a:cs typeface="Aptos" pitchFamily="34" charset="-120"/>
-              </a:rPr>
-              <a:t>10</a:t>
-            </a:r>
-            <a:endParaRPr lang="en-US" sz="1100" dirty="0"/>
-          </a:p>
-        </p:txBody>
-      </p:sp>
-      <p:sp>
-        <p:nvSpPr>
-          <p:cNvPr id="10" name="Text 8"/>
-          <p:cNvSpPr/>
-          <p:nvPr/>
-        </p:nvSpPr>
-        <p:spPr>
-          <a:xfrm>
-            <a:off x="640080" y="621792"/>
             <a:ext cx="10881360" cy="713232"/>
           </a:xfrm>
           <a:prstGeom prst="rect">
@@ -7600,14 +8495,14 @@
       </p:sp>
       <p:sp>
         <p:nvSpPr>
-          <p:cNvPr id="11" name="Text 9"/>
+          <p:cNvPr id="9" name="Text 7"/>
           <p:cNvSpPr/>
           <p:nvPr/>
         </p:nvSpPr>
         <p:spPr>
           <a:xfrm>
             <a:off x="868680" y="1508760"/>
-            <a:ext cx="6537960" cy="4160520"/>
+            <a:ext cx="6309360" cy="4160520"/>
           </a:xfrm>
           <a:prstGeom prst="rect">
             <a:avLst/>
@@ -7652,18 +8547,18 @@
       </p:sp>
       <p:sp>
         <p:nvSpPr>
-          <p:cNvPr id="12" name="Shape 10"/>
-          <p:cNvSpPr/>
-          <p:nvPr/>
-        </p:nvSpPr>
-        <p:spPr>
-          <a:xfrm>
-            <a:off x="7909560" y="1417320"/>
-            <a:ext cx="3154680" cy="1828800"/>
+          <p:cNvPr id="10" name="Shape 8"/>
+          <p:cNvSpPr/>
+          <p:nvPr/>
+        </p:nvSpPr>
+        <p:spPr>
+          <a:xfrm>
+            <a:off x="7635240" y="1325880"/>
+            <a:ext cx="3474720" cy="1325880"/>
           </a:xfrm>
           <a:prstGeom prst="roundRect">
             <a:avLst>
-              <a:gd name="adj" fmla="val 6000"/>
+              <a:gd name="adj" fmla="val 8276"/>
             </a:avLst>
           </a:prstGeom>
           <a:solidFill>
@@ -7679,14 +8574,14 @@
       </p:sp>
       <p:sp>
         <p:nvSpPr>
-          <p:cNvPr id="13" name="Text 11"/>
-          <p:cNvSpPr/>
-          <p:nvPr/>
-        </p:nvSpPr>
-        <p:spPr>
-          <a:xfrm>
-            <a:off x="8074152" y="1563624"/>
-            <a:ext cx="2825496" cy="256032"/>
+          <p:cNvPr id="11" name="Text 9"/>
+          <p:cNvSpPr/>
+          <p:nvPr/>
+        </p:nvSpPr>
+        <p:spPr>
+          <a:xfrm>
+            <a:off x="7799832" y="1472184"/>
+            <a:ext cx="3145536" cy="256032"/>
           </a:xfrm>
           <a:prstGeom prst="rect">
             <a:avLst/>
@@ -7710,7 +8605,7 @@
                 <a:ea typeface="Aptos" pitchFamily="34" charset="-122"/>
                 <a:cs typeface="Aptos" pitchFamily="34" charset="-120"/>
               </a:rPr>
-              <a:t>Key idea</a:t>
+              <a:t>Data decision</a:t>
             </a:r>
             <a:endParaRPr lang="en-US" sz="1300" dirty="0"/>
           </a:p>
@@ -7718,14 +8613,14 @@
       </p:sp>
       <p:sp>
         <p:nvSpPr>
-          <p:cNvPr id="14" name="Text 12"/>
-          <p:cNvSpPr/>
-          <p:nvPr/>
-        </p:nvSpPr>
-        <p:spPr>
-          <a:xfrm>
-            <a:off x="8074152" y="1920240"/>
-            <a:ext cx="2825496" cy="1188720"/>
+          <p:cNvPr id="12" name="Text 10"/>
+          <p:cNvSpPr/>
+          <p:nvPr/>
+        </p:nvSpPr>
+        <p:spPr>
+          <a:xfrm>
+            <a:off x="7799832" y="1828800"/>
+            <a:ext cx="3145536" cy="685800"/>
           </a:xfrm>
           <a:prstGeom prst="rect">
             <a:avLst/>
@@ -7759,21 +8654,212 @@
       </p:sp>
       <p:sp>
         <p:nvSpPr>
-          <p:cNvPr id="15" name="Shape 13"/>
-          <p:cNvSpPr/>
-          <p:nvPr/>
-        </p:nvSpPr>
-        <p:spPr>
-          <a:xfrm>
-            <a:off x="7909560" y="3520440"/>
-            <a:ext cx="3154680" cy="1737360"/>
+          <p:cNvPr id="13" name="Shape 11"/>
+          <p:cNvSpPr/>
+          <p:nvPr/>
+        </p:nvSpPr>
+        <p:spPr>
+          <a:xfrm>
+            <a:off x="7635240" y="2788920"/>
+            <a:ext cx="3474720" cy="1536192"/>
           </a:xfrm>
           <a:prstGeom prst="roundRect">
             <a:avLst>
-              <a:gd name="adj" fmla="val 6316"/>
+              <a:gd name="adj" fmla="val 7143"/>
             </a:avLst>
           </a:prstGeom>
           <a:solidFill>
+            <a:srgbClr val="FFFFFF">
+              <a:alpha val="88000"/>
+            </a:srgbClr>
+          </a:solidFill>
+          <a:ln w="12700">
+            <a:solidFill>
+              <a:srgbClr val="D6E8F2"/>
+            </a:solidFill>
+            <a:prstDash val="solid"/>
+          </a:ln>
+        </p:spPr>
+      </p:sp>
+      <p:sp>
+        <p:nvSpPr>
+          <p:cNvPr id="14" name="Shape 12"/>
+          <p:cNvSpPr/>
+          <p:nvPr/>
+        </p:nvSpPr>
+        <p:spPr>
+          <a:xfrm>
+            <a:off x="8138160" y="3474720"/>
+            <a:ext cx="256032" cy="411480"/>
+          </a:xfrm>
+          <a:prstGeom prst="rect">
+            <a:avLst/>
+          </a:prstGeom>
+          <a:solidFill>
+            <a:srgbClr val="0068B7"/>
+          </a:solidFill>
+          <a:ln w="12700">
+            <a:solidFill>
+              <a:srgbClr val="0068B7"/>
+            </a:solidFill>
+            <a:prstDash val="solid"/>
+          </a:ln>
+        </p:spPr>
+      </p:sp>
+      <p:sp>
+        <p:nvSpPr>
+          <p:cNvPr id="15" name="Shape 13"/>
+          <p:cNvSpPr/>
+          <p:nvPr/>
+        </p:nvSpPr>
+        <p:spPr>
+          <a:xfrm>
+            <a:off x="8577072" y="3172968"/>
+            <a:ext cx="256032" cy="713232"/>
+          </a:xfrm>
+          <a:prstGeom prst="rect">
+            <a:avLst/>
+          </a:prstGeom>
+          <a:solidFill>
+            <a:srgbClr val="2F8A28"/>
+          </a:solidFill>
+          <a:ln w="12700">
+            <a:solidFill>
+              <a:srgbClr val="2F8A28"/>
+            </a:solidFill>
+            <a:prstDash val="solid"/>
+          </a:ln>
+        </p:spPr>
+      </p:sp>
+      <p:sp>
+        <p:nvSpPr>
+          <p:cNvPr id="16" name="Shape 14"/>
+          <p:cNvSpPr/>
+          <p:nvPr/>
+        </p:nvSpPr>
+        <p:spPr>
+          <a:xfrm>
+            <a:off x="9015984" y="2880360"/>
+            <a:ext cx="256032" cy="1005840"/>
+          </a:xfrm>
+          <a:prstGeom prst="rect">
+            <a:avLst/>
+          </a:prstGeom>
+          <a:solidFill>
+            <a:srgbClr val="D69A2D"/>
+          </a:solidFill>
+          <a:ln w="12700">
+            <a:solidFill>
+              <a:srgbClr val="D69A2D"/>
+            </a:solidFill>
+            <a:prstDash val="solid"/>
+          </a:ln>
+        </p:spPr>
+      </p:sp>
+      <p:sp>
+        <p:nvSpPr>
+          <p:cNvPr id="17" name="Shape 15"/>
+          <p:cNvSpPr/>
+          <p:nvPr/>
+        </p:nvSpPr>
+        <p:spPr>
+          <a:xfrm>
+            <a:off x="9454896" y="3319272"/>
+            <a:ext cx="256032" cy="566928"/>
+          </a:xfrm>
+          <a:prstGeom prst="rect">
+            <a:avLst/>
+          </a:prstGeom>
+          <a:solidFill>
+            <a:srgbClr val="6A4CA3"/>
+          </a:solidFill>
+          <a:ln w="12700">
+            <a:solidFill>
+              <a:srgbClr val="6A4CA3"/>
+            </a:solidFill>
+            <a:prstDash val="solid"/>
+          </a:ln>
+        </p:spPr>
+      </p:sp>
+      <p:sp>
+        <p:nvSpPr>
+          <p:cNvPr id="18" name="Shape 16"/>
+          <p:cNvSpPr/>
+          <p:nvPr/>
+        </p:nvSpPr>
+        <p:spPr>
+          <a:xfrm>
+            <a:off x="8019288" y="3886200"/>
+            <a:ext cx="2706624" cy="0"/>
+          </a:xfrm>
+          <a:prstGeom prst="line">
+            <a:avLst/>
+          </a:prstGeom>
+          <a:noFill/>
+          <a:ln w="15240">
+            <a:solidFill>
+              <a:srgbClr val="003A63"/>
+            </a:solidFill>
+            <a:prstDash val="solid"/>
+          </a:ln>
+        </p:spPr>
+      </p:sp>
+      <p:sp>
+        <p:nvSpPr>
+          <p:cNvPr id="19" name="Text 17"/>
+          <p:cNvSpPr/>
+          <p:nvPr/>
+        </p:nvSpPr>
+        <p:spPr>
+          <a:xfrm>
+            <a:off x="7863840" y="3017520"/>
+            <a:ext cx="3017520" cy="201168"/>
+          </a:xfrm>
+          <a:prstGeom prst="rect">
+            <a:avLst/>
+          </a:prstGeom>
+          <a:noFill/>
+          <a:ln/>
+        </p:spPr>
+        <p:txBody>
+          <a:bodyPr wrap="square" lIns="0" tIns="0" rIns="0" bIns="0" rtlCol="0" anchor="ctr"/>
+          <a:lstStyle/>
+          <a:p>
+            <a:pPr algn="ctr" indent="0" marL="0">
+              <a:buNone/>
+            </a:pPr>
+            <a:r>
+              <a:rPr lang="en-US" sz="1050" b="1" dirty="0">
+                <a:solidFill>
+                  <a:srgbClr val="003A63"/>
+                </a:solidFill>
+                <a:latin typeface="Aptos" pitchFamily="34" charset="0"/>
+                <a:ea typeface="Aptos" pitchFamily="34" charset="-122"/>
+                <a:cs typeface="Aptos" pitchFamily="34" charset="-120"/>
+              </a:rPr>
+              <a:t>Measure and monitor</a:t>
+            </a:r>
+            <a:endParaRPr lang="en-US" sz="1050" dirty="0"/>
+          </a:p>
+        </p:txBody>
+      </p:sp>
+      <p:sp>
+        <p:nvSpPr>
+          <p:cNvPr id="20" name="Shape 18"/>
+          <p:cNvSpPr/>
+          <p:nvPr/>
+        </p:nvSpPr>
+        <p:spPr>
+          <a:xfrm>
+            <a:off x="7635240" y="4498848"/>
+            <a:ext cx="3474720" cy="1143000"/>
+          </a:xfrm>
+          <a:prstGeom prst="roundRect">
+            <a:avLst>
+              <a:gd name="adj" fmla="val 9600"/>
+            </a:avLst>
+          </a:prstGeom>
+          <a:solidFill>
             <a:srgbClr val="EAF6F8"/>
           </a:solidFill>
           <a:ln w="12700">
@@ -7786,14 +8872,14 @@
       </p:sp>
       <p:sp>
         <p:nvSpPr>
-          <p:cNvPr id="16" name="Text 14"/>
-          <p:cNvSpPr/>
-          <p:nvPr/>
-        </p:nvSpPr>
-        <p:spPr>
-          <a:xfrm>
-            <a:off x="8074152" y="3666744"/>
-            <a:ext cx="2825496" cy="256032"/>
+          <p:cNvPr id="21" name="Text 19"/>
+          <p:cNvSpPr/>
+          <p:nvPr/>
+        </p:nvSpPr>
+        <p:spPr>
+          <a:xfrm>
+            <a:off x="7799832" y="4645152"/>
+            <a:ext cx="3145536" cy="256032"/>
           </a:xfrm>
           <a:prstGeom prst="rect">
             <a:avLst/>
@@ -7817,7 +8903,7 @@
                 <a:ea typeface="Aptos" pitchFamily="34" charset="-122"/>
                 <a:cs typeface="Aptos" pitchFamily="34" charset="-120"/>
               </a:rPr>
-              <a:t>Use this for</a:t>
+              <a:t>How to validate</a:t>
             </a:r>
             <a:endParaRPr lang="en-US" sz="1300" dirty="0"/>
           </a:p>
@@ -7825,14 +8911,14 @@
       </p:sp>
       <p:sp>
         <p:nvSpPr>
-          <p:cNvPr id="17" name="Text 15"/>
-          <p:cNvSpPr/>
-          <p:nvPr/>
-        </p:nvSpPr>
-        <p:spPr>
-          <a:xfrm>
-            <a:off x="8074152" y="4023360"/>
-            <a:ext cx="2825496" cy="1097280"/>
+          <p:cNvPr id="22" name="Text 20"/>
+          <p:cNvSpPr/>
+          <p:nvPr/>
+        </p:nvSpPr>
+        <p:spPr>
+          <a:xfrm>
+            <a:off x="7799832" y="5001768"/>
+            <a:ext cx="3145536" cy="502920"/>
           </a:xfrm>
           <a:prstGeom prst="rect">
             <a:avLst/>
@@ -7858,7 +8944,7 @@
                 <a:ea typeface="Aptos" pitchFamily="34" charset="-122"/>
                 <a:cs typeface="Aptos" pitchFamily="34" charset="-120"/>
               </a:rPr>
-              <a:t>Connect the concept to public health decisions, safeguards, documentation, or implementation work.</a:t>
+              <a:t>Use the assignment to test whether you can explain the concept, apply it to a realistic public health situation, and identify what would need review before the work moves forward.</a:t>
             </a:r>
             <a:endParaRPr lang="en-US" sz="1550" dirty="0"/>
           </a:p>
@@ -8032,8 +9118,8 @@
         </p:nvSpPr>
         <p:spPr>
           <a:xfrm>
-            <a:off x="9966960" y="6537960"/>
-            <a:ext cx="1645920" cy="201168"/>
+            <a:off x="9646920" y="6537960"/>
+            <a:ext cx="1965960" cy="201168"/>
           </a:xfrm>
           <a:prstGeom prst="rect">
             <a:avLst/>
@@ -8057,7 +9143,7 @@
                 <a:ea typeface="Aptos" pitchFamily="34" charset="-122"/>
                 <a:cs typeface="Aptos" pitchFamily="34" charset="-120"/>
               </a:rPr>
-              <a:t>Â© Paula Soper</a:t>
+              <a:t>Copyright Paula Soper</a:t>
             </a:r>
             <a:endParaRPr lang="en-US" sz="800" dirty="0"/>
           </a:p>
@@ -8104,77 +9190,13 @@
       </p:sp>
       <p:sp>
         <p:nvSpPr>
-          <p:cNvPr id="8" name="Shape 6"/>
+          <p:cNvPr id="8" name="Text 6"/>
           <p:cNvSpPr/>
           <p:nvPr/>
         </p:nvSpPr>
         <p:spPr>
           <a:xfrm>
             <a:off x="640080" y="658368"/>
-            <a:ext cx="420624" cy="420624"/>
-          </a:xfrm>
-          <a:prstGeom prst="ellipse">
-            <a:avLst/>
-          </a:prstGeom>
-          <a:solidFill>
-            <a:srgbClr val="0068B7"/>
-          </a:solidFill>
-          <a:ln w="12700">
-            <a:solidFill>
-              <a:srgbClr val="0068B7"/>
-            </a:solidFill>
-            <a:prstDash val="solid"/>
-          </a:ln>
-        </p:spPr>
-      </p:sp>
-      <p:sp>
-        <p:nvSpPr>
-          <p:cNvPr id="9" name="Text 7"/>
-          <p:cNvSpPr/>
-          <p:nvPr/>
-        </p:nvSpPr>
-        <p:spPr>
-          <a:xfrm>
-            <a:off x="640080" y="731520"/>
-            <a:ext cx="420624" cy="164592"/>
-          </a:xfrm>
-          <a:prstGeom prst="rect">
-            <a:avLst/>
-          </a:prstGeom>
-          <a:noFill/>
-          <a:ln/>
-        </p:spPr>
-        <p:txBody>
-          <a:bodyPr wrap="square" lIns="0" tIns="0" rIns="0" bIns="0" rtlCol="0" anchor="ctr"/>
-          <a:lstStyle/>
-          <a:p>
-            <a:pPr algn="ctr" indent="0" marL="0">
-              <a:buNone/>
-            </a:pPr>
-            <a:r>
-              <a:rPr lang="en-US" sz="1100" b="1" dirty="0">
-                <a:solidFill>
-                  <a:srgbClr val="FFFFFF"/>
-                </a:solidFill>
-                <a:latin typeface="Aptos" pitchFamily="34" charset="0"/>
-                <a:ea typeface="Aptos" pitchFamily="34" charset="-122"/>
-                <a:cs typeface="Aptos" pitchFamily="34" charset="-120"/>
-              </a:rPr>
-              <a:t>11</a:t>
-            </a:r>
-            <a:endParaRPr lang="en-US" sz="1100" dirty="0"/>
-          </a:p>
-        </p:txBody>
-      </p:sp>
-      <p:sp>
-        <p:nvSpPr>
-          <p:cNvPr id="10" name="Text 8"/>
-          <p:cNvSpPr/>
-          <p:nvPr/>
-        </p:nvSpPr>
-        <p:spPr>
-          <a:xfrm>
-            <a:off x="640080" y="621792"/>
             <a:ext cx="10881360" cy="713232"/>
           </a:xfrm>
           <a:prstGeom prst="rect">
@@ -8209,14 +9231,14 @@
       </p:sp>
       <p:sp>
         <p:nvSpPr>
-          <p:cNvPr id="11" name="Text 9"/>
+          <p:cNvPr id="9" name="Text 7"/>
           <p:cNvSpPr/>
           <p:nvPr/>
         </p:nvSpPr>
         <p:spPr>
           <a:xfrm>
             <a:off x="868680" y="1508760"/>
-            <a:ext cx="6537960" cy="4160520"/>
+            <a:ext cx="6309360" cy="4160520"/>
           </a:xfrm>
           <a:prstGeom prst="rect">
             <a:avLst/>
@@ -8275,18 +9297,18 @@
       </p:sp>
       <p:sp>
         <p:nvSpPr>
-          <p:cNvPr id="12" name="Shape 10"/>
-          <p:cNvSpPr/>
-          <p:nvPr/>
-        </p:nvSpPr>
-        <p:spPr>
-          <a:xfrm>
-            <a:off x="7909560" y="1417320"/>
-            <a:ext cx="3154680" cy="1828800"/>
+          <p:cNvPr id="10" name="Shape 8"/>
+          <p:cNvSpPr/>
+          <p:nvPr/>
+        </p:nvSpPr>
+        <p:spPr>
+          <a:xfrm>
+            <a:off x="7635240" y="1325880"/>
+            <a:ext cx="3474720" cy="1325880"/>
           </a:xfrm>
           <a:prstGeom prst="roundRect">
             <a:avLst>
-              <a:gd name="adj" fmla="val 6000"/>
+              <a:gd name="adj" fmla="val 8276"/>
             </a:avLst>
           </a:prstGeom>
           <a:solidFill>
@@ -8302,14 +9324,14 @@
       </p:sp>
       <p:sp>
         <p:nvSpPr>
-          <p:cNvPr id="13" name="Text 11"/>
-          <p:cNvSpPr/>
-          <p:nvPr/>
-        </p:nvSpPr>
-        <p:spPr>
-          <a:xfrm>
-            <a:off x="8074152" y="1563624"/>
-            <a:ext cx="2825496" cy="256032"/>
+          <p:cNvPr id="11" name="Text 9"/>
+          <p:cNvSpPr/>
+          <p:nvPr/>
+        </p:nvSpPr>
+        <p:spPr>
+          <a:xfrm>
+            <a:off x="7799832" y="1472184"/>
+            <a:ext cx="3145536" cy="256032"/>
           </a:xfrm>
           <a:prstGeom prst="rect">
             <a:avLst/>
@@ -8333,7 +9355,7 @@
                 <a:ea typeface="Aptos" pitchFamily="34" charset="-122"/>
                 <a:cs typeface="Aptos" pitchFamily="34" charset="-120"/>
               </a:rPr>
-              <a:t>Key idea</a:t>
+              <a:t>Data decision</a:t>
             </a:r>
             <a:endParaRPr lang="en-US" sz="1300" dirty="0"/>
           </a:p>
@@ -8341,14 +9363,14 @@
       </p:sp>
       <p:sp>
         <p:nvSpPr>
-          <p:cNvPr id="14" name="Text 12"/>
-          <p:cNvSpPr/>
-          <p:nvPr/>
-        </p:nvSpPr>
-        <p:spPr>
-          <a:xfrm>
-            <a:off x="8074152" y="1920240"/>
-            <a:ext cx="2825496" cy="1188720"/>
+          <p:cNvPr id="12" name="Text 10"/>
+          <p:cNvSpPr/>
+          <p:nvPr/>
+        </p:nvSpPr>
+        <p:spPr>
+          <a:xfrm>
+            <a:off x="7799832" y="1828800"/>
+            <a:ext cx="3145536" cy="685800"/>
           </a:xfrm>
           <a:prstGeom prst="rect">
             <a:avLst/>
@@ -8382,21 +9404,212 @@
       </p:sp>
       <p:sp>
         <p:nvSpPr>
-          <p:cNvPr id="15" name="Shape 13"/>
-          <p:cNvSpPr/>
-          <p:nvPr/>
-        </p:nvSpPr>
-        <p:spPr>
-          <a:xfrm>
-            <a:off x="7909560" y="3520440"/>
-            <a:ext cx="3154680" cy="1737360"/>
+          <p:cNvPr id="13" name="Shape 11"/>
+          <p:cNvSpPr/>
+          <p:nvPr/>
+        </p:nvSpPr>
+        <p:spPr>
+          <a:xfrm>
+            <a:off x="7635240" y="2788920"/>
+            <a:ext cx="3474720" cy="1536192"/>
           </a:xfrm>
           <a:prstGeom prst="roundRect">
             <a:avLst>
-              <a:gd name="adj" fmla="val 6316"/>
+              <a:gd name="adj" fmla="val 7143"/>
             </a:avLst>
           </a:prstGeom>
           <a:solidFill>
+            <a:srgbClr val="FFFFFF">
+              <a:alpha val="88000"/>
+            </a:srgbClr>
+          </a:solidFill>
+          <a:ln w="12700">
+            <a:solidFill>
+              <a:srgbClr val="D6E8F2"/>
+            </a:solidFill>
+            <a:prstDash val="solid"/>
+          </a:ln>
+        </p:spPr>
+      </p:sp>
+      <p:sp>
+        <p:nvSpPr>
+          <p:cNvPr id="14" name="Shape 12"/>
+          <p:cNvSpPr/>
+          <p:nvPr/>
+        </p:nvSpPr>
+        <p:spPr>
+          <a:xfrm>
+            <a:off x="8138160" y="3474720"/>
+            <a:ext cx="256032" cy="411480"/>
+          </a:xfrm>
+          <a:prstGeom prst="rect">
+            <a:avLst/>
+          </a:prstGeom>
+          <a:solidFill>
+            <a:srgbClr val="0068B7"/>
+          </a:solidFill>
+          <a:ln w="12700">
+            <a:solidFill>
+              <a:srgbClr val="0068B7"/>
+            </a:solidFill>
+            <a:prstDash val="solid"/>
+          </a:ln>
+        </p:spPr>
+      </p:sp>
+      <p:sp>
+        <p:nvSpPr>
+          <p:cNvPr id="15" name="Shape 13"/>
+          <p:cNvSpPr/>
+          <p:nvPr/>
+        </p:nvSpPr>
+        <p:spPr>
+          <a:xfrm>
+            <a:off x="8577072" y="3172968"/>
+            <a:ext cx="256032" cy="713232"/>
+          </a:xfrm>
+          <a:prstGeom prst="rect">
+            <a:avLst/>
+          </a:prstGeom>
+          <a:solidFill>
+            <a:srgbClr val="2F8A28"/>
+          </a:solidFill>
+          <a:ln w="12700">
+            <a:solidFill>
+              <a:srgbClr val="2F8A28"/>
+            </a:solidFill>
+            <a:prstDash val="solid"/>
+          </a:ln>
+        </p:spPr>
+      </p:sp>
+      <p:sp>
+        <p:nvSpPr>
+          <p:cNvPr id="16" name="Shape 14"/>
+          <p:cNvSpPr/>
+          <p:nvPr/>
+        </p:nvSpPr>
+        <p:spPr>
+          <a:xfrm>
+            <a:off x="9015984" y="2880360"/>
+            <a:ext cx="256032" cy="1005840"/>
+          </a:xfrm>
+          <a:prstGeom prst="rect">
+            <a:avLst/>
+          </a:prstGeom>
+          <a:solidFill>
+            <a:srgbClr val="D69A2D"/>
+          </a:solidFill>
+          <a:ln w="12700">
+            <a:solidFill>
+              <a:srgbClr val="D69A2D"/>
+            </a:solidFill>
+            <a:prstDash val="solid"/>
+          </a:ln>
+        </p:spPr>
+      </p:sp>
+      <p:sp>
+        <p:nvSpPr>
+          <p:cNvPr id="17" name="Shape 15"/>
+          <p:cNvSpPr/>
+          <p:nvPr/>
+        </p:nvSpPr>
+        <p:spPr>
+          <a:xfrm>
+            <a:off x="9454896" y="3319272"/>
+            <a:ext cx="256032" cy="566928"/>
+          </a:xfrm>
+          <a:prstGeom prst="rect">
+            <a:avLst/>
+          </a:prstGeom>
+          <a:solidFill>
+            <a:srgbClr val="6A4CA3"/>
+          </a:solidFill>
+          <a:ln w="12700">
+            <a:solidFill>
+              <a:srgbClr val="6A4CA3"/>
+            </a:solidFill>
+            <a:prstDash val="solid"/>
+          </a:ln>
+        </p:spPr>
+      </p:sp>
+      <p:sp>
+        <p:nvSpPr>
+          <p:cNvPr id="18" name="Shape 16"/>
+          <p:cNvSpPr/>
+          <p:nvPr/>
+        </p:nvSpPr>
+        <p:spPr>
+          <a:xfrm>
+            <a:off x="8019288" y="3886200"/>
+            <a:ext cx="2706624" cy="0"/>
+          </a:xfrm>
+          <a:prstGeom prst="line">
+            <a:avLst/>
+          </a:prstGeom>
+          <a:noFill/>
+          <a:ln w="15240">
+            <a:solidFill>
+              <a:srgbClr val="003A63"/>
+            </a:solidFill>
+            <a:prstDash val="solid"/>
+          </a:ln>
+        </p:spPr>
+      </p:sp>
+      <p:sp>
+        <p:nvSpPr>
+          <p:cNvPr id="19" name="Text 17"/>
+          <p:cNvSpPr/>
+          <p:nvPr/>
+        </p:nvSpPr>
+        <p:spPr>
+          <a:xfrm>
+            <a:off x="7863840" y="3017520"/>
+            <a:ext cx="3017520" cy="201168"/>
+          </a:xfrm>
+          <a:prstGeom prst="rect">
+            <a:avLst/>
+          </a:prstGeom>
+          <a:noFill/>
+          <a:ln/>
+        </p:spPr>
+        <p:txBody>
+          <a:bodyPr wrap="square" lIns="0" tIns="0" rIns="0" bIns="0" rtlCol="0" anchor="ctr"/>
+          <a:lstStyle/>
+          <a:p>
+            <a:pPr algn="ctr" indent="0" marL="0">
+              <a:buNone/>
+            </a:pPr>
+            <a:r>
+              <a:rPr lang="en-US" sz="1050" b="1" dirty="0">
+                <a:solidFill>
+                  <a:srgbClr val="003A63"/>
+                </a:solidFill>
+                <a:latin typeface="Aptos" pitchFamily="34" charset="0"/>
+                <a:ea typeface="Aptos" pitchFamily="34" charset="-122"/>
+                <a:cs typeface="Aptos" pitchFamily="34" charset="-120"/>
+              </a:rPr>
+              <a:t>Measure and monitor</a:t>
+            </a:r>
+            <a:endParaRPr lang="en-US" sz="1050" dirty="0"/>
+          </a:p>
+        </p:txBody>
+      </p:sp>
+      <p:sp>
+        <p:nvSpPr>
+          <p:cNvPr id="20" name="Shape 18"/>
+          <p:cNvSpPr/>
+          <p:nvPr/>
+        </p:nvSpPr>
+        <p:spPr>
+          <a:xfrm>
+            <a:off x="7635240" y="4498848"/>
+            <a:ext cx="3474720" cy="1143000"/>
+          </a:xfrm>
+          <a:prstGeom prst="roundRect">
+            <a:avLst>
+              <a:gd name="adj" fmla="val 9600"/>
+            </a:avLst>
+          </a:prstGeom>
+          <a:solidFill>
             <a:srgbClr val="EAF6F8"/>
           </a:solidFill>
           <a:ln w="12700">
@@ -8409,14 +9622,14 @@
       </p:sp>
       <p:sp>
         <p:nvSpPr>
-          <p:cNvPr id="16" name="Text 14"/>
-          <p:cNvSpPr/>
-          <p:nvPr/>
-        </p:nvSpPr>
-        <p:spPr>
-          <a:xfrm>
-            <a:off x="8074152" y="3666744"/>
-            <a:ext cx="2825496" cy="256032"/>
+          <p:cNvPr id="21" name="Text 19"/>
+          <p:cNvSpPr/>
+          <p:nvPr/>
+        </p:nvSpPr>
+        <p:spPr>
+          <a:xfrm>
+            <a:off x="7799832" y="4645152"/>
+            <a:ext cx="3145536" cy="256032"/>
           </a:xfrm>
           <a:prstGeom prst="rect">
             <a:avLst/>
@@ -8440,7 +9653,7 @@
                 <a:ea typeface="Aptos" pitchFamily="34" charset="-122"/>
                 <a:cs typeface="Aptos" pitchFamily="34" charset="-120"/>
               </a:rPr>
-              <a:t>Use this for</a:t>
+              <a:t>How to validate</a:t>
             </a:r>
             <a:endParaRPr lang="en-US" sz="1300" dirty="0"/>
           </a:p>
@@ -8448,14 +9661,14 @@
       </p:sp>
       <p:sp>
         <p:nvSpPr>
-          <p:cNvPr id="17" name="Text 15"/>
-          <p:cNvSpPr/>
-          <p:nvPr/>
-        </p:nvSpPr>
-        <p:spPr>
-          <a:xfrm>
-            <a:off x="8074152" y="4023360"/>
-            <a:ext cx="2825496" cy="1097280"/>
+          <p:cNvPr id="22" name="Text 20"/>
+          <p:cNvSpPr/>
+          <p:nvPr/>
+        </p:nvSpPr>
+        <p:spPr>
+          <a:xfrm>
+            <a:off x="7799832" y="5001768"/>
+            <a:ext cx="3145536" cy="502920"/>
           </a:xfrm>
           <a:prstGeom prst="rect">
             <a:avLst/>
@@ -8481,7 +9694,7 @@
                 <a:ea typeface="Aptos" pitchFamily="34" charset="-122"/>
                 <a:cs typeface="Aptos" pitchFamily="34" charset="-120"/>
               </a:rPr>
-              <a:t>Connect the concept to public health decisions, safeguards, documentation, or implementation work.</a:t>
+              <a:t>Connect the concept to data quality, model performance, validation evidence, monitoring measures, and decisions that remain under human control.</a:t>
             </a:r>
             <a:endParaRPr lang="en-US" sz="1550" dirty="0"/>
           </a:p>
@@ -8655,8 +9868,8 @@
         </p:nvSpPr>
         <p:spPr>
           <a:xfrm>
-            <a:off x="9966960" y="6537960"/>
-            <a:ext cx="1645920" cy="201168"/>
+            <a:off x="9646920" y="6537960"/>
+            <a:ext cx="1965960" cy="201168"/>
           </a:xfrm>
           <a:prstGeom prst="rect">
             <a:avLst/>
@@ -8680,7 +9893,7 @@
                 <a:ea typeface="Aptos" pitchFamily="34" charset="-122"/>
                 <a:cs typeface="Aptos" pitchFamily="34" charset="-120"/>
               </a:rPr>
-              <a:t>Â© Paula Soper</a:t>
+              <a:t>Copyright Paula Soper</a:t>
             </a:r>
             <a:endParaRPr lang="en-US" sz="800" dirty="0"/>
           </a:p>
@@ -8775,7 +9988,7 @@
         <p:spPr>
           <a:xfrm>
             <a:off x="868680" y="1508760"/>
-            <a:ext cx="6537960" cy="4160520"/>
+            <a:ext cx="6309360" cy="4160520"/>
           </a:xfrm>
           <a:prstGeom prst="rect">
             <a:avLst/>
@@ -8812,12 +10025,12 @@
         </p:nvSpPr>
         <p:spPr>
           <a:xfrm>
-            <a:off x="7909560" y="1417320"/>
-            <a:ext cx="3154680" cy="1828800"/>
+            <a:off x="7635240" y="1325880"/>
+            <a:ext cx="3474720" cy="1325880"/>
           </a:xfrm>
           <a:prstGeom prst="roundRect">
             <a:avLst>
-              <a:gd name="adj" fmla="val 6000"/>
+              <a:gd name="adj" fmla="val 8276"/>
             </a:avLst>
           </a:prstGeom>
           <a:solidFill>
@@ -8839,8 +10052,8 @@
         </p:nvSpPr>
         <p:spPr>
           <a:xfrm>
-            <a:off x="8074152" y="1563624"/>
-            <a:ext cx="2825496" cy="256032"/>
+            <a:off x="7799832" y="1472184"/>
+            <a:ext cx="3145536" cy="256032"/>
           </a:xfrm>
           <a:prstGeom prst="rect">
             <a:avLst/>
@@ -8864,7 +10077,7 @@
                 <a:ea typeface="Aptos" pitchFamily="34" charset="-122"/>
                 <a:cs typeface="Aptos" pitchFamily="34" charset="-120"/>
               </a:rPr>
-              <a:t>Key idea</a:t>
+              <a:t>Data decision</a:t>
             </a:r>
             <a:endParaRPr lang="en-US" sz="1300" dirty="0"/>
           </a:p>
@@ -8878,8 +10091,8 @@
         </p:nvSpPr>
         <p:spPr>
           <a:xfrm>
-            <a:off x="8074152" y="1920240"/>
-            <a:ext cx="2825496" cy="1188720"/>
+            <a:off x="7799832" y="1828800"/>
+            <a:ext cx="3145536" cy="685800"/>
           </a:xfrm>
           <a:prstGeom prst="rect">
             <a:avLst/>
@@ -8919,15 +10132,206 @@
         </p:nvSpPr>
         <p:spPr>
           <a:xfrm>
-            <a:off x="7909560" y="3520440"/>
-            <a:ext cx="3154680" cy="1737360"/>
+            <a:off x="7635240" y="2788920"/>
+            <a:ext cx="3474720" cy="1536192"/>
           </a:xfrm>
           <a:prstGeom prst="roundRect">
             <a:avLst>
-              <a:gd name="adj" fmla="val 6316"/>
+              <a:gd name="adj" fmla="val 7143"/>
             </a:avLst>
           </a:prstGeom>
           <a:solidFill>
+            <a:srgbClr val="FFFFFF">
+              <a:alpha val="88000"/>
+            </a:srgbClr>
+          </a:solidFill>
+          <a:ln w="12700">
+            <a:solidFill>
+              <a:srgbClr val="D6E8F2"/>
+            </a:solidFill>
+            <a:prstDash val="solid"/>
+          </a:ln>
+        </p:spPr>
+      </p:sp>
+      <p:sp>
+        <p:nvSpPr>
+          <p:cNvPr id="14" name="Shape 12"/>
+          <p:cNvSpPr/>
+          <p:nvPr/>
+        </p:nvSpPr>
+        <p:spPr>
+          <a:xfrm>
+            <a:off x="8138160" y="3474720"/>
+            <a:ext cx="256032" cy="411480"/>
+          </a:xfrm>
+          <a:prstGeom prst="rect">
+            <a:avLst/>
+          </a:prstGeom>
+          <a:solidFill>
+            <a:srgbClr val="0068B7"/>
+          </a:solidFill>
+          <a:ln w="12700">
+            <a:solidFill>
+              <a:srgbClr val="0068B7"/>
+            </a:solidFill>
+            <a:prstDash val="solid"/>
+          </a:ln>
+        </p:spPr>
+      </p:sp>
+      <p:sp>
+        <p:nvSpPr>
+          <p:cNvPr id="15" name="Shape 13"/>
+          <p:cNvSpPr/>
+          <p:nvPr/>
+        </p:nvSpPr>
+        <p:spPr>
+          <a:xfrm>
+            <a:off x="8577072" y="3172968"/>
+            <a:ext cx="256032" cy="713232"/>
+          </a:xfrm>
+          <a:prstGeom prst="rect">
+            <a:avLst/>
+          </a:prstGeom>
+          <a:solidFill>
+            <a:srgbClr val="2F8A28"/>
+          </a:solidFill>
+          <a:ln w="12700">
+            <a:solidFill>
+              <a:srgbClr val="2F8A28"/>
+            </a:solidFill>
+            <a:prstDash val="solid"/>
+          </a:ln>
+        </p:spPr>
+      </p:sp>
+      <p:sp>
+        <p:nvSpPr>
+          <p:cNvPr id="16" name="Shape 14"/>
+          <p:cNvSpPr/>
+          <p:nvPr/>
+        </p:nvSpPr>
+        <p:spPr>
+          <a:xfrm>
+            <a:off x="9015984" y="2880360"/>
+            <a:ext cx="256032" cy="1005840"/>
+          </a:xfrm>
+          <a:prstGeom prst="rect">
+            <a:avLst/>
+          </a:prstGeom>
+          <a:solidFill>
+            <a:srgbClr val="D69A2D"/>
+          </a:solidFill>
+          <a:ln w="12700">
+            <a:solidFill>
+              <a:srgbClr val="D69A2D"/>
+            </a:solidFill>
+            <a:prstDash val="solid"/>
+          </a:ln>
+        </p:spPr>
+      </p:sp>
+      <p:sp>
+        <p:nvSpPr>
+          <p:cNvPr id="17" name="Shape 15"/>
+          <p:cNvSpPr/>
+          <p:nvPr/>
+        </p:nvSpPr>
+        <p:spPr>
+          <a:xfrm>
+            <a:off x="9454896" y="3319272"/>
+            <a:ext cx="256032" cy="566928"/>
+          </a:xfrm>
+          <a:prstGeom prst="rect">
+            <a:avLst/>
+          </a:prstGeom>
+          <a:solidFill>
+            <a:srgbClr val="6A4CA3"/>
+          </a:solidFill>
+          <a:ln w="12700">
+            <a:solidFill>
+              <a:srgbClr val="6A4CA3"/>
+            </a:solidFill>
+            <a:prstDash val="solid"/>
+          </a:ln>
+        </p:spPr>
+      </p:sp>
+      <p:sp>
+        <p:nvSpPr>
+          <p:cNvPr id="18" name="Shape 16"/>
+          <p:cNvSpPr/>
+          <p:nvPr/>
+        </p:nvSpPr>
+        <p:spPr>
+          <a:xfrm>
+            <a:off x="8019288" y="3886200"/>
+            <a:ext cx="2706624" cy="0"/>
+          </a:xfrm>
+          <a:prstGeom prst="line">
+            <a:avLst/>
+          </a:prstGeom>
+          <a:noFill/>
+          <a:ln w="15240">
+            <a:solidFill>
+              <a:srgbClr val="003A63"/>
+            </a:solidFill>
+            <a:prstDash val="solid"/>
+          </a:ln>
+        </p:spPr>
+      </p:sp>
+      <p:sp>
+        <p:nvSpPr>
+          <p:cNvPr id="19" name="Text 17"/>
+          <p:cNvSpPr/>
+          <p:nvPr/>
+        </p:nvSpPr>
+        <p:spPr>
+          <a:xfrm>
+            <a:off x="7863840" y="3017520"/>
+            <a:ext cx="3017520" cy="201168"/>
+          </a:xfrm>
+          <a:prstGeom prst="rect">
+            <a:avLst/>
+          </a:prstGeom>
+          <a:noFill/>
+          <a:ln/>
+        </p:spPr>
+        <p:txBody>
+          <a:bodyPr wrap="square" lIns="0" tIns="0" rIns="0" bIns="0" rtlCol="0" anchor="ctr"/>
+          <a:lstStyle/>
+          <a:p>
+            <a:pPr algn="ctr" indent="0" marL="0">
+              <a:buNone/>
+            </a:pPr>
+            <a:r>
+              <a:rPr lang="en-US" sz="1050" b="1" dirty="0">
+                <a:solidFill>
+                  <a:srgbClr val="003A63"/>
+                </a:solidFill>
+                <a:latin typeface="Aptos" pitchFamily="34" charset="0"/>
+                <a:ea typeface="Aptos" pitchFamily="34" charset="-122"/>
+                <a:cs typeface="Aptos" pitchFamily="34" charset="-120"/>
+              </a:rPr>
+              <a:t>Measure and monitor</a:t>
+            </a:r>
+            <a:endParaRPr lang="en-US" sz="1050" dirty="0"/>
+          </a:p>
+        </p:txBody>
+      </p:sp>
+      <p:sp>
+        <p:nvSpPr>
+          <p:cNvPr id="20" name="Shape 18"/>
+          <p:cNvSpPr/>
+          <p:nvPr/>
+        </p:nvSpPr>
+        <p:spPr>
+          <a:xfrm>
+            <a:off x="7635240" y="4498848"/>
+            <a:ext cx="3474720" cy="1143000"/>
+          </a:xfrm>
+          <a:prstGeom prst="roundRect">
+            <a:avLst>
+              <a:gd name="adj" fmla="val 9600"/>
+            </a:avLst>
+          </a:prstGeom>
+          <a:solidFill>
             <a:srgbClr val="EAF6F8"/>
           </a:solidFill>
           <a:ln w="12700">
@@ -8940,14 +10344,14 @@
       </p:sp>
       <p:sp>
         <p:nvSpPr>
-          <p:cNvPr id="14" name="Text 12"/>
-          <p:cNvSpPr/>
-          <p:nvPr/>
-        </p:nvSpPr>
-        <p:spPr>
-          <a:xfrm>
-            <a:off x="8074152" y="3666744"/>
-            <a:ext cx="2825496" cy="256032"/>
+          <p:cNvPr id="21" name="Text 19"/>
+          <p:cNvSpPr/>
+          <p:nvPr/>
+        </p:nvSpPr>
+        <p:spPr>
+          <a:xfrm>
+            <a:off x="7799832" y="4645152"/>
+            <a:ext cx="3145536" cy="256032"/>
           </a:xfrm>
           <a:prstGeom prst="rect">
             <a:avLst/>
@@ -8971,7 +10375,7 @@
                 <a:ea typeface="Aptos" pitchFamily="34" charset="-122"/>
                 <a:cs typeface="Aptos" pitchFamily="34" charset="-120"/>
               </a:rPr>
-              <a:t>Use this for</a:t>
+              <a:t>How to validate</a:t>
             </a:r>
             <a:endParaRPr lang="en-US" sz="1300" dirty="0"/>
           </a:p>
@@ -8979,14 +10383,14 @@
       </p:sp>
       <p:sp>
         <p:nvSpPr>
-          <p:cNvPr id="15" name="Text 13"/>
-          <p:cNvSpPr/>
-          <p:nvPr/>
-        </p:nvSpPr>
-        <p:spPr>
-          <a:xfrm>
-            <a:off x="8074152" y="4023360"/>
-            <a:ext cx="2825496" cy="1097280"/>
+          <p:cNvPr id="22" name="Text 20"/>
+          <p:cNvSpPr/>
+          <p:nvPr/>
+        </p:nvSpPr>
+        <p:spPr>
+          <a:xfrm>
+            <a:off x="7799832" y="5001768"/>
+            <a:ext cx="3145536" cy="502920"/>
           </a:xfrm>
           <a:prstGeom prst="rect">
             <a:avLst/>
@@ -9012,7 +10416,7 @@
                 <a:ea typeface="Aptos" pitchFamily="34" charset="-122"/>
                 <a:cs typeface="Aptos" pitchFamily="34" charset="-120"/>
               </a:rPr>
-              <a:t>Connect the concept to public health decisions, safeguards, documentation, or implementation work.</a:t>
+              <a:t>Connect the concept to data quality, model performance, validation evidence, monitoring measures, and decisions that remain under human control.</a:t>
             </a:r>
             <a:endParaRPr lang="en-US" sz="1550" dirty="0"/>
           </a:p>
@@ -9186,8 +10590,8 @@
         </p:nvSpPr>
         <p:spPr>
           <a:xfrm>
-            <a:off x="9966960" y="6537960"/>
-            <a:ext cx="1645920" cy="201168"/>
+            <a:off x="9646920" y="6537960"/>
+            <a:ext cx="1965960" cy="201168"/>
           </a:xfrm>
           <a:prstGeom prst="rect">
             <a:avLst/>
@@ -9211,7 +10615,7 @@
                 <a:ea typeface="Aptos" pitchFamily="34" charset="-122"/>
                 <a:cs typeface="Aptos" pitchFamily="34" charset="-120"/>
               </a:rPr>
-              <a:t>Â© Paula Soper</a:t>
+              <a:t>Copyright Paula Soper</a:t>
             </a:r>
             <a:endParaRPr lang="en-US" sz="800" dirty="0"/>
           </a:p>
@@ -9574,46 +10978,7 @@
       </p:sp>
       <p:sp>
         <p:nvSpPr>
-          <p:cNvPr id="15" name="Text 13"/>
-          <p:cNvSpPr/>
-          <p:nvPr/>
-        </p:nvSpPr>
-        <p:spPr>
-          <a:xfrm>
-            <a:off x="8695944" y="3941064"/>
-            <a:ext cx="201168" cy="256032"/>
-          </a:xfrm>
-          <a:prstGeom prst="rect">
-            <a:avLst/>
-          </a:prstGeom>
-          <a:noFill/>
-          <a:ln/>
-        </p:spPr>
-        <p:txBody>
-          <a:bodyPr wrap="square" lIns="0" tIns="0" rIns="0" bIns="0" rtlCol="0" anchor="ctr"/>
-          <a:lstStyle/>
-          <a:p>
-            <a:pPr algn="ctr" indent="0" marL="0">
-              <a:buNone/>
-            </a:pPr>
-            <a:r>
-              <a:rPr lang="en-US" sz="1800" b="1" dirty="0">
-                <a:solidFill>
-                  <a:srgbClr val="0068B7"/>
-                </a:solidFill>
-                <a:latin typeface="Aptos" pitchFamily="34" charset="0"/>
-                <a:ea typeface="Aptos" pitchFamily="34" charset="-122"/>
-                <a:cs typeface="Aptos" pitchFamily="34" charset="-120"/>
-              </a:rPr>
-              <a:t>â†’</a:t>
-            </a:r>
-            <a:endParaRPr lang="en-US" sz="1800" dirty="0"/>
-          </a:p>
-        </p:txBody>
-      </p:sp>
-      <p:sp>
-        <p:nvSpPr>
-          <p:cNvPr id="16" name="Shape 14"/>
+          <p:cNvPr id="15" name="Shape 13"/>
           <p:cNvSpPr/>
           <p:nvPr/>
         </p:nvSpPr>
@@ -9640,7 +11005,7 @@
       </p:sp>
       <p:sp>
         <p:nvSpPr>
-          <p:cNvPr id="17" name="Text 15"/>
+          <p:cNvPr id="16" name="Text 14"/>
           <p:cNvSpPr/>
           <p:nvPr/>
         </p:nvSpPr>
@@ -9681,46 +11046,7 @@
       </p:sp>
       <p:sp>
         <p:nvSpPr>
-          <p:cNvPr id="18" name="Text 16"/>
-          <p:cNvSpPr/>
-          <p:nvPr/>
-        </p:nvSpPr>
-        <p:spPr>
-          <a:xfrm>
-            <a:off x="9985248" y="3941064"/>
-            <a:ext cx="201168" cy="256032"/>
-          </a:xfrm>
-          <a:prstGeom prst="rect">
-            <a:avLst/>
-          </a:prstGeom>
-          <a:noFill/>
-          <a:ln/>
-        </p:spPr>
-        <p:txBody>
-          <a:bodyPr wrap="square" lIns="0" tIns="0" rIns="0" bIns="0" rtlCol="0" anchor="ctr"/>
-          <a:lstStyle/>
-          <a:p>
-            <a:pPr algn="ctr" indent="0" marL="0">
-              <a:buNone/>
-            </a:pPr>
-            <a:r>
-              <a:rPr lang="en-US" sz="1800" b="1" dirty="0">
-                <a:solidFill>
-                  <a:srgbClr val="0068B7"/>
-                </a:solidFill>
-                <a:latin typeface="Aptos" pitchFamily="34" charset="0"/>
-                <a:ea typeface="Aptos" pitchFamily="34" charset="-122"/>
-                <a:cs typeface="Aptos" pitchFamily="34" charset="-120"/>
-              </a:rPr>
-              <a:t>â†’</a:t>
-            </a:r>
-            <a:endParaRPr lang="en-US" sz="1800" dirty="0"/>
-          </a:p>
-        </p:txBody>
-      </p:sp>
-      <p:sp>
-        <p:nvSpPr>
-          <p:cNvPr id="19" name="Shape 17"/>
+          <p:cNvPr id="17" name="Shape 15"/>
           <p:cNvSpPr/>
           <p:nvPr/>
         </p:nvSpPr>
@@ -9747,7 +11073,7 @@
       </p:sp>
       <p:sp>
         <p:nvSpPr>
-          <p:cNvPr id="20" name="Text 18"/>
+          <p:cNvPr id="18" name="Text 16"/>
           <p:cNvSpPr/>
           <p:nvPr/>
         </p:nvSpPr>
@@ -9954,8 +11280,8 @@
         </p:nvSpPr>
         <p:spPr>
           <a:xfrm>
-            <a:off x="9966960" y="6537960"/>
-            <a:ext cx="1645920" cy="201168"/>
+            <a:off x="9646920" y="6537960"/>
+            <a:ext cx="1965960" cy="201168"/>
           </a:xfrm>
           <a:prstGeom prst="rect">
             <a:avLst/>
@@ -9979,7 +11305,7 @@
                 <a:ea typeface="Aptos" pitchFamily="34" charset="-122"/>
                 <a:cs typeface="Aptos" pitchFamily="34" charset="-120"/>
               </a:rPr>
-              <a:t>Â© Paula Soper</a:t>
+              <a:t>Copyright Paula Soper</a:t>
             </a:r>
             <a:endParaRPr lang="en-US" sz="800" dirty="0"/>
           </a:p>
@@ -10026,77 +11352,13 @@
       </p:sp>
       <p:sp>
         <p:nvSpPr>
-          <p:cNvPr id="8" name="Shape 6"/>
+          <p:cNvPr id="8" name="Text 6"/>
           <p:cNvSpPr/>
           <p:nvPr/>
         </p:nvSpPr>
         <p:spPr>
           <a:xfrm>
             <a:off x="640080" y="658368"/>
-            <a:ext cx="420624" cy="420624"/>
-          </a:xfrm>
-          <a:prstGeom prst="ellipse">
-            <a:avLst/>
-          </a:prstGeom>
-          <a:solidFill>
-            <a:srgbClr val="0068B7"/>
-          </a:solidFill>
-          <a:ln w="12700">
-            <a:solidFill>
-              <a:srgbClr val="0068B7"/>
-            </a:solidFill>
-            <a:prstDash val="solid"/>
-          </a:ln>
-        </p:spPr>
-      </p:sp>
-      <p:sp>
-        <p:nvSpPr>
-          <p:cNvPr id="9" name="Text 7"/>
-          <p:cNvSpPr/>
-          <p:nvPr/>
-        </p:nvSpPr>
-        <p:spPr>
-          <a:xfrm>
-            <a:off x="640080" y="731520"/>
-            <a:ext cx="420624" cy="164592"/>
-          </a:xfrm>
-          <a:prstGeom prst="rect">
-            <a:avLst/>
-          </a:prstGeom>
-          <a:noFill/>
-          <a:ln/>
-        </p:spPr>
-        <p:txBody>
-          <a:bodyPr wrap="square" lIns="0" tIns="0" rIns="0" bIns="0" rtlCol="0" anchor="ctr"/>
-          <a:lstStyle/>
-          <a:p>
-            <a:pPr algn="ctr" indent="0" marL="0">
-              <a:buNone/>
-            </a:pPr>
-            <a:r>
-              <a:rPr lang="en-US" sz="1100" b="1" dirty="0">
-                <a:solidFill>
-                  <a:srgbClr val="FFFFFF"/>
-                </a:solidFill>
-                <a:latin typeface="Aptos" pitchFamily="34" charset="0"/>
-                <a:ea typeface="Aptos" pitchFamily="34" charset="-122"/>
-                <a:cs typeface="Aptos" pitchFamily="34" charset="-120"/>
-              </a:rPr>
-              <a:t>12</a:t>
-            </a:r>
-            <a:endParaRPr lang="en-US" sz="1100" dirty="0"/>
-          </a:p>
-        </p:txBody>
-      </p:sp>
-      <p:sp>
-        <p:nvSpPr>
-          <p:cNvPr id="10" name="Text 8"/>
-          <p:cNvSpPr/>
-          <p:nvPr/>
-        </p:nvSpPr>
-        <p:spPr>
-          <a:xfrm>
-            <a:off x="640080" y="621792"/>
             <a:ext cx="10881360" cy="713232"/>
           </a:xfrm>
           <a:prstGeom prst="rect">
@@ -10131,14 +11393,14 @@
       </p:sp>
       <p:sp>
         <p:nvSpPr>
-          <p:cNvPr id="11" name="Text 9"/>
+          <p:cNvPr id="9" name="Text 7"/>
           <p:cNvSpPr/>
           <p:nvPr/>
         </p:nvSpPr>
         <p:spPr>
           <a:xfrm>
             <a:off x="868680" y="1508760"/>
-            <a:ext cx="6537960" cy="4160520"/>
+            <a:ext cx="6309360" cy="4160520"/>
           </a:xfrm>
           <a:prstGeom prst="rect">
             <a:avLst/>
@@ -10197,18 +11459,18 @@
       </p:sp>
       <p:sp>
         <p:nvSpPr>
-          <p:cNvPr id="12" name="Shape 10"/>
-          <p:cNvSpPr/>
-          <p:nvPr/>
-        </p:nvSpPr>
-        <p:spPr>
-          <a:xfrm>
-            <a:off x="7909560" y="1417320"/>
-            <a:ext cx="3154680" cy="1828800"/>
+          <p:cNvPr id="10" name="Shape 8"/>
+          <p:cNvSpPr/>
+          <p:nvPr/>
+        </p:nvSpPr>
+        <p:spPr>
+          <a:xfrm>
+            <a:off x="7635240" y="1325880"/>
+            <a:ext cx="3474720" cy="1325880"/>
           </a:xfrm>
           <a:prstGeom prst="roundRect">
             <a:avLst>
-              <a:gd name="adj" fmla="val 6000"/>
+              <a:gd name="adj" fmla="val 8276"/>
             </a:avLst>
           </a:prstGeom>
           <a:solidFill>
@@ -10224,14 +11486,14 @@
       </p:sp>
       <p:sp>
         <p:nvSpPr>
-          <p:cNvPr id="13" name="Text 11"/>
-          <p:cNvSpPr/>
-          <p:nvPr/>
-        </p:nvSpPr>
-        <p:spPr>
-          <a:xfrm>
-            <a:off x="8074152" y="1563624"/>
-            <a:ext cx="2825496" cy="256032"/>
+          <p:cNvPr id="11" name="Text 9"/>
+          <p:cNvSpPr/>
+          <p:nvPr/>
+        </p:nvSpPr>
+        <p:spPr>
+          <a:xfrm>
+            <a:off x="7799832" y="1472184"/>
+            <a:ext cx="3145536" cy="256032"/>
           </a:xfrm>
           <a:prstGeom prst="rect">
             <a:avLst/>
@@ -10255,7 +11517,7 @@
                 <a:ea typeface="Aptos" pitchFamily="34" charset="-122"/>
                 <a:cs typeface="Aptos" pitchFamily="34" charset="-120"/>
               </a:rPr>
-              <a:t>Key idea</a:t>
+              <a:t>Data decision</a:t>
             </a:r>
             <a:endParaRPr lang="en-US" sz="1300" dirty="0"/>
           </a:p>
@@ -10263,14 +11525,14 @@
       </p:sp>
       <p:sp>
         <p:nvSpPr>
-          <p:cNvPr id="14" name="Text 12"/>
-          <p:cNvSpPr/>
-          <p:nvPr/>
-        </p:nvSpPr>
-        <p:spPr>
-          <a:xfrm>
-            <a:off x="8074152" y="1920240"/>
-            <a:ext cx="2825496" cy="1188720"/>
+          <p:cNvPr id="12" name="Text 10"/>
+          <p:cNvSpPr/>
+          <p:nvPr/>
+        </p:nvSpPr>
+        <p:spPr>
+          <a:xfrm>
+            <a:off x="7799832" y="1828800"/>
+            <a:ext cx="3145536" cy="685800"/>
           </a:xfrm>
           <a:prstGeom prst="rect">
             <a:avLst/>
@@ -10304,21 +11566,212 @@
       </p:sp>
       <p:sp>
         <p:nvSpPr>
-          <p:cNvPr id="15" name="Shape 13"/>
-          <p:cNvSpPr/>
-          <p:nvPr/>
-        </p:nvSpPr>
-        <p:spPr>
-          <a:xfrm>
-            <a:off x="7909560" y="3520440"/>
-            <a:ext cx="3154680" cy="1737360"/>
+          <p:cNvPr id="13" name="Shape 11"/>
+          <p:cNvSpPr/>
+          <p:nvPr/>
+        </p:nvSpPr>
+        <p:spPr>
+          <a:xfrm>
+            <a:off x="7635240" y="2788920"/>
+            <a:ext cx="3474720" cy="1536192"/>
           </a:xfrm>
           <a:prstGeom prst="roundRect">
             <a:avLst>
-              <a:gd name="adj" fmla="val 6316"/>
+              <a:gd name="adj" fmla="val 7143"/>
             </a:avLst>
           </a:prstGeom>
           <a:solidFill>
+            <a:srgbClr val="FFFFFF">
+              <a:alpha val="88000"/>
+            </a:srgbClr>
+          </a:solidFill>
+          <a:ln w="12700">
+            <a:solidFill>
+              <a:srgbClr val="D6E8F2"/>
+            </a:solidFill>
+            <a:prstDash val="solid"/>
+          </a:ln>
+        </p:spPr>
+      </p:sp>
+      <p:sp>
+        <p:nvSpPr>
+          <p:cNvPr id="14" name="Shape 12"/>
+          <p:cNvSpPr/>
+          <p:nvPr/>
+        </p:nvSpPr>
+        <p:spPr>
+          <a:xfrm>
+            <a:off x="8138160" y="3474720"/>
+            <a:ext cx="256032" cy="411480"/>
+          </a:xfrm>
+          <a:prstGeom prst="rect">
+            <a:avLst/>
+          </a:prstGeom>
+          <a:solidFill>
+            <a:srgbClr val="0068B7"/>
+          </a:solidFill>
+          <a:ln w="12700">
+            <a:solidFill>
+              <a:srgbClr val="0068B7"/>
+            </a:solidFill>
+            <a:prstDash val="solid"/>
+          </a:ln>
+        </p:spPr>
+      </p:sp>
+      <p:sp>
+        <p:nvSpPr>
+          <p:cNvPr id="15" name="Shape 13"/>
+          <p:cNvSpPr/>
+          <p:nvPr/>
+        </p:nvSpPr>
+        <p:spPr>
+          <a:xfrm>
+            <a:off x="8577072" y="3172968"/>
+            <a:ext cx="256032" cy="713232"/>
+          </a:xfrm>
+          <a:prstGeom prst="rect">
+            <a:avLst/>
+          </a:prstGeom>
+          <a:solidFill>
+            <a:srgbClr val="2F8A28"/>
+          </a:solidFill>
+          <a:ln w="12700">
+            <a:solidFill>
+              <a:srgbClr val="2F8A28"/>
+            </a:solidFill>
+            <a:prstDash val="solid"/>
+          </a:ln>
+        </p:spPr>
+      </p:sp>
+      <p:sp>
+        <p:nvSpPr>
+          <p:cNvPr id="16" name="Shape 14"/>
+          <p:cNvSpPr/>
+          <p:nvPr/>
+        </p:nvSpPr>
+        <p:spPr>
+          <a:xfrm>
+            <a:off x="9015984" y="2880360"/>
+            <a:ext cx="256032" cy="1005840"/>
+          </a:xfrm>
+          <a:prstGeom prst="rect">
+            <a:avLst/>
+          </a:prstGeom>
+          <a:solidFill>
+            <a:srgbClr val="D69A2D"/>
+          </a:solidFill>
+          <a:ln w="12700">
+            <a:solidFill>
+              <a:srgbClr val="D69A2D"/>
+            </a:solidFill>
+            <a:prstDash val="solid"/>
+          </a:ln>
+        </p:spPr>
+      </p:sp>
+      <p:sp>
+        <p:nvSpPr>
+          <p:cNvPr id="17" name="Shape 15"/>
+          <p:cNvSpPr/>
+          <p:nvPr/>
+        </p:nvSpPr>
+        <p:spPr>
+          <a:xfrm>
+            <a:off x="9454896" y="3319272"/>
+            <a:ext cx="256032" cy="566928"/>
+          </a:xfrm>
+          <a:prstGeom prst="rect">
+            <a:avLst/>
+          </a:prstGeom>
+          <a:solidFill>
+            <a:srgbClr val="6A4CA3"/>
+          </a:solidFill>
+          <a:ln w="12700">
+            <a:solidFill>
+              <a:srgbClr val="6A4CA3"/>
+            </a:solidFill>
+            <a:prstDash val="solid"/>
+          </a:ln>
+        </p:spPr>
+      </p:sp>
+      <p:sp>
+        <p:nvSpPr>
+          <p:cNvPr id="18" name="Shape 16"/>
+          <p:cNvSpPr/>
+          <p:nvPr/>
+        </p:nvSpPr>
+        <p:spPr>
+          <a:xfrm>
+            <a:off x="8019288" y="3886200"/>
+            <a:ext cx="2706624" cy="0"/>
+          </a:xfrm>
+          <a:prstGeom prst="line">
+            <a:avLst/>
+          </a:prstGeom>
+          <a:noFill/>
+          <a:ln w="15240">
+            <a:solidFill>
+              <a:srgbClr val="003A63"/>
+            </a:solidFill>
+            <a:prstDash val="solid"/>
+          </a:ln>
+        </p:spPr>
+      </p:sp>
+      <p:sp>
+        <p:nvSpPr>
+          <p:cNvPr id="19" name="Text 17"/>
+          <p:cNvSpPr/>
+          <p:nvPr/>
+        </p:nvSpPr>
+        <p:spPr>
+          <a:xfrm>
+            <a:off x="7863840" y="3017520"/>
+            <a:ext cx="3017520" cy="201168"/>
+          </a:xfrm>
+          <a:prstGeom prst="rect">
+            <a:avLst/>
+          </a:prstGeom>
+          <a:noFill/>
+          <a:ln/>
+        </p:spPr>
+        <p:txBody>
+          <a:bodyPr wrap="square" lIns="0" tIns="0" rIns="0" bIns="0" rtlCol="0" anchor="ctr"/>
+          <a:lstStyle/>
+          <a:p>
+            <a:pPr algn="ctr" indent="0" marL="0">
+              <a:buNone/>
+            </a:pPr>
+            <a:r>
+              <a:rPr lang="en-US" sz="1050" b="1" dirty="0">
+                <a:solidFill>
+                  <a:srgbClr val="003A63"/>
+                </a:solidFill>
+                <a:latin typeface="Aptos" pitchFamily="34" charset="0"/>
+                <a:ea typeface="Aptos" pitchFamily="34" charset="-122"/>
+                <a:cs typeface="Aptos" pitchFamily="34" charset="-120"/>
+              </a:rPr>
+              <a:t>Measure and monitor</a:t>
+            </a:r>
+            <a:endParaRPr lang="en-US" sz="1050" dirty="0"/>
+          </a:p>
+        </p:txBody>
+      </p:sp>
+      <p:sp>
+        <p:nvSpPr>
+          <p:cNvPr id="20" name="Shape 18"/>
+          <p:cNvSpPr/>
+          <p:nvPr/>
+        </p:nvSpPr>
+        <p:spPr>
+          <a:xfrm>
+            <a:off x="7635240" y="4498848"/>
+            <a:ext cx="3474720" cy="1143000"/>
+          </a:xfrm>
+          <a:prstGeom prst="roundRect">
+            <a:avLst>
+              <a:gd name="adj" fmla="val 9600"/>
+            </a:avLst>
+          </a:prstGeom>
+          <a:solidFill>
             <a:srgbClr val="EAF6F8"/>
           </a:solidFill>
           <a:ln w="12700">
@@ -10331,14 +11784,14 @@
       </p:sp>
       <p:sp>
         <p:nvSpPr>
-          <p:cNvPr id="16" name="Text 14"/>
-          <p:cNvSpPr/>
-          <p:nvPr/>
-        </p:nvSpPr>
-        <p:spPr>
-          <a:xfrm>
-            <a:off x="8074152" y="3666744"/>
-            <a:ext cx="2825496" cy="256032"/>
+          <p:cNvPr id="21" name="Text 19"/>
+          <p:cNvSpPr/>
+          <p:nvPr/>
+        </p:nvSpPr>
+        <p:spPr>
+          <a:xfrm>
+            <a:off x="7799832" y="4645152"/>
+            <a:ext cx="3145536" cy="256032"/>
           </a:xfrm>
           <a:prstGeom prst="rect">
             <a:avLst/>
@@ -10362,7 +11815,7 @@
                 <a:ea typeface="Aptos" pitchFamily="34" charset="-122"/>
                 <a:cs typeface="Aptos" pitchFamily="34" charset="-120"/>
               </a:rPr>
-              <a:t>Use this for</a:t>
+              <a:t>How to validate</a:t>
             </a:r>
             <a:endParaRPr lang="en-US" sz="1300" dirty="0"/>
           </a:p>
@@ -10370,14 +11823,14 @@
       </p:sp>
       <p:sp>
         <p:nvSpPr>
-          <p:cNvPr id="17" name="Text 15"/>
-          <p:cNvSpPr/>
-          <p:nvPr/>
-        </p:nvSpPr>
-        <p:spPr>
-          <a:xfrm>
-            <a:off x="8074152" y="4023360"/>
-            <a:ext cx="2825496" cy="1097280"/>
+          <p:cNvPr id="22" name="Text 20"/>
+          <p:cNvSpPr/>
+          <p:nvPr/>
+        </p:nvSpPr>
+        <p:spPr>
+          <a:xfrm>
+            <a:off x="7799832" y="5001768"/>
+            <a:ext cx="3145536" cy="502920"/>
           </a:xfrm>
           <a:prstGeom prst="rect">
             <a:avLst/>
@@ -10403,7 +11856,7 @@
                 <a:ea typeface="Aptos" pitchFamily="34" charset="-122"/>
                 <a:cs typeface="Aptos" pitchFamily="34" charset="-120"/>
               </a:rPr>
-              <a:t>Connect the concept to public health decisions, safeguards, documentation, or implementation work.</a:t>
+              <a:t>Use the assignment to test whether you can explain the concept, apply it to a realistic public health situation, and identify what would need review before the work moves forward.</a:t>
             </a:r>
             <a:endParaRPr lang="en-US" sz="1550" dirty="0"/>
           </a:p>
@@ -10577,8 +12030,8 @@
         </p:nvSpPr>
         <p:spPr>
           <a:xfrm>
-            <a:off x="9966960" y="6537960"/>
-            <a:ext cx="1645920" cy="201168"/>
+            <a:off x="9646920" y="6537960"/>
+            <a:ext cx="1965960" cy="201168"/>
           </a:xfrm>
           <a:prstGeom prst="rect">
             <a:avLst/>
@@ -10602,7 +12055,7 @@
                 <a:ea typeface="Aptos" pitchFamily="34" charset="-122"/>
                 <a:cs typeface="Aptos" pitchFamily="34" charset="-120"/>
               </a:rPr>
-              <a:t>Â© Paula Soper</a:t>
+              <a:t>Copyright Paula Soper</a:t>
             </a:r>
             <a:endParaRPr lang="en-US" sz="800" dirty="0"/>
           </a:p>
@@ -10649,77 +12102,13 @@
       </p:sp>
       <p:sp>
         <p:nvSpPr>
-          <p:cNvPr id="8" name="Shape 6"/>
+          <p:cNvPr id="8" name="Text 6"/>
           <p:cNvSpPr/>
           <p:nvPr/>
         </p:nvSpPr>
         <p:spPr>
           <a:xfrm>
             <a:off x="640080" y="658368"/>
-            <a:ext cx="420624" cy="420624"/>
-          </a:xfrm>
-          <a:prstGeom prst="ellipse">
-            <a:avLst/>
-          </a:prstGeom>
-          <a:solidFill>
-            <a:srgbClr val="0068B7"/>
-          </a:solidFill>
-          <a:ln w="12700">
-            <a:solidFill>
-              <a:srgbClr val="0068B7"/>
-            </a:solidFill>
-            <a:prstDash val="solid"/>
-          </a:ln>
-        </p:spPr>
-      </p:sp>
-      <p:sp>
-        <p:nvSpPr>
-          <p:cNvPr id="9" name="Text 7"/>
-          <p:cNvSpPr/>
-          <p:nvPr/>
-        </p:nvSpPr>
-        <p:spPr>
-          <a:xfrm>
-            <a:off x="640080" y="731520"/>
-            <a:ext cx="420624" cy="164592"/>
-          </a:xfrm>
-          <a:prstGeom prst="rect">
-            <a:avLst/>
-          </a:prstGeom>
-          <a:noFill/>
-          <a:ln/>
-        </p:spPr>
-        <p:txBody>
-          <a:bodyPr wrap="square" lIns="0" tIns="0" rIns="0" bIns="0" rtlCol="0" anchor="ctr"/>
-          <a:lstStyle/>
-          <a:p>
-            <a:pPr algn="ctr" indent="0" marL="0">
-              <a:buNone/>
-            </a:pPr>
-            <a:r>
-              <a:rPr lang="en-US" sz="1100" b="1" dirty="0">
-                <a:solidFill>
-                  <a:srgbClr val="FFFFFF"/>
-                </a:solidFill>
-                <a:latin typeface="Aptos" pitchFamily="34" charset="0"/>
-                <a:ea typeface="Aptos" pitchFamily="34" charset="-122"/>
-                <a:cs typeface="Aptos" pitchFamily="34" charset="-120"/>
-              </a:rPr>
-              <a:t>13</a:t>
-            </a:r>
-            <a:endParaRPr lang="en-US" sz="1100" dirty="0"/>
-          </a:p>
-        </p:txBody>
-      </p:sp>
-      <p:sp>
-        <p:nvSpPr>
-          <p:cNvPr id="10" name="Text 8"/>
-          <p:cNvSpPr/>
-          <p:nvPr/>
-        </p:nvSpPr>
-        <p:spPr>
-          <a:xfrm>
-            <a:off x="640080" y="621792"/>
             <a:ext cx="10881360" cy="713232"/>
           </a:xfrm>
           <a:prstGeom prst="rect">
@@ -10754,14 +12143,14 @@
       </p:sp>
       <p:sp>
         <p:nvSpPr>
-          <p:cNvPr id="11" name="Text 9"/>
+          <p:cNvPr id="9" name="Text 7"/>
           <p:cNvSpPr/>
           <p:nvPr/>
         </p:nvSpPr>
         <p:spPr>
           <a:xfrm>
             <a:off x="868680" y="1508760"/>
-            <a:ext cx="6537960" cy="4160520"/>
+            <a:ext cx="6309360" cy="4160520"/>
           </a:xfrm>
           <a:prstGeom prst="rect">
             <a:avLst/>
@@ -10820,18 +12209,18 @@
       </p:sp>
       <p:sp>
         <p:nvSpPr>
-          <p:cNvPr id="12" name="Shape 10"/>
-          <p:cNvSpPr/>
-          <p:nvPr/>
-        </p:nvSpPr>
-        <p:spPr>
-          <a:xfrm>
-            <a:off x="7909560" y="1417320"/>
-            <a:ext cx="3154680" cy="1828800"/>
+          <p:cNvPr id="10" name="Shape 8"/>
+          <p:cNvSpPr/>
+          <p:nvPr/>
+        </p:nvSpPr>
+        <p:spPr>
+          <a:xfrm>
+            <a:off x="7635240" y="1325880"/>
+            <a:ext cx="3474720" cy="1325880"/>
           </a:xfrm>
           <a:prstGeom prst="roundRect">
             <a:avLst>
-              <a:gd name="adj" fmla="val 6000"/>
+              <a:gd name="adj" fmla="val 8276"/>
             </a:avLst>
           </a:prstGeom>
           <a:solidFill>
@@ -10847,14 +12236,14 @@
       </p:sp>
       <p:sp>
         <p:nvSpPr>
-          <p:cNvPr id="13" name="Text 11"/>
-          <p:cNvSpPr/>
-          <p:nvPr/>
-        </p:nvSpPr>
-        <p:spPr>
-          <a:xfrm>
-            <a:off x="8074152" y="1563624"/>
-            <a:ext cx="2825496" cy="256032"/>
+          <p:cNvPr id="11" name="Text 9"/>
+          <p:cNvSpPr/>
+          <p:nvPr/>
+        </p:nvSpPr>
+        <p:spPr>
+          <a:xfrm>
+            <a:off x="7799832" y="1472184"/>
+            <a:ext cx="3145536" cy="256032"/>
           </a:xfrm>
           <a:prstGeom prst="rect">
             <a:avLst/>
@@ -10878,7 +12267,7 @@
                 <a:ea typeface="Aptos" pitchFamily="34" charset="-122"/>
                 <a:cs typeface="Aptos" pitchFamily="34" charset="-120"/>
               </a:rPr>
-              <a:t>Key idea</a:t>
+              <a:t>Data decision</a:t>
             </a:r>
             <a:endParaRPr lang="en-US" sz="1300" dirty="0"/>
           </a:p>
@@ -10886,14 +12275,14 @@
       </p:sp>
       <p:sp>
         <p:nvSpPr>
-          <p:cNvPr id="14" name="Text 12"/>
-          <p:cNvSpPr/>
-          <p:nvPr/>
-        </p:nvSpPr>
-        <p:spPr>
-          <a:xfrm>
-            <a:off x="8074152" y="1920240"/>
-            <a:ext cx="2825496" cy="1188720"/>
+          <p:cNvPr id="12" name="Text 10"/>
+          <p:cNvSpPr/>
+          <p:nvPr/>
+        </p:nvSpPr>
+        <p:spPr>
+          <a:xfrm>
+            <a:off x="7799832" y="1828800"/>
+            <a:ext cx="3145536" cy="685800"/>
           </a:xfrm>
           <a:prstGeom prst="rect">
             <a:avLst/>
@@ -10927,21 +12316,212 @@
       </p:sp>
       <p:sp>
         <p:nvSpPr>
-          <p:cNvPr id="15" name="Shape 13"/>
-          <p:cNvSpPr/>
-          <p:nvPr/>
-        </p:nvSpPr>
-        <p:spPr>
-          <a:xfrm>
-            <a:off x="7909560" y="3520440"/>
-            <a:ext cx="3154680" cy="1737360"/>
+          <p:cNvPr id="13" name="Shape 11"/>
+          <p:cNvSpPr/>
+          <p:nvPr/>
+        </p:nvSpPr>
+        <p:spPr>
+          <a:xfrm>
+            <a:off x="7635240" y="2788920"/>
+            <a:ext cx="3474720" cy="1536192"/>
           </a:xfrm>
           <a:prstGeom prst="roundRect">
             <a:avLst>
-              <a:gd name="adj" fmla="val 6316"/>
+              <a:gd name="adj" fmla="val 7143"/>
             </a:avLst>
           </a:prstGeom>
           <a:solidFill>
+            <a:srgbClr val="FFFFFF">
+              <a:alpha val="88000"/>
+            </a:srgbClr>
+          </a:solidFill>
+          <a:ln w="12700">
+            <a:solidFill>
+              <a:srgbClr val="D6E8F2"/>
+            </a:solidFill>
+            <a:prstDash val="solid"/>
+          </a:ln>
+        </p:spPr>
+      </p:sp>
+      <p:sp>
+        <p:nvSpPr>
+          <p:cNvPr id="14" name="Shape 12"/>
+          <p:cNvSpPr/>
+          <p:nvPr/>
+        </p:nvSpPr>
+        <p:spPr>
+          <a:xfrm>
+            <a:off x="8138160" y="3474720"/>
+            <a:ext cx="256032" cy="411480"/>
+          </a:xfrm>
+          <a:prstGeom prst="rect">
+            <a:avLst/>
+          </a:prstGeom>
+          <a:solidFill>
+            <a:srgbClr val="0068B7"/>
+          </a:solidFill>
+          <a:ln w="12700">
+            <a:solidFill>
+              <a:srgbClr val="0068B7"/>
+            </a:solidFill>
+            <a:prstDash val="solid"/>
+          </a:ln>
+        </p:spPr>
+      </p:sp>
+      <p:sp>
+        <p:nvSpPr>
+          <p:cNvPr id="15" name="Shape 13"/>
+          <p:cNvSpPr/>
+          <p:nvPr/>
+        </p:nvSpPr>
+        <p:spPr>
+          <a:xfrm>
+            <a:off x="8577072" y="3172968"/>
+            <a:ext cx="256032" cy="713232"/>
+          </a:xfrm>
+          <a:prstGeom prst="rect">
+            <a:avLst/>
+          </a:prstGeom>
+          <a:solidFill>
+            <a:srgbClr val="2F8A28"/>
+          </a:solidFill>
+          <a:ln w="12700">
+            <a:solidFill>
+              <a:srgbClr val="2F8A28"/>
+            </a:solidFill>
+            <a:prstDash val="solid"/>
+          </a:ln>
+        </p:spPr>
+      </p:sp>
+      <p:sp>
+        <p:nvSpPr>
+          <p:cNvPr id="16" name="Shape 14"/>
+          <p:cNvSpPr/>
+          <p:nvPr/>
+        </p:nvSpPr>
+        <p:spPr>
+          <a:xfrm>
+            <a:off x="9015984" y="2880360"/>
+            <a:ext cx="256032" cy="1005840"/>
+          </a:xfrm>
+          <a:prstGeom prst="rect">
+            <a:avLst/>
+          </a:prstGeom>
+          <a:solidFill>
+            <a:srgbClr val="D69A2D"/>
+          </a:solidFill>
+          <a:ln w="12700">
+            <a:solidFill>
+              <a:srgbClr val="D69A2D"/>
+            </a:solidFill>
+            <a:prstDash val="solid"/>
+          </a:ln>
+        </p:spPr>
+      </p:sp>
+      <p:sp>
+        <p:nvSpPr>
+          <p:cNvPr id="17" name="Shape 15"/>
+          <p:cNvSpPr/>
+          <p:nvPr/>
+        </p:nvSpPr>
+        <p:spPr>
+          <a:xfrm>
+            <a:off x="9454896" y="3319272"/>
+            <a:ext cx="256032" cy="566928"/>
+          </a:xfrm>
+          <a:prstGeom prst="rect">
+            <a:avLst/>
+          </a:prstGeom>
+          <a:solidFill>
+            <a:srgbClr val="6A4CA3"/>
+          </a:solidFill>
+          <a:ln w="12700">
+            <a:solidFill>
+              <a:srgbClr val="6A4CA3"/>
+            </a:solidFill>
+            <a:prstDash val="solid"/>
+          </a:ln>
+        </p:spPr>
+      </p:sp>
+      <p:sp>
+        <p:nvSpPr>
+          <p:cNvPr id="18" name="Shape 16"/>
+          <p:cNvSpPr/>
+          <p:nvPr/>
+        </p:nvSpPr>
+        <p:spPr>
+          <a:xfrm>
+            <a:off x="8019288" y="3886200"/>
+            <a:ext cx="2706624" cy="0"/>
+          </a:xfrm>
+          <a:prstGeom prst="line">
+            <a:avLst/>
+          </a:prstGeom>
+          <a:noFill/>
+          <a:ln w="15240">
+            <a:solidFill>
+              <a:srgbClr val="003A63"/>
+            </a:solidFill>
+            <a:prstDash val="solid"/>
+          </a:ln>
+        </p:spPr>
+      </p:sp>
+      <p:sp>
+        <p:nvSpPr>
+          <p:cNvPr id="19" name="Text 17"/>
+          <p:cNvSpPr/>
+          <p:nvPr/>
+        </p:nvSpPr>
+        <p:spPr>
+          <a:xfrm>
+            <a:off x="7863840" y="3017520"/>
+            <a:ext cx="3017520" cy="201168"/>
+          </a:xfrm>
+          <a:prstGeom prst="rect">
+            <a:avLst/>
+          </a:prstGeom>
+          <a:noFill/>
+          <a:ln/>
+        </p:spPr>
+        <p:txBody>
+          <a:bodyPr wrap="square" lIns="0" tIns="0" rIns="0" bIns="0" rtlCol="0" anchor="ctr"/>
+          <a:lstStyle/>
+          <a:p>
+            <a:pPr algn="ctr" indent="0" marL="0">
+              <a:buNone/>
+            </a:pPr>
+            <a:r>
+              <a:rPr lang="en-US" sz="1050" b="1" dirty="0">
+                <a:solidFill>
+                  <a:srgbClr val="003A63"/>
+                </a:solidFill>
+                <a:latin typeface="Aptos" pitchFamily="34" charset="0"/>
+                <a:ea typeface="Aptos" pitchFamily="34" charset="-122"/>
+                <a:cs typeface="Aptos" pitchFamily="34" charset="-120"/>
+              </a:rPr>
+              <a:t>Measure and monitor</a:t>
+            </a:r>
+            <a:endParaRPr lang="en-US" sz="1050" dirty="0"/>
+          </a:p>
+        </p:txBody>
+      </p:sp>
+      <p:sp>
+        <p:nvSpPr>
+          <p:cNvPr id="20" name="Shape 18"/>
+          <p:cNvSpPr/>
+          <p:nvPr/>
+        </p:nvSpPr>
+        <p:spPr>
+          <a:xfrm>
+            <a:off x="7635240" y="4498848"/>
+            <a:ext cx="3474720" cy="1143000"/>
+          </a:xfrm>
+          <a:prstGeom prst="roundRect">
+            <a:avLst>
+              <a:gd name="adj" fmla="val 9600"/>
+            </a:avLst>
+          </a:prstGeom>
+          <a:solidFill>
             <a:srgbClr val="EAF6F8"/>
           </a:solidFill>
           <a:ln w="12700">
@@ -10954,14 +12534,14 @@
       </p:sp>
       <p:sp>
         <p:nvSpPr>
-          <p:cNvPr id="16" name="Text 14"/>
-          <p:cNvSpPr/>
-          <p:nvPr/>
-        </p:nvSpPr>
-        <p:spPr>
-          <a:xfrm>
-            <a:off x="8074152" y="3666744"/>
-            <a:ext cx="2825496" cy="256032"/>
+          <p:cNvPr id="21" name="Text 19"/>
+          <p:cNvSpPr/>
+          <p:nvPr/>
+        </p:nvSpPr>
+        <p:spPr>
+          <a:xfrm>
+            <a:off x="7799832" y="4645152"/>
+            <a:ext cx="3145536" cy="256032"/>
           </a:xfrm>
           <a:prstGeom prst="rect">
             <a:avLst/>
@@ -10985,7 +12565,7 @@
                 <a:ea typeface="Aptos" pitchFamily="34" charset="-122"/>
                 <a:cs typeface="Aptos" pitchFamily="34" charset="-120"/>
               </a:rPr>
-              <a:t>Use this for</a:t>
+              <a:t>How to validate</a:t>
             </a:r>
             <a:endParaRPr lang="en-US" sz="1300" dirty="0"/>
           </a:p>
@@ -10993,14 +12573,14 @@
       </p:sp>
       <p:sp>
         <p:nvSpPr>
-          <p:cNvPr id="17" name="Text 15"/>
-          <p:cNvSpPr/>
-          <p:nvPr/>
-        </p:nvSpPr>
-        <p:spPr>
-          <a:xfrm>
-            <a:off x="8074152" y="4023360"/>
-            <a:ext cx="2825496" cy="1097280"/>
+          <p:cNvPr id="22" name="Text 20"/>
+          <p:cNvSpPr/>
+          <p:nvPr/>
+        </p:nvSpPr>
+        <p:spPr>
+          <a:xfrm>
+            <a:off x="7799832" y="5001768"/>
+            <a:ext cx="3145536" cy="502920"/>
           </a:xfrm>
           <a:prstGeom prst="rect">
             <a:avLst/>
@@ -11026,7 +12606,7 @@
                 <a:ea typeface="Aptos" pitchFamily="34" charset="-122"/>
                 <a:cs typeface="Aptos" pitchFamily="34" charset="-120"/>
               </a:rPr>
-              <a:t>Connect the concept to public health decisions, safeguards, documentation, or implementation work.</a:t>
+              <a:t>Use the assignment to test whether you can explain the concept, apply it to a realistic public health situation, and identify what would need review before the work moves forward.</a:t>
             </a:r>
             <a:endParaRPr lang="en-US" sz="1550" dirty="0"/>
           </a:p>
@@ -11200,8 +12780,8 @@
         </p:nvSpPr>
         <p:spPr>
           <a:xfrm>
-            <a:off x="9966960" y="6537960"/>
-            <a:ext cx="1645920" cy="201168"/>
+            <a:off x="9646920" y="6537960"/>
+            <a:ext cx="1965960" cy="201168"/>
           </a:xfrm>
           <a:prstGeom prst="rect">
             <a:avLst/>
@@ -11225,7 +12805,7 @@
                 <a:ea typeface="Aptos" pitchFamily="34" charset="-122"/>
                 <a:cs typeface="Aptos" pitchFamily="34" charset="-120"/>
               </a:rPr>
-              <a:t>Â© Paula Soper</a:t>
+              <a:t>Copyright Paula Soper</a:t>
             </a:r>
             <a:endParaRPr lang="en-US" sz="800" dirty="0"/>
           </a:p>
@@ -11272,77 +12852,13 @@
       </p:sp>
       <p:sp>
         <p:nvSpPr>
-          <p:cNvPr id="8" name="Shape 6"/>
+          <p:cNvPr id="8" name="Text 6"/>
           <p:cNvSpPr/>
           <p:nvPr/>
         </p:nvSpPr>
         <p:spPr>
           <a:xfrm>
             <a:off x="640080" y="658368"/>
-            <a:ext cx="420624" cy="420624"/>
-          </a:xfrm>
-          <a:prstGeom prst="ellipse">
-            <a:avLst/>
-          </a:prstGeom>
-          <a:solidFill>
-            <a:srgbClr val="0068B7"/>
-          </a:solidFill>
-          <a:ln w="12700">
-            <a:solidFill>
-              <a:srgbClr val="0068B7"/>
-            </a:solidFill>
-            <a:prstDash val="solid"/>
-          </a:ln>
-        </p:spPr>
-      </p:sp>
-      <p:sp>
-        <p:nvSpPr>
-          <p:cNvPr id="9" name="Text 7"/>
-          <p:cNvSpPr/>
-          <p:nvPr/>
-        </p:nvSpPr>
-        <p:spPr>
-          <a:xfrm>
-            <a:off x="640080" y="731520"/>
-            <a:ext cx="420624" cy="164592"/>
-          </a:xfrm>
-          <a:prstGeom prst="rect">
-            <a:avLst/>
-          </a:prstGeom>
-          <a:noFill/>
-          <a:ln/>
-        </p:spPr>
-        <p:txBody>
-          <a:bodyPr wrap="square" lIns="0" tIns="0" rIns="0" bIns="0" rtlCol="0" anchor="ctr"/>
-          <a:lstStyle/>
-          <a:p>
-            <a:pPr algn="ctr" indent="0" marL="0">
-              <a:buNone/>
-            </a:pPr>
-            <a:r>
-              <a:rPr lang="en-US" sz="1100" b="1" dirty="0">
-                <a:solidFill>
-                  <a:srgbClr val="FFFFFF"/>
-                </a:solidFill>
-                <a:latin typeface="Aptos" pitchFamily="34" charset="0"/>
-                <a:ea typeface="Aptos" pitchFamily="34" charset="-122"/>
-                <a:cs typeface="Aptos" pitchFamily="34" charset="-120"/>
-              </a:rPr>
-              <a:t>14</a:t>
-            </a:r>
-            <a:endParaRPr lang="en-US" sz="1100" dirty="0"/>
-          </a:p>
-        </p:txBody>
-      </p:sp>
-      <p:sp>
-        <p:nvSpPr>
-          <p:cNvPr id="10" name="Text 8"/>
-          <p:cNvSpPr/>
-          <p:nvPr/>
-        </p:nvSpPr>
-        <p:spPr>
-          <a:xfrm>
-            <a:off x="640080" y="621792"/>
             <a:ext cx="10881360" cy="713232"/>
           </a:xfrm>
           <a:prstGeom prst="rect">
@@ -11377,14 +12893,14 @@
       </p:sp>
       <p:sp>
         <p:nvSpPr>
-          <p:cNvPr id="11" name="Text 9"/>
+          <p:cNvPr id="9" name="Text 7"/>
           <p:cNvSpPr/>
           <p:nvPr/>
         </p:nvSpPr>
         <p:spPr>
           <a:xfrm>
             <a:off x="868680" y="1508760"/>
-            <a:ext cx="6537960" cy="4160520"/>
+            <a:ext cx="6309360" cy="4160520"/>
           </a:xfrm>
           <a:prstGeom prst="rect">
             <a:avLst/>
@@ -11443,18 +12959,18 @@
       </p:sp>
       <p:sp>
         <p:nvSpPr>
-          <p:cNvPr id="12" name="Shape 10"/>
-          <p:cNvSpPr/>
-          <p:nvPr/>
-        </p:nvSpPr>
-        <p:spPr>
-          <a:xfrm>
-            <a:off x="7909560" y="1417320"/>
-            <a:ext cx="3154680" cy="1828800"/>
+          <p:cNvPr id="10" name="Shape 8"/>
+          <p:cNvSpPr/>
+          <p:nvPr/>
+        </p:nvSpPr>
+        <p:spPr>
+          <a:xfrm>
+            <a:off x="7635240" y="1325880"/>
+            <a:ext cx="3474720" cy="1325880"/>
           </a:xfrm>
           <a:prstGeom prst="roundRect">
             <a:avLst>
-              <a:gd name="adj" fmla="val 6000"/>
+              <a:gd name="adj" fmla="val 8276"/>
             </a:avLst>
           </a:prstGeom>
           <a:solidFill>
@@ -11470,14 +12986,14 @@
       </p:sp>
       <p:sp>
         <p:nvSpPr>
-          <p:cNvPr id="13" name="Text 11"/>
-          <p:cNvSpPr/>
-          <p:nvPr/>
-        </p:nvSpPr>
-        <p:spPr>
-          <a:xfrm>
-            <a:off x="8074152" y="1563624"/>
-            <a:ext cx="2825496" cy="256032"/>
+          <p:cNvPr id="11" name="Text 9"/>
+          <p:cNvSpPr/>
+          <p:nvPr/>
+        </p:nvSpPr>
+        <p:spPr>
+          <a:xfrm>
+            <a:off x="7799832" y="1472184"/>
+            <a:ext cx="3145536" cy="256032"/>
           </a:xfrm>
           <a:prstGeom prst="rect">
             <a:avLst/>
@@ -11501,7 +13017,7 @@
                 <a:ea typeface="Aptos" pitchFamily="34" charset="-122"/>
                 <a:cs typeface="Aptos" pitchFamily="34" charset="-120"/>
               </a:rPr>
-              <a:t>Key idea</a:t>
+              <a:t>Data decision</a:t>
             </a:r>
             <a:endParaRPr lang="en-US" sz="1300" dirty="0"/>
           </a:p>
@@ -11509,14 +13025,14 @@
       </p:sp>
       <p:sp>
         <p:nvSpPr>
-          <p:cNvPr id="14" name="Text 12"/>
-          <p:cNvSpPr/>
-          <p:nvPr/>
-        </p:nvSpPr>
-        <p:spPr>
-          <a:xfrm>
-            <a:off x="8074152" y="1920240"/>
-            <a:ext cx="2825496" cy="1188720"/>
+          <p:cNvPr id="12" name="Text 10"/>
+          <p:cNvSpPr/>
+          <p:nvPr/>
+        </p:nvSpPr>
+        <p:spPr>
+          <a:xfrm>
+            <a:off x="7799832" y="1828800"/>
+            <a:ext cx="3145536" cy="685800"/>
           </a:xfrm>
           <a:prstGeom prst="rect">
             <a:avLst/>
@@ -11550,21 +13066,212 @@
       </p:sp>
       <p:sp>
         <p:nvSpPr>
-          <p:cNvPr id="15" name="Shape 13"/>
-          <p:cNvSpPr/>
-          <p:nvPr/>
-        </p:nvSpPr>
-        <p:spPr>
-          <a:xfrm>
-            <a:off x="7909560" y="3520440"/>
-            <a:ext cx="3154680" cy="1737360"/>
+          <p:cNvPr id="13" name="Shape 11"/>
+          <p:cNvSpPr/>
+          <p:nvPr/>
+        </p:nvSpPr>
+        <p:spPr>
+          <a:xfrm>
+            <a:off x="7635240" y="2788920"/>
+            <a:ext cx="3474720" cy="1536192"/>
           </a:xfrm>
           <a:prstGeom prst="roundRect">
             <a:avLst>
-              <a:gd name="adj" fmla="val 6316"/>
+              <a:gd name="adj" fmla="val 7143"/>
             </a:avLst>
           </a:prstGeom>
           <a:solidFill>
+            <a:srgbClr val="FFFFFF">
+              <a:alpha val="88000"/>
+            </a:srgbClr>
+          </a:solidFill>
+          <a:ln w="12700">
+            <a:solidFill>
+              <a:srgbClr val="D6E8F2"/>
+            </a:solidFill>
+            <a:prstDash val="solid"/>
+          </a:ln>
+        </p:spPr>
+      </p:sp>
+      <p:sp>
+        <p:nvSpPr>
+          <p:cNvPr id="14" name="Shape 12"/>
+          <p:cNvSpPr/>
+          <p:nvPr/>
+        </p:nvSpPr>
+        <p:spPr>
+          <a:xfrm>
+            <a:off x="8138160" y="3474720"/>
+            <a:ext cx="256032" cy="411480"/>
+          </a:xfrm>
+          <a:prstGeom prst="rect">
+            <a:avLst/>
+          </a:prstGeom>
+          <a:solidFill>
+            <a:srgbClr val="0068B7"/>
+          </a:solidFill>
+          <a:ln w="12700">
+            <a:solidFill>
+              <a:srgbClr val="0068B7"/>
+            </a:solidFill>
+            <a:prstDash val="solid"/>
+          </a:ln>
+        </p:spPr>
+      </p:sp>
+      <p:sp>
+        <p:nvSpPr>
+          <p:cNvPr id="15" name="Shape 13"/>
+          <p:cNvSpPr/>
+          <p:nvPr/>
+        </p:nvSpPr>
+        <p:spPr>
+          <a:xfrm>
+            <a:off x="8577072" y="3172968"/>
+            <a:ext cx="256032" cy="713232"/>
+          </a:xfrm>
+          <a:prstGeom prst="rect">
+            <a:avLst/>
+          </a:prstGeom>
+          <a:solidFill>
+            <a:srgbClr val="2F8A28"/>
+          </a:solidFill>
+          <a:ln w="12700">
+            <a:solidFill>
+              <a:srgbClr val="2F8A28"/>
+            </a:solidFill>
+            <a:prstDash val="solid"/>
+          </a:ln>
+        </p:spPr>
+      </p:sp>
+      <p:sp>
+        <p:nvSpPr>
+          <p:cNvPr id="16" name="Shape 14"/>
+          <p:cNvSpPr/>
+          <p:nvPr/>
+        </p:nvSpPr>
+        <p:spPr>
+          <a:xfrm>
+            <a:off x="9015984" y="2880360"/>
+            <a:ext cx="256032" cy="1005840"/>
+          </a:xfrm>
+          <a:prstGeom prst="rect">
+            <a:avLst/>
+          </a:prstGeom>
+          <a:solidFill>
+            <a:srgbClr val="D69A2D"/>
+          </a:solidFill>
+          <a:ln w="12700">
+            <a:solidFill>
+              <a:srgbClr val="D69A2D"/>
+            </a:solidFill>
+            <a:prstDash val="solid"/>
+          </a:ln>
+        </p:spPr>
+      </p:sp>
+      <p:sp>
+        <p:nvSpPr>
+          <p:cNvPr id="17" name="Shape 15"/>
+          <p:cNvSpPr/>
+          <p:nvPr/>
+        </p:nvSpPr>
+        <p:spPr>
+          <a:xfrm>
+            <a:off x="9454896" y="3319272"/>
+            <a:ext cx="256032" cy="566928"/>
+          </a:xfrm>
+          <a:prstGeom prst="rect">
+            <a:avLst/>
+          </a:prstGeom>
+          <a:solidFill>
+            <a:srgbClr val="6A4CA3"/>
+          </a:solidFill>
+          <a:ln w="12700">
+            <a:solidFill>
+              <a:srgbClr val="6A4CA3"/>
+            </a:solidFill>
+            <a:prstDash val="solid"/>
+          </a:ln>
+        </p:spPr>
+      </p:sp>
+      <p:sp>
+        <p:nvSpPr>
+          <p:cNvPr id="18" name="Shape 16"/>
+          <p:cNvSpPr/>
+          <p:nvPr/>
+        </p:nvSpPr>
+        <p:spPr>
+          <a:xfrm>
+            <a:off x="8019288" y="3886200"/>
+            <a:ext cx="2706624" cy="0"/>
+          </a:xfrm>
+          <a:prstGeom prst="line">
+            <a:avLst/>
+          </a:prstGeom>
+          <a:noFill/>
+          <a:ln w="15240">
+            <a:solidFill>
+              <a:srgbClr val="003A63"/>
+            </a:solidFill>
+            <a:prstDash val="solid"/>
+          </a:ln>
+        </p:spPr>
+      </p:sp>
+      <p:sp>
+        <p:nvSpPr>
+          <p:cNvPr id="19" name="Text 17"/>
+          <p:cNvSpPr/>
+          <p:nvPr/>
+        </p:nvSpPr>
+        <p:spPr>
+          <a:xfrm>
+            <a:off x="7863840" y="3017520"/>
+            <a:ext cx="3017520" cy="201168"/>
+          </a:xfrm>
+          <a:prstGeom prst="rect">
+            <a:avLst/>
+          </a:prstGeom>
+          <a:noFill/>
+          <a:ln/>
+        </p:spPr>
+        <p:txBody>
+          <a:bodyPr wrap="square" lIns="0" tIns="0" rIns="0" bIns="0" rtlCol="0" anchor="ctr"/>
+          <a:lstStyle/>
+          <a:p>
+            <a:pPr algn="ctr" indent="0" marL="0">
+              <a:buNone/>
+            </a:pPr>
+            <a:r>
+              <a:rPr lang="en-US" sz="1050" b="1" dirty="0">
+                <a:solidFill>
+                  <a:srgbClr val="003A63"/>
+                </a:solidFill>
+                <a:latin typeface="Aptos" pitchFamily="34" charset="0"/>
+                <a:ea typeface="Aptos" pitchFamily="34" charset="-122"/>
+                <a:cs typeface="Aptos" pitchFamily="34" charset="-120"/>
+              </a:rPr>
+              <a:t>Measure and monitor</a:t>
+            </a:r>
+            <a:endParaRPr lang="en-US" sz="1050" dirty="0"/>
+          </a:p>
+        </p:txBody>
+      </p:sp>
+      <p:sp>
+        <p:nvSpPr>
+          <p:cNvPr id="20" name="Shape 18"/>
+          <p:cNvSpPr/>
+          <p:nvPr/>
+        </p:nvSpPr>
+        <p:spPr>
+          <a:xfrm>
+            <a:off x="7635240" y="4498848"/>
+            <a:ext cx="3474720" cy="1143000"/>
+          </a:xfrm>
+          <a:prstGeom prst="roundRect">
+            <a:avLst>
+              <a:gd name="adj" fmla="val 9600"/>
+            </a:avLst>
+          </a:prstGeom>
+          <a:solidFill>
             <a:srgbClr val="EAF6F8"/>
           </a:solidFill>
           <a:ln w="12700">
@@ -11577,14 +13284,14 @@
       </p:sp>
       <p:sp>
         <p:nvSpPr>
-          <p:cNvPr id="16" name="Text 14"/>
-          <p:cNvSpPr/>
-          <p:nvPr/>
-        </p:nvSpPr>
-        <p:spPr>
-          <a:xfrm>
-            <a:off x="8074152" y="3666744"/>
-            <a:ext cx="2825496" cy="256032"/>
+          <p:cNvPr id="21" name="Text 19"/>
+          <p:cNvSpPr/>
+          <p:nvPr/>
+        </p:nvSpPr>
+        <p:spPr>
+          <a:xfrm>
+            <a:off x="7799832" y="4645152"/>
+            <a:ext cx="3145536" cy="256032"/>
           </a:xfrm>
           <a:prstGeom prst="rect">
             <a:avLst/>
@@ -11608,7 +13315,7 @@
                 <a:ea typeface="Aptos" pitchFamily="34" charset="-122"/>
                 <a:cs typeface="Aptos" pitchFamily="34" charset="-120"/>
               </a:rPr>
-              <a:t>Use this for</a:t>
+              <a:t>How to validate</a:t>
             </a:r>
             <a:endParaRPr lang="en-US" sz="1300" dirty="0"/>
           </a:p>
@@ -11616,14 +13323,14 @@
       </p:sp>
       <p:sp>
         <p:nvSpPr>
-          <p:cNvPr id="17" name="Text 15"/>
-          <p:cNvSpPr/>
-          <p:nvPr/>
-        </p:nvSpPr>
-        <p:spPr>
-          <a:xfrm>
-            <a:off x="8074152" y="4023360"/>
-            <a:ext cx="2825496" cy="1097280"/>
+          <p:cNvPr id="22" name="Text 20"/>
+          <p:cNvSpPr/>
+          <p:nvPr/>
+        </p:nvSpPr>
+        <p:spPr>
+          <a:xfrm>
+            <a:off x="7799832" y="5001768"/>
+            <a:ext cx="3145536" cy="502920"/>
           </a:xfrm>
           <a:prstGeom prst="rect">
             <a:avLst/>
@@ -11649,7 +13356,7 @@
                 <a:ea typeface="Aptos" pitchFamily="34" charset="-122"/>
                 <a:cs typeface="Aptos" pitchFamily="34" charset="-120"/>
               </a:rPr>
-              <a:t>Connect the concept to public health decisions, safeguards, documentation, or implementation work.</a:t>
+              <a:t>Connect the concept to data quality, model performance, validation evidence, monitoring measures, and decisions that remain under human control.</a:t>
             </a:r>
             <a:endParaRPr lang="en-US" sz="1550" dirty="0"/>
           </a:p>
@@ -11823,8 +13530,8 @@
         </p:nvSpPr>
         <p:spPr>
           <a:xfrm>
-            <a:off x="9966960" y="6537960"/>
-            <a:ext cx="1645920" cy="201168"/>
+            <a:off x="9646920" y="6537960"/>
+            <a:ext cx="1965960" cy="201168"/>
           </a:xfrm>
           <a:prstGeom prst="rect">
             <a:avLst/>
@@ -11848,7 +13555,7 @@
                 <a:ea typeface="Aptos" pitchFamily="34" charset="-122"/>
                 <a:cs typeface="Aptos" pitchFamily="34" charset="-120"/>
               </a:rPr>
-              <a:t>Â© Paula Soper</a:t>
+              <a:t>Copyright Paula Soper</a:t>
             </a:r>
             <a:endParaRPr lang="en-US" sz="800" dirty="0"/>
           </a:p>
@@ -12191,46 +13898,7 @@
       </p:sp>
       <p:sp>
         <p:nvSpPr>
-          <p:cNvPr id="15" name="Text 13"/>
-          <p:cNvSpPr/>
-          <p:nvPr/>
-        </p:nvSpPr>
-        <p:spPr>
-          <a:xfrm>
-            <a:off x="8817864" y="4187952"/>
-            <a:ext cx="201168" cy="256032"/>
-          </a:xfrm>
-          <a:prstGeom prst="rect">
-            <a:avLst/>
-          </a:prstGeom>
-          <a:noFill/>
-          <a:ln/>
-        </p:spPr>
-        <p:txBody>
-          <a:bodyPr wrap="square" lIns="0" tIns="0" rIns="0" bIns="0" rtlCol="0" anchor="ctr"/>
-          <a:lstStyle/>
-          <a:p>
-            <a:pPr algn="ctr" indent="0" marL="0">
-              <a:buNone/>
-            </a:pPr>
-            <a:r>
-              <a:rPr lang="en-US" sz="1800" b="1" dirty="0">
-                <a:solidFill>
-                  <a:srgbClr val="0068B7"/>
-                </a:solidFill>
-                <a:latin typeface="Aptos" pitchFamily="34" charset="0"/>
-                <a:ea typeface="Aptos" pitchFamily="34" charset="-122"/>
-                <a:cs typeface="Aptos" pitchFamily="34" charset="-120"/>
-              </a:rPr>
-              <a:t>â†’</a:t>
-            </a:r>
-            <a:endParaRPr lang="en-US" sz="1800" dirty="0"/>
-          </a:p>
-        </p:txBody>
-      </p:sp>
-      <p:sp>
-        <p:nvSpPr>
-          <p:cNvPr id="16" name="Shape 14"/>
+          <p:cNvPr id="15" name="Shape 13"/>
           <p:cNvSpPr/>
           <p:nvPr/>
         </p:nvSpPr>
@@ -12257,7 +13925,7 @@
       </p:sp>
       <p:sp>
         <p:nvSpPr>
-          <p:cNvPr id="17" name="Text 15"/>
+          <p:cNvPr id="16" name="Text 14"/>
           <p:cNvSpPr/>
           <p:nvPr/>
         </p:nvSpPr>
@@ -12298,46 +13966,7 @@
       </p:sp>
       <p:sp>
         <p:nvSpPr>
-          <p:cNvPr id="18" name="Text 16"/>
-          <p:cNvSpPr/>
-          <p:nvPr/>
-        </p:nvSpPr>
-        <p:spPr>
-          <a:xfrm>
-            <a:off x="10046208" y="4187952"/>
-            <a:ext cx="201168" cy="256032"/>
-          </a:xfrm>
-          <a:prstGeom prst="rect">
-            <a:avLst/>
-          </a:prstGeom>
-          <a:noFill/>
-          <a:ln/>
-        </p:spPr>
-        <p:txBody>
-          <a:bodyPr wrap="square" lIns="0" tIns="0" rIns="0" bIns="0" rtlCol="0" anchor="ctr"/>
-          <a:lstStyle/>
-          <a:p>
-            <a:pPr algn="ctr" indent="0" marL="0">
-              <a:buNone/>
-            </a:pPr>
-            <a:r>
-              <a:rPr lang="en-US" sz="1800" b="1" dirty="0">
-                <a:solidFill>
-                  <a:srgbClr val="0068B7"/>
-                </a:solidFill>
-                <a:latin typeface="Aptos" pitchFamily="34" charset="0"/>
-                <a:ea typeface="Aptos" pitchFamily="34" charset="-122"/>
-                <a:cs typeface="Aptos" pitchFamily="34" charset="-120"/>
-              </a:rPr>
-              <a:t>â†’</a:t>
-            </a:r>
-            <a:endParaRPr lang="en-US" sz="1800" dirty="0"/>
-          </a:p>
-        </p:txBody>
-      </p:sp>
-      <p:sp>
-        <p:nvSpPr>
-          <p:cNvPr id="19" name="Shape 17"/>
+          <p:cNvPr id="17" name="Shape 15"/>
           <p:cNvSpPr/>
           <p:nvPr/>
         </p:nvSpPr>
@@ -12364,7 +13993,7 @@
       </p:sp>
       <p:sp>
         <p:nvSpPr>
-          <p:cNvPr id="20" name="Text 18"/>
+          <p:cNvPr id="18" name="Text 16"/>
           <p:cNvSpPr/>
           <p:nvPr/>
         </p:nvSpPr>
@@ -12571,8 +14200,8 @@
         </p:nvSpPr>
         <p:spPr>
           <a:xfrm>
-            <a:off x="9966960" y="6537960"/>
-            <a:ext cx="1645920" cy="201168"/>
+            <a:off x="9646920" y="6537960"/>
+            <a:ext cx="1965960" cy="201168"/>
           </a:xfrm>
           <a:prstGeom prst="rect">
             <a:avLst/>
@@ -12596,7 +14225,7 @@
                 <a:ea typeface="Aptos" pitchFamily="34" charset="-122"/>
                 <a:cs typeface="Aptos" pitchFamily="34" charset="-120"/>
               </a:rPr>
-              <a:t>Â© Paula Soper</a:t>
+              <a:t>Copyright Paula Soper</a:t>
             </a:r>
             <a:endParaRPr lang="en-US" sz="800" dirty="0"/>
           </a:p>
@@ -12939,46 +14568,7 @@
       </p:sp>
       <p:sp>
         <p:nvSpPr>
-          <p:cNvPr id="15" name="Text 13"/>
-          <p:cNvSpPr/>
-          <p:nvPr/>
-        </p:nvSpPr>
-        <p:spPr>
-          <a:xfrm>
-            <a:off x="8817864" y="4187952"/>
-            <a:ext cx="201168" cy="256032"/>
-          </a:xfrm>
-          <a:prstGeom prst="rect">
-            <a:avLst/>
-          </a:prstGeom>
-          <a:noFill/>
-          <a:ln/>
-        </p:spPr>
-        <p:txBody>
-          <a:bodyPr wrap="square" lIns="0" tIns="0" rIns="0" bIns="0" rtlCol="0" anchor="ctr"/>
-          <a:lstStyle/>
-          <a:p>
-            <a:pPr algn="ctr" indent="0" marL="0">
-              <a:buNone/>
-            </a:pPr>
-            <a:r>
-              <a:rPr lang="en-US" sz="1800" b="1" dirty="0">
-                <a:solidFill>
-                  <a:srgbClr val="0068B7"/>
-                </a:solidFill>
-                <a:latin typeface="Aptos" pitchFamily="34" charset="0"/>
-                <a:ea typeface="Aptos" pitchFamily="34" charset="-122"/>
-                <a:cs typeface="Aptos" pitchFamily="34" charset="-120"/>
-              </a:rPr>
-              <a:t>â†’</a:t>
-            </a:r>
-            <a:endParaRPr lang="en-US" sz="1800" dirty="0"/>
-          </a:p>
-        </p:txBody>
-      </p:sp>
-      <p:sp>
-        <p:nvSpPr>
-          <p:cNvPr id="16" name="Shape 14"/>
+          <p:cNvPr id="15" name="Shape 13"/>
           <p:cNvSpPr/>
           <p:nvPr/>
         </p:nvSpPr>
@@ -13005,7 +14595,7 @@
       </p:sp>
       <p:sp>
         <p:nvSpPr>
-          <p:cNvPr id="17" name="Text 15"/>
+          <p:cNvPr id="16" name="Text 14"/>
           <p:cNvSpPr/>
           <p:nvPr/>
         </p:nvSpPr>
@@ -13046,46 +14636,7 @@
       </p:sp>
       <p:sp>
         <p:nvSpPr>
-          <p:cNvPr id="18" name="Text 16"/>
-          <p:cNvSpPr/>
-          <p:nvPr/>
-        </p:nvSpPr>
-        <p:spPr>
-          <a:xfrm>
-            <a:off x="10046208" y="4187952"/>
-            <a:ext cx="201168" cy="256032"/>
-          </a:xfrm>
-          <a:prstGeom prst="rect">
-            <a:avLst/>
-          </a:prstGeom>
-          <a:noFill/>
-          <a:ln/>
-        </p:spPr>
-        <p:txBody>
-          <a:bodyPr wrap="square" lIns="0" tIns="0" rIns="0" bIns="0" rtlCol="0" anchor="ctr"/>
-          <a:lstStyle/>
-          <a:p>
-            <a:pPr algn="ctr" indent="0" marL="0">
-              <a:buNone/>
-            </a:pPr>
-            <a:r>
-              <a:rPr lang="en-US" sz="1800" b="1" dirty="0">
-                <a:solidFill>
-                  <a:srgbClr val="0068B7"/>
-                </a:solidFill>
-                <a:latin typeface="Aptos" pitchFamily="34" charset="0"/>
-                <a:ea typeface="Aptos" pitchFamily="34" charset="-122"/>
-                <a:cs typeface="Aptos" pitchFamily="34" charset="-120"/>
-              </a:rPr>
-              <a:t>â†’</a:t>
-            </a:r>
-            <a:endParaRPr lang="en-US" sz="1800" dirty="0"/>
-          </a:p>
-        </p:txBody>
-      </p:sp>
-      <p:sp>
-        <p:nvSpPr>
-          <p:cNvPr id="19" name="Shape 17"/>
+          <p:cNvPr id="17" name="Shape 15"/>
           <p:cNvSpPr/>
           <p:nvPr/>
         </p:nvSpPr>
@@ -13112,7 +14663,7 @@
       </p:sp>
       <p:sp>
         <p:nvSpPr>
-          <p:cNvPr id="20" name="Text 18"/>
+          <p:cNvPr id="18" name="Text 16"/>
           <p:cNvSpPr/>
           <p:nvPr/>
         </p:nvSpPr>
@@ -13319,8 +14870,8 @@
         </p:nvSpPr>
         <p:spPr>
           <a:xfrm>
-            <a:off x="9966960" y="6537960"/>
-            <a:ext cx="1645920" cy="201168"/>
+            <a:off x="9646920" y="6537960"/>
+            <a:ext cx="1965960" cy="201168"/>
           </a:xfrm>
           <a:prstGeom prst="rect">
             <a:avLst/>
@@ -13344,7 +14895,7 @@
                 <a:ea typeface="Aptos" pitchFamily="34" charset="-122"/>
                 <a:cs typeface="Aptos" pitchFamily="34" charset="-120"/>
               </a:rPr>
-              <a:t>Â© Paula Soper</a:t>
+              <a:t>Copyright Paula Soper</a:t>
             </a:r>
             <a:endParaRPr lang="en-US" sz="800" dirty="0"/>
           </a:p>
@@ -13391,77 +14942,13 @@
       </p:sp>
       <p:sp>
         <p:nvSpPr>
-          <p:cNvPr id="8" name="Shape 6"/>
+          <p:cNvPr id="8" name="Text 6"/>
           <p:cNvSpPr/>
           <p:nvPr/>
         </p:nvSpPr>
         <p:spPr>
           <a:xfrm>
             <a:off x="640080" y="658368"/>
-            <a:ext cx="420624" cy="420624"/>
-          </a:xfrm>
-          <a:prstGeom prst="ellipse">
-            <a:avLst/>
-          </a:prstGeom>
-          <a:solidFill>
-            <a:srgbClr val="0068B7"/>
-          </a:solidFill>
-          <a:ln w="12700">
-            <a:solidFill>
-              <a:srgbClr val="0068B7"/>
-            </a:solidFill>
-            <a:prstDash val="solid"/>
-          </a:ln>
-        </p:spPr>
-      </p:sp>
-      <p:sp>
-        <p:nvSpPr>
-          <p:cNvPr id="9" name="Text 7"/>
-          <p:cNvSpPr/>
-          <p:nvPr/>
-        </p:nvSpPr>
-        <p:spPr>
-          <a:xfrm>
-            <a:off x="640080" y="731520"/>
-            <a:ext cx="420624" cy="164592"/>
-          </a:xfrm>
-          <a:prstGeom prst="rect">
-            <a:avLst/>
-          </a:prstGeom>
-          <a:noFill/>
-          <a:ln/>
-        </p:spPr>
-        <p:txBody>
-          <a:bodyPr wrap="square" lIns="0" tIns="0" rIns="0" bIns="0" rtlCol="0" anchor="ctr"/>
-          <a:lstStyle/>
-          <a:p>
-            <a:pPr algn="ctr" indent="0" marL="0">
-              <a:buNone/>
-            </a:pPr>
-            <a:r>
-              <a:rPr lang="en-US" sz="1100" b="1" dirty="0">
-                <a:solidFill>
-                  <a:srgbClr val="FFFFFF"/>
-                </a:solidFill>
-                <a:latin typeface="Aptos" pitchFamily="34" charset="0"/>
-                <a:ea typeface="Aptos" pitchFamily="34" charset="-122"/>
-                <a:cs typeface="Aptos" pitchFamily="34" charset="-120"/>
-              </a:rPr>
-              <a:t>1</a:t>
-            </a:r>
-            <a:endParaRPr lang="en-US" sz="1100" dirty="0"/>
-          </a:p>
-        </p:txBody>
-      </p:sp>
-      <p:sp>
-        <p:nvSpPr>
-          <p:cNvPr id="10" name="Text 8"/>
-          <p:cNvSpPr/>
-          <p:nvPr/>
-        </p:nvSpPr>
-        <p:spPr>
-          <a:xfrm>
-            <a:off x="640080" y="621792"/>
             <a:ext cx="10881360" cy="713232"/>
           </a:xfrm>
           <a:prstGeom prst="rect">
@@ -13496,14 +14983,14 @@
       </p:sp>
       <p:sp>
         <p:nvSpPr>
-          <p:cNvPr id="11" name="Text 9"/>
+          <p:cNvPr id="9" name="Text 7"/>
           <p:cNvSpPr/>
           <p:nvPr/>
         </p:nvSpPr>
         <p:spPr>
           <a:xfrm>
             <a:off x="868680" y="1508760"/>
-            <a:ext cx="6537960" cy="4160520"/>
+            <a:ext cx="6309360" cy="4160520"/>
           </a:xfrm>
           <a:prstGeom prst="rect">
             <a:avLst/>
@@ -13562,18 +15049,18 @@
       </p:sp>
       <p:sp>
         <p:nvSpPr>
-          <p:cNvPr id="12" name="Shape 10"/>
-          <p:cNvSpPr/>
-          <p:nvPr/>
-        </p:nvSpPr>
-        <p:spPr>
-          <a:xfrm>
-            <a:off x="7909560" y="1417320"/>
-            <a:ext cx="3154680" cy="1828800"/>
+          <p:cNvPr id="10" name="Shape 8"/>
+          <p:cNvSpPr/>
+          <p:nvPr/>
+        </p:nvSpPr>
+        <p:spPr>
+          <a:xfrm>
+            <a:off x="7635240" y="1325880"/>
+            <a:ext cx="3474720" cy="1325880"/>
           </a:xfrm>
           <a:prstGeom prst="roundRect">
             <a:avLst>
-              <a:gd name="adj" fmla="val 6000"/>
+              <a:gd name="adj" fmla="val 8276"/>
             </a:avLst>
           </a:prstGeom>
           <a:solidFill>
@@ -13589,14 +15076,14 @@
       </p:sp>
       <p:sp>
         <p:nvSpPr>
-          <p:cNvPr id="13" name="Text 11"/>
-          <p:cNvSpPr/>
-          <p:nvPr/>
-        </p:nvSpPr>
-        <p:spPr>
-          <a:xfrm>
-            <a:off x="8074152" y="1563624"/>
-            <a:ext cx="2825496" cy="256032"/>
+          <p:cNvPr id="11" name="Text 9"/>
+          <p:cNvSpPr/>
+          <p:nvPr/>
+        </p:nvSpPr>
+        <p:spPr>
+          <a:xfrm>
+            <a:off x="7799832" y="1472184"/>
+            <a:ext cx="3145536" cy="256032"/>
           </a:xfrm>
           <a:prstGeom prst="rect">
             <a:avLst/>
@@ -13620,7 +15107,7 @@
                 <a:ea typeface="Aptos" pitchFamily="34" charset="-122"/>
                 <a:cs typeface="Aptos" pitchFamily="34" charset="-120"/>
               </a:rPr>
-              <a:t>Key idea</a:t>
+              <a:t>Data decision</a:t>
             </a:r>
             <a:endParaRPr lang="en-US" sz="1300" dirty="0"/>
           </a:p>
@@ -13628,14 +15115,14 @@
       </p:sp>
       <p:sp>
         <p:nvSpPr>
-          <p:cNvPr id="14" name="Text 12"/>
-          <p:cNvSpPr/>
-          <p:nvPr/>
-        </p:nvSpPr>
-        <p:spPr>
-          <a:xfrm>
-            <a:off x="8074152" y="1920240"/>
-            <a:ext cx="2825496" cy="1188720"/>
+          <p:cNvPr id="12" name="Text 10"/>
+          <p:cNvSpPr/>
+          <p:nvPr/>
+        </p:nvSpPr>
+        <p:spPr>
+          <a:xfrm>
+            <a:off x="7799832" y="1828800"/>
+            <a:ext cx="3145536" cy="685800"/>
           </a:xfrm>
           <a:prstGeom prst="rect">
             <a:avLst/>
@@ -13669,21 +15156,212 @@
       </p:sp>
       <p:sp>
         <p:nvSpPr>
-          <p:cNvPr id="15" name="Shape 13"/>
-          <p:cNvSpPr/>
-          <p:nvPr/>
-        </p:nvSpPr>
-        <p:spPr>
-          <a:xfrm>
-            <a:off x="7909560" y="3520440"/>
-            <a:ext cx="3154680" cy="1737360"/>
+          <p:cNvPr id="13" name="Shape 11"/>
+          <p:cNvSpPr/>
+          <p:nvPr/>
+        </p:nvSpPr>
+        <p:spPr>
+          <a:xfrm>
+            <a:off x="7635240" y="2788920"/>
+            <a:ext cx="3474720" cy="1536192"/>
           </a:xfrm>
           <a:prstGeom prst="roundRect">
             <a:avLst>
-              <a:gd name="adj" fmla="val 6316"/>
+              <a:gd name="adj" fmla="val 7143"/>
             </a:avLst>
           </a:prstGeom>
           <a:solidFill>
+            <a:srgbClr val="FFFFFF">
+              <a:alpha val="88000"/>
+            </a:srgbClr>
+          </a:solidFill>
+          <a:ln w="12700">
+            <a:solidFill>
+              <a:srgbClr val="D6E8F2"/>
+            </a:solidFill>
+            <a:prstDash val="solid"/>
+          </a:ln>
+        </p:spPr>
+      </p:sp>
+      <p:sp>
+        <p:nvSpPr>
+          <p:cNvPr id="14" name="Shape 12"/>
+          <p:cNvSpPr/>
+          <p:nvPr/>
+        </p:nvSpPr>
+        <p:spPr>
+          <a:xfrm>
+            <a:off x="8138160" y="3474720"/>
+            <a:ext cx="256032" cy="411480"/>
+          </a:xfrm>
+          <a:prstGeom prst="rect">
+            <a:avLst/>
+          </a:prstGeom>
+          <a:solidFill>
+            <a:srgbClr val="0068B7"/>
+          </a:solidFill>
+          <a:ln w="12700">
+            <a:solidFill>
+              <a:srgbClr val="0068B7"/>
+            </a:solidFill>
+            <a:prstDash val="solid"/>
+          </a:ln>
+        </p:spPr>
+      </p:sp>
+      <p:sp>
+        <p:nvSpPr>
+          <p:cNvPr id="15" name="Shape 13"/>
+          <p:cNvSpPr/>
+          <p:nvPr/>
+        </p:nvSpPr>
+        <p:spPr>
+          <a:xfrm>
+            <a:off x="8577072" y="3172968"/>
+            <a:ext cx="256032" cy="713232"/>
+          </a:xfrm>
+          <a:prstGeom prst="rect">
+            <a:avLst/>
+          </a:prstGeom>
+          <a:solidFill>
+            <a:srgbClr val="2F8A28"/>
+          </a:solidFill>
+          <a:ln w="12700">
+            <a:solidFill>
+              <a:srgbClr val="2F8A28"/>
+            </a:solidFill>
+            <a:prstDash val="solid"/>
+          </a:ln>
+        </p:spPr>
+      </p:sp>
+      <p:sp>
+        <p:nvSpPr>
+          <p:cNvPr id="16" name="Shape 14"/>
+          <p:cNvSpPr/>
+          <p:nvPr/>
+        </p:nvSpPr>
+        <p:spPr>
+          <a:xfrm>
+            <a:off x="9015984" y="2880360"/>
+            <a:ext cx="256032" cy="1005840"/>
+          </a:xfrm>
+          <a:prstGeom prst="rect">
+            <a:avLst/>
+          </a:prstGeom>
+          <a:solidFill>
+            <a:srgbClr val="D69A2D"/>
+          </a:solidFill>
+          <a:ln w="12700">
+            <a:solidFill>
+              <a:srgbClr val="D69A2D"/>
+            </a:solidFill>
+            <a:prstDash val="solid"/>
+          </a:ln>
+        </p:spPr>
+      </p:sp>
+      <p:sp>
+        <p:nvSpPr>
+          <p:cNvPr id="17" name="Shape 15"/>
+          <p:cNvSpPr/>
+          <p:nvPr/>
+        </p:nvSpPr>
+        <p:spPr>
+          <a:xfrm>
+            <a:off x="9454896" y="3319272"/>
+            <a:ext cx="256032" cy="566928"/>
+          </a:xfrm>
+          <a:prstGeom prst="rect">
+            <a:avLst/>
+          </a:prstGeom>
+          <a:solidFill>
+            <a:srgbClr val="6A4CA3"/>
+          </a:solidFill>
+          <a:ln w="12700">
+            <a:solidFill>
+              <a:srgbClr val="6A4CA3"/>
+            </a:solidFill>
+            <a:prstDash val="solid"/>
+          </a:ln>
+        </p:spPr>
+      </p:sp>
+      <p:sp>
+        <p:nvSpPr>
+          <p:cNvPr id="18" name="Shape 16"/>
+          <p:cNvSpPr/>
+          <p:nvPr/>
+        </p:nvSpPr>
+        <p:spPr>
+          <a:xfrm>
+            <a:off x="8019288" y="3886200"/>
+            <a:ext cx="2706624" cy="0"/>
+          </a:xfrm>
+          <a:prstGeom prst="line">
+            <a:avLst/>
+          </a:prstGeom>
+          <a:noFill/>
+          <a:ln w="15240">
+            <a:solidFill>
+              <a:srgbClr val="003A63"/>
+            </a:solidFill>
+            <a:prstDash val="solid"/>
+          </a:ln>
+        </p:spPr>
+      </p:sp>
+      <p:sp>
+        <p:nvSpPr>
+          <p:cNvPr id="19" name="Text 17"/>
+          <p:cNvSpPr/>
+          <p:nvPr/>
+        </p:nvSpPr>
+        <p:spPr>
+          <a:xfrm>
+            <a:off x="7863840" y="3017520"/>
+            <a:ext cx="3017520" cy="201168"/>
+          </a:xfrm>
+          <a:prstGeom prst="rect">
+            <a:avLst/>
+          </a:prstGeom>
+          <a:noFill/>
+          <a:ln/>
+        </p:spPr>
+        <p:txBody>
+          <a:bodyPr wrap="square" lIns="0" tIns="0" rIns="0" bIns="0" rtlCol="0" anchor="ctr"/>
+          <a:lstStyle/>
+          <a:p>
+            <a:pPr algn="ctr" indent="0" marL="0">
+              <a:buNone/>
+            </a:pPr>
+            <a:r>
+              <a:rPr lang="en-US" sz="1050" b="1" dirty="0">
+                <a:solidFill>
+                  <a:srgbClr val="003A63"/>
+                </a:solidFill>
+                <a:latin typeface="Aptos" pitchFamily="34" charset="0"/>
+                <a:ea typeface="Aptos" pitchFamily="34" charset="-122"/>
+                <a:cs typeface="Aptos" pitchFamily="34" charset="-120"/>
+              </a:rPr>
+              <a:t>Measure and monitor</a:t>
+            </a:r>
+            <a:endParaRPr lang="en-US" sz="1050" dirty="0"/>
+          </a:p>
+        </p:txBody>
+      </p:sp>
+      <p:sp>
+        <p:nvSpPr>
+          <p:cNvPr id="20" name="Shape 18"/>
+          <p:cNvSpPr/>
+          <p:nvPr/>
+        </p:nvSpPr>
+        <p:spPr>
+          <a:xfrm>
+            <a:off x="7635240" y="4498848"/>
+            <a:ext cx="3474720" cy="1143000"/>
+          </a:xfrm>
+          <a:prstGeom prst="roundRect">
+            <a:avLst>
+              <a:gd name="adj" fmla="val 9600"/>
+            </a:avLst>
+          </a:prstGeom>
+          <a:solidFill>
             <a:srgbClr val="EAF6F8"/>
           </a:solidFill>
           <a:ln w="12700">
@@ -13696,14 +15374,14 @@
       </p:sp>
       <p:sp>
         <p:nvSpPr>
-          <p:cNvPr id="16" name="Text 14"/>
-          <p:cNvSpPr/>
-          <p:nvPr/>
-        </p:nvSpPr>
-        <p:spPr>
-          <a:xfrm>
-            <a:off x="8074152" y="3666744"/>
-            <a:ext cx="2825496" cy="256032"/>
+          <p:cNvPr id="21" name="Text 19"/>
+          <p:cNvSpPr/>
+          <p:nvPr/>
+        </p:nvSpPr>
+        <p:spPr>
+          <a:xfrm>
+            <a:off x="7799832" y="4645152"/>
+            <a:ext cx="3145536" cy="256032"/>
           </a:xfrm>
           <a:prstGeom prst="rect">
             <a:avLst/>
@@ -13727,7 +15405,7 @@
                 <a:ea typeface="Aptos" pitchFamily="34" charset="-122"/>
                 <a:cs typeface="Aptos" pitchFamily="34" charset="-120"/>
               </a:rPr>
-              <a:t>Use this for</a:t>
+              <a:t>How to validate</a:t>
             </a:r>
             <a:endParaRPr lang="en-US" sz="1300" dirty="0"/>
           </a:p>
@@ -13735,14 +15413,14 @@
       </p:sp>
       <p:sp>
         <p:nvSpPr>
-          <p:cNvPr id="17" name="Text 15"/>
-          <p:cNvSpPr/>
-          <p:nvPr/>
-        </p:nvSpPr>
-        <p:spPr>
-          <a:xfrm>
-            <a:off x="8074152" y="4023360"/>
-            <a:ext cx="2825496" cy="1097280"/>
+          <p:cNvPr id="22" name="Text 20"/>
+          <p:cNvSpPr/>
+          <p:nvPr/>
+        </p:nvSpPr>
+        <p:spPr>
+          <a:xfrm>
+            <a:off x="7799832" y="5001768"/>
+            <a:ext cx="3145536" cy="502920"/>
           </a:xfrm>
           <a:prstGeom prst="rect">
             <a:avLst/>
@@ -13768,7 +15446,7 @@
                 <a:ea typeface="Aptos" pitchFamily="34" charset="-122"/>
                 <a:cs typeface="Aptos" pitchFamily="34" charset="-120"/>
               </a:rPr>
-              <a:t>Connect the concept to public health decisions, safeguards, documentation, or implementation work.</a:t>
+              <a:t>Use the assignment to test whether you can explain the concept, apply it to a realistic public health situation, and identify what would need review before the work moves forward.</a:t>
             </a:r>
             <a:endParaRPr lang="en-US" sz="1550" dirty="0"/>
           </a:p>
@@ -13942,8 +15620,8 @@
         </p:nvSpPr>
         <p:spPr>
           <a:xfrm>
-            <a:off x="9966960" y="6537960"/>
-            <a:ext cx="1645920" cy="201168"/>
+            <a:off x="9646920" y="6537960"/>
+            <a:ext cx="1965960" cy="201168"/>
           </a:xfrm>
           <a:prstGeom prst="rect">
             <a:avLst/>
@@ -13967,7 +15645,7 @@
                 <a:ea typeface="Aptos" pitchFamily="34" charset="-122"/>
                 <a:cs typeface="Aptos" pitchFamily="34" charset="-120"/>
               </a:rPr>
-              <a:t>Â© Paula Soper</a:t>
+              <a:t>Copyright Paula Soper</a:t>
             </a:r>
             <a:endParaRPr lang="en-US" sz="800" dirty="0"/>
           </a:p>
@@ -14014,77 +15692,13 @@
       </p:sp>
       <p:sp>
         <p:nvSpPr>
-          <p:cNvPr id="8" name="Shape 6"/>
+          <p:cNvPr id="8" name="Text 6"/>
           <p:cNvSpPr/>
           <p:nvPr/>
         </p:nvSpPr>
         <p:spPr>
           <a:xfrm>
             <a:off x="640080" y="658368"/>
-            <a:ext cx="420624" cy="420624"/>
-          </a:xfrm>
-          <a:prstGeom prst="ellipse">
-            <a:avLst/>
-          </a:prstGeom>
-          <a:solidFill>
-            <a:srgbClr val="0068B7"/>
-          </a:solidFill>
-          <a:ln w="12700">
-            <a:solidFill>
-              <a:srgbClr val="0068B7"/>
-            </a:solidFill>
-            <a:prstDash val="solid"/>
-          </a:ln>
-        </p:spPr>
-      </p:sp>
-      <p:sp>
-        <p:nvSpPr>
-          <p:cNvPr id="9" name="Text 7"/>
-          <p:cNvSpPr/>
-          <p:nvPr/>
-        </p:nvSpPr>
-        <p:spPr>
-          <a:xfrm>
-            <a:off x="640080" y="731520"/>
-            <a:ext cx="420624" cy="164592"/>
-          </a:xfrm>
-          <a:prstGeom prst="rect">
-            <a:avLst/>
-          </a:prstGeom>
-          <a:noFill/>
-          <a:ln/>
-        </p:spPr>
-        <p:txBody>
-          <a:bodyPr wrap="square" lIns="0" tIns="0" rIns="0" bIns="0" rtlCol="0" anchor="ctr"/>
-          <a:lstStyle/>
-          <a:p>
-            <a:pPr algn="ctr" indent="0" marL="0">
-              <a:buNone/>
-            </a:pPr>
-            <a:r>
-              <a:rPr lang="en-US" sz="1100" b="1" dirty="0">
-                <a:solidFill>
-                  <a:srgbClr val="FFFFFF"/>
-                </a:solidFill>
-                <a:latin typeface="Aptos" pitchFamily="34" charset="0"/>
-                <a:ea typeface="Aptos" pitchFamily="34" charset="-122"/>
-                <a:cs typeface="Aptos" pitchFamily="34" charset="-120"/>
-              </a:rPr>
-              <a:t>2</a:t>
-            </a:r>
-            <a:endParaRPr lang="en-US" sz="1100" dirty="0"/>
-          </a:p>
-        </p:txBody>
-      </p:sp>
-      <p:sp>
-        <p:nvSpPr>
-          <p:cNvPr id="10" name="Text 8"/>
-          <p:cNvSpPr/>
-          <p:nvPr/>
-        </p:nvSpPr>
-        <p:spPr>
-          <a:xfrm>
-            <a:off x="640080" y="621792"/>
             <a:ext cx="10881360" cy="713232"/>
           </a:xfrm>
           <a:prstGeom prst="rect">
@@ -14119,14 +15733,14 @@
       </p:sp>
       <p:sp>
         <p:nvSpPr>
-          <p:cNvPr id="11" name="Text 9"/>
+          <p:cNvPr id="9" name="Text 7"/>
           <p:cNvSpPr/>
           <p:nvPr/>
         </p:nvSpPr>
         <p:spPr>
           <a:xfrm>
             <a:off x="868680" y="1508760"/>
-            <a:ext cx="6537960" cy="4160520"/>
+            <a:ext cx="6309360" cy="4160520"/>
           </a:xfrm>
           <a:prstGeom prst="rect">
             <a:avLst/>
@@ -14185,18 +15799,18 @@
       </p:sp>
       <p:sp>
         <p:nvSpPr>
-          <p:cNvPr id="12" name="Shape 10"/>
-          <p:cNvSpPr/>
-          <p:nvPr/>
-        </p:nvSpPr>
-        <p:spPr>
-          <a:xfrm>
-            <a:off x="7909560" y="1417320"/>
-            <a:ext cx="3154680" cy="1828800"/>
+          <p:cNvPr id="10" name="Shape 8"/>
+          <p:cNvSpPr/>
+          <p:nvPr/>
+        </p:nvSpPr>
+        <p:spPr>
+          <a:xfrm>
+            <a:off x="7635240" y="1325880"/>
+            <a:ext cx="3474720" cy="1325880"/>
           </a:xfrm>
           <a:prstGeom prst="roundRect">
             <a:avLst>
-              <a:gd name="adj" fmla="val 6000"/>
+              <a:gd name="adj" fmla="val 8276"/>
             </a:avLst>
           </a:prstGeom>
           <a:solidFill>
@@ -14212,14 +15826,14 @@
       </p:sp>
       <p:sp>
         <p:nvSpPr>
-          <p:cNvPr id="13" name="Text 11"/>
-          <p:cNvSpPr/>
-          <p:nvPr/>
-        </p:nvSpPr>
-        <p:spPr>
-          <a:xfrm>
-            <a:off x="8074152" y="1563624"/>
-            <a:ext cx="2825496" cy="256032"/>
+          <p:cNvPr id="11" name="Text 9"/>
+          <p:cNvSpPr/>
+          <p:nvPr/>
+        </p:nvSpPr>
+        <p:spPr>
+          <a:xfrm>
+            <a:off x="7799832" y="1472184"/>
+            <a:ext cx="3145536" cy="256032"/>
           </a:xfrm>
           <a:prstGeom prst="rect">
             <a:avLst/>
@@ -14243,7 +15857,7 @@
                 <a:ea typeface="Aptos" pitchFamily="34" charset="-122"/>
                 <a:cs typeface="Aptos" pitchFamily="34" charset="-120"/>
               </a:rPr>
-              <a:t>Key idea</a:t>
+              <a:t>Data decision</a:t>
             </a:r>
             <a:endParaRPr lang="en-US" sz="1300" dirty="0"/>
           </a:p>
@@ -14251,14 +15865,14 @@
       </p:sp>
       <p:sp>
         <p:nvSpPr>
-          <p:cNvPr id="14" name="Text 12"/>
-          <p:cNvSpPr/>
-          <p:nvPr/>
-        </p:nvSpPr>
-        <p:spPr>
-          <a:xfrm>
-            <a:off x="8074152" y="1920240"/>
-            <a:ext cx="2825496" cy="1188720"/>
+          <p:cNvPr id="12" name="Text 10"/>
+          <p:cNvSpPr/>
+          <p:nvPr/>
+        </p:nvSpPr>
+        <p:spPr>
+          <a:xfrm>
+            <a:off x="7799832" y="1828800"/>
+            <a:ext cx="3145536" cy="685800"/>
           </a:xfrm>
           <a:prstGeom prst="rect">
             <a:avLst/>
@@ -14292,21 +15906,212 @@
       </p:sp>
       <p:sp>
         <p:nvSpPr>
-          <p:cNvPr id="15" name="Shape 13"/>
-          <p:cNvSpPr/>
-          <p:nvPr/>
-        </p:nvSpPr>
-        <p:spPr>
-          <a:xfrm>
-            <a:off x="7909560" y="3520440"/>
-            <a:ext cx="3154680" cy="1737360"/>
+          <p:cNvPr id="13" name="Shape 11"/>
+          <p:cNvSpPr/>
+          <p:nvPr/>
+        </p:nvSpPr>
+        <p:spPr>
+          <a:xfrm>
+            <a:off x="7635240" y="2788920"/>
+            <a:ext cx="3474720" cy="1536192"/>
           </a:xfrm>
           <a:prstGeom prst="roundRect">
             <a:avLst>
-              <a:gd name="adj" fmla="val 6316"/>
+              <a:gd name="adj" fmla="val 7143"/>
             </a:avLst>
           </a:prstGeom>
           <a:solidFill>
+            <a:srgbClr val="FFFFFF">
+              <a:alpha val="88000"/>
+            </a:srgbClr>
+          </a:solidFill>
+          <a:ln w="12700">
+            <a:solidFill>
+              <a:srgbClr val="D6E8F2"/>
+            </a:solidFill>
+            <a:prstDash val="solid"/>
+          </a:ln>
+        </p:spPr>
+      </p:sp>
+      <p:sp>
+        <p:nvSpPr>
+          <p:cNvPr id="14" name="Shape 12"/>
+          <p:cNvSpPr/>
+          <p:nvPr/>
+        </p:nvSpPr>
+        <p:spPr>
+          <a:xfrm>
+            <a:off x="8138160" y="3474720"/>
+            <a:ext cx="256032" cy="411480"/>
+          </a:xfrm>
+          <a:prstGeom prst="rect">
+            <a:avLst/>
+          </a:prstGeom>
+          <a:solidFill>
+            <a:srgbClr val="0068B7"/>
+          </a:solidFill>
+          <a:ln w="12700">
+            <a:solidFill>
+              <a:srgbClr val="0068B7"/>
+            </a:solidFill>
+            <a:prstDash val="solid"/>
+          </a:ln>
+        </p:spPr>
+      </p:sp>
+      <p:sp>
+        <p:nvSpPr>
+          <p:cNvPr id="15" name="Shape 13"/>
+          <p:cNvSpPr/>
+          <p:nvPr/>
+        </p:nvSpPr>
+        <p:spPr>
+          <a:xfrm>
+            <a:off x="8577072" y="3172968"/>
+            <a:ext cx="256032" cy="713232"/>
+          </a:xfrm>
+          <a:prstGeom prst="rect">
+            <a:avLst/>
+          </a:prstGeom>
+          <a:solidFill>
+            <a:srgbClr val="2F8A28"/>
+          </a:solidFill>
+          <a:ln w="12700">
+            <a:solidFill>
+              <a:srgbClr val="2F8A28"/>
+            </a:solidFill>
+            <a:prstDash val="solid"/>
+          </a:ln>
+        </p:spPr>
+      </p:sp>
+      <p:sp>
+        <p:nvSpPr>
+          <p:cNvPr id="16" name="Shape 14"/>
+          <p:cNvSpPr/>
+          <p:nvPr/>
+        </p:nvSpPr>
+        <p:spPr>
+          <a:xfrm>
+            <a:off x="9015984" y="2880360"/>
+            <a:ext cx="256032" cy="1005840"/>
+          </a:xfrm>
+          <a:prstGeom prst="rect">
+            <a:avLst/>
+          </a:prstGeom>
+          <a:solidFill>
+            <a:srgbClr val="D69A2D"/>
+          </a:solidFill>
+          <a:ln w="12700">
+            <a:solidFill>
+              <a:srgbClr val="D69A2D"/>
+            </a:solidFill>
+            <a:prstDash val="solid"/>
+          </a:ln>
+        </p:spPr>
+      </p:sp>
+      <p:sp>
+        <p:nvSpPr>
+          <p:cNvPr id="17" name="Shape 15"/>
+          <p:cNvSpPr/>
+          <p:nvPr/>
+        </p:nvSpPr>
+        <p:spPr>
+          <a:xfrm>
+            <a:off x="9454896" y="3319272"/>
+            <a:ext cx="256032" cy="566928"/>
+          </a:xfrm>
+          <a:prstGeom prst="rect">
+            <a:avLst/>
+          </a:prstGeom>
+          <a:solidFill>
+            <a:srgbClr val="6A4CA3"/>
+          </a:solidFill>
+          <a:ln w="12700">
+            <a:solidFill>
+              <a:srgbClr val="6A4CA3"/>
+            </a:solidFill>
+            <a:prstDash val="solid"/>
+          </a:ln>
+        </p:spPr>
+      </p:sp>
+      <p:sp>
+        <p:nvSpPr>
+          <p:cNvPr id="18" name="Shape 16"/>
+          <p:cNvSpPr/>
+          <p:nvPr/>
+        </p:nvSpPr>
+        <p:spPr>
+          <a:xfrm>
+            <a:off x="8019288" y="3886200"/>
+            <a:ext cx="2706624" cy="0"/>
+          </a:xfrm>
+          <a:prstGeom prst="line">
+            <a:avLst/>
+          </a:prstGeom>
+          <a:noFill/>
+          <a:ln w="15240">
+            <a:solidFill>
+              <a:srgbClr val="003A63"/>
+            </a:solidFill>
+            <a:prstDash val="solid"/>
+          </a:ln>
+        </p:spPr>
+      </p:sp>
+      <p:sp>
+        <p:nvSpPr>
+          <p:cNvPr id="19" name="Text 17"/>
+          <p:cNvSpPr/>
+          <p:nvPr/>
+        </p:nvSpPr>
+        <p:spPr>
+          <a:xfrm>
+            <a:off x="7863840" y="3017520"/>
+            <a:ext cx="3017520" cy="201168"/>
+          </a:xfrm>
+          <a:prstGeom prst="rect">
+            <a:avLst/>
+          </a:prstGeom>
+          <a:noFill/>
+          <a:ln/>
+        </p:spPr>
+        <p:txBody>
+          <a:bodyPr wrap="square" lIns="0" tIns="0" rIns="0" bIns="0" rtlCol="0" anchor="ctr"/>
+          <a:lstStyle/>
+          <a:p>
+            <a:pPr algn="ctr" indent="0" marL="0">
+              <a:buNone/>
+            </a:pPr>
+            <a:r>
+              <a:rPr lang="en-US" sz="1050" b="1" dirty="0">
+                <a:solidFill>
+                  <a:srgbClr val="003A63"/>
+                </a:solidFill>
+                <a:latin typeface="Aptos" pitchFamily="34" charset="0"/>
+                <a:ea typeface="Aptos" pitchFamily="34" charset="-122"/>
+                <a:cs typeface="Aptos" pitchFamily="34" charset="-120"/>
+              </a:rPr>
+              <a:t>Measure and monitor</a:t>
+            </a:r>
+            <a:endParaRPr lang="en-US" sz="1050" dirty="0"/>
+          </a:p>
+        </p:txBody>
+      </p:sp>
+      <p:sp>
+        <p:nvSpPr>
+          <p:cNvPr id="20" name="Shape 18"/>
+          <p:cNvSpPr/>
+          <p:nvPr/>
+        </p:nvSpPr>
+        <p:spPr>
+          <a:xfrm>
+            <a:off x="7635240" y="4498848"/>
+            <a:ext cx="3474720" cy="1143000"/>
+          </a:xfrm>
+          <a:prstGeom prst="roundRect">
+            <a:avLst>
+              <a:gd name="adj" fmla="val 9600"/>
+            </a:avLst>
+          </a:prstGeom>
+          <a:solidFill>
             <a:srgbClr val="EAF6F8"/>
           </a:solidFill>
           <a:ln w="12700">
@@ -14319,14 +16124,14 @@
       </p:sp>
       <p:sp>
         <p:nvSpPr>
-          <p:cNvPr id="16" name="Text 14"/>
-          <p:cNvSpPr/>
-          <p:nvPr/>
-        </p:nvSpPr>
-        <p:spPr>
-          <a:xfrm>
-            <a:off x="8074152" y="3666744"/>
-            <a:ext cx="2825496" cy="256032"/>
+          <p:cNvPr id="21" name="Text 19"/>
+          <p:cNvSpPr/>
+          <p:nvPr/>
+        </p:nvSpPr>
+        <p:spPr>
+          <a:xfrm>
+            <a:off x="7799832" y="4645152"/>
+            <a:ext cx="3145536" cy="256032"/>
           </a:xfrm>
           <a:prstGeom prst="rect">
             <a:avLst/>
@@ -14350,7 +16155,7 @@
                 <a:ea typeface="Aptos" pitchFamily="34" charset="-122"/>
                 <a:cs typeface="Aptos" pitchFamily="34" charset="-120"/>
               </a:rPr>
-              <a:t>Use this for</a:t>
+              <a:t>How to validate</a:t>
             </a:r>
             <a:endParaRPr lang="en-US" sz="1300" dirty="0"/>
           </a:p>
@@ -14358,14 +16163,14 @@
       </p:sp>
       <p:sp>
         <p:nvSpPr>
-          <p:cNvPr id="17" name="Text 15"/>
-          <p:cNvSpPr/>
-          <p:nvPr/>
-        </p:nvSpPr>
-        <p:spPr>
-          <a:xfrm>
-            <a:off x="8074152" y="4023360"/>
-            <a:ext cx="2825496" cy="1097280"/>
+          <p:cNvPr id="22" name="Text 20"/>
+          <p:cNvSpPr/>
+          <p:nvPr/>
+        </p:nvSpPr>
+        <p:spPr>
+          <a:xfrm>
+            <a:off x="7799832" y="5001768"/>
+            <a:ext cx="3145536" cy="502920"/>
           </a:xfrm>
           <a:prstGeom prst="rect">
             <a:avLst/>
@@ -14391,7 +16196,7 @@
                 <a:ea typeface="Aptos" pitchFamily="34" charset="-122"/>
                 <a:cs typeface="Aptos" pitchFamily="34" charset="-120"/>
               </a:rPr>
-              <a:t>Connect the concept to public health decisions, safeguards, documentation, or implementation work.</a:t>
+              <a:t>Connect the concept to data quality, model performance, validation evidence, monitoring measures, and decisions that remain under human control.</a:t>
             </a:r>
             <a:endParaRPr lang="en-US" sz="1550" dirty="0"/>
           </a:p>
@@ -14565,8 +16370,8 @@
         </p:nvSpPr>
         <p:spPr>
           <a:xfrm>
-            <a:off x="9966960" y="6537960"/>
-            <a:ext cx="1645920" cy="201168"/>
+            <a:off x="9646920" y="6537960"/>
+            <a:ext cx="1965960" cy="201168"/>
           </a:xfrm>
           <a:prstGeom prst="rect">
             <a:avLst/>
@@ -14590,7 +16395,7 @@
                 <a:ea typeface="Aptos" pitchFamily="34" charset="-122"/>
                 <a:cs typeface="Aptos" pitchFamily="34" charset="-120"/>
               </a:rPr>
-              <a:t>Â© Paula Soper</a:t>
+              <a:t>Copyright Paula Soper</a:t>
             </a:r>
             <a:endParaRPr lang="en-US" sz="800" dirty="0"/>
           </a:p>
@@ -14637,77 +16442,13 @@
       </p:sp>
       <p:sp>
         <p:nvSpPr>
-          <p:cNvPr id="8" name="Shape 6"/>
+          <p:cNvPr id="8" name="Text 6"/>
           <p:cNvSpPr/>
           <p:nvPr/>
         </p:nvSpPr>
         <p:spPr>
           <a:xfrm>
             <a:off x="640080" y="658368"/>
-            <a:ext cx="420624" cy="420624"/>
-          </a:xfrm>
-          <a:prstGeom prst="ellipse">
-            <a:avLst/>
-          </a:prstGeom>
-          <a:solidFill>
-            <a:srgbClr val="0068B7"/>
-          </a:solidFill>
-          <a:ln w="12700">
-            <a:solidFill>
-              <a:srgbClr val="0068B7"/>
-            </a:solidFill>
-            <a:prstDash val="solid"/>
-          </a:ln>
-        </p:spPr>
-      </p:sp>
-      <p:sp>
-        <p:nvSpPr>
-          <p:cNvPr id="9" name="Text 7"/>
-          <p:cNvSpPr/>
-          <p:nvPr/>
-        </p:nvSpPr>
-        <p:spPr>
-          <a:xfrm>
-            <a:off x="640080" y="731520"/>
-            <a:ext cx="420624" cy="164592"/>
-          </a:xfrm>
-          <a:prstGeom prst="rect">
-            <a:avLst/>
-          </a:prstGeom>
-          <a:noFill/>
-          <a:ln/>
-        </p:spPr>
-        <p:txBody>
-          <a:bodyPr wrap="square" lIns="0" tIns="0" rIns="0" bIns="0" rtlCol="0" anchor="ctr"/>
-          <a:lstStyle/>
-          <a:p>
-            <a:pPr algn="ctr" indent="0" marL="0">
-              <a:buNone/>
-            </a:pPr>
-            <a:r>
-              <a:rPr lang="en-US" sz="1100" b="1" dirty="0">
-                <a:solidFill>
-                  <a:srgbClr val="FFFFFF"/>
-                </a:solidFill>
-                <a:latin typeface="Aptos" pitchFamily="34" charset="0"/>
-                <a:ea typeface="Aptos" pitchFamily="34" charset="-122"/>
-                <a:cs typeface="Aptos" pitchFamily="34" charset="-120"/>
-              </a:rPr>
-              <a:t>3</a:t>
-            </a:r>
-            <a:endParaRPr lang="en-US" sz="1100" dirty="0"/>
-          </a:p>
-        </p:txBody>
-      </p:sp>
-      <p:sp>
-        <p:nvSpPr>
-          <p:cNvPr id="10" name="Text 8"/>
-          <p:cNvSpPr/>
-          <p:nvPr/>
-        </p:nvSpPr>
-        <p:spPr>
-          <a:xfrm>
-            <a:off x="640080" y="621792"/>
             <a:ext cx="10881360" cy="713232"/>
           </a:xfrm>
           <a:prstGeom prst="rect">
@@ -14742,14 +16483,14 @@
       </p:sp>
       <p:sp>
         <p:nvSpPr>
-          <p:cNvPr id="11" name="Text 9"/>
+          <p:cNvPr id="9" name="Text 7"/>
           <p:cNvSpPr/>
           <p:nvPr/>
         </p:nvSpPr>
         <p:spPr>
           <a:xfrm>
             <a:off x="868680" y="1508760"/>
-            <a:ext cx="6537960" cy="4160520"/>
+            <a:ext cx="6309360" cy="4160520"/>
           </a:xfrm>
           <a:prstGeom prst="rect">
             <a:avLst/>
@@ -14808,18 +16549,18 @@
       </p:sp>
       <p:sp>
         <p:nvSpPr>
-          <p:cNvPr id="12" name="Shape 10"/>
-          <p:cNvSpPr/>
-          <p:nvPr/>
-        </p:nvSpPr>
-        <p:spPr>
-          <a:xfrm>
-            <a:off x="7909560" y="1417320"/>
-            <a:ext cx="3154680" cy="1828800"/>
+          <p:cNvPr id="10" name="Shape 8"/>
+          <p:cNvSpPr/>
+          <p:nvPr/>
+        </p:nvSpPr>
+        <p:spPr>
+          <a:xfrm>
+            <a:off x="7635240" y="1325880"/>
+            <a:ext cx="3474720" cy="1325880"/>
           </a:xfrm>
           <a:prstGeom prst="roundRect">
             <a:avLst>
-              <a:gd name="adj" fmla="val 6000"/>
+              <a:gd name="adj" fmla="val 8276"/>
             </a:avLst>
           </a:prstGeom>
           <a:solidFill>
@@ -14835,14 +16576,14 @@
       </p:sp>
       <p:sp>
         <p:nvSpPr>
-          <p:cNvPr id="13" name="Text 11"/>
-          <p:cNvSpPr/>
-          <p:nvPr/>
-        </p:nvSpPr>
-        <p:spPr>
-          <a:xfrm>
-            <a:off x="8074152" y="1563624"/>
-            <a:ext cx="2825496" cy="256032"/>
+          <p:cNvPr id="11" name="Text 9"/>
+          <p:cNvSpPr/>
+          <p:nvPr/>
+        </p:nvSpPr>
+        <p:spPr>
+          <a:xfrm>
+            <a:off x="7799832" y="1472184"/>
+            <a:ext cx="3145536" cy="256032"/>
           </a:xfrm>
           <a:prstGeom prst="rect">
             <a:avLst/>
@@ -14866,7 +16607,7 @@
                 <a:ea typeface="Aptos" pitchFamily="34" charset="-122"/>
                 <a:cs typeface="Aptos" pitchFamily="34" charset="-120"/>
               </a:rPr>
-              <a:t>Key idea</a:t>
+              <a:t>Data decision</a:t>
             </a:r>
             <a:endParaRPr lang="en-US" sz="1300" dirty="0"/>
           </a:p>
@@ -14874,14 +16615,14 @@
       </p:sp>
       <p:sp>
         <p:nvSpPr>
-          <p:cNvPr id="14" name="Text 12"/>
-          <p:cNvSpPr/>
-          <p:nvPr/>
-        </p:nvSpPr>
-        <p:spPr>
-          <a:xfrm>
-            <a:off x="8074152" y="1920240"/>
-            <a:ext cx="2825496" cy="1188720"/>
+          <p:cNvPr id="12" name="Text 10"/>
+          <p:cNvSpPr/>
+          <p:nvPr/>
+        </p:nvSpPr>
+        <p:spPr>
+          <a:xfrm>
+            <a:off x="7799832" y="1828800"/>
+            <a:ext cx="3145536" cy="685800"/>
           </a:xfrm>
           <a:prstGeom prst="rect">
             <a:avLst/>
@@ -14915,21 +16656,212 @@
       </p:sp>
       <p:sp>
         <p:nvSpPr>
-          <p:cNvPr id="15" name="Shape 13"/>
-          <p:cNvSpPr/>
-          <p:nvPr/>
-        </p:nvSpPr>
-        <p:spPr>
-          <a:xfrm>
-            <a:off x="7909560" y="3520440"/>
-            <a:ext cx="3154680" cy="1737360"/>
+          <p:cNvPr id="13" name="Shape 11"/>
+          <p:cNvSpPr/>
+          <p:nvPr/>
+        </p:nvSpPr>
+        <p:spPr>
+          <a:xfrm>
+            <a:off x="7635240" y="2788920"/>
+            <a:ext cx="3474720" cy="1536192"/>
           </a:xfrm>
           <a:prstGeom prst="roundRect">
             <a:avLst>
-              <a:gd name="adj" fmla="val 6316"/>
+              <a:gd name="adj" fmla="val 7143"/>
             </a:avLst>
           </a:prstGeom>
           <a:solidFill>
+            <a:srgbClr val="FFFFFF">
+              <a:alpha val="88000"/>
+            </a:srgbClr>
+          </a:solidFill>
+          <a:ln w="12700">
+            <a:solidFill>
+              <a:srgbClr val="D6E8F2"/>
+            </a:solidFill>
+            <a:prstDash val="solid"/>
+          </a:ln>
+        </p:spPr>
+      </p:sp>
+      <p:sp>
+        <p:nvSpPr>
+          <p:cNvPr id="14" name="Shape 12"/>
+          <p:cNvSpPr/>
+          <p:nvPr/>
+        </p:nvSpPr>
+        <p:spPr>
+          <a:xfrm>
+            <a:off x="8138160" y="3474720"/>
+            <a:ext cx="256032" cy="411480"/>
+          </a:xfrm>
+          <a:prstGeom prst="rect">
+            <a:avLst/>
+          </a:prstGeom>
+          <a:solidFill>
+            <a:srgbClr val="0068B7"/>
+          </a:solidFill>
+          <a:ln w="12700">
+            <a:solidFill>
+              <a:srgbClr val="0068B7"/>
+            </a:solidFill>
+            <a:prstDash val="solid"/>
+          </a:ln>
+        </p:spPr>
+      </p:sp>
+      <p:sp>
+        <p:nvSpPr>
+          <p:cNvPr id="15" name="Shape 13"/>
+          <p:cNvSpPr/>
+          <p:nvPr/>
+        </p:nvSpPr>
+        <p:spPr>
+          <a:xfrm>
+            <a:off x="8577072" y="3172968"/>
+            <a:ext cx="256032" cy="713232"/>
+          </a:xfrm>
+          <a:prstGeom prst="rect">
+            <a:avLst/>
+          </a:prstGeom>
+          <a:solidFill>
+            <a:srgbClr val="2F8A28"/>
+          </a:solidFill>
+          <a:ln w="12700">
+            <a:solidFill>
+              <a:srgbClr val="2F8A28"/>
+            </a:solidFill>
+            <a:prstDash val="solid"/>
+          </a:ln>
+        </p:spPr>
+      </p:sp>
+      <p:sp>
+        <p:nvSpPr>
+          <p:cNvPr id="16" name="Shape 14"/>
+          <p:cNvSpPr/>
+          <p:nvPr/>
+        </p:nvSpPr>
+        <p:spPr>
+          <a:xfrm>
+            <a:off x="9015984" y="2880360"/>
+            <a:ext cx="256032" cy="1005840"/>
+          </a:xfrm>
+          <a:prstGeom prst="rect">
+            <a:avLst/>
+          </a:prstGeom>
+          <a:solidFill>
+            <a:srgbClr val="D69A2D"/>
+          </a:solidFill>
+          <a:ln w="12700">
+            <a:solidFill>
+              <a:srgbClr val="D69A2D"/>
+            </a:solidFill>
+            <a:prstDash val="solid"/>
+          </a:ln>
+        </p:spPr>
+      </p:sp>
+      <p:sp>
+        <p:nvSpPr>
+          <p:cNvPr id="17" name="Shape 15"/>
+          <p:cNvSpPr/>
+          <p:nvPr/>
+        </p:nvSpPr>
+        <p:spPr>
+          <a:xfrm>
+            <a:off x="9454896" y="3319272"/>
+            <a:ext cx="256032" cy="566928"/>
+          </a:xfrm>
+          <a:prstGeom prst="rect">
+            <a:avLst/>
+          </a:prstGeom>
+          <a:solidFill>
+            <a:srgbClr val="6A4CA3"/>
+          </a:solidFill>
+          <a:ln w="12700">
+            <a:solidFill>
+              <a:srgbClr val="6A4CA3"/>
+            </a:solidFill>
+            <a:prstDash val="solid"/>
+          </a:ln>
+        </p:spPr>
+      </p:sp>
+      <p:sp>
+        <p:nvSpPr>
+          <p:cNvPr id="18" name="Shape 16"/>
+          <p:cNvSpPr/>
+          <p:nvPr/>
+        </p:nvSpPr>
+        <p:spPr>
+          <a:xfrm>
+            <a:off x="8019288" y="3886200"/>
+            <a:ext cx="2706624" cy="0"/>
+          </a:xfrm>
+          <a:prstGeom prst="line">
+            <a:avLst/>
+          </a:prstGeom>
+          <a:noFill/>
+          <a:ln w="15240">
+            <a:solidFill>
+              <a:srgbClr val="003A63"/>
+            </a:solidFill>
+            <a:prstDash val="solid"/>
+          </a:ln>
+        </p:spPr>
+      </p:sp>
+      <p:sp>
+        <p:nvSpPr>
+          <p:cNvPr id="19" name="Text 17"/>
+          <p:cNvSpPr/>
+          <p:nvPr/>
+        </p:nvSpPr>
+        <p:spPr>
+          <a:xfrm>
+            <a:off x="7863840" y="3017520"/>
+            <a:ext cx="3017520" cy="201168"/>
+          </a:xfrm>
+          <a:prstGeom prst="rect">
+            <a:avLst/>
+          </a:prstGeom>
+          <a:noFill/>
+          <a:ln/>
+        </p:spPr>
+        <p:txBody>
+          <a:bodyPr wrap="square" lIns="0" tIns="0" rIns="0" bIns="0" rtlCol="0" anchor="ctr"/>
+          <a:lstStyle/>
+          <a:p>
+            <a:pPr algn="ctr" indent="0" marL="0">
+              <a:buNone/>
+            </a:pPr>
+            <a:r>
+              <a:rPr lang="en-US" sz="1050" b="1" dirty="0">
+                <a:solidFill>
+                  <a:srgbClr val="003A63"/>
+                </a:solidFill>
+                <a:latin typeface="Aptos" pitchFamily="34" charset="0"/>
+                <a:ea typeface="Aptos" pitchFamily="34" charset="-122"/>
+                <a:cs typeface="Aptos" pitchFamily="34" charset="-120"/>
+              </a:rPr>
+              <a:t>Measure and monitor</a:t>
+            </a:r>
+            <a:endParaRPr lang="en-US" sz="1050" dirty="0"/>
+          </a:p>
+        </p:txBody>
+      </p:sp>
+      <p:sp>
+        <p:nvSpPr>
+          <p:cNvPr id="20" name="Shape 18"/>
+          <p:cNvSpPr/>
+          <p:nvPr/>
+        </p:nvSpPr>
+        <p:spPr>
+          <a:xfrm>
+            <a:off x="7635240" y="4498848"/>
+            <a:ext cx="3474720" cy="1143000"/>
+          </a:xfrm>
+          <a:prstGeom prst="roundRect">
+            <a:avLst>
+              <a:gd name="adj" fmla="val 9600"/>
+            </a:avLst>
+          </a:prstGeom>
+          <a:solidFill>
             <a:srgbClr val="EAF6F8"/>
           </a:solidFill>
           <a:ln w="12700">
@@ -14942,14 +16874,14 @@
       </p:sp>
       <p:sp>
         <p:nvSpPr>
-          <p:cNvPr id="16" name="Text 14"/>
-          <p:cNvSpPr/>
-          <p:nvPr/>
-        </p:nvSpPr>
-        <p:spPr>
-          <a:xfrm>
-            <a:off x="8074152" y="3666744"/>
-            <a:ext cx="2825496" cy="256032"/>
+          <p:cNvPr id="21" name="Text 19"/>
+          <p:cNvSpPr/>
+          <p:nvPr/>
+        </p:nvSpPr>
+        <p:spPr>
+          <a:xfrm>
+            <a:off x="7799832" y="4645152"/>
+            <a:ext cx="3145536" cy="256032"/>
           </a:xfrm>
           <a:prstGeom prst="rect">
             <a:avLst/>
@@ -14973,7 +16905,7 @@
                 <a:ea typeface="Aptos" pitchFamily="34" charset="-122"/>
                 <a:cs typeface="Aptos" pitchFamily="34" charset="-120"/>
               </a:rPr>
-              <a:t>Use this for</a:t>
+              <a:t>How to validate</a:t>
             </a:r>
             <a:endParaRPr lang="en-US" sz="1300" dirty="0"/>
           </a:p>
@@ -14981,14 +16913,14 @@
       </p:sp>
       <p:sp>
         <p:nvSpPr>
-          <p:cNvPr id="17" name="Text 15"/>
-          <p:cNvSpPr/>
-          <p:nvPr/>
-        </p:nvSpPr>
-        <p:spPr>
-          <a:xfrm>
-            <a:off x="8074152" y="4023360"/>
-            <a:ext cx="2825496" cy="1097280"/>
+          <p:cNvPr id="22" name="Text 20"/>
+          <p:cNvSpPr/>
+          <p:nvPr/>
+        </p:nvSpPr>
+        <p:spPr>
+          <a:xfrm>
+            <a:off x="7799832" y="5001768"/>
+            <a:ext cx="3145536" cy="502920"/>
           </a:xfrm>
           <a:prstGeom prst="rect">
             <a:avLst/>
@@ -15014,7 +16946,7 @@
                 <a:ea typeface="Aptos" pitchFamily="34" charset="-122"/>
                 <a:cs typeface="Aptos" pitchFamily="34" charset="-120"/>
               </a:rPr>
-              <a:t>Connect the concept to public health decisions, safeguards, documentation, or implementation work.</a:t>
+              <a:t>Connect the concept to data quality, model performance, validation evidence, monitoring measures, and decisions that remain under human control.</a:t>
             </a:r>
             <a:endParaRPr lang="en-US" sz="1550" dirty="0"/>
           </a:p>
@@ -15188,8 +17120,8 @@
         </p:nvSpPr>
         <p:spPr>
           <a:xfrm>
-            <a:off x="9966960" y="6537960"/>
-            <a:ext cx="1645920" cy="201168"/>
+            <a:off x="9646920" y="6537960"/>
+            <a:ext cx="1965960" cy="201168"/>
           </a:xfrm>
           <a:prstGeom prst="rect">
             <a:avLst/>
@@ -15213,7 +17145,7 @@
                 <a:ea typeface="Aptos" pitchFamily="34" charset="-122"/>
                 <a:cs typeface="Aptos" pitchFamily="34" charset="-120"/>
               </a:rPr>
-              <a:t>Â© Paula Soper</a:t>
+              <a:t>Copyright Paula Soper</a:t>
             </a:r>
             <a:endParaRPr lang="en-US" sz="800" dirty="0"/>
           </a:p>
@@ -15260,77 +17192,13 @@
       </p:sp>
       <p:sp>
         <p:nvSpPr>
-          <p:cNvPr id="8" name="Shape 6"/>
+          <p:cNvPr id="8" name="Text 6"/>
           <p:cNvSpPr/>
           <p:nvPr/>
         </p:nvSpPr>
         <p:spPr>
           <a:xfrm>
             <a:off x="640080" y="658368"/>
-            <a:ext cx="420624" cy="420624"/>
-          </a:xfrm>
-          <a:prstGeom prst="ellipse">
-            <a:avLst/>
-          </a:prstGeom>
-          <a:solidFill>
-            <a:srgbClr val="0068B7"/>
-          </a:solidFill>
-          <a:ln w="12700">
-            <a:solidFill>
-              <a:srgbClr val="0068B7"/>
-            </a:solidFill>
-            <a:prstDash val="solid"/>
-          </a:ln>
-        </p:spPr>
-      </p:sp>
-      <p:sp>
-        <p:nvSpPr>
-          <p:cNvPr id="9" name="Text 7"/>
-          <p:cNvSpPr/>
-          <p:nvPr/>
-        </p:nvSpPr>
-        <p:spPr>
-          <a:xfrm>
-            <a:off x="640080" y="731520"/>
-            <a:ext cx="420624" cy="164592"/>
-          </a:xfrm>
-          <a:prstGeom prst="rect">
-            <a:avLst/>
-          </a:prstGeom>
-          <a:noFill/>
-          <a:ln/>
-        </p:spPr>
-        <p:txBody>
-          <a:bodyPr wrap="square" lIns="0" tIns="0" rIns="0" bIns="0" rtlCol="0" anchor="ctr"/>
-          <a:lstStyle/>
-          <a:p>
-            <a:pPr algn="ctr" indent="0" marL="0">
-              <a:buNone/>
-            </a:pPr>
-            <a:r>
-              <a:rPr lang="en-US" sz="1100" b="1" dirty="0">
-                <a:solidFill>
-                  <a:srgbClr val="FFFFFF"/>
-                </a:solidFill>
-                <a:latin typeface="Aptos" pitchFamily="34" charset="0"/>
-                <a:ea typeface="Aptos" pitchFamily="34" charset="-122"/>
-                <a:cs typeface="Aptos" pitchFamily="34" charset="-120"/>
-              </a:rPr>
-              <a:t>4</a:t>
-            </a:r>
-            <a:endParaRPr lang="en-US" sz="1100" dirty="0"/>
-          </a:p>
-        </p:txBody>
-      </p:sp>
-      <p:sp>
-        <p:nvSpPr>
-          <p:cNvPr id="10" name="Text 8"/>
-          <p:cNvSpPr/>
-          <p:nvPr/>
-        </p:nvSpPr>
-        <p:spPr>
-          <a:xfrm>
-            <a:off x="640080" y="621792"/>
             <a:ext cx="10881360" cy="713232"/>
           </a:xfrm>
           <a:prstGeom prst="rect">
@@ -15365,14 +17233,14 @@
       </p:sp>
       <p:sp>
         <p:nvSpPr>
-          <p:cNvPr id="11" name="Text 9"/>
+          <p:cNvPr id="9" name="Text 7"/>
           <p:cNvSpPr/>
           <p:nvPr/>
         </p:nvSpPr>
         <p:spPr>
           <a:xfrm>
             <a:off x="868680" y="1508760"/>
-            <a:ext cx="6537960" cy="4160520"/>
+            <a:ext cx="6309360" cy="4160520"/>
           </a:xfrm>
           <a:prstGeom prst="rect">
             <a:avLst/>
@@ -15431,18 +17299,18 @@
       </p:sp>
       <p:sp>
         <p:nvSpPr>
-          <p:cNvPr id="12" name="Shape 10"/>
-          <p:cNvSpPr/>
-          <p:nvPr/>
-        </p:nvSpPr>
-        <p:spPr>
-          <a:xfrm>
-            <a:off x="7909560" y="1417320"/>
-            <a:ext cx="3154680" cy="1828800"/>
+          <p:cNvPr id="10" name="Shape 8"/>
+          <p:cNvSpPr/>
+          <p:nvPr/>
+        </p:nvSpPr>
+        <p:spPr>
+          <a:xfrm>
+            <a:off x="7635240" y="1325880"/>
+            <a:ext cx="3474720" cy="1325880"/>
           </a:xfrm>
           <a:prstGeom prst="roundRect">
             <a:avLst>
-              <a:gd name="adj" fmla="val 6000"/>
+              <a:gd name="adj" fmla="val 8276"/>
             </a:avLst>
           </a:prstGeom>
           <a:solidFill>
@@ -15458,14 +17326,14 @@
       </p:sp>
       <p:sp>
         <p:nvSpPr>
-          <p:cNvPr id="13" name="Text 11"/>
-          <p:cNvSpPr/>
-          <p:nvPr/>
-        </p:nvSpPr>
-        <p:spPr>
-          <a:xfrm>
-            <a:off x="8074152" y="1563624"/>
-            <a:ext cx="2825496" cy="256032"/>
+          <p:cNvPr id="11" name="Text 9"/>
+          <p:cNvSpPr/>
+          <p:nvPr/>
+        </p:nvSpPr>
+        <p:spPr>
+          <a:xfrm>
+            <a:off x="7799832" y="1472184"/>
+            <a:ext cx="3145536" cy="256032"/>
           </a:xfrm>
           <a:prstGeom prst="rect">
             <a:avLst/>
@@ -15489,7 +17357,7 @@
                 <a:ea typeface="Aptos" pitchFamily="34" charset="-122"/>
                 <a:cs typeface="Aptos" pitchFamily="34" charset="-120"/>
               </a:rPr>
-              <a:t>Key idea</a:t>
+              <a:t>Data decision</a:t>
             </a:r>
             <a:endParaRPr lang="en-US" sz="1300" dirty="0"/>
           </a:p>
@@ -15497,14 +17365,14 @@
       </p:sp>
       <p:sp>
         <p:nvSpPr>
-          <p:cNvPr id="14" name="Text 12"/>
-          <p:cNvSpPr/>
-          <p:nvPr/>
-        </p:nvSpPr>
-        <p:spPr>
-          <a:xfrm>
-            <a:off x="8074152" y="1920240"/>
-            <a:ext cx="2825496" cy="1188720"/>
+          <p:cNvPr id="12" name="Text 10"/>
+          <p:cNvSpPr/>
+          <p:nvPr/>
+        </p:nvSpPr>
+        <p:spPr>
+          <a:xfrm>
+            <a:off x="7799832" y="1828800"/>
+            <a:ext cx="3145536" cy="685800"/>
           </a:xfrm>
           <a:prstGeom prst="rect">
             <a:avLst/>
@@ -15538,21 +17406,212 @@
       </p:sp>
       <p:sp>
         <p:nvSpPr>
-          <p:cNvPr id="15" name="Shape 13"/>
-          <p:cNvSpPr/>
-          <p:nvPr/>
-        </p:nvSpPr>
-        <p:spPr>
-          <a:xfrm>
-            <a:off x="7909560" y="3520440"/>
-            <a:ext cx="3154680" cy="1737360"/>
+          <p:cNvPr id="13" name="Shape 11"/>
+          <p:cNvSpPr/>
+          <p:nvPr/>
+        </p:nvSpPr>
+        <p:spPr>
+          <a:xfrm>
+            <a:off x="7635240" y="2788920"/>
+            <a:ext cx="3474720" cy="1536192"/>
           </a:xfrm>
           <a:prstGeom prst="roundRect">
             <a:avLst>
-              <a:gd name="adj" fmla="val 6316"/>
+              <a:gd name="adj" fmla="val 7143"/>
             </a:avLst>
           </a:prstGeom>
           <a:solidFill>
+            <a:srgbClr val="FFFFFF">
+              <a:alpha val="88000"/>
+            </a:srgbClr>
+          </a:solidFill>
+          <a:ln w="12700">
+            <a:solidFill>
+              <a:srgbClr val="D6E8F2"/>
+            </a:solidFill>
+            <a:prstDash val="solid"/>
+          </a:ln>
+        </p:spPr>
+      </p:sp>
+      <p:sp>
+        <p:nvSpPr>
+          <p:cNvPr id="14" name="Shape 12"/>
+          <p:cNvSpPr/>
+          <p:nvPr/>
+        </p:nvSpPr>
+        <p:spPr>
+          <a:xfrm>
+            <a:off x="8138160" y="3474720"/>
+            <a:ext cx="256032" cy="411480"/>
+          </a:xfrm>
+          <a:prstGeom prst="rect">
+            <a:avLst/>
+          </a:prstGeom>
+          <a:solidFill>
+            <a:srgbClr val="0068B7"/>
+          </a:solidFill>
+          <a:ln w="12700">
+            <a:solidFill>
+              <a:srgbClr val="0068B7"/>
+            </a:solidFill>
+            <a:prstDash val="solid"/>
+          </a:ln>
+        </p:spPr>
+      </p:sp>
+      <p:sp>
+        <p:nvSpPr>
+          <p:cNvPr id="15" name="Shape 13"/>
+          <p:cNvSpPr/>
+          <p:nvPr/>
+        </p:nvSpPr>
+        <p:spPr>
+          <a:xfrm>
+            <a:off x="8577072" y="3172968"/>
+            <a:ext cx="256032" cy="713232"/>
+          </a:xfrm>
+          <a:prstGeom prst="rect">
+            <a:avLst/>
+          </a:prstGeom>
+          <a:solidFill>
+            <a:srgbClr val="2F8A28"/>
+          </a:solidFill>
+          <a:ln w="12700">
+            <a:solidFill>
+              <a:srgbClr val="2F8A28"/>
+            </a:solidFill>
+            <a:prstDash val="solid"/>
+          </a:ln>
+        </p:spPr>
+      </p:sp>
+      <p:sp>
+        <p:nvSpPr>
+          <p:cNvPr id="16" name="Shape 14"/>
+          <p:cNvSpPr/>
+          <p:nvPr/>
+        </p:nvSpPr>
+        <p:spPr>
+          <a:xfrm>
+            <a:off x="9015984" y="2880360"/>
+            <a:ext cx="256032" cy="1005840"/>
+          </a:xfrm>
+          <a:prstGeom prst="rect">
+            <a:avLst/>
+          </a:prstGeom>
+          <a:solidFill>
+            <a:srgbClr val="D69A2D"/>
+          </a:solidFill>
+          <a:ln w="12700">
+            <a:solidFill>
+              <a:srgbClr val="D69A2D"/>
+            </a:solidFill>
+            <a:prstDash val="solid"/>
+          </a:ln>
+        </p:spPr>
+      </p:sp>
+      <p:sp>
+        <p:nvSpPr>
+          <p:cNvPr id="17" name="Shape 15"/>
+          <p:cNvSpPr/>
+          <p:nvPr/>
+        </p:nvSpPr>
+        <p:spPr>
+          <a:xfrm>
+            <a:off x="9454896" y="3319272"/>
+            <a:ext cx="256032" cy="566928"/>
+          </a:xfrm>
+          <a:prstGeom prst="rect">
+            <a:avLst/>
+          </a:prstGeom>
+          <a:solidFill>
+            <a:srgbClr val="6A4CA3"/>
+          </a:solidFill>
+          <a:ln w="12700">
+            <a:solidFill>
+              <a:srgbClr val="6A4CA3"/>
+            </a:solidFill>
+            <a:prstDash val="solid"/>
+          </a:ln>
+        </p:spPr>
+      </p:sp>
+      <p:sp>
+        <p:nvSpPr>
+          <p:cNvPr id="18" name="Shape 16"/>
+          <p:cNvSpPr/>
+          <p:nvPr/>
+        </p:nvSpPr>
+        <p:spPr>
+          <a:xfrm>
+            <a:off x="8019288" y="3886200"/>
+            <a:ext cx="2706624" cy="0"/>
+          </a:xfrm>
+          <a:prstGeom prst="line">
+            <a:avLst/>
+          </a:prstGeom>
+          <a:noFill/>
+          <a:ln w="15240">
+            <a:solidFill>
+              <a:srgbClr val="003A63"/>
+            </a:solidFill>
+            <a:prstDash val="solid"/>
+          </a:ln>
+        </p:spPr>
+      </p:sp>
+      <p:sp>
+        <p:nvSpPr>
+          <p:cNvPr id="19" name="Text 17"/>
+          <p:cNvSpPr/>
+          <p:nvPr/>
+        </p:nvSpPr>
+        <p:spPr>
+          <a:xfrm>
+            <a:off x="7863840" y="3017520"/>
+            <a:ext cx="3017520" cy="201168"/>
+          </a:xfrm>
+          <a:prstGeom prst="rect">
+            <a:avLst/>
+          </a:prstGeom>
+          <a:noFill/>
+          <a:ln/>
+        </p:spPr>
+        <p:txBody>
+          <a:bodyPr wrap="square" lIns="0" tIns="0" rIns="0" bIns="0" rtlCol="0" anchor="ctr"/>
+          <a:lstStyle/>
+          <a:p>
+            <a:pPr algn="ctr" indent="0" marL="0">
+              <a:buNone/>
+            </a:pPr>
+            <a:r>
+              <a:rPr lang="en-US" sz="1050" b="1" dirty="0">
+                <a:solidFill>
+                  <a:srgbClr val="003A63"/>
+                </a:solidFill>
+                <a:latin typeface="Aptos" pitchFamily="34" charset="0"/>
+                <a:ea typeface="Aptos" pitchFamily="34" charset="-122"/>
+                <a:cs typeface="Aptos" pitchFamily="34" charset="-120"/>
+              </a:rPr>
+              <a:t>Measure and monitor</a:t>
+            </a:r>
+            <a:endParaRPr lang="en-US" sz="1050" dirty="0"/>
+          </a:p>
+        </p:txBody>
+      </p:sp>
+      <p:sp>
+        <p:nvSpPr>
+          <p:cNvPr id="20" name="Shape 18"/>
+          <p:cNvSpPr/>
+          <p:nvPr/>
+        </p:nvSpPr>
+        <p:spPr>
+          <a:xfrm>
+            <a:off x="7635240" y="4498848"/>
+            <a:ext cx="3474720" cy="1143000"/>
+          </a:xfrm>
+          <a:prstGeom prst="roundRect">
+            <a:avLst>
+              <a:gd name="adj" fmla="val 9600"/>
+            </a:avLst>
+          </a:prstGeom>
+          <a:solidFill>
             <a:srgbClr val="EAF6F8"/>
           </a:solidFill>
           <a:ln w="12700">
@@ -15565,14 +17624,14 @@
       </p:sp>
       <p:sp>
         <p:nvSpPr>
-          <p:cNvPr id="16" name="Text 14"/>
-          <p:cNvSpPr/>
-          <p:nvPr/>
-        </p:nvSpPr>
-        <p:spPr>
-          <a:xfrm>
-            <a:off x="8074152" y="3666744"/>
-            <a:ext cx="2825496" cy="256032"/>
+          <p:cNvPr id="21" name="Text 19"/>
+          <p:cNvSpPr/>
+          <p:nvPr/>
+        </p:nvSpPr>
+        <p:spPr>
+          <a:xfrm>
+            <a:off x="7799832" y="4645152"/>
+            <a:ext cx="3145536" cy="256032"/>
           </a:xfrm>
           <a:prstGeom prst="rect">
             <a:avLst/>
@@ -15596,7 +17655,7 @@
                 <a:ea typeface="Aptos" pitchFamily="34" charset="-122"/>
                 <a:cs typeface="Aptos" pitchFamily="34" charset="-120"/>
               </a:rPr>
-              <a:t>Use this for</a:t>
+              <a:t>How to validate</a:t>
             </a:r>
             <a:endParaRPr lang="en-US" sz="1300" dirty="0"/>
           </a:p>
@@ -15604,14 +17663,14 @@
       </p:sp>
       <p:sp>
         <p:nvSpPr>
-          <p:cNvPr id="17" name="Text 15"/>
-          <p:cNvSpPr/>
-          <p:nvPr/>
-        </p:nvSpPr>
-        <p:spPr>
-          <a:xfrm>
-            <a:off x="8074152" y="4023360"/>
-            <a:ext cx="2825496" cy="1097280"/>
+          <p:cNvPr id="22" name="Text 20"/>
+          <p:cNvSpPr/>
+          <p:nvPr/>
+        </p:nvSpPr>
+        <p:spPr>
+          <a:xfrm>
+            <a:off x="7799832" y="5001768"/>
+            <a:ext cx="3145536" cy="502920"/>
           </a:xfrm>
           <a:prstGeom prst="rect">
             <a:avLst/>
@@ -15637,7 +17696,7 @@
                 <a:ea typeface="Aptos" pitchFamily="34" charset="-122"/>
                 <a:cs typeface="Aptos" pitchFamily="34" charset="-120"/>
               </a:rPr>
-              <a:t>Connect the concept to public health decisions, safeguards, documentation, or implementation work.</a:t>
+              <a:t>Connect the concept to data quality, model performance, validation evidence, monitoring measures, and decisions that remain under human control.</a:t>
             </a:r>
             <a:endParaRPr lang="en-US" sz="1550" dirty="0"/>
           </a:p>
@@ -15811,8 +17870,8 @@
         </p:nvSpPr>
         <p:spPr>
           <a:xfrm>
-            <a:off x="9966960" y="6537960"/>
-            <a:ext cx="1645920" cy="201168"/>
+            <a:off x="9646920" y="6537960"/>
+            <a:ext cx="1965960" cy="201168"/>
           </a:xfrm>
           <a:prstGeom prst="rect">
             <a:avLst/>
@@ -15836,7 +17895,7 @@
                 <a:ea typeface="Aptos" pitchFamily="34" charset="-122"/>
                 <a:cs typeface="Aptos" pitchFamily="34" charset="-120"/>
               </a:rPr>
-              <a:t>Â© Paula Soper</a:t>
+              <a:t>Copyright Paula Soper</a:t>
             </a:r>
             <a:endParaRPr lang="en-US" sz="800" dirty="0"/>
           </a:p>
@@ -15931,7 +17990,7 @@
         <p:spPr>
           <a:xfrm>
             <a:off x="868680" y="1508760"/>
-            <a:ext cx="6537960" cy="4160520"/>
+            <a:ext cx="6309360" cy="4160520"/>
           </a:xfrm>
           <a:prstGeom prst="rect">
             <a:avLst/>
@@ -15996,12 +18055,12 @@
         </p:nvSpPr>
         <p:spPr>
           <a:xfrm>
-            <a:off x="7909560" y="1417320"/>
-            <a:ext cx="3154680" cy="1828800"/>
+            <a:off x="7635240" y="1325880"/>
+            <a:ext cx="3474720" cy="1325880"/>
           </a:xfrm>
           <a:prstGeom prst="roundRect">
             <a:avLst>
-              <a:gd name="adj" fmla="val 6000"/>
+              <a:gd name="adj" fmla="val 8276"/>
             </a:avLst>
           </a:prstGeom>
           <a:solidFill>
@@ -16023,8 +18082,8 @@
         </p:nvSpPr>
         <p:spPr>
           <a:xfrm>
-            <a:off x="8074152" y="1563624"/>
-            <a:ext cx="2825496" cy="256032"/>
+            <a:off x="7799832" y="1472184"/>
+            <a:ext cx="3145536" cy="256032"/>
           </a:xfrm>
           <a:prstGeom prst="rect">
             <a:avLst/>
@@ -16048,7 +18107,7 @@
                 <a:ea typeface="Aptos" pitchFamily="34" charset="-122"/>
                 <a:cs typeface="Aptos" pitchFamily="34" charset="-120"/>
               </a:rPr>
-              <a:t>Key idea</a:t>
+              <a:t>Data decision</a:t>
             </a:r>
             <a:endParaRPr lang="en-US" sz="1300" dirty="0"/>
           </a:p>
@@ -16062,8 +18121,8 @@
         </p:nvSpPr>
         <p:spPr>
           <a:xfrm>
-            <a:off x="8074152" y="1920240"/>
-            <a:ext cx="2825496" cy="1188720"/>
+            <a:off x="7799832" y="1828800"/>
+            <a:ext cx="3145536" cy="685800"/>
           </a:xfrm>
           <a:prstGeom prst="rect">
             <a:avLst/>
@@ -16103,15 +18162,206 @@
         </p:nvSpPr>
         <p:spPr>
           <a:xfrm>
-            <a:off x="7909560" y="3520440"/>
-            <a:ext cx="3154680" cy="1737360"/>
+            <a:off x="7635240" y="2788920"/>
+            <a:ext cx="3474720" cy="1536192"/>
           </a:xfrm>
           <a:prstGeom prst="roundRect">
             <a:avLst>
-              <a:gd name="adj" fmla="val 6316"/>
+              <a:gd name="adj" fmla="val 7143"/>
             </a:avLst>
           </a:prstGeom>
           <a:solidFill>
+            <a:srgbClr val="FFFFFF">
+              <a:alpha val="88000"/>
+            </a:srgbClr>
+          </a:solidFill>
+          <a:ln w="12700">
+            <a:solidFill>
+              <a:srgbClr val="D6E8F2"/>
+            </a:solidFill>
+            <a:prstDash val="solid"/>
+          </a:ln>
+        </p:spPr>
+      </p:sp>
+      <p:sp>
+        <p:nvSpPr>
+          <p:cNvPr id="14" name="Shape 12"/>
+          <p:cNvSpPr/>
+          <p:nvPr/>
+        </p:nvSpPr>
+        <p:spPr>
+          <a:xfrm>
+            <a:off x="8138160" y="3474720"/>
+            <a:ext cx="256032" cy="411480"/>
+          </a:xfrm>
+          <a:prstGeom prst="rect">
+            <a:avLst/>
+          </a:prstGeom>
+          <a:solidFill>
+            <a:srgbClr val="0068B7"/>
+          </a:solidFill>
+          <a:ln w="12700">
+            <a:solidFill>
+              <a:srgbClr val="0068B7"/>
+            </a:solidFill>
+            <a:prstDash val="solid"/>
+          </a:ln>
+        </p:spPr>
+      </p:sp>
+      <p:sp>
+        <p:nvSpPr>
+          <p:cNvPr id="15" name="Shape 13"/>
+          <p:cNvSpPr/>
+          <p:nvPr/>
+        </p:nvSpPr>
+        <p:spPr>
+          <a:xfrm>
+            <a:off x="8577072" y="3172968"/>
+            <a:ext cx="256032" cy="713232"/>
+          </a:xfrm>
+          <a:prstGeom prst="rect">
+            <a:avLst/>
+          </a:prstGeom>
+          <a:solidFill>
+            <a:srgbClr val="2F8A28"/>
+          </a:solidFill>
+          <a:ln w="12700">
+            <a:solidFill>
+              <a:srgbClr val="2F8A28"/>
+            </a:solidFill>
+            <a:prstDash val="solid"/>
+          </a:ln>
+        </p:spPr>
+      </p:sp>
+      <p:sp>
+        <p:nvSpPr>
+          <p:cNvPr id="16" name="Shape 14"/>
+          <p:cNvSpPr/>
+          <p:nvPr/>
+        </p:nvSpPr>
+        <p:spPr>
+          <a:xfrm>
+            <a:off x="9015984" y="2880360"/>
+            <a:ext cx="256032" cy="1005840"/>
+          </a:xfrm>
+          <a:prstGeom prst="rect">
+            <a:avLst/>
+          </a:prstGeom>
+          <a:solidFill>
+            <a:srgbClr val="D69A2D"/>
+          </a:solidFill>
+          <a:ln w="12700">
+            <a:solidFill>
+              <a:srgbClr val="D69A2D"/>
+            </a:solidFill>
+            <a:prstDash val="solid"/>
+          </a:ln>
+        </p:spPr>
+      </p:sp>
+      <p:sp>
+        <p:nvSpPr>
+          <p:cNvPr id="17" name="Shape 15"/>
+          <p:cNvSpPr/>
+          <p:nvPr/>
+        </p:nvSpPr>
+        <p:spPr>
+          <a:xfrm>
+            <a:off x="9454896" y="3319272"/>
+            <a:ext cx="256032" cy="566928"/>
+          </a:xfrm>
+          <a:prstGeom prst="rect">
+            <a:avLst/>
+          </a:prstGeom>
+          <a:solidFill>
+            <a:srgbClr val="6A4CA3"/>
+          </a:solidFill>
+          <a:ln w="12700">
+            <a:solidFill>
+              <a:srgbClr val="6A4CA3"/>
+            </a:solidFill>
+            <a:prstDash val="solid"/>
+          </a:ln>
+        </p:spPr>
+      </p:sp>
+      <p:sp>
+        <p:nvSpPr>
+          <p:cNvPr id="18" name="Shape 16"/>
+          <p:cNvSpPr/>
+          <p:nvPr/>
+        </p:nvSpPr>
+        <p:spPr>
+          <a:xfrm>
+            <a:off x="8019288" y="3886200"/>
+            <a:ext cx="2706624" cy="0"/>
+          </a:xfrm>
+          <a:prstGeom prst="line">
+            <a:avLst/>
+          </a:prstGeom>
+          <a:noFill/>
+          <a:ln w="15240">
+            <a:solidFill>
+              <a:srgbClr val="003A63"/>
+            </a:solidFill>
+            <a:prstDash val="solid"/>
+          </a:ln>
+        </p:spPr>
+      </p:sp>
+      <p:sp>
+        <p:nvSpPr>
+          <p:cNvPr id="19" name="Text 17"/>
+          <p:cNvSpPr/>
+          <p:nvPr/>
+        </p:nvSpPr>
+        <p:spPr>
+          <a:xfrm>
+            <a:off x="7863840" y="3017520"/>
+            <a:ext cx="3017520" cy="201168"/>
+          </a:xfrm>
+          <a:prstGeom prst="rect">
+            <a:avLst/>
+          </a:prstGeom>
+          <a:noFill/>
+          <a:ln/>
+        </p:spPr>
+        <p:txBody>
+          <a:bodyPr wrap="square" lIns="0" tIns="0" rIns="0" bIns="0" rtlCol="0" anchor="ctr"/>
+          <a:lstStyle/>
+          <a:p>
+            <a:pPr algn="ctr" indent="0" marL="0">
+              <a:buNone/>
+            </a:pPr>
+            <a:r>
+              <a:rPr lang="en-US" sz="1050" b="1" dirty="0">
+                <a:solidFill>
+                  <a:srgbClr val="003A63"/>
+                </a:solidFill>
+                <a:latin typeface="Aptos" pitchFamily="34" charset="0"/>
+                <a:ea typeface="Aptos" pitchFamily="34" charset="-122"/>
+                <a:cs typeface="Aptos" pitchFamily="34" charset="-120"/>
+              </a:rPr>
+              <a:t>Measure and monitor</a:t>
+            </a:r>
+            <a:endParaRPr lang="en-US" sz="1050" dirty="0"/>
+          </a:p>
+        </p:txBody>
+      </p:sp>
+      <p:sp>
+        <p:nvSpPr>
+          <p:cNvPr id="20" name="Shape 18"/>
+          <p:cNvSpPr/>
+          <p:nvPr/>
+        </p:nvSpPr>
+        <p:spPr>
+          <a:xfrm>
+            <a:off x="7635240" y="4498848"/>
+            <a:ext cx="3474720" cy="1143000"/>
+          </a:xfrm>
+          <a:prstGeom prst="roundRect">
+            <a:avLst>
+              <a:gd name="adj" fmla="val 9600"/>
+            </a:avLst>
+          </a:prstGeom>
+          <a:solidFill>
             <a:srgbClr val="EAF6F8"/>
           </a:solidFill>
           <a:ln w="12700">
@@ -16124,14 +18374,14 @@
       </p:sp>
       <p:sp>
         <p:nvSpPr>
-          <p:cNvPr id="14" name="Text 12"/>
-          <p:cNvSpPr/>
-          <p:nvPr/>
-        </p:nvSpPr>
-        <p:spPr>
-          <a:xfrm>
-            <a:off x="8074152" y="3666744"/>
-            <a:ext cx="2825496" cy="256032"/>
+          <p:cNvPr id="21" name="Text 19"/>
+          <p:cNvSpPr/>
+          <p:nvPr/>
+        </p:nvSpPr>
+        <p:spPr>
+          <a:xfrm>
+            <a:off x="7799832" y="4645152"/>
+            <a:ext cx="3145536" cy="256032"/>
           </a:xfrm>
           <a:prstGeom prst="rect">
             <a:avLst/>
@@ -16155,7 +18405,7 @@
                 <a:ea typeface="Aptos" pitchFamily="34" charset="-122"/>
                 <a:cs typeface="Aptos" pitchFamily="34" charset="-120"/>
               </a:rPr>
-              <a:t>Use this for</a:t>
+              <a:t>How to validate</a:t>
             </a:r>
             <a:endParaRPr lang="en-US" sz="1300" dirty="0"/>
           </a:p>
@@ -16163,14 +18413,14 @@
       </p:sp>
       <p:sp>
         <p:nvSpPr>
-          <p:cNvPr id="15" name="Text 13"/>
-          <p:cNvSpPr/>
-          <p:nvPr/>
-        </p:nvSpPr>
-        <p:spPr>
-          <a:xfrm>
-            <a:off x="8074152" y="4023360"/>
-            <a:ext cx="2825496" cy="1097280"/>
+          <p:cNvPr id="22" name="Text 20"/>
+          <p:cNvSpPr/>
+          <p:nvPr/>
+        </p:nvSpPr>
+        <p:spPr>
+          <a:xfrm>
+            <a:off x="7799832" y="5001768"/>
+            <a:ext cx="3145536" cy="502920"/>
           </a:xfrm>
           <a:prstGeom prst="rect">
             <a:avLst/>
@@ -16196,7 +18446,7 @@
                 <a:ea typeface="Aptos" pitchFamily="34" charset="-122"/>
                 <a:cs typeface="Aptos" pitchFamily="34" charset="-120"/>
               </a:rPr>
-              <a:t>Connect the concept to public health decisions, safeguards, documentation, or implementation work.</a:t>
+              <a:t>Connect the concept to data quality, model performance, validation evidence, monitoring measures, and decisions that remain under human control.</a:t>
             </a:r>
             <a:endParaRPr lang="en-US" sz="1550" dirty="0"/>
           </a:p>

--- a/downloads/presentations/modules/ops-200.pptx
+++ b/downloads/presentations/modules/ops-200.pptx
@@ -3523,13 +3523,11 @@
             </a:avLst>
           </a:prstGeom>
           <a:solidFill>
-            <a:srgbClr val="FFFFFF">
-              <a:alpha val="88000"/>
-            </a:srgbClr>
+            <a:srgbClr val="FFFFFF"/>
           </a:solidFill>
           <a:ln w="12700">
             <a:solidFill>
-              <a:srgbClr val="D6E8F2"/>
+              <a:srgbClr val="B9D7E6"/>
             </a:solidFill>
             <a:prstDash val="solid"/>
           </a:ln>
@@ -3537,169 +3535,112 @@
       </p:sp>
       <p:sp>
         <p:nvSpPr>
-          <p:cNvPr id="14" name="Shape 12"/>
-          <p:cNvSpPr/>
-          <p:nvPr/>
-        </p:nvSpPr>
-        <p:spPr>
-          <a:xfrm>
-            <a:off x="8138160" y="3474720"/>
-            <a:ext cx="256032" cy="411480"/>
-          </a:xfrm>
-          <a:prstGeom prst="rect">
-            <a:avLst/>
-          </a:prstGeom>
-          <a:solidFill>
-            <a:srgbClr val="0068B7"/>
-          </a:solidFill>
-          <a:ln w="12700">
-            <a:solidFill>
-              <a:srgbClr val="0068B7"/>
-            </a:solidFill>
-            <a:prstDash val="solid"/>
-          </a:ln>
-        </p:spPr>
-      </p:sp>
-      <p:sp>
-        <p:nvSpPr>
-          <p:cNvPr id="15" name="Shape 13"/>
-          <p:cNvSpPr/>
-          <p:nvPr/>
-        </p:nvSpPr>
-        <p:spPr>
-          <a:xfrm>
-            <a:off x="8577072" y="3172968"/>
-            <a:ext cx="256032" cy="713232"/>
-          </a:xfrm>
-          <a:prstGeom prst="rect">
-            <a:avLst/>
-          </a:prstGeom>
-          <a:solidFill>
-            <a:srgbClr val="2F8A28"/>
-          </a:solidFill>
-          <a:ln w="12700">
-            <a:solidFill>
-              <a:srgbClr val="2F8A28"/>
-            </a:solidFill>
-            <a:prstDash val="solid"/>
-          </a:ln>
-        </p:spPr>
+          <p:cNvPr id="14" name="Text 12"/>
+          <p:cNvSpPr/>
+          <p:nvPr/>
+        </p:nvSpPr>
+        <p:spPr>
+          <a:xfrm>
+            <a:off x="7799832" y="2935224"/>
+            <a:ext cx="3145536" cy="256032"/>
+          </a:xfrm>
+          <a:prstGeom prst="rect">
+            <a:avLst/>
+          </a:prstGeom>
+          <a:noFill/>
+          <a:ln/>
+        </p:spPr>
+        <p:txBody>
+          <a:bodyPr wrap="square" lIns="0" tIns="0" rIns="0" bIns="0" rtlCol="0" anchor="ctr"/>
+          <a:lstStyle/>
+          <a:p>
+            <a:pPr indent="0" marL="0">
+              <a:buNone/>
+            </a:pPr>
+            <a:r>
+              <a:rPr lang="en-US" sz="1300" b="1" dirty="0">
+                <a:solidFill>
+                  <a:srgbClr val="0068B7"/>
+                </a:solidFill>
+                <a:latin typeface="Aptos" pitchFamily="34" charset="0"/>
+                <a:ea typeface="Aptos" pitchFamily="34" charset="-122"/>
+                <a:cs typeface="Aptos" pitchFamily="34" charset="-120"/>
+              </a:rPr>
+              <a:t>Concept checkpoints</a:t>
+            </a:r>
+            <a:endParaRPr lang="en-US" sz="1300" dirty="0"/>
+          </a:p>
+        </p:txBody>
+      </p:sp>
+      <p:sp>
+        <p:nvSpPr>
+          <p:cNvPr id="15" name="Text 13"/>
+          <p:cNvSpPr/>
+          <p:nvPr/>
+        </p:nvSpPr>
+        <p:spPr>
+          <a:xfrm>
+            <a:off x="7818120" y="3300984"/>
+            <a:ext cx="3090672" cy="877824"/>
+          </a:xfrm>
+          <a:prstGeom prst="rect">
+            <a:avLst/>
+          </a:prstGeom>
+          <a:noFill/>
+          <a:ln/>
+        </p:spPr>
+        <p:txBody>
+          <a:bodyPr wrap="square" lIns="254" tIns="254" rIns="254" bIns="254" rtlCol="0" anchor="t">
+            <a:normAutofit/>
+          </a:bodyPr>
+          <a:lstStyle/>
+          <a:p>
+            <a:r>
+              <a:rPr lang="en-US" sz="1380" dirty="0">
+                <a:solidFill>
+                  <a:srgbClr val="17364A"/>
+                </a:solidFill>
+                <a:latin typeface="Aptos" pitchFamily="34" charset="0"/>
+                <a:ea typeface="Aptos" pitchFamily="34" charset="-122"/>
+                <a:cs typeface="Aptos" pitchFamily="34" charset="-120"/>
+              </a:rPr>
+              <a:t>If demographic fields are missing more often for some populations, the model may be less.</a:t>
+            </a:r>
+            <a:endParaRPr lang="en-US" sz="1380" dirty="0"/>
+          </a:p>
+          <a:p>
+            <a:r>
+              <a:rPr lang="en-US" sz="1380" dirty="0">
+                <a:solidFill>
+                  <a:srgbClr val="17364A"/>
+                </a:solidFill>
+                <a:latin typeface="Aptos" pitchFamily="34" charset="0"/>
+                <a:ea typeface="Aptos" pitchFamily="34" charset="-122"/>
+                <a:cs typeface="Aptos" pitchFamily="34" charset="-120"/>
+              </a:rPr>
+              <a:t>If the data feed from certain clinics is delayed, the prioritization queue may reflect.</a:t>
+            </a:r>
+            <a:endParaRPr lang="en-US" sz="1380" dirty="0"/>
+          </a:p>
+          <a:p>
+            <a:r>
+              <a:rPr lang="en-US" sz="1380" dirty="0">
+                <a:solidFill>
+                  <a:srgbClr val="17364A"/>
+                </a:solidFill>
+                <a:latin typeface="Aptos" pitchFamily="34" charset="0"/>
+                <a:ea typeface="Aptos" pitchFamily="34" charset="-122"/>
+                <a:cs typeface="Aptos" pitchFamily="34" charset="-120"/>
+              </a:rPr>
+              <a:t>A data quality review can reveal these issues before the tool is deployed.</a:t>
+            </a:r>
+            <a:endParaRPr lang="en-US" sz="1380" dirty="0"/>
+          </a:p>
+        </p:txBody>
       </p:sp>
       <p:sp>
         <p:nvSpPr>
           <p:cNvPr id="16" name="Shape 14"/>
-          <p:cNvSpPr/>
-          <p:nvPr/>
-        </p:nvSpPr>
-        <p:spPr>
-          <a:xfrm>
-            <a:off x="9015984" y="2880360"/>
-            <a:ext cx="256032" cy="1005840"/>
-          </a:xfrm>
-          <a:prstGeom prst="rect">
-            <a:avLst/>
-          </a:prstGeom>
-          <a:solidFill>
-            <a:srgbClr val="D69A2D"/>
-          </a:solidFill>
-          <a:ln w="12700">
-            <a:solidFill>
-              <a:srgbClr val="D69A2D"/>
-            </a:solidFill>
-            <a:prstDash val="solid"/>
-          </a:ln>
-        </p:spPr>
-      </p:sp>
-      <p:sp>
-        <p:nvSpPr>
-          <p:cNvPr id="17" name="Shape 15"/>
-          <p:cNvSpPr/>
-          <p:nvPr/>
-        </p:nvSpPr>
-        <p:spPr>
-          <a:xfrm>
-            <a:off x="9454896" y="3319272"/>
-            <a:ext cx="256032" cy="566928"/>
-          </a:xfrm>
-          <a:prstGeom prst="rect">
-            <a:avLst/>
-          </a:prstGeom>
-          <a:solidFill>
-            <a:srgbClr val="6A4CA3"/>
-          </a:solidFill>
-          <a:ln w="12700">
-            <a:solidFill>
-              <a:srgbClr val="6A4CA3"/>
-            </a:solidFill>
-            <a:prstDash val="solid"/>
-          </a:ln>
-        </p:spPr>
-      </p:sp>
-      <p:sp>
-        <p:nvSpPr>
-          <p:cNvPr id="18" name="Shape 16"/>
-          <p:cNvSpPr/>
-          <p:nvPr/>
-        </p:nvSpPr>
-        <p:spPr>
-          <a:xfrm>
-            <a:off x="8019288" y="3886200"/>
-            <a:ext cx="2706624" cy="0"/>
-          </a:xfrm>
-          <a:prstGeom prst="line">
-            <a:avLst/>
-          </a:prstGeom>
-          <a:noFill/>
-          <a:ln w="15240">
-            <a:solidFill>
-              <a:srgbClr val="003A63"/>
-            </a:solidFill>
-            <a:prstDash val="solid"/>
-          </a:ln>
-        </p:spPr>
-      </p:sp>
-      <p:sp>
-        <p:nvSpPr>
-          <p:cNvPr id="19" name="Text 17"/>
-          <p:cNvSpPr/>
-          <p:nvPr/>
-        </p:nvSpPr>
-        <p:spPr>
-          <a:xfrm>
-            <a:off x="7863840" y="3017520"/>
-            <a:ext cx="3017520" cy="201168"/>
-          </a:xfrm>
-          <a:prstGeom prst="rect">
-            <a:avLst/>
-          </a:prstGeom>
-          <a:noFill/>
-          <a:ln/>
-        </p:spPr>
-        <p:txBody>
-          <a:bodyPr wrap="square" lIns="0" tIns="0" rIns="0" bIns="0" rtlCol="0" anchor="ctr"/>
-          <a:lstStyle/>
-          <a:p>
-            <a:pPr algn="ctr" indent="0" marL="0">
-              <a:buNone/>
-            </a:pPr>
-            <a:r>
-              <a:rPr lang="en-US" sz="1050" b="1" dirty="0">
-                <a:solidFill>
-                  <a:srgbClr val="003A63"/>
-                </a:solidFill>
-                <a:latin typeface="Aptos" pitchFamily="34" charset="0"/>
-                <a:ea typeface="Aptos" pitchFamily="34" charset="-122"/>
-                <a:cs typeface="Aptos" pitchFamily="34" charset="-120"/>
-              </a:rPr>
-              <a:t>Measure and monitor</a:t>
-            </a:r>
-            <a:endParaRPr lang="en-US" sz="1050" dirty="0"/>
-          </a:p>
-        </p:txBody>
-      </p:sp>
-      <p:sp>
-        <p:nvSpPr>
-          <p:cNvPr id="20" name="Shape 18"/>
           <p:cNvSpPr/>
           <p:nvPr/>
         </p:nvSpPr>
@@ -3726,7 +3667,7 @@
       </p:sp>
       <p:sp>
         <p:nvSpPr>
-          <p:cNvPr id="21" name="Text 19"/>
+          <p:cNvPr id="17" name="Text 15"/>
           <p:cNvSpPr/>
           <p:nvPr/>
         </p:nvSpPr>
@@ -3765,7 +3706,7 @@
       </p:sp>
       <p:sp>
         <p:nvSpPr>
-          <p:cNvPr id="22" name="Text 20"/>
+          <p:cNvPr id="18" name="Text 16"/>
           <p:cNvSpPr/>
           <p:nvPr/>
         </p:nvSpPr>
@@ -4273,13 +4214,11 @@
             </a:avLst>
           </a:prstGeom>
           <a:solidFill>
-            <a:srgbClr val="FFFFFF">
-              <a:alpha val="88000"/>
-            </a:srgbClr>
+            <a:srgbClr val="FFFFFF"/>
           </a:solidFill>
           <a:ln w="12700">
             <a:solidFill>
-              <a:srgbClr val="D6E8F2"/>
+              <a:srgbClr val="B9D7E6"/>
             </a:solidFill>
             <a:prstDash val="solid"/>
           </a:ln>
@@ -4287,169 +4226,112 @@
       </p:sp>
       <p:sp>
         <p:nvSpPr>
-          <p:cNvPr id="14" name="Shape 12"/>
-          <p:cNvSpPr/>
-          <p:nvPr/>
-        </p:nvSpPr>
-        <p:spPr>
-          <a:xfrm>
-            <a:off x="8138160" y="3474720"/>
-            <a:ext cx="256032" cy="411480"/>
-          </a:xfrm>
-          <a:prstGeom prst="rect">
-            <a:avLst/>
-          </a:prstGeom>
-          <a:solidFill>
-            <a:srgbClr val="0068B7"/>
-          </a:solidFill>
-          <a:ln w="12700">
-            <a:solidFill>
-              <a:srgbClr val="0068B7"/>
-            </a:solidFill>
-            <a:prstDash val="solid"/>
-          </a:ln>
-        </p:spPr>
-      </p:sp>
-      <p:sp>
-        <p:nvSpPr>
-          <p:cNvPr id="15" name="Shape 13"/>
-          <p:cNvSpPr/>
-          <p:nvPr/>
-        </p:nvSpPr>
-        <p:spPr>
-          <a:xfrm>
-            <a:off x="8577072" y="3172968"/>
-            <a:ext cx="256032" cy="713232"/>
-          </a:xfrm>
-          <a:prstGeom prst="rect">
-            <a:avLst/>
-          </a:prstGeom>
-          <a:solidFill>
-            <a:srgbClr val="2F8A28"/>
-          </a:solidFill>
-          <a:ln w="12700">
-            <a:solidFill>
-              <a:srgbClr val="2F8A28"/>
-            </a:solidFill>
-            <a:prstDash val="solid"/>
-          </a:ln>
-        </p:spPr>
+          <p:cNvPr id="14" name="Text 12"/>
+          <p:cNvSpPr/>
+          <p:nvPr/>
+        </p:nvSpPr>
+        <p:spPr>
+          <a:xfrm>
+            <a:off x="7799832" y="2935224"/>
+            <a:ext cx="3145536" cy="256032"/>
+          </a:xfrm>
+          <a:prstGeom prst="rect">
+            <a:avLst/>
+          </a:prstGeom>
+          <a:noFill/>
+          <a:ln/>
+        </p:spPr>
+        <p:txBody>
+          <a:bodyPr wrap="square" lIns="0" tIns="0" rIns="0" bIns="0" rtlCol="0" anchor="ctr"/>
+          <a:lstStyle/>
+          <a:p>
+            <a:pPr indent="0" marL="0">
+              <a:buNone/>
+            </a:pPr>
+            <a:r>
+              <a:rPr lang="en-US" sz="1300" b="1" dirty="0">
+                <a:solidFill>
+                  <a:srgbClr val="0068B7"/>
+                </a:solidFill>
+                <a:latin typeface="Aptos" pitchFamily="34" charset="0"/>
+                <a:ea typeface="Aptos" pitchFamily="34" charset="-122"/>
+                <a:cs typeface="Aptos" pitchFamily="34" charset="-120"/>
+              </a:rPr>
+              <a:t>Concept checkpoints</a:t>
+            </a:r>
+            <a:endParaRPr lang="en-US" sz="1300" dirty="0"/>
+          </a:p>
+        </p:txBody>
+      </p:sp>
+      <p:sp>
+        <p:nvSpPr>
+          <p:cNvPr id="15" name="Text 13"/>
+          <p:cNvSpPr/>
+          <p:nvPr/>
+        </p:nvSpPr>
+        <p:spPr>
+          <a:xfrm>
+            <a:off x="7818120" y="3300984"/>
+            <a:ext cx="3090672" cy="877824"/>
+          </a:xfrm>
+          <a:prstGeom prst="rect">
+            <a:avLst/>
+          </a:prstGeom>
+          <a:noFill/>
+          <a:ln/>
+        </p:spPr>
+        <p:txBody>
+          <a:bodyPr wrap="square" lIns="254" tIns="254" rIns="254" bIns="254" rtlCol="0" anchor="t">
+            <a:normAutofit/>
+          </a:bodyPr>
+          <a:lstStyle/>
+          <a:p>
+            <a:r>
+              <a:rPr lang="en-US" sz="1380" dirty="0">
+                <a:solidFill>
+                  <a:srgbClr val="17364A"/>
+                </a:solidFill>
+                <a:latin typeface="Aptos" pitchFamily="34" charset="0"/>
+                <a:ea typeface="Aptos" pitchFamily="34" charset="-122"/>
+                <a:cs typeface="Aptos" pitchFamily="34" charset="-120"/>
+              </a:rPr>
+              <a:t>Data quality engineering begins by defining required fields and acceptable thresholds for.</a:t>
+            </a:r>
+            <a:endParaRPr lang="en-US" sz="1380" dirty="0"/>
+          </a:p>
+          <a:p>
+            <a:r>
+              <a:rPr lang="en-US" sz="1380" dirty="0">
+                <a:solidFill>
+                  <a:srgbClr val="17364A"/>
+                </a:solidFill>
+                <a:latin typeface="Aptos" pitchFamily="34" charset="0"/>
+                <a:ea typeface="Aptos" pitchFamily="34" charset="-122"/>
+                <a:cs typeface="Aptos" pitchFamily="34" charset="-120"/>
+              </a:rPr>
+              <a:t>For an AI-supported case triage workflow, required fields may include condition, lab.</a:t>
+            </a:r>
+            <a:endParaRPr lang="en-US" sz="1380" dirty="0"/>
+          </a:p>
+          <a:p>
+            <a:r>
+              <a:rPr lang="en-US" sz="1380" dirty="0">
+                <a:solidFill>
+                  <a:srgbClr val="17364A"/>
+                </a:solidFill>
+                <a:latin typeface="Aptos" pitchFamily="34" charset="0"/>
+                <a:ea typeface="Aptos" pitchFamily="34" charset="-122"/>
+                <a:cs typeface="Aptos" pitchFamily="34" charset="-120"/>
+              </a:rPr>
+              <a:t>The agency should decide which missing fields stop automated support, which trigger a.</a:t>
+            </a:r>
+            <a:endParaRPr lang="en-US" sz="1380" dirty="0"/>
+          </a:p>
+        </p:txBody>
       </p:sp>
       <p:sp>
         <p:nvSpPr>
           <p:cNvPr id="16" name="Shape 14"/>
-          <p:cNvSpPr/>
-          <p:nvPr/>
-        </p:nvSpPr>
-        <p:spPr>
-          <a:xfrm>
-            <a:off x="9015984" y="2880360"/>
-            <a:ext cx="256032" cy="1005840"/>
-          </a:xfrm>
-          <a:prstGeom prst="rect">
-            <a:avLst/>
-          </a:prstGeom>
-          <a:solidFill>
-            <a:srgbClr val="D69A2D"/>
-          </a:solidFill>
-          <a:ln w="12700">
-            <a:solidFill>
-              <a:srgbClr val="D69A2D"/>
-            </a:solidFill>
-            <a:prstDash val="solid"/>
-          </a:ln>
-        </p:spPr>
-      </p:sp>
-      <p:sp>
-        <p:nvSpPr>
-          <p:cNvPr id="17" name="Shape 15"/>
-          <p:cNvSpPr/>
-          <p:nvPr/>
-        </p:nvSpPr>
-        <p:spPr>
-          <a:xfrm>
-            <a:off x="9454896" y="3319272"/>
-            <a:ext cx="256032" cy="566928"/>
-          </a:xfrm>
-          <a:prstGeom prst="rect">
-            <a:avLst/>
-          </a:prstGeom>
-          <a:solidFill>
-            <a:srgbClr val="6A4CA3"/>
-          </a:solidFill>
-          <a:ln w="12700">
-            <a:solidFill>
-              <a:srgbClr val="6A4CA3"/>
-            </a:solidFill>
-            <a:prstDash val="solid"/>
-          </a:ln>
-        </p:spPr>
-      </p:sp>
-      <p:sp>
-        <p:nvSpPr>
-          <p:cNvPr id="18" name="Shape 16"/>
-          <p:cNvSpPr/>
-          <p:nvPr/>
-        </p:nvSpPr>
-        <p:spPr>
-          <a:xfrm>
-            <a:off x="8019288" y="3886200"/>
-            <a:ext cx="2706624" cy="0"/>
-          </a:xfrm>
-          <a:prstGeom prst="line">
-            <a:avLst/>
-          </a:prstGeom>
-          <a:noFill/>
-          <a:ln w="15240">
-            <a:solidFill>
-              <a:srgbClr val="003A63"/>
-            </a:solidFill>
-            <a:prstDash val="solid"/>
-          </a:ln>
-        </p:spPr>
-      </p:sp>
-      <p:sp>
-        <p:nvSpPr>
-          <p:cNvPr id="19" name="Text 17"/>
-          <p:cNvSpPr/>
-          <p:nvPr/>
-        </p:nvSpPr>
-        <p:spPr>
-          <a:xfrm>
-            <a:off x="7863840" y="3017520"/>
-            <a:ext cx="3017520" cy="201168"/>
-          </a:xfrm>
-          <a:prstGeom prst="rect">
-            <a:avLst/>
-          </a:prstGeom>
-          <a:noFill/>
-          <a:ln/>
-        </p:spPr>
-        <p:txBody>
-          <a:bodyPr wrap="square" lIns="0" tIns="0" rIns="0" bIns="0" rtlCol="0" anchor="ctr"/>
-          <a:lstStyle/>
-          <a:p>
-            <a:pPr algn="ctr" indent="0" marL="0">
-              <a:buNone/>
-            </a:pPr>
-            <a:r>
-              <a:rPr lang="en-US" sz="1050" b="1" dirty="0">
-                <a:solidFill>
-                  <a:srgbClr val="003A63"/>
-                </a:solidFill>
-                <a:latin typeface="Aptos" pitchFamily="34" charset="0"/>
-                <a:ea typeface="Aptos" pitchFamily="34" charset="-122"/>
-                <a:cs typeface="Aptos" pitchFamily="34" charset="-120"/>
-              </a:rPr>
-              <a:t>Measure and monitor</a:t>
-            </a:r>
-            <a:endParaRPr lang="en-US" sz="1050" dirty="0"/>
-          </a:p>
-        </p:txBody>
-      </p:sp>
-      <p:sp>
-        <p:nvSpPr>
-          <p:cNvPr id="20" name="Shape 18"/>
           <p:cNvSpPr/>
           <p:nvPr/>
         </p:nvSpPr>
@@ -4476,7 +4358,7 @@
       </p:sp>
       <p:sp>
         <p:nvSpPr>
-          <p:cNvPr id="21" name="Text 19"/>
+          <p:cNvPr id="17" name="Text 15"/>
           <p:cNvSpPr/>
           <p:nvPr/>
         </p:nvSpPr>
@@ -4515,7 +4397,7 @@
       </p:sp>
       <p:sp>
         <p:nvSpPr>
-          <p:cNvPr id="22" name="Text 20"/>
+          <p:cNvPr id="18" name="Text 16"/>
           <p:cNvSpPr/>
           <p:nvPr/>
         </p:nvSpPr>
@@ -5023,13 +4905,11 @@
             </a:avLst>
           </a:prstGeom>
           <a:solidFill>
-            <a:srgbClr val="FFFFFF">
-              <a:alpha val="88000"/>
-            </a:srgbClr>
+            <a:srgbClr val="FFFFFF"/>
           </a:solidFill>
           <a:ln w="12700">
             <a:solidFill>
-              <a:srgbClr val="D6E8F2"/>
+              <a:srgbClr val="B9D7E6"/>
             </a:solidFill>
             <a:prstDash val="solid"/>
           </a:ln>
@@ -5037,26 +4917,42 @@
       </p:sp>
       <p:sp>
         <p:nvSpPr>
-          <p:cNvPr id="14" name="Shape 12"/>
-          <p:cNvSpPr/>
-          <p:nvPr/>
-        </p:nvSpPr>
-        <p:spPr>
-          <a:xfrm>
-            <a:off x="8046720" y="3108960"/>
-            <a:ext cx="2651760" cy="896112"/>
-          </a:xfrm>
-          <a:prstGeom prst="arc">
-            <a:avLst/>
-          </a:prstGeom>
-          <a:noFill/>
-          <a:ln w="25400">
-            <a:solidFill>
-              <a:srgbClr val="0068B7"/>
-            </a:solidFill>
-            <a:prstDash val="solid"/>
-          </a:ln>
-        </p:spPr>
+          <p:cNvPr id="14" name="Text 12"/>
+          <p:cNvSpPr/>
+          <p:nvPr/>
+        </p:nvSpPr>
+        <p:spPr>
+          <a:xfrm>
+            <a:off x="7799832" y="2935224"/>
+            <a:ext cx="3145536" cy="256032"/>
+          </a:xfrm>
+          <a:prstGeom prst="rect">
+            <a:avLst/>
+          </a:prstGeom>
+          <a:noFill/>
+          <a:ln/>
+        </p:spPr>
+        <p:txBody>
+          <a:bodyPr wrap="square" lIns="0" tIns="0" rIns="0" bIns="0" rtlCol="0" anchor="ctr"/>
+          <a:lstStyle/>
+          <a:p>
+            <a:pPr indent="0" marL="0">
+              <a:buNone/>
+            </a:pPr>
+            <a:r>
+              <a:rPr lang="en-US" sz="1300" b="1" dirty="0">
+                <a:solidFill>
+                  <a:srgbClr val="0068B7"/>
+                </a:solidFill>
+                <a:latin typeface="Aptos" pitchFamily="34" charset="0"/>
+                <a:ea typeface="Aptos" pitchFamily="34" charset="-122"/>
+                <a:cs typeface="Aptos" pitchFamily="34" charset="-120"/>
+              </a:rPr>
+              <a:t>Concept checkpoints</a:t>
+            </a:r>
+            <a:endParaRPr lang="en-US" sz="1300" dirty="0"/>
+          </a:p>
+        </p:txBody>
       </p:sp>
       <p:sp>
         <p:nvSpPr>
@@ -5066,102 +4962,67 @@
         </p:nvSpPr>
         <p:spPr>
           <a:xfrm>
-            <a:off x="7909560" y="3099816"/>
-            <a:ext cx="2926080" cy="256032"/>
-          </a:xfrm>
-          <a:prstGeom prst="rect">
-            <a:avLst/>
-          </a:prstGeom>
-          <a:noFill/>
-          <a:ln/>
-        </p:spPr>
-        <p:txBody>
-          <a:bodyPr wrap="square" lIns="0" tIns="0" rIns="0" bIns="0" rtlCol="0" anchor="ctr"/>
-          <a:lstStyle/>
-          <a:p>
-            <a:pPr algn="ctr" indent="0" marL="0">
-              <a:buNone/>
-            </a:pPr>
-            <a:r>
-              <a:rPr lang="en-US" sz="1500" b="1" dirty="0">
-                <a:solidFill>
-                  <a:srgbClr val="003A63"/>
-                </a:solidFill>
-                <a:latin typeface="Aptos" pitchFamily="34" charset="0"/>
-                <a:ea typeface="Aptos" pitchFamily="34" charset="-122"/>
-                <a:cs typeface="Aptos" pitchFamily="34" charset="-120"/>
-              </a:rPr>
-              <a:t>Risk</a:t>
-            </a:r>
-            <a:endParaRPr lang="en-US" sz="1500" dirty="0"/>
+            <a:off x="7818120" y="3300984"/>
+            <a:ext cx="3090672" cy="877824"/>
+          </a:xfrm>
+          <a:prstGeom prst="rect">
+            <a:avLst/>
+          </a:prstGeom>
+          <a:noFill/>
+          <a:ln/>
+        </p:spPr>
+        <p:txBody>
+          <a:bodyPr wrap="square" lIns="254" tIns="254" rIns="254" bIns="254" rtlCol="0" anchor="t">
+            <a:normAutofit/>
+          </a:bodyPr>
+          <a:lstStyle/>
+          <a:p>
+            <a:r>
+              <a:rPr lang="en-US" sz="1380" dirty="0">
+                <a:solidFill>
+                  <a:srgbClr val="17364A"/>
+                </a:solidFill>
+                <a:latin typeface="Aptos" pitchFamily="34" charset="0"/>
+                <a:ea typeface="Aptos" pitchFamily="34" charset="-122"/>
+                <a:cs typeface="Aptos" pitchFamily="34" charset="-120"/>
+              </a:rPr>
+              <a:t>Fitness-for-use mismatch.</a:t>
+            </a:r>
+            <a:endParaRPr lang="en-US" sz="1380" dirty="0"/>
+          </a:p>
+          <a:p>
+            <a:r>
+              <a:rPr lang="en-US" sz="1380" dirty="0">
+                <a:solidFill>
+                  <a:srgbClr val="17364A"/>
+                </a:solidFill>
+                <a:latin typeface="Aptos" pitchFamily="34" charset="0"/>
+                <a:ea typeface="Aptos" pitchFamily="34" charset="-122"/>
+                <a:cs typeface="Aptos" pitchFamily="34" charset="-120"/>
+              </a:rPr>
+              <a:t>Data suitable for one purpose may be unsafe for another.</a:t>
+            </a:r>
+            <a:endParaRPr lang="en-US" sz="1380" dirty="0"/>
+          </a:p>
+          <a:p>
+            <a:r>
+              <a:rPr lang="en-US" sz="1380" dirty="0">
+                <a:solidFill>
+                  <a:srgbClr val="17364A"/>
+                </a:solidFill>
+                <a:latin typeface="Aptos" pitchFamily="34" charset="0"/>
+                <a:ea typeface="Aptos" pitchFamily="34" charset="-122"/>
+                <a:cs typeface="Aptos" pitchFamily="34" charset="-120"/>
+              </a:rPr>
+              <a:t>Guardrails include use-case-specific quality criteria and approval conditions.</a:t>
+            </a:r>
+            <a:endParaRPr lang="en-US" sz="1380" dirty="0"/>
           </a:p>
         </p:txBody>
       </p:sp>
       <p:sp>
         <p:nvSpPr>
           <p:cNvPr id="16" name="Shape 14"/>
-          <p:cNvSpPr/>
-          <p:nvPr/>
-        </p:nvSpPr>
-        <p:spPr>
-          <a:xfrm>
-            <a:off x="8366760" y="3639312"/>
-            <a:ext cx="2011680" cy="0"/>
-          </a:xfrm>
-          <a:prstGeom prst="line">
-            <a:avLst/>
-          </a:prstGeom>
-          <a:noFill/>
-          <a:ln w="63500">
-            <a:solidFill>
-              <a:srgbClr val="2F8A28"/>
-            </a:solidFill>
-            <a:prstDash val="solid"/>
-          </a:ln>
-        </p:spPr>
-      </p:sp>
-      <p:sp>
-        <p:nvSpPr>
-          <p:cNvPr id="17" name="Text 15"/>
-          <p:cNvSpPr/>
-          <p:nvPr/>
-        </p:nvSpPr>
-        <p:spPr>
-          <a:xfrm>
-            <a:off x="7909560" y="3849624"/>
-            <a:ext cx="2926080" cy="164592"/>
-          </a:xfrm>
-          <a:prstGeom prst="rect">
-            <a:avLst/>
-          </a:prstGeom>
-          <a:noFill/>
-          <a:ln/>
-        </p:spPr>
-        <p:txBody>
-          <a:bodyPr wrap="square" lIns="0" tIns="0" rIns="0" bIns="0" rtlCol="0" anchor="ctr"/>
-          <a:lstStyle/>
-          <a:p>
-            <a:pPr algn="ctr" indent="0" marL="0">
-              <a:buNone/>
-            </a:pPr>
-            <a:r>
-              <a:rPr lang="en-US" sz="900" dirty="0">
-                <a:solidFill>
-                  <a:srgbClr val="003A63"/>
-                </a:solidFill>
-                <a:latin typeface="Aptos" pitchFamily="34" charset="0"/>
-                <a:ea typeface="Aptos" pitchFamily="34" charset="-122"/>
-                <a:cs typeface="Aptos" pitchFamily="34" charset="-120"/>
-              </a:rPr>
-              <a:t>Human review</a:t>
-            </a:r>
-            <a:endParaRPr lang="en-US" sz="900" dirty="0"/>
-          </a:p>
-        </p:txBody>
-      </p:sp>
-      <p:sp>
-        <p:nvSpPr>
-          <p:cNvPr id="18" name="Shape 16"/>
           <p:cNvSpPr/>
           <p:nvPr/>
         </p:nvSpPr>
@@ -5188,7 +5049,7 @@
       </p:sp>
       <p:sp>
         <p:nvSpPr>
-          <p:cNvPr id="19" name="Text 17"/>
+          <p:cNvPr id="17" name="Text 15"/>
           <p:cNvSpPr/>
           <p:nvPr/>
         </p:nvSpPr>
@@ -5227,7 +5088,7 @@
       </p:sp>
       <p:sp>
         <p:nvSpPr>
-          <p:cNvPr id="20" name="Text 18"/>
+          <p:cNvPr id="18" name="Text 16"/>
           <p:cNvSpPr/>
           <p:nvPr/>
         </p:nvSpPr>
@@ -5735,13 +5596,11 @@
             </a:avLst>
           </a:prstGeom>
           <a:solidFill>
-            <a:srgbClr val="FFFFFF">
-              <a:alpha val="88000"/>
-            </a:srgbClr>
+            <a:srgbClr val="FFFFFF"/>
           </a:solidFill>
           <a:ln w="12700">
             <a:solidFill>
-              <a:srgbClr val="D6E8F2"/>
+              <a:srgbClr val="B9D7E6"/>
             </a:solidFill>
             <a:prstDash val="solid"/>
           </a:ln>
@@ -5749,26 +5608,42 @@
       </p:sp>
       <p:sp>
         <p:nvSpPr>
-          <p:cNvPr id="14" name="Shape 12"/>
-          <p:cNvSpPr/>
-          <p:nvPr/>
-        </p:nvSpPr>
-        <p:spPr>
-          <a:xfrm>
-            <a:off x="8046720" y="3108960"/>
-            <a:ext cx="2651760" cy="896112"/>
-          </a:xfrm>
-          <a:prstGeom prst="arc">
-            <a:avLst/>
-          </a:prstGeom>
-          <a:noFill/>
-          <a:ln w="25400">
-            <a:solidFill>
-              <a:srgbClr val="0068B7"/>
-            </a:solidFill>
-            <a:prstDash val="solid"/>
-          </a:ln>
-        </p:spPr>
+          <p:cNvPr id="14" name="Text 12"/>
+          <p:cNvSpPr/>
+          <p:nvPr/>
+        </p:nvSpPr>
+        <p:spPr>
+          <a:xfrm>
+            <a:off x="7799832" y="2935224"/>
+            <a:ext cx="3145536" cy="256032"/>
+          </a:xfrm>
+          <a:prstGeom prst="rect">
+            <a:avLst/>
+          </a:prstGeom>
+          <a:noFill/>
+          <a:ln/>
+        </p:spPr>
+        <p:txBody>
+          <a:bodyPr wrap="square" lIns="0" tIns="0" rIns="0" bIns="0" rtlCol="0" anchor="ctr"/>
+          <a:lstStyle/>
+          <a:p>
+            <a:pPr indent="0" marL="0">
+              <a:buNone/>
+            </a:pPr>
+            <a:r>
+              <a:rPr lang="en-US" sz="1300" b="1" dirty="0">
+                <a:solidFill>
+                  <a:srgbClr val="0068B7"/>
+                </a:solidFill>
+                <a:latin typeface="Aptos" pitchFamily="34" charset="0"/>
+                <a:ea typeface="Aptos" pitchFamily="34" charset="-122"/>
+                <a:cs typeface="Aptos" pitchFamily="34" charset="-120"/>
+              </a:rPr>
+              <a:t>Concept checkpoints</a:t>
+            </a:r>
+            <a:endParaRPr lang="en-US" sz="1300" dirty="0"/>
+          </a:p>
+        </p:txBody>
       </p:sp>
       <p:sp>
         <p:nvSpPr>
@@ -5778,102 +5653,67 @@
         </p:nvSpPr>
         <p:spPr>
           <a:xfrm>
-            <a:off x="7909560" y="3099816"/>
-            <a:ext cx="2926080" cy="256032"/>
-          </a:xfrm>
-          <a:prstGeom prst="rect">
-            <a:avLst/>
-          </a:prstGeom>
-          <a:noFill/>
-          <a:ln/>
-        </p:spPr>
-        <p:txBody>
-          <a:bodyPr wrap="square" lIns="0" tIns="0" rIns="0" bIns="0" rtlCol="0" anchor="ctr"/>
-          <a:lstStyle/>
-          <a:p>
-            <a:pPr algn="ctr" indent="0" marL="0">
-              <a:buNone/>
-            </a:pPr>
-            <a:r>
-              <a:rPr lang="en-US" sz="1500" b="1" dirty="0">
-                <a:solidFill>
-                  <a:srgbClr val="003A63"/>
-                </a:solidFill>
-                <a:latin typeface="Aptos" pitchFamily="34" charset="0"/>
-                <a:ea typeface="Aptos" pitchFamily="34" charset="-122"/>
-                <a:cs typeface="Aptos" pitchFamily="34" charset="-120"/>
-              </a:rPr>
-              <a:t>Risk</a:t>
-            </a:r>
-            <a:endParaRPr lang="en-US" sz="1500" dirty="0"/>
+            <a:off x="7818120" y="3300984"/>
+            <a:ext cx="3090672" cy="877824"/>
+          </a:xfrm>
+          <a:prstGeom prst="rect">
+            <a:avLst/>
+          </a:prstGeom>
+          <a:noFill/>
+          <a:ln/>
+        </p:spPr>
+        <p:txBody>
+          <a:bodyPr wrap="square" lIns="254" tIns="254" rIns="254" bIns="254" rtlCol="0" anchor="t">
+            <a:normAutofit/>
+          </a:bodyPr>
+          <a:lstStyle/>
+          <a:p>
+            <a:r>
+              <a:rPr lang="en-US" sz="1380" dirty="0">
+                <a:solidFill>
+                  <a:srgbClr val="17364A"/>
+                </a:solidFill>
+                <a:latin typeface="Aptos" pitchFamily="34" charset="0"/>
+                <a:ea typeface="Aptos" pitchFamily="34" charset="-122"/>
+                <a:cs typeface="Aptos" pitchFamily="34" charset="-120"/>
+              </a:rPr>
+              <a:t>Equity blind spots.</a:t>
+            </a:r>
+            <a:endParaRPr lang="en-US" sz="1380" dirty="0"/>
+          </a:p>
+          <a:p>
+            <a:r>
+              <a:rPr lang="en-US" sz="1380" dirty="0">
+                <a:solidFill>
+                  <a:srgbClr val="17364A"/>
+                </a:solidFill>
+                <a:latin typeface="Aptos" pitchFamily="34" charset="0"/>
+                <a:ea typeface="Aptos" pitchFamily="34" charset="-122"/>
+                <a:cs typeface="Aptos" pitchFamily="34" charset="-120"/>
+              </a:rPr>
+              <a:t>Missingness and underrepresentation may affect some groups more than others.</a:t>
+            </a:r>
+            <a:endParaRPr lang="en-US" sz="1380" dirty="0"/>
+          </a:p>
+          <a:p>
+            <a:r>
+              <a:rPr lang="en-US" sz="1380" dirty="0">
+                <a:solidFill>
+                  <a:srgbClr val="17364A"/>
+                </a:solidFill>
+                <a:latin typeface="Aptos" pitchFamily="34" charset="0"/>
+                <a:ea typeface="Aptos" pitchFamily="34" charset="-122"/>
+                <a:cs typeface="Aptos" pitchFamily="34" charset="-120"/>
+              </a:rPr>
+              <a:t>Guardrails include subgroup review, community context, and documentation of limitations.</a:t>
+            </a:r>
+            <a:endParaRPr lang="en-US" sz="1380" dirty="0"/>
           </a:p>
         </p:txBody>
       </p:sp>
       <p:sp>
         <p:nvSpPr>
           <p:cNvPr id="16" name="Shape 14"/>
-          <p:cNvSpPr/>
-          <p:nvPr/>
-        </p:nvSpPr>
-        <p:spPr>
-          <a:xfrm>
-            <a:off x="8366760" y="3639312"/>
-            <a:ext cx="2011680" cy="0"/>
-          </a:xfrm>
-          <a:prstGeom prst="line">
-            <a:avLst/>
-          </a:prstGeom>
-          <a:noFill/>
-          <a:ln w="63500">
-            <a:solidFill>
-              <a:srgbClr val="2F8A28"/>
-            </a:solidFill>
-            <a:prstDash val="solid"/>
-          </a:ln>
-        </p:spPr>
-      </p:sp>
-      <p:sp>
-        <p:nvSpPr>
-          <p:cNvPr id="17" name="Text 15"/>
-          <p:cNvSpPr/>
-          <p:nvPr/>
-        </p:nvSpPr>
-        <p:spPr>
-          <a:xfrm>
-            <a:off x="7909560" y="3849624"/>
-            <a:ext cx="2926080" cy="164592"/>
-          </a:xfrm>
-          <a:prstGeom prst="rect">
-            <a:avLst/>
-          </a:prstGeom>
-          <a:noFill/>
-          <a:ln/>
-        </p:spPr>
-        <p:txBody>
-          <a:bodyPr wrap="square" lIns="0" tIns="0" rIns="0" bIns="0" rtlCol="0" anchor="ctr"/>
-          <a:lstStyle/>
-          <a:p>
-            <a:pPr algn="ctr" indent="0" marL="0">
-              <a:buNone/>
-            </a:pPr>
-            <a:r>
-              <a:rPr lang="en-US" sz="900" dirty="0">
-                <a:solidFill>
-                  <a:srgbClr val="003A63"/>
-                </a:solidFill>
-                <a:latin typeface="Aptos" pitchFamily="34" charset="0"/>
-                <a:ea typeface="Aptos" pitchFamily="34" charset="-122"/>
-                <a:cs typeface="Aptos" pitchFamily="34" charset="-120"/>
-              </a:rPr>
-              <a:t>Human review</a:t>
-            </a:r>
-            <a:endParaRPr lang="en-US" sz="900" dirty="0"/>
-          </a:p>
-        </p:txBody>
-      </p:sp>
-      <p:sp>
-        <p:nvSpPr>
-          <p:cNvPr id="18" name="Shape 16"/>
           <p:cNvSpPr/>
           <p:nvPr/>
         </p:nvSpPr>
@@ -5900,7 +5740,7 @@
       </p:sp>
       <p:sp>
         <p:nvSpPr>
-          <p:cNvPr id="19" name="Text 17"/>
+          <p:cNvPr id="17" name="Text 15"/>
           <p:cNvSpPr/>
           <p:nvPr/>
         </p:nvSpPr>
@@ -5939,7 +5779,7 @@
       </p:sp>
       <p:sp>
         <p:nvSpPr>
-          <p:cNvPr id="20" name="Text 18"/>
+          <p:cNvPr id="18" name="Text 16"/>
           <p:cNvSpPr/>
           <p:nvPr/>
         </p:nvSpPr>
@@ -6447,13 +6287,11 @@
             </a:avLst>
           </a:prstGeom>
           <a:solidFill>
-            <a:srgbClr val="FFFFFF">
-              <a:alpha val="88000"/>
-            </a:srgbClr>
+            <a:srgbClr val="FFFFFF"/>
           </a:solidFill>
           <a:ln w="12700">
             <a:solidFill>
-              <a:srgbClr val="D6E8F2"/>
+              <a:srgbClr val="B9D7E6"/>
             </a:solidFill>
             <a:prstDash val="solid"/>
           </a:ln>
@@ -6461,169 +6299,98 @@
       </p:sp>
       <p:sp>
         <p:nvSpPr>
-          <p:cNvPr id="14" name="Shape 12"/>
-          <p:cNvSpPr/>
-          <p:nvPr/>
-        </p:nvSpPr>
-        <p:spPr>
-          <a:xfrm>
-            <a:off x="8138160" y="3474720"/>
-            <a:ext cx="256032" cy="411480"/>
-          </a:xfrm>
-          <a:prstGeom prst="rect">
-            <a:avLst/>
-          </a:prstGeom>
-          <a:solidFill>
-            <a:srgbClr val="0068B7"/>
-          </a:solidFill>
-          <a:ln w="12700">
-            <a:solidFill>
-              <a:srgbClr val="0068B7"/>
-            </a:solidFill>
-            <a:prstDash val="solid"/>
-          </a:ln>
-        </p:spPr>
-      </p:sp>
-      <p:sp>
-        <p:nvSpPr>
-          <p:cNvPr id="15" name="Shape 13"/>
-          <p:cNvSpPr/>
-          <p:nvPr/>
-        </p:nvSpPr>
-        <p:spPr>
-          <a:xfrm>
-            <a:off x="8577072" y="3172968"/>
-            <a:ext cx="256032" cy="713232"/>
-          </a:xfrm>
-          <a:prstGeom prst="rect">
-            <a:avLst/>
-          </a:prstGeom>
-          <a:solidFill>
-            <a:srgbClr val="2F8A28"/>
-          </a:solidFill>
-          <a:ln w="12700">
-            <a:solidFill>
-              <a:srgbClr val="2F8A28"/>
-            </a:solidFill>
-            <a:prstDash val="solid"/>
-          </a:ln>
-        </p:spPr>
+          <p:cNvPr id="14" name="Text 12"/>
+          <p:cNvSpPr/>
+          <p:nvPr/>
+        </p:nvSpPr>
+        <p:spPr>
+          <a:xfrm>
+            <a:off x="7799832" y="2935224"/>
+            <a:ext cx="3145536" cy="256032"/>
+          </a:xfrm>
+          <a:prstGeom prst="rect">
+            <a:avLst/>
+          </a:prstGeom>
+          <a:noFill/>
+          <a:ln/>
+        </p:spPr>
+        <p:txBody>
+          <a:bodyPr wrap="square" lIns="0" tIns="0" rIns="0" bIns="0" rtlCol="0" anchor="ctr"/>
+          <a:lstStyle/>
+          <a:p>
+            <a:pPr indent="0" marL="0">
+              <a:buNone/>
+            </a:pPr>
+            <a:r>
+              <a:rPr lang="en-US" sz="1300" b="1" dirty="0">
+                <a:solidFill>
+                  <a:srgbClr val="0068B7"/>
+                </a:solidFill>
+                <a:latin typeface="Aptos" pitchFamily="34" charset="0"/>
+                <a:ea typeface="Aptos" pitchFamily="34" charset="-122"/>
+                <a:cs typeface="Aptos" pitchFamily="34" charset="-120"/>
+              </a:rPr>
+              <a:t>Concept checkpoints</a:t>
+            </a:r>
+            <a:endParaRPr lang="en-US" sz="1300" dirty="0"/>
+          </a:p>
+        </p:txBody>
+      </p:sp>
+      <p:sp>
+        <p:nvSpPr>
+          <p:cNvPr id="15" name="Text 13"/>
+          <p:cNvSpPr/>
+          <p:nvPr/>
+        </p:nvSpPr>
+        <p:spPr>
+          <a:xfrm>
+            <a:off x="7818120" y="3300984"/>
+            <a:ext cx="3090672" cy="877824"/>
+          </a:xfrm>
+          <a:prstGeom prst="rect">
+            <a:avLst/>
+          </a:prstGeom>
+          <a:noFill/>
+          <a:ln/>
+        </p:spPr>
+        <p:txBody>
+          <a:bodyPr wrap="square" lIns="254" tIns="254" rIns="254" bIns="254" rtlCol="0" anchor="t">
+            <a:normAutofit/>
+          </a:bodyPr>
+          <a:lstStyle/>
+          <a:p>
+            <a:r>
+              <a:rPr lang="en-US" sz="1380" dirty="0">
+                <a:solidFill>
+                  <a:srgbClr val="17364A"/>
+                </a:solidFill>
+                <a:latin typeface="Aptos" pitchFamily="34" charset="0"/>
+                <a:ea typeface="Aptos" pitchFamily="34" charset="-122"/>
+                <a:cs typeface="Aptos" pitchFamily="34" charset="-120"/>
+              </a:rPr>
+              <a:t>RAG depends on document quality, metadata, and currency.</a:t>
+            </a:r>
+            <a:endParaRPr lang="en-US" sz="1380" dirty="0"/>
+          </a:p>
+          <a:p>
+            <a:r>
+              <a:rPr lang="en-US" sz="1380" dirty="0">
+                <a:solidFill>
+                  <a:srgbClr val="17364A"/>
+                </a:solidFill>
+                <a:latin typeface="Aptos" pitchFamily="34" charset="0"/>
+                <a:ea typeface="Aptos" pitchFamily="34" charset="-122"/>
+                <a:cs typeface="Aptos" pitchFamily="34" charset="-120"/>
+              </a:rPr>
+              <a:t>Agentic AI should be blocked from acting automatically when required data are missing or.</a:t>
+            </a:r>
+            <a:endParaRPr lang="en-US" sz="1380" dirty="0"/>
+          </a:p>
+        </p:txBody>
       </p:sp>
       <p:sp>
         <p:nvSpPr>
           <p:cNvPr id="16" name="Shape 14"/>
-          <p:cNvSpPr/>
-          <p:nvPr/>
-        </p:nvSpPr>
-        <p:spPr>
-          <a:xfrm>
-            <a:off x="9015984" y="2880360"/>
-            <a:ext cx="256032" cy="1005840"/>
-          </a:xfrm>
-          <a:prstGeom prst="rect">
-            <a:avLst/>
-          </a:prstGeom>
-          <a:solidFill>
-            <a:srgbClr val="D69A2D"/>
-          </a:solidFill>
-          <a:ln w="12700">
-            <a:solidFill>
-              <a:srgbClr val="D69A2D"/>
-            </a:solidFill>
-            <a:prstDash val="solid"/>
-          </a:ln>
-        </p:spPr>
-      </p:sp>
-      <p:sp>
-        <p:nvSpPr>
-          <p:cNvPr id="17" name="Shape 15"/>
-          <p:cNvSpPr/>
-          <p:nvPr/>
-        </p:nvSpPr>
-        <p:spPr>
-          <a:xfrm>
-            <a:off x="9454896" y="3319272"/>
-            <a:ext cx="256032" cy="566928"/>
-          </a:xfrm>
-          <a:prstGeom prst="rect">
-            <a:avLst/>
-          </a:prstGeom>
-          <a:solidFill>
-            <a:srgbClr val="6A4CA3"/>
-          </a:solidFill>
-          <a:ln w="12700">
-            <a:solidFill>
-              <a:srgbClr val="6A4CA3"/>
-            </a:solidFill>
-            <a:prstDash val="solid"/>
-          </a:ln>
-        </p:spPr>
-      </p:sp>
-      <p:sp>
-        <p:nvSpPr>
-          <p:cNvPr id="18" name="Shape 16"/>
-          <p:cNvSpPr/>
-          <p:nvPr/>
-        </p:nvSpPr>
-        <p:spPr>
-          <a:xfrm>
-            <a:off x="8019288" y="3886200"/>
-            <a:ext cx="2706624" cy="0"/>
-          </a:xfrm>
-          <a:prstGeom prst="line">
-            <a:avLst/>
-          </a:prstGeom>
-          <a:noFill/>
-          <a:ln w="15240">
-            <a:solidFill>
-              <a:srgbClr val="003A63"/>
-            </a:solidFill>
-            <a:prstDash val="solid"/>
-          </a:ln>
-        </p:spPr>
-      </p:sp>
-      <p:sp>
-        <p:nvSpPr>
-          <p:cNvPr id="19" name="Text 17"/>
-          <p:cNvSpPr/>
-          <p:nvPr/>
-        </p:nvSpPr>
-        <p:spPr>
-          <a:xfrm>
-            <a:off x="7863840" y="3017520"/>
-            <a:ext cx="3017520" cy="201168"/>
-          </a:xfrm>
-          <a:prstGeom prst="rect">
-            <a:avLst/>
-          </a:prstGeom>
-          <a:noFill/>
-          <a:ln/>
-        </p:spPr>
-        <p:txBody>
-          <a:bodyPr wrap="square" lIns="0" tIns="0" rIns="0" bIns="0" rtlCol="0" anchor="ctr"/>
-          <a:lstStyle/>
-          <a:p>
-            <a:pPr algn="ctr" indent="0" marL="0">
-              <a:buNone/>
-            </a:pPr>
-            <a:r>
-              <a:rPr lang="en-US" sz="1050" b="1" dirty="0">
-                <a:solidFill>
-                  <a:srgbClr val="003A63"/>
-                </a:solidFill>
-                <a:latin typeface="Aptos" pitchFamily="34" charset="0"/>
-                <a:ea typeface="Aptos" pitchFamily="34" charset="-122"/>
-                <a:cs typeface="Aptos" pitchFamily="34" charset="-120"/>
-              </a:rPr>
-              <a:t>Measure and monitor</a:t>
-            </a:r>
-            <a:endParaRPr lang="en-US" sz="1050" dirty="0"/>
-          </a:p>
-        </p:txBody>
-      </p:sp>
-      <p:sp>
-        <p:nvSpPr>
-          <p:cNvPr id="20" name="Shape 18"/>
           <p:cNvSpPr/>
           <p:nvPr/>
         </p:nvSpPr>
@@ -6650,7 +6417,7 @@
       </p:sp>
       <p:sp>
         <p:nvSpPr>
-          <p:cNvPr id="21" name="Text 19"/>
+          <p:cNvPr id="17" name="Text 15"/>
           <p:cNvSpPr/>
           <p:nvPr/>
         </p:nvSpPr>
@@ -6689,7 +6456,7 @@
       </p:sp>
       <p:sp>
         <p:nvSpPr>
-          <p:cNvPr id="22" name="Text 20"/>
+          <p:cNvPr id="18" name="Text 16"/>
           <p:cNvSpPr/>
           <p:nvPr/>
         </p:nvSpPr>
@@ -7197,13 +6964,11 @@
             </a:avLst>
           </a:prstGeom>
           <a:solidFill>
-            <a:srgbClr val="FFFFFF">
-              <a:alpha val="88000"/>
-            </a:srgbClr>
+            <a:srgbClr val="FFFFFF"/>
           </a:solidFill>
           <a:ln w="12700">
             <a:solidFill>
-              <a:srgbClr val="D6E8F2"/>
+              <a:srgbClr val="B9D7E6"/>
             </a:solidFill>
             <a:prstDash val="solid"/>
           </a:ln>
@@ -7211,169 +6976,112 @@
       </p:sp>
       <p:sp>
         <p:nvSpPr>
-          <p:cNvPr id="14" name="Shape 12"/>
-          <p:cNvSpPr/>
-          <p:nvPr/>
-        </p:nvSpPr>
-        <p:spPr>
-          <a:xfrm>
-            <a:off x="8138160" y="3474720"/>
-            <a:ext cx="256032" cy="411480"/>
-          </a:xfrm>
-          <a:prstGeom prst="rect">
-            <a:avLst/>
-          </a:prstGeom>
-          <a:solidFill>
-            <a:srgbClr val="0068B7"/>
-          </a:solidFill>
-          <a:ln w="12700">
-            <a:solidFill>
-              <a:srgbClr val="0068B7"/>
-            </a:solidFill>
-            <a:prstDash val="solid"/>
-          </a:ln>
-        </p:spPr>
-      </p:sp>
-      <p:sp>
-        <p:nvSpPr>
-          <p:cNvPr id="15" name="Shape 13"/>
-          <p:cNvSpPr/>
-          <p:nvPr/>
-        </p:nvSpPr>
-        <p:spPr>
-          <a:xfrm>
-            <a:off x="8577072" y="3172968"/>
-            <a:ext cx="256032" cy="713232"/>
-          </a:xfrm>
-          <a:prstGeom prst="rect">
-            <a:avLst/>
-          </a:prstGeom>
-          <a:solidFill>
-            <a:srgbClr val="2F8A28"/>
-          </a:solidFill>
-          <a:ln w="12700">
-            <a:solidFill>
-              <a:srgbClr val="2F8A28"/>
-            </a:solidFill>
-            <a:prstDash val="solid"/>
-          </a:ln>
-        </p:spPr>
+          <p:cNvPr id="14" name="Text 12"/>
+          <p:cNvSpPr/>
+          <p:nvPr/>
+        </p:nvSpPr>
+        <p:spPr>
+          <a:xfrm>
+            <a:off x="7799832" y="2935224"/>
+            <a:ext cx="3145536" cy="256032"/>
+          </a:xfrm>
+          <a:prstGeom prst="rect">
+            <a:avLst/>
+          </a:prstGeom>
+          <a:noFill/>
+          <a:ln/>
+        </p:spPr>
+        <p:txBody>
+          <a:bodyPr wrap="square" lIns="0" tIns="0" rIns="0" bIns="0" rtlCol="0" anchor="ctr"/>
+          <a:lstStyle/>
+          <a:p>
+            <a:pPr indent="0" marL="0">
+              <a:buNone/>
+            </a:pPr>
+            <a:r>
+              <a:rPr lang="en-US" sz="1300" b="1" dirty="0">
+                <a:solidFill>
+                  <a:srgbClr val="0068B7"/>
+                </a:solidFill>
+                <a:latin typeface="Aptos" pitchFamily="34" charset="0"/>
+                <a:ea typeface="Aptos" pitchFamily="34" charset="-122"/>
+                <a:cs typeface="Aptos" pitchFamily="34" charset="-120"/>
+              </a:rPr>
+              <a:t>Concept checkpoints</a:t>
+            </a:r>
+            <a:endParaRPr lang="en-US" sz="1300" dirty="0"/>
+          </a:p>
+        </p:txBody>
+      </p:sp>
+      <p:sp>
+        <p:nvSpPr>
+          <p:cNvPr id="15" name="Text 13"/>
+          <p:cNvSpPr/>
+          <p:nvPr/>
+        </p:nvSpPr>
+        <p:spPr>
+          <a:xfrm>
+            <a:off x="7818120" y="3300984"/>
+            <a:ext cx="3090672" cy="877824"/>
+          </a:xfrm>
+          <a:prstGeom prst="rect">
+            <a:avLst/>
+          </a:prstGeom>
+          <a:noFill/>
+          <a:ln/>
+        </p:spPr>
+        <p:txBody>
+          <a:bodyPr wrap="square" lIns="254" tIns="254" rIns="254" bIns="254" rtlCol="0" anchor="t">
+            <a:normAutofit/>
+          </a:bodyPr>
+          <a:lstStyle/>
+          <a:p>
+            <a:r>
+              <a:rPr lang="en-US" sz="1380" dirty="0">
+                <a:solidFill>
+                  <a:srgbClr val="17364A"/>
+                </a:solidFill>
+                <a:latin typeface="Aptos" pitchFamily="34" charset="0"/>
+                <a:ea typeface="Aptos" pitchFamily="34" charset="-122"/>
+                <a:cs typeface="Aptos" pitchFamily="34" charset="-120"/>
+              </a:rPr>
+              <a:t>Which data quality problems most often affect your program area?</a:t>
+            </a:r>
+            <a:endParaRPr lang="en-US" sz="1380" dirty="0"/>
+          </a:p>
+          <a:p>
+            <a:r>
+              <a:rPr lang="en-US" sz="1380" dirty="0">
+                <a:solidFill>
+                  <a:srgbClr val="17364A"/>
+                </a:solidFill>
+                <a:latin typeface="Aptos" pitchFamily="34" charset="0"/>
+                <a:ea typeface="Aptos" pitchFamily="34" charset="-122"/>
+                <a:cs typeface="Aptos" pitchFamily="34" charset="-120"/>
+              </a:rPr>
+              <a:t>Which missing fields would make an AI output unsafe or unreliable?</a:t>
+            </a:r>
+            <a:endParaRPr lang="en-US" sz="1380" dirty="0"/>
+          </a:p>
+          <a:p>
+            <a:r>
+              <a:rPr lang="en-US" sz="1380" dirty="0">
+                <a:solidFill>
+                  <a:srgbClr val="17364A"/>
+                </a:solidFill>
+                <a:latin typeface="Aptos" pitchFamily="34" charset="0"/>
+                <a:ea typeface="Aptos" pitchFamily="34" charset="-122"/>
+                <a:cs typeface="Aptos" pitchFamily="34" charset="-120"/>
+              </a:rPr>
+              <a:t>Which populations or settings may be underrepresented in the data?</a:t>
+            </a:r>
+            <a:endParaRPr lang="en-US" sz="1380" dirty="0"/>
+          </a:p>
+        </p:txBody>
       </p:sp>
       <p:sp>
         <p:nvSpPr>
           <p:cNvPr id="16" name="Shape 14"/>
-          <p:cNvSpPr/>
-          <p:nvPr/>
-        </p:nvSpPr>
-        <p:spPr>
-          <a:xfrm>
-            <a:off x="9015984" y="2880360"/>
-            <a:ext cx="256032" cy="1005840"/>
-          </a:xfrm>
-          <a:prstGeom prst="rect">
-            <a:avLst/>
-          </a:prstGeom>
-          <a:solidFill>
-            <a:srgbClr val="D69A2D"/>
-          </a:solidFill>
-          <a:ln w="12700">
-            <a:solidFill>
-              <a:srgbClr val="D69A2D"/>
-            </a:solidFill>
-            <a:prstDash val="solid"/>
-          </a:ln>
-        </p:spPr>
-      </p:sp>
-      <p:sp>
-        <p:nvSpPr>
-          <p:cNvPr id="17" name="Shape 15"/>
-          <p:cNvSpPr/>
-          <p:nvPr/>
-        </p:nvSpPr>
-        <p:spPr>
-          <a:xfrm>
-            <a:off x="9454896" y="3319272"/>
-            <a:ext cx="256032" cy="566928"/>
-          </a:xfrm>
-          <a:prstGeom prst="rect">
-            <a:avLst/>
-          </a:prstGeom>
-          <a:solidFill>
-            <a:srgbClr val="6A4CA3"/>
-          </a:solidFill>
-          <a:ln w="12700">
-            <a:solidFill>
-              <a:srgbClr val="6A4CA3"/>
-            </a:solidFill>
-            <a:prstDash val="solid"/>
-          </a:ln>
-        </p:spPr>
-      </p:sp>
-      <p:sp>
-        <p:nvSpPr>
-          <p:cNvPr id="18" name="Shape 16"/>
-          <p:cNvSpPr/>
-          <p:nvPr/>
-        </p:nvSpPr>
-        <p:spPr>
-          <a:xfrm>
-            <a:off x="8019288" y="3886200"/>
-            <a:ext cx="2706624" cy="0"/>
-          </a:xfrm>
-          <a:prstGeom prst="line">
-            <a:avLst/>
-          </a:prstGeom>
-          <a:noFill/>
-          <a:ln w="15240">
-            <a:solidFill>
-              <a:srgbClr val="003A63"/>
-            </a:solidFill>
-            <a:prstDash val="solid"/>
-          </a:ln>
-        </p:spPr>
-      </p:sp>
-      <p:sp>
-        <p:nvSpPr>
-          <p:cNvPr id="19" name="Text 17"/>
-          <p:cNvSpPr/>
-          <p:nvPr/>
-        </p:nvSpPr>
-        <p:spPr>
-          <a:xfrm>
-            <a:off x="7863840" y="3017520"/>
-            <a:ext cx="3017520" cy="201168"/>
-          </a:xfrm>
-          <a:prstGeom prst="rect">
-            <a:avLst/>
-          </a:prstGeom>
-          <a:noFill/>
-          <a:ln/>
-        </p:spPr>
-        <p:txBody>
-          <a:bodyPr wrap="square" lIns="0" tIns="0" rIns="0" bIns="0" rtlCol="0" anchor="ctr"/>
-          <a:lstStyle/>
-          <a:p>
-            <a:pPr algn="ctr" indent="0" marL="0">
-              <a:buNone/>
-            </a:pPr>
-            <a:r>
-              <a:rPr lang="en-US" sz="1050" b="1" dirty="0">
-                <a:solidFill>
-                  <a:srgbClr val="003A63"/>
-                </a:solidFill>
-                <a:latin typeface="Aptos" pitchFamily="34" charset="0"/>
-                <a:ea typeface="Aptos" pitchFamily="34" charset="-122"/>
-                <a:cs typeface="Aptos" pitchFamily="34" charset="-120"/>
-              </a:rPr>
-              <a:t>Measure and monitor</a:t>
-            </a:r>
-            <a:endParaRPr lang="en-US" sz="1050" dirty="0"/>
-          </a:p>
-        </p:txBody>
-      </p:sp>
-      <p:sp>
-        <p:nvSpPr>
-          <p:cNvPr id="20" name="Shape 18"/>
           <p:cNvSpPr/>
           <p:nvPr/>
         </p:nvSpPr>
@@ -7400,7 +7108,7 @@
       </p:sp>
       <p:sp>
         <p:nvSpPr>
-          <p:cNvPr id="21" name="Text 19"/>
+          <p:cNvPr id="17" name="Text 15"/>
           <p:cNvSpPr/>
           <p:nvPr/>
         </p:nvSpPr>
@@ -7439,7 +7147,7 @@
       </p:sp>
       <p:sp>
         <p:nvSpPr>
-          <p:cNvPr id="22" name="Text 20"/>
+          <p:cNvPr id="18" name="Text 16"/>
           <p:cNvSpPr/>
           <p:nvPr/>
         </p:nvSpPr>
@@ -7933,13 +7641,11 @@
             </a:avLst>
           </a:prstGeom>
           <a:solidFill>
-            <a:srgbClr val="FFFFFF">
-              <a:alpha val="88000"/>
-            </a:srgbClr>
+            <a:srgbClr val="FFFFFF"/>
           </a:solidFill>
           <a:ln w="12700">
             <a:solidFill>
-              <a:srgbClr val="D6E8F2"/>
+              <a:srgbClr val="B9D7E6"/>
             </a:solidFill>
             <a:prstDash val="solid"/>
           </a:ln>
@@ -7947,169 +7653,98 @@
       </p:sp>
       <p:sp>
         <p:nvSpPr>
-          <p:cNvPr id="14" name="Shape 12"/>
-          <p:cNvSpPr/>
-          <p:nvPr/>
-        </p:nvSpPr>
-        <p:spPr>
-          <a:xfrm>
-            <a:off x="8138160" y="3474720"/>
-            <a:ext cx="256032" cy="411480"/>
-          </a:xfrm>
-          <a:prstGeom prst="rect">
-            <a:avLst/>
-          </a:prstGeom>
-          <a:solidFill>
-            <a:srgbClr val="0068B7"/>
-          </a:solidFill>
-          <a:ln w="12700">
-            <a:solidFill>
-              <a:srgbClr val="0068B7"/>
-            </a:solidFill>
-            <a:prstDash val="solid"/>
-          </a:ln>
-        </p:spPr>
-      </p:sp>
-      <p:sp>
-        <p:nvSpPr>
-          <p:cNvPr id="15" name="Shape 13"/>
-          <p:cNvSpPr/>
-          <p:nvPr/>
-        </p:nvSpPr>
-        <p:spPr>
-          <a:xfrm>
-            <a:off x="8577072" y="3172968"/>
-            <a:ext cx="256032" cy="713232"/>
-          </a:xfrm>
-          <a:prstGeom prst="rect">
-            <a:avLst/>
-          </a:prstGeom>
-          <a:solidFill>
-            <a:srgbClr val="2F8A28"/>
-          </a:solidFill>
-          <a:ln w="12700">
-            <a:solidFill>
-              <a:srgbClr val="2F8A28"/>
-            </a:solidFill>
-            <a:prstDash val="solid"/>
-          </a:ln>
-        </p:spPr>
+          <p:cNvPr id="14" name="Text 12"/>
+          <p:cNvSpPr/>
+          <p:nvPr/>
+        </p:nvSpPr>
+        <p:spPr>
+          <a:xfrm>
+            <a:off x="7799832" y="2935224"/>
+            <a:ext cx="3145536" cy="256032"/>
+          </a:xfrm>
+          <a:prstGeom prst="rect">
+            <a:avLst/>
+          </a:prstGeom>
+          <a:noFill/>
+          <a:ln/>
+        </p:spPr>
+        <p:txBody>
+          <a:bodyPr wrap="square" lIns="0" tIns="0" rIns="0" bIns="0" rtlCol="0" anchor="ctr"/>
+          <a:lstStyle/>
+          <a:p>
+            <a:pPr indent="0" marL="0">
+              <a:buNone/>
+            </a:pPr>
+            <a:r>
+              <a:rPr lang="en-US" sz="1300" b="1" dirty="0">
+                <a:solidFill>
+                  <a:srgbClr val="0068B7"/>
+                </a:solidFill>
+                <a:latin typeface="Aptos" pitchFamily="34" charset="0"/>
+                <a:ea typeface="Aptos" pitchFamily="34" charset="-122"/>
+                <a:cs typeface="Aptos" pitchFamily="34" charset="-120"/>
+              </a:rPr>
+              <a:t>Concept checkpoints</a:t>
+            </a:r>
+            <a:endParaRPr lang="en-US" sz="1300" dirty="0"/>
+          </a:p>
+        </p:txBody>
+      </p:sp>
+      <p:sp>
+        <p:nvSpPr>
+          <p:cNvPr id="15" name="Text 13"/>
+          <p:cNvSpPr/>
+          <p:nvPr/>
+        </p:nvSpPr>
+        <p:spPr>
+          <a:xfrm>
+            <a:off x="7818120" y="3300984"/>
+            <a:ext cx="3090672" cy="877824"/>
+          </a:xfrm>
+          <a:prstGeom prst="rect">
+            <a:avLst/>
+          </a:prstGeom>
+          <a:noFill/>
+          <a:ln/>
+        </p:spPr>
+        <p:txBody>
+          <a:bodyPr wrap="square" lIns="254" tIns="254" rIns="254" bIns="254" rtlCol="0" anchor="t">
+            <a:normAutofit/>
+          </a:bodyPr>
+          <a:lstStyle/>
+          <a:p>
+            <a:r>
+              <a:rPr lang="en-US" sz="1380" dirty="0">
+                <a:solidFill>
+                  <a:srgbClr val="17364A"/>
+                </a:solidFill>
+                <a:latin typeface="Aptos" pitchFamily="34" charset="0"/>
+                <a:ea typeface="Aptos" pitchFamily="34" charset="-122"/>
+                <a:cs typeface="Aptos" pitchFamily="34" charset="-120"/>
+              </a:rPr>
+              <a:t>How would staff detect data drift?</a:t>
+            </a:r>
+            <a:endParaRPr lang="en-US" sz="1380" dirty="0"/>
+          </a:p>
+          <a:p>
+            <a:r>
+              <a:rPr lang="en-US" sz="1380" dirty="0">
+                <a:solidFill>
+                  <a:srgbClr val="17364A"/>
+                </a:solidFill>
+                <a:latin typeface="Aptos" pitchFamily="34" charset="0"/>
+                <a:ea typeface="Aptos" pitchFamily="34" charset="-122"/>
+                <a:cs typeface="Aptos" pitchFamily="34" charset="-120"/>
+              </a:rPr>
+              <a:t>Who has authority to pause or limit AI use when data quality is insufficient?</a:t>
+            </a:r>
+            <a:endParaRPr lang="en-US" sz="1380" dirty="0"/>
+          </a:p>
+        </p:txBody>
       </p:sp>
       <p:sp>
         <p:nvSpPr>
           <p:cNvPr id="16" name="Shape 14"/>
-          <p:cNvSpPr/>
-          <p:nvPr/>
-        </p:nvSpPr>
-        <p:spPr>
-          <a:xfrm>
-            <a:off x="9015984" y="2880360"/>
-            <a:ext cx="256032" cy="1005840"/>
-          </a:xfrm>
-          <a:prstGeom prst="rect">
-            <a:avLst/>
-          </a:prstGeom>
-          <a:solidFill>
-            <a:srgbClr val="D69A2D"/>
-          </a:solidFill>
-          <a:ln w="12700">
-            <a:solidFill>
-              <a:srgbClr val="D69A2D"/>
-            </a:solidFill>
-            <a:prstDash val="solid"/>
-          </a:ln>
-        </p:spPr>
-      </p:sp>
-      <p:sp>
-        <p:nvSpPr>
-          <p:cNvPr id="17" name="Shape 15"/>
-          <p:cNvSpPr/>
-          <p:nvPr/>
-        </p:nvSpPr>
-        <p:spPr>
-          <a:xfrm>
-            <a:off x="9454896" y="3319272"/>
-            <a:ext cx="256032" cy="566928"/>
-          </a:xfrm>
-          <a:prstGeom prst="rect">
-            <a:avLst/>
-          </a:prstGeom>
-          <a:solidFill>
-            <a:srgbClr val="6A4CA3"/>
-          </a:solidFill>
-          <a:ln w="12700">
-            <a:solidFill>
-              <a:srgbClr val="6A4CA3"/>
-            </a:solidFill>
-            <a:prstDash val="solid"/>
-          </a:ln>
-        </p:spPr>
-      </p:sp>
-      <p:sp>
-        <p:nvSpPr>
-          <p:cNvPr id="18" name="Shape 16"/>
-          <p:cNvSpPr/>
-          <p:nvPr/>
-        </p:nvSpPr>
-        <p:spPr>
-          <a:xfrm>
-            <a:off x="8019288" y="3886200"/>
-            <a:ext cx="2706624" cy="0"/>
-          </a:xfrm>
-          <a:prstGeom prst="line">
-            <a:avLst/>
-          </a:prstGeom>
-          <a:noFill/>
-          <a:ln w="15240">
-            <a:solidFill>
-              <a:srgbClr val="003A63"/>
-            </a:solidFill>
-            <a:prstDash val="solid"/>
-          </a:ln>
-        </p:spPr>
-      </p:sp>
-      <p:sp>
-        <p:nvSpPr>
-          <p:cNvPr id="19" name="Text 17"/>
-          <p:cNvSpPr/>
-          <p:nvPr/>
-        </p:nvSpPr>
-        <p:spPr>
-          <a:xfrm>
-            <a:off x="7863840" y="3017520"/>
-            <a:ext cx="3017520" cy="201168"/>
-          </a:xfrm>
-          <a:prstGeom prst="rect">
-            <a:avLst/>
-          </a:prstGeom>
-          <a:noFill/>
-          <a:ln/>
-        </p:spPr>
-        <p:txBody>
-          <a:bodyPr wrap="square" lIns="0" tIns="0" rIns="0" bIns="0" rtlCol="0" anchor="ctr"/>
-          <a:lstStyle/>
-          <a:p>
-            <a:pPr algn="ctr" indent="0" marL="0">
-              <a:buNone/>
-            </a:pPr>
-            <a:r>
-              <a:rPr lang="en-US" sz="1050" b="1" dirty="0">
-                <a:solidFill>
-                  <a:srgbClr val="003A63"/>
-                </a:solidFill>
-                <a:latin typeface="Aptos" pitchFamily="34" charset="0"/>
-                <a:ea typeface="Aptos" pitchFamily="34" charset="-122"/>
-                <a:cs typeface="Aptos" pitchFamily="34" charset="-120"/>
-              </a:rPr>
-              <a:t>Measure and monitor</a:t>
-            </a:r>
-            <a:endParaRPr lang="en-US" sz="1050" dirty="0"/>
-          </a:p>
-        </p:txBody>
-      </p:sp>
-      <p:sp>
-        <p:nvSpPr>
-          <p:cNvPr id="20" name="Shape 18"/>
           <p:cNvSpPr/>
           <p:nvPr/>
         </p:nvSpPr>
@@ -8136,7 +7771,7 @@
       </p:sp>
       <p:sp>
         <p:nvSpPr>
-          <p:cNvPr id="21" name="Text 19"/>
+          <p:cNvPr id="17" name="Text 15"/>
           <p:cNvSpPr/>
           <p:nvPr/>
         </p:nvSpPr>
@@ -8175,7 +7810,7 @@
       </p:sp>
       <p:sp>
         <p:nvSpPr>
-          <p:cNvPr id="22" name="Text 20"/>
+          <p:cNvPr id="18" name="Text 16"/>
           <p:cNvSpPr/>
           <p:nvPr/>
         </p:nvSpPr>
@@ -8669,13 +8304,11 @@
             </a:avLst>
           </a:prstGeom>
           <a:solidFill>
-            <a:srgbClr val="FFFFFF">
-              <a:alpha val="88000"/>
-            </a:srgbClr>
+            <a:srgbClr val="FFFFFF"/>
           </a:solidFill>
           <a:ln w="12700">
             <a:solidFill>
-              <a:srgbClr val="D6E8F2"/>
+              <a:srgbClr val="B9D7E6"/>
             </a:solidFill>
             <a:prstDash val="solid"/>
           </a:ln>
@@ -8683,169 +8316,98 @@
       </p:sp>
       <p:sp>
         <p:nvSpPr>
-          <p:cNvPr id="14" name="Shape 12"/>
-          <p:cNvSpPr/>
-          <p:nvPr/>
-        </p:nvSpPr>
-        <p:spPr>
-          <a:xfrm>
-            <a:off x="8138160" y="3474720"/>
-            <a:ext cx="256032" cy="411480"/>
-          </a:xfrm>
-          <a:prstGeom prst="rect">
-            <a:avLst/>
-          </a:prstGeom>
-          <a:solidFill>
-            <a:srgbClr val="0068B7"/>
-          </a:solidFill>
-          <a:ln w="12700">
-            <a:solidFill>
-              <a:srgbClr val="0068B7"/>
-            </a:solidFill>
-            <a:prstDash val="solid"/>
-          </a:ln>
-        </p:spPr>
-      </p:sp>
-      <p:sp>
-        <p:nvSpPr>
-          <p:cNvPr id="15" name="Shape 13"/>
-          <p:cNvSpPr/>
-          <p:nvPr/>
-        </p:nvSpPr>
-        <p:spPr>
-          <a:xfrm>
-            <a:off x="8577072" y="3172968"/>
-            <a:ext cx="256032" cy="713232"/>
-          </a:xfrm>
-          <a:prstGeom prst="rect">
-            <a:avLst/>
-          </a:prstGeom>
-          <a:solidFill>
-            <a:srgbClr val="2F8A28"/>
-          </a:solidFill>
-          <a:ln w="12700">
-            <a:solidFill>
-              <a:srgbClr val="2F8A28"/>
-            </a:solidFill>
-            <a:prstDash val="solid"/>
-          </a:ln>
-        </p:spPr>
+          <p:cNvPr id="14" name="Text 12"/>
+          <p:cNvSpPr/>
+          <p:nvPr/>
+        </p:nvSpPr>
+        <p:spPr>
+          <a:xfrm>
+            <a:off x="7799832" y="2935224"/>
+            <a:ext cx="3145536" cy="256032"/>
+          </a:xfrm>
+          <a:prstGeom prst="rect">
+            <a:avLst/>
+          </a:prstGeom>
+          <a:noFill/>
+          <a:ln/>
+        </p:spPr>
+        <p:txBody>
+          <a:bodyPr wrap="square" lIns="0" tIns="0" rIns="0" bIns="0" rtlCol="0" anchor="ctr"/>
+          <a:lstStyle/>
+          <a:p>
+            <a:pPr indent="0" marL="0">
+              <a:buNone/>
+            </a:pPr>
+            <a:r>
+              <a:rPr lang="en-US" sz="1300" b="1" dirty="0">
+                <a:solidFill>
+                  <a:srgbClr val="0068B7"/>
+                </a:solidFill>
+                <a:latin typeface="Aptos" pitchFamily="34" charset="0"/>
+                <a:ea typeface="Aptos" pitchFamily="34" charset="-122"/>
+                <a:cs typeface="Aptos" pitchFamily="34" charset="-120"/>
+              </a:rPr>
+              <a:t>Concept checkpoints</a:t>
+            </a:r>
+            <a:endParaRPr lang="en-US" sz="1300" dirty="0"/>
+          </a:p>
+        </p:txBody>
+      </p:sp>
+      <p:sp>
+        <p:nvSpPr>
+          <p:cNvPr id="15" name="Text 13"/>
+          <p:cNvSpPr/>
+          <p:nvPr/>
+        </p:nvSpPr>
+        <p:spPr>
+          <a:xfrm>
+            <a:off x="7818120" y="3300984"/>
+            <a:ext cx="3090672" cy="877824"/>
+          </a:xfrm>
+          <a:prstGeom prst="rect">
+            <a:avLst/>
+          </a:prstGeom>
+          <a:noFill/>
+          <a:ln/>
+        </p:spPr>
+        <p:txBody>
+          <a:bodyPr wrap="square" lIns="254" tIns="254" rIns="254" bIns="254" rtlCol="0" anchor="t">
+            <a:normAutofit/>
+          </a:bodyPr>
+          <a:lstStyle/>
+          <a:p>
+            <a:r>
+              <a:rPr lang="en-US" sz="1380" dirty="0">
+                <a:solidFill>
+                  <a:srgbClr val="17364A"/>
+                </a:solidFill>
+                <a:latin typeface="Aptos" pitchFamily="34" charset="0"/>
+                <a:ea typeface="Aptos" pitchFamily="34" charset="-122"/>
+                <a:cs typeface="Aptos" pitchFamily="34" charset="-120"/>
+              </a:rPr>
+              <a:t>Create a data quality review plan for one AI-supported workflow.</a:t>
+            </a:r>
+            <a:endParaRPr lang="en-US" sz="1380" dirty="0"/>
+          </a:p>
+          <a:p>
+            <a:r>
+              <a:rPr lang="en-US" sz="1380" dirty="0">
+                <a:solidFill>
+                  <a:srgbClr val="17364A"/>
+                </a:solidFill>
+                <a:latin typeface="Aptos" pitchFamily="34" charset="0"/>
+                <a:ea typeface="Aptos" pitchFamily="34" charset="-122"/>
+                <a:cs typeface="Aptos" pitchFamily="34" charset="-120"/>
+              </a:rPr>
+              <a:t>Include the use case, required fields, quality dimensions, thresholds or review rules,.</a:t>
+            </a:r>
+            <a:endParaRPr lang="en-US" sz="1380" dirty="0"/>
+          </a:p>
+        </p:txBody>
       </p:sp>
       <p:sp>
         <p:nvSpPr>
           <p:cNvPr id="16" name="Shape 14"/>
-          <p:cNvSpPr/>
-          <p:nvPr/>
-        </p:nvSpPr>
-        <p:spPr>
-          <a:xfrm>
-            <a:off x="9015984" y="2880360"/>
-            <a:ext cx="256032" cy="1005840"/>
-          </a:xfrm>
-          <a:prstGeom prst="rect">
-            <a:avLst/>
-          </a:prstGeom>
-          <a:solidFill>
-            <a:srgbClr val="D69A2D"/>
-          </a:solidFill>
-          <a:ln w="12700">
-            <a:solidFill>
-              <a:srgbClr val="D69A2D"/>
-            </a:solidFill>
-            <a:prstDash val="solid"/>
-          </a:ln>
-        </p:spPr>
-      </p:sp>
-      <p:sp>
-        <p:nvSpPr>
-          <p:cNvPr id="17" name="Shape 15"/>
-          <p:cNvSpPr/>
-          <p:nvPr/>
-        </p:nvSpPr>
-        <p:spPr>
-          <a:xfrm>
-            <a:off x="9454896" y="3319272"/>
-            <a:ext cx="256032" cy="566928"/>
-          </a:xfrm>
-          <a:prstGeom prst="rect">
-            <a:avLst/>
-          </a:prstGeom>
-          <a:solidFill>
-            <a:srgbClr val="6A4CA3"/>
-          </a:solidFill>
-          <a:ln w="12700">
-            <a:solidFill>
-              <a:srgbClr val="6A4CA3"/>
-            </a:solidFill>
-            <a:prstDash val="solid"/>
-          </a:ln>
-        </p:spPr>
-      </p:sp>
-      <p:sp>
-        <p:nvSpPr>
-          <p:cNvPr id="18" name="Shape 16"/>
-          <p:cNvSpPr/>
-          <p:nvPr/>
-        </p:nvSpPr>
-        <p:spPr>
-          <a:xfrm>
-            <a:off x="8019288" y="3886200"/>
-            <a:ext cx="2706624" cy="0"/>
-          </a:xfrm>
-          <a:prstGeom prst="line">
-            <a:avLst/>
-          </a:prstGeom>
-          <a:noFill/>
-          <a:ln w="15240">
-            <a:solidFill>
-              <a:srgbClr val="003A63"/>
-            </a:solidFill>
-            <a:prstDash val="solid"/>
-          </a:ln>
-        </p:spPr>
-      </p:sp>
-      <p:sp>
-        <p:nvSpPr>
-          <p:cNvPr id="19" name="Text 17"/>
-          <p:cNvSpPr/>
-          <p:nvPr/>
-        </p:nvSpPr>
-        <p:spPr>
-          <a:xfrm>
-            <a:off x="7863840" y="3017520"/>
-            <a:ext cx="3017520" cy="201168"/>
-          </a:xfrm>
-          <a:prstGeom prst="rect">
-            <a:avLst/>
-          </a:prstGeom>
-          <a:noFill/>
-          <a:ln/>
-        </p:spPr>
-        <p:txBody>
-          <a:bodyPr wrap="square" lIns="0" tIns="0" rIns="0" bIns="0" rtlCol="0" anchor="ctr"/>
-          <a:lstStyle/>
-          <a:p>
-            <a:pPr algn="ctr" indent="0" marL="0">
-              <a:buNone/>
-            </a:pPr>
-            <a:r>
-              <a:rPr lang="en-US" sz="1050" b="1" dirty="0">
-                <a:solidFill>
-                  <a:srgbClr val="003A63"/>
-                </a:solidFill>
-                <a:latin typeface="Aptos" pitchFamily="34" charset="0"/>
-                <a:ea typeface="Aptos" pitchFamily="34" charset="-122"/>
-                <a:cs typeface="Aptos" pitchFamily="34" charset="-120"/>
-              </a:rPr>
-              <a:t>Measure and monitor</a:t>
-            </a:r>
-            <a:endParaRPr lang="en-US" sz="1050" dirty="0"/>
-          </a:p>
-        </p:txBody>
-      </p:sp>
-      <p:sp>
-        <p:nvSpPr>
-          <p:cNvPr id="20" name="Shape 18"/>
           <p:cNvSpPr/>
           <p:nvPr/>
         </p:nvSpPr>
@@ -8872,7 +8434,7 @@
       </p:sp>
       <p:sp>
         <p:nvSpPr>
-          <p:cNvPr id="21" name="Text 19"/>
+          <p:cNvPr id="17" name="Text 15"/>
           <p:cNvSpPr/>
           <p:nvPr/>
         </p:nvSpPr>
@@ -8911,7 +8473,7 @@
       </p:sp>
       <p:sp>
         <p:nvSpPr>
-          <p:cNvPr id="22" name="Text 20"/>
+          <p:cNvPr id="18" name="Text 16"/>
           <p:cNvSpPr/>
           <p:nvPr/>
         </p:nvSpPr>
@@ -9419,13 +8981,11 @@
             </a:avLst>
           </a:prstGeom>
           <a:solidFill>
-            <a:srgbClr val="FFFFFF">
-              <a:alpha val="88000"/>
-            </a:srgbClr>
+            <a:srgbClr val="FFFFFF"/>
           </a:solidFill>
           <a:ln w="12700">
             <a:solidFill>
-              <a:srgbClr val="D6E8F2"/>
+              <a:srgbClr val="B9D7E6"/>
             </a:solidFill>
             <a:prstDash val="solid"/>
           </a:ln>
@@ -9433,169 +8993,112 @@
       </p:sp>
       <p:sp>
         <p:nvSpPr>
-          <p:cNvPr id="14" name="Shape 12"/>
-          <p:cNvSpPr/>
-          <p:nvPr/>
-        </p:nvSpPr>
-        <p:spPr>
-          <a:xfrm>
-            <a:off x="8138160" y="3474720"/>
-            <a:ext cx="256032" cy="411480"/>
-          </a:xfrm>
-          <a:prstGeom prst="rect">
-            <a:avLst/>
-          </a:prstGeom>
-          <a:solidFill>
-            <a:srgbClr val="0068B7"/>
-          </a:solidFill>
-          <a:ln w="12700">
-            <a:solidFill>
-              <a:srgbClr val="0068B7"/>
-            </a:solidFill>
-            <a:prstDash val="solid"/>
-          </a:ln>
-        </p:spPr>
-      </p:sp>
-      <p:sp>
-        <p:nvSpPr>
-          <p:cNvPr id="15" name="Shape 13"/>
-          <p:cNvSpPr/>
-          <p:nvPr/>
-        </p:nvSpPr>
-        <p:spPr>
-          <a:xfrm>
-            <a:off x="8577072" y="3172968"/>
-            <a:ext cx="256032" cy="713232"/>
-          </a:xfrm>
-          <a:prstGeom prst="rect">
-            <a:avLst/>
-          </a:prstGeom>
-          <a:solidFill>
-            <a:srgbClr val="2F8A28"/>
-          </a:solidFill>
-          <a:ln w="12700">
-            <a:solidFill>
-              <a:srgbClr val="2F8A28"/>
-            </a:solidFill>
-            <a:prstDash val="solid"/>
-          </a:ln>
-        </p:spPr>
+          <p:cNvPr id="14" name="Text 12"/>
+          <p:cNvSpPr/>
+          <p:nvPr/>
+        </p:nvSpPr>
+        <p:spPr>
+          <a:xfrm>
+            <a:off x="7799832" y="2935224"/>
+            <a:ext cx="3145536" cy="256032"/>
+          </a:xfrm>
+          <a:prstGeom prst="rect">
+            <a:avLst/>
+          </a:prstGeom>
+          <a:noFill/>
+          <a:ln/>
+        </p:spPr>
+        <p:txBody>
+          <a:bodyPr wrap="square" lIns="0" tIns="0" rIns="0" bIns="0" rtlCol="0" anchor="ctr"/>
+          <a:lstStyle/>
+          <a:p>
+            <a:pPr indent="0" marL="0">
+              <a:buNone/>
+            </a:pPr>
+            <a:r>
+              <a:rPr lang="en-US" sz="1300" b="1" dirty="0">
+                <a:solidFill>
+                  <a:srgbClr val="0068B7"/>
+                </a:solidFill>
+                <a:latin typeface="Aptos" pitchFamily="34" charset="0"/>
+                <a:ea typeface="Aptos" pitchFamily="34" charset="-122"/>
+                <a:cs typeface="Aptos" pitchFamily="34" charset="-120"/>
+              </a:rPr>
+              <a:t>Concept checkpoints</a:t>
+            </a:r>
+            <a:endParaRPr lang="en-US" sz="1300" dirty="0"/>
+          </a:p>
+        </p:txBody>
+      </p:sp>
+      <p:sp>
+        <p:nvSpPr>
+          <p:cNvPr id="15" name="Text 13"/>
+          <p:cNvSpPr/>
+          <p:nvPr/>
+        </p:nvSpPr>
+        <p:spPr>
+          <a:xfrm>
+            <a:off x="7818120" y="3300984"/>
+            <a:ext cx="3090672" cy="877824"/>
+          </a:xfrm>
+          <a:prstGeom prst="rect">
+            <a:avLst/>
+          </a:prstGeom>
+          <a:noFill/>
+          <a:ln/>
+        </p:spPr>
+        <p:txBody>
+          <a:bodyPr wrap="square" lIns="254" tIns="254" rIns="254" bIns="254" rtlCol="0" anchor="t">
+            <a:normAutofit/>
+          </a:bodyPr>
+          <a:lstStyle/>
+          <a:p>
+            <a:r>
+              <a:rPr lang="en-US" sz="1380" dirty="0">
+                <a:solidFill>
+                  <a:srgbClr val="17364A"/>
+                </a:solidFill>
+                <a:latin typeface="Aptos" pitchFamily="34" charset="0"/>
+                <a:ea typeface="Aptos" pitchFamily="34" charset="-122"/>
+                <a:cs typeface="Aptos" pitchFamily="34" charset="-120"/>
+              </a:rPr>
+              <a:t>Data quality review plan</a:t>
+            </a:r>
+            <a:endParaRPr lang="en-US" sz="1380" dirty="0"/>
+          </a:p>
+          <a:p>
+            <a:r>
+              <a:rPr lang="en-US" sz="1380" dirty="0">
+                <a:solidFill>
+                  <a:srgbClr val="17364A"/>
+                </a:solidFill>
+                <a:latin typeface="Aptos" pitchFamily="34" charset="0"/>
+                <a:ea typeface="Aptos" pitchFamily="34" charset="-122"/>
+                <a:cs typeface="Aptos" pitchFamily="34" charset="-120"/>
+              </a:rPr>
+              <a:t>Data quality checklist</a:t>
+            </a:r>
+            <a:endParaRPr lang="en-US" sz="1380" dirty="0"/>
+          </a:p>
+          <a:p>
+            <a:r>
+              <a:rPr lang="en-US" sz="1380" dirty="0">
+                <a:solidFill>
+                  <a:srgbClr val="17364A"/>
+                </a:solidFill>
+                <a:latin typeface="Aptos" pitchFamily="34" charset="0"/>
+                <a:ea typeface="Aptos" pitchFamily="34" charset="-122"/>
+                <a:cs typeface="Aptos" pitchFamily="34" charset="-120"/>
+              </a:rPr>
+              <a:t>Thresholds or review criteria</a:t>
+            </a:r>
+            <a:endParaRPr lang="en-US" sz="1380" dirty="0"/>
+          </a:p>
+        </p:txBody>
       </p:sp>
       <p:sp>
         <p:nvSpPr>
           <p:cNvPr id="16" name="Shape 14"/>
-          <p:cNvSpPr/>
-          <p:nvPr/>
-        </p:nvSpPr>
-        <p:spPr>
-          <a:xfrm>
-            <a:off x="9015984" y="2880360"/>
-            <a:ext cx="256032" cy="1005840"/>
-          </a:xfrm>
-          <a:prstGeom prst="rect">
-            <a:avLst/>
-          </a:prstGeom>
-          <a:solidFill>
-            <a:srgbClr val="D69A2D"/>
-          </a:solidFill>
-          <a:ln w="12700">
-            <a:solidFill>
-              <a:srgbClr val="D69A2D"/>
-            </a:solidFill>
-            <a:prstDash val="solid"/>
-          </a:ln>
-        </p:spPr>
-      </p:sp>
-      <p:sp>
-        <p:nvSpPr>
-          <p:cNvPr id="17" name="Shape 15"/>
-          <p:cNvSpPr/>
-          <p:nvPr/>
-        </p:nvSpPr>
-        <p:spPr>
-          <a:xfrm>
-            <a:off x="9454896" y="3319272"/>
-            <a:ext cx="256032" cy="566928"/>
-          </a:xfrm>
-          <a:prstGeom prst="rect">
-            <a:avLst/>
-          </a:prstGeom>
-          <a:solidFill>
-            <a:srgbClr val="6A4CA3"/>
-          </a:solidFill>
-          <a:ln w="12700">
-            <a:solidFill>
-              <a:srgbClr val="6A4CA3"/>
-            </a:solidFill>
-            <a:prstDash val="solid"/>
-          </a:ln>
-        </p:spPr>
-      </p:sp>
-      <p:sp>
-        <p:nvSpPr>
-          <p:cNvPr id="18" name="Shape 16"/>
-          <p:cNvSpPr/>
-          <p:nvPr/>
-        </p:nvSpPr>
-        <p:spPr>
-          <a:xfrm>
-            <a:off x="8019288" y="3886200"/>
-            <a:ext cx="2706624" cy="0"/>
-          </a:xfrm>
-          <a:prstGeom prst="line">
-            <a:avLst/>
-          </a:prstGeom>
-          <a:noFill/>
-          <a:ln w="15240">
-            <a:solidFill>
-              <a:srgbClr val="003A63"/>
-            </a:solidFill>
-            <a:prstDash val="solid"/>
-          </a:ln>
-        </p:spPr>
-      </p:sp>
-      <p:sp>
-        <p:nvSpPr>
-          <p:cNvPr id="19" name="Text 17"/>
-          <p:cNvSpPr/>
-          <p:nvPr/>
-        </p:nvSpPr>
-        <p:spPr>
-          <a:xfrm>
-            <a:off x="7863840" y="3017520"/>
-            <a:ext cx="3017520" cy="201168"/>
-          </a:xfrm>
-          <a:prstGeom prst="rect">
-            <a:avLst/>
-          </a:prstGeom>
-          <a:noFill/>
-          <a:ln/>
-        </p:spPr>
-        <p:txBody>
-          <a:bodyPr wrap="square" lIns="0" tIns="0" rIns="0" bIns="0" rtlCol="0" anchor="ctr"/>
-          <a:lstStyle/>
-          <a:p>
-            <a:pPr algn="ctr" indent="0" marL="0">
-              <a:buNone/>
-            </a:pPr>
-            <a:r>
-              <a:rPr lang="en-US" sz="1050" b="1" dirty="0">
-                <a:solidFill>
-                  <a:srgbClr val="003A63"/>
-                </a:solidFill>
-                <a:latin typeface="Aptos" pitchFamily="34" charset="0"/>
-                <a:ea typeface="Aptos" pitchFamily="34" charset="-122"/>
-                <a:cs typeface="Aptos" pitchFamily="34" charset="-120"/>
-              </a:rPr>
-              <a:t>Measure and monitor</a:t>
-            </a:r>
-            <a:endParaRPr lang="en-US" sz="1050" dirty="0"/>
-          </a:p>
-        </p:txBody>
-      </p:sp>
-      <p:sp>
-        <p:nvSpPr>
-          <p:cNvPr id="20" name="Shape 18"/>
           <p:cNvSpPr/>
           <p:nvPr/>
         </p:nvSpPr>
@@ -9622,7 +9125,7 @@
       </p:sp>
       <p:sp>
         <p:nvSpPr>
-          <p:cNvPr id="21" name="Text 19"/>
+          <p:cNvPr id="17" name="Text 15"/>
           <p:cNvSpPr/>
           <p:nvPr/>
         </p:nvSpPr>
@@ -9661,7 +9164,7 @@
       </p:sp>
       <p:sp>
         <p:nvSpPr>
-          <p:cNvPr id="22" name="Text 20"/>
+          <p:cNvPr id="18" name="Text 16"/>
           <p:cNvSpPr/>
           <p:nvPr/>
         </p:nvSpPr>
@@ -10141,13 +9644,11 @@
             </a:avLst>
           </a:prstGeom>
           <a:solidFill>
-            <a:srgbClr val="FFFFFF">
-              <a:alpha val="88000"/>
-            </a:srgbClr>
+            <a:srgbClr val="FFFFFF"/>
           </a:solidFill>
           <a:ln w="12700">
             <a:solidFill>
-              <a:srgbClr val="D6E8F2"/>
+              <a:srgbClr val="B9D7E6"/>
             </a:solidFill>
             <a:prstDash val="solid"/>
           </a:ln>
@@ -10155,169 +9656,84 @@
       </p:sp>
       <p:sp>
         <p:nvSpPr>
-          <p:cNvPr id="14" name="Shape 12"/>
-          <p:cNvSpPr/>
-          <p:nvPr/>
-        </p:nvSpPr>
-        <p:spPr>
-          <a:xfrm>
-            <a:off x="8138160" y="3474720"/>
-            <a:ext cx="256032" cy="411480"/>
-          </a:xfrm>
-          <a:prstGeom prst="rect">
-            <a:avLst/>
-          </a:prstGeom>
-          <a:solidFill>
-            <a:srgbClr val="0068B7"/>
-          </a:solidFill>
-          <a:ln w="12700">
-            <a:solidFill>
-              <a:srgbClr val="0068B7"/>
-            </a:solidFill>
-            <a:prstDash val="solid"/>
-          </a:ln>
-        </p:spPr>
-      </p:sp>
-      <p:sp>
-        <p:nvSpPr>
-          <p:cNvPr id="15" name="Shape 13"/>
-          <p:cNvSpPr/>
-          <p:nvPr/>
-        </p:nvSpPr>
-        <p:spPr>
-          <a:xfrm>
-            <a:off x="8577072" y="3172968"/>
-            <a:ext cx="256032" cy="713232"/>
-          </a:xfrm>
-          <a:prstGeom prst="rect">
-            <a:avLst/>
-          </a:prstGeom>
-          <a:solidFill>
-            <a:srgbClr val="2F8A28"/>
-          </a:solidFill>
-          <a:ln w="12700">
-            <a:solidFill>
-              <a:srgbClr val="2F8A28"/>
-            </a:solidFill>
-            <a:prstDash val="solid"/>
-          </a:ln>
-        </p:spPr>
+          <p:cNvPr id="14" name="Text 12"/>
+          <p:cNvSpPr/>
+          <p:nvPr/>
+        </p:nvSpPr>
+        <p:spPr>
+          <a:xfrm>
+            <a:off x="7799832" y="2935224"/>
+            <a:ext cx="3145536" cy="256032"/>
+          </a:xfrm>
+          <a:prstGeom prst="rect">
+            <a:avLst/>
+          </a:prstGeom>
+          <a:noFill/>
+          <a:ln/>
+        </p:spPr>
+        <p:txBody>
+          <a:bodyPr wrap="square" lIns="0" tIns="0" rIns="0" bIns="0" rtlCol="0" anchor="ctr"/>
+          <a:lstStyle/>
+          <a:p>
+            <a:pPr indent="0" marL="0">
+              <a:buNone/>
+            </a:pPr>
+            <a:r>
+              <a:rPr lang="en-US" sz="1300" b="1" dirty="0">
+                <a:solidFill>
+                  <a:srgbClr val="0068B7"/>
+                </a:solidFill>
+                <a:latin typeface="Aptos" pitchFamily="34" charset="0"/>
+                <a:ea typeface="Aptos" pitchFamily="34" charset="-122"/>
+                <a:cs typeface="Aptos" pitchFamily="34" charset="-120"/>
+              </a:rPr>
+              <a:t>Concept checkpoints</a:t>
+            </a:r>
+            <a:endParaRPr lang="en-US" sz="1300" dirty="0"/>
+          </a:p>
+        </p:txBody>
+      </p:sp>
+      <p:sp>
+        <p:nvSpPr>
+          <p:cNvPr id="15" name="Text 13"/>
+          <p:cNvSpPr/>
+          <p:nvPr/>
+        </p:nvSpPr>
+        <p:spPr>
+          <a:xfrm>
+            <a:off x="7818120" y="3300984"/>
+            <a:ext cx="3090672" cy="877824"/>
+          </a:xfrm>
+          <a:prstGeom prst="rect">
+            <a:avLst/>
+          </a:prstGeom>
+          <a:noFill/>
+          <a:ln/>
+        </p:spPr>
+        <p:txBody>
+          <a:bodyPr wrap="square" lIns="254" tIns="254" rIns="254" bIns="254" rtlCol="0" anchor="t">
+            <a:normAutofit/>
+          </a:bodyPr>
+          <a:lstStyle/>
+          <a:p>
+            <a:r>
+              <a:rPr lang="en-US" sz="1380" dirty="0">
+                <a:solidFill>
+                  <a:srgbClr val="17364A"/>
+                </a:solidFill>
+                <a:latin typeface="Aptos" pitchFamily="34" charset="0"/>
+                <a:ea typeface="Aptos" pitchFamily="34" charset="-122"/>
+                <a:cs typeface="Aptos" pitchFamily="34" charset="-120"/>
+              </a:rPr>
+              <a:t>Known limitations statement</a:t>
+            </a:r>
+            <a:endParaRPr lang="en-US" sz="1380" dirty="0"/>
+          </a:p>
+        </p:txBody>
       </p:sp>
       <p:sp>
         <p:nvSpPr>
           <p:cNvPr id="16" name="Shape 14"/>
-          <p:cNvSpPr/>
-          <p:nvPr/>
-        </p:nvSpPr>
-        <p:spPr>
-          <a:xfrm>
-            <a:off x="9015984" y="2880360"/>
-            <a:ext cx="256032" cy="1005840"/>
-          </a:xfrm>
-          <a:prstGeom prst="rect">
-            <a:avLst/>
-          </a:prstGeom>
-          <a:solidFill>
-            <a:srgbClr val="D69A2D"/>
-          </a:solidFill>
-          <a:ln w="12700">
-            <a:solidFill>
-              <a:srgbClr val="D69A2D"/>
-            </a:solidFill>
-            <a:prstDash val="solid"/>
-          </a:ln>
-        </p:spPr>
-      </p:sp>
-      <p:sp>
-        <p:nvSpPr>
-          <p:cNvPr id="17" name="Shape 15"/>
-          <p:cNvSpPr/>
-          <p:nvPr/>
-        </p:nvSpPr>
-        <p:spPr>
-          <a:xfrm>
-            <a:off x="9454896" y="3319272"/>
-            <a:ext cx="256032" cy="566928"/>
-          </a:xfrm>
-          <a:prstGeom prst="rect">
-            <a:avLst/>
-          </a:prstGeom>
-          <a:solidFill>
-            <a:srgbClr val="6A4CA3"/>
-          </a:solidFill>
-          <a:ln w="12700">
-            <a:solidFill>
-              <a:srgbClr val="6A4CA3"/>
-            </a:solidFill>
-            <a:prstDash val="solid"/>
-          </a:ln>
-        </p:spPr>
-      </p:sp>
-      <p:sp>
-        <p:nvSpPr>
-          <p:cNvPr id="18" name="Shape 16"/>
-          <p:cNvSpPr/>
-          <p:nvPr/>
-        </p:nvSpPr>
-        <p:spPr>
-          <a:xfrm>
-            <a:off x="8019288" y="3886200"/>
-            <a:ext cx="2706624" cy="0"/>
-          </a:xfrm>
-          <a:prstGeom prst="line">
-            <a:avLst/>
-          </a:prstGeom>
-          <a:noFill/>
-          <a:ln w="15240">
-            <a:solidFill>
-              <a:srgbClr val="003A63"/>
-            </a:solidFill>
-            <a:prstDash val="solid"/>
-          </a:ln>
-        </p:spPr>
-      </p:sp>
-      <p:sp>
-        <p:nvSpPr>
-          <p:cNvPr id="19" name="Text 17"/>
-          <p:cNvSpPr/>
-          <p:nvPr/>
-        </p:nvSpPr>
-        <p:spPr>
-          <a:xfrm>
-            <a:off x="7863840" y="3017520"/>
-            <a:ext cx="3017520" cy="201168"/>
-          </a:xfrm>
-          <a:prstGeom prst="rect">
-            <a:avLst/>
-          </a:prstGeom>
-          <a:noFill/>
-          <a:ln/>
-        </p:spPr>
-        <p:txBody>
-          <a:bodyPr wrap="square" lIns="0" tIns="0" rIns="0" bIns="0" rtlCol="0" anchor="ctr"/>
-          <a:lstStyle/>
-          <a:p>
-            <a:pPr algn="ctr" indent="0" marL="0">
-              <a:buNone/>
-            </a:pPr>
-            <a:r>
-              <a:rPr lang="en-US" sz="1050" b="1" dirty="0">
-                <a:solidFill>
-                  <a:srgbClr val="003A63"/>
-                </a:solidFill>
-                <a:latin typeface="Aptos" pitchFamily="34" charset="0"/>
-                <a:ea typeface="Aptos" pitchFamily="34" charset="-122"/>
-                <a:cs typeface="Aptos" pitchFamily="34" charset="-120"/>
-              </a:rPr>
-              <a:t>Measure and monitor</a:t>
-            </a:r>
-            <a:endParaRPr lang="en-US" sz="1050" dirty="0"/>
-          </a:p>
-        </p:txBody>
-      </p:sp>
-      <p:sp>
-        <p:nvSpPr>
-          <p:cNvPr id="20" name="Shape 18"/>
           <p:cNvSpPr/>
           <p:nvPr/>
         </p:nvSpPr>
@@ -10344,7 +9760,7 @@
       </p:sp>
       <p:sp>
         <p:nvSpPr>
-          <p:cNvPr id="21" name="Text 19"/>
+          <p:cNvPr id="17" name="Text 15"/>
           <p:cNvSpPr/>
           <p:nvPr/>
         </p:nvSpPr>
@@ -10383,7 +9799,7 @@
       </p:sp>
       <p:sp>
         <p:nvSpPr>
-          <p:cNvPr id="22" name="Text 20"/>
+          <p:cNvPr id="18" name="Text 16"/>
           <p:cNvSpPr/>
           <p:nvPr/>
         </p:nvSpPr>
@@ -10916,20 +10332,20 @@
         </p:nvSpPr>
         <p:spPr>
           <a:xfrm>
-            <a:off x="7635240" y="3730752"/>
-            <a:ext cx="1033272" cy="749808"/>
+            <a:off x="7909560" y="3675888"/>
+            <a:ext cx="3154680" cy="1691640"/>
           </a:xfrm>
           <a:prstGeom prst="roundRect">
             <a:avLst>
-              <a:gd name="adj" fmla="val 14634"/>
+              <a:gd name="adj" fmla="val 6486"/>
             </a:avLst>
           </a:prstGeom>
           <a:solidFill>
-            <a:srgbClr val="0068B7"/>
+            <a:srgbClr val="FFFFFF"/>
           </a:solidFill>
           <a:ln w="12700">
             <a:solidFill>
-              <a:srgbClr val="0068B7"/>
+              <a:srgbClr val="B9D7E6"/>
             </a:solidFill>
             <a:prstDash val="solid"/>
           </a:ln>
@@ -10943,172 +10359,100 @@
         </p:nvSpPr>
         <p:spPr>
           <a:xfrm>
-            <a:off x="7708392" y="3922776"/>
-            <a:ext cx="886968" cy="310896"/>
-          </a:xfrm>
-          <a:prstGeom prst="rect">
-            <a:avLst/>
-          </a:prstGeom>
-          <a:noFill/>
-          <a:ln/>
-        </p:spPr>
-        <p:txBody>
-          <a:bodyPr wrap="square" lIns="0" tIns="0" rIns="0" bIns="0" rtlCol="0" anchor="ctr">
+            <a:off x="8074152" y="3822192"/>
+            <a:ext cx="2825496" cy="256032"/>
+          </a:xfrm>
+          <a:prstGeom prst="rect">
+            <a:avLst/>
+          </a:prstGeom>
+          <a:noFill/>
+          <a:ln/>
+        </p:spPr>
+        <p:txBody>
+          <a:bodyPr wrap="square" lIns="0" tIns="0" rIns="0" bIns="0" rtlCol="0" anchor="ctr"/>
+          <a:lstStyle/>
+          <a:p>
+            <a:pPr indent="0" marL="0">
+              <a:buNone/>
+            </a:pPr>
+            <a:r>
+              <a:rPr lang="en-US" sz="1300" b="1" dirty="0">
+                <a:solidFill>
+                  <a:srgbClr val="0068B7"/>
+                </a:solidFill>
+                <a:latin typeface="Aptos" pitchFamily="34" charset="0"/>
+                <a:ea typeface="Aptos" pitchFamily="34" charset="-122"/>
+                <a:cs typeface="Aptos" pitchFamily="34" charset="-120"/>
+              </a:rPr>
+              <a:t>Learning sequence</a:t>
+            </a:r>
+            <a:endParaRPr lang="en-US" sz="1300" dirty="0"/>
+          </a:p>
+        </p:txBody>
+      </p:sp>
+      <p:sp>
+        <p:nvSpPr>
+          <p:cNvPr id="15" name="Text 13"/>
+          <p:cNvSpPr/>
+          <p:nvPr/>
+        </p:nvSpPr>
+        <p:spPr>
+          <a:xfrm>
+            <a:off x="8092440" y="4187952"/>
+            <a:ext cx="2770632" cy="1033272"/>
+          </a:xfrm>
+          <a:prstGeom prst="rect">
+            <a:avLst/>
+          </a:prstGeom>
+          <a:noFill/>
+          <a:ln/>
+        </p:spPr>
+        <p:txBody>
+          <a:bodyPr wrap="square" lIns="254" tIns="254" rIns="254" bIns="254" rtlCol="0" anchor="t">
             <a:normAutofit/>
           </a:bodyPr>
           <a:lstStyle/>
           <a:p>
-            <a:pPr algn="ctr" indent="0" marL="0">
-              <a:buNone/>
-            </a:pPr>
-            <a:r>
-              <a:rPr lang="en-US" sz="1500" b="1" dirty="0">
-                <a:solidFill>
-                  <a:srgbClr val="FFFFFF"/>
-                </a:solidFill>
-                <a:latin typeface="Aptos" pitchFamily="34" charset="0"/>
-                <a:ea typeface="Aptos" pitchFamily="34" charset="-122"/>
-                <a:cs typeface="Aptos" pitchFamily="34" charset="-120"/>
-              </a:rPr>
-              <a:t>Learn</a:t>
-            </a:r>
-            <a:endParaRPr lang="en-US" sz="1500" dirty="0"/>
-          </a:p>
-        </p:txBody>
-      </p:sp>
-      <p:sp>
-        <p:nvSpPr>
-          <p:cNvPr id="15" name="Shape 13"/>
-          <p:cNvSpPr/>
-          <p:nvPr/>
-        </p:nvSpPr>
-        <p:spPr>
-          <a:xfrm>
-            <a:off x="8924544" y="3730752"/>
-            <a:ext cx="1033272" cy="749808"/>
-          </a:xfrm>
-          <a:prstGeom prst="roundRect">
-            <a:avLst>
-              <a:gd name="adj" fmla="val 14634"/>
-            </a:avLst>
-          </a:prstGeom>
-          <a:solidFill>
-            <a:srgbClr val="2F8A28"/>
-          </a:solidFill>
-          <a:ln w="12700">
-            <a:solidFill>
-              <a:srgbClr val="2F8A28"/>
-            </a:solidFill>
-            <a:prstDash val="solid"/>
-          </a:ln>
-        </p:spPr>
-      </p:sp>
-      <p:sp>
-        <p:nvSpPr>
-          <p:cNvPr id="16" name="Text 14"/>
-          <p:cNvSpPr/>
-          <p:nvPr/>
-        </p:nvSpPr>
-        <p:spPr>
-          <a:xfrm>
-            <a:off x="8997696" y="3922776"/>
-            <a:ext cx="886968" cy="310896"/>
-          </a:xfrm>
-          <a:prstGeom prst="rect">
-            <a:avLst/>
-          </a:prstGeom>
-          <a:noFill/>
-          <a:ln/>
-        </p:spPr>
-        <p:txBody>
-          <a:bodyPr wrap="square" lIns="0" tIns="0" rIns="0" bIns="0" rtlCol="0" anchor="ctr">
-            <a:normAutofit/>
-          </a:bodyPr>
-          <a:lstStyle/>
-          <a:p>
-            <a:pPr algn="ctr" indent="0" marL="0">
-              <a:buNone/>
-            </a:pPr>
-            <a:r>
-              <a:rPr lang="en-US" sz="1500" b="1" dirty="0">
-                <a:solidFill>
-                  <a:srgbClr val="FFFFFF"/>
-                </a:solidFill>
-                <a:latin typeface="Aptos" pitchFamily="34" charset="0"/>
-                <a:ea typeface="Aptos" pitchFamily="34" charset="-122"/>
-                <a:cs typeface="Aptos" pitchFamily="34" charset="-120"/>
-              </a:rPr>
-              <a:t>Apply</a:t>
-            </a:r>
-            <a:endParaRPr lang="en-US" sz="1500" dirty="0"/>
-          </a:p>
-        </p:txBody>
-      </p:sp>
-      <p:sp>
-        <p:nvSpPr>
-          <p:cNvPr id="17" name="Shape 15"/>
-          <p:cNvSpPr/>
-          <p:nvPr/>
-        </p:nvSpPr>
-        <p:spPr>
-          <a:xfrm>
-            <a:off x="10213848" y="3730752"/>
-            <a:ext cx="1033272" cy="749808"/>
-          </a:xfrm>
-          <a:prstGeom prst="roundRect">
-            <a:avLst>
-              <a:gd name="adj" fmla="val 14634"/>
-            </a:avLst>
-          </a:prstGeom>
-          <a:solidFill>
-            <a:srgbClr val="6A4CA3"/>
-          </a:solidFill>
-          <a:ln w="12700">
-            <a:solidFill>
-              <a:srgbClr val="6A4CA3"/>
-            </a:solidFill>
-            <a:prstDash val="solid"/>
-          </a:ln>
-        </p:spPr>
-      </p:sp>
-      <p:sp>
-        <p:nvSpPr>
-          <p:cNvPr id="18" name="Text 16"/>
-          <p:cNvSpPr/>
-          <p:nvPr/>
-        </p:nvSpPr>
-        <p:spPr>
-          <a:xfrm>
-            <a:off x="10287000" y="3922776"/>
-            <a:ext cx="886968" cy="310896"/>
-          </a:xfrm>
-          <a:prstGeom prst="rect">
-            <a:avLst/>
-          </a:prstGeom>
-          <a:noFill/>
-          <a:ln/>
-        </p:spPr>
-        <p:txBody>
-          <a:bodyPr wrap="square" lIns="0" tIns="0" rIns="0" bIns="0" rtlCol="0" anchor="ctr">
-            <a:normAutofit/>
-          </a:bodyPr>
-          <a:lstStyle/>
-          <a:p>
-            <a:pPr algn="ctr" indent="0" marL="0">
-              <a:buNone/>
-            </a:pPr>
-            <a:r>
-              <a:rPr lang="en-US" sz="1500" b="1" dirty="0">
-                <a:solidFill>
-                  <a:srgbClr val="FFFFFF"/>
-                </a:solidFill>
-                <a:latin typeface="Aptos" pitchFamily="34" charset="0"/>
-                <a:ea typeface="Aptos" pitchFamily="34" charset="-122"/>
-                <a:cs typeface="Aptos" pitchFamily="34" charset="-120"/>
-              </a:rPr>
-              <a:t>Document</a:t>
-            </a:r>
-            <a:endParaRPr lang="en-US" sz="1500" dirty="0"/>
+            <a:r>
+              <a:rPr lang="en-US" sz="1380" dirty="0">
+                <a:solidFill>
+                  <a:srgbClr val="17364A"/>
+                </a:solidFill>
+                <a:latin typeface="Aptos" pitchFamily="34" charset="0"/>
+                <a:ea typeface="Aptos" pitchFamily="34" charset="-122"/>
+                <a:cs typeface="Aptos" pitchFamily="34" charset="-120"/>
+              </a:rPr>
+              <a:t>Read the module for shared vocabulary and context.</a:t>
+            </a:r>
+            <a:endParaRPr lang="en-US" sz="1380" dirty="0"/>
+          </a:p>
+          <a:p>
+            <a:r>
+              <a:rPr lang="en-US" sz="1380" dirty="0">
+                <a:solidFill>
+                  <a:srgbClr val="17364A"/>
+                </a:solidFill>
+                <a:latin typeface="Aptos" pitchFamily="34" charset="0"/>
+                <a:ea typeface="Aptos" pitchFamily="34" charset="-122"/>
+                <a:cs typeface="Aptos" pitchFamily="34" charset="-120"/>
+              </a:rPr>
+              <a:t>Complete the practical exercise to apply the concept.</a:t>
+            </a:r>
+            <a:endParaRPr lang="en-US" sz="1380" dirty="0"/>
+          </a:p>
+          <a:p>
+            <a:r>
+              <a:rPr lang="en-US" sz="1380" dirty="0">
+                <a:solidFill>
+                  <a:srgbClr val="17364A"/>
+                </a:solidFill>
+                <a:latin typeface="Aptos" pitchFamily="34" charset="0"/>
+                <a:ea typeface="Aptos" pitchFamily="34" charset="-122"/>
+                <a:cs typeface="Aptos" pitchFamily="34" charset="-120"/>
+              </a:rPr>
+              <a:t>Use the notes and references for deeper review.</a:t>
+            </a:r>
+            <a:endParaRPr lang="en-US" sz="1380" dirty="0"/>
           </a:p>
         </p:txBody>
       </p:sp>
@@ -11581,13 +10925,11 @@
             </a:avLst>
           </a:prstGeom>
           <a:solidFill>
-            <a:srgbClr val="FFFFFF">
-              <a:alpha val="88000"/>
-            </a:srgbClr>
+            <a:srgbClr val="FFFFFF"/>
           </a:solidFill>
           <a:ln w="12700">
             <a:solidFill>
-              <a:srgbClr val="D6E8F2"/>
+              <a:srgbClr val="B9D7E6"/>
             </a:solidFill>
             <a:prstDash val="solid"/>
           </a:ln>
@@ -11595,169 +10937,112 @@
       </p:sp>
       <p:sp>
         <p:nvSpPr>
-          <p:cNvPr id="14" name="Shape 12"/>
-          <p:cNvSpPr/>
-          <p:nvPr/>
-        </p:nvSpPr>
-        <p:spPr>
-          <a:xfrm>
-            <a:off x="8138160" y="3474720"/>
-            <a:ext cx="256032" cy="411480"/>
-          </a:xfrm>
-          <a:prstGeom prst="rect">
-            <a:avLst/>
-          </a:prstGeom>
-          <a:solidFill>
-            <a:srgbClr val="0068B7"/>
-          </a:solidFill>
-          <a:ln w="12700">
-            <a:solidFill>
-              <a:srgbClr val="0068B7"/>
-            </a:solidFill>
-            <a:prstDash val="solid"/>
-          </a:ln>
-        </p:spPr>
-      </p:sp>
-      <p:sp>
-        <p:nvSpPr>
-          <p:cNvPr id="15" name="Shape 13"/>
-          <p:cNvSpPr/>
-          <p:nvPr/>
-        </p:nvSpPr>
-        <p:spPr>
-          <a:xfrm>
-            <a:off x="8577072" y="3172968"/>
-            <a:ext cx="256032" cy="713232"/>
-          </a:xfrm>
-          <a:prstGeom prst="rect">
-            <a:avLst/>
-          </a:prstGeom>
-          <a:solidFill>
-            <a:srgbClr val="2F8A28"/>
-          </a:solidFill>
-          <a:ln w="12700">
-            <a:solidFill>
-              <a:srgbClr val="2F8A28"/>
-            </a:solidFill>
-            <a:prstDash val="solid"/>
-          </a:ln>
-        </p:spPr>
+          <p:cNvPr id="14" name="Text 12"/>
+          <p:cNvSpPr/>
+          <p:nvPr/>
+        </p:nvSpPr>
+        <p:spPr>
+          <a:xfrm>
+            <a:off x="7799832" y="2935224"/>
+            <a:ext cx="3145536" cy="256032"/>
+          </a:xfrm>
+          <a:prstGeom prst="rect">
+            <a:avLst/>
+          </a:prstGeom>
+          <a:noFill/>
+          <a:ln/>
+        </p:spPr>
+        <p:txBody>
+          <a:bodyPr wrap="square" lIns="0" tIns="0" rIns="0" bIns="0" rtlCol="0" anchor="ctr"/>
+          <a:lstStyle/>
+          <a:p>
+            <a:pPr indent="0" marL="0">
+              <a:buNone/>
+            </a:pPr>
+            <a:r>
+              <a:rPr lang="en-US" sz="1300" b="1" dirty="0">
+                <a:solidFill>
+                  <a:srgbClr val="0068B7"/>
+                </a:solidFill>
+                <a:latin typeface="Aptos" pitchFamily="34" charset="0"/>
+                <a:ea typeface="Aptos" pitchFamily="34" charset="-122"/>
+                <a:cs typeface="Aptos" pitchFamily="34" charset="-120"/>
+              </a:rPr>
+              <a:t>Concept checkpoints</a:t>
+            </a:r>
+            <a:endParaRPr lang="en-US" sz="1300" dirty="0"/>
+          </a:p>
+        </p:txBody>
+      </p:sp>
+      <p:sp>
+        <p:nvSpPr>
+          <p:cNvPr id="15" name="Text 13"/>
+          <p:cNvSpPr/>
+          <p:nvPr/>
+        </p:nvSpPr>
+        <p:spPr>
+          <a:xfrm>
+            <a:off x="7818120" y="3300984"/>
+            <a:ext cx="3090672" cy="877824"/>
+          </a:xfrm>
+          <a:prstGeom prst="rect">
+            <a:avLst/>
+          </a:prstGeom>
+          <a:noFill/>
+          <a:ln/>
+        </p:spPr>
+        <p:txBody>
+          <a:bodyPr wrap="square" lIns="254" tIns="254" rIns="254" bIns="254" rtlCol="0" anchor="t">
+            <a:normAutofit/>
+          </a:bodyPr>
+          <a:lstStyle/>
+          <a:p>
+            <a:r>
+              <a:rPr lang="en-US" sz="1380" dirty="0">
+                <a:solidFill>
+                  <a:srgbClr val="17364A"/>
+                </a:solidFill>
+                <a:latin typeface="Aptos" pitchFamily="34" charset="0"/>
+                <a:ea typeface="Aptos" pitchFamily="34" charset="-122"/>
+                <a:cs typeface="Aptos" pitchFamily="34" charset="-120"/>
+              </a:rPr>
+              <a:t>Data quality review plan</a:t>
+            </a:r>
+            <a:endParaRPr lang="en-US" sz="1380" dirty="0"/>
+          </a:p>
+          <a:p>
+            <a:r>
+              <a:rPr lang="en-US" sz="1380" dirty="0">
+                <a:solidFill>
+                  <a:srgbClr val="17364A"/>
+                </a:solidFill>
+                <a:latin typeface="Aptos" pitchFamily="34" charset="0"/>
+                <a:ea typeface="Aptos" pitchFamily="34" charset="-122"/>
+                <a:cs typeface="Aptos" pitchFamily="34" charset="-120"/>
+              </a:rPr>
+              <a:t>Data quality checklist</a:t>
+            </a:r>
+            <a:endParaRPr lang="en-US" sz="1380" dirty="0"/>
+          </a:p>
+          <a:p>
+            <a:r>
+              <a:rPr lang="en-US" sz="1380" dirty="0">
+                <a:solidFill>
+                  <a:srgbClr val="17364A"/>
+                </a:solidFill>
+                <a:latin typeface="Aptos" pitchFamily="34" charset="0"/>
+                <a:ea typeface="Aptos" pitchFamily="34" charset="-122"/>
+                <a:cs typeface="Aptos" pitchFamily="34" charset="-120"/>
+              </a:rPr>
+              <a:t>Thresholds or review criteria</a:t>
+            </a:r>
+            <a:endParaRPr lang="en-US" sz="1380" dirty="0"/>
+          </a:p>
+        </p:txBody>
       </p:sp>
       <p:sp>
         <p:nvSpPr>
           <p:cNvPr id="16" name="Shape 14"/>
-          <p:cNvSpPr/>
-          <p:nvPr/>
-        </p:nvSpPr>
-        <p:spPr>
-          <a:xfrm>
-            <a:off x="9015984" y="2880360"/>
-            <a:ext cx="256032" cy="1005840"/>
-          </a:xfrm>
-          <a:prstGeom prst="rect">
-            <a:avLst/>
-          </a:prstGeom>
-          <a:solidFill>
-            <a:srgbClr val="D69A2D"/>
-          </a:solidFill>
-          <a:ln w="12700">
-            <a:solidFill>
-              <a:srgbClr val="D69A2D"/>
-            </a:solidFill>
-            <a:prstDash val="solid"/>
-          </a:ln>
-        </p:spPr>
-      </p:sp>
-      <p:sp>
-        <p:nvSpPr>
-          <p:cNvPr id="17" name="Shape 15"/>
-          <p:cNvSpPr/>
-          <p:nvPr/>
-        </p:nvSpPr>
-        <p:spPr>
-          <a:xfrm>
-            <a:off x="9454896" y="3319272"/>
-            <a:ext cx="256032" cy="566928"/>
-          </a:xfrm>
-          <a:prstGeom prst="rect">
-            <a:avLst/>
-          </a:prstGeom>
-          <a:solidFill>
-            <a:srgbClr val="6A4CA3"/>
-          </a:solidFill>
-          <a:ln w="12700">
-            <a:solidFill>
-              <a:srgbClr val="6A4CA3"/>
-            </a:solidFill>
-            <a:prstDash val="solid"/>
-          </a:ln>
-        </p:spPr>
-      </p:sp>
-      <p:sp>
-        <p:nvSpPr>
-          <p:cNvPr id="18" name="Shape 16"/>
-          <p:cNvSpPr/>
-          <p:nvPr/>
-        </p:nvSpPr>
-        <p:spPr>
-          <a:xfrm>
-            <a:off x="8019288" y="3886200"/>
-            <a:ext cx="2706624" cy="0"/>
-          </a:xfrm>
-          <a:prstGeom prst="line">
-            <a:avLst/>
-          </a:prstGeom>
-          <a:noFill/>
-          <a:ln w="15240">
-            <a:solidFill>
-              <a:srgbClr val="003A63"/>
-            </a:solidFill>
-            <a:prstDash val="solid"/>
-          </a:ln>
-        </p:spPr>
-      </p:sp>
-      <p:sp>
-        <p:nvSpPr>
-          <p:cNvPr id="19" name="Text 17"/>
-          <p:cNvSpPr/>
-          <p:nvPr/>
-        </p:nvSpPr>
-        <p:spPr>
-          <a:xfrm>
-            <a:off x="7863840" y="3017520"/>
-            <a:ext cx="3017520" cy="201168"/>
-          </a:xfrm>
-          <a:prstGeom prst="rect">
-            <a:avLst/>
-          </a:prstGeom>
-          <a:noFill/>
-          <a:ln/>
-        </p:spPr>
-        <p:txBody>
-          <a:bodyPr wrap="square" lIns="0" tIns="0" rIns="0" bIns="0" rtlCol="0" anchor="ctr"/>
-          <a:lstStyle/>
-          <a:p>
-            <a:pPr algn="ctr" indent="0" marL="0">
-              <a:buNone/>
-            </a:pPr>
-            <a:r>
-              <a:rPr lang="en-US" sz="1050" b="1" dirty="0">
-                <a:solidFill>
-                  <a:srgbClr val="003A63"/>
-                </a:solidFill>
-                <a:latin typeface="Aptos" pitchFamily="34" charset="0"/>
-                <a:ea typeface="Aptos" pitchFamily="34" charset="-122"/>
-                <a:cs typeface="Aptos" pitchFamily="34" charset="-120"/>
-              </a:rPr>
-              <a:t>Measure and monitor</a:t>
-            </a:r>
-            <a:endParaRPr lang="en-US" sz="1050" dirty="0"/>
-          </a:p>
-        </p:txBody>
-      </p:sp>
-      <p:sp>
-        <p:nvSpPr>
-          <p:cNvPr id="20" name="Shape 18"/>
           <p:cNvSpPr/>
           <p:nvPr/>
         </p:nvSpPr>
@@ -11784,7 +11069,7 @@
       </p:sp>
       <p:sp>
         <p:nvSpPr>
-          <p:cNvPr id="21" name="Text 19"/>
+          <p:cNvPr id="17" name="Text 15"/>
           <p:cNvSpPr/>
           <p:nvPr/>
         </p:nvSpPr>
@@ -11823,7 +11108,7 @@
       </p:sp>
       <p:sp>
         <p:nvSpPr>
-          <p:cNvPr id="22" name="Text 20"/>
+          <p:cNvPr id="18" name="Text 16"/>
           <p:cNvSpPr/>
           <p:nvPr/>
         </p:nvSpPr>
@@ -12331,13 +11616,11 @@
             </a:avLst>
           </a:prstGeom>
           <a:solidFill>
-            <a:srgbClr val="FFFFFF">
-              <a:alpha val="88000"/>
-            </a:srgbClr>
+            <a:srgbClr val="FFFFFF"/>
           </a:solidFill>
           <a:ln w="12700">
             <a:solidFill>
-              <a:srgbClr val="D6E8F2"/>
+              <a:srgbClr val="B9D7E6"/>
             </a:solidFill>
             <a:prstDash val="solid"/>
           </a:ln>
@@ -12345,169 +11628,112 @@
       </p:sp>
       <p:sp>
         <p:nvSpPr>
-          <p:cNvPr id="14" name="Shape 12"/>
-          <p:cNvSpPr/>
-          <p:nvPr/>
-        </p:nvSpPr>
-        <p:spPr>
-          <a:xfrm>
-            <a:off x="8138160" y="3474720"/>
-            <a:ext cx="256032" cy="411480"/>
-          </a:xfrm>
-          <a:prstGeom prst="rect">
-            <a:avLst/>
-          </a:prstGeom>
-          <a:solidFill>
-            <a:srgbClr val="0068B7"/>
-          </a:solidFill>
-          <a:ln w="12700">
-            <a:solidFill>
-              <a:srgbClr val="0068B7"/>
-            </a:solidFill>
-            <a:prstDash val="solid"/>
-          </a:ln>
-        </p:spPr>
-      </p:sp>
-      <p:sp>
-        <p:nvSpPr>
-          <p:cNvPr id="15" name="Shape 13"/>
-          <p:cNvSpPr/>
-          <p:nvPr/>
-        </p:nvSpPr>
-        <p:spPr>
-          <a:xfrm>
-            <a:off x="8577072" y="3172968"/>
-            <a:ext cx="256032" cy="713232"/>
-          </a:xfrm>
-          <a:prstGeom prst="rect">
-            <a:avLst/>
-          </a:prstGeom>
-          <a:solidFill>
-            <a:srgbClr val="2F8A28"/>
-          </a:solidFill>
-          <a:ln w="12700">
-            <a:solidFill>
-              <a:srgbClr val="2F8A28"/>
-            </a:solidFill>
-            <a:prstDash val="solid"/>
-          </a:ln>
-        </p:spPr>
+          <p:cNvPr id="14" name="Text 12"/>
+          <p:cNvSpPr/>
+          <p:nvPr/>
+        </p:nvSpPr>
+        <p:spPr>
+          <a:xfrm>
+            <a:off x="7799832" y="2935224"/>
+            <a:ext cx="3145536" cy="256032"/>
+          </a:xfrm>
+          <a:prstGeom prst="rect">
+            <a:avLst/>
+          </a:prstGeom>
+          <a:noFill/>
+          <a:ln/>
+        </p:spPr>
+        <p:txBody>
+          <a:bodyPr wrap="square" lIns="0" tIns="0" rIns="0" bIns="0" rtlCol="0" anchor="ctr"/>
+          <a:lstStyle/>
+          <a:p>
+            <a:pPr indent="0" marL="0">
+              <a:buNone/>
+            </a:pPr>
+            <a:r>
+              <a:rPr lang="en-US" sz="1300" b="1" dirty="0">
+                <a:solidFill>
+                  <a:srgbClr val="0068B7"/>
+                </a:solidFill>
+                <a:latin typeface="Aptos" pitchFamily="34" charset="0"/>
+                <a:ea typeface="Aptos" pitchFamily="34" charset="-122"/>
+                <a:cs typeface="Aptos" pitchFamily="34" charset="-120"/>
+              </a:rPr>
+              <a:t>Concept checkpoints</a:t>
+            </a:r>
+            <a:endParaRPr lang="en-US" sz="1300" dirty="0"/>
+          </a:p>
+        </p:txBody>
+      </p:sp>
+      <p:sp>
+        <p:nvSpPr>
+          <p:cNvPr id="15" name="Text 13"/>
+          <p:cNvSpPr/>
+          <p:nvPr/>
+        </p:nvSpPr>
+        <p:spPr>
+          <a:xfrm>
+            <a:off x="7818120" y="3300984"/>
+            <a:ext cx="3090672" cy="877824"/>
+          </a:xfrm>
+          <a:prstGeom prst="rect">
+            <a:avLst/>
+          </a:prstGeom>
+          <a:noFill/>
+          <a:ln/>
+        </p:spPr>
+        <p:txBody>
+          <a:bodyPr wrap="square" lIns="254" tIns="254" rIns="254" bIns="254" rtlCol="0" anchor="t">
+            <a:normAutofit/>
+          </a:bodyPr>
+          <a:lstStyle/>
+          <a:p>
+            <a:r>
+              <a:rPr lang="en-US" sz="1380" dirty="0">
+                <a:solidFill>
+                  <a:srgbClr val="17364A"/>
+                </a:solidFill>
+                <a:latin typeface="Aptos" pitchFamily="34" charset="0"/>
+                <a:ea typeface="Aptos" pitchFamily="34" charset="-122"/>
+                <a:cs typeface="Aptos" pitchFamily="34" charset="-120"/>
+              </a:rPr>
+              <a:t>1.</a:t>
+            </a:r>
+            <a:endParaRPr lang="en-US" sz="1380" dirty="0"/>
+          </a:p>
+          <a:p>
+            <a:r>
+              <a:rPr lang="en-US" sz="1380" dirty="0">
+                <a:solidFill>
+                  <a:srgbClr val="17364A"/>
+                </a:solidFill>
+                <a:latin typeface="Aptos" pitchFamily="34" charset="0"/>
+                <a:ea typeface="Aptos" pitchFamily="34" charset="-122"/>
+                <a:cs typeface="Aptos" pitchFamily="34" charset="-120"/>
+              </a:rPr>
+              <a:t>What does fitness for use mean?</a:t>
+            </a:r>
+            <a:endParaRPr lang="en-US" sz="1380" dirty="0"/>
+          </a:p>
+          <a:p>
+            <a:r>
+              <a:rPr lang="en-US" sz="1380" dirty="0">
+                <a:solidFill>
+                  <a:srgbClr val="17364A"/>
+                </a:solidFill>
+                <a:latin typeface="Aptos" pitchFamily="34" charset="0"/>
+                <a:ea typeface="Aptos" pitchFamily="34" charset="-122"/>
+                <a:cs typeface="Aptos" pitchFamily="34" charset="-120"/>
+              </a:rPr>
+              <a:t>2.</a:t>
+            </a:r>
+            <a:endParaRPr lang="en-US" sz="1380" dirty="0"/>
+          </a:p>
+        </p:txBody>
       </p:sp>
       <p:sp>
         <p:nvSpPr>
           <p:cNvPr id="16" name="Shape 14"/>
-          <p:cNvSpPr/>
-          <p:nvPr/>
-        </p:nvSpPr>
-        <p:spPr>
-          <a:xfrm>
-            <a:off x="9015984" y="2880360"/>
-            <a:ext cx="256032" cy="1005840"/>
-          </a:xfrm>
-          <a:prstGeom prst="rect">
-            <a:avLst/>
-          </a:prstGeom>
-          <a:solidFill>
-            <a:srgbClr val="D69A2D"/>
-          </a:solidFill>
-          <a:ln w="12700">
-            <a:solidFill>
-              <a:srgbClr val="D69A2D"/>
-            </a:solidFill>
-            <a:prstDash val="solid"/>
-          </a:ln>
-        </p:spPr>
-      </p:sp>
-      <p:sp>
-        <p:nvSpPr>
-          <p:cNvPr id="17" name="Shape 15"/>
-          <p:cNvSpPr/>
-          <p:nvPr/>
-        </p:nvSpPr>
-        <p:spPr>
-          <a:xfrm>
-            <a:off x="9454896" y="3319272"/>
-            <a:ext cx="256032" cy="566928"/>
-          </a:xfrm>
-          <a:prstGeom prst="rect">
-            <a:avLst/>
-          </a:prstGeom>
-          <a:solidFill>
-            <a:srgbClr val="6A4CA3"/>
-          </a:solidFill>
-          <a:ln w="12700">
-            <a:solidFill>
-              <a:srgbClr val="6A4CA3"/>
-            </a:solidFill>
-            <a:prstDash val="solid"/>
-          </a:ln>
-        </p:spPr>
-      </p:sp>
-      <p:sp>
-        <p:nvSpPr>
-          <p:cNvPr id="18" name="Shape 16"/>
-          <p:cNvSpPr/>
-          <p:nvPr/>
-        </p:nvSpPr>
-        <p:spPr>
-          <a:xfrm>
-            <a:off x="8019288" y="3886200"/>
-            <a:ext cx="2706624" cy="0"/>
-          </a:xfrm>
-          <a:prstGeom prst="line">
-            <a:avLst/>
-          </a:prstGeom>
-          <a:noFill/>
-          <a:ln w="15240">
-            <a:solidFill>
-              <a:srgbClr val="003A63"/>
-            </a:solidFill>
-            <a:prstDash val="solid"/>
-          </a:ln>
-        </p:spPr>
-      </p:sp>
-      <p:sp>
-        <p:nvSpPr>
-          <p:cNvPr id="19" name="Text 17"/>
-          <p:cNvSpPr/>
-          <p:nvPr/>
-        </p:nvSpPr>
-        <p:spPr>
-          <a:xfrm>
-            <a:off x="7863840" y="3017520"/>
-            <a:ext cx="3017520" cy="201168"/>
-          </a:xfrm>
-          <a:prstGeom prst="rect">
-            <a:avLst/>
-          </a:prstGeom>
-          <a:noFill/>
-          <a:ln/>
-        </p:spPr>
-        <p:txBody>
-          <a:bodyPr wrap="square" lIns="0" tIns="0" rIns="0" bIns="0" rtlCol="0" anchor="ctr"/>
-          <a:lstStyle/>
-          <a:p>
-            <a:pPr algn="ctr" indent="0" marL="0">
-              <a:buNone/>
-            </a:pPr>
-            <a:r>
-              <a:rPr lang="en-US" sz="1050" b="1" dirty="0">
-                <a:solidFill>
-                  <a:srgbClr val="003A63"/>
-                </a:solidFill>
-                <a:latin typeface="Aptos" pitchFamily="34" charset="0"/>
-                <a:ea typeface="Aptos" pitchFamily="34" charset="-122"/>
-                <a:cs typeface="Aptos" pitchFamily="34" charset="-120"/>
-              </a:rPr>
-              <a:t>Measure and monitor</a:t>
-            </a:r>
-            <a:endParaRPr lang="en-US" sz="1050" dirty="0"/>
-          </a:p>
-        </p:txBody>
-      </p:sp>
-      <p:sp>
-        <p:nvSpPr>
-          <p:cNvPr id="20" name="Shape 18"/>
           <p:cNvSpPr/>
           <p:nvPr/>
         </p:nvSpPr>
@@ -12534,7 +11760,7 @@
       </p:sp>
       <p:sp>
         <p:nvSpPr>
-          <p:cNvPr id="21" name="Text 19"/>
+          <p:cNvPr id="17" name="Text 15"/>
           <p:cNvSpPr/>
           <p:nvPr/>
         </p:nvSpPr>
@@ -12573,7 +11799,7 @@
       </p:sp>
       <p:sp>
         <p:nvSpPr>
-          <p:cNvPr id="22" name="Text 20"/>
+          <p:cNvPr id="18" name="Text 16"/>
           <p:cNvSpPr/>
           <p:nvPr/>
         </p:nvSpPr>
@@ -13081,13 +12307,11 @@
             </a:avLst>
           </a:prstGeom>
           <a:solidFill>
-            <a:srgbClr val="FFFFFF">
-              <a:alpha val="88000"/>
-            </a:srgbClr>
+            <a:srgbClr val="FFFFFF"/>
           </a:solidFill>
           <a:ln w="12700">
             <a:solidFill>
-              <a:srgbClr val="D6E8F2"/>
+              <a:srgbClr val="B9D7E6"/>
             </a:solidFill>
             <a:prstDash val="solid"/>
           </a:ln>
@@ -13095,169 +12319,112 @@
       </p:sp>
       <p:sp>
         <p:nvSpPr>
-          <p:cNvPr id="14" name="Shape 12"/>
-          <p:cNvSpPr/>
-          <p:nvPr/>
-        </p:nvSpPr>
-        <p:spPr>
-          <a:xfrm>
-            <a:off x="8138160" y="3474720"/>
-            <a:ext cx="256032" cy="411480"/>
-          </a:xfrm>
-          <a:prstGeom prst="rect">
-            <a:avLst/>
-          </a:prstGeom>
-          <a:solidFill>
-            <a:srgbClr val="0068B7"/>
-          </a:solidFill>
-          <a:ln w="12700">
-            <a:solidFill>
-              <a:srgbClr val="0068B7"/>
-            </a:solidFill>
-            <a:prstDash val="solid"/>
-          </a:ln>
-        </p:spPr>
-      </p:sp>
-      <p:sp>
-        <p:nvSpPr>
-          <p:cNvPr id="15" name="Shape 13"/>
-          <p:cNvSpPr/>
-          <p:nvPr/>
-        </p:nvSpPr>
-        <p:spPr>
-          <a:xfrm>
-            <a:off x="8577072" y="3172968"/>
-            <a:ext cx="256032" cy="713232"/>
-          </a:xfrm>
-          <a:prstGeom prst="rect">
-            <a:avLst/>
-          </a:prstGeom>
-          <a:solidFill>
-            <a:srgbClr val="2F8A28"/>
-          </a:solidFill>
-          <a:ln w="12700">
-            <a:solidFill>
-              <a:srgbClr val="2F8A28"/>
-            </a:solidFill>
-            <a:prstDash val="solid"/>
-          </a:ln>
-        </p:spPr>
+          <p:cNvPr id="14" name="Text 12"/>
+          <p:cNvSpPr/>
+          <p:nvPr/>
+        </p:nvSpPr>
+        <p:spPr>
+          <a:xfrm>
+            <a:off x="7799832" y="2935224"/>
+            <a:ext cx="3145536" cy="256032"/>
+          </a:xfrm>
+          <a:prstGeom prst="rect">
+            <a:avLst/>
+          </a:prstGeom>
+          <a:noFill/>
+          <a:ln/>
+        </p:spPr>
+        <p:txBody>
+          <a:bodyPr wrap="square" lIns="0" tIns="0" rIns="0" bIns="0" rtlCol="0" anchor="ctr"/>
+          <a:lstStyle/>
+          <a:p>
+            <a:pPr indent="0" marL="0">
+              <a:buNone/>
+            </a:pPr>
+            <a:r>
+              <a:rPr lang="en-US" sz="1300" b="1" dirty="0">
+                <a:solidFill>
+                  <a:srgbClr val="0068B7"/>
+                </a:solidFill>
+                <a:latin typeface="Aptos" pitchFamily="34" charset="0"/>
+                <a:ea typeface="Aptos" pitchFamily="34" charset="-122"/>
+                <a:cs typeface="Aptos" pitchFamily="34" charset="-120"/>
+              </a:rPr>
+              <a:t>Concept checkpoints</a:t>
+            </a:r>
+            <a:endParaRPr lang="en-US" sz="1300" dirty="0"/>
+          </a:p>
+        </p:txBody>
+      </p:sp>
+      <p:sp>
+        <p:nvSpPr>
+          <p:cNvPr id="15" name="Text 13"/>
+          <p:cNvSpPr/>
+          <p:nvPr/>
+        </p:nvSpPr>
+        <p:spPr>
+          <a:xfrm>
+            <a:off x="7818120" y="3300984"/>
+            <a:ext cx="3090672" cy="877824"/>
+          </a:xfrm>
+          <a:prstGeom prst="rect">
+            <a:avLst/>
+          </a:prstGeom>
+          <a:noFill/>
+          <a:ln/>
+        </p:spPr>
+        <p:txBody>
+          <a:bodyPr wrap="square" lIns="254" tIns="254" rIns="254" bIns="254" rtlCol="0" anchor="t">
+            <a:normAutofit/>
+          </a:bodyPr>
+          <a:lstStyle/>
+          <a:p>
+            <a:r>
+              <a:rPr lang="en-US" sz="1380" dirty="0">
+                <a:solidFill>
+                  <a:srgbClr val="17364A"/>
+                </a:solidFill>
+                <a:latin typeface="Aptos" pitchFamily="34" charset="0"/>
+                <a:ea typeface="Aptos" pitchFamily="34" charset="-122"/>
+                <a:cs typeface="Aptos" pitchFamily="34" charset="-120"/>
+              </a:rPr>
+              <a:t>CDC surveillance and data quality resources</a:t>
+            </a:r>
+            <a:endParaRPr lang="en-US" sz="1380" dirty="0"/>
+          </a:p>
+          <a:p>
+            <a:r>
+              <a:rPr lang="en-US" sz="1380" dirty="0">
+                <a:solidFill>
+                  <a:srgbClr val="17364A"/>
+                </a:solidFill>
+                <a:latin typeface="Aptos" pitchFamily="34" charset="0"/>
+                <a:ea typeface="Aptos" pitchFamily="34" charset="-122"/>
+                <a:cs typeface="Aptos" pitchFamily="34" charset="-120"/>
+              </a:rPr>
+              <a:t>CDC Public Health Data Strategy:.</a:t>
+            </a:r>
+            <a:endParaRPr lang="en-US" sz="1380" dirty="0"/>
+          </a:p>
+          <a:p>
+            <a:r>
+              <a:rPr lang="en-US" sz="1380" dirty="0">
+                <a:solidFill>
+                  <a:srgbClr val="17364A"/>
+                </a:solidFill>
+                <a:latin typeface="Aptos" pitchFamily="34" charset="0"/>
+                <a:ea typeface="Aptos" pitchFamily="34" charset="-122"/>
+                <a:cs typeface="Aptos" pitchFamily="34" charset="-120"/>
+              </a:rPr>
+              <a:t>NIST AI Risk Management Framework: https://www.nist.gov/itl/ai-risk-management-framework</a:t>
+            </a:r>
+            <a:endParaRPr lang="en-US" sz="1380" dirty="0"/>
+          </a:p>
+        </p:txBody>
       </p:sp>
       <p:sp>
         <p:nvSpPr>
           <p:cNvPr id="16" name="Shape 14"/>
-          <p:cNvSpPr/>
-          <p:nvPr/>
-        </p:nvSpPr>
-        <p:spPr>
-          <a:xfrm>
-            <a:off x="9015984" y="2880360"/>
-            <a:ext cx="256032" cy="1005840"/>
-          </a:xfrm>
-          <a:prstGeom prst="rect">
-            <a:avLst/>
-          </a:prstGeom>
-          <a:solidFill>
-            <a:srgbClr val="D69A2D"/>
-          </a:solidFill>
-          <a:ln w="12700">
-            <a:solidFill>
-              <a:srgbClr val="D69A2D"/>
-            </a:solidFill>
-            <a:prstDash val="solid"/>
-          </a:ln>
-        </p:spPr>
-      </p:sp>
-      <p:sp>
-        <p:nvSpPr>
-          <p:cNvPr id="17" name="Shape 15"/>
-          <p:cNvSpPr/>
-          <p:nvPr/>
-        </p:nvSpPr>
-        <p:spPr>
-          <a:xfrm>
-            <a:off x="9454896" y="3319272"/>
-            <a:ext cx="256032" cy="566928"/>
-          </a:xfrm>
-          <a:prstGeom prst="rect">
-            <a:avLst/>
-          </a:prstGeom>
-          <a:solidFill>
-            <a:srgbClr val="6A4CA3"/>
-          </a:solidFill>
-          <a:ln w="12700">
-            <a:solidFill>
-              <a:srgbClr val="6A4CA3"/>
-            </a:solidFill>
-            <a:prstDash val="solid"/>
-          </a:ln>
-        </p:spPr>
-      </p:sp>
-      <p:sp>
-        <p:nvSpPr>
-          <p:cNvPr id="18" name="Shape 16"/>
-          <p:cNvSpPr/>
-          <p:nvPr/>
-        </p:nvSpPr>
-        <p:spPr>
-          <a:xfrm>
-            <a:off x="8019288" y="3886200"/>
-            <a:ext cx="2706624" cy="0"/>
-          </a:xfrm>
-          <a:prstGeom prst="line">
-            <a:avLst/>
-          </a:prstGeom>
-          <a:noFill/>
-          <a:ln w="15240">
-            <a:solidFill>
-              <a:srgbClr val="003A63"/>
-            </a:solidFill>
-            <a:prstDash val="solid"/>
-          </a:ln>
-        </p:spPr>
-      </p:sp>
-      <p:sp>
-        <p:nvSpPr>
-          <p:cNvPr id="19" name="Text 17"/>
-          <p:cNvSpPr/>
-          <p:nvPr/>
-        </p:nvSpPr>
-        <p:spPr>
-          <a:xfrm>
-            <a:off x="7863840" y="3017520"/>
-            <a:ext cx="3017520" cy="201168"/>
-          </a:xfrm>
-          <a:prstGeom prst="rect">
-            <a:avLst/>
-          </a:prstGeom>
-          <a:noFill/>
-          <a:ln/>
-        </p:spPr>
-        <p:txBody>
-          <a:bodyPr wrap="square" lIns="0" tIns="0" rIns="0" bIns="0" rtlCol="0" anchor="ctr"/>
-          <a:lstStyle/>
-          <a:p>
-            <a:pPr algn="ctr" indent="0" marL="0">
-              <a:buNone/>
-            </a:pPr>
-            <a:r>
-              <a:rPr lang="en-US" sz="1050" b="1" dirty="0">
-                <a:solidFill>
-                  <a:srgbClr val="003A63"/>
-                </a:solidFill>
-                <a:latin typeface="Aptos" pitchFamily="34" charset="0"/>
-                <a:ea typeface="Aptos" pitchFamily="34" charset="-122"/>
-                <a:cs typeface="Aptos" pitchFamily="34" charset="-120"/>
-              </a:rPr>
-              <a:t>Measure and monitor</a:t>
-            </a:r>
-            <a:endParaRPr lang="en-US" sz="1050" dirty="0"/>
-          </a:p>
-        </p:txBody>
-      </p:sp>
-      <p:sp>
-        <p:nvSpPr>
-          <p:cNvPr id="20" name="Shape 18"/>
           <p:cNvSpPr/>
           <p:nvPr/>
         </p:nvSpPr>
@@ -13284,7 +12451,7 @@
       </p:sp>
       <p:sp>
         <p:nvSpPr>
-          <p:cNvPr id="21" name="Text 19"/>
+          <p:cNvPr id="17" name="Text 15"/>
           <p:cNvSpPr/>
           <p:nvPr/>
         </p:nvSpPr>
@@ -13323,7 +12490,7 @@
       </p:sp>
       <p:sp>
         <p:nvSpPr>
-          <p:cNvPr id="22" name="Text 20"/>
+          <p:cNvPr id="18" name="Text 16"/>
           <p:cNvSpPr/>
           <p:nvPr/>
         </p:nvSpPr>
@@ -13836,20 +13003,20 @@
         </p:nvSpPr>
         <p:spPr>
           <a:xfrm>
-            <a:off x="7818120" y="3977640"/>
-            <a:ext cx="972312" cy="749808"/>
+            <a:off x="8046720" y="3794760"/>
+            <a:ext cx="3063240" cy="1600200"/>
           </a:xfrm>
           <a:prstGeom prst="roundRect">
             <a:avLst>
-              <a:gd name="adj" fmla="val 14634"/>
+              <a:gd name="adj" fmla="val 6857"/>
             </a:avLst>
           </a:prstGeom>
           <a:solidFill>
-            <a:srgbClr val="0068B7"/>
+            <a:srgbClr val="FFFFFF"/>
           </a:solidFill>
           <a:ln w="12700">
             <a:solidFill>
-              <a:srgbClr val="0068B7"/>
+              <a:srgbClr val="B9D7E6"/>
             </a:solidFill>
             <a:prstDash val="solid"/>
           </a:ln>
@@ -13863,172 +13030,100 @@
         </p:nvSpPr>
         <p:spPr>
           <a:xfrm>
-            <a:off x="7891272" y="4169664"/>
-            <a:ext cx="826008" cy="310896"/>
-          </a:xfrm>
-          <a:prstGeom prst="rect">
-            <a:avLst/>
-          </a:prstGeom>
-          <a:noFill/>
-          <a:ln/>
-        </p:spPr>
-        <p:txBody>
-          <a:bodyPr wrap="square" lIns="0" tIns="0" rIns="0" bIns="0" rtlCol="0" anchor="ctr">
+            <a:off x="8211312" y="3941064"/>
+            <a:ext cx="2734056" cy="256032"/>
+          </a:xfrm>
+          <a:prstGeom prst="rect">
+            <a:avLst/>
+          </a:prstGeom>
+          <a:noFill/>
+          <a:ln/>
+        </p:spPr>
+        <p:txBody>
+          <a:bodyPr wrap="square" lIns="0" tIns="0" rIns="0" bIns="0" rtlCol="0" anchor="ctr"/>
+          <a:lstStyle/>
+          <a:p>
+            <a:pPr indent="0" marL="0">
+              <a:buNone/>
+            </a:pPr>
+            <a:r>
+              <a:rPr lang="en-US" sz="1300" b="1" dirty="0">
+                <a:solidFill>
+                  <a:srgbClr val="0068B7"/>
+                </a:solidFill>
+                <a:latin typeface="Aptos" pitchFamily="34" charset="0"/>
+                <a:ea typeface="Aptos" pitchFamily="34" charset="-122"/>
+                <a:cs typeface="Aptos" pitchFamily="34" charset="-120"/>
+              </a:rPr>
+              <a:t>Use the play links to</a:t>
+            </a:r>
+            <a:endParaRPr lang="en-US" sz="1300" dirty="0"/>
+          </a:p>
+        </p:txBody>
+      </p:sp>
+      <p:sp>
+        <p:nvSpPr>
+          <p:cNvPr id="15" name="Text 13"/>
+          <p:cNvSpPr/>
+          <p:nvPr/>
+        </p:nvSpPr>
+        <p:spPr>
+          <a:xfrm>
+            <a:off x="8229600" y="4306824"/>
+            <a:ext cx="2679192" cy="941832"/>
+          </a:xfrm>
+          <a:prstGeom prst="rect">
+            <a:avLst/>
+          </a:prstGeom>
+          <a:noFill/>
+          <a:ln/>
+        </p:spPr>
+        <p:txBody>
+          <a:bodyPr wrap="square" lIns="254" tIns="254" rIns="254" bIns="254" rtlCol="0" anchor="t">
             <a:normAutofit/>
           </a:bodyPr>
           <a:lstStyle/>
           <a:p>
-            <a:pPr algn="ctr" indent="0" marL="0">
-              <a:buNone/>
-            </a:pPr>
-            <a:r>
-              <a:rPr lang="en-US" sz="1500" b="1" dirty="0">
-                <a:solidFill>
-                  <a:srgbClr val="FFFFFF"/>
-                </a:solidFill>
-                <a:latin typeface="Aptos" pitchFamily="34" charset="0"/>
-                <a:ea typeface="Aptos" pitchFamily="34" charset="-122"/>
-                <a:cs typeface="Aptos" pitchFamily="34" charset="-120"/>
-              </a:rPr>
-              <a:t>Lesson</a:t>
-            </a:r>
-            <a:endParaRPr lang="en-US" sz="1500" dirty="0"/>
-          </a:p>
-        </p:txBody>
-      </p:sp>
-      <p:sp>
-        <p:nvSpPr>
-          <p:cNvPr id="15" name="Shape 13"/>
-          <p:cNvSpPr/>
-          <p:nvPr/>
-        </p:nvSpPr>
-        <p:spPr>
-          <a:xfrm>
-            <a:off x="9046464" y="3977640"/>
-            <a:ext cx="972312" cy="749808"/>
-          </a:xfrm>
-          <a:prstGeom prst="roundRect">
-            <a:avLst>
-              <a:gd name="adj" fmla="val 14634"/>
-            </a:avLst>
-          </a:prstGeom>
-          <a:solidFill>
-            <a:srgbClr val="2F8A28"/>
-          </a:solidFill>
-          <a:ln w="12700">
-            <a:solidFill>
-              <a:srgbClr val="2F8A28"/>
-            </a:solidFill>
-            <a:prstDash val="solid"/>
-          </a:ln>
-        </p:spPr>
-      </p:sp>
-      <p:sp>
-        <p:nvSpPr>
-          <p:cNvPr id="16" name="Text 14"/>
-          <p:cNvSpPr/>
-          <p:nvPr/>
-        </p:nvSpPr>
-        <p:spPr>
-          <a:xfrm>
-            <a:off x="9119616" y="4169664"/>
-            <a:ext cx="826008" cy="310896"/>
-          </a:xfrm>
-          <a:prstGeom prst="rect">
-            <a:avLst/>
-          </a:prstGeom>
-          <a:noFill/>
-          <a:ln/>
-        </p:spPr>
-        <p:txBody>
-          <a:bodyPr wrap="square" lIns="0" tIns="0" rIns="0" bIns="0" rtlCol="0" anchor="ctr">
-            <a:normAutofit/>
-          </a:bodyPr>
-          <a:lstStyle/>
-          <a:p>
-            <a:pPr algn="ctr" indent="0" marL="0">
-              <a:buNone/>
-            </a:pPr>
-            <a:r>
-              <a:rPr lang="en-US" sz="1500" b="1" dirty="0">
-                <a:solidFill>
-                  <a:srgbClr val="FFFFFF"/>
-                </a:solidFill>
-                <a:latin typeface="Aptos" pitchFamily="34" charset="0"/>
-                <a:ea typeface="Aptos" pitchFamily="34" charset="-122"/>
-                <a:cs typeface="Aptos" pitchFamily="34" charset="-120"/>
-              </a:rPr>
-              <a:t>Plays</a:t>
-            </a:r>
-            <a:endParaRPr lang="en-US" sz="1500" dirty="0"/>
-          </a:p>
-        </p:txBody>
-      </p:sp>
-      <p:sp>
-        <p:nvSpPr>
-          <p:cNvPr id="17" name="Shape 15"/>
-          <p:cNvSpPr/>
-          <p:nvPr/>
-        </p:nvSpPr>
-        <p:spPr>
-          <a:xfrm>
-            <a:off x="10274808" y="3977640"/>
-            <a:ext cx="972312" cy="749808"/>
-          </a:xfrm>
-          <a:prstGeom prst="roundRect">
-            <a:avLst>
-              <a:gd name="adj" fmla="val 14634"/>
-            </a:avLst>
-          </a:prstGeom>
-          <a:solidFill>
-            <a:srgbClr val="6A4CA3"/>
-          </a:solidFill>
-          <a:ln w="12700">
-            <a:solidFill>
-              <a:srgbClr val="6A4CA3"/>
-            </a:solidFill>
-            <a:prstDash val="solid"/>
-          </a:ln>
-        </p:spPr>
-      </p:sp>
-      <p:sp>
-        <p:nvSpPr>
-          <p:cNvPr id="18" name="Text 16"/>
-          <p:cNvSpPr/>
-          <p:nvPr/>
-        </p:nvSpPr>
-        <p:spPr>
-          <a:xfrm>
-            <a:off x="10347960" y="4169664"/>
-            <a:ext cx="826008" cy="310896"/>
-          </a:xfrm>
-          <a:prstGeom prst="rect">
-            <a:avLst/>
-          </a:prstGeom>
-          <a:noFill/>
-          <a:ln/>
-        </p:spPr>
-        <p:txBody>
-          <a:bodyPr wrap="square" lIns="0" tIns="0" rIns="0" bIns="0" rtlCol="0" anchor="ctr">
-            <a:normAutofit/>
-          </a:bodyPr>
-          <a:lstStyle/>
-          <a:p>
-            <a:pPr algn="ctr" indent="0" marL="0">
-              <a:buNone/>
-            </a:pPr>
-            <a:r>
-              <a:rPr lang="en-US" sz="1500" b="1" dirty="0">
-                <a:solidFill>
-                  <a:srgbClr val="FFFFFF"/>
-                </a:solidFill>
-                <a:latin typeface="Aptos" pitchFamily="34" charset="0"/>
-                <a:ea typeface="Aptos" pitchFamily="34" charset="-122"/>
-                <a:cs typeface="Aptos" pitchFamily="34" charset="-120"/>
-              </a:rPr>
-              <a:t>Action</a:t>
-            </a:r>
-            <a:endParaRPr lang="en-US" sz="1500" dirty="0"/>
+            <a:r>
+              <a:rPr lang="en-US" sz="1380" dirty="0">
+                <a:solidFill>
+                  <a:srgbClr val="17364A"/>
+                </a:solidFill>
+                <a:latin typeface="Aptos" pitchFamily="34" charset="0"/>
+                <a:ea typeface="Aptos" pitchFamily="34" charset="-122"/>
+                <a:cs typeface="Aptos" pitchFamily="34" charset="-120"/>
+              </a:rPr>
+              <a:t>Locate the decision point in the playbook sequence.</a:t>
+            </a:r>
+            <a:endParaRPr lang="en-US" sz="1380" dirty="0"/>
+          </a:p>
+          <a:p>
+            <a:r>
+              <a:rPr lang="en-US" sz="1380" dirty="0">
+                <a:solidFill>
+                  <a:srgbClr val="17364A"/>
+                </a:solidFill>
+                <a:latin typeface="Aptos" pitchFamily="34" charset="0"/>
+                <a:ea typeface="Aptos" pitchFamily="34" charset="-122"/>
+                <a:cs typeface="Aptos" pitchFamily="34" charset="-120"/>
+              </a:rPr>
+              <a:t>Identify who should participate in the work.</a:t>
+            </a:r>
+            <a:endParaRPr lang="en-US" sz="1380" dirty="0"/>
+          </a:p>
+          <a:p>
+            <a:r>
+              <a:rPr lang="en-US" sz="1380" dirty="0">
+                <a:solidFill>
+                  <a:srgbClr val="17364A"/>
+                </a:solidFill>
+                <a:latin typeface="Aptos" pitchFamily="34" charset="0"/>
+                <a:ea typeface="Aptos" pitchFamily="34" charset="-122"/>
+                <a:cs typeface="Aptos" pitchFamily="34" charset="-120"/>
+              </a:rPr>
+              <a:t>Document the review, approval, or implementation step.</a:t>
+            </a:r>
+            <a:endParaRPr lang="en-US" sz="1380" dirty="0"/>
           </a:p>
         </p:txBody>
       </p:sp>
@@ -14506,20 +13601,20 @@
         </p:nvSpPr>
         <p:spPr>
           <a:xfrm>
-            <a:off x="7818120" y="3977640"/>
-            <a:ext cx="972312" cy="749808"/>
+            <a:off x="8046720" y="3794760"/>
+            <a:ext cx="3063240" cy="1600200"/>
           </a:xfrm>
           <a:prstGeom prst="roundRect">
             <a:avLst>
-              <a:gd name="adj" fmla="val 14634"/>
+              <a:gd name="adj" fmla="val 6857"/>
             </a:avLst>
           </a:prstGeom>
           <a:solidFill>
-            <a:srgbClr val="0068B7"/>
+            <a:srgbClr val="FFFFFF"/>
           </a:solidFill>
           <a:ln w="12700">
             <a:solidFill>
-              <a:srgbClr val="0068B7"/>
+              <a:srgbClr val="B9D7E6"/>
             </a:solidFill>
             <a:prstDash val="solid"/>
           </a:ln>
@@ -14533,172 +13628,100 @@
         </p:nvSpPr>
         <p:spPr>
           <a:xfrm>
-            <a:off x="7891272" y="4169664"/>
-            <a:ext cx="826008" cy="310896"/>
-          </a:xfrm>
-          <a:prstGeom prst="rect">
-            <a:avLst/>
-          </a:prstGeom>
-          <a:noFill/>
-          <a:ln/>
-        </p:spPr>
-        <p:txBody>
-          <a:bodyPr wrap="square" lIns="0" tIns="0" rIns="0" bIns="0" rtlCol="0" anchor="ctr">
+            <a:off x="8211312" y="3941064"/>
+            <a:ext cx="2734056" cy="256032"/>
+          </a:xfrm>
+          <a:prstGeom prst="rect">
+            <a:avLst/>
+          </a:prstGeom>
+          <a:noFill/>
+          <a:ln/>
+        </p:spPr>
+        <p:txBody>
+          <a:bodyPr wrap="square" lIns="0" tIns="0" rIns="0" bIns="0" rtlCol="0" anchor="ctr"/>
+          <a:lstStyle/>
+          <a:p>
+            <a:pPr indent="0" marL="0">
+              <a:buNone/>
+            </a:pPr>
+            <a:r>
+              <a:rPr lang="en-US" sz="1300" b="1" dirty="0">
+                <a:solidFill>
+                  <a:srgbClr val="0068B7"/>
+                </a:solidFill>
+                <a:latin typeface="Aptos" pitchFamily="34" charset="0"/>
+                <a:ea typeface="Aptos" pitchFamily="34" charset="-122"/>
+                <a:cs typeface="Aptos" pitchFamily="34" charset="-120"/>
+              </a:rPr>
+              <a:t>Tool selection cues</a:t>
+            </a:r>
+            <a:endParaRPr lang="en-US" sz="1300" dirty="0"/>
+          </a:p>
+        </p:txBody>
+      </p:sp>
+      <p:sp>
+        <p:nvSpPr>
+          <p:cNvPr id="15" name="Text 13"/>
+          <p:cNvSpPr/>
+          <p:nvPr/>
+        </p:nvSpPr>
+        <p:spPr>
+          <a:xfrm>
+            <a:off x="8229600" y="4306824"/>
+            <a:ext cx="2679192" cy="941832"/>
+          </a:xfrm>
+          <a:prstGeom prst="rect">
+            <a:avLst/>
+          </a:prstGeom>
+          <a:noFill/>
+          <a:ln/>
+        </p:spPr>
+        <p:txBody>
+          <a:bodyPr wrap="square" lIns="254" tIns="254" rIns="254" bIns="254" rtlCol="0" anchor="t">
             <a:normAutofit/>
           </a:bodyPr>
           <a:lstStyle/>
           <a:p>
-            <a:pPr algn="ctr" indent="0" marL="0">
-              <a:buNone/>
-            </a:pPr>
-            <a:r>
-              <a:rPr lang="en-US" sz="1500" b="1" dirty="0">
-                <a:solidFill>
-                  <a:srgbClr val="FFFFFF"/>
-                </a:solidFill>
-                <a:latin typeface="Aptos" pitchFamily="34" charset="0"/>
-                <a:ea typeface="Aptos" pitchFamily="34" charset="-122"/>
-                <a:cs typeface="Aptos" pitchFamily="34" charset="-120"/>
-              </a:rPr>
-              <a:t>Concept</a:t>
-            </a:r>
-            <a:endParaRPr lang="en-US" sz="1500" dirty="0"/>
-          </a:p>
-        </p:txBody>
-      </p:sp>
-      <p:sp>
-        <p:nvSpPr>
-          <p:cNvPr id="15" name="Shape 13"/>
-          <p:cNvSpPr/>
-          <p:nvPr/>
-        </p:nvSpPr>
-        <p:spPr>
-          <a:xfrm>
-            <a:off x="9046464" y="3977640"/>
-            <a:ext cx="972312" cy="749808"/>
-          </a:xfrm>
-          <a:prstGeom prst="roundRect">
-            <a:avLst>
-              <a:gd name="adj" fmla="val 14634"/>
-            </a:avLst>
-          </a:prstGeom>
-          <a:solidFill>
-            <a:srgbClr val="2F8A28"/>
-          </a:solidFill>
-          <a:ln w="12700">
-            <a:solidFill>
-              <a:srgbClr val="2F8A28"/>
-            </a:solidFill>
-            <a:prstDash val="solid"/>
-          </a:ln>
-        </p:spPr>
-      </p:sp>
-      <p:sp>
-        <p:nvSpPr>
-          <p:cNvPr id="16" name="Text 14"/>
-          <p:cNvSpPr/>
-          <p:nvPr/>
-        </p:nvSpPr>
-        <p:spPr>
-          <a:xfrm>
-            <a:off x="9119616" y="4169664"/>
-            <a:ext cx="826008" cy="310896"/>
-          </a:xfrm>
-          <a:prstGeom prst="rect">
-            <a:avLst/>
-          </a:prstGeom>
-          <a:noFill/>
-          <a:ln/>
-        </p:spPr>
-        <p:txBody>
-          <a:bodyPr wrap="square" lIns="0" tIns="0" rIns="0" bIns="0" rtlCol="0" anchor="ctr">
-            <a:normAutofit/>
-          </a:bodyPr>
-          <a:lstStyle/>
-          <a:p>
-            <a:pPr algn="ctr" indent="0" marL="0">
-              <a:buNone/>
-            </a:pPr>
-            <a:r>
-              <a:rPr lang="en-US" sz="1500" b="1" dirty="0">
-                <a:solidFill>
-                  <a:srgbClr val="FFFFFF"/>
-                </a:solidFill>
-                <a:latin typeface="Aptos" pitchFamily="34" charset="0"/>
-                <a:ea typeface="Aptos" pitchFamily="34" charset="-122"/>
-                <a:cs typeface="Aptos" pitchFamily="34" charset="-120"/>
-              </a:rPr>
-              <a:t>Tool</a:t>
-            </a:r>
-            <a:endParaRPr lang="en-US" sz="1500" dirty="0"/>
-          </a:p>
-        </p:txBody>
-      </p:sp>
-      <p:sp>
-        <p:nvSpPr>
-          <p:cNvPr id="17" name="Shape 15"/>
-          <p:cNvSpPr/>
-          <p:nvPr/>
-        </p:nvSpPr>
-        <p:spPr>
-          <a:xfrm>
-            <a:off x="10274808" y="3977640"/>
-            <a:ext cx="972312" cy="749808"/>
-          </a:xfrm>
-          <a:prstGeom prst="roundRect">
-            <a:avLst>
-              <a:gd name="adj" fmla="val 14634"/>
-            </a:avLst>
-          </a:prstGeom>
-          <a:solidFill>
-            <a:srgbClr val="D69A2D"/>
-          </a:solidFill>
-          <a:ln w="12700">
-            <a:solidFill>
-              <a:srgbClr val="D69A2D"/>
-            </a:solidFill>
-            <a:prstDash val="solid"/>
-          </a:ln>
-        </p:spPr>
-      </p:sp>
-      <p:sp>
-        <p:nvSpPr>
-          <p:cNvPr id="18" name="Text 16"/>
-          <p:cNvSpPr/>
-          <p:nvPr/>
-        </p:nvSpPr>
-        <p:spPr>
-          <a:xfrm>
-            <a:off x="10347960" y="4169664"/>
-            <a:ext cx="826008" cy="310896"/>
-          </a:xfrm>
-          <a:prstGeom prst="rect">
-            <a:avLst/>
-          </a:prstGeom>
-          <a:noFill/>
-          <a:ln/>
-        </p:spPr>
-        <p:txBody>
-          <a:bodyPr wrap="square" lIns="0" tIns="0" rIns="0" bIns="0" rtlCol="0" anchor="ctr">
-            <a:normAutofit/>
-          </a:bodyPr>
-          <a:lstStyle/>
-          <a:p>
-            <a:pPr algn="ctr" indent="0" marL="0">
-              <a:buNone/>
-            </a:pPr>
-            <a:r>
-              <a:rPr lang="en-US" sz="1500" b="1" dirty="0">
-                <a:solidFill>
-                  <a:srgbClr val="FFFFFF"/>
-                </a:solidFill>
-                <a:latin typeface="Aptos" pitchFamily="34" charset="0"/>
-                <a:ea typeface="Aptos" pitchFamily="34" charset="-122"/>
-                <a:cs typeface="Aptos" pitchFamily="34" charset="-120"/>
-              </a:rPr>
-              <a:t>Artifact</a:t>
-            </a:r>
-            <a:endParaRPr lang="en-US" sz="1500" dirty="0"/>
+            <a:r>
+              <a:rPr lang="en-US" sz="1380" dirty="0">
+                <a:solidFill>
+                  <a:srgbClr val="17364A"/>
+                </a:solidFill>
+                <a:latin typeface="Aptos" pitchFamily="34" charset="0"/>
+                <a:ea typeface="Aptos" pitchFamily="34" charset="-122"/>
+                <a:cs typeface="Aptos" pitchFamily="34" charset="-120"/>
+              </a:rPr>
+              <a:t>Use a tool when no comparable local process exists.</a:t>
+            </a:r>
+            <a:endParaRPr lang="en-US" sz="1380" dirty="0"/>
+          </a:p>
+          <a:p>
+            <a:r>
+              <a:rPr lang="en-US" sz="1380" dirty="0">
+                <a:solidFill>
+                  <a:srgbClr val="17364A"/>
+                </a:solidFill>
+                <a:latin typeface="Aptos" pitchFamily="34" charset="0"/>
+                <a:ea typeface="Aptos" pitchFamily="34" charset="-122"/>
+                <a:cs typeface="Aptos" pitchFamily="34" charset="-120"/>
+              </a:rPr>
+              <a:t>Adapt existing department templates when they already fit the purpose.</a:t>
+            </a:r>
+            <a:endParaRPr lang="en-US" sz="1380" dirty="0"/>
+          </a:p>
+          <a:p>
+            <a:r>
+              <a:rPr lang="en-US" sz="1380" dirty="0">
+                <a:solidFill>
+                  <a:srgbClr val="17364A"/>
+                </a:solidFill>
+                <a:latin typeface="Aptos" pitchFamily="34" charset="0"/>
+                <a:ea typeface="Aptos" pitchFamily="34" charset="-122"/>
+                <a:cs typeface="Aptos" pitchFamily="34" charset="-120"/>
+              </a:rPr>
+              <a:t>Save the completed artifact as evidence of the decision.</a:t>
+            </a:r>
+            <a:endParaRPr lang="en-US" sz="1380" dirty="0"/>
           </a:p>
         </p:txBody>
       </p:sp>
@@ -15171,13 +14194,11 @@
             </a:avLst>
           </a:prstGeom>
           <a:solidFill>
-            <a:srgbClr val="FFFFFF">
-              <a:alpha val="88000"/>
-            </a:srgbClr>
+            <a:srgbClr val="FFFFFF"/>
           </a:solidFill>
           <a:ln w="12700">
             <a:solidFill>
-              <a:srgbClr val="D6E8F2"/>
+              <a:srgbClr val="B9D7E6"/>
             </a:solidFill>
             <a:prstDash val="solid"/>
           </a:ln>
@@ -15185,169 +14206,112 @@
       </p:sp>
       <p:sp>
         <p:nvSpPr>
-          <p:cNvPr id="14" name="Shape 12"/>
-          <p:cNvSpPr/>
-          <p:nvPr/>
-        </p:nvSpPr>
-        <p:spPr>
-          <a:xfrm>
-            <a:off x="8138160" y="3474720"/>
-            <a:ext cx="256032" cy="411480"/>
-          </a:xfrm>
-          <a:prstGeom prst="rect">
-            <a:avLst/>
-          </a:prstGeom>
-          <a:solidFill>
-            <a:srgbClr val="0068B7"/>
-          </a:solidFill>
-          <a:ln w="12700">
-            <a:solidFill>
-              <a:srgbClr val="0068B7"/>
-            </a:solidFill>
-            <a:prstDash val="solid"/>
-          </a:ln>
-        </p:spPr>
-      </p:sp>
-      <p:sp>
-        <p:nvSpPr>
-          <p:cNvPr id="15" name="Shape 13"/>
-          <p:cNvSpPr/>
-          <p:nvPr/>
-        </p:nvSpPr>
-        <p:spPr>
-          <a:xfrm>
-            <a:off x="8577072" y="3172968"/>
-            <a:ext cx="256032" cy="713232"/>
-          </a:xfrm>
-          <a:prstGeom prst="rect">
-            <a:avLst/>
-          </a:prstGeom>
-          <a:solidFill>
-            <a:srgbClr val="2F8A28"/>
-          </a:solidFill>
-          <a:ln w="12700">
-            <a:solidFill>
-              <a:srgbClr val="2F8A28"/>
-            </a:solidFill>
-            <a:prstDash val="solid"/>
-          </a:ln>
-        </p:spPr>
+          <p:cNvPr id="14" name="Text 12"/>
+          <p:cNvSpPr/>
+          <p:nvPr/>
+        </p:nvSpPr>
+        <p:spPr>
+          <a:xfrm>
+            <a:off x="7799832" y="2935224"/>
+            <a:ext cx="3145536" cy="256032"/>
+          </a:xfrm>
+          <a:prstGeom prst="rect">
+            <a:avLst/>
+          </a:prstGeom>
+          <a:noFill/>
+          <a:ln/>
+        </p:spPr>
+        <p:txBody>
+          <a:bodyPr wrap="square" lIns="0" tIns="0" rIns="0" bIns="0" rtlCol="0" anchor="ctr"/>
+          <a:lstStyle/>
+          <a:p>
+            <a:pPr indent="0" marL="0">
+              <a:buNone/>
+            </a:pPr>
+            <a:r>
+              <a:rPr lang="en-US" sz="1300" b="1" dirty="0">
+                <a:solidFill>
+                  <a:srgbClr val="0068B7"/>
+                </a:solidFill>
+                <a:latin typeface="Aptos" pitchFamily="34" charset="0"/>
+                <a:ea typeface="Aptos" pitchFamily="34" charset="-122"/>
+                <a:cs typeface="Aptos" pitchFamily="34" charset="-120"/>
+              </a:rPr>
+              <a:t>Concept checkpoints</a:t>
+            </a:r>
+            <a:endParaRPr lang="en-US" sz="1300" dirty="0"/>
+          </a:p>
+        </p:txBody>
+      </p:sp>
+      <p:sp>
+        <p:nvSpPr>
+          <p:cNvPr id="15" name="Text 13"/>
+          <p:cNvSpPr/>
+          <p:nvPr/>
+        </p:nvSpPr>
+        <p:spPr>
+          <a:xfrm>
+            <a:off x="7818120" y="3300984"/>
+            <a:ext cx="3090672" cy="877824"/>
+          </a:xfrm>
+          <a:prstGeom prst="rect">
+            <a:avLst/>
+          </a:prstGeom>
+          <a:noFill/>
+          <a:ln/>
+        </p:spPr>
+        <p:txBody>
+          <a:bodyPr wrap="square" lIns="254" tIns="254" rIns="254" bIns="254" rtlCol="0" anchor="t">
+            <a:normAutofit/>
+          </a:bodyPr>
+          <a:lstStyle/>
+          <a:p>
+            <a:r>
+              <a:rPr lang="en-US" sz="1380" dirty="0">
+                <a:solidFill>
+                  <a:srgbClr val="17364A"/>
+                </a:solidFill>
+                <a:latin typeface="Aptos" pitchFamily="34" charset="0"/>
+                <a:ea typeface="Aptos" pitchFamily="34" charset="-122"/>
+                <a:cs typeface="Aptos" pitchFamily="34" charset="-120"/>
+              </a:rPr>
+              <a:t>Assess how missingness, timeliness, duplication, coding variation, and representativeness.</a:t>
+            </a:r>
+            <a:endParaRPr lang="en-US" sz="1380" dirty="0"/>
+          </a:p>
+          <a:p>
+            <a:r>
+              <a:rPr lang="en-US" sz="1380" dirty="0">
+                <a:solidFill>
+                  <a:srgbClr val="17364A"/>
+                </a:solidFill>
+                <a:latin typeface="Aptos" pitchFamily="34" charset="0"/>
+                <a:ea typeface="Aptos" pitchFamily="34" charset="-122"/>
+                <a:cs typeface="Aptos" pitchFamily="34" charset="-120"/>
+              </a:rPr>
+              <a:t>Define quality thresholds, review rules, and escalation criteria for a workflow.</a:t>
+            </a:r>
+            <a:endParaRPr lang="en-US" sz="1380" dirty="0"/>
+          </a:p>
+          <a:p>
+            <a:r>
+              <a:rPr lang="en-US" sz="1380" dirty="0">
+                <a:solidFill>
+                  <a:srgbClr val="17364A"/>
+                </a:solidFill>
+                <a:latin typeface="Aptos" pitchFamily="34" charset="0"/>
+                <a:ea typeface="Aptos" pitchFamily="34" charset="-122"/>
+                <a:cs typeface="Aptos" pitchFamily="34" charset="-120"/>
+              </a:rPr>
+              <a:t>Produce a data quality review plan for an AI-supported use case.</a:t>
+            </a:r>
+            <a:endParaRPr lang="en-US" sz="1380" dirty="0"/>
+          </a:p>
+        </p:txBody>
       </p:sp>
       <p:sp>
         <p:nvSpPr>
           <p:cNvPr id="16" name="Shape 14"/>
-          <p:cNvSpPr/>
-          <p:nvPr/>
-        </p:nvSpPr>
-        <p:spPr>
-          <a:xfrm>
-            <a:off x="9015984" y="2880360"/>
-            <a:ext cx="256032" cy="1005840"/>
-          </a:xfrm>
-          <a:prstGeom prst="rect">
-            <a:avLst/>
-          </a:prstGeom>
-          <a:solidFill>
-            <a:srgbClr val="D69A2D"/>
-          </a:solidFill>
-          <a:ln w="12700">
-            <a:solidFill>
-              <a:srgbClr val="D69A2D"/>
-            </a:solidFill>
-            <a:prstDash val="solid"/>
-          </a:ln>
-        </p:spPr>
-      </p:sp>
-      <p:sp>
-        <p:nvSpPr>
-          <p:cNvPr id="17" name="Shape 15"/>
-          <p:cNvSpPr/>
-          <p:nvPr/>
-        </p:nvSpPr>
-        <p:spPr>
-          <a:xfrm>
-            <a:off x="9454896" y="3319272"/>
-            <a:ext cx="256032" cy="566928"/>
-          </a:xfrm>
-          <a:prstGeom prst="rect">
-            <a:avLst/>
-          </a:prstGeom>
-          <a:solidFill>
-            <a:srgbClr val="6A4CA3"/>
-          </a:solidFill>
-          <a:ln w="12700">
-            <a:solidFill>
-              <a:srgbClr val="6A4CA3"/>
-            </a:solidFill>
-            <a:prstDash val="solid"/>
-          </a:ln>
-        </p:spPr>
-      </p:sp>
-      <p:sp>
-        <p:nvSpPr>
-          <p:cNvPr id="18" name="Shape 16"/>
-          <p:cNvSpPr/>
-          <p:nvPr/>
-        </p:nvSpPr>
-        <p:spPr>
-          <a:xfrm>
-            <a:off x="8019288" y="3886200"/>
-            <a:ext cx="2706624" cy="0"/>
-          </a:xfrm>
-          <a:prstGeom prst="line">
-            <a:avLst/>
-          </a:prstGeom>
-          <a:noFill/>
-          <a:ln w="15240">
-            <a:solidFill>
-              <a:srgbClr val="003A63"/>
-            </a:solidFill>
-            <a:prstDash val="solid"/>
-          </a:ln>
-        </p:spPr>
-      </p:sp>
-      <p:sp>
-        <p:nvSpPr>
-          <p:cNvPr id="19" name="Text 17"/>
-          <p:cNvSpPr/>
-          <p:nvPr/>
-        </p:nvSpPr>
-        <p:spPr>
-          <a:xfrm>
-            <a:off x="7863840" y="3017520"/>
-            <a:ext cx="3017520" cy="201168"/>
-          </a:xfrm>
-          <a:prstGeom prst="rect">
-            <a:avLst/>
-          </a:prstGeom>
-          <a:noFill/>
-          <a:ln/>
-        </p:spPr>
-        <p:txBody>
-          <a:bodyPr wrap="square" lIns="0" tIns="0" rIns="0" bIns="0" rtlCol="0" anchor="ctr"/>
-          <a:lstStyle/>
-          <a:p>
-            <a:pPr algn="ctr" indent="0" marL="0">
-              <a:buNone/>
-            </a:pPr>
-            <a:r>
-              <a:rPr lang="en-US" sz="1050" b="1" dirty="0">
-                <a:solidFill>
-                  <a:srgbClr val="003A63"/>
-                </a:solidFill>
-                <a:latin typeface="Aptos" pitchFamily="34" charset="0"/>
-                <a:ea typeface="Aptos" pitchFamily="34" charset="-122"/>
-                <a:cs typeface="Aptos" pitchFamily="34" charset="-120"/>
-              </a:rPr>
-              <a:t>Measure and monitor</a:t>
-            </a:r>
-            <a:endParaRPr lang="en-US" sz="1050" dirty="0"/>
-          </a:p>
-        </p:txBody>
-      </p:sp>
-      <p:sp>
-        <p:nvSpPr>
-          <p:cNvPr id="20" name="Shape 18"/>
           <p:cNvSpPr/>
           <p:nvPr/>
         </p:nvSpPr>
@@ -15374,7 +14338,7 @@
       </p:sp>
       <p:sp>
         <p:nvSpPr>
-          <p:cNvPr id="21" name="Text 19"/>
+          <p:cNvPr id="17" name="Text 15"/>
           <p:cNvSpPr/>
           <p:nvPr/>
         </p:nvSpPr>
@@ -15413,7 +14377,7 @@
       </p:sp>
       <p:sp>
         <p:nvSpPr>
-          <p:cNvPr id="22" name="Text 20"/>
+          <p:cNvPr id="18" name="Text 16"/>
           <p:cNvSpPr/>
           <p:nvPr/>
         </p:nvSpPr>
@@ -15921,13 +14885,11 @@
             </a:avLst>
           </a:prstGeom>
           <a:solidFill>
-            <a:srgbClr val="FFFFFF">
-              <a:alpha val="88000"/>
-            </a:srgbClr>
+            <a:srgbClr val="FFFFFF"/>
           </a:solidFill>
           <a:ln w="12700">
             <a:solidFill>
-              <a:srgbClr val="D6E8F2"/>
+              <a:srgbClr val="B9D7E6"/>
             </a:solidFill>
             <a:prstDash val="solid"/>
           </a:ln>
@@ -15935,169 +14897,98 @@
       </p:sp>
       <p:sp>
         <p:nvSpPr>
-          <p:cNvPr id="14" name="Shape 12"/>
-          <p:cNvSpPr/>
-          <p:nvPr/>
-        </p:nvSpPr>
-        <p:spPr>
-          <a:xfrm>
-            <a:off x="8138160" y="3474720"/>
-            <a:ext cx="256032" cy="411480"/>
-          </a:xfrm>
-          <a:prstGeom prst="rect">
-            <a:avLst/>
-          </a:prstGeom>
-          <a:solidFill>
-            <a:srgbClr val="0068B7"/>
-          </a:solidFill>
-          <a:ln w="12700">
-            <a:solidFill>
-              <a:srgbClr val="0068B7"/>
-            </a:solidFill>
-            <a:prstDash val="solid"/>
-          </a:ln>
-        </p:spPr>
-      </p:sp>
-      <p:sp>
-        <p:nvSpPr>
-          <p:cNvPr id="15" name="Shape 13"/>
-          <p:cNvSpPr/>
-          <p:nvPr/>
-        </p:nvSpPr>
-        <p:spPr>
-          <a:xfrm>
-            <a:off x="8577072" y="3172968"/>
-            <a:ext cx="256032" cy="713232"/>
-          </a:xfrm>
-          <a:prstGeom prst="rect">
-            <a:avLst/>
-          </a:prstGeom>
-          <a:solidFill>
-            <a:srgbClr val="2F8A28"/>
-          </a:solidFill>
-          <a:ln w="12700">
-            <a:solidFill>
-              <a:srgbClr val="2F8A28"/>
-            </a:solidFill>
-            <a:prstDash val="solid"/>
-          </a:ln>
-        </p:spPr>
+          <p:cNvPr id="14" name="Text 12"/>
+          <p:cNvSpPr/>
+          <p:nvPr/>
+        </p:nvSpPr>
+        <p:spPr>
+          <a:xfrm>
+            <a:off x="7799832" y="2935224"/>
+            <a:ext cx="3145536" cy="256032"/>
+          </a:xfrm>
+          <a:prstGeom prst="rect">
+            <a:avLst/>
+          </a:prstGeom>
+          <a:noFill/>
+          <a:ln/>
+        </p:spPr>
+        <p:txBody>
+          <a:bodyPr wrap="square" lIns="0" tIns="0" rIns="0" bIns="0" rtlCol="0" anchor="ctr"/>
+          <a:lstStyle/>
+          <a:p>
+            <a:pPr indent="0" marL="0">
+              <a:buNone/>
+            </a:pPr>
+            <a:r>
+              <a:rPr lang="en-US" sz="1300" b="1" dirty="0">
+                <a:solidFill>
+                  <a:srgbClr val="0068B7"/>
+                </a:solidFill>
+                <a:latin typeface="Aptos" pitchFamily="34" charset="0"/>
+                <a:ea typeface="Aptos" pitchFamily="34" charset="-122"/>
+                <a:cs typeface="Aptos" pitchFamily="34" charset="-120"/>
+              </a:rPr>
+              <a:t>Concept checkpoints</a:t>
+            </a:r>
+            <a:endParaRPr lang="en-US" sz="1300" dirty="0"/>
+          </a:p>
+        </p:txBody>
+      </p:sp>
+      <p:sp>
+        <p:nvSpPr>
+          <p:cNvPr id="15" name="Text 13"/>
+          <p:cNvSpPr/>
+          <p:nvPr/>
+        </p:nvSpPr>
+        <p:spPr>
+          <a:xfrm>
+            <a:off x="7818120" y="3300984"/>
+            <a:ext cx="3090672" cy="877824"/>
+          </a:xfrm>
+          <a:prstGeom prst="rect">
+            <a:avLst/>
+          </a:prstGeom>
+          <a:noFill/>
+          <a:ln/>
+        </p:spPr>
+        <p:txBody>
+          <a:bodyPr wrap="square" lIns="254" tIns="254" rIns="254" bIns="254" rtlCol="0" anchor="t">
+            <a:normAutofit/>
+          </a:bodyPr>
+          <a:lstStyle/>
+          <a:p>
+            <a:r>
+              <a:rPr lang="en-US" sz="1380" dirty="0">
+                <a:solidFill>
+                  <a:srgbClr val="17364A"/>
+                </a:solidFill>
+                <a:latin typeface="Aptos" pitchFamily="34" charset="0"/>
+                <a:ea typeface="Aptos" pitchFamily="34" charset="-122"/>
+                <a:cs typeface="Aptos" pitchFamily="34" charset="-120"/>
+              </a:rPr>
+              <a:t>Data quality engineering is the practical work of defining, measuring, improving, and.</a:t>
+            </a:r>
+            <a:endParaRPr lang="en-US" sz="1380" dirty="0"/>
+          </a:p>
+          <a:p>
+            <a:r>
+              <a:rPr lang="en-US" sz="1380" dirty="0">
+                <a:solidFill>
+                  <a:srgbClr val="17364A"/>
+                </a:solidFill>
+                <a:latin typeface="Aptos" pitchFamily="34" charset="0"/>
+                <a:ea typeface="Aptos" pitchFamily="34" charset="-122"/>
+                <a:cs typeface="Aptos" pitchFamily="34" charset="-120"/>
+              </a:rPr>
+              <a:t>It directly affects whether AI outputs are accurate, equitable, timely, and safe enough to.</a:t>
+            </a:r>
+            <a:endParaRPr lang="en-US" sz="1380" dirty="0"/>
+          </a:p>
+        </p:txBody>
       </p:sp>
       <p:sp>
         <p:nvSpPr>
           <p:cNvPr id="16" name="Shape 14"/>
-          <p:cNvSpPr/>
-          <p:nvPr/>
-        </p:nvSpPr>
-        <p:spPr>
-          <a:xfrm>
-            <a:off x="9015984" y="2880360"/>
-            <a:ext cx="256032" cy="1005840"/>
-          </a:xfrm>
-          <a:prstGeom prst="rect">
-            <a:avLst/>
-          </a:prstGeom>
-          <a:solidFill>
-            <a:srgbClr val="D69A2D"/>
-          </a:solidFill>
-          <a:ln w="12700">
-            <a:solidFill>
-              <a:srgbClr val="D69A2D"/>
-            </a:solidFill>
-            <a:prstDash val="solid"/>
-          </a:ln>
-        </p:spPr>
-      </p:sp>
-      <p:sp>
-        <p:nvSpPr>
-          <p:cNvPr id="17" name="Shape 15"/>
-          <p:cNvSpPr/>
-          <p:nvPr/>
-        </p:nvSpPr>
-        <p:spPr>
-          <a:xfrm>
-            <a:off x="9454896" y="3319272"/>
-            <a:ext cx="256032" cy="566928"/>
-          </a:xfrm>
-          <a:prstGeom prst="rect">
-            <a:avLst/>
-          </a:prstGeom>
-          <a:solidFill>
-            <a:srgbClr val="6A4CA3"/>
-          </a:solidFill>
-          <a:ln w="12700">
-            <a:solidFill>
-              <a:srgbClr val="6A4CA3"/>
-            </a:solidFill>
-            <a:prstDash val="solid"/>
-          </a:ln>
-        </p:spPr>
-      </p:sp>
-      <p:sp>
-        <p:nvSpPr>
-          <p:cNvPr id="18" name="Shape 16"/>
-          <p:cNvSpPr/>
-          <p:nvPr/>
-        </p:nvSpPr>
-        <p:spPr>
-          <a:xfrm>
-            <a:off x="8019288" y="3886200"/>
-            <a:ext cx="2706624" cy="0"/>
-          </a:xfrm>
-          <a:prstGeom prst="line">
-            <a:avLst/>
-          </a:prstGeom>
-          <a:noFill/>
-          <a:ln w="15240">
-            <a:solidFill>
-              <a:srgbClr val="003A63"/>
-            </a:solidFill>
-            <a:prstDash val="solid"/>
-          </a:ln>
-        </p:spPr>
-      </p:sp>
-      <p:sp>
-        <p:nvSpPr>
-          <p:cNvPr id="19" name="Text 17"/>
-          <p:cNvSpPr/>
-          <p:nvPr/>
-        </p:nvSpPr>
-        <p:spPr>
-          <a:xfrm>
-            <a:off x="7863840" y="3017520"/>
-            <a:ext cx="3017520" cy="201168"/>
-          </a:xfrm>
-          <a:prstGeom prst="rect">
-            <a:avLst/>
-          </a:prstGeom>
-          <a:noFill/>
-          <a:ln/>
-        </p:spPr>
-        <p:txBody>
-          <a:bodyPr wrap="square" lIns="0" tIns="0" rIns="0" bIns="0" rtlCol="0" anchor="ctr"/>
-          <a:lstStyle/>
-          <a:p>
-            <a:pPr algn="ctr" indent="0" marL="0">
-              <a:buNone/>
-            </a:pPr>
-            <a:r>
-              <a:rPr lang="en-US" sz="1050" b="1" dirty="0">
-                <a:solidFill>
-                  <a:srgbClr val="003A63"/>
-                </a:solidFill>
-                <a:latin typeface="Aptos" pitchFamily="34" charset="0"/>
-                <a:ea typeface="Aptos" pitchFamily="34" charset="-122"/>
-                <a:cs typeface="Aptos" pitchFamily="34" charset="-120"/>
-              </a:rPr>
-              <a:t>Measure and monitor</a:t>
-            </a:r>
-            <a:endParaRPr lang="en-US" sz="1050" dirty="0"/>
-          </a:p>
-        </p:txBody>
-      </p:sp>
-      <p:sp>
-        <p:nvSpPr>
-          <p:cNvPr id="20" name="Shape 18"/>
           <p:cNvSpPr/>
           <p:nvPr/>
         </p:nvSpPr>
@@ -16124,7 +15015,7 @@
       </p:sp>
       <p:sp>
         <p:nvSpPr>
-          <p:cNvPr id="21" name="Text 19"/>
+          <p:cNvPr id="17" name="Text 15"/>
           <p:cNvSpPr/>
           <p:nvPr/>
         </p:nvSpPr>
@@ -16163,7 +15054,7 @@
       </p:sp>
       <p:sp>
         <p:nvSpPr>
-          <p:cNvPr id="22" name="Text 20"/>
+          <p:cNvPr id="18" name="Text 16"/>
           <p:cNvSpPr/>
           <p:nvPr/>
         </p:nvSpPr>
@@ -16671,13 +15562,11 @@
             </a:avLst>
           </a:prstGeom>
           <a:solidFill>
-            <a:srgbClr val="FFFFFF">
-              <a:alpha val="88000"/>
-            </a:srgbClr>
+            <a:srgbClr val="FFFFFF"/>
           </a:solidFill>
           <a:ln w="12700">
             <a:solidFill>
-              <a:srgbClr val="D6E8F2"/>
+              <a:srgbClr val="B9D7E6"/>
             </a:solidFill>
             <a:prstDash val="solid"/>
           </a:ln>
@@ -16685,169 +15574,112 @@
       </p:sp>
       <p:sp>
         <p:nvSpPr>
-          <p:cNvPr id="14" name="Shape 12"/>
-          <p:cNvSpPr/>
-          <p:nvPr/>
-        </p:nvSpPr>
-        <p:spPr>
-          <a:xfrm>
-            <a:off x="8138160" y="3474720"/>
-            <a:ext cx="256032" cy="411480"/>
-          </a:xfrm>
-          <a:prstGeom prst="rect">
-            <a:avLst/>
-          </a:prstGeom>
-          <a:solidFill>
-            <a:srgbClr val="0068B7"/>
-          </a:solidFill>
-          <a:ln w="12700">
-            <a:solidFill>
-              <a:srgbClr val="0068B7"/>
-            </a:solidFill>
-            <a:prstDash val="solid"/>
-          </a:ln>
-        </p:spPr>
-      </p:sp>
-      <p:sp>
-        <p:nvSpPr>
-          <p:cNvPr id="15" name="Shape 13"/>
-          <p:cNvSpPr/>
-          <p:nvPr/>
-        </p:nvSpPr>
-        <p:spPr>
-          <a:xfrm>
-            <a:off x="8577072" y="3172968"/>
-            <a:ext cx="256032" cy="713232"/>
-          </a:xfrm>
-          <a:prstGeom prst="rect">
-            <a:avLst/>
-          </a:prstGeom>
-          <a:solidFill>
-            <a:srgbClr val="2F8A28"/>
-          </a:solidFill>
-          <a:ln w="12700">
-            <a:solidFill>
-              <a:srgbClr val="2F8A28"/>
-            </a:solidFill>
-            <a:prstDash val="solid"/>
-          </a:ln>
-        </p:spPr>
+          <p:cNvPr id="14" name="Text 12"/>
+          <p:cNvSpPr/>
+          <p:nvPr/>
+        </p:nvSpPr>
+        <p:spPr>
+          <a:xfrm>
+            <a:off x="7799832" y="2935224"/>
+            <a:ext cx="3145536" cy="256032"/>
+          </a:xfrm>
+          <a:prstGeom prst="rect">
+            <a:avLst/>
+          </a:prstGeom>
+          <a:noFill/>
+          <a:ln/>
+        </p:spPr>
+        <p:txBody>
+          <a:bodyPr wrap="square" lIns="0" tIns="0" rIns="0" bIns="0" rtlCol="0" anchor="ctr"/>
+          <a:lstStyle/>
+          <a:p>
+            <a:pPr indent="0" marL="0">
+              <a:buNone/>
+            </a:pPr>
+            <a:r>
+              <a:rPr lang="en-US" sz="1300" b="1" dirty="0">
+                <a:solidFill>
+                  <a:srgbClr val="0068B7"/>
+                </a:solidFill>
+                <a:latin typeface="Aptos" pitchFamily="34" charset="0"/>
+                <a:ea typeface="Aptos" pitchFamily="34" charset="-122"/>
+                <a:cs typeface="Aptos" pitchFamily="34" charset="-120"/>
+              </a:rPr>
+              <a:t>Concept checkpoints</a:t>
+            </a:r>
+            <a:endParaRPr lang="en-US" sz="1300" dirty="0"/>
+          </a:p>
+        </p:txBody>
+      </p:sp>
+      <p:sp>
+        <p:nvSpPr>
+          <p:cNvPr id="15" name="Text 13"/>
+          <p:cNvSpPr/>
+          <p:nvPr/>
+        </p:nvSpPr>
+        <p:spPr>
+          <a:xfrm>
+            <a:off x="7818120" y="3300984"/>
+            <a:ext cx="3090672" cy="877824"/>
+          </a:xfrm>
+          <a:prstGeom prst="rect">
+            <a:avLst/>
+          </a:prstGeom>
+          <a:noFill/>
+          <a:ln/>
+        </p:spPr>
+        <p:txBody>
+          <a:bodyPr wrap="square" lIns="254" tIns="254" rIns="254" bIns="254" rtlCol="0" anchor="t">
+            <a:normAutofit/>
+          </a:bodyPr>
+          <a:lstStyle/>
+          <a:p>
+            <a:r>
+              <a:rPr lang="en-US" sz="1380" dirty="0">
+                <a:solidFill>
+                  <a:srgbClr val="17364A"/>
+                </a:solidFill>
+                <a:latin typeface="Aptos" pitchFamily="34" charset="0"/>
+                <a:ea typeface="Aptos" pitchFamily="34" charset="-122"/>
+                <a:cs typeface="Aptos" pitchFamily="34" charset="-120"/>
+              </a:rPr>
+              <a:t>A risk score may look objective even when the data underrepresent communities with limited.</a:t>
+            </a:r>
+            <a:endParaRPr lang="en-US" sz="1380" dirty="0"/>
+          </a:p>
+          <a:p>
+            <a:r>
+              <a:rPr lang="en-US" sz="1380" dirty="0">
+                <a:solidFill>
+                  <a:srgbClr val="17364A"/>
+                </a:solidFill>
+                <a:latin typeface="Aptos" pitchFamily="34" charset="0"/>
+                <a:ea typeface="Aptos" pitchFamily="34" charset="-122"/>
+                <a:cs typeface="Aptos" pitchFamily="34" charset="-120"/>
+              </a:rPr>
+              <a:t>A classification model may appear efficient while encoding historical reporting patterns.</a:t>
+            </a:r>
+            <a:endParaRPr lang="en-US" sz="1380" dirty="0"/>
+          </a:p>
+          <a:p>
+            <a:r>
+              <a:rPr lang="en-US" sz="1380" dirty="0">
+                <a:solidFill>
+                  <a:srgbClr val="17364A"/>
+                </a:solidFill>
+                <a:latin typeface="Aptos" pitchFamily="34" charset="0"/>
+                <a:ea typeface="Aptos" pitchFamily="34" charset="-122"/>
+                <a:cs typeface="Aptos" pitchFamily="34" charset="-120"/>
+              </a:rPr>
+              <a:t>Data quality engineering helps agencies identify these problems before they become.</a:t>
+            </a:r>
+            <a:endParaRPr lang="en-US" sz="1380" dirty="0"/>
+          </a:p>
+        </p:txBody>
       </p:sp>
       <p:sp>
         <p:nvSpPr>
           <p:cNvPr id="16" name="Shape 14"/>
-          <p:cNvSpPr/>
-          <p:nvPr/>
-        </p:nvSpPr>
-        <p:spPr>
-          <a:xfrm>
-            <a:off x="9015984" y="2880360"/>
-            <a:ext cx="256032" cy="1005840"/>
-          </a:xfrm>
-          <a:prstGeom prst="rect">
-            <a:avLst/>
-          </a:prstGeom>
-          <a:solidFill>
-            <a:srgbClr val="D69A2D"/>
-          </a:solidFill>
-          <a:ln w="12700">
-            <a:solidFill>
-              <a:srgbClr val="D69A2D"/>
-            </a:solidFill>
-            <a:prstDash val="solid"/>
-          </a:ln>
-        </p:spPr>
-      </p:sp>
-      <p:sp>
-        <p:nvSpPr>
-          <p:cNvPr id="17" name="Shape 15"/>
-          <p:cNvSpPr/>
-          <p:nvPr/>
-        </p:nvSpPr>
-        <p:spPr>
-          <a:xfrm>
-            <a:off x="9454896" y="3319272"/>
-            <a:ext cx="256032" cy="566928"/>
-          </a:xfrm>
-          <a:prstGeom prst="rect">
-            <a:avLst/>
-          </a:prstGeom>
-          <a:solidFill>
-            <a:srgbClr val="6A4CA3"/>
-          </a:solidFill>
-          <a:ln w="12700">
-            <a:solidFill>
-              <a:srgbClr val="6A4CA3"/>
-            </a:solidFill>
-            <a:prstDash val="solid"/>
-          </a:ln>
-        </p:spPr>
-      </p:sp>
-      <p:sp>
-        <p:nvSpPr>
-          <p:cNvPr id="18" name="Shape 16"/>
-          <p:cNvSpPr/>
-          <p:nvPr/>
-        </p:nvSpPr>
-        <p:spPr>
-          <a:xfrm>
-            <a:off x="8019288" y="3886200"/>
-            <a:ext cx="2706624" cy="0"/>
-          </a:xfrm>
-          <a:prstGeom prst="line">
-            <a:avLst/>
-          </a:prstGeom>
-          <a:noFill/>
-          <a:ln w="15240">
-            <a:solidFill>
-              <a:srgbClr val="003A63"/>
-            </a:solidFill>
-            <a:prstDash val="solid"/>
-          </a:ln>
-        </p:spPr>
-      </p:sp>
-      <p:sp>
-        <p:nvSpPr>
-          <p:cNvPr id="19" name="Text 17"/>
-          <p:cNvSpPr/>
-          <p:nvPr/>
-        </p:nvSpPr>
-        <p:spPr>
-          <a:xfrm>
-            <a:off x="7863840" y="3017520"/>
-            <a:ext cx="3017520" cy="201168"/>
-          </a:xfrm>
-          <a:prstGeom prst="rect">
-            <a:avLst/>
-          </a:prstGeom>
-          <a:noFill/>
-          <a:ln/>
-        </p:spPr>
-        <p:txBody>
-          <a:bodyPr wrap="square" lIns="0" tIns="0" rIns="0" bIns="0" rtlCol="0" anchor="ctr"/>
-          <a:lstStyle/>
-          <a:p>
-            <a:pPr algn="ctr" indent="0" marL="0">
-              <a:buNone/>
-            </a:pPr>
-            <a:r>
-              <a:rPr lang="en-US" sz="1050" b="1" dirty="0">
-                <a:solidFill>
-                  <a:srgbClr val="003A63"/>
-                </a:solidFill>
-                <a:latin typeface="Aptos" pitchFamily="34" charset="0"/>
-                <a:ea typeface="Aptos" pitchFamily="34" charset="-122"/>
-                <a:cs typeface="Aptos" pitchFamily="34" charset="-120"/>
-              </a:rPr>
-              <a:t>Measure and monitor</a:t>
-            </a:r>
-            <a:endParaRPr lang="en-US" sz="1050" dirty="0"/>
-          </a:p>
-        </p:txBody>
-      </p:sp>
-      <p:sp>
-        <p:nvSpPr>
-          <p:cNvPr id="20" name="Shape 18"/>
           <p:cNvSpPr/>
           <p:nvPr/>
         </p:nvSpPr>
@@ -16874,7 +15706,7 @@
       </p:sp>
       <p:sp>
         <p:nvSpPr>
-          <p:cNvPr id="21" name="Text 19"/>
+          <p:cNvPr id="17" name="Text 15"/>
           <p:cNvSpPr/>
           <p:nvPr/>
         </p:nvSpPr>
@@ -16913,7 +15745,7 @@
       </p:sp>
       <p:sp>
         <p:nvSpPr>
-          <p:cNvPr id="22" name="Text 20"/>
+          <p:cNvPr id="18" name="Text 16"/>
           <p:cNvSpPr/>
           <p:nvPr/>
         </p:nvSpPr>
@@ -17421,13 +16253,11 @@
             </a:avLst>
           </a:prstGeom>
           <a:solidFill>
-            <a:srgbClr val="FFFFFF">
-              <a:alpha val="88000"/>
-            </a:srgbClr>
+            <a:srgbClr val="FFFFFF"/>
           </a:solidFill>
           <a:ln w="12700">
             <a:solidFill>
-              <a:srgbClr val="D6E8F2"/>
+              <a:srgbClr val="B9D7E6"/>
             </a:solidFill>
             <a:prstDash val="solid"/>
           </a:ln>
@@ -17435,169 +16265,112 @@
       </p:sp>
       <p:sp>
         <p:nvSpPr>
-          <p:cNvPr id="14" name="Shape 12"/>
-          <p:cNvSpPr/>
-          <p:nvPr/>
-        </p:nvSpPr>
-        <p:spPr>
-          <a:xfrm>
-            <a:off x="8138160" y="3474720"/>
-            <a:ext cx="256032" cy="411480"/>
-          </a:xfrm>
-          <a:prstGeom prst="rect">
-            <a:avLst/>
-          </a:prstGeom>
-          <a:solidFill>
-            <a:srgbClr val="0068B7"/>
-          </a:solidFill>
-          <a:ln w="12700">
-            <a:solidFill>
-              <a:srgbClr val="0068B7"/>
-            </a:solidFill>
-            <a:prstDash val="solid"/>
-          </a:ln>
-        </p:spPr>
-      </p:sp>
-      <p:sp>
-        <p:nvSpPr>
-          <p:cNvPr id="15" name="Shape 13"/>
-          <p:cNvSpPr/>
-          <p:nvPr/>
-        </p:nvSpPr>
-        <p:spPr>
-          <a:xfrm>
-            <a:off x="8577072" y="3172968"/>
-            <a:ext cx="256032" cy="713232"/>
-          </a:xfrm>
-          <a:prstGeom prst="rect">
-            <a:avLst/>
-          </a:prstGeom>
-          <a:solidFill>
-            <a:srgbClr val="2F8A28"/>
-          </a:solidFill>
-          <a:ln w="12700">
-            <a:solidFill>
-              <a:srgbClr val="2F8A28"/>
-            </a:solidFill>
-            <a:prstDash val="solid"/>
-          </a:ln>
-        </p:spPr>
+          <p:cNvPr id="14" name="Text 12"/>
+          <p:cNvSpPr/>
+          <p:nvPr/>
+        </p:nvSpPr>
+        <p:spPr>
+          <a:xfrm>
+            <a:off x="7799832" y="2935224"/>
+            <a:ext cx="3145536" cy="256032"/>
+          </a:xfrm>
+          <a:prstGeom prst="rect">
+            <a:avLst/>
+          </a:prstGeom>
+          <a:noFill/>
+          <a:ln/>
+        </p:spPr>
+        <p:txBody>
+          <a:bodyPr wrap="square" lIns="0" tIns="0" rIns="0" bIns="0" rtlCol="0" anchor="ctr"/>
+          <a:lstStyle/>
+          <a:p>
+            <a:pPr indent="0" marL="0">
+              <a:buNone/>
+            </a:pPr>
+            <a:r>
+              <a:rPr lang="en-US" sz="1300" b="1" dirty="0">
+                <a:solidFill>
+                  <a:srgbClr val="0068B7"/>
+                </a:solidFill>
+                <a:latin typeface="Aptos" pitchFamily="34" charset="0"/>
+                <a:ea typeface="Aptos" pitchFamily="34" charset="-122"/>
+                <a:cs typeface="Aptos" pitchFamily="34" charset="-120"/>
+              </a:rPr>
+              <a:t>Concept checkpoints</a:t>
+            </a:r>
+            <a:endParaRPr lang="en-US" sz="1300" dirty="0"/>
+          </a:p>
+        </p:txBody>
+      </p:sp>
+      <p:sp>
+        <p:nvSpPr>
+          <p:cNvPr id="15" name="Text 13"/>
+          <p:cNvSpPr/>
+          <p:nvPr/>
+        </p:nvSpPr>
+        <p:spPr>
+          <a:xfrm>
+            <a:off x="7818120" y="3300984"/>
+            <a:ext cx="3090672" cy="877824"/>
+          </a:xfrm>
+          <a:prstGeom prst="rect">
+            <a:avLst/>
+          </a:prstGeom>
+          <a:noFill/>
+          <a:ln/>
+        </p:spPr>
+        <p:txBody>
+          <a:bodyPr wrap="square" lIns="254" tIns="254" rIns="254" bIns="254" rtlCol="0" anchor="t">
+            <a:normAutofit/>
+          </a:bodyPr>
+          <a:lstStyle/>
+          <a:p>
+            <a:r>
+              <a:rPr lang="en-US" sz="1380" dirty="0">
+                <a:solidFill>
+                  <a:srgbClr val="17364A"/>
+                </a:solidFill>
+                <a:latin typeface="Aptos" pitchFamily="34" charset="0"/>
+                <a:ea typeface="Aptos" pitchFamily="34" charset="-122"/>
+                <a:cs typeface="Aptos" pitchFamily="34" charset="-120"/>
+              </a:rPr>
+              <a:t>Timeliness.</a:t>
+            </a:r>
+            <a:endParaRPr lang="en-US" sz="1380" dirty="0"/>
+          </a:p>
+          <a:p>
+            <a:r>
+              <a:rPr lang="en-US" sz="1380" dirty="0">
+                <a:solidFill>
+                  <a:srgbClr val="17364A"/>
+                </a:solidFill>
+                <a:latin typeface="Aptos" pitchFamily="34" charset="0"/>
+                <a:ea typeface="Aptos" pitchFamily="34" charset="-122"/>
+                <a:cs typeface="Aptos" pitchFamily="34" charset="-120"/>
+              </a:rPr>
+              <a:t>Timeliness refers to whether data are available quickly enough for the intended use.</a:t>
+            </a:r>
+            <a:endParaRPr lang="en-US" sz="1380" dirty="0"/>
+          </a:p>
+          <a:p>
+            <a:r>
+              <a:rPr lang="en-US" sz="1380" dirty="0">
+                <a:solidFill>
+                  <a:srgbClr val="17364A"/>
+                </a:solidFill>
+                <a:latin typeface="Aptos" pitchFamily="34" charset="0"/>
+                <a:ea typeface="Aptos" pitchFamily="34" charset="-122"/>
+                <a:cs typeface="Aptos" pitchFamily="34" charset="-120"/>
+              </a:rPr>
+              <a:t>Delayed data may be acceptable for retrospective analysis but unsafe for urgent response.</a:t>
+            </a:r>
+            <a:endParaRPr lang="en-US" sz="1380" dirty="0"/>
+          </a:p>
+        </p:txBody>
       </p:sp>
       <p:sp>
         <p:nvSpPr>
           <p:cNvPr id="16" name="Shape 14"/>
-          <p:cNvSpPr/>
-          <p:nvPr/>
-        </p:nvSpPr>
-        <p:spPr>
-          <a:xfrm>
-            <a:off x="9015984" y="2880360"/>
-            <a:ext cx="256032" cy="1005840"/>
-          </a:xfrm>
-          <a:prstGeom prst="rect">
-            <a:avLst/>
-          </a:prstGeom>
-          <a:solidFill>
-            <a:srgbClr val="D69A2D"/>
-          </a:solidFill>
-          <a:ln w="12700">
-            <a:solidFill>
-              <a:srgbClr val="D69A2D"/>
-            </a:solidFill>
-            <a:prstDash val="solid"/>
-          </a:ln>
-        </p:spPr>
-      </p:sp>
-      <p:sp>
-        <p:nvSpPr>
-          <p:cNvPr id="17" name="Shape 15"/>
-          <p:cNvSpPr/>
-          <p:nvPr/>
-        </p:nvSpPr>
-        <p:spPr>
-          <a:xfrm>
-            <a:off x="9454896" y="3319272"/>
-            <a:ext cx="256032" cy="566928"/>
-          </a:xfrm>
-          <a:prstGeom prst="rect">
-            <a:avLst/>
-          </a:prstGeom>
-          <a:solidFill>
-            <a:srgbClr val="6A4CA3"/>
-          </a:solidFill>
-          <a:ln w="12700">
-            <a:solidFill>
-              <a:srgbClr val="6A4CA3"/>
-            </a:solidFill>
-            <a:prstDash val="solid"/>
-          </a:ln>
-        </p:spPr>
-      </p:sp>
-      <p:sp>
-        <p:nvSpPr>
-          <p:cNvPr id="18" name="Shape 16"/>
-          <p:cNvSpPr/>
-          <p:nvPr/>
-        </p:nvSpPr>
-        <p:spPr>
-          <a:xfrm>
-            <a:off x="8019288" y="3886200"/>
-            <a:ext cx="2706624" cy="0"/>
-          </a:xfrm>
-          <a:prstGeom prst="line">
-            <a:avLst/>
-          </a:prstGeom>
-          <a:noFill/>
-          <a:ln w="15240">
-            <a:solidFill>
-              <a:srgbClr val="003A63"/>
-            </a:solidFill>
-            <a:prstDash val="solid"/>
-          </a:ln>
-        </p:spPr>
-      </p:sp>
-      <p:sp>
-        <p:nvSpPr>
-          <p:cNvPr id="19" name="Text 17"/>
-          <p:cNvSpPr/>
-          <p:nvPr/>
-        </p:nvSpPr>
-        <p:spPr>
-          <a:xfrm>
-            <a:off x="7863840" y="3017520"/>
-            <a:ext cx="3017520" cy="201168"/>
-          </a:xfrm>
-          <a:prstGeom prst="rect">
-            <a:avLst/>
-          </a:prstGeom>
-          <a:noFill/>
-          <a:ln/>
-        </p:spPr>
-        <p:txBody>
-          <a:bodyPr wrap="square" lIns="0" tIns="0" rIns="0" bIns="0" rtlCol="0" anchor="ctr"/>
-          <a:lstStyle/>
-          <a:p>
-            <a:pPr algn="ctr" indent="0" marL="0">
-              <a:buNone/>
-            </a:pPr>
-            <a:r>
-              <a:rPr lang="en-US" sz="1050" b="1" dirty="0">
-                <a:solidFill>
-                  <a:srgbClr val="003A63"/>
-                </a:solidFill>
-                <a:latin typeface="Aptos" pitchFamily="34" charset="0"/>
-                <a:ea typeface="Aptos" pitchFamily="34" charset="-122"/>
-                <a:cs typeface="Aptos" pitchFamily="34" charset="-120"/>
-              </a:rPr>
-              <a:t>Measure and monitor</a:t>
-            </a:r>
-            <a:endParaRPr lang="en-US" sz="1050" dirty="0"/>
-          </a:p>
-        </p:txBody>
-      </p:sp>
-      <p:sp>
-        <p:nvSpPr>
-          <p:cNvPr id="20" name="Shape 18"/>
           <p:cNvSpPr/>
           <p:nvPr/>
         </p:nvSpPr>
@@ -17624,7 +16397,7 @@
       </p:sp>
       <p:sp>
         <p:nvSpPr>
-          <p:cNvPr id="21" name="Text 19"/>
+          <p:cNvPr id="17" name="Text 15"/>
           <p:cNvSpPr/>
           <p:nvPr/>
         </p:nvSpPr>
@@ -17663,7 +16436,7 @@
       </p:sp>
       <p:sp>
         <p:nvSpPr>
-          <p:cNvPr id="22" name="Text 20"/>
+          <p:cNvPr id="18" name="Text 16"/>
           <p:cNvSpPr/>
           <p:nvPr/>
         </p:nvSpPr>
@@ -18171,13 +16944,11 @@
             </a:avLst>
           </a:prstGeom>
           <a:solidFill>
-            <a:srgbClr val="FFFFFF">
-              <a:alpha val="88000"/>
-            </a:srgbClr>
+            <a:srgbClr val="FFFFFF"/>
           </a:solidFill>
           <a:ln w="12700">
             <a:solidFill>
-              <a:srgbClr val="D6E8F2"/>
+              <a:srgbClr val="B9D7E6"/>
             </a:solidFill>
             <a:prstDash val="solid"/>
           </a:ln>
@@ -18185,169 +16956,112 @@
       </p:sp>
       <p:sp>
         <p:nvSpPr>
-          <p:cNvPr id="14" name="Shape 12"/>
-          <p:cNvSpPr/>
-          <p:nvPr/>
-        </p:nvSpPr>
-        <p:spPr>
-          <a:xfrm>
-            <a:off x="8138160" y="3474720"/>
-            <a:ext cx="256032" cy="411480"/>
-          </a:xfrm>
-          <a:prstGeom prst="rect">
-            <a:avLst/>
-          </a:prstGeom>
-          <a:solidFill>
-            <a:srgbClr val="0068B7"/>
-          </a:solidFill>
-          <a:ln w="12700">
-            <a:solidFill>
-              <a:srgbClr val="0068B7"/>
-            </a:solidFill>
-            <a:prstDash val="solid"/>
-          </a:ln>
-        </p:spPr>
-      </p:sp>
-      <p:sp>
-        <p:nvSpPr>
-          <p:cNvPr id="15" name="Shape 13"/>
-          <p:cNvSpPr/>
-          <p:nvPr/>
-        </p:nvSpPr>
-        <p:spPr>
-          <a:xfrm>
-            <a:off x="8577072" y="3172968"/>
-            <a:ext cx="256032" cy="713232"/>
-          </a:xfrm>
-          <a:prstGeom prst="rect">
-            <a:avLst/>
-          </a:prstGeom>
-          <a:solidFill>
-            <a:srgbClr val="2F8A28"/>
-          </a:solidFill>
-          <a:ln w="12700">
-            <a:solidFill>
-              <a:srgbClr val="2F8A28"/>
-            </a:solidFill>
-            <a:prstDash val="solid"/>
-          </a:ln>
-        </p:spPr>
+          <p:cNvPr id="14" name="Text 12"/>
+          <p:cNvSpPr/>
+          <p:nvPr/>
+        </p:nvSpPr>
+        <p:spPr>
+          <a:xfrm>
+            <a:off x="7799832" y="2935224"/>
+            <a:ext cx="3145536" cy="256032"/>
+          </a:xfrm>
+          <a:prstGeom prst="rect">
+            <a:avLst/>
+          </a:prstGeom>
+          <a:noFill/>
+          <a:ln/>
+        </p:spPr>
+        <p:txBody>
+          <a:bodyPr wrap="square" lIns="0" tIns="0" rIns="0" bIns="0" rtlCol="0" anchor="ctr"/>
+          <a:lstStyle/>
+          <a:p>
+            <a:pPr indent="0" marL="0">
+              <a:buNone/>
+            </a:pPr>
+            <a:r>
+              <a:rPr lang="en-US" sz="1300" b="1" dirty="0">
+                <a:solidFill>
+                  <a:srgbClr val="0068B7"/>
+                </a:solidFill>
+                <a:latin typeface="Aptos" pitchFamily="34" charset="0"/>
+                <a:ea typeface="Aptos" pitchFamily="34" charset="-122"/>
+                <a:cs typeface="Aptos" pitchFamily="34" charset="-120"/>
+              </a:rPr>
+              <a:t>Concept checkpoints</a:t>
+            </a:r>
+            <a:endParaRPr lang="en-US" sz="1300" dirty="0"/>
+          </a:p>
+        </p:txBody>
+      </p:sp>
+      <p:sp>
+        <p:nvSpPr>
+          <p:cNvPr id="15" name="Text 13"/>
+          <p:cNvSpPr/>
+          <p:nvPr/>
+        </p:nvSpPr>
+        <p:spPr>
+          <a:xfrm>
+            <a:off x="7818120" y="3300984"/>
+            <a:ext cx="3090672" cy="877824"/>
+          </a:xfrm>
+          <a:prstGeom prst="rect">
+            <a:avLst/>
+          </a:prstGeom>
+          <a:noFill/>
+          <a:ln/>
+        </p:spPr>
+        <p:txBody>
+          <a:bodyPr wrap="square" lIns="254" tIns="254" rIns="254" bIns="254" rtlCol="0" anchor="t">
+            <a:normAutofit/>
+          </a:bodyPr>
+          <a:lstStyle/>
+          <a:p>
+            <a:r>
+              <a:rPr lang="en-US" sz="1380" dirty="0">
+                <a:solidFill>
+                  <a:srgbClr val="17364A"/>
+                </a:solidFill>
+                <a:latin typeface="Aptos" pitchFamily="34" charset="0"/>
+                <a:ea typeface="Aptos" pitchFamily="34" charset="-122"/>
+                <a:cs typeface="Aptos" pitchFamily="34" charset="-120"/>
+              </a:rPr>
+              <a:t>Representativeness refers to whether data reflect the population, events, or settings.</a:t>
+            </a:r>
+            <a:endParaRPr lang="en-US" sz="1380" dirty="0"/>
+          </a:p>
+          <a:p>
+            <a:r>
+              <a:rPr lang="en-US" sz="1380" dirty="0">
+                <a:solidFill>
+                  <a:srgbClr val="17364A"/>
+                </a:solidFill>
+                <a:latin typeface="Aptos" pitchFamily="34" charset="0"/>
+                <a:ea typeface="Aptos" pitchFamily="34" charset="-122"/>
+                <a:cs typeface="Aptos" pitchFamily="34" charset="-120"/>
+              </a:rPr>
+              <a:t>Data drift.</a:t>
+            </a:r>
+            <a:endParaRPr lang="en-US" sz="1380" dirty="0"/>
+          </a:p>
+          <a:p>
+            <a:r>
+              <a:rPr lang="en-US" sz="1380" dirty="0">
+                <a:solidFill>
+                  <a:srgbClr val="17364A"/>
+                </a:solidFill>
+                <a:latin typeface="Aptos" pitchFamily="34" charset="0"/>
+                <a:ea typeface="Aptos" pitchFamily="34" charset="-122"/>
+                <a:cs typeface="Aptos" pitchFamily="34" charset="-120"/>
+              </a:rPr>
+              <a:t>Data drift is a change in data patterns over time.</a:t>
+            </a:r>
+            <a:endParaRPr lang="en-US" sz="1380" dirty="0"/>
+          </a:p>
+        </p:txBody>
       </p:sp>
       <p:sp>
         <p:nvSpPr>
           <p:cNvPr id="16" name="Shape 14"/>
-          <p:cNvSpPr/>
-          <p:nvPr/>
-        </p:nvSpPr>
-        <p:spPr>
-          <a:xfrm>
-            <a:off x="9015984" y="2880360"/>
-            <a:ext cx="256032" cy="1005840"/>
-          </a:xfrm>
-          <a:prstGeom prst="rect">
-            <a:avLst/>
-          </a:prstGeom>
-          <a:solidFill>
-            <a:srgbClr val="D69A2D"/>
-          </a:solidFill>
-          <a:ln w="12700">
-            <a:solidFill>
-              <a:srgbClr val="D69A2D"/>
-            </a:solidFill>
-            <a:prstDash val="solid"/>
-          </a:ln>
-        </p:spPr>
-      </p:sp>
-      <p:sp>
-        <p:nvSpPr>
-          <p:cNvPr id="17" name="Shape 15"/>
-          <p:cNvSpPr/>
-          <p:nvPr/>
-        </p:nvSpPr>
-        <p:spPr>
-          <a:xfrm>
-            <a:off x="9454896" y="3319272"/>
-            <a:ext cx="256032" cy="566928"/>
-          </a:xfrm>
-          <a:prstGeom prst="rect">
-            <a:avLst/>
-          </a:prstGeom>
-          <a:solidFill>
-            <a:srgbClr val="6A4CA3"/>
-          </a:solidFill>
-          <a:ln w="12700">
-            <a:solidFill>
-              <a:srgbClr val="6A4CA3"/>
-            </a:solidFill>
-            <a:prstDash val="solid"/>
-          </a:ln>
-        </p:spPr>
-      </p:sp>
-      <p:sp>
-        <p:nvSpPr>
-          <p:cNvPr id="18" name="Shape 16"/>
-          <p:cNvSpPr/>
-          <p:nvPr/>
-        </p:nvSpPr>
-        <p:spPr>
-          <a:xfrm>
-            <a:off x="8019288" y="3886200"/>
-            <a:ext cx="2706624" cy="0"/>
-          </a:xfrm>
-          <a:prstGeom prst="line">
-            <a:avLst/>
-          </a:prstGeom>
-          <a:noFill/>
-          <a:ln w="15240">
-            <a:solidFill>
-              <a:srgbClr val="003A63"/>
-            </a:solidFill>
-            <a:prstDash val="solid"/>
-          </a:ln>
-        </p:spPr>
-      </p:sp>
-      <p:sp>
-        <p:nvSpPr>
-          <p:cNvPr id="19" name="Text 17"/>
-          <p:cNvSpPr/>
-          <p:nvPr/>
-        </p:nvSpPr>
-        <p:spPr>
-          <a:xfrm>
-            <a:off x="7863840" y="3017520"/>
-            <a:ext cx="3017520" cy="201168"/>
-          </a:xfrm>
-          <a:prstGeom prst="rect">
-            <a:avLst/>
-          </a:prstGeom>
-          <a:noFill/>
-          <a:ln/>
-        </p:spPr>
-        <p:txBody>
-          <a:bodyPr wrap="square" lIns="0" tIns="0" rIns="0" bIns="0" rtlCol="0" anchor="ctr"/>
-          <a:lstStyle/>
-          <a:p>
-            <a:pPr algn="ctr" indent="0" marL="0">
-              <a:buNone/>
-            </a:pPr>
-            <a:r>
-              <a:rPr lang="en-US" sz="1050" b="1" dirty="0">
-                <a:solidFill>
-                  <a:srgbClr val="003A63"/>
-                </a:solidFill>
-                <a:latin typeface="Aptos" pitchFamily="34" charset="0"/>
-                <a:ea typeface="Aptos" pitchFamily="34" charset="-122"/>
-                <a:cs typeface="Aptos" pitchFamily="34" charset="-120"/>
-              </a:rPr>
-              <a:t>Measure and monitor</a:t>
-            </a:r>
-            <a:endParaRPr lang="en-US" sz="1050" dirty="0"/>
-          </a:p>
-        </p:txBody>
-      </p:sp>
-      <p:sp>
-        <p:nvSpPr>
-          <p:cNvPr id="20" name="Shape 18"/>
           <p:cNvSpPr/>
           <p:nvPr/>
         </p:nvSpPr>
@@ -18374,7 +17088,7 @@
       </p:sp>
       <p:sp>
         <p:nvSpPr>
-          <p:cNvPr id="21" name="Text 19"/>
+          <p:cNvPr id="17" name="Text 15"/>
           <p:cNvSpPr/>
           <p:nvPr/>
         </p:nvSpPr>
@@ -18413,7 +17127,7 @@
       </p:sp>
       <p:sp>
         <p:nvSpPr>
-          <p:cNvPr id="22" name="Text 20"/>
+          <p:cNvPr id="18" name="Text 16"/>
           <p:cNvSpPr/>
           <p:nvPr/>
         </p:nvSpPr>

--- a/downloads/presentations/modules/ops-200.pptx
+++ b/downloads/presentations/modules/ops-200.pptx
@@ -3351,49 +3351,58 @@
           <a:ln/>
         </p:spPr>
         <p:txBody>
-          <a:bodyPr wrap="square" lIns="635" tIns="635" rIns="635" bIns="635" rtlCol="0" anchor="t">
+          <a:bodyPr wrap="square" lIns="1016" tIns="1016" rIns="1016" bIns="1016" rtlCol="0" anchor="t">
             <a:normAutofit/>
           </a:bodyPr>
           <a:lstStyle/>
           <a:p>
+            <a:pPr indent="0" marL="0">
+              <a:buNone/>
+            </a:pPr>
             <a:r>
               <a:rPr lang="en-US" sz="2100" dirty="0">
                 <a:solidFill>
-                  <a:srgbClr val="17364A"/>
-                </a:solidFill>
-                <a:latin typeface="Aptos" pitchFamily="34" charset="0"/>
-                <a:ea typeface="Aptos" pitchFamily="34" charset="-122"/>
-                <a:cs typeface="Aptos" pitchFamily="34" charset="-120"/>
-              </a:rPr>
-              <a:t>A health department may use AI to identify cases needing rapid follow-up.</a:t>
+                  <a:srgbClr val="003A63"/>
+                </a:solidFill>
+                <a:latin typeface="Aptos" pitchFamily="34" charset="0"/>
+                <a:ea typeface="Aptos" pitchFamily="34" charset="-122"/>
+                <a:cs typeface="Aptos" pitchFamily="34" charset="-120"/>
+              </a:rPr>
+              <a:t>• A health department may use AI to identify cases needing rapid follow-up.</a:t>
             </a:r>
             <a:endParaRPr lang="en-US" sz="2100" dirty="0"/>
           </a:p>
           <a:p>
+            <a:pPr indent="0" marL="0">
+              <a:buNone/>
+            </a:pPr>
             <a:r>
               <a:rPr lang="en-US" sz="2100" dirty="0">
                 <a:solidFill>
-                  <a:srgbClr val="17364A"/>
-                </a:solidFill>
-                <a:latin typeface="Aptos" pitchFamily="34" charset="0"/>
-                <a:ea typeface="Aptos" pitchFamily="34" charset="-122"/>
-                <a:cs typeface="Aptos" pitchFamily="34" charset="-120"/>
-              </a:rPr>
-              <a:t>If demographic fields are missing more often for some populations, the model may be less reliable for.</a:t>
+                  <a:srgbClr val="003A63"/>
+                </a:solidFill>
+                <a:latin typeface="Aptos" pitchFamily="34" charset="0"/>
+                <a:ea typeface="Aptos" pitchFamily="34" charset="-122"/>
+                <a:cs typeface="Aptos" pitchFamily="34" charset="-120"/>
+              </a:rPr>
+              <a:t>• If demographic fields are missing more often for some populations, the model may be less.</a:t>
             </a:r>
             <a:endParaRPr lang="en-US" sz="2100" dirty="0"/>
           </a:p>
           <a:p>
+            <a:pPr indent="0" marL="0">
+              <a:buNone/>
+            </a:pPr>
             <a:r>
               <a:rPr lang="en-US" sz="2100" dirty="0">
                 <a:solidFill>
-                  <a:srgbClr val="17364A"/>
-                </a:solidFill>
-                <a:latin typeface="Aptos" pitchFamily="34" charset="0"/>
-                <a:ea typeface="Aptos" pitchFamily="34" charset="-122"/>
-                <a:cs typeface="Aptos" pitchFamily="34" charset="-120"/>
-              </a:rPr>
-              <a:t>If the data feed from certain clinics is delayed, the prioritization queue may reflect reporting.</a:t>
+                  <a:srgbClr val="003A63"/>
+                </a:solidFill>
+                <a:latin typeface="Aptos" pitchFamily="34" charset="0"/>
+                <a:ea typeface="Aptos" pitchFamily="34" charset="-122"/>
+                <a:cs typeface="Aptos" pitchFamily="34" charset="-120"/>
+              </a:rPr>
+              <a:t>• If the data feed from certain clinics is delayed, the prioritization queue may reflect.</a:t>
             </a:r>
             <a:endParaRPr lang="en-US" sz="2100" dirty="0"/>
           </a:p>
@@ -3473,17 +3482,17 @@
         </p:nvSpPr>
         <p:spPr>
           <a:xfrm>
-            <a:off x="7799832" y="1828800"/>
-            <a:ext cx="3145536" cy="685800"/>
-          </a:xfrm>
-          <a:prstGeom prst="rect">
-            <a:avLst/>
-          </a:prstGeom>
-          <a:noFill/>
-          <a:ln/>
-        </p:spPr>
-        <p:txBody>
-          <a:bodyPr wrap="square" lIns="0" tIns="0" rIns="0" bIns="0" rtlCol="0" anchor="t">
+            <a:off x="7799832" y="1801368"/>
+            <a:ext cx="3145536" cy="758952"/>
+          </a:xfrm>
+          <a:prstGeom prst="rect">
+            <a:avLst/>
+          </a:prstGeom>
+          <a:noFill/>
+          <a:ln/>
+        </p:spPr>
+        <p:txBody>
+          <a:bodyPr wrap="square" lIns="254" tIns="254" rIns="254" bIns="254" rtlCol="0" anchor="t">
             <a:normAutofit/>
           </a:bodyPr>
           <a:lstStyle/>
@@ -3492,7 +3501,7 @@
               <a:buNone/>
             </a:pPr>
             <a:r>
-              <a:rPr lang="en-US" sz="1550" dirty="0">
+              <a:rPr lang="en-US" sz="1320" dirty="0">
                 <a:solidFill>
                   <a:srgbClr val="17364A"/>
                 </a:solidFill>
@@ -3502,7 +3511,7 @@
               </a:rPr>
               <a:t>A health department may use AI to identify cases needing rapid follow-up.</a:t>
             </a:r>
-            <a:endParaRPr lang="en-US" sz="1550" dirty="0"/>
+            <a:endParaRPr lang="en-US" sz="1320" dirty="0"/>
           </a:p>
         </p:txBody>
       </p:sp>
@@ -3590,13 +3599,16 @@
           <a:ln/>
         </p:spPr>
         <p:txBody>
-          <a:bodyPr wrap="square" lIns="254" tIns="254" rIns="254" bIns="254" rtlCol="0" anchor="t">
+          <a:bodyPr wrap="square" lIns="508" tIns="508" rIns="508" bIns="508" rtlCol="0" anchor="t">
             <a:normAutofit/>
           </a:bodyPr>
           <a:lstStyle/>
           <a:p>
-            <a:r>
-              <a:rPr lang="en-US" sz="1380" dirty="0">
+            <a:pPr indent="0" marL="0">
+              <a:buNone/>
+            </a:pPr>
+            <a:r>
+              <a:rPr lang="en-US" sz="1220" dirty="0">
                 <a:solidFill>
                   <a:srgbClr val="17364A"/>
                 </a:solidFill>
@@ -3604,13 +3616,16 @@
                 <a:ea typeface="Aptos" pitchFamily="34" charset="-122"/>
                 <a:cs typeface="Aptos" pitchFamily="34" charset="-120"/>
               </a:rPr>
-              <a:t>If demographic fields are missing more often for some populations, the model may be less.</a:t>
-            </a:r>
-            <a:endParaRPr lang="en-US" sz="1380" dirty="0"/>
-          </a:p>
-          <a:p>
-            <a:r>
-              <a:rPr lang="en-US" sz="1380" dirty="0">
+              <a:t>If demographic fields are missing more often for some populations,.</a:t>
+            </a:r>
+            <a:endParaRPr lang="en-US" sz="1220" dirty="0"/>
+          </a:p>
+          <a:p>
+            <a:pPr indent="0" marL="0">
+              <a:buNone/>
+            </a:pPr>
+            <a:r>
+              <a:rPr lang="en-US" sz="1220" dirty="0">
                 <a:solidFill>
                   <a:srgbClr val="17364A"/>
                 </a:solidFill>
@@ -3618,13 +3633,16 @@
                 <a:ea typeface="Aptos" pitchFamily="34" charset="-122"/>
                 <a:cs typeface="Aptos" pitchFamily="34" charset="-120"/>
               </a:rPr>
-              <a:t>If the data feed from certain clinics is delayed, the prioritization queue may reflect.</a:t>
-            </a:r>
-            <a:endParaRPr lang="en-US" sz="1380" dirty="0"/>
-          </a:p>
-          <a:p>
-            <a:r>
-              <a:rPr lang="en-US" sz="1380" dirty="0">
+              <a:t>If the data feed from certain clinics is delayed, the.</a:t>
+            </a:r>
+            <a:endParaRPr lang="en-US" sz="1220" dirty="0"/>
+          </a:p>
+          <a:p>
+            <a:pPr indent="0" marL="0">
+              <a:buNone/>
+            </a:pPr>
+            <a:r>
+              <a:rPr lang="en-US" sz="1220" dirty="0">
                 <a:solidFill>
                   <a:srgbClr val="17364A"/>
                 </a:solidFill>
@@ -3632,9 +3650,9 @@
                 <a:ea typeface="Aptos" pitchFamily="34" charset="-122"/>
                 <a:cs typeface="Aptos" pitchFamily="34" charset="-120"/>
               </a:rPr>
-              <a:t>A data quality review can reveal these issues before the tool is deployed.</a:t>
-            </a:r>
-            <a:endParaRPr lang="en-US" sz="1380" dirty="0"/>
+              <a:t>A data quality review can reveal these issues before the tool is.</a:t>
+            </a:r>
+            <a:endParaRPr lang="en-US" sz="1220" dirty="0"/>
           </a:p>
         </p:txBody>
       </p:sp>
@@ -3712,17 +3730,17 @@
         </p:nvSpPr>
         <p:spPr>
           <a:xfrm>
-            <a:off x="7799832" y="5001768"/>
-            <a:ext cx="3145536" cy="502920"/>
-          </a:xfrm>
-          <a:prstGeom prst="rect">
-            <a:avLst/>
-          </a:prstGeom>
-          <a:noFill/>
-          <a:ln/>
-        </p:spPr>
-        <p:txBody>
-          <a:bodyPr wrap="square" lIns="0" tIns="0" rIns="0" bIns="0" rtlCol="0" anchor="t">
+            <a:off x="7799832" y="4974336"/>
+            <a:ext cx="3145536" cy="576072"/>
+          </a:xfrm>
+          <a:prstGeom prst="rect">
+            <a:avLst/>
+          </a:prstGeom>
+          <a:noFill/>
+          <a:ln/>
+        </p:spPr>
+        <p:txBody>
+          <a:bodyPr wrap="square" lIns="254" tIns="254" rIns="254" bIns="254" rtlCol="0" anchor="t">
             <a:normAutofit/>
           </a:bodyPr>
           <a:lstStyle/>
@@ -3731,7 +3749,7 @@
               <a:buNone/>
             </a:pPr>
             <a:r>
-              <a:rPr lang="en-US" sz="1550" dirty="0">
+              <a:rPr lang="en-US" sz="1320" dirty="0">
                 <a:solidFill>
                   <a:srgbClr val="17364A"/>
                 </a:solidFill>
@@ -3739,9 +3757,9 @@
                 <a:ea typeface="Aptos" pitchFamily="34" charset="-122"/>
                 <a:cs typeface="Aptos" pitchFamily="34" charset="-120"/>
               </a:rPr>
-              <a:t>Connect the concept to data quality, model performance, validation evidence, monitoring measures, and decisions that remain under human control.</a:t>
-            </a:r>
-            <a:endParaRPr lang="en-US" sz="1550" dirty="0"/>
+              <a:t>Connect the concept to data quality, model performance, validation evidence, monitoring measures, and decisions that.</a:t>
+            </a:r>
+            <a:endParaRPr lang="en-US" sz="1320" dirty="0"/>
           </a:p>
         </p:txBody>
       </p:sp>
@@ -4042,49 +4060,58 @@
           <a:ln/>
         </p:spPr>
         <p:txBody>
-          <a:bodyPr wrap="square" lIns="635" tIns="635" rIns="635" bIns="635" rtlCol="0" anchor="t">
+          <a:bodyPr wrap="square" lIns="1016" tIns="1016" rIns="1016" bIns="1016" rtlCol="0" anchor="t">
             <a:normAutofit/>
           </a:bodyPr>
           <a:lstStyle/>
           <a:p>
+            <a:pPr indent="0" marL="0">
+              <a:buNone/>
+            </a:pPr>
             <a:r>
               <a:rPr lang="en-US" sz="2100" dirty="0">
                 <a:solidFill>
-                  <a:srgbClr val="17364A"/>
-                </a:solidFill>
-                <a:latin typeface="Aptos" pitchFamily="34" charset="0"/>
-                <a:ea typeface="Aptos" pitchFamily="34" charset="-122"/>
-                <a:cs typeface="Aptos" pitchFamily="34" charset="-120"/>
-              </a:rPr>
-              <a:t>Data quality engineering begins by defining required fields and acceptable thresholds for the intended.</a:t>
+                  <a:srgbClr val="003A63"/>
+                </a:solidFill>
+                <a:latin typeface="Aptos" pitchFamily="34" charset="0"/>
+                <a:ea typeface="Aptos" pitchFamily="34" charset="-122"/>
+                <a:cs typeface="Aptos" pitchFamily="34" charset="-120"/>
+              </a:rPr>
+              <a:t>• Data quality engineering begins by defining required fields and acceptable thresholds for the.</a:t>
             </a:r>
             <a:endParaRPr lang="en-US" sz="2100" dirty="0"/>
           </a:p>
           <a:p>
+            <a:pPr indent="0" marL="0">
+              <a:buNone/>
+            </a:pPr>
             <a:r>
               <a:rPr lang="en-US" sz="2100" dirty="0">
                 <a:solidFill>
-                  <a:srgbClr val="17364A"/>
-                </a:solidFill>
-                <a:latin typeface="Aptos" pitchFamily="34" charset="0"/>
-                <a:ea typeface="Aptos" pitchFamily="34" charset="-122"/>
-                <a:cs typeface="Aptos" pitchFamily="34" charset="-120"/>
-              </a:rPr>
-              <a:t>For an AI-supported case triage workflow, required fields may include condition, lab evidence, onset.</a:t>
+                  <a:srgbClr val="003A63"/>
+                </a:solidFill>
+                <a:latin typeface="Aptos" pitchFamily="34" charset="0"/>
+                <a:ea typeface="Aptos" pitchFamily="34" charset="-122"/>
+                <a:cs typeface="Aptos" pitchFamily="34" charset="-120"/>
+              </a:rPr>
+              <a:t>• For an AI-supported case triage workflow, required fields may include condition, lab evidence,.</a:t>
             </a:r>
             <a:endParaRPr lang="en-US" sz="2100" dirty="0"/>
           </a:p>
           <a:p>
+            <a:pPr indent="0" marL="0">
+              <a:buNone/>
+            </a:pPr>
             <a:r>
               <a:rPr lang="en-US" sz="2100" dirty="0">
                 <a:solidFill>
-                  <a:srgbClr val="17364A"/>
-                </a:solidFill>
-                <a:latin typeface="Aptos" pitchFamily="34" charset="0"/>
-                <a:ea typeface="Aptos" pitchFamily="34" charset="-122"/>
-                <a:cs typeface="Aptos" pitchFamily="34" charset="-120"/>
-              </a:rPr>
-              <a:t>The agency should decide which missing fields stop automated support, which trigger a warning, and.</a:t>
+                  <a:srgbClr val="003A63"/>
+                </a:solidFill>
+                <a:latin typeface="Aptos" pitchFamily="34" charset="0"/>
+                <a:ea typeface="Aptos" pitchFamily="34" charset="-122"/>
+                <a:cs typeface="Aptos" pitchFamily="34" charset="-120"/>
+              </a:rPr>
+              <a:t>• The agency should decide which missing fields stop automated support, which trigger a warning,.</a:t>
             </a:r>
             <a:endParaRPr lang="en-US" sz="2100" dirty="0"/>
           </a:p>
@@ -4164,17 +4191,17 @@
         </p:nvSpPr>
         <p:spPr>
           <a:xfrm>
-            <a:off x="7799832" y="1828800"/>
-            <a:ext cx="3145536" cy="685800"/>
-          </a:xfrm>
-          <a:prstGeom prst="rect">
-            <a:avLst/>
-          </a:prstGeom>
-          <a:noFill/>
-          <a:ln/>
-        </p:spPr>
-        <p:txBody>
-          <a:bodyPr wrap="square" lIns="0" tIns="0" rIns="0" bIns="0" rtlCol="0" anchor="t">
+            <a:off x="7799832" y="1801368"/>
+            <a:ext cx="3145536" cy="758952"/>
+          </a:xfrm>
+          <a:prstGeom prst="rect">
+            <a:avLst/>
+          </a:prstGeom>
+          <a:noFill/>
+          <a:ln/>
+        </p:spPr>
+        <p:txBody>
+          <a:bodyPr wrap="square" lIns="254" tIns="254" rIns="254" bIns="254" rtlCol="0" anchor="t">
             <a:normAutofit/>
           </a:bodyPr>
           <a:lstStyle/>
@@ -4183,7 +4210,7 @@
               <a:buNone/>
             </a:pPr>
             <a:r>
-              <a:rPr lang="en-US" sz="1550" dirty="0">
+              <a:rPr lang="en-US" sz="1320" dirty="0">
                 <a:solidFill>
                   <a:srgbClr val="17364A"/>
                 </a:solidFill>
@@ -4193,7 +4220,7 @@
               </a:rPr>
               <a:t>Data quality engineering begins by defining required fields and acceptable thresholds for the intended.</a:t>
             </a:r>
-            <a:endParaRPr lang="en-US" sz="1550" dirty="0"/>
+            <a:endParaRPr lang="en-US" sz="1320" dirty="0"/>
           </a:p>
         </p:txBody>
       </p:sp>
@@ -4281,13 +4308,16 @@
           <a:ln/>
         </p:spPr>
         <p:txBody>
-          <a:bodyPr wrap="square" lIns="254" tIns="254" rIns="254" bIns="254" rtlCol="0" anchor="t">
+          <a:bodyPr wrap="square" lIns="508" tIns="508" rIns="508" bIns="508" rtlCol="0" anchor="t">
             <a:normAutofit/>
           </a:bodyPr>
           <a:lstStyle/>
           <a:p>
-            <a:r>
-              <a:rPr lang="en-US" sz="1380" dirty="0">
+            <a:pPr indent="0" marL="0">
+              <a:buNone/>
+            </a:pPr>
+            <a:r>
+              <a:rPr lang="en-US" sz="1220" dirty="0">
                 <a:solidFill>
                   <a:srgbClr val="17364A"/>
                 </a:solidFill>
@@ -4295,13 +4325,16 @@
                 <a:ea typeface="Aptos" pitchFamily="34" charset="-122"/>
                 <a:cs typeface="Aptos" pitchFamily="34" charset="-120"/>
               </a:rPr>
-              <a:t>Data quality engineering begins by defining required fields and acceptable thresholds for.</a:t>
-            </a:r>
-            <a:endParaRPr lang="en-US" sz="1380" dirty="0"/>
-          </a:p>
-          <a:p>
-            <a:r>
-              <a:rPr lang="en-US" sz="1380" dirty="0">
+              <a:t>Data quality engineering begins by defining required fields and.</a:t>
+            </a:r>
+            <a:endParaRPr lang="en-US" sz="1220" dirty="0"/>
+          </a:p>
+          <a:p>
+            <a:pPr indent="0" marL="0">
+              <a:buNone/>
+            </a:pPr>
+            <a:r>
+              <a:rPr lang="en-US" sz="1220" dirty="0">
                 <a:solidFill>
                   <a:srgbClr val="17364A"/>
                 </a:solidFill>
@@ -4309,13 +4342,16 @@
                 <a:ea typeface="Aptos" pitchFamily="34" charset="-122"/>
                 <a:cs typeface="Aptos" pitchFamily="34" charset="-120"/>
               </a:rPr>
-              <a:t>For an AI-supported case triage workflow, required fields may include condition, lab.</a:t>
-            </a:r>
-            <a:endParaRPr lang="en-US" sz="1380" dirty="0"/>
-          </a:p>
-          <a:p>
-            <a:r>
-              <a:rPr lang="en-US" sz="1380" dirty="0">
+              <a:t>For an AI-supported case triage workflow, required fields may.</a:t>
+            </a:r>
+            <a:endParaRPr lang="en-US" sz="1220" dirty="0"/>
+          </a:p>
+          <a:p>
+            <a:pPr indent="0" marL="0">
+              <a:buNone/>
+            </a:pPr>
+            <a:r>
+              <a:rPr lang="en-US" sz="1220" dirty="0">
                 <a:solidFill>
                   <a:srgbClr val="17364A"/>
                 </a:solidFill>
@@ -4323,9 +4359,9 @@
                 <a:ea typeface="Aptos" pitchFamily="34" charset="-122"/>
                 <a:cs typeface="Aptos" pitchFamily="34" charset="-120"/>
               </a:rPr>
-              <a:t>The agency should decide which missing fields stop automated support, which trigger a.</a:t>
-            </a:r>
-            <a:endParaRPr lang="en-US" sz="1380" dirty="0"/>
+              <a:t>The agency should decide which missing fields stop automated.</a:t>
+            </a:r>
+            <a:endParaRPr lang="en-US" sz="1220" dirty="0"/>
           </a:p>
         </p:txBody>
       </p:sp>
@@ -4403,17 +4439,17 @@
         </p:nvSpPr>
         <p:spPr>
           <a:xfrm>
-            <a:off x="7799832" y="5001768"/>
-            <a:ext cx="3145536" cy="502920"/>
-          </a:xfrm>
-          <a:prstGeom prst="rect">
-            <a:avLst/>
-          </a:prstGeom>
-          <a:noFill/>
-          <a:ln/>
-        </p:spPr>
-        <p:txBody>
-          <a:bodyPr wrap="square" lIns="0" tIns="0" rIns="0" bIns="0" rtlCol="0" anchor="t">
+            <a:off x="7799832" y="4974336"/>
+            <a:ext cx="3145536" cy="576072"/>
+          </a:xfrm>
+          <a:prstGeom prst="rect">
+            <a:avLst/>
+          </a:prstGeom>
+          <a:noFill/>
+          <a:ln/>
+        </p:spPr>
+        <p:txBody>
+          <a:bodyPr wrap="square" lIns="254" tIns="254" rIns="254" bIns="254" rtlCol="0" anchor="t">
             <a:normAutofit/>
           </a:bodyPr>
           <a:lstStyle/>
@@ -4422,7 +4458,7 @@
               <a:buNone/>
             </a:pPr>
             <a:r>
-              <a:rPr lang="en-US" sz="1550" dirty="0">
+              <a:rPr lang="en-US" sz="1320" dirty="0">
                 <a:solidFill>
                   <a:srgbClr val="17364A"/>
                 </a:solidFill>
@@ -4430,9 +4466,9 @@
                 <a:ea typeface="Aptos" pitchFamily="34" charset="-122"/>
                 <a:cs typeface="Aptos" pitchFamily="34" charset="-120"/>
               </a:rPr>
-              <a:t>Connect the concept to data quality, model performance, validation evidence, monitoring measures, and decisions that remain under human control.</a:t>
-            </a:r>
-            <a:endParaRPr lang="en-US" sz="1550" dirty="0"/>
+              <a:t>Connect the concept to data quality, model performance, validation evidence, monitoring measures, and decisions that.</a:t>
+            </a:r>
+            <a:endParaRPr lang="en-US" sz="1320" dirty="0"/>
           </a:p>
         </p:txBody>
       </p:sp>
@@ -4733,49 +4769,58 @@
           <a:ln/>
         </p:spPr>
         <p:txBody>
-          <a:bodyPr wrap="square" lIns="635" tIns="635" rIns="635" bIns="635" rtlCol="0" anchor="t">
+          <a:bodyPr wrap="square" lIns="1016" tIns="1016" rIns="1016" bIns="1016" rtlCol="0" anchor="t">
             <a:normAutofit/>
           </a:bodyPr>
           <a:lstStyle/>
           <a:p>
+            <a:pPr indent="0" marL="0">
+              <a:buNone/>
+            </a:pPr>
             <a:r>
               <a:rPr lang="en-US" sz="2100" dirty="0">
                 <a:solidFill>
-                  <a:srgbClr val="17364A"/>
-                </a:solidFill>
-                <a:latin typeface="Aptos" pitchFamily="34" charset="0"/>
-                <a:ea typeface="Aptos" pitchFamily="34" charset="-122"/>
-                <a:cs typeface="Aptos" pitchFamily="34" charset="-120"/>
-              </a:rPr>
-              <a:t>Confident output from weak data.</a:t>
+                  <a:srgbClr val="003A63"/>
+                </a:solidFill>
+                <a:latin typeface="Aptos" pitchFamily="34" charset="0"/>
+                <a:ea typeface="Aptos" pitchFamily="34" charset="-122"/>
+                <a:cs typeface="Aptos" pitchFamily="34" charset="-120"/>
+              </a:rPr>
+              <a:t>• Confident output from weak data.</a:t>
             </a:r>
             <a:endParaRPr lang="en-US" sz="2100" dirty="0"/>
           </a:p>
           <a:p>
+            <a:pPr indent="0" marL="0">
+              <a:buNone/>
+            </a:pPr>
             <a:r>
               <a:rPr lang="en-US" sz="2100" dirty="0">
                 <a:solidFill>
-                  <a:srgbClr val="17364A"/>
-                </a:solidFill>
-                <a:latin typeface="Aptos" pitchFamily="34" charset="0"/>
-                <a:ea typeface="Aptos" pitchFamily="34" charset="-122"/>
-                <a:cs typeface="Aptos" pitchFamily="34" charset="-120"/>
-              </a:rPr>
-              <a:t>AI may produce polished outputs from incomplete or biased data.</a:t>
+                  <a:srgbClr val="003A63"/>
+                </a:solidFill>
+                <a:latin typeface="Aptos" pitchFamily="34" charset="0"/>
+                <a:ea typeface="Aptos" pitchFamily="34" charset="-122"/>
+                <a:cs typeface="Aptos" pitchFamily="34" charset="-120"/>
+              </a:rPr>
+              <a:t>• AI may produce polished outputs from incomplete or biased data.</a:t>
             </a:r>
             <a:endParaRPr lang="en-US" sz="2100" dirty="0"/>
           </a:p>
           <a:p>
+            <a:pPr indent="0" marL="0">
+              <a:buNone/>
+            </a:pPr>
             <a:r>
               <a:rPr lang="en-US" sz="2100" dirty="0">
                 <a:solidFill>
-                  <a:srgbClr val="17364A"/>
-                </a:solidFill>
-                <a:latin typeface="Aptos" pitchFamily="34" charset="0"/>
-                <a:ea typeface="Aptos" pitchFamily="34" charset="-122"/>
-                <a:cs typeface="Aptos" pitchFamily="34" charset="-120"/>
-              </a:rPr>
-              <a:t>Guardrails include uncertainty labeling, source review, and limits on use.</a:t>
+                  <a:srgbClr val="003A63"/>
+                </a:solidFill>
+                <a:latin typeface="Aptos" pitchFamily="34" charset="0"/>
+                <a:ea typeface="Aptos" pitchFamily="34" charset="-122"/>
+                <a:cs typeface="Aptos" pitchFamily="34" charset="-120"/>
+              </a:rPr>
+              <a:t>• Guardrails include uncertainty labeling, source review, and limits on use.</a:t>
             </a:r>
             <a:endParaRPr lang="en-US" sz="2100" dirty="0"/>
           </a:p>
@@ -4855,17 +4900,17 @@
         </p:nvSpPr>
         <p:spPr>
           <a:xfrm>
-            <a:off x="7799832" y="1828800"/>
-            <a:ext cx="3145536" cy="685800"/>
-          </a:xfrm>
-          <a:prstGeom prst="rect">
-            <a:avLst/>
-          </a:prstGeom>
-          <a:noFill/>
-          <a:ln/>
-        </p:spPr>
-        <p:txBody>
-          <a:bodyPr wrap="square" lIns="0" tIns="0" rIns="0" bIns="0" rtlCol="0" anchor="t">
+            <a:off x="7799832" y="1801368"/>
+            <a:ext cx="3145536" cy="758952"/>
+          </a:xfrm>
+          <a:prstGeom prst="rect">
+            <a:avLst/>
+          </a:prstGeom>
+          <a:noFill/>
+          <a:ln/>
+        </p:spPr>
+        <p:txBody>
+          <a:bodyPr wrap="square" lIns="254" tIns="254" rIns="254" bIns="254" rtlCol="0" anchor="t">
             <a:normAutofit/>
           </a:bodyPr>
           <a:lstStyle/>
@@ -4874,7 +4919,7 @@
               <a:buNone/>
             </a:pPr>
             <a:r>
-              <a:rPr lang="en-US" sz="1550" dirty="0">
+              <a:rPr lang="en-US" sz="1320" dirty="0">
                 <a:solidFill>
                   <a:srgbClr val="17364A"/>
                 </a:solidFill>
@@ -4884,7 +4929,7 @@
               </a:rPr>
               <a:t>Confident output from weak data.</a:t>
             </a:r>
-            <a:endParaRPr lang="en-US" sz="1550" dirty="0"/>
+            <a:endParaRPr lang="en-US" sz="1320" dirty="0"/>
           </a:p>
         </p:txBody>
       </p:sp>
@@ -4972,13 +5017,16 @@
           <a:ln/>
         </p:spPr>
         <p:txBody>
-          <a:bodyPr wrap="square" lIns="254" tIns="254" rIns="254" bIns="254" rtlCol="0" anchor="t">
+          <a:bodyPr wrap="square" lIns="508" tIns="508" rIns="508" bIns="508" rtlCol="0" anchor="t">
             <a:normAutofit/>
           </a:bodyPr>
           <a:lstStyle/>
           <a:p>
-            <a:r>
-              <a:rPr lang="en-US" sz="1380" dirty="0">
+            <a:pPr indent="0" marL="0">
+              <a:buNone/>
+            </a:pPr>
+            <a:r>
+              <a:rPr lang="en-US" sz="1220" dirty="0">
                 <a:solidFill>
                   <a:srgbClr val="17364A"/>
                 </a:solidFill>
@@ -4988,11 +5036,14 @@
               </a:rPr>
               <a:t>Fitness-for-use mismatch.</a:t>
             </a:r>
-            <a:endParaRPr lang="en-US" sz="1380" dirty="0"/>
-          </a:p>
-          <a:p>
-            <a:r>
-              <a:rPr lang="en-US" sz="1380" dirty="0">
+            <a:endParaRPr lang="en-US" sz="1220" dirty="0"/>
+          </a:p>
+          <a:p>
+            <a:pPr indent="0" marL="0">
+              <a:buNone/>
+            </a:pPr>
+            <a:r>
+              <a:rPr lang="en-US" sz="1220" dirty="0">
                 <a:solidFill>
                   <a:srgbClr val="17364A"/>
                 </a:solidFill>
@@ -5002,11 +5053,14 @@
               </a:rPr>
               <a:t>Data suitable for one purpose may be unsafe for another.</a:t>
             </a:r>
-            <a:endParaRPr lang="en-US" sz="1380" dirty="0"/>
-          </a:p>
-          <a:p>
-            <a:r>
-              <a:rPr lang="en-US" sz="1380" dirty="0">
+            <a:endParaRPr lang="en-US" sz="1220" dirty="0"/>
+          </a:p>
+          <a:p>
+            <a:pPr indent="0" marL="0">
+              <a:buNone/>
+            </a:pPr>
+            <a:r>
+              <a:rPr lang="en-US" sz="1220" dirty="0">
                 <a:solidFill>
                   <a:srgbClr val="17364A"/>
                 </a:solidFill>
@@ -5014,9 +5068,9 @@
                 <a:ea typeface="Aptos" pitchFamily="34" charset="-122"/>
                 <a:cs typeface="Aptos" pitchFamily="34" charset="-120"/>
               </a:rPr>
-              <a:t>Guardrails include use-case-specific quality criteria and approval conditions.</a:t>
-            </a:r>
-            <a:endParaRPr lang="en-US" sz="1380" dirty="0"/>
+              <a:t>Guardrails include use-case-specific quality criteria and approval.</a:t>
+            </a:r>
+            <a:endParaRPr lang="en-US" sz="1220" dirty="0"/>
           </a:p>
         </p:txBody>
       </p:sp>
@@ -5094,17 +5148,17 @@
         </p:nvSpPr>
         <p:spPr>
           <a:xfrm>
-            <a:off x="7799832" y="5001768"/>
-            <a:ext cx="3145536" cy="502920"/>
-          </a:xfrm>
-          <a:prstGeom prst="rect">
-            <a:avLst/>
-          </a:prstGeom>
-          <a:noFill/>
-          <a:ln/>
-        </p:spPr>
-        <p:txBody>
-          <a:bodyPr wrap="square" lIns="0" tIns="0" rIns="0" bIns="0" rtlCol="0" anchor="t">
+            <a:off x="7799832" y="4974336"/>
+            <a:ext cx="3145536" cy="576072"/>
+          </a:xfrm>
+          <a:prstGeom prst="rect">
+            <a:avLst/>
+          </a:prstGeom>
+          <a:noFill/>
+          <a:ln/>
+        </p:spPr>
+        <p:txBody>
+          <a:bodyPr wrap="square" lIns="254" tIns="254" rIns="254" bIns="254" rtlCol="0" anchor="t">
             <a:normAutofit/>
           </a:bodyPr>
           <a:lstStyle/>
@@ -5113,7 +5167,7 @@
               <a:buNone/>
             </a:pPr>
             <a:r>
-              <a:rPr lang="en-US" sz="1550" dirty="0">
+              <a:rPr lang="en-US" sz="1320" dirty="0">
                 <a:solidFill>
                   <a:srgbClr val="17364A"/>
                 </a:solidFill>
@@ -5121,9 +5175,9 @@
                 <a:ea typeface="Aptos" pitchFamily="34" charset="-122"/>
                 <a:cs typeface="Aptos" pitchFamily="34" charset="-120"/>
               </a:rPr>
-              <a:t>Identify what could go wrong, who could be affected, what safeguards are needed, and what evidence should be reviewed before use expands.</a:t>
-            </a:r>
-            <a:endParaRPr lang="en-US" sz="1550" dirty="0"/>
+              <a:t>Identify what could go wrong, who could be affected, what safeguards are needed, and what evidence should be reviewed.</a:t>
+            </a:r>
+            <a:endParaRPr lang="en-US" sz="1320" dirty="0"/>
           </a:p>
         </p:txBody>
       </p:sp>
@@ -5424,49 +5478,58 @@
           <a:ln/>
         </p:spPr>
         <p:txBody>
-          <a:bodyPr wrap="square" lIns="635" tIns="635" rIns="635" bIns="635" rtlCol="0" anchor="t">
+          <a:bodyPr wrap="square" lIns="1016" tIns="1016" rIns="1016" bIns="1016" rtlCol="0" anchor="t">
             <a:normAutofit/>
           </a:bodyPr>
           <a:lstStyle/>
           <a:p>
+            <a:pPr indent="0" marL="0">
+              <a:buNone/>
+            </a:pPr>
             <a:r>
               <a:rPr lang="en-US" sz="2100" dirty="0">
                 <a:solidFill>
-                  <a:srgbClr val="17364A"/>
-                </a:solidFill>
-                <a:latin typeface="Aptos" pitchFamily="34" charset="0"/>
-                <a:ea typeface="Aptos" pitchFamily="34" charset="-122"/>
-                <a:cs typeface="Aptos" pitchFamily="34" charset="-120"/>
-              </a:rPr>
-              <a:t>Equity blind spots.</a:t>
+                  <a:srgbClr val="003A63"/>
+                </a:solidFill>
+                <a:latin typeface="Aptos" pitchFamily="34" charset="0"/>
+                <a:ea typeface="Aptos" pitchFamily="34" charset="-122"/>
+                <a:cs typeface="Aptos" pitchFamily="34" charset="-120"/>
+              </a:rPr>
+              <a:t>• Equity blind spots.</a:t>
             </a:r>
             <a:endParaRPr lang="en-US" sz="2100" dirty="0"/>
           </a:p>
           <a:p>
+            <a:pPr indent="0" marL="0">
+              <a:buNone/>
+            </a:pPr>
             <a:r>
               <a:rPr lang="en-US" sz="2100" dirty="0">
                 <a:solidFill>
-                  <a:srgbClr val="17364A"/>
-                </a:solidFill>
-                <a:latin typeface="Aptos" pitchFamily="34" charset="0"/>
-                <a:ea typeface="Aptos" pitchFamily="34" charset="-122"/>
-                <a:cs typeface="Aptos" pitchFamily="34" charset="-120"/>
-              </a:rPr>
-              <a:t>Missingness and underrepresentation may affect some groups more than others.</a:t>
+                  <a:srgbClr val="003A63"/>
+                </a:solidFill>
+                <a:latin typeface="Aptos" pitchFamily="34" charset="0"/>
+                <a:ea typeface="Aptos" pitchFamily="34" charset="-122"/>
+                <a:cs typeface="Aptos" pitchFamily="34" charset="-120"/>
+              </a:rPr>
+              <a:t>• Missingness and underrepresentation may affect some groups more than others.</a:t>
             </a:r>
             <a:endParaRPr lang="en-US" sz="2100" dirty="0"/>
           </a:p>
           <a:p>
+            <a:pPr indent="0" marL="0">
+              <a:buNone/>
+            </a:pPr>
             <a:r>
               <a:rPr lang="en-US" sz="2100" dirty="0">
                 <a:solidFill>
-                  <a:srgbClr val="17364A"/>
-                </a:solidFill>
-                <a:latin typeface="Aptos" pitchFamily="34" charset="0"/>
-                <a:ea typeface="Aptos" pitchFamily="34" charset="-122"/>
-                <a:cs typeface="Aptos" pitchFamily="34" charset="-120"/>
-              </a:rPr>
-              <a:t>Guardrails include subgroup review, community context, and documentation of limitations.</a:t>
+                  <a:srgbClr val="003A63"/>
+                </a:solidFill>
+                <a:latin typeface="Aptos" pitchFamily="34" charset="0"/>
+                <a:ea typeface="Aptos" pitchFamily="34" charset="-122"/>
+                <a:cs typeface="Aptos" pitchFamily="34" charset="-120"/>
+              </a:rPr>
+              <a:t>• Guardrails include subgroup review, community context, and documentation of limitations.</a:t>
             </a:r>
             <a:endParaRPr lang="en-US" sz="2100" dirty="0"/>
           </a:p>
@@ -5546,17 +5609,17 @@
         </p:nvSpPr>
         <p:spPr>
           <a:xfrm>
-            <a:off x="7799832" y="1828800"/>
-            <a:ext cx="3145536" cy="685800"/>
-          </a:xfrm>
-          <a:prstGeom prst="rect">
-            <a:avLst/>
-          </a:prstGeom>
-          <a:noFill/>
-          <a:ln/>
-        </p:spPr>
-        <p:txBody>
-          <a:bodyPr wrap="square" lIns="0" tIns="0" rIns="0" bIns="0" rtlCol="0" anchor="t">
+            <a:off x="7799832" y="1801368"/>
+            <a:ext cx="3145536" cy="758952"/>
+          </a:xfrm>
+          <a:prstGeom prst="rect">
+            <a:avLst/>
+          </a:prstGeom>
+          <a:noFill/>
+          <a:ln/>
+        </p:spPr>
+        <p:txBody>
+          <a:bodyPr wrap="square" lIns="254" tIns="254" rIns="254" bIns="254" rtlCol="0" anchor="t">
             <a:normAutofit/>
           </a:bodyPr>
           <a:lstStyle/>
@@ -5565,7 +5628,7 @@
               <a:buNone/>
             </a:pPr>
             <a:r>
-              <a:rPr lang="en-US" sz="1550" dirty="0">
+              <a:rPr lang="en-US" sz="1320" dirty="0">
                 <a:solidFill>
                   <a:srgbClr val="17364A"/>
                 </a:solidFill>
@@ -5575,7 +5638,7 @@
               </a:rPr>
               <a:t>Equity blind spots.</a:t>
             </a:r>
-            <a:endParaRPr lang="en-US" sz="1550" dirty="0"/>
+            <a:endParaRPr lang="en-US" sz="1320" dirty="0"/>
           </a:p>
         </p:txBody>
       </p:sp>
@@ -5663,13 +5726,16 @@
           <a:ln/>
         </p:spPr>
         <p:txBody>
-          <a:bodyPr wrap="square" lIns="254" tIns="254" rIns="254" bIns="254" rtlCol="0" anchor="t">
+          <a:bodyPr wrap="square" lIns="508" tIns="508" rIns="508" bIns="508" rtlCol="0" anchor="t">
             <a:normAutofit/>
           </a:bodyPr>
           <a:lstStyle/>
           <a:p>
-            <a:r>
-              <a:rPr lang="en-US" sz="1380" dirty="0">
+            <a:pPr indent="0" marL="0">
+              <a:buNone/>
+            </a:pPr>
+            <a:r>
+              <a:rPr lang="en-US" sz="1220" dirty="0">
                 <a:solidFill>
                   <a:srgbClr val="17364A"/>
                 </a:solidFill>
@@ -5679,11 +5745,14 @@
               </a:rPr>
               <a:t>Equity blind spots.</a:t>
             </a:r>
-            <a:endParaRPr lang="en-US" sz="1380" dirty="0"/>
-          </a:p>
-          <a:p>
-            <a:r>
-              <a:rPr lang="en-US" sz="1380" dirty="0">
+            <a:endParaRPr lang="en-US" sz="1220" dirty="0"/>
+          </a:p>
+          <a:p>
+            <a:pPr indent="0" marL="0">
+              <a:buNone/>
+            </a:pPr>
+            <a:r>
+              <a:rPr lang="en-US" sz="1220" dirty="0">
                 <a:solidFill>
                   <a:srgbClr val="17364A"/>
                 </a:solidFill>
@@ -5691,13 +5760,16 @@
                 <a:ea typeface="Aptos" pitchFamily="34" charset="-122"/>
                 <a:cs typeface="Aptos" pitchFamily="34" charset="-120"/>
               </a:rPr>
-              <a:t>Missingness and underrepresentation may affect some groups more than others.</a:t>
-            </a:r>
-            <a:endParaRPr lang="en-US" sz="1380" dirty="0"/>
-          </a:p>
-          <a:p>
-            <a:r>
-              <a:rPr lang="en-US" sz="1380" dirty="0">
+              <a:t>Missingness and underrepresentation may affect some groups more.</a:t>
+            </a:r>
+            <a:endParaRPr lang="en-US" sz="1220" dirty="0"/>
+          </a:p>
+          <a:p>
+            <a:pPr indent="0" marL="0">
+              <a:buNone/>
+            </a:pPr>
+            <a:r>
+              <a:rPr lang="en-US" sz="1220" dirty="0">
                 <a:solidFill>
                   <a:srgbClr val="17364A"/>
                 </a:solidFill>
@@ -5705,9 +5777,9 @@
                 <a:ea typeface="Aptos" pitchFamily="34" charset="-122"/>
                 <a:cs typeface="Aptos" pitchFamily="34" charset="-120"/>
               </a:rPr>
-              <a:t>Guardrails include subgroup review, community context, and documentation of limitations.</a:t>
-            </a:r>
-            <a:endParaRPr lang="en-US" sz="1380" dirty="0"/>
+              <a:t>Guardrails include subgroup review, community context, and.</a:t>
+            </a:r>
+            <a:endParaRPr lang="en-US" sz="1220" dirty="0"/>
           </a:p>
         </p:txBody>
       </p:sp>
@@ -5785,17 +5857,17 @@
         </p:nvSpPr>
         <p:spPr>
           <a:xfrm>
-            <a:off x="7799832" y="5001768"/>
-            <a:ext cx="3145536" cy="502920"/>
-          </a:xfrm>
-          <a:prstGeom prst="rect">
-            <a:avLst/>
-          </a:prstGeom>
-          <a:noFill/>
-          <a:ln/>
-        </p:spPr>
-        <p:txBody>
-          <a:bodyPr wrap="square" lIns="0" tIns="0" rIns="0" bIns="0" rtlCol="0" anchor="t">
+            <a:off x="7799832" y="4974336"/>
+            <a:ext cx="3145536" cy="576072"/>
+          </a:xfrm>
+          <a:prstGeom prst="rect">
+            <a:avLst/>
+          </a:prstGeom>
+          <a:noFill/>
+          <a:ln/>
+        </p:spPr>
+        <p:txBody>
+          <a:bodyPr wrap="square" lIns="254" tIns="254" rIns="254" bIns="254" rtlCol="0" anchor="t">
             <a:normAutofit/>
           </a:bodyPr>
           <a:lstStyle/>
@@ -5804,7 +5876,7 @@
               <a:buNone/>
             </a:pPr>
             <a:r>
-              <a:rPr lang="en-US" sz="1550" dirty="0">
+              <a:rPr lang="en-US" sz="1320" dirty="0">
                 <a:solidFill>
                   <a:srgbClr val="17364A"/>
                 </a:solidFill>
@@ -5812,9 +5884,9 @@
                 <a:ea typeface="Aptos" pitchFamily="34" charset="-122"/>
                 <a:cs typeface="Aptos" pitchFamily="34" charset="-120"/>
               </a:rPr>
-              <a:t>Identify what could go wrong, who could be affected, what safeguards are needed, and what evidence should be reviewed before use expands.</a:t>
-            </a:r>
-            <a:endParaRPr lang="en-US" sz="1550" dirty="0"/>
+              <a:t>Identify what could go wrong, who could be affected, what safeguards are needed, and what evidence should be reviewed.</a:t>
+            </a:r>
+            <a:endParaRPr lang="en-US" sz="1320" dirty="0"/>
           </a:p>
         </p:txBody>
       </p:sp>
@@ -6115,49 +6187,58 @@
           <a:ln/>
         </p:spPr>
         <p:txBody>
-          <a:bodyPr wrap="square" lIns="635" tIns="635" rIns="635" bIns="635" rtlCol="0" anchor="t">
+          <a:bodyPr wrap="square" lIns="1016" tIns="1016" rIns="1016" bIns="1016" rtlCol="0" anchor="t">
             <a:normAutofit/>
           </a:bodyPr>
           <a:lstStyle/>
           <a:p>
+            <a:pPr indent="0" marL="0">
+              <a:buNone/>
+            </a:pPr>
             <a:r>
               <a:rPr lang="en-US" sz="2100" dirty="0">
                 <a:solidFill>
-                  <a:srgbClr val="17364A"/>
-                </a:solidFill>
-                <a:latin typeface="Aptos" pitchFamily="34" charset="0"/>
-                <a:ea typeface="Aptos" pitchFamily="34" charset="-122"/>
-                <a:cs typeface="Aptos" pitchFamily="34" charset="-120"/>
-              </a:rPr>
-              <a:t>Generative AI may summarize datasets or records, but the output must reflect missingness and uncertainty.</a:t>
+                  <a:srgbClr val="003A63"/>
+                </a:solidFill>
+                <a:latin typeface="Aptos" pitchFamily="34" charset="0"/>
+                <a:ea typeface="Aptos" pitchFamily="34" charset="-122"/>
+                <a:cs typeface="Aptos" pitchFamily="34" charset="-120"/>
+              </a:rPr>
+              <a:t>• Generative AI may summarize datasets or records, but the output must reflect missingness and.</a:t>
             </a:r>
             <a:endParaRPr lang="en-US" sz="2100" dirty="0"/>
           </a:p>
           <a:p>
+            <a:pPr indent="0" marL="0">
+              <a:buNone/>
+            </a:pPr>
             <a:r>
               <a:rPr lang="en-US" sz="2100" dirty="0">
                 <a:solidFill>
-                  <a:srgbClr val="17364A"/>
-                </a:solidFill>
-                <a:latin typeface="Aptos" pitchFamily="34" charset="0"/>
-                <a:ea typeface="Aptos" pitchFamily="34" charset="-122"/>
-                <a:cs typeface="Aptos" pitchFamily="34" charset="-120"/>
-              </a:rPr>
-              <a:t>Predictive analytics depend heavily on feature quality, label quality, and representative training data.</a:t>
+                  <a:srgbClr val="003A63"/>
+                </a:solidFill>
+                <a:latin typeface="Aptos" pitchFamily="34" charset="0"/>
+                <a:ea typeface="Aptos" pitchFamily="34" charset="-122"/>
+                <a:cs typeface="Aptos" pitchFamily="34" charset="-120"/>
+              </a:rPr>
+              <a:t>• Predictive analytics depend heavily on feature quality, label quality, and representative.</a:t>
             </a:r>
             <a:endParaRPr lang="en-US" sz="2100" dirty="0"/>
           </a:p>
           <a:p>
+            <a:pPr indent="0" marL="0">
+              <a:buNone/>
+            </a:pPr>
             <a:r>
               <a:rPr lang="en-US" sz="2100" dirty="0">
                 <a:solidFill>
-                  <a:srgbClr val="17364A"/>
-                </a:solidFill>
-                <a:latin typeface="Aptos" pitchFamily="34" charset="0"/>
-                <a:ea typeface="Aptos" pitchFamily="34" charset="-122"/>
-                <a:cs typeface="Aptos" pitchFamily="34" charset="-120"/>
-              </a:rPr>
-              <a:t>NLP may be affected by language variation, abbreviations, and documentation practices.</a:t>
+                  <a:srgbClr val="003A63"/>
+                </a:solidFill>
+                <a:latin typeface="Aptos" pitchFamily="34" charset="0"/>
+                <a:ea typeface="Aptos" pitchFamily="34" charset="-122"/>
+                <a:cs typeface="Aptos" pitchFamily="34" charset="-120"/>
+              </a:rPr>
+              <a:t>• NLP may be affected by language variation, abbreviations, and documentation practices.</a:t>
             </a:r>
             <a:endParaRPr lang="en-US" sz="2100" dirty="0"/>
           </a:p>
@@ -6237,17 +6318,17 @@
         </p:nvSpPr>
         <p:spPr>
           <a:xfrm>
-            <a:off x="7799832" y="1828800"/>
-            <a:ext cx="3145536" cy="685800"/>
-          </a:xfrm>
-          <a:prstGeom prst="rect">
-            <a:avLst/>
-          </a:prstGeom>
-          <a:noFill/>
-          <a:ln/>
-        </p:spPr>
-        <p:txBody>
-          <a:bodyPr wrap="square" lIns="0" tIns="0" rIns="0" bIns="0" rtlCol="0" anchor="t">
+            <a:off x="7799832" y="1801368"/>
+            <a:ext cx="3145536" cy="758952"/>
+          </a:xfrm>
+          <a:prstGeom prst="rect">
+            <a:avLst/>
+          </a:prstGeom>
+          <a:noFill/>
+          <a:ln/>
+        </p:spPr>
+        <p:txBody>
+          <a:bodyPr wrap="square" lIns="254" tIns="254" rIns="254" bIns="254" rtlCol="0" anchor="t">
             <a:normAutofit/>
           </a:bodyPr>
           <a:lstStyle/>
@@ -6256,7 +6337,7 @@
               <a:buNone/>
             </a:pPr>
             <a:r>
-              <a:rPr lang="en-US" sz="1550" dirty="0">
+              <a:rPr lang="en-US" sz="1320" dirty="0">
                 <a:solidFill>
                   <a:srgbClr val="17364A"/>
                 </a:solidFill>
@@ -6266,7 +6347,7 @@
               </a:rPr>
               <a:t>Generative AI may summarize datasets or records, but the output must reflect missingness and uncertainty.</a:t>
             </a:r>
-            <a:endParaRPr lang="en-US" sz="1550" dirty="0"/>
+            <a:endParaRPr lang="en-US" sz="1320" dirty="0"/>
           </a:p>
         </p:txBody>
       </p:sp>
@@ -6354,13 +6435,16 @@
           <a:ln/>
         </p:spPr>
         <p:txBody>
-          <a:bodyPr wrap="square" lIns="254" tIns="254" rIns="254" bIns="254" rtlCol="0" anchor="t">
+          <a:bodyPr wrap="square" lIns="508" tIns="508" rIns="508" bIns="508" rtlCol="0" anchor="t">
             <a:normAutofit/>
           </a:bodyPr>
           <a:lstStyle/>
           <a:p>
-            <a:r>
-              <a:rPr lang="en-US" sz="1380" dirty="0">
+            <a:pPr indent="0" marL="0">
+              <a:buNone/>
+            </a:pPr>
+            <a:r>
+              <a:rPr lang="en-US" sz="1220" dirty="0">
                 <a:solidFill>
                   <a:srgbClr val="17364A"/>
                 </a:solidFill>
@@ -6370,11 +6454,14 @@
               </a:rPr>
               <a:t>RAG depends on document quality, metadata, and currency.</a:t>
             </a:r>
-            <a:endParaRPr lang="en-US" sz="1380" dirty="0"/>
-          </a:p>
-          <a:p>
-            <a:r>
-              <a:rPr lang="en-US" sz="1380" dirty="0">
+            <a:endParaRPr lang="en-US" sz="1220" dirty="0"/>
+          </a:p>
+          <a:p>
+            <a:pPr indent="0" marL="0">
+              <a:buNone/>
+            </a:pPr>
+            <a:r>
+              <a:rPr lang="en-US" sz="1220" dirty="0">
                 <a:solidFill>
                   <a:srgbClr val="17364A"/>
                 </a:solidFill>
@@ -6382,9 +6469,9 @@
                 <a:ea typeface="Aptos" pitchFamily="34" charset="-122"/>
                 <a:cs typeface="Aptos" pitchFamily="34" charset="-120"/>
               </a:rPr>
-              <a:t>Agentic AI should be blocked from acting automatically when required data are missing or.</a:t>
-            </a:r>
-            <a:endParaRPr lang="en-US" sz="1380" dirty="0"/>
+              <a:t>Agentic AI should be blocked from acting automatically when.</a:t>
+            </a:r>
+            <a:endParaRPr lang="en-US" sz="1220" dirty="0"/>
           </a:p>
         </p:txBody>
       </p:sp>
@@ -6462,17 +6549,17 @@
         </p:nvSpPr>
         <p:spPr>
           <a:xfrm>
-            <a:off x="7799832" y="5001768"/>
-            <a:ext cx="3145536" cy="502920"/>
-          </a:xfrm>
-          <a:prstGeom prst="rect">
-            <a:avLst/>
-          </a:prstGeom>
-          <a:noFill/>
-          <a:ln/>
-        </p:spPr>
-        <p:txBody>
-          <a:bodyPr wrap="square" lIns="0" tIns="0" rIns="0" bIns="0" rtlCol="0" anchor="t">
+            <a:off x="7799832" y="4974336"/>
+            <a:ext cx="3145536" cy="576072"/>
+          </a:xfrm>
+          <a:prstGeom prst="rect">
+            <a:avLst/>
+          </a:prstGeom>
+          <a:noFill/>
+          <a:ln/>
+        </p:spPr>
+        <p:txBody>
+          <a:bodyPr wrap="square" lIns="254" tIns="254" rIns="254" bIns="254" rtlCol="0" anchor="t">
             <a:normAutofit/>
           </a:bodyPr>
           <a:lstStyle/>
@@ -6481,7 +6568,7 @@
               <a:buNone/>
             </a:pPr>
             <a:r>
-              <a:rPr lang="en-US" sz="1550" dirty="0">
+              <a:rPr lang="en-US" sz="1320" dirty="0">
                 <a:solidFill>
                   <a:srgbClr val="17364A"/>
                 </a:solidFill>
@@ -6489,9 +6576,9 @@
                 <a:ea typeface="Aptos" pitchFamily="34" charset="-122"/>
                 <a:cs typeface="Aptos" pitchFamily="34" charset="-120"/>
               </a:rPr>
-              <a:t>Connect the concept to data quality, model performance, validation evidence, monitoring measures, and decisions that remain under human control.</a:t>
-            </a:r>
-            <a:endParaRPr lang="en-US" sz="1550" dirty="0"/>
+              <a:t>Connect the concept to data quality, model performance, validation evidence, monitoring measures, and decisions that.</a:t>
+            </a:r>
+            <a:endParaRPr lang="en-US" sz="1320" dirty="0"/>
           </a:p>
         </p:txBody>
       </p:sp>
@@ -6792,49 +6879,58 @@
           <a:ln/>
         </p:spPr>
         <p:txBody>
-          <a:bodyPr wrap="square" lIns="635" tIns="635" rIns="635" bIns="635" rtlCol="0" anchor="t">
+          <a:bodyPr wrap="square" lIns="1016" tIns="1016" rIns="1016" bIns="1016" rtlCol="0" anchor="t">
             <a:normAutofit/>
           </a:bodyPr>
           <a:lstStyle/>
           <a:p>
+            <a:pPr indent="0" marL="0">
+              <a:buNone/>
+            </a:pPr>
             <a:r>
               <a:rPr lang="en-US" sz="2100" dirty="0">
                 <a:solidFill>
-                  <a:srgbClr val="17364A"/>
-                </a:solidFill>
-                <a:latin typeface="Aptos" pitchFamily="34" charset="0"/>
-                <a:ea typeface="Aptos" pitchFamily="34" charset="-122"/>
-                <a:cs typeface="Aptos" pitchFamily="34" charset="-120"/>
-              </a:rPr>
-              <a:t>Which data quality problems most often affect your program area?</a:t>
+                  <a:srgbClr val="003A63"/>
+                </a:solidFill>
+                <a:latin typeface="Aptos" pitchFamily="34" charset="0"/>
+                <a:ea typeface="Aptos" pitchFamily="34" charset="-122"/>
+                <a:cs typeface="Aptos" pitchFamily="34" charset="-120"/>
+              </a:rPr>
+              <a:t>• Which data quality problems most often affect your program area?</a:t>
             </a:r>
             <a:endParaRPr lang="en-US" sz="2100" dirty="0"/>
           </a:p>
           <a:p>
+            <a:pPr indent="0" marL="0">
+              <a:buNone/>
+            </a:pPr>
             <a:r>
               <a:rPr lang="en-US" sz="2100" dirty="0">
                 <a:solidFill>
-                  <a:srgbClr val="17364A"/>
-                </a:solidFill>
-                <a:latin typeface="Aptos" pitchFamily="34" charset="0"/>
-                <a:ea typeface="Aptos" pitchFamily="34" charset="-122"/>
-                <a:cs typeface="Aptos" pitchFamily="34" charset="-120"/>
-              </a:rPr>
-              <a:t>Which missing fields would make an AI output unsafe or unreliable?</a:t>
+                  <a:srgbClr val="003A63"/>
+                </a:solidFill>
+                <a:latin typeface="Aptos" pitchFamily="34" charset="0"/>
+                <a:ea typeface="Aptos" pitchFamily="34" charset="-122"/>
+                <a:cs typeface="Aptos" pitchFamily="34" charset="-120"/>
+              </a:rPr>
+              <a:t>• Which missing fields would make an AI output unsafe or unreliable?</a:t>
             </a:r>
             <a:endParaRPr lang="en-US" sz="2100" dirty="0"/>
           </a:p>
           <a:p>
+            <a:pPr indent="0" marL="0">
+              <a:buNone/>
+            </a:pPr>
             <a:r>
               <a:rPr lang="en-US" sz="2100" dirty="0">
                 <a:solidFill>
-                  <a:srgbClr val="17364A"/>
-                </a:solidFill>
-                <a:latin typeface="Aptos" pitchFamily="34" charset="0"/>
-                <a:ea typeface="Aptos" pitchFamily="34" charset="-122"/>
-                <a:cs typeface="Aptos" pitchFamily="34" charset="-120"/>
-              </a:rPr>
-              <a:t>Which populations or settings may be underrepresented in the data?</a:t>
+                  <a:srgbClr val="003A63"/>
+                </a:solidFill>
+                <a:latin typeface="Aptos" pitchFamily="34" charset="0"/>
+                <a:ea typeface="Aptos" pitchFamily="34" charset="-122"/>
+                <a:cs typeface="Aptos" pitchFamily="34" charset="-120"/>
+              </a:rPr>
+              <a:t>• Which populations or settings may be underrepresented in the data?</a:t>
             </a:r>
             <a:endParaRPr lang="en-US" sz="2100" dirty="0"/>
           </a:p>
@@ -6914,17 +7010,17 @@
         </p:nvSpPr>
         <p:spPr>
           <a:xfrm>
-            <a:off x="7799832" y="1828800"/>
-            <a:ext cx="3145536" cy="685800"/>
-          </a:xfrm>
-          <a:prstGeom prst="rect">
-            <a:avLst/>
-          </a:prstGeom>
-          <a:noFill/>
-          <a:ln/>
-        </p:spPr>
-        <p:txBody>
-          <a:bodyPr wrap="square" lIns="0" tIns="0" rIns="0" bIns="0" rtlCol="0" anchor="t">
+            <a:off x="7799832" y="1801368"/>
+            <a:ext cx="3145536" cy="758952"/>
+          </a:xfrm>
+          <a:prstGeom prst="rect">
+            <a:avLst/>
+          </a:prstGeom>
+          <a:noFill/>
+          <a:ln/>
+        </p:spPr>
+        <p:txBody>
+          <a:bodyPr wrap="square" lIns="254" tIns="254" rIns="254" bIns="254" rtlCol="0" anchor="t">
             <a:normAutofit/>
           </a:bodyPr>
           <a:lstStyle/>
@@ -6933,7 +7029,7 @@
               <a:buNone/>
             </a:pPr>
             <a:r>
-              <a:rPr lang="en-US" sz="1550" dirty="0">
+              <a:rPr lang="en-US" sz="1320" dirty="0">
                 <a:solidFill>
                   <a:srgbClr val="17364A"/>
                 </a:solidFill>
@@ -6943,7 +7039,7 @@
               </a:rPr>
               <a:t>Which data quality problems most often affect your program area?</a:t>
             </a:r>
-            <a:endParaRPr lang="en-US" sz="1550" dirty="0"/>
+            <a:endParaRPr lang="en-US" sz="1320" dirty="0"/>
           </a:p>
         </p:txBody>
       </p:sp>
@@ -7031,13 +7127,16 @@
           <a:ln/>
         </p:spPr>
         <p:txBody>
-          <a:bodyPr wrap="square" lIns="254" tIns="254" rIns="254" bIns="254" rtlCol="0" anchor="t">
+          <a:bodyPr wrap="square" lIns="508" tIns="508" rIns="508" bIns="508" rtlCol="0" anchor="t">
             <a:normAutofit/>
           </a:bodyPr>
           <a:lstStyle/>
           <a:p>
-            <a:r>
-              <a:rPr lang="en-US" sz="1380" dirty="0">
+            <a:pPr indent="0" marL="0">
+              <a:buNone/>
+            </a:pPr>
+            <a:r>
+              <a:rPr lang="en-US" sz="1220" dirty="0">
                 <a:solidFill>
                   <a:srgbClr val="17364A"/>
                 </a:solidFill>
@@ -7047,11 +7146,14 @@
               </a:rPr>
               <a:t>Which data quality problems most often affect your program area?</a:t>
             </a:r>
-            <a:endParaRPr lang="en-US" sz="1380" dirty="0"/>
-          </a:p>
-          <a:p>
-            <a:r>
-              <a:rPr lang="en-US" sz="1380" dirty="0">
+            <a:endParaRPr lang="en-US" sz="1220" dirty="0"/>
+          </a:p>
+          <a:p>
+            <a:pPr indent="0" marL="0">
+              <a:buNone/>
+            </a:pPr>
+            <a:r>
+              <a:rPr lang="en-US" sz="1220" dirty="0">
                 <a:solidFill>
                   <a:srgbClr val="17364A"/>
                 </a:solidFill>
@@ -7061,11 +7163,14 @@
               </a:rPr>
               <a:t>Which missing fields would make an AI output unsafe or unreliable?</a:t>
             </a:r>
-            <a:endParaRPr lang="en-US" sz="1380" dirty="0"/>
-          </a:p>
-          <a:p>
-            <a:r>
-              <a:rPr lang="en-US" sz="1380" dirty="0">
+            <a:endParaRPr lang="en-US" sz="1220" dirty="0"/>
+          </a:p>
+          <a:p>
+            <a:pPr indent="0" marL="0">
+              <a:buNone/>
+            </a:pPr>
+            <a:r>
+              <a:rPr lang="en-US" sz="1220" dirty="0">
                 <a:solidFill>
                   <a:srgbClr val="17364A"/>
                 </a:solidFill>
@@ -7075,7 +7180,7 @@
               </a:rPr>
               <a:t>Which populations or settings may be underrepresented in the data?</a:t>
             </a:r>
-            <a:endParaRPr lang="en-US" sz="1380" dirty="0"/>
+            <a:endParaRPr lang="en-US" sz="1220" dirty="0"/>
           </a:p>
         </p:txBody>
       </p:sp>
@@ -7153,17 +7258,17 @@
         </p:nvSpPr>
         <p:spPr>
           <a:xfrm>
-            <a:off x="7799832" y="5001768"/>
-            <a:ext cx="3145536" cy="502920"/>
-          </a:xfrm>
-          <a:prstGeom prst="rect">
-            <a:avLst/>
-          </a:prstGeom>
-          <a:noFill/>
-          <a:ln/>
-        </p:spPr>
-        <p:txBody>
-          <a:bodyPr wrap="square" lIns="0" tIns="0" rIns="0" bIns="0" rtlCol="0" anchor="t">
+            <a:off x="7799832" y="4974336"/>
+            <a:ext cx="3145536" cy="576072"/>
+          </a:xfrm>
+          <a:prstGeom prst="rect">
+            <a:avLst/>
+          </a:prstGeom>
+          <a:noFill/>
+          <a:ln/>
+        </p:spPr>
+        <p:txBody>
+          <a:bodyPr wrap="square" lIns="254" tIns="254" rIns="254" bIns="254" rtlCol="0" anchor="t">
             <a:normAutofit/>
           </a:bodyPr>
           <a:lstStyle/>
@@ -7172,7 +7277,7 @@
               <a:buNone/>
             </a:pPr>
             <a:r>
-              <a:rPr lang="en-US" sz="1550" dirty="0">
+              <a:rPr lang="en-US" sz="1320" dirty="0">
                 <a:solidFill>
                   <a:srgbClr val="17364A"/>
                 </a:solidFill>
@@ -7180,9 +7285,9 @@
                 <a:ea typeface="Aptos" pitchFamily="34" charset="-122"/>
                 <a:cs typeface="Aptos" pitchFamily="34" charset="-120"/>
               </a:rPr>
-              <a:t>Connect the concept to data quality, model performance, validation evidence, monitoring measures, and decisions that remain under human control.</a:t>
-            </a:r>
-            <a:endParaRPr lang="en-US" sz="1550" dirty="0"/>
+              <a:t>Connect the concept to data quality, model performance, validation evidence, monitoring measures, and decisions that.</a:t>
+            </a:r>
+            <a:endParaRPr lang="en-US" sz="1320" dirty="0"/>
           </a:p>
         </p:txBody>
       </p:sp>
@@ -7483,35 +7588,41 @@
           <a:ln/>
         </p:spPr>
         <p:txBody>
-          <a:bodyPr wrap="square" lIns="635" tIns="635" rIns="635" bIns="635" rtlCol="0" anchor="t">
+          <a:bodyPr wrap="square" lIns="1016" tIns="1016" rIns="1016" bIns="1016" rtlCol="0" anchor="t">
             <a:normAutofit/>
           </a:bodyPr>
           <a:lstStyle/>
           <a:p>
+            <a:pPr indent="0" marL="0">
+              <a:buNone/>
+            </a:pPr>
             <a:r>
               <a:rPr lang="en-US" sz="2100" dirty="0">
                 <a:solidFill>
-                  <a:srgbClr val="17364A"/>
-                </a:solidFill>
-                <a:latin typeface="Aptos" pitchFamily="34" charset="0"/>
-                <a:ea typeface="Aptos" pitchFamily="34" charset="-122"/>
-                <a:cs typeface="Aptos" pitchFamily="34" charset="-120"/>
-              </a:rPr>
-              <a:t>How would staff detect data drift?</a:t>
+                  <a:srgbClr val="003A63"/>
+                </a:solidFill>
+                <a:latin typeface="Aptos" pitchFamily="34" charset="0"/>
+                <a:ea typeface="Aptos" pitchFamily="34" charset="-122"/>
+                <a:cs typeface="Aptos" pitchFamily="34" charset="-120"/>
+              </a:rPr>
+              <a:t>• How would staff detect data drift?</a:t>
             </a:r>
             <a:endParaRPr lang="en-US" sz="2100" dirty="0"/>
           </a:p>
           <a:p>
+            <a:pPr indent="0" marL="0">
+              <a:buNone/>
+            </a:pPr>
             <a:r>
               <a:rPr lang="en-US" sz="2100" dirty="0">
                 <a:solidFill>
-                  <a:srgbClr val="17364A"/>
-                </a:solidFill>
-                <a:latin typeface="Aptos" pitchFamily="34" charset="0"/>
-                <a:ea typeface="Aptos" pitchFamily="34" charset="-122"/>
-                <a:cs typeface="Aptos" pitchFamily="34" charset="-120"/>
-              </a:rPr>
-              <a:t>Who has authority to pause or limit AI use when data quality is insufficient?</a:t>
+                  <a:srgbClr val="003A63"/>
+                </a:solidFill>
+                <a:latin typeface="Aptos" pitchFamily="34" charset="0"/>
+                <a:ea typeface="Aptos" pitchFamily="34" charset="-122"/>
+                <a:cs typeface="Aptos" pitchFamily="34" charset="-120"/>
+              </a:rPr>
+              <a:t>• Who has authority to pause or limit AI use when data quality is insufficient?</a:t>
             </a:r>
             <a:endParaRPr lang="en-US" sz="2100" dirty="0"/>
           </a:p>
@@ -7591,17 +7702,17 @@
         </p:nvSpPr>
         <p:spPr>
           <a:xfrm>
-            <a:off x="7799832" y="1828800"/>
-            <a:ext cx="3145536" cy="685800"/>
-          </a:xfrm>
-          <a:prstGeom prst="rect">
-            <a:avLst/>
-          </a:prstGeom>
-          <a:noFill/>
-          <a:ln/>
-        </p:spPr>
-        <p:txBody>
-          <a:bodyPr wrap="square" lIns="0" tIns="0" rIns="0" bIns="0" rtlCol="0" anchor="t">
+            <a:off x="7799832" y="1801368"/>
+            <a:ext cx="3145536" cy="758952"/>
+          </a:xfrm>
+          <a:prstGeom prst="rect">
+            <a:avLst/>
+          </a:prstGeom>
+          <a:noFill/>
+          <a:ln/>
+        </p:spPr>
+        <p:txBody>
+          <a:bodyPr wrap="square" lIns="254" tIns="254" rIns="254" bIns="254" rtlCol="0" anchor="t">
             <a:normAutofit/>
           </a:bodyPr>
           <a:lstStyle/>
@@ -7610,7 +7721,7 @@
               <a:buNone/>
             </a:pPr>
             <a:r>
-              <a:rPr lang="en-US" sz="1550" dirty="0">
+              <a:rPr lang="en-US" sz="1320" dirty="0">
                 <a:solidFill>
                   <a:srgbClr val="17364A"/>
                 </a:solidFill>
@@ -7620,7 +7731,7 @@
               </a:rPr>
               <a:t>How would staff detect data drift?</a:t>
             </a:r>
-            <a:endParaRPr lang="en-US" sz="1550" dirty="0"/>
+            <a:endParaRPr lang="en-US" sz="1320" dirty="0"/>
           </a:p>
         </p:txBody>
       </p:sp>
@@ -7708,13 +7819,16 @@
           <a:ln/>
         </p:spPr>
         <p:txBody>
-          <a:bodyPr wrap="square" lIns="254" tIns="254" rIns="254" bIns="254" rtlCol="0" anchor="t">
+          <a:bodyPr wrap="square" lIns="508" tIns="508" rIns="508" bIns="508" rtlCol="0" anchor="t">
             <a:normAutofit/>
           </a:bodyPr>
           <a:lstStyle/>
           <a:p>
-            <a:r>
-              <a:rPr lang="en-US" sz="1380" dirty="0">
+            <a:pPr indent="0" marL="0">
+              <a:buNone/>
+            </a:pPr>
+            <a:r>
+              <a:rPr lang="en-US" sz="1220" dirty="0">
                 <a:solidFill>
                   <a:srgbClr val="17364A"/>
                 </a:solidFill>
@@ -7724,11 +7838,14 @@
               </a:rPr>
               <a:t>How would staff detect data drift?</a:t>
             </a:r>
-            <a:endParaRPr lang="en-US" sz="1380" dirty="0"/>
-          </a:p>
-          <a:p>
-            <a:r>
-              <a:rPr lang="en-US" sz="1380" dirty="0">
+            <a:endParaRPr lang="en-US" sz="1220" dirty="0"/>
+          </a:p>
+          <a:p>
+            <a:pPr indent="0" marL="0">
+              <a:buNone/>
+            </a:pPr>
+            <a:r>
+              <a:rPr lang="en-US" sz="1220" dirty="0">
                 <a:solidFill>
                   <a:srgbClr val="17364A"/>
                 </a:solidFill>
@@ -7736,9 +7853,9 @@
                 <a:ea typeface="Aptos" pitchFamily="34" charset="-122"/>
                 <a:cs typeface="Aptos" pitchFamily="34" charset="-120"/>
               </a:rPr>
-              <a:t>Who has authority to pause or limit AI use when data quality is insufficient?</a:t>
-            </a:r>
-            <a:endParaRPr lang="en-US" sz="1380" dirty="0"/>
+              <a:t>Who has authority to pause or limit AI use when data quality is.</a:t>
+            </a:r>
+            <a:endParaRPr lang="en-US" sz="1220" dirty="0"/>
           </a:p>
         </p:txBody>
       </p:sp>
@@ -7816,17 +7933,17 @@
         </p:nvSpPr>
         <p:spPr>
           <a:xfrm>
-            <a:off x="7799832" y="5001768"/>
-            <a:ext cx="3145536" cy="502920"/>
-          </a:xfrm>
-          <a:prstGeom prst="rect">
-            <a:avLst/>
-          </a:prstGeom>
-          <a:noFill/>
-          <a:ln/>
-        </p:spPr>
-        <p:txBody>
-          <a:bodyPr wrap="square" lIns="0" tIns="0" rIns="0" bIns="0" rtlCol="0" anchor="t">
+            <a:off x="7799832" y="4974336"/>
+            <a:ext cx="3145536" cy="576072"/>
+          </a:xfrm>
+          <a:prstGeom prst="rect">
+            <a:avLst/>
+          </a:prstGeom>
+          <a:noFill/>
+          <a:ln/>
+        </p:spPr>
+        <p:txBody>
+          <a:bodyPr wrap="square" lIns="254" tIns="254" rIns="254" bIns="254" rtlCol="0" anchor="t">
             <a:normAutofit/>
           </a:bodyPr>
           <a:lstStyle/>
@@ -7835,7 +7952,7 @@
               <a:buNone/>
             </a:pPr>
             <a:r>
-              <a:rPr lang="en-US" sz="1550" dirty="0">
+              <a:rPr lang="en-US" sz="1320" dirty="0">
                 <a:solidFill>
                   <a:srgbClr val="17364A"/>
                 </a:solidFill>
@@ -7843,9 +7960,9 @@
                 <a:ea typeface="Aptos" pitchFamily="34" charset="-122"/>
                 <a:cs typeface="Aptos" pitchFamily="34" charset="-120"/>
               </a:rPr>
-              <a:t>Connect the concept to data quality, model performance, validation evidence, monitoring measures, and decisions that remain under human control.</a:t>
-            </a:r>
-            <a:endParaRPr lang="en-US" sz="1550" dirty="0"/>
+              <a:t>Connect the concept to data quality, model performance, validation evidence, monitoring measures, and decisions that.</a:t>
+            </a:r>
+            <a:endParaRPr lang="en-US" sz="1320" dirty="0"/>
           </a:p>
         </p:txBody>
       </p:sp>
@@ -8146,35 +8263,41 @@
           <a:ln/>
         </p:spPr>
         <p:txBody>
-          <a:bodyPr wrap="square" lIns="635" tIns="635" rIns="635" bIns="635" rtlCol="0" anchor="t">
+          <a:bodyPr wrap="square" lIns="1016" tIns="1016" rIns="1016" bIns="1016" rtlCol="0" anchor="t">
             <a:normAutofit/>
           </a:bodyPr>
           <a:lstStyle/>
           <a:p>
+            <a:pPr indent="0" marL="0">
+              <a:buNone/>
+            </a:pPr>
             <a:r>
               <a:rPr lang="en-US" sz="2100" dirty="0">
                 <a:solidFill>
-                  <a:srgbClr val="17364A"/>
-                </a:solidFill>
-                <a:latin typeface="Aptos" pitchFamily="34" charset="0"/>
-                <a:ea typeface="Aptos" pitchFamily="34" charset="-122"/>
-                <a:cs typeface="Aptos" pitchFamily="34" charset="-120"/>
-              </a:rPr>
-              <a:t>Create a data quality review plan for one AI-supported workflow.</a:t>
+                  <a:srgbClr val="003A63"/>
+                </a:solidFill>
+                <a:latin typeface="Aptos" pitchFamily="34" charset="0"/>
+                <a:ea typeface="Aptos" pitchFamily="34" charset="-122"/>
+                <a:cs typeface="Aptos" pitchFamily="34" charset="-120"/>
+              </a:rPr>
+              <a:t>• Create a data quality review plan for one AI-supported workflow.</a:t>
             </a:r>
             <a:endParaRPr lang="en-US" sz="2100" dirty="0"/>
           </a:p>
           <a:p>
+            <a:pPr indent="0" marL="0">
+              <a:buNone/>
+            </a:pPr>
             <a:r>
               <a:rPr lang="en-US" sz="2100" dirty="0">
                 <a:solidFill>
-                  <a:srgbClr val="17364A"/>
-                </a:solidFill>
-                <a:latin typeface="Aptos" pitchFamily="34" charset="0"/>
-                <a:ea typeface="Aptos" pitchFamily="34" charset="-122"/>
-                <a:cs typeface="Aptos" pitchFamily="34" charset="-120"/>
-              </a:rPr>
-              <a:t>Include the use case, required fields, quality dimensions, thresholds or review rules, known.</a:t>
+                  <a:srgbClr val="003A63"/>
+                </a:solidFill>
+                <a:latin typeface="Aptos" pitchFamily="34" charset="0"/>
+                <a:ea typeface="Aptos" pitchFamily="34" charset="-122"/>
+                <a:cs typeface="Aptos" pitchFamily="34" charset="-120"/>
+              </a:rPr>
+              <a:t>• Include the use case, required fields, quality dimensions, thresholds or review rules, known.</a:t>
             </a:r>
             <a:endParaRPr lang="en-US" sz="2100" dirty="0"/>
           </a:p>
@@ -8254,17 +8377,17 @@
         </p:nvSpPr>
         <p:spPr>
           <a:xfrm>
-            <a:off x="7799832" y="1828800"/>
-            <a:ext cx="3145536" cy="685800"/>
-          </a:xfrm>
-          <a:prstGeom prst="rect">
-            <a:avLst/>
-          </a:prstGeom>
-          <a:noFill/>
-          <a:ln/>
-        </p:spPr>
-        <p:txBody>
-          <a:bodyPr wrap="square" lIns="0" tIns="0" rIns="0" bIns="0" rtlCol="0" anchor="t">
+            <a:off x="7799832" y="1801368"/>
+            <a:ext cx="3145536" cy="758952"/>
+          </a:xfrm>
+          <a:prstGeom prst="rect">
+            <a:avLst/>
+          </a:prstGeom>
+          <a:noFill/>
+          <a:ln/>
+        </p:spPr>
+        <p:txBody>
+          <a:bodyPr wrap="square" lIns="254" tIns="254" rIns="254" bIns="254" rtlCol="0" anchor="t">
             <a:normAutofit/>
           </a:bodyPr>
           <a:lstStyle/>
@@ -8273,7 +8396,7 @@
               <a:buNone/>
             </a:pPr>
             <a:r>
-              <a:rPr lang="en-US" sz="1550" dirty="0">
+              <a:rPr lang="en-US" sz="1320" dirty="0">
                 <a:solidFill>
                   <a:srgbClr val="17364A"/>
                 </a:solidFill>
@@ -8283,7 +8406,7 @@
               </a:rPr>
               <a:t>Create a data quality review plan for one AI-supported workflow.</a:t>
             </a:r>
-            <a:endParaRPr lang="en-US" sz="1550" dirty="0"/>
+            <a:endParaRPr lang="en-US" sz="1320" dirty="0"/>
           </a:p>
         </p:txBody>
       </p:sp>
@@ -8371,13 +8494,16 @@
           <a:ln/>
         </p:spPr>
         <p:txBody>
-          <a:bodyPr wrap="square" lIns="254" tIns="254" rIns="254" bIns="254" rtlCol="0" anchor="t">
+          <a:bodyPr wrap="square" lIns="508" tIns="508" rIns="508" bIns="508" rtlCol="0" anchor="t">
             <a:normAutofit/>
           </a:bodyPr>
           <a:lstStyle/>
           <a:p>
-            <a:r>
-              <a:rPr lang="en-US" sz="1380" dirty="0">
+            <a:pPr indent="0" marL="0">
+              <a:buNone/>
+            </a:pPr>
+            <a:r>
+              <a:rPr lang="en-US" sz="1220" dirty="0">
                 <a:solidFill>
                   <a:srgbClr val="17364A"/>
                 </a:solidFill>
@@ -8387,11 +8513,14 @@
               </a:rPr>
               <a:t>Create a data quality review plan for one AI-supported workflow.</a:t>
             </a:r>
-            <a:endParaRPr lang="en-US" sz="1380" dirty="0"/>
-          </a:p>
-          <a:p>
-            <a:r>
-              <a:rPr lang="en-US" sz="1380" dirty="0">
+            <a:endParaRPr lang="en-US" sz="1220" dirty="0"/>
+          </a:p>
+          <a:p>
+            <a:pPr indent="0" marL="0">
+              <a:buNone/>
+            </a:pPr>
+            <a:r>
+              <a:rPr lang="en-US" sz="1220" dirty="0">
                 <a:solidFill>
                   <a:srgbClr val="17364A"/>
                 </a:solidFill>
@@ -8399,9 +8528,9 @@
                 <a:ea typeface="Aptos" pitchFamily="34" charset="-122"/>
                 <a:cs typeface="Aptos" pitchFamily="34" charset="-120"/>
               </a:rPr>
-              <a:t>Include the use case, required fields, quality dimensions, thresholds or review rules,.</a:t>
-            </a:r>
-            <a:endParaRPr lang="en-US" sz="1380" dirty="0"/>
+              <a:t>Include the use case, required fields, quality dimensions,.</a:t>
+            </a:r>
+            <a:endParaRPr lang="en-US" sz="1220" dirty="0"/>
           </a:p>
         </p:txBody>
       </p:sp>
@@ -8479,17 +8608,17 @@
         </p:nvSpPr>
         <p:spPr>
           <a:xfrm>
-            <a:off x="7799832" y="5001768"/>
-            <a:ext cx="3145536" cy="502920"/>
-          </a:xfrm>
-          <a:prstGeom prst="rect">
-            <a:avLst/>
-          </a:prstGeom>
-          <a:noFill/>
-          <a:ln/>
-        </p:spPr>
-        <p:txBody>
-          <a:bodyPr wrap="square" lIns="0" tIns="0" rIns="0" bIns="0" rtlCol="0" anchor="t">
+            <a:off x="7799832" y="4974336"/>
+            <a:ext cx="3145536" cy="576072"/>
+          </a:xfrm>
+          <a:prstGeom prst="rect">
+            <a:avLst/>
+          </a:prstGeom>
+          <a:noFill/>
+          <a:ln/>
+        </p:spPr>
+        <p:txBody>
+          <a:bodyPr wrap="square" lIns="254" tIns="254" rIns="254" bIns="254" rtlCol="0" anchor="t">
             <a:normAutofit/>
           </a:bodyPr>
           <a:lstStyle/>
@@ -8498,7 +8627,7 @@
               <a:buNone/>
             </a:pPr>
             <a:r>
-              <a:rPr lang="en-US" sz="1550" dirty="0">
+              <a:rPr lang="en-US" sz="1320" dirty="0">
                 <a:solidFill>
                   <a:srgbClr val="17364A"/>
                 </a:solidFill>
@@ -8506,9 +8635,9 @@
                 <a:ea typeface="Aptos" pitchFamily="34" charset="-122"/>
                 <a:cs typeface="Aptos" pitchFamily="34" charset="-120"/>
               </a:rPr>
-              <a:t>Use the assignment to test whether you can explain the concept, apply it to a realistic public health situation, and identify what would need review before the work moves forward.</a:t>
-            </a:r>
-            <a:endParaRPr lang="en-US" sz="1550" dirty="0"/>
+              <a:t>Use the assignment to test whether you can explain the concept, apply it to a realistic public health situation, and.</a:t>
+            </a:r>
+            <a:endParaRPr lang="en-US" sz="1320" dirty="0"/>
           </a:p>
         </p:txBody>
       </p:sp>
@@ -8809,49 +8938,58 @@
           <a:ln/>
         </p:spPr>
         <p:txBody>
-          <a:bodyPr wrap="square" lIns="635" tIns="635" rIns="635" bIns="635" rtlCol="0" anchor="t">
+          <a:bodyPr wrap="square" lIns="1016" tIns="1016" rIns="1016" bIns="1016" rtlCol="0" anchor="t">
             <a:normAutofit/>
           </a:bodyPr>
           <a:lstStyle/>
           <a:p>
+            <a:pPr indent="0" marL="0">
+              <a:buNone/>
+            </a:pPr>
             <a:r>
               <a:rPr lang="en-US" sz="2100" dirty="0">
                 <a:solidFill>
-                  <a:srgbClr val="17364A"/>
-                </a:solidFill>
-                <a:latin typeface="Aptos" pitchFamily="34" charset="0"/>
-                <a:ea typeface="Aptos" pitchFamily="34" charset="-122"/>
-                <a:cs typeface="Aptos" pitchFamily="34" charset="-120"/>
-              </a:rPr>
-              <a:t>Data quality review plan</a:t>
+                  <a:srgbClr val="003A63"/>
+                </a:solidFill>
+                <a:latin typeface="Aptos" pitchFamily="34" charset="0"/>
+                <a:ea typeface="Aptos" pitchFamily="34" charset="-122"/>
+                <a:cs typeface="Aptos" pitchFamily="34" charset="-120"/>
+              </a:rPr>
+              <a:t>• Data quality review plan</a:t>
             </a:r>
             <a:endParaRPr lang="en-US" sz="2100" dirty="0"/>
           </a:p>
           <a:p>
+            <a:pPr indent="0" marL="0">
+              <a:buNone/>
+            </a:pPr>
             <a:r>
               <a:rPr lang="en-US" sz="2100" dirty="0">
                 <a:solidFill>
-                  <a:srgbClr val="17364A"/>
-                </a:solidFill>
-                <a:latin typeface="Aptos" pitchFamily="34" charset="0"/>
-                <a:ea typeface="Aptos" pitchFamily="34" charset="-122"/>
-                <a:cs typeface="Aptos" pitchFamily="34" charset="-120"/>
-              </a:rPr>
-              <a:t>Data quality checklist</a:t>
+                  <a:srgbClr val="003A63"/>
+                </a:solidFill>
+                <a:latin typeface="Aptos" pitchFamily="34" charset="0"/>
+                <a:ea typeface="Aptos" pitchFamily="34" charset="-122"/>
+                <a:cs typeface="Aptos" pitchFamily="34" charset="-120"/>
+              </a:rPr>
+              <a:t>• Data quality checklist</a:t>
             </a:r>
             <a:endParaRPr lang="en-US" sz="2100" dirty="0"/>
           </a:p>
           <a:p>
+            <a:pPr indent="0" marL="0">
+              <a:buNone/>
+            </a:pPr>
             <a:r>
               <a:rPr lang="en-US" sz="2100" dirty="0">
                 <a:solidFill>
-                  <a:srgbClr val="17364A"/>
-                </a:solidFill>
-                <a:latin typeface="Aptos" pitchFamily="34" charset="0"/>
-                <a:ea typeface="Aptos" pitchFamily="34" charset="-122"/>
-                <a:cs typeface="Aptos" pitchFamily="34" charset="-120"/>
-              </a:rPr>
-              <a:t>Thresholds or review criteria</a:t>
+                  <a:srgbClr val="003A63"/>
+                </a:solidFill>
+                <a:latin typeface="Aptos" pitchFamily="34" charset="0"/>
+                <a:ea typeface="Aptos" pitchFamily="34" charset="-122"/>
+                <a:cs typeface="Aptos" pitchFamily="34" charset="-120"/>
+              </a:rPr>
+              <a:t>• Thresholds or review criteria</a:t>
             </a:r>
             <a:endParaRPr lang="en-US" sz="2100" dirty="0"/>
           </a:p>
@@ -8931,17 +9069,17 @@
         </p:nvSpPr>
         <p:spPr>
           <a:xfrm>
-            <a:off x="7799832" y="1828800"/>
-            <a:ext cx="3145536" cy="685800"/>
-          </a:xfrm>
-          <a:prstGeom prst="rect">
-            <a:avLst/>
-          </a:prstGeom>
-          <a:noFill/>
-          <a:ln/>
-        </p:spPr>
-        <p:txBody>
-          <a:bodyPr wrap="square" lIns="0" tIns="0" rIns="0" bIns="0" rtlCol="0" anchor="t">
+            <a:off x="7799832" y="1801368"/>
+            <a:ext cx="3145536" cy="758952"/>
+          </a:xfrm>
+          <a:prstGeom prst="rect">
+            <a:avLst/>
+          </a:prstGeom>
+          <a:noFill/>
+          <a:ln/>
+        </p:spPr>
+        <p:txBody>
+          <a:bodyPr wrap="square" lIns="254" tIns="254" rIns="254" bIns="254" rtlCol="0" anchor="t">
             <a:normAutofit/>
           </a:bodyPr>
           <a:lstStyle/>
@@ -8950,7 +9088,7 @@
               <a:buNone/>
             </a:pPr>
             <a:r>
-              <a:rPr lang="en-US" sz="1550" dirty="0">
+              <a:rPr lang="en-US" sz="1320" dirty="0">
                 <a:solidFill>
                   <a:srgbClr val="17364A"/>
                 </a:solidFill>
@@ -8960,7 +9098,7 @@
               </a:rPr>
               <a:t>Data quality review plan</a:t>
             </a:r>
-            <a:endParaRPr lang="en-US" sz="1550" dirty="0"/>
+            <a:endParaRPr lang="en-US" sz="1320" dirty="0"/>
           </a:p>
         </p:txBody>
       </p:sp>
@@ -9048,13 +9186,16 @@
           <a:ln/>
         </p:spPr>
         <p:txBody>
-          <a:bodyPr wrap="square" lIns="254" tIns="254" rIns="254" bIns="254" rtlCol="0" anchor="t">
+          <a:bodyPr wrap="square" lIns="508" tIns="508" rIns="508" bIns="508" rtlCol="0" anchor="t">
             <a:normAutofit/>
           </a:bodyPr>
           <a:lstStyle/>
           <a:p>
-            <a:r>
-              <a:rPr lang="en-US" sz="1380" dirty="0">
+            <a:pPr indent="0" marL="0">
+              <a:buNone/>
+            </a:pPr>
+            <a:r>
+              <a:rPr lang="en-US" sz="1220" dirty="0">
                 <a:solidFill>
                   <a:srgbClr val="17364A"/>
                 </a:solidFill>
@@ -9064,11 +9205,14 @@
               </a:rPr>
               <a:t>Data quality review plan</a:t>
             </a:r>
-            <a:endParaRPr lang="en-US" sz="1380" dirty="0"/>
-          </a:p>
-          <a:p>
-            <a:r>
-              <a:rPr lang="en-US" sz="1380" dirty="0">
+            <a:endParaRPr lang="en-US" sz="1220" dirty="0"/>
+          </a:p>
+          <a:p>
+            <a:pPr indent="0" marL="0">
+              <a:buNone/>
+            </a:pPr>
+            <a:r>
+              <a:rPr lang="en-US" sz="1220" dirty="0">
                 <a:solidFill>
                   <a:srgbClr val="17364A"/>
                 </a:solidFill>
@@ -9078,11 +9222,14 @@
               </a:rPr>
               <a:t>Data quality checklist</a:t>
             </a:r>
-            <a:endParaRPr lang="en-US" sz="1380" dirty="0"/>
-          </a:p>
-          <a:p>
-            <a:r>
-              <a:rPr lang="en-US" sz="1380" dirty="0">
+            <a:endParaRPr lang="en-US" sz="1220" dirty="0"/>
+          </a:p>
+          <a:p>
+            <a:pPr indent="0" marL="0">
+              <a:buNone/>
+            </a:pPr>
+            <a:r>
+              <a:rPr lang="en-US" sz="1220" dirty="0">
                 <a:solidFill>
                   <a:srgbClr val="17364A"/>
                 </a:solidFill>
@@ -9092,7 +9239,7 @@
               </a:rPr>
               <a:t>Thresholds or review criteria</a:t>
             </a:r>
-            <a:endParaRPr lang="en-US" sz="1380" dirty="0"/>
+            <a:endParaRPr lang="en-US" sz="1220" dirty="0"/>
           </a:p>
         </p:txBody>
       </p:sp>
@@ -9170,17 +9317,17 @@
         </p:nvSpPr>
         <p:spPr>
           <a:xfrm>
-            <a:off x="7799832" y="5001768"/>
-            <a:ext cx="3145536" cy="502920"/>
-          </a:xfrm>
-          <a:prstGeom prst="rect">
-            <a:avLst/>
-          </a:prstGeom>
-          <a:noFill/>
-          <a:ln/>
-        </p:spPr>
-        <p:txBody>
-          <a:bodyPr wrap="square" lIns="0" tIns="0" rIns="0" bIns="0" rtlCol="0" anchor="t">
+            <a:off x="7799832" y="4974336"/>
+            <a:ext cx="3145536" cy="576072"/>
+          </a:xfrm>
+          <a:prstGeom prst="rect">
+            <a:avLst/>
+          </a:prstGeom>
+          <a:noFill/>
+          <a:ln/>
+        </p:spPr>
+        <p:txBody>
+          <a:bodyPr wrap="square" lIns="254" tIns="254" rIns="254" bIns="254" rtlCol="0" anchor="t">
             <a:normAutofit/>
           </a:bodyPr>
           <a:lstStyle/>
@@ -9189,7 +9336,7 @@
               <a:buNone/>
             </a:pPr>
             <a:r>
-              <a:rPr lang="en-US" sz="1550" dirty="0">
+              <a:rPr lang="en-US" sz="1320" dirty="0">
                 <a:solidFill>
                   <a:srgbClr val="17364A"/>
                 </a:solidFill>
@@ -9197,9 +9344,9 @@
                 <a:ea typeface="Aptos" pitchFamily="34" charset="-122"/>
                 <a:cs typeface="Aptos" pitchFamily="34" charset="-120"/>
               </a:rPr>
-              <a:t>Connect the concept to data quality, model performance, validation evidence, monitoring measures, and decisions that remain under human control.</a:t>
-            </a:r>
-            <a:endParaRPr lang="en-US" sz="1550" dirty="0"/>
+              <a:t>Connect the concept to data quality, model performance, validation evidence, monitoring measures, and decisions that.</a:t>
+            </a:r>
+            <a:endParaRPr lang="en-US" sz="1320" dirty="0"/>
           </a:p>
         </p:txBody>
       </p:sp>
@@ -9500,21 +9647,24 @@
           <a:ln/>
         </p:spPr>
         <p:txBody>
-          <a:bodyPr wrap="square" lIns="635" tIns="635" rIns="635" bIns="635" rtlCol="0" anchor="t">
+          <a:bodyPr wrap="square" lIns="1016" tIns="1016" rIns="1016" bIns="1016" rtlCol="0" anchor="t">
             <a:normAutofit/>
           </a:bodyPr>
           <a:lstStyle/>
           <a:p>
+            <a:pPr indent="0" marL="0">
+              <a:buNone/>
+            </a:pPr>
             <a:r>
               <a:rPr lang="en-US" sz="2100" dirty="0">
                 <a:solidFill>
-                  <a:srgbClr val="17364A"/>
-                </a:solidFill>
-                <a:latin typeface="Aptos" pitchFamily="34" charset="0"/>
-                <a:ea typeface="Aptos" pitchFamily="34" charset="-122"/>
-                <a:cs typeface="Aptos" pitchFamily="34" charset="-120"/>
-              </a:rPr>
-              <a:t>Known limitations statement</a:t>
+                  <a:srgbClr val="003A63"/>
+                </a:solidFill>
+                <a:latin typeface="Aptos" pitchFamily="34" charset="0"/>
+                <a:ea typeface="Aptos" pitchFamily="34" charset="-122"/>
+                <a:cs typeface="Aptos" pitchFamily="34" charset="-120"/>
+              </a:rPr>
+              <a:t>• Known limitations statement</a:t>
             </a:r>
             <a:endParaRPr lang="en-US" sz="2100" dirty="0"/>
           </a:p>
@@ -9594,17 +9744,17 @@
         </p:nvSpPr>
         <p:spPr>
           <a:xfrm>
-            <a:off x="7799832" y="1828800"/>
-            <a:ext cx="3145536" cy="685800"/>
-          </a:xfrm>
-          <a:prstGeom prst="rect">
-            <a:avLst/>
-          </a:prstGeom>
-          <a:noFill/>
-          <a:ln/>
-        </p:spPr>
-        <p:txBody>
-          <a:bodyPr wrap="square" lIns="0" tIns="0" rIns="0" bIns="0" rtlCol="0" anchor="t">
+            <a:off x="7799832" y="1801368"/>
+            <a:ext cx="3145536" cy="758952"/>
+          </a:xfrm>
+          <a:prstGeom prst="rect">
+            <a:avLst/>
+          </a:prstGeom>
+          <a:noFill/>
+          <a:ln/>
+        </p:spPr>
+        <p:txBody>
+          <a:bodyPr wrap="square" lIns="254" tIns="254" rIns="254" bIns="254" rtlCol="0" anchor="t">
             <a:normAutofit/>
           </a:bodyPr>
           <a:lstStyle/>
@@ -9613,7 +9763,7 @@
               <a:buNone/>
             </a:pPr>
             <a:r>
-              <a:rPr lang="en-US" sz="1550" dirty="0">
+              <a:rPr lang="en-US" sz="1320" dirty="0">
                 <a:solidFill>
                   <a:srgbClr val="17364A"/>
                 </a:solidFill>
@@ -9623,7 +9773,7 @@
               </a:rPr>
               <a:t>Known limitations statement</a:t>
             </a:r>
-            <a:endParaRPr lang="en-US" sz="1550" dirty="0"/>
+            <a:endParaRPr lang="en-US" sz="1320" dirty="0"/>
           </a:p>
         </p:txBody>
       </p:sp>
@@ -9711,13 +9861,16 @@
           <a:ln/>
         </p:spPr>
         <p:txBody>
-          <a:bodyPr wrap="square" lIns="254" tIns="254" rIns="254" bIns="254" rtlCol="0" anchor="t">
+          <a:bodyPr wrap="square" lIns="508" tIns="508" rIns="508" bIns="508" rtlCol="0" anchor="t">
             <a:normAutofit/>
           </a:bodyPr>
           <a:lstStyle/>
           <a:p>
-            <a:r>
-              <a:rPr lang="en-US" sz="1380" dirty="0">
+            <a:pPr indent="0" marL="0">
+              <a:buNone/>
+            </a:pPr>
+            <a:r>
+              <a:rPr lang="en-US" sz="1220" dirty="0">
                 <a:solidFill>
                   <a:srgbClr val="17364A"/>
                 </a:solidFill>
@@ -9727,7 +9880,7 @@
               </a:rPr>
               <a:t>Known limitations statement</a:t>
             </a:r>
-            <a:endParaRPr lang="en-US" sz="1380" dirty="0"/>
+            <a:endParaRPr lang="en-US" sz="1220" dirty="0"/>
           </a:p>
         </p:txBody>
       </p:sp>
@@ -9805,17 +9958,17 @@
         </p:nvSpPr>
         <p:spPr>
           <a:xfrm>
-            <a:off x="7799832" y="5001768"/>
-            <a:ext cx="3145536" cy="502920"/>
-          </a:xfrm>
-          <a:prstGeom prst="rect">
-            <a:avLst/>
-          </a:prstGeom>
-          <a:noFill/>
-          <a:ln/>
-        </p:spPr>
-        <p:txBody>
-          <a:bodyPr wrap="square" lIns="0" tIns="0" rIns="0" bIns="0" rtlCol="0" anchor="t">
+            <a:off x="7799832" y="4974336"/>
+            <a:ext cx="3145536" cy="576072"/>
+          </a:xfrm>
+          <a:prstGeom prst="rect">
+            <a:avLst/>
+          </a:prstGeom>
+          <a:noFill/>
+          <a:ln/>
+        </p:spPr>
+        <p:txBody>
+          <a:bodyPr wrap="square" lIns="254" tIns="254" rIns="254" bIns="254" rtlCol="0" anchor="t">
             <a:normAutofit/>
           </a:bodyPr>
           <a:lstStyle/>
@@ -9824,7 +9977,7 @@
               <a:buNone/>
             </a:pPr>
             <a:r>
-              <a:rPr lang="en-US" sz="1550" dirty="0">
+              <a:rPr lang="en-US" sz="1320" dirty="0">
                 <a:solidFill>
                   <a:srgbClr val="17364A"/>
                 </a:solidFill>
@@ -9832,9 +9985,9 @@
                 <a:ea typeface="Aptos" pitchFamily="34" charset="-122"/>
                 <a:cs typeface="Aptos" pitchFamily="34" charset="-120"/>
               </a:rPr>
-              <a:t>Connect the concept to data quality, model performance, validation evidence, monitoring measures, and decisions that remain under human control.</a:t>
-            </a:r>
-            <a:endParaRPr lang="en-US" sz="1550" dirty="0"/>
+              <a:t>Connect the concept to data quality, model performance, validation evidence, monitoring measures, and decisions that.</a:t>
+            </a:r>
+            <a:endParaRPr lang="en-US" sz="1320" dirty="0"/>
           </a:p>
         </p:txBody>
       </p:sp>
@@ -10135,49 +10288,58 @@
           <a:ln/>
         </p:spPr>
         <p:txBody>
-          <a:bodyPr wrap="square" lIns="635" tIns="635" rIns="635" bIns="635" rtlCol="0" anchor="t">
+          <a:bodyPr wrap="square" lIns="1016" tIns="1016" rIns="1016" bIns="1016" rtlCol="0" anchor="t">
             <a:normAutofit/>
           </a:bodyPr>
           <a:lstStyle/>
           <a:p>
+            <a:pPr indent="0" marL="0">
+              <a:buNone/>
+            </a:pPr>
             <a:r>
               <a:rPr lang="en-US" sz="2100" dirty="0">
                 <a:solidFill>
-                  <a:srgbClr val="17364A"/>
-                </a:solidFill>
-                <a:latin typeface="Aptos" pitchFamily="34" charset="0"/>
-                <a:ea typeface="Aptos" pitchFamily="34" charset="-122"/>
-                <a:cs typeface="Aptos" pitchFamily="34" charset="-120"/>
-              </a:rPr>
-              <a:t>Data quality engineering is the practical work of defining, measuring, improving, and monitoring data quality so.</a:t>
+                  <a:srgbClr val="003A63"/>
+                </a:solidFill>
+                <a:latin typeface="Aptos" pitchFamily="34" charset="0"/>
+                <a:ea typeface="Aptos" pitchFamily="34" charset="-122"/>
+                <a:cs typeface="Aptos" pitchFamily="34" charset="-120"/>
+              </a:rPr>
+              <a:t>• Data quality engineering is the practical work of defining, measuring, improving, and.</a:t>
             </a:r>
             <a:endParaRPr lang="en-US" sz="2100" dirty="0"/>
           </a:p>
           <a:p>
+            <a:pPr indent="0" marL="0">
+              <a:buNone/>
+            </a:pPr>
             <a:r>
               <a:rPr lang="en-US" sz="2100" dirty="0">
                 <a:solidFill>
-                  <a:srgbClr val="17364A"/>
-                </a:solidFill>
-                <a:latin typeface="Aptos" pitchFamily="34" charset="0"/>
-                <a:ea typeface="Aptos" pitchFamily="34" charset="-122"/>
-                <a:cs typeface="Aptos" pitchFamily="34" charset="-120"/>
-              </a:rPr>
-              <a:t>In public health AI, data quality is not a background concern.</a:t>
+                  <a:srgbClr val="003A63"/>
+                </a:solidFill>
+                <a:latin typeface="Aptos" pitchFamily="34" charset="0"/>
+                <a:ea typeface="Aptos" pitchFamily="34" charset="-122"/>
+                <a:cs typeface="Aptos" pitchFamily="34" charset="-120"/>
+              </a:rPr>
+              <a:t>• In public health AI, data quality is not a background concern.</a:t>
             </a:r>
             <a:endParaRPr lang="en-US" sz="2100" dirty="0"/>
           </a:p>
           <a:p>
+            <a:pPr indent="0" marL="0">
+              <a:buNone/>
+            </a:pPr>
             <a:r>
               <a:rPr lang="en-US" sz="2100" dirty="0">
                 <a:solidFill>
-                  <a:srgbClr val="17364A"/>
-                </a:solidFill>
-                <a:latin typeface="Aptos" pitchFamily="34" charset="0"/>
-                <a:ea typeface="Aptos" pitchFamily="34" charset="-122"/>
-                <a:cs typeface="Aptos" pitchFamily="34" charset="-120"/>
-              </a:rPr>
-              <a:t>It directly affects whether AI outputs are accurate, equitable, timely, and safe enough to support public health.</a:t>
+                  <a:srgbClr val="003A63"/>
+                </a:solidFill>
+                <a:latin typeface="Aptos" pitchFamily="34" charset="0"/>
+                <a:ea typeface="Aptos" pitchFamily="34" charset="-122"/>
+                <a:cs typeface="Aptos" pitchFamily="34" charset="-120"/>
+              </a:rPr>
+              <a:t>• It directly affects whether AI outputs are accurate, equitable, timely, and safe enough to.</a:t>
             </a:r>
             <a:endParaRPr lang="en-US" sz="2100" dirty="0"/>
           </a:p>
@@ -10257,17 +10419,17 @@
         </p:nvSpPr>
         <p:spPr>
           <a:xfrm>
-            <a:off x="8074152" y="1920240"/>
-            <a:ext cx="2825496" cy="1280160"/>
-          </a:xfrm>
-          <a:prstGeom prst="rect">
-            <a:avLst/>
-          </a:prstGeom>
-          <a:noFill/>
-          <a:ln/>
-        </p:spPr>
-        <p:txBody>
-          <a:bodyPr wrap="square" lIns="0" tIns="0" rIns="0" bIns="0" rtlCol="0" anchor="t">
+            <a:off x="8074152" y="1892808"/>
+            <a:ext cx="2825496" cy="1353312"/>
+          </a:xfrm>
+          <a:prstGeom prst="rect">
+            <a:avLst/>
+          </a:prstGeom>
+          <a:noFill/>
+          <a:ln/>
+        </p:spPr>
+        <p:txBody>
+          <a:bodyPr wrap="square" lIns="254" tIns="254" rIns="254" bIns="254" rtlCol="0" anchor="t">
             <a:normAutofit/>
           </a:bodyPr>
           <a:lstStyle/>
@@ -10276,7 +10438,7 @@
               <a:buNone/>
             </a:pPr>
             <a:r>
-              <a:rPr lang="en-US" sz="1550" dirty="0">
+              <a:rPr lang="en-US" sz="1320" dirty="0">
                 <a:solidFill>
                   <a:srgbClr val="17364A"/>
                 </a:solidFill>
@@ -10284,43 +10446,9 @@
                 <a:ea typeface="Aptos" pitchFamily="34" charset="-122"/>
                 <a:cs typeface="Aptos" pitchFamily="34" charset="-120"/>
               </a:rPr>
-              <a:t>Level: applied/foundational</a:t>
-            </a:r>
-            <a:endParaRPr lang="en-US" sz="1550" dirty="0"/>
-          </a:p>
-          <a:p>
-            <a:pPr indent="0" marL="0">
-              <a:buNone/>
-            </a:pPr>
-            <a:r>
-              <a:rPr lang="en-US" sz="1550" dirty="0">
-                <a:solidFill>
-                  <a:srgbClr val="17364A"/>
-                </a:solidFill>
-                <a:latin typeface="Aptos" pitchFamily="34" charset="0"/>
-                <a:ea typeface="Aptos" pitchFamily="34" charset="-122"/>
-                <a:cs typeface="Aptos" pitchFamily="34" charset="-120"/>
-              </a:rPr>
-              <a:t>Primary track: Operations and Data Quality Track</a:t>
-            </a:r>
-            <a:endParaRPr lang="en-US" sz="1550" dirty="0"/>
-          </a:p>
-          <a:p>
-            <a:pPr indent="0" marL="0">
-              <a:buNone/>
-            </a:pPr>
-            <a:r>
-              <a:rPr lang="en-US" sz="1550" dirty="0">
-                <a:solidFill>
-                  <a:srgbClr val="17364A"/>
-                </a:solidFill>
-                <a:latin typeface="Aptos" pitchFamily="34" charset="0"/>
-                <a:ea typeface="Aptos" pitchFamily="34" charset="-122"/>
-                <a:cs typeface="Aptos" pitchFamily="34" charset="-120"/>
-              </a:rPr>
-              <a:t>Appears in tracks: technical-architecture</a:t>
-            </a:r>
-            <a:endParaRPr lang="en-US" sz="1550" dirty="0"/>
+              <a:t>Level: applied/foundational Primary track: Operations and Data Quality Track Appears in tracks: technical-architecture</a:t>
+            </a:r>
+            <a:endParaRPr lang="en-US" sz="1320" dirty="0"/>
           </a:p>
         </p:txBody>
       </p:sp>
@@ -10408,13 +10536,16 @@
           <a:ln/>
         </p:spPr>
         <p:txBody>
-          <a:bodyPr wrap="square" lIns="254" tIns="254" rIns="254" bIns="254" rtlCol="0" anchor="t">
+          <a:bodyPr wrap="square" lIns="508" tIns="508" rIns="508" bIns="508" rtlCol="0" anchor="t">
             <a:normAutofit/>
           </a:bodyPr>
           <a:lstStyle/>
           <a:p>
-            <a:r>
-              <a:rPr lang="en-US" sz="1380" dirty="0">
+            <a:pPr indent="0" marL="0">
+              <a:buNone/>
+            </a:pPr>
+            <a:r>
+              <a:rPr lang="en-US" sz="1220" dirty="0">
                 <a:solidFill>
                   <a:srgbClr val="17364A"/>
                 </a:solidFill>
@@ -10424,11 +10555,14 @@
               </a:rPr>
               <a:t>Read the module for shared vocabulary and context.</a:t>
             </a:r>
-            <a:endParaRPr lang="en-US" sz="1380" dirty="0"/>
-          </a:p>
-          <a:p>
-            <a:r>
-              <a:rPr lang="en-US" sz="1380" dirty="0">
+            <a:endParaRPr lang="en-US" sz="1220" dirty="0"/>
+          </a:p>
+          <a:p>
+            <a:pPr indent="0" marL="0">
+              <a:buNone/>
+            </a:pPr>
+            <a:r>
+              <a:rPr lang="en-US" sz="1220" dirty="0">
                 <a:solidFill>
                   <a:srgbClr val="17364A"/>
                 </a:solidFill>
@@ -10438,11 +10572,14 @@
               </a:rPr>
               <a:t>Complete the practical exercise to apply the concept.</a:t>
             </a:r>
-            <a:endParaRPr lang="en-US" sz="1380" dirty="0"/>
-          </a:p>
-          <a:p>
-            <a:r>
-              <a:rPr lang="en-US" sz="1380" dirty="0">
+            <a:endParaRPr lang="en-US" sz="1220" dirty="0"/>
+          </a:p>
+          <a:p>
+            <a:pPr indent="0" marL="0">
+              <a:buNone/>
+            </a:pPr>
+            <a:r>
+              <a:rPr lang="en-US" sz="1220" dirty="0">
                 <a:solidFill>
                   <a:srgbClr val="17364A"/>
                 </a:solidFill>
@@ -10452,7 +10589,7 @@
               </a:rPr>
               <a:t>Use the notes and references for deeper review.</a:t>
             </a:r>
-            <a:endParaRPr lang="en-US" sz="1380" dirty="0"/>
+            <a:endParaRPr lang="en-US" sz="1220" dirty="0"/>
           </a:p>
         </p:txBody>
       </p:sp>
@@ -10753,49 +10890,58 @@
           <a:ln/>
         </p:spPr>
         <p:txBody>
-          <a:bodyPr wrap="square" lIns="635" tIns="635" rIns="635" bIns="635" rtlCol="0" anchor="t">
+          <a:bodyPr wrap="square" lIns="1016" tIns="1016" rIns="1016" bIns="1016" rtlCol="0" anchor="t">
             <a:normAutofit/>
           </a:bodyPr>
           <a:lstStyle/>
           <a:p>
+            <a:pPr indent="0" marL="0">
+              <a:buNone/>
+            </a:pPr>
             <a:r>
               <a:rPr lang="en-US" sz="2100" dirty="0">
                 <a:solidFill>
-                  <a:srgbClr val="17364A"/>
-                </a:solidFill>
-                <a:latin typeface="Aptos" pitchFamily="34" charset="0"/>
-                <a:ea typeface="Aptos" pitchFamily="34" charset="-122"/>
-                <a:cs typeface="Aptos" pitchFamily="34" charset="-120"/>
-              </a:rPr>
-              <a:t>Data quality review plan</a:t>
+                  <a:srgbClr val="003A63"/>
+                </a:solidFill>
+                <a:latin typeface="Aptos" pitchFamily="34" charset="0"/>
+                <a:ea typeface="Aptos" pitchFamily="34" charset="-122"/>
+                <a:cs typeface="Aptos" pitchFamily="34" charset="-120"/>
+              </a:rPr>
+              <a:t>• Data quality review plan</a:t>
             </a:r>
             <a:endParaRPr lang="en-US" sz="2100" dirty="0"/>
           </a:p>
           <a:p>
+            <a:pPr indent="0" marL="0">
+              <a:buNone/>
+            </a:pPr>
             <a:r>
               <a:rPr lang="en-US" sz="2100" dirty="0">
                 <a:solidFill>
-                  <a:srgbClr val="17364A"/>
-                </a:solidFill>
-                <a:latin typeface="Aptos" pitchFamily="34" charset="0"/>
-                <a:ea typeface="Aptos" pitchFamily="34" charset="-122"/>
-                <a:cs typeface="Aptos" pitchFamily="34" charset="-120"/>
-              </a:rPr>
-              <a:t>Data quality checklist</a:t>
+                  <a:srgbClr val="003A63"/>
+                </a:solidFill>
+                <a:latin typeface="Aptos" pitchFamily="34" charset="0"/>
+                <a:ea typeface="Aptos" pitchFamily="34" charset="-122"/>
+                <a:cs typeface="Aptos" pitchFamily="34" charset="-120"/>
+              </a:rPr>
+              <a:t>• Data quality checklist</a:t>
             </a:r>
             <a:endParaRPr lang="en-US" sz="2100" dirty="0"/>
           </a:p>
           <a:p>
+            <a:pPr indent="0" marL="0">
+              <a:buNone/>
+            </a:pPr>
             <a:r>
               <a:rPr lang="en-US" sz="2100" dirty="0">
                 <a:solidFill>
-                  <a:srgbClr val="17364A"/>
-                </a:solidFill>
-                <a:latin typeface="Aptos" pitchFamily="34" charset="0"/>
-                <a:ea typeface="Aptos" pitchFamily="34" charset="-122"/>
-                <a:cs typeface="Aptos" pitchFamily="34" charset="-120"/>
-              </a:rPr>
-              <a:t>Thresholds or review criteria</a:t>
+                  <a:srgbClr val="003A63"/>
+                </a:solidFill>
+                <a:latin typeface="Aptos" pitchFamily="34" charset="0"/>
+                <a:ea typeface="Aptos" pitchFamily="34" charset="-122"/>
+                <a:cs typeface="Aptos" pitchFamily="34" charset="-120"/>
+              </a:rPr>
+              <a:t>• Thresholds or review criteria</a:t>
             </a:r>
             <a:endParaRPr lang="en-US" sz="2100" dirty="0"/>
           </a:p>
@@ -10875,17 +11021,17 @@
         </p:nvSpPr>
         <p:spPr>
           <a:xfrm>
-            <a:off x="7799832" y="1828800"/>
-            <a:ext cx="3145536" cy="685800"/>
-          </a:xfrm>
-          <a:prstGeom prst="rect">
-            <a:avLst/>
-          </a:prstGeom>
-          <a:noFill/>
-          <a:ln/>
-        </p:spPr>
-        <p:txBody>
-          <a:bodyPr wrap="square" lIns="0" tIns="0" rIns="0" bIns="0" rtlCol="0" anchor="t">
+            <a:off x="7799832" y="1801368"/>
+            <a:ext cx="3145536" cy="758952"/>
+          </a:xfrm>
+          <a:prstGeom prst="rect">
+            <a:avLst/>
+          </a:prstGeom>
+          <a:noFill/>
+          <a:ln/>
+        </p:spPr>
+        <p:txBody>
+          <a:bodyPr wrap="square" lIns="254" tIns="254" rIns="254" bIns="254" rtlCol="0" anchor="t">
             <a:normAutofit/>
           </a:bodyPr>
           <a:lstStyle/>
@@ -10894,7 +11040,7 @@
               <a:buNone/>
             </a:pPr>
             <a:r>
-              <a:rPr lang="en-US" sz="1550" dirty="0">
+              <a:rPr lang="en-US" sz="1320" dirty="0">
                 <a:solidFill>
                   <a:srgbClr val="17364A"/>
                 </a:solidFill>
@@ -10904,7 +11050,7 @@
               </a:rPr>
               <a:t>Data quality review plan</a:t>
             </a:r>
-            <a:endParaRPr lang="en-US" sz="1550" dirty="0"/>
+            <a:endParaRPr lang="en-US" sz="1320" dirty="0"/>
           </a:p>
         </p:txBody>
       </p:sp>
@@ -10992,13 +11138,16 @@
           <a:ln/>
         </p:spPr>
         <p:txBody>
-          <a:bodyPr wrap="square" lIns="254" tIns="254" rIns="254" bIns="254" rtlCol="0" anchor="t">
+          <a:bodyPr wrap="square" lIns="508" tIns="508" rIns="508" bIns="508" rtlCol="0" anchor="t">
             <a:normAutofit/>
           </a:bodyPr>
           <a:lstStyle/>
           <a:p>
-            <a:r>
-              <a:rPr lang="en-US" sz="1380" dirty="0">
+            <a:pPr indent="0" marL="0">
+              <a:buNone/>
+            </a:pPr>
+            <a:r>
+              <a:rPr lang="en-US" sz="1220" dirty="0">
                 <a:solidFill>
                   <a:srgbClr val="17364A"/>
                 </a:solidFill>
@@ -11008,11 +11157,14 @@
               </a:rPr>
               <a:t>Data quality review plan</a:t>
             </a:r>
-            <a:endParaRPr lang="en-US" sz="1380" dirty="0"/>
-          </a:p>
-          <a:p>
-            <a:r>
-              <a:rPr lang="en-US" sz="1380" dirty="0">
+            <a:endParaRPr lang="en-US" sz="1220" dirty="0"/>
+          </a:p>
+          <a:p>
+            <a:pPr indent="0" marL="0">
+              <a:buNone/>
+            </a:pPr>
+            <a:r>
+              <a:rPr lang="en-US" sz="1220" dirty="0">
                 <a:solidFill>
                   <a:srgbClr val="17364A"/>
                 </a:solidFill>
@@ -11022,11 +11174,14 @@
               </a:rPr>
               <a:t>Data quality checklist</a:t>
             </a:r>
-            <a:endParaRPr lang="en-US" sz="1380" dirty="0"/>
-          </a:p>
-          <a:p>
-            <a:r>
-              <a:rPr lang="en-US" sz="1380" dirty="0">
+            <a:endParaRPr lang="en-US" sz="1220" dirty="0"/>
+          </a:p>
+          <a:p>
+            <a:pPr indent="0" marL="0">
+              <a:buNone/>
+            </a:pPr>
+            <a:r>
+              <a:rPr lang="en-US" sz="1220" dirty="0">
                 <a:solidFill>
                   <a:srgbClr val="17364A"/>
                 </a:solidFill>
@@ -11036,7 +11191,7 @@
               </a:rPr>
               <a:t>Thresholds or review criteria</a:t>
             </a:r>
-            <a:endParaRPr lang="en-US" sz="1380" dirty="0"/>
+            <a:endParaRPr lang="en-US" sz="1220" dirty="0"/>
           </a:p>
         </p:txBody>
       </p:sp>
@@ -11114,17 +11269,17 @@
         </p:nvSpPr>
         <p:spPr>
           <a:xfrm>
-            <a:off x="7799832" y="5001768"/>
-            <a:ext cx="3145536" cy="502920"/>
-          </a:xfrm>
-          <a:prstGeom prst="rect">
-            <a:avLst/>
-          </a:prstGeom>
-          <a:noFill/>
-          <a:ln/>
-        </p:spPr>
-        <p:txBody>
-          <a:bodyPr wrap="square" lIns="0" tIns="0" rIns="0" bIns="0" rtlCol="0" anchor="t">
+            <a:off x="7799832" y="4974336"/>
+            <a:ext cx="3145536" cy="576072"/>
+          </a:xfrm>
+          <a:prstGeom prst="rect">
+            <a:avLst/>
+          </a:prstGeom>
+          <a:noFill/>
+          <a:ln/>
+        </p:spPr>
+        <p:txBody>
+          <a:bodyPr wrap="square" lIns="254" tIns="254" rIns="254" bIns="254" rtlCol="0" anchor="t">
             <a:normAutofit/>
           </a:bodyPr>
           <a:lstStyle/>
@@ -11133,7 +11288,7 @@
               <a:buNone/>
             </a:pPr>
             <a:r>
-              <a:rPr lang="en-US" sz="1550" dirty="0">
+              <a:rPr lang="en-US" sz="1320" dirty="0">
                 <a:solidFill>
                   <a:srgbClr val="17364A"/>
                 </a:solidFill>
@@ -11141,9 +11296,9 @@
                 <a:ea typeface="Aptos" pitchFamily="34" charset="-122"/>
                 <a:cs typeface="Aptos" pitchFamily="34" charset="-120"/>
               </a:rPr>
-              <a:t>Use the assignment to test whether you can explain the concept, apply it to a realistic public health situation, and identify what would need review before the work moves forward.</a:t>
-            </a:r>
-            <a:endParaRPr lang="en-US" sz="1550" dirty="0"/>
+              <a:t>Use the assignment to test whether you can explain the concept, apply it to a realistic public health situation, and.</a:t>
+            </a:r>
+            <a:endParaRPr lang="en-US" sz="1320" dirty="0"/>
           </a:p>
         </p:txBody>
       </p:sp>
@@ -11444,49 +11599,58 @@
           <a:ln/>
         </p:spPr>
         <p:txBody>
-          <a:bodyPr wrap="square" lIns="635" tIns="635" rIns="635" bIns="635" rtlCol="0" anchor="t">
+          <a:bodyPr wrap="square" lIns="1016" tIns="1016" rIns="1016" bIns="1016" rtlCol="0" anchor="t">
             <a:normAutofit/>
           </a:bodyPr>
           <a:lstStyle/>
           <a:p>
+            <a:pPr indent="0" marL="0">
+              <a:buNone/>
+            </a:pPr>
             <a:r>
               <a:rPr lang="en-US" sz="2100" dirty="0">
                 <a:solidFill>
-                  <a:srgbClr val="17364A"/>
-                </a:solidFill>
-                <a:latin typeface="Aptos" pitchFamily="34" charset="0"/>
-                <a:ea typeface="Aptos" pitchFamily="34" charset="-122"/>
-                <a:cs typeface="Aptos" pitchFamily="34" charset="-120"/>
-              </a:rPr>
-              <a:t>1. What does fitness for use mean?</a:t>
+                  <a:srgbClr val="003A63"/>
+                </a:solidFill>
+                <a:latin typeface="Aptos" pitchFamily="34" charset="0"/>
+                <a:ea typeface="Aptos" pitchFamily="34" charset="-122"/>
+                <a:cs typeface="Aptos" pitchFamily="34" charset="-120"/>
+              </a:rPr>
+              <a:t>• 1. What does fitness for use mean?</a:t>
             </a:r>
             <a:endParaRPr lang="en-US" sz="2100" dirty="0"/>
           </a:p>
           <a:p>
+            <a:pPr indent="0" marL="0">
+              <a:buNone/>
+            </a:pPr>
             <a:r>
               <a:rPr lang="en-US" sz="2100" dirty="0">
                 <a:solidFill>
-                  <a:srgbClr val="17364A"/>
-                </a:solidFill>
-                <a:latin typeface="Aptos" pitchFamily="34" charset="0"/>
-                <a:ea typeface="Aptos" pitchFamily="34" charset="-122"/>
-                <a:cs typeface="Aptos" pitchFamily="34" charset="-120"/>
-              </a:rPr>
-              <a:t>2. Why can poor data quality be dangerous in AI-supported workflows?</a:t>
+                  <a:srgbClr val="003A63"/>
+                </a:solidFill>
+                <a:latin typeface="Aptos" pitchFamily="34" charset="0"/>
+                <a:ea typeface="Aptos" pitchFamily="34" charset="-122"/>
+                <a:cs typeface="Aptos" pitchFamily="34" charset="-120"/>
+              </a:rPr>
+              <a:t>• 2. Why can poor data quality be dangerous in AI-supported workflows?</a:t>
             </a:r>
             <a:endParaRPr lang="en-US" sz="2100" dirty="0"/>
           </a:p>
           <a:p>
+            <a:pPr indent="0" marL="0">
+              <a:buNone/>
+            </a:pPr>
             <a:r>
               <a:rPr lang="en-US" sz="2100" dirty="0">
                 <a:solidFill>
-                  <a:srgbClr val="17364A"/>
-                </a:solidFill>
-                <a:latin typeface="Aptos" pitchFamily="34" charset="0"/>
-                <a:ea typeface="Aptos" pitchFamily="34" charset="-122"/>
-                <a:cs typeface="Aptos" pitchFamily="34" charset="-120"/>
-              </a:rPr>
-              <a:t>3. What is data drift?</a:t>
+                  <a:srgbClr val="003A63"/>
+                </a:solidFill>
+                <a:latin typeface="Aptos" pitchFamily="34" charset="0"/>
+                <a:ea typeface="Aptos" pitchFamily="34" charset="-122"/>
+                <a:cs typeface="Aptos" pitchFamily="34" charset="-120"/>
+              </a:rPr>
+              <a:t>• 3. What is data drift?</a:t>
             </a:r>
             <a:endParaRPr lang="en-US" sz="2100" dirty="0"/>
           </a:p>
@@ -11566,17 +11730,17 @@
         </p:nvSpPr>
         <p:spPr>
           <a:xfrm>
-            <a:off x="7799832" y="1828800"/>
-            <a:ext cx="3145536" cy="685800"/>
-          </a:xfrm>
-          <a:prstGeom prst="rect">
-            <a:avLst/>
-          </a:prstGeom>
-          <a:noFill/>
-          <a:ln/>
-        </p:spPr>
-        <p:txBody>
-          <a:bodyPr wrap="square" lIns="0" tIns="0" rIns="0" bIns="0" rtlCol="0" anchor="t">
+            <a:off x="7799832" y="1801368"/>
+            <a:ext cx="3145536" cy="758952"/>
+          </a:xfrm>
+          <a:prstGeom prst="rect">
+            <a:avLst/>
+          </a:prstGeom>
+          <a:noFill/>
+          <a:ln/>
+        </p:spPr>
+        <p:txBody>
+          <a:bodyPr wrap="square" lIns="254" tIns="254" rIns="254" bIns="254" rtlCol="0" anchor="t">
             <a:normAutofit/>
           </a:bodyPr>
           <a:lstStyle/>
@@ -11585,7 +11749,7 @@
               <a:buNone/>
             </a:pPr>
             <a:r>
-              <a:rPr lang="en-US" sz="1550" dirty="0">
+              <a:rPr lang="en-US" sz="1320" dirty="0">
                 <a:solidFill>
                   <a:srgbClr val="17364A"/>
                 </a:solidFill>
@@ -11595,7 +11759,7 @@
               </a:rPr>
               <a:t>1. What does fitness for use mean?</a:t>
             </a:r>
-            <a:endParaRPr lang="en-US" sz="1550" dirty="0"/>
+            <a:endParaRPr lang="en-US" sz="1320" dirty="0"/>
           </a:p>
         </p:txBody>
       </p:sp>
@@ -11683,13 +11847,16 @@
           <a:ln/>
         </p:spPr>
         <p:txBody>
-          <a:bodyPr wrap="square" lIns="254" tIns="254" rIns="254" bIns="254" rtlCol="0" anchor="t">
+          <a:bodyPr wrap="square" lIns="508" tIns="508" rIns="508" bIns="508" rtlCol="0" anchor="t">
             <a:normAutofit/>
           </a:bodyPr>
           <a:lstStyle/>
           <a:p>
-            <a:r>
-              <a:rPr lang="en-US" sz="1380" dirty="0">
+            <a:pPr indent="0" marL="0">
+              <a:buNone/>
+            </a:pPr>
+            <a:r>
+              <a:rPr lang="en-US" sz="1220" dirty="0">
                 <a:solidFill>
                   <a:srgbClr val="17364A"/>
                 </a:solidFill>
@@ -11699,11 +11866,14 @@
               </a:rPr>
               <a:t>1.</a:t>
             </a:r>
-            <a:endParaRPr lang="en-US" sz="1380" dirty="0"/>
-          </a:p>
-          <a:p>
-            <a:r>
-              <a:rPr lang="en-US" sz="1380" dirty="0">
+            <a:endParaRPr lang="en-US" sz="1220" dirty="0"/>
+          </a:p>
+          <a:p>
+            <a:pPr indent="0" marL="0">
+              <a:buNone/>
+            </a:pPr>
+            <a:r>
+              <a:rPr lang="en-US" sz="1220" dirty="0">
                 <a:solidFill>
                   <a:srgbClr val="17364A"/>
                 </a:solidFill>
@@ -11713,11 +11883,14 @@
               </a:rPr>
               <a:t>What does fitness for use mean?</a:t>
             </a:r>
-            <a:endParaRPr lang="en-US" sz="1380" dirty="0"/>
-          </a:p>
-          <a:p>
-            <a:r>
-              <a:rPr lang="en-US" sz="1380" dirty="0">
+            <a:endParaRPr lang="en-US" sz="1220" dirty="0"/>
+          </a:p>
+          <a:p>
+            <a:pPr indent="0" marL="0">
+              <a:buNone/>
+            </a:pPr>
+            <a:r>
+              <a:rPr lang="en-US" sz="1220" dirty="0">
                 <a:solidFill>
                   <a:srgbClr val="17364A"/>
                 </a:solidFill>
@@ -11727,7 +11900,7 @@
               </a:rPr>
               <a:t>2.</a:t>
             </a:r>
-            <a:endParaRPr lang="en-US" sz="1380" dirty="0"/>
+            <a:endParaRPr lang="en-US" sz="1220" dirty="0"/>
           </a:p>
         </p:txBody>
       </p:sp>
@@ -11805,17 +11978,17 @@
         </p:nvSpPr>
         <p:spPr>
           <a:xfrm>
-            <a:off x="7799832" y="5001768"/>
-            <a:ext cx="3145536" cy="502920"/>
-          </a:xfrm>
-          <a:prstGeom prst="rect">
-            <a:avLst/>
-          </a:prstGeom>
-          <a:noFill/>
-          <a:ln/>
-        </p:spPr>
-        <p:txBody>
-          <a:bodyPr wrap="square" lIns="0" tIns="0" rIns="0" bIns="0" rtlCol="0" anchor="t">
+            <a:off x="7799832" y="4974336"/>
+            <a:ext cx="3145536" cy="576072"/>
+          </a:xfrm>
+          <a:prstGeom prst="rect">
+            <a:avLst/>
+          </a:prstGeom>
+          <a:noFill/>
+          <a:ln/>
+        </p:spPr>
+        <p:txBody>
+          <a:bodyPr wrap="square" lIns="254" tIns="254" rIns="254" bIns="254" rtlCol="0" anchor="t">
             <a:normAutofit/>
           </a:bodyPr>
           <a:lstStyle/>
@@ -11824,7 +11997,7 @@
               <a:buNone/>
             </a:pPr>
             <a:r>
-              <a:rPr lang="en-US" sz="1550" dirty="0">
+              <a:rPr lang="en-US" sz="1320" dirty="0">
                 <a:solidFill>
                   <a:srgbClr val="17364A"/>
                 </a:solidFill>
@@ -11832,9 +12005,9 @@
                 <a:ea typeface="Aptos" pitchFamily="34" charset="-122"/>
                 <a:cs typeface="Aptos" pitchFamily="34" charset="-120"/>
               </a:rPr>
-              <a:t>Use the assignment to test whether you can explain the concept, apply it to a realistic public health situation, and identify what would need review before the work moves forward.</a:t>
-            </a:r>
-            <a:endParaRPr lang="en-US" sz="1550" dirty="0"/>
+              <a:t>Use the assignment to test whether you can explain the concept, apply it to a realistic public health situation, and.</a:t>
+            </a:r>
+            <a:endParaRPr lang="en-US" sz="1320" dirty="0"/>
           </a:p>
         </p:txBody>
       </p:sp>
@@ -12135,49 +12308,58 @@
           <a:ln/>
         </p:spPr>
         <p:txBody>
-          <a:bodyPr wrap="square" lIns="635" tIns="635" rIns="635" bIns="635" rtlCol="0" anchor="t">
+          <a:bodyPr wrap="square" lIns="1016" tIns="1016" rIns="1016" bIns="1016" rtlCol="0" anchor="t">
             <a:normAutofit/>
           </a:bodyPr>
           <a:lstStyle/>
           <a:p>
+            <a:pPr indent="0" marL="0">
+              <a:buNone/>
+            </a:pPr>
             <a:r>
               <a:rPr lang="en-US" sz="2100" dirty="0">
                 <a:solidFill>
-                  <a:srgbClr val="17364A"/>
-                </a:solidFill>
-                <a:latin typeface="Aptos" pitchFamily="34" charset="0"/>
-                <a:ea typeface="Aptos" pitchFamily="34" charset="-122"/>
-                <a:cs typeface="Aptos" pitchFamily="34" charset="-120"/>
-              </a:rPr>
-              <a:t>CDC surveillance and data quality resources</a:t>
+                  <a:srgbClr val="003A63"/>
+                </a:solidFill>
+                <a:latin typeface="Aptos" pitchFamily="34" charset="0"/>
+                <a:ea typeface="Aptos" pitchFamily="34" charset="-122"/>
+                <a:cs typeface="Aptos" pitchFamily="34" charset="-120"/>
+              </a:rPr>
+              <a:t>• CDC surveillance and data quality resources</a:t>
             </a:r>
             <a:endParaRPr lang="en-US" sz="2100" dirty="0"/>
           </a:p>
           <a:p>
+            <a:pPr indent="0" marL="0">
+              <a:buNone/>
+            </a:pPr>
             <a:r>
               <a:rPr lang="en-US" sz="2100" dirty="0">
                 <a:solidFill>
-                  <a:srgbClr val="17364A"/>
-                </a:solidFill>
-                <a:latin typeface="Aptos" pitchFamily="34" charset="0"/>
-                <a:ea typeface="Aptos" pitchFamily="34" charset="-122"/>
-                <a:cs typeface="Aptos" pitchFamily="34" charset="-120"/>
-              </a:rPr>
-              <a:t>CDC Public Health Data Strategy: https://www.cdc.gov/public-health-data-strategy/php/about/index.html</a:t>
+                  <a:srgbClr val="003A63"/>
+                </a:solidFill>
+                <a:latin typeface="Aptos" pitchFamily="34" charset="0"/>
+                <a:ea typeface="Aptos" pitchFamily="34" charset="-122"/>
+                <a:cs typeface="Aptos" pitchFamily="34" charset="-120"/>
+              </a:rPr>
+              <a:t>• CDC Public Health Data Strategy:.</a:t>
             </a:r>
             <a:endParaRPr lang="en-US" sz="2100" dirty="0"/>
           </a:p>
           <a:p>
+            <a:pPr indent="0" marL="0">
+              <a:buNone/>
+            </a:pPr>
             <a:r>
               <a:rPr lang="en-US" sz="2100" dirty="0">
                 <a:solidFill>
-                  <a:srgbClr val="17364A"/>
-                </a:solidFill>
-                <a:latin typeface="Aptos" pitchFamily="34" charset="0"/>
-                <a:ea typeface="Aptos" pitchFamily="34" charset="-122"/>
-                <a:cs typeface="Aptos" pitchFamily="34" charset="-120"/>
-              </a:rPr>
-              <a:t>NIST AI Risk Management Framework: https://www.nist.gov/itl/ai-risk-management-framework</a:t>
+                  <a:srgbClr val="003A63"/>
+                </a:solidFill>
+                <a:latin typeface="Aptos" pitchFamily="34" charset="0"/>
+                <a:ea typeface="Aptos" pitchFamily="34" charset="-122"/>
+                <a:cs typeface="Aptos" pitchFamily="34" charset="-120"/>
+              </a:rPr>
+              <a:t>• NIST AI Risk Management Framework: https://www.nist.gov/itl/ai-risk-management-framework</a:t>
             </a:r>
             <a:endParaRPr lang="en-US" sz="2100" dirty="0"/>
           </a:p>
@@ -12257,17 +12439,17 @@
         </p:nvSpPr>
         <p:spPr>
           <a:xfrm>
-            <a:off x="7799832" y="1828800"/>
-            <a:ext cx="3145536" cy="685800"/>
-          </a:xfrm>
-          <a:prstGeom prst="rect">
-            <a:avLst/>
-          </a:prstGeom>
-          <a:noFill/>
-          <a:ln/>
-        </p:spPr>
-        <p:txBody>
-          <a:bodyPr wrap="square" lIns="0" tIns="0" rIns="0" bIns="0" rtlCol="0" anchor="t">
+            <a:off x="7799832" y="1801368"/>
+            <a:ext cx="3145536" cy="758952"/>
+          </a:xfrm>
+          <a:prstGeom prst="rect">
+            <a:avLst/>
+          </a:prstGeom>
+          <a:noFill/>
+          <a:ln/>
+        </p:spPr>
+        <p:txBody>
+          <a:bodyPr wrap="square" lIns="254" tIns="254" rIns="254" bIns="254" rtlCol="0" anchor="t">
             <a:normAutofit/>
           </a:bodyPr>
           <a:lstStyle/>
@@ -12276,7 +12458,7 @@
               <a:buNone/>
             </a:pPr>
             <a:r>
-              <a:rPr lang="en-US" sz="1550" dirty="0">
+              <a:rPr lang="en-US" sz="1320" dirty="0">
                 <a:solidFill>
                   <a:srgbClr val="17364A"/>
                 </a:solidFill>
@@ -12286,7 +12468,7 @@
               </a:rPr>
               <a:t>CDC surveillance and data quality resources</a:t>
             </a:r>
-            <a:endParaRPr lang="en-US" sz="1550" dirty="0"/>
+            <a:endParaRPr lang="en-US" sz="1320" dirty="0"/>
           </a:p>
         </p:txBody>
       </p:sp>
@@ -12374,13 +12556,16 @@
           <a:ln/>
         </p:spPr>
         <p:txBody>
-          <a:bodyPr wrap="square" lIns="254" tIns="254" rIns="254" bIns="254" rtlCol="0" anchor="t">
+          <a:bodyPr wrap="square" lIns="508" tIns="508" rIns="508" bIns="508" rtlCol="0" anchor="t">
             <a:normAutofit/>
           </a:bodyPr>
           <a:lstStyle/>
           <a:p>
-            <a:r>
-              <a:rPr lang="en-US" sz="1380" dirty="0">
+            <a:pPr indent="0" marL="0">
+              <a:buNone/>
+            </a:pPr>
+            <a:r>
+              <a:rPr lang="en-US" sz="1220" dirty="0">
                 <a:solidFill>
                   <a:srgbClr val="17364A"/>
                 </a:solidFill>
@@ -12390,11 +12575,14 @@
               </a:rPr>
               <a:t>CDC surveillance and data quality resources</a:t>
             </a:r>
-            <a:endParaRPr lang="en-US" sz="1380" dirty="0"/>
-          </a:p>
-          <a:p>
-            <a:r>
-              <a:rPr lang="en-US" sz="1380" dirty="0">
+            <a:endParaRPr lang="en-US" sz="1220" dirty="0"/>
+          </a:p>
+          <a:p>
+            <a:pPr indent="0" marL="0">
+              <a:buNone/>
+            </a:pPr>
+            <a:r>
+              <a:rPr lang="en-US" sz="1220" dirty="0">
                 <a:solidFill>
                   <a:srgbClr val="17364A"/>
                 </a:solidFill>
@@ -12404,11 +12592,14 @@
               </a:rPr>
               <a:t>CDC Public Health Data Strategy:.</a:t>
             </a:r>
-            <a:endParaRPr lang="en-US" sz="1380" dirty="0"/>
-          </a:p>
-          <a:p>
-            <a:r>
-              <a:rPr lang="en-US" sz="1380" dirty="0">
+            <a:endParaRPr lang="en-US" sz="1220" dirty="0"/>
+          </a:p>
+          <a:p>
+            <a:pPr indent="0" marL="0">
+              <a:buNone/>
+            </a:pPr>
+            <a:r>
+              <a:rPr lang="en-US" sz="1220" dirty="0">
                 <a:solidFill>
                   <a:srgbClr val="17364A"/>
                 </a:solidFill>
@@ -12416,9 +12607,9 @@
                 <a:ea typeface="Aptos" pitchFamily="34" charset="-122"/>
                 <a:cs typeface="Aptos" pitchFamily="34" charset="-120"/>
               </a:rPr>
-              <a:t>NIST AI Risk Management Framework: https://www.nist.gov/itl/ai-risk-management-framework</a:t>
-            </a:r>
-            <a:endParaRPr lang="en-US" sz="1380" dirty="0"/>
+              <a:t>NIST AI Risk Management Framework:.</a:t>
+            </a:r>
+            <a:endParaRPr lang="en-US" sz="1220" dirty="0"/>
           </a:p>
         </p:txBody>
       </p:sp>
@@ -12496,17 +12687,17 @@
         </p:nvSpPr>
         <p:spPr>
           <a:xfrm>
-            <a:off x="7799832" y="5001768"/>
-            <a:ext cx="3145536" cy="502920"/>
-          </a:xfrm>
-          <a:prstGeom prst="rect">
-            <a:avLst/>
-          </a:prstGeom>
-          <a:noFill/>
-          <a:ln/>
-        </p:spPr>
-        <p:txBody>
-          <a:bodyPr wrap="square" lIns="0" tIns="0" rIns="0" bIns="0" rtlCol="0" anchor="t">
+            <a:off x="7799832" y="4974336"/>
+            <a:ext cx="3145536" cy="576072"/>
+          </a:xfrm>
+          <a:prstGeom prst="rect">
+            <a:avLst/>
+          </a:prstGeom>
+          <a:noFill/>
+          <a:ln/>
+        </p:spPr>
+        <p:txBody>
+          <a:bodyPr wrap="square" lIns="254" tIns="254" rIns="254" bIns="254" rtlCol="0" anchor="t">
             <a:normAutofit/>
           </a:bodyPr>
           <a:lstStyle/>
@@ -12515,7 +12706,7 @@
               <a:buNone/>
             </a:pPr>
             <a:r>
-              <a:rPr lang="en-US" sz="1550" dirty="0">
+              <a:rPr lang="en-US" sz="1320" dirty="0">
                 <a:solidFill>
                   <a:srgbClr val="17364A"/>
                 </a:solidFill>
@@ -12523,9 +12714,9 @@
                 <a:ea typeface="Aptos" pitchFamily="34" charset="-122"/>
                 <a:cs typeface="Aptos" pitchFamily="34" charset="-120"/>
               </a:rPr>
-              <a:t>Connect the concept to data quality, model performance, validation evidence, monitoring measures, and decisions that remain under human control.</a:t>
-            </a:r>
-            <a:endParaRPr lang="en-US" sz="1550" dirty="0"/>
+              <a:t>Connect the concept to data quality, model performance, validation evidence, monitoring measures, and decisions that.</a:t>
+            </a:r>
+            <a:endParaRPr lang="en-US" sz="1320" dirty="0"/>
           </a:p>
         </p:txBody>
       </p:sp>
@@ -12826,63 +13017,75 @@
           <a:ln/>
         </p:spPr>
         <p:txBody>
-          <a:bodyPr wrap="square" lIns="635" tIns="635" rIns="635" bIns="635" rtlCol="0" anchor="t">
+          <a:bodyPr wrap="square" lIns="1016" tIns="1016" rIns="1016" bIns="1016" rtlCol="0" anchor="t">
             <a:normAutofit/>
           </a:bodyPr>
           <a:lstStyle/>
           <a:p>
+            <a:pPr indent="0" marL="0">
+              <a:buNone/>
+            </a:pPr>
             <a:r>
               <a:rPr lang="en-US" sz="1900" dirty="0">
                 <a:solidFill>
-                  <a:srgbClr val="17364A"/>
-                </a:solidFill>
-                <a:latin typeface="Aptos" pitchFamily="34" charset="0"/>
-                <a:ea typeface="Aptos" pitchFamily="34" charset="-122"/>
-                <a:cs typeface="Aptos" pitchFamily="34" charset="-120"/>
-              </a:rPr>
-              <a:t>Play 11: Build and Deploy AI Solutions - This lesson informs Play 11 by helping learners connect the lesson.</a:t>
+                  <a:srgbClr val="003A63"/>
+                </a:solidFill>
+                <a:latin typeface="Aptos" pitchFamily="34" charset="0"/>
+                <a:ea typeface="Aptos" pitchFamily="34" charset="-122"/>
+                <a:cs typeface="Aptos" pitchFamily="34" charset="-120"/>
+              </a:rPr>
+              <a:t>• Play 11: Build and Deploy AI Solutions - This lesson informs Play 11 by helping learners.</a:t>
             </a:r>
             <a:endParaRPr lang="en-US" sz="1900" dirty="0"/>
           </a:p>
           <a:p>
+            <a:pPr indent="0" marL="0">
+              <a:buNone/>
+            </a:pPr>
             <a:r>
               <a:rPr lang="en-US" sz="1900" dirty="0">
                 <a:solidFill>
-                  <a:srgbClr val="17364A"/>
-                </a:solidFill>
-                <a:latin typeface="Aptos" pitchFamily="34" charset="0"/>
-                <a:ea typeface="Aptos" pitchFamily="34" charset="-122"/>
-                <a:cs typeface="Aptos" pitchFamily="34" charset="-120"/>
-              </a:rPr>
-              <a:t>Play 7: Prioritize Use Cases - This lesson informs Play 7 by helping learners connect the lesson topic to.</a:t>
+                  <a:srgbClr val="003A63"/>
+                </a:solidFill>
+                <a:latin typeface="Aptos" pitchFamily="34" charset="0"/>
+                <a:ea typeface="Aptos" pitchFamily="34" charset="-122"/>
+                <a:cs typeface="Aptos" pitchFamily="34" charset="-120"/>
+              </a:rPr>
+              <a:t>• Play 7: Prioritize Use Cases - This lesson informs Play 7 by helping learners connect the.</a:t>
             </a:r>
             <a:endParaRPr lang="en-US" sz="1900" dirty="0"/>
           </a:p>
           <a:p>
+            <a:pPr indent="0" marL="0">
+              <a:buNone/>
+            </a:pPr>
             <a:r>
               <a:rPr lang="en-US" sz="1900" dirty="0">
                 <a:solidFill>
-                  <a:srgbClr val="17364A"/>
-                </a:solidFill>
-                <a:latin typeface="Aptos" pitchFamily="34" charset="0"/>
-                <a:ea typeface="Aptos" pitchFamily="34" charset="-122"/>
-                <a:cs typeface="Aptos" pitchFamily="34" charset="-120"/>
-              </a:rPr>
-              <a:t>Play 1: Vision &amp; Guardrails - This lesson informs Play 1 by helping learners connect the lesson topic to.</a:t>
+                  <a:srgbClr val="003A63"/>
+                </a:solidFill>
+                <a:latin typeface="Aptos" pitchFamily="34" charset="0"/>
+                <a:ea typeface="Aptos" pitchFamily="34" charset="-122"/>
+                <a:cs typeface="Aptos" pitchFamily="34" charset="-120"/>
+              </a:rPr>
+              <a:t>• Play 1: Vision &amp; Guardrails - This lesson informs Play 1 by helping learners connect the.</a:t>
             </a:r>
             <a:endParaRPr lang="en-US" sz="1900" dirty="0"/>
           </a:p>
           <a:p>
+            <a:pPr indent="0" marL="0">
+              <a:buNone/>
+            </a:pPr>
             <a:r>
               <a:rPr lang="en-US" sz="1900" dirty="0">
                 <a:solidFill>
-                  <a:srgbClr val="17364A"/>
-                </a:solidFill>
-                <a:latin typeface="Aptos" pitchFamily="34" charset="0"/>
-                <a:ea typeface="Aptos" pitchFamily="34" charset="-122"/>
-                <a:cs typeface="Aptos" pitchFamily="34" charset="-120"/>
-              </a:rPr>
-              <a:t>Play 2: Readiness Assessment - This lesson informs Play 2 by helping learners connect the lesson topic to.</a:t>
+                  <a:srgbClr val="003A63"/>
+                </a:solidFill>
+                <a:latin typeface="Aptos" pitchFamily="34" charset="0"/>
+                <a:ea typeface="Aptos" pitchFamily="34" charset="-122"/>
+                <a:cs typeface="Aptos" pitchFamily="34" charset="-120"/>
+              </a:rPr>
+              <a:t>• Play 2: Readiness Assessment - This lesson informs Play 2 by helping learners connect the.</a:t>
             </a:r>
             <a:endParaRPr lang="en-US" sz="1900" dirty="0"/>
           </a:p>
@@ -12962,17 +13165,17 @@
         </p:nvSpPr>
         <p:spPr>
           <a:xfrm>
-            <a:off x="8211312" y="1920240"/>
-            <a:ext cx="2734056" cy="1463040"/>
-          </a:xfrm>
-          <a:prstGeom prst="rect">
-            <a:avLst/>
-          </a:prstGeom>
-          <a:noFill/>
-          <a:ln/>
-        </p:spPr>
-        <p:txBody>
-          <a:bodyPr wrap="square" lIns="0" tIns="0" rIns="0" bIns="0" rtlCol="0" anchor="t">
+            <a:off x="8211312" y="1892808"/>
+            <a:ext cx="2734056" cy="1536192"/>
+          </a:xfrm>
+          <a:prstGeom prst="rect">
+            <a:avLst/>
+          </a:prstGeom>
+          <a:noFill/>
+          <a:ln/>
+        </p:spPr>
+        <p:txBody>
+          <a:bodyPr wrap="square" lIns="254" tIns="254" rIns="254" bIns="254" rtlCol="0" anchor="t">
             <a:normAutofit/>
           </a:bodyPr>
           <a:lstStyle/>
@@ -12981,7 +13184,7 @@
               <a:buNone/>
             </a:pPr>
             <a:r>
-              <a:rPr lang="en-US" sz="1550" dirty="0">
+              <a:rPr lang="en-US" sz="1320" dirty="0">
                 <a:solidFill>
                   <a:srgbClr val="17364A"/>
                 </a:solidFill>
@@ -12989,9 +13192,9 @@
                 <a:ea typeface="Aptos" pitchFamily="34" charset="-122"/>
                 <a:cs typeface="Aptos" pitchFamily="34" charset="-120"/>
               </a:rPr>
-              <a:t>Use the related plays to identify decisions, participants, timing, approvals, and documentation needed for responsible implementation.</a:t>
-            </a:r>
-            <a:endParaRPr lang="en-US" sz="1550" dirty="0"/>
+              <a:t>Use the related plays to identify decisions, participants, timing, approvals, and documentation needed for responsible.</a:t>
+            </a:r>
+            <a:endParaRPr lang="en-US" sz="1320" dirty="0"/>
           </a:p>
         </p:txBody>
       </p:sp>
@@ -13079,13 +13282,16 @@
           <a:ln/>
         </p:spPr>
         <p:txBody>
-          <a:bodyPr wrap="square" lIns="254" tIns="254" rIns="254" bIns="254" rtlCol="0" anchor="t">
+          <a:bodyPr wrap="square" lIns="508" tIns="508" rIns="508" bIns="508" rtlCol="0" anchor="t">
             <a:normAutofit/>
           </a:bodyPr>
           <a:lstStyle/>
           <a:p>
-            <a:r>
-              <a:rPr lang="en-US" sz="1380" dirty="0">
+            <a:pPr indent="0" marL="0">
+              <a:buNone/>
+            </a:pPr>
+            <a:r>
+              <a:rPr lang="en-US" sz="1220" dirty="0">
                 <a:solidFill>
                   <a:srgbClr val="17364A"/>
                 </a:solidFill>
@@ -13095,11 +13301,14 @@
               </a:rPr>
               <a:t>Locate the decision point in the playbook sequence.</a:t>
             </a:r>
-            <a:endParaRPr lang="en-US" sz="1380" dirty="0"/>
-          </a:p>
-          <a:p>
-            <a:r>
-              <a:rPr lang="en-US" sz="1380" dirty="0">
+            <a:endParaRPr lang="en-US" sz="1220" dirty="0"/>
+          </a:p>
+          <a:p>
+            <a:pPr indent="0" marL="0">
+              <a:buNone/>
+            </a:pPr>
+            <a:r>
+              <a:rPr lang="en-US" sz="1220" dirty="0">
                 <a:solidFill>
                   <a:srgbClr val="17364A"/>
                 </a:solidFill>
@@ -13109,11 +13318,14 @@
               </a:rPr>
               <a:t>Identify who should participate in the work.</a:t>
             </a:r>
-            <a:endParaRPr lang="en-US" sz="1380" dirty="0"/>
-          </a:p>
-          <a:p>
-            <a:r>
-              <a:rPr lang="en-US" sz="1380" dirty="0">
+            <a:endParaRPr lang="en-US" sz="1220" dirty="0"/>
+          </a:p>
+          <a:p>
+            <a:pPr indent="0" marL="0">
+              <a:buNone/>
+            </a:pPr>
+            <a:r>
+              <a:rPr lang="en-US" sz="1220" dirty="0">
                 <a:solidFill>
                   <a:srgbClr val="17364A"/>
                 </a:solidFill>
@@ -13123,7 +13335,7 @@
               </a:rPr>
               <a:t>Document the review, approval, or implementation step.</a:t>
             </a:r>
-            <a:endParaRPr lang="en-US" sz="1380" dirty="0"/>
+            <a:endParaRPr lang="en-US" sz="1220" dirty="0"/>
           </a:p>
         </p:txBody>
       </p:sp>
@@ -13424,63 +13636,75 @@
           <a:ln/>
         </p:spPr>
         <p:txBody>
-          <a:bodyPr wrap="square" lIns="635" tIns="635" rIns="635" bIns="635" rtlCol="0" anchor="t">
+          <a:bodyPr wrap="square" lIns="1016" tIns="1016" rIns="1016" bIns="1016" rtlCol="0" anchor="t">
             <a:normAutofit/>
           </a:bodyPr>
           <a:lstStyle/>
           <a:p>
+            <a:pPr indent="0" marL="0">
+              <a:buNone/>
+            </a:pPr>
             <a:r>
               <a:rPr lang="en-US" sz="1850" dirty="0">
                 <a:solidFill>
-                  <a:srgbClr val="17364A"/>
-                </a:solidFill>
-                <a:latin typeface="Aptos" pitchFamily="34" charset="0"/>
-                <a:ea typeface="Aptos" pitchFamily="34" charset="-122"/>
-                <a:cs typeface="Aptos" pitchFamily="34" charset="-120"/>
-              </a:rPr>
-              <a:t>Tool 3: Equity Impact Assessment Checklist (Checklist) - Use this tool to complete or strengthen the.</a:t>
+                  <a:srgbClr val="003A63"/>
+                </a:solidFill>
+                <a:latin typeface="Aptos" pitchFamily="34" charset="0"/>
+                <a:ea typeface="Aptos" pitchFamily="34" charset="-122"/>
+                <a:cs typeface="Aptos" pitchFamily="34" charset="-120"/>
+              </a:rPr>
+              <a:t>• Tool 3: Equity Impact Assessment Checklist (Checklist) - Use this tool to complete or.</a:t>
             </a:r>
             <a:endParaRPr lang="en-US" sz="1850" dirty="0"/>
           </a:p>
           <a:p>
+            <a:pPr indent="0" marL="0">
+              <a:buNone/>
+            </a:pPr>
             <a:r>
               <a:rPr lang="en-US" sz="1850" dirty="0">
                 <a:solidFill>
-                  <a:srgbClr val="17364A"/>
-                </a:solidFill>
-                <a:latin typeface="Aptos" pitchFamily="34" charset="0"/>
-                <a:ea typeface="Aptos" pitchFamily="34" charset="-122"/>
-                <a:cs typeface="Aptos" pitchFamily="34" charset="-120"/>
-              </a:rPr>
-              <a:t>Tool 4: AI Policy Landscape Scan (Worksheet) - Use AI Policy Landscape Scan to translate this lesson into a.</a:t>
+                  <a:srgbClr val="003A63"/>
+                </a:solidFill>
+                <a:latin typeface="Aptos" pitchFamily="34" charset="0"/>
+                <a:ea typeface="Aptos" pitchFamily="34" charset="-122"/>
+                <a:cs typeface="Aptos" pitchFamily="34" charset="-120"/>
+              </a:rPr>
+              <a:t>• Tool 4: AI Policy Landscape Scan (Worksheet) - Use AI Policy Landscape Scan to translate this.</a:t>
             </a:r>
             <a:endParaRPr lang="en-US" sz="1850" dirty="0"/>
           </a:p>
           <a:p>
+            <a:pPr indent="0" marL="0">
+              <a:buNone/>
+            </a:pPr>
             <a:r>
               <a:rPr lang="en-US" sz="1850" dirty="0">
                 <a:solidFill>
-                  <a:srgbClr val="17364A"/>
-                </a:solidFill>
-                <a:latin typeface="Aptos" pitchFamily="34" charset="0"/>
-                <a:ea typeface="Aptos" pitchFamily="34" charset="-122"/>
-                <a:cs typeface="Aptos" pitchFamily="34" charset="-120"/>
-              </a:rPr>
-              <a:t>Tool 5: AI Environmental and Resource Impact Review (Checklist) - Use AI Environmental and Resource Impact.</a:t>
+                  <a:srgbClr val="003A63"/>
+                </a:solidFill>
+                <a:latin typeface="Aptos" pitchFamily="34" charset="0"/>
+                <a:ea typeface="Aptos" pitchFamily="34" charset="-122"/>
+                <a:cs typeface="Aptos" pitchFamily="34" charset="-120"/>
+              </a:rPr>
+              <a:t>• Tool 5: AI Environmental and Resource Impact Review (Checklist) - Use AI Environmental and.</a:t>
             </a:r>
             <a:endParaRPr lang="en-US" sz="1850" dirty="0"/>
           </a:p>
           <a:p>
+            <a:pPr indent="0" marL="0">
+              <a:buNone/>
+            </a:pPr>
             <a:r>
               <a:rPr lang="en-US" sz="1850" dirty="0">
                 <a:solidFill>
-                  <a:srgbClr val="17364A"/>
-                </a:solidFill>
-                <a:latin typeface="Aptos" pitchFamily="34" charset="0"/>
-                <a:ea typeface="Aptos" pitchFamily="34" charset="-122"/>
-                <a:cs typeface="Aptos" pitchFamily="34" charset="-120"/>
-              </a:rPr>
-              <a:t>Tool 6: Human-Centered AI Decision Rule Checklist (Checklist) - Use Human-Centered AI Decision Rule.</a:t>
+                  <a:srgbClr val="003A63"/>
+                </a:solidFill>
+                <a:latin typeface="Aptos" pitchFamily="34" charset="0"/>
+                <a:ea typeface="Aptos" pitchFamily="34" charset="-122"/>
+                <a:cs typeface="Aptos" pitchFamily="34" charset="-120"/>
+              </a:rPr>
+              <a:t>• Tool 6: Human-Centered AI Decision Rule Checklist (Checklist) - Use Human-Centered AI Decision.</a:t>
             </a:r>
             <a:endParaRPr lang="en-US" sz="1850" dirty="0"/>
           </a:p>
@@ -13560,17 +13784,17 @@
         </p:nvSpPr>
         <p:spPr>
           <a:xfrm>
-            <a:off x="8211312" y="1920240"/>
-            <a:ext cx="2734056" cy="1463040"/>
-          </a:xfrm>
-          <a:prstGeom prst="rect">
-            <a:avLst/>
-          </a:prstGeom>
-          <a:noFill/>
-          <a:ln/>
-        </p:spPr>
-        <p:txBody>
-          <a:bodyPr wrap="square" lIns="0" tIns="0" rIns="0" bIns="0" rtlCol="0" anchor="t">
+            <a:off x="8211312" y="1892808"/>
+            <a:ext cx="2734056" cy="1536192"/>
+          </a:xfrm>
+          <a:prstGeom prst="rect">
+            <a:avLst/>
+          </a:prstGeom>
+          <a:noFill/>
+          <a:ln/>
+        </p:spPr>
+        <p:txBody>
+          <a:bodyPr wrap="square" lIns="254" tIns="254" rIns="254" bIns="254" rtlCol="0" anchor="t">
             <a:normAutofit/>
           </a:bodyPr>
           <a:lstStyle/>
@@ -13579,7 +13803,7 @@
               <a:buNone/>
             </a:pPr>
             <a:r>
-              <a:rPr lang="en-US" sz="1550" dirty="0">
+              <a:rPr lang="en-US" sz="1320" dirty="0">
                 <a:solidFill>
                   <a:srgbClr val="17364A"/>
                 </a:solidFill>
@@ -13587,9 +13811,9 @@
                 <a:ea typeface="Aptos" pitchFamily="34" charset="-122"/>
                 <a:cs typeface="Aptos" pitchFamily="34" charset="-120"/>
               </a:rPr>
-              <a:t>Use linked tools when your department needs a structured worksheet, template, checklist, review process, or documentation artifact.</a:t>
-            </a:r>
-            <a:endParaRPr lang="en-US" sz="1550" dirty="0"/>
+              <a:t>Use linked tools when your department needs a structured worksheet, template, checklist, review process, or.</a:t>
+            </a:r>
+            <a:endParaRPr lang="en-US" sz="1320" dirty="0"/>
           </a:p>
         </p:txBody>
       </p:sp>
@@ -13677,13 +13901,16 @@
           <a:ln/>
         </p:spPr>
         <p:txBody>
-          <a:bodyPr wrap="square" lIns="254" tIns="254" rIns="254" bIns="254" rtlCol="0" anchor="t">
+          <a:bodyPr wrap="square" lIns="508" tIns="508" rIns="508" bIns="508" rtlCol="0" anchor="t">
             <a:normAutofit/>
           </a:bodyPr>
           <a:lstStyle/>
           <a:p>
-            <a:r>
-              <a:rPr lang="en-US" sz="1380" dirty="0">
+            <a:pPr indent="0" marL="0">
+              <a:buNone/>
+            </a:pPr>
+            <a:r>
+              <a:rPr lang="en-US" sz="1220" dirty="0">
                 <a:solidFill>
                   <a:srgbClr val="17364A"/>
                 </a:solidFill>
@@ -13693,11 +13920,14 @@
               </a:rPr>
               <a:t>Use a tool when no comparable local process exists.</a:t>
             </a:r>
-            <a:endParaRPr lang="en-US" sz="1380" dirty="0"/>
-          </a:p>
-          <a:p>
-            <a:r>
-              <a:rPr lang="en-US" sz="1380" dirty="0">
+            <a:endParaRPr lang="en-US" sz="1220" dirty="0"/>
+          </a:p>
+          <a:p>
+            <a:pPr indent="0" marL="0">
+              <a:buNone/>
+            </a:pPr>
+            <a:r>
+              <a:rPr lang="en-US" sz="1220" dirty="0">
                 <a:solidFill>
                   <a:srgbClr val="17364A"/>
                 </a:solidFill>
@@ -13705,13 +13935,16 @@
                 <a:ea typeface="Aptos" pitchFamily="34" charset="-122"/>
                 <a:cs typeface="Aptos" pitchFamily="34" charset="-120"/>
               </a:rPr>
-              <a:t>Adapt existing department templates when they already fit the purpose.</a:t>
-            </a:r>
-            <a:endParaRPr lang="en-US" sz="1380" dirty="0"/>
-          </a:p>
-          <a:p>
-            <a:r>
-              <a:rPr lang="en-US" sz="1380" dirty="0">
+              <a:t>Adapt existing department templates when they already fit the.</a:t>
+            </a:r>
+            <a:endParaRPr lang="en-US" sz="1220" dirty="0"/>
+          </a:p>
+          <a:p>
+            <a:pPr indent="0" marL="0">
+              <a:buNone/>
+            </a:pPr>
+            <a:r>
+              <a:rPr lang="en-US" sz="1220" dirty="0">
                 <a:solidFill>
                   <a:srgbClr val="17364A"/>
                 </a:solidFill>
@@ -13721,7 +13954,7 @@
               </a:rPr>
               <a:t>Save the completed artifact as evidence of the decision.</a:t>
             </a:r>
-            <a:endParaRPr lang="en-US" sz="1380" dirty="0"/>
+            <a:endParaRPr lang="en-US" sz="1220" dirty="0"/>
           </a:p>
         </p:txBody>
       </p:sp>
@@ -14022,49 +14255,58 @@
           <a:ln/>
         </p:spPr>
         <p:txBody>
-          <a:bodyPr wrap="square" lIns="635" tIns="635" rIns="635" bIns="635" rtlCol="0" anchor="t">
+          <a:bodyPr wrap="square" lIns="1016" tIns="1016" rIns="1016" bIns="1016" rtlCol="0" anchor="t">
             <a:normAutofit/>
           </a:bodyPr>
           <a:lstStyle/>
           <a:p>
+            <a:pPr indent="0" marL="0">
+              <a:buNone/>
+            </a:pPr>
             <a:r>
               <a:rPr lang="en-US" sz="2100" dirty="0">
                 <a:solidFill>
-                  <a:srgbClr val="17364A"/>
-                </a:solidFill>
-                <a:latin typeface="Aptos" pitchFamily="34" charset="0"/>
-                <a:ea typeface="Aptos" pitchFamily="34" charset="-122"/>
-                <a:cs typeface="Aptos" pitchFamily="34" charset="-120"/>
-              </a:rPr>
-              <a:t>Identify major data quality dimensions relevant to public health AI.</a:t>
+                  <a:srgbClr val="003A63"/>
+                </a:solidFill>
+                <a:latin typeface="Aptos" pitchFamily="34" charset="0"/>
+                <a:ea typeface="Aptos" pitchFamily="34" charset="-122"/>
+                <a:cs typeface="Aptos" pitchFamily="34" charset="-120"/>
+              </a:rPr>
+              <a:t>• Identify major data quality dimensions relevant to public health AI.</a:t>
             </a:r>
             <a:endParaRPr lang="en-US" sz="2100" dirty="0"/>
           </a:p>
           <a:p>
+            <a:pPr indent="0" marL="0">
+              <a:buNone/>
+            </a:pPr>
             <a:r>
               <a:rPr lang="en-US" sz="2100" dirty="0">
                 <a:solidFill>
-                  <a:srgbClr val="17364A"/>
-                </a:solidFill>
-                <a:latin typeface="Aptos" pitchFamily="34" charset="0"/>
-                <a:ea typeface="Aptos" pitchFamily="34" charset="-122"/>
-                <a:cs typeface="Aptos" pitchFamily="34" charset="-120"/>
-              </a:rPr>
-              <a:t>Explain the difference between general data quality and fitness for a specific use.</a:t>
+                  <a:srgbClr val="003A63"/>
+                </a:solidFill>
+                <a:latin typeface="Aptos" pitchFamily="34" charset="0"/>
+                <a:ea typeface="Aptos" pitchFamily="34" charset="-122"/>
+                <a:cs typeface="Aptos" pitchFamily="34" charset="-120"/>
+              </a:rPr>
+              <a:t>• Explain the difference between general data quality and fitness for a specific use.</a:t>
             </a:r>
             <a:endParaRPr lang="en-US" sz="2100" dirty="0"/>
           </a:p>
           <a:p>
+            <a:pPr indent="0" marL="0">
+              <a:buNone/>
+            </a:pPr>
             <a:r>
               <a:rPr lang="en-US" sz="2100" dirty="0">
                 <a:solidFill>
-                  <a:srgbClr val="17364A"/>
-                </a:solidFill>
-                <a:latin typeface="Aptos" pitchFamily="34" charset="0"/>
-                <a:ea typeface="Aptos" pitchFamily="34" charset="-122"/>
-                <a:cs typeface="Aptos" pitchFamily="34" charset="-120"/>
-              </a:rPr>
-              <a:t>Assess how missingness, timeliness, duplication, coding variation, and representativeness affect AI.</a:t>
+                  <a:srgbClr val="003A63"/>
+                </a:solidFill>
+                <a:latin typeface="Aptos" pitchFamily="34" charset="0"/>
+                <a:ea typeface="Aptos" pitchFamily="34" charset="-122"/>
+                <a:cs typeface="Aptos" pitchFamily="34" charset="-120"/>
+              </a:rPr>
+              <a:t>• Assess how missingness, timeliness, duplication, coding variation, and representativeness.</a:t>
             </a:r>
             <a:endParaRPr lang="en-US" sz="2100" dirty="0"/>
           </a:p>
@@ -14144,17 +14386,17 @@
         </p:nvSpPr>
         <p:spPr>
           <a:xfrm>
-            <a:off x="7799832" y="1828800"/>
-            <a:ext cx="3145536" cy="685800"/>
-          </a:xfrm>
-          <a:prstGeom prst="rect">
-            <a:avLst/>
-          </a:prstGeom>
-          <a:noFill/>
-          <a:ln/>
-        </p:spPr>
-        <p:txBody>
-          <a:bodyPr wrap="square" lIns="0" tIns="0" rIns="0" bIns="0" rtlCol="0" anchor="t">
+            <a:off x="7799832" y="1801368"/>
+            <a:ext cx="3145536" cy="758952"/>
+          </a:xfrm>
+          <a:prstGeom prst="rect">
+            <a:avLst/>
+          </a:prstGeom>
+          <a:noFill/>
+          <a:ln/>
+        </p:spPr>
+        <p:txBody>
+          <a:bodyPr wrap="square" lIns="254" tIns="254" rIns="254" bIns="254" rtlCol="0" anchor="t">
             <a:normAutofit/>
           </a:bodyPr>
           <a:lstStyle/>
@@ -14163,7 +14405,7 @@
               <a:buNone/>
             </a:pPr>
             <a:r>
-              <a:rPr lang="en-US" sz="1550" dirty="0">
+              <a:rPr lang="en-US" sz="1320" dirty="0">
                 <a:solidFill>
                   <a:srgbClr val="17364A"/>
                 </a:solidFill>
@@ -14173,7 +14415,7 @@
               </a:rPr>
               <a:t>Identify major data quality dimensions relevant to public health AI.</a:t>
             </a:r>
-            <a:endParaRPr lang="en-US" sz="1550" dirty="0"/>
+            <a:endParaRPr lang="en-US" sz="1320" dirty="0"/>
           </a:p>
         </p:txBody>
       </p:sp>
@@ -14261,13 +14503,16 @@
           <a:ln/>
         </p:spPr>
         <p:txBody>
-          <a:bodyPr wrap="square" lIns="254" tIns="254" rIns="254" bIns="254" rtlCol="0" anchor="t">
+          <a:bodyPr wrap="square" lIns="508" tIns="508" rIns="508" bIns="508" rtlCol="0" anchor="t">
             <a:normAutofit/>
           </a:bodyPr>
           <a:lstStyle/>
           <a:p>
-            <a:r>
-              <a:rPr lang="en-US" sz="1380" dirty="0">
+            <a:pPr indent="0" marL="0">
+              <a:buNone/>
+            </a:pPr>
+            <a:r>
+              <a:rPr lang="en-US" sz="1220" dirty="0">
                 <a:solidFill>
                   <a:srgbClr val="17364A"/>
                 </a:solidFill>
@@ -14275,13 +14520,16 @@
                 <a:ea typeface="Aptos" pitchFamily="34" charset="-122"/>
                 <a:cs typeface="Aptos" pitchFamily="34" charset="-120"/>
               </a:rPr>
-              <a:t>Assess how missingness, timeliness, duplication, coding variation, and representativeness.</a:t>
-            </a:r>
-            <a:endParaRPr lang="en-US" sz="1380" dirty="0"/>
-          </a:p>
-          <a:p>
-            <a:r>
-              <a:rPr lang="en-US" sz="1380" dirty="0">
+              <a:t>Assess how missingness, timeliness, duplication, coding variation,.</a:t>
+            </a:r>
+            <a:endParaRPr lang="en-US" sz="1220" dirty="0"/>
+          </a:p>
+          <a:p>
+            <a:pPr indent="0" marL="0">
+              <a:buNone/>
+            </a:pPr>
+            <a:r>
+              <a:rPr lang="en-US" sz="1220" dirty="0">
                 <a:solidFill>
                   <a:srgbClr val="17364A"/>
                 </a:solidFill>
@@ -14289,13 +14537,16 @@
                 <a:ea typeface="Aptos" pitchFamily="34" charset="-122"/>
                 <a:cs typeface="Aptos" pitchFamily="34" charset="-120"/>
               </a:rPr>
-              <a:t>Define quality thresholds, review rules, and escalation criteria for a workflow.</a:t>
-            </a:r>
-            <a:endParaRPr lang="en-US" sz="1380" dirty="0"/>
-          </a:p>
-          <a:p>
-            <a:r>
-              <a:rPr lang="en-US" sz="1380" dirty="0">
+              <a:t>Define quality thresholds, review rules, and escalation criteria.</a:t>
+            </a:r>
+            <a:endParaRPr lang="en-US" sz="1220" dirty="0"/>
+          </a:p>
+          <a:p>
+            <a:pPr indent="0" marL="0">
+              <a:buNone/>
+            </a:pPr>
+            <a:r>
+              <a:rPr lang="en-US" sz="1220" dirty="0">
                 <a:solidFill>
                   <a:srgbClr val="17364A"/>
                 </a:solidFill>
@@ -14305,7 +14556,7 @@
               </a:rPr>
               <a:t>Produce a data quality review plan for an AI-supported use case.</a:t>
             </a:r>
-            <a:endParaRPr lang="en-US" sz="1380" dirty="0"/>
+            <a:endParaRPr lang="en-US" sz="1220" dirty="0"/>
           </a:p>
         </p:txBody>
       </p:sp>
@@ -14383,17 +14634,17 @@
         </p:nvSpPr>
         <p:spPr>
           <a:xfrm>
-            <a:off x="7799832" y="5001768"/>
-            <a:ext cx="3145536" cy="502920"/>
-          </a:xfrm>
-          <a:prstGeom prst="rect">
-            <a:avLst/>
-          </a:prstGeom>
-          <a:noFill/>
-          <a:ln/>
-        </p:spPr>
-        <p:txBody>
-          <a:bodyPr wrap="square" lIns="0" tIns="0" rIns="0" bIns="0" rtlCol="0" anchor="t">
+            <a:off x="7799832" y="4974336"/>
+            <a:ext cx="3145536" cy="576072"/>
+          </a:xfrm>
+          <a:prstGeom prst="rect">
+            <a:avLst/>
+          </a:prstGeom>
+          <a:noFill/>
+          <a:ln/>
+        </p:spPr>
+        <p:txBody>
+          <a:bodyPr wrap="square" lIns="254" tIns="254" rIns="254" bIns="254" rtlCol="0" anchor="t">
             <a:normAutofit/>
           </a:bodyPr>
           <a:lstStyle/>
@@ -14402,7 +14653,7 @@
               <a:buNone/>
             </a:pPr>
             <a:r>
-              <a:rPr lang="en-US" sz="1550" dirty="0">
+              <a:rPr lang="en-US" sz="1320" dirty="0">
                 <a:solidFill>
                   <a:srgbClr val="17364A"/>
                 </a:solidFill>
@@ -14410,9 +14661,9 @@
                 <a:ea typeface="Aptos" pitchFamily="34" charset="-122"/>
                 <a:cs typeface="Aptos" pitchFamily="34" charset="-120"/>
               </a:rPr>
-              <a:t>Use the assignment to test whether you can explain the concept, apply it to a realistic public health situation, and identify what would need review before the work moves forward.</a:t>
-            </a:r>
-            <a:endParaRPr lang="en-US" sz="1550" dirty="0"/>
+              <a:t>Use the assignment to test whether you can explain the concept, apply it to a realistic public health situation, and.</a:t>
+            </a:r>
+            <a:endParaRPr lang="en-US" sz="1320" dirty="0"/>
           </a:p>
         </p:txBody>
       </p:sp>
@@ -14713,49 +14964,58 @@
           <a:ln/>
         </p:spPr>
         <p:txBody>
-          <a:bodyPr wrap="square" lIns="635" tIns="635" rIns="635" bIns="635" rtlCol="0" anchor="t">
+          <a:bodyPr wrap="square" lIns="1016" tIns="1016" rIns="1016" bIns="1016" rtlCol="0" anchor="t">
             <a:normAutofit/>
           </a:bodyPr>
           <a:lstStyle/>
           <a:p>
+            <a:pPr indent="0" marL="0">
+              <a:buNone/>
+            </a:pPr>
             <a:r>
               <a:rPr lang="en-US" sz="2100" dirty="0">
                 <a:solidFill>
-                  <a:srgbClr val="17364A"/>
-                </a:solidFill>
-                <a:latin typeface="Aptos" pitchFamily="34" charset="0"/>
-                <a:ea typeface="Aptos" pitchFamily="34" charset="-122"/>
-                <a:cs typeface="Aptos" pitchFamily="34" charset="-120"/>
-              </a:rPr>
-              <a:t>Data quality engineering is the practical work of defining, measuring, improving, and monitoring data.</a:t>
+                  <a:srgbClr val="003A63"/>
+                </a:solidFill>
+                <a:latin typeface="Aptos" pitchFamily="34" charset="0"/>
+                <a:ea typeface="Aptos" pitchFamily="34" charset="-122"/>
+                <a:cs typeface="Aptos" pitchFamily="34" charset="-120"/>
+              </a:rPr>
+              <a:t>• Data quality engineering is the practical work of defining, measuring, improving, and.</a:t>
             </a:r>
             <a:endParaRPr lang="en-US" sz="2100" dirty="0"/>
           </a:p>
           <a:p>
+            <a:pPr indent="0" marL="0">
+              <a:buNone/>
+            </a:pPr>
             <a:r>
               <a:rPr lang="en-US" sz="2100" dirty="0">
                 <a:solidFill>
-                  <a:srgbClr val="17364A"/>
-                </a:solidFill>
-                <a:latin typeface="Aptos" pitchFamily="34" charset="0"/>
-                <a:ea typeface="Aptos" pitchFamily="34" charset="-122"/>
-                <a:cs typeface="Aptos" pitchFamily="34" charset="-120"/>
-              </a:rPr>
-              <a:t>In public health AI, data quality is not a background concern.</a:t>
+                  <a:srgbClr val="003A63"/>
+                </a:solidFill>
+                <a:latin typeface="Aptos" pitchFamily="34" charset="0"/>
+                <a:ea typeface="Aptos" pitchFamily="34" charset="-122"/>
+                <a:cs typeface="Aptos" pitchFamily="34" charset="-120"/>
+              </a:rPr>
+              <a:t>• In public health AI, data quality is not a background concern.</a:t>
             </a:r>
             <a:endParaRPr lang="en-US" sz="2100" dirty="0"/>
           </a:p>
           <a:p>
+            <a:pPr indent="0" marL="0">
+              <a:buNone/>
+            </a:pPr>
             <a:r>
               <a:rPr lang="en-US" sz="2100" dirty="0">
                 <a:solidFill>
-                  <a:srgbClr val="17364A"/>
-                </a:solidFill>
-                <a:latin typeface="Aptos" pitchFamily="34" charset="0"/>
-                <a:ea typeface="Aptos" pitchFamily="34" charset="-122"/>
-                <a:cs typeface="Aptos" pitchFamily="34" charset="-120"/>
-              </a:rPr>
-              <a:t>It directly affects whether AI outputs are accurate, equitable, timely, and safe enough to support.</a:t>
+                  <a:srgbClr val="003A63"/>
+                </a:solidFill>
+                <a:latin typeface="Aptos" pitchFamily="34" charset="0"/>
+                <a:ea typeface="Aptos" pitchFamily="34" charset="-122"/>
+                <a:cs typeface="Aptos" pitchFamily="34" charset="-120"/>
+              </a:rPr>
+              <a:t>• It directly affects whether AI outputs are accurate, equitable, timely, and safe enough to.</a:t>
             </a:r>
             <a:endParaRPr lang="en-US" sz="2100" dirty="0"/>
           </a:p>
@@ -14835,17 +15095,17 @@
         </p:nvSpPr>
         <p:spPr>
           <a:xfrm>
-            <a:off x="7799832" y="1828800"/>
-            <a:ext cx="3145536" cy="685800"/>
-          </a:xfrm>
-          <a:prstGeom prst="rect">
-            <a:avLst/>
-          </a:prstGeom>
-          <a:noFill/>
-          <a:ln/>
-        </p:spPr>
-        <p:txBody>
-          <a:bodyPr wrap="square" lIns="0" tIns="0" rIns="0" bIns="0" rtlCol="0" anchor="t">
+            <a:off x="7799832" y="1801368"/>
+            <a:ext cx="3145536" cy="758952"/>
+          </a:xfrm>
+          <a:prstGeom prst="rect">
+            <a:avLst/>
+          </a:prstGeom>
+          <a:noFill/>
+          <a:ln/>
+        </p:spPr>
+        <p:txBody>
+          <a:bodyPr wrap="square" lIns="254" tIns="254" rIns="254" bIns="254" rtlCol="0" anchor="t">
             <a:normAutofit/>
           </a:bodyPr>
           <a:lstStyle/>
@@ -14854,7 +15114,7 @@
               <a:buNone/>
             </a:pPr>
             <a:r>
-              <a:rPr lang="en-US" sz="1550" dirty="0">
+              <a:rPr lang="en-US" sz="1320" dirty="0">
                 <a:solidFill>
                   <a:srgbClr val="17364A"/>
                 </a:solidFill>
@@ -14864,7 +15124,7 @@
               </a:rPr>
               <a:t>Data quality engineering is the practical work of defining, measuring, improving, and monitoring data.</a:t>
             </a:r>
-            <a:endParaRPr lang="en-US" sz="1550" dirty="0"/>
+            <a:endParaRPr lang="en-US" sz="1320" dirty="0"/>
           </a:p>
         </p:txBody>
       </p:sp>
@@ -14952,13 +15212,16 @@
           <a:ln/>
         </p:spPr>
         <p:txBody>
-          <a:bodyPr wrap="square" lIns="254" tIns="254" rIns="254" bIns="254" rtlCol="0" anchor="t">
+          <a:bodyPr wrap="square" lIns="508" tIns="508" rIns="508" bIns="508" rtlCol="0" anchor="t">
             <a:normAutofit/>
           </a:bodyPr>
           <a:lstStyle/>
           <a:p>
-            <a:r>
-              <a:rPr lang="en-US" sz="1380" dirty="0">
+            <a:pPr indent="0" marL="0">
+              <a:buNone/>
+            </a:pPr>
+            <a:r>
+              <a:rPr lang="en-US" sz="1220" dirty="0">
                 <a:solidFill>
                   <a:srgbClr val="17364A"/>
                 </a:solidFill>
@@ -14966,13 +15229,16 @@
                 <a:ea typeface="Aptos" pitchFamily="34" charset="-122"/>
                 <a:cs typeface="Aptos" pitchFamily="34" charset="-120"/>
               </a:rPr>
-              <a:t>Data quality engineering is the practical work of defining, measuring, improving, and.</a:t>
-            </a:r>
-            <a:endParaRPr lang="en-US" sz="1380" dirty="0"/>
-          </a:p>
-          <a:p>
-            <a:r>
-              <a:rPr lang="en-US" sz="1380" dirty="0">
+              <a:t>Data quality engineering is the practical work of defining,.</a:t>
+            </a:r>
+            <a:endParaRPr lang="en-US" sz="1220" dirty="0"/>
+          </a:p>
+          <a:p>
+            <a:pPr indent="0" marL="0">
+              <a:buNone/>
+            </a:pPr>
+            <a:r>
+              <a:rPr lang="en-US" sz="1220" dirty="0">
                 <a:solidFill>
                   <a:srgbClr val="17364A"/>
                 </a:solidFill>
@@ -14980,9 +15246,9 @@
                 <a:ea typeface="Aptos" pitchFamily="34" charset="-122"/>
                 <a:cs typeface="Aptos" pitchFamily="34" charset="-120"/>
               </a:rPr>
-              <a:t>It directly affects whether AI outputs are accurate, equitable, timely, and safe enough to.</a:t>
-            </a:r>
-            <a:endParaRPr lang="en-US" sz="1380" dirty="0"/>
+              <a:t>It directly affects whether AI outputs are accurate, equitable,.</a:t>
+            </a:r>
+            <a:endParaRPr lang="en-US" sz="1220" dirty="0"/>
           </a:p>
         </p:txBody>
       </p:sp>
@@ -15060,17 +15326,17 @@
         </p:nvSpPr>
         <p:spPr>
           <a:xfrm>
-            <a:off x="7799832" y="5001768"/>
-            <a:ext cx="3145536" cy="502920"/>
-          </a:xfrm>
-          <a:prstGeom prst="rect">
-            <a:avLst/>
-          </a:prstGeom>
-          <a:noFill/>
-          <a:ln/>
-        </p:spPr>
-        <p:txBody>
-          <a:bodyPr wrap="square" lIns="0" tIns="0" rIns="0" bIns="0" rtlCol="0" anchor="t">
+            <a:off x="7799832" y="4974336"/>
+            <a:ext cx="3145536" cy="576072"/>
+          </a:xfrm>
+          <a:prstGeom prst="rect">
+            <a:avLst/>
+          </a:prstGeom>
+          <a:noFill/>
+          <a:ln/>
+        </p:spPr>
+        <p:txBody>
+          <a:bodyPr wrap="square" lIns="254" tIns="254" rIns="254" bIns="254" rtlCol="0" anchor="t">
             <a:normAutofit/>
           </a:bodyPr>
           <a:lstStyle/>
@@ -15079,7 +15345,7 @@
               <a:buNone/>
             </a:pPr>
             <a:r>
-              <a:rPr lang="en-US" sz="1550" dirty="0">
+              <a:rPr lang="en-US" sz="1320" dirty="0">
                 <a:solidFill>
                   <a:srgbClr val="17364A"/>
                 </a:solidFill>
@@ -15087,9 +15353,9 @@
                 <a:ea typeface="Aptos" pitchFamily="34" charset="-122"/>
                 <a:cs typeface="Aptos" pitchFamily="34" charset="-120"/>
               </a:rPr>
-              <a:t>Connect the concept to data quality, model performance, validation evidence, monitoring measures, and decisions that remain under human control.</a:t>
-            </a:r>
-            <a:endParaRPr lang="en-US" sz="1550" dirty="0"/>
+              <a:t>Connect the concept to data quality, model performance, validation evidence, monitoring measures, and decisions that.</a:t>
+            </a:r>
+            <a:endParaRPr lang="en-US" sz="1320" dirty="0"/>
           </a:p>
         </p:txBody>
       </p:sp>
@@ -15390,49 +15656,58 @@
           <a:ln/>
         </p:spPr>
         <p:txBody>
-          <a:bodyPr wrap="square" lIns="635" tIns="635" rIns="635" bIns="635" rtlCol="0" anchor="t">
+          <a:bodyPr wrap="square" lIns="1016" tIns="1016" rIns="1016" bIns="1016" rtlCol="0" anchor="t">
             <a:normAutofit/>
           </a:bodyPr>
           <a:lstStyle/>
           <a:p>
+            <a:pPr indent="0" marL="0">
+              <a:buNone/>
+            </a:pPr>
             <a:r>
               <a:rPr lang="en-US" sz="2100" dirty="0">
                 <a:solidFill>
-                  <a:srgbClr val="17364A"/>
-                </a:solidFill>
-                <a:latin typeface="Aptos" pitchFamily="34" charset="0"/>
-                <a:ea typeface="Aptos" pitchFamily="34" charset="-122"/>
-                <a:cs typeface="Aptos" pitchFamily="34" charset="-120"/>
-              </a:rPr>
-              <a:t>AI systems can create a false sense of precision when they produce polished outputs from weak data.</a:t>
+                  <a:srgbClr val="003A63"/>
+                </a:solidFill>
+                <a:latin typeface="Aptos" pitchFamily="34" charset="0"/>
+                <a:ea typeface="Aptos" pitchFamily="34" charset="-122"/>
+                <a:cs typeface="Aptos" pitchFamily="34" charset="-120"/>
+              </a:rPr>
+              <a:t>• AI systems can create a false sense of precision when they produce polished outputs from weak.</a:t>
             </a:r>
             <a:endParaRPr lang="en-US" sz="2100" dirty="0"/>
           </a:p>
           <a:p>
+            <a:pPr indent="0" marL="0">
+              <a:buNone/>
+            </a:pPr>
             <a:r>
               <a:rPr lang="en-US" sz="2100" dirty="0">
                 <a:solidFill>
-                  <a:srgbClr val="17364A"/>
-                </a:solidFill>
-                <a:latin typeface="Aptos" pitchFamily="34" charset="0"/>
-                <a:ea typeface="Aptos" pitchFamily="34" charset="-122"/>
-                <a:cs typeface="Aptos" pitchFamily="34" charset="-120"/>
-              </a:rPr>
-              <a:t>A summary may sound authoritative even when key fields are missing.</a:t>
+                  <a:srgbClr val="003A63"/>
+                </a:solidFill>
+                <a:latin typeface="Aptos" pitchFamily="34" charset="0"/>
+                <a:ea typeface="Aptos" pitchFamily="34" charset="-122"/>
+                <a:cs typeface="Aptos" pitchFamily="34" charset="-120"/>
+              </a:rPr>
+              <a:t>• A summary may sound authoritative even when key fields are missing.</a:t>
             </a:r>
             <a:endParaRPr lang="en-US" sz="2100" dirty="0"/>
           </a:p>
           <a:p>
+            <a:pPr indent="0" marL="0">
+              <a:buNone/>
+            </a:pPr>
             <a:r>
               <a:rPr lang="en-US" sz="2100" dirty="0">
                 <a:solidFill>
-                  <a:srgbClr val="17364A"/>
-                </a:solidFill>
-                <a:latin typeface="Aptos" pitchFamily="34" charset="0"/>
-                <a:ea typeface="Aptos" pitchFamily="34" charset="-122"/>
-                <a:cs typeface="Aptos" pitchFamily="34" charset="-120"/>
-              </a:rPr>
-              <a:t>A risk score may look objective even when the data underrepresent communities with limited healthcare.</a:t>
+                  <a:srgbClr val="003A63"/>
+                </a:solidFill>
+                <a:latin typeface="Aptos" pitchFamily="34" charset="0"/>
+                <a:ea typeface="Aptos" pitchFamily="34" charset="-122"/>
+                <a:cs typeface="Aptos" pitchFamily="34" charset="-120"/>
+              </a:rPr>
+              <a:t>• A risk score may look objective even when the data underrepresent communities with limited.</a:t>
             </a:r>
             <a:endParaRPr lang="en-US" sz="2100" dirty="0"/>
           </a:p>
@@ -15512,17 +15787,17 @@
         </p:nvSpPr>
         <p:spPr>
           <a:xfrm>
-            <a:off x="7799832" y="1828800"/>
-            <a:ext cx="3145536" cy="685800"/>
-          </a:xfrm>
-          <a:prstGeom prst="rect">
-            <a:avLst/>
-          </a:prstGeom>
-          <a:noFill/>
-          <a:ln/>
-        </p:spPr>
-        <p:txBody>
-          <a:bodyPr wrap="square" lIns="0" tIns="0" rIns="0" bIns="0" rtlCol="0" anchor="t">
+            <a:off x="7799832" y="1801368"/>
+            <a:ext cx="3145536" cy="758952"/>
+          </a:xfrm>
+          <a:prstGeom prst="rect">
+            <a:avLst/>
+          </a:prstGeom>
+          <a:noFill/>
+          <a:ln/>
+        </p:spPr>
+        <p:txBody>
+          <a:bodyPr wrap="square" lIns="254" tIns="254" rIns="254" bIns="254" rtlCol="0" anchor="t">
             <a:normAutofit/>
           </a:bodyPr>
           <a:lstStyle/>
@@ -15531,7 +15806,7 @@
               <a:buNone/>
             </a:pPr>
             <a:r>
-              <a:rPr lang="en-US" sz="1550" dirty="0">
+              <a:rPr lang="en-US" sz="1320" dirty="0">
                 <a:solidFill>
                   <a:srgbClr val="17364A"/>
                 </a:solidFill>
@@ -15541,7 +15816,7 @@
               </a:rPr>
               <a:t>AI systems can create a false sense of precision when they produce polished outputs from weak data.</a:t>
             </a:r>
-            <a:endParaRPr lang="en-US" sz="1550" dirty="0"/>
+            <a:endParaRPr lang="en-US" sz="1320" dirty="0"/>
           </a:p>
         </p:txBody>
       </p:sp>
@@ -15629,13 +15904,16 @@
           <a:ln/>
         </p:spPr>
         <p:txBody>
-          <a:bodyPr wrap="square" lIns="254" tIns="254" rIns="254" bIns="254" rtlCol="0" anchor="t">
+          <a:bodyPr wrap="square" lIns="508" tIns="508" rIns="508" bIns="508" rtlCol="0" anchor="t">
             <a:normAutofit/>
           </a:bodyPr>
           <a:lstStyle/>
           <a:p>
-            <a:r>
-              <a:rPr lang="en-US" sz="1380" dirty="0">
+            <a:pPr indent="0" marL="0">
+              <a:buNone/>
+            </a:pPr>
+            <a:r>
+              <a:rPr lang="en-US" sz="1220" dirty="0">
                 <a:solidFill>
                   <a:srgbClr val="17364A"/>
                 </a:solidFill>
@@ -15643,13 +15921,16 @@
                 <a:ea typeface="Aptos" pitchFamily="34" charset="-122"/>
                 <a:cs typeface="Aptos" pitchFamily="34" charset="-120"/>
               </a:rPr>
-              <a:t>A risk score may look objective even when the data underrepresent communities with limited.</a:t>
-            </a:r>
-            <a:endParaRPr lang="en-US" sz="1380" dirty="0"/>
-          </a:p>
-          <a:p>
-            <a:r>
-              <a:rPr lang="en-US" sz="1380" dirty="0">
+              <a:t>A risk score may look objective even when the data underrepresent.</a:t>
+            </a:r>
+            <a:endParaRPr lang="en-US" sz="1220" dirty="0"/>
+          </a:p>
+          <a:p>
+            <a:pPr indent="0" marL="0">
+              <a:buNone/>
+            </a:pPr>
+            <a:r>
+              <a:rPr lang="en-US" sz="1220" dirty="0">
                 <a:solidFill>
                   <a:srgbClr val="17364A"/>
                 </a:solidFill>
@@ -15657,13 +15938,16 @@
                 <a:ea typeface="Aptos" pitchFamily="34" charset="-122"/>
                 <a:cs typeface="Aptos" pitchFamily="34" charset="-120"/>
               </a:rPr>
-              <a:t>A classification model may appear efficient while encoding historical reporting patterns.</a:t>
-            </a:r>
-            <a:endParaRPr lang="en-US" sz="1380" dirty="0"/>
-          </a:p>
-          <a:p>
-            <a:r>
-              <a:rPr lang="en-US" sz="1380" dirty="0">
+              <a:t>A classification model may appear efficient while encoding.</a:t>
+            </a:r>
+            <a:endParaRPr lang="en-US" sz="1220" dirty="0"/>
+          </a:p>
+          <a:p>
+            <a:pPr indent="0" marL="0">
+              <a:buNone/>
+            </a:pPr>
+            <a:r>
+              <a:rPr lang="en-US" sz="1220" dirty="0">
                 <a:solidFill>
                   <a:srgbClr val="17364A"/>
                 </a:solidFill>
@@ -15671,9 +15955,9 @@
                 <a:ea typeface="Aptos" pitchFamily="34" charset="-122"/>
                 <a:cs typeface="Aptos" pitchFamily="34" charset="-120"/>
               </a:rPr>
-              <a:t>Data quality engineering helps agencies identify these problems before they become.</a:t>
-            </a:r>
-            <a:endParaRPr lang="en-US" sz="1380" dirty="0"/>
+              <a:t>Data quality engineering helps agencies identify these problems.</a:t>
+            </a:r>
+            <a:endParaRPr lang="en-US" sz="1220" dirty="0"/>
           </a:p>
         </p:txBody>
       </p:sp>
@@ -15751,17 +16035,17 @@
         </p:nvSpPr>
         <p:spPr>
           <a:xfrm>
-            <a:off x="7799832" y="5001768"/>
-            <a:ext cx="3145536" cy="502920"/>
-          </a:xfrm>
-          <a:prstGeom prst="rect">
-            <a:avLst/>
-          </a:prstGeom>
-          <a:noFill/>
-          <a:ln/>
-        </p:spPr>
-        <p:txBody>
-          <a:bodyPr wrap="square" lIns="0" tIns="0" rIns="0" bIns="0" rtlCol="0" anchor="t">
+            <a:off x="7799832" y="4974336"/>
+            <a:ext cx="3145536" cy="576072"/>
+          </a:xfrm>
+          <a:prstGeom prst="rect">
+            <a:avLst/>
+          </a:prstGeom>
+          <a:noFill/>
+          <a:ln/>
+        </p:spPr>
+        <p:txBody>
+          <a:bodyPr wrap="square" lIns="254" tIns="254" rIns="254" bIns="254" rtlCol="0" anchor="t">
             <a:normAutofit/>
           </a:bodyPr>
           <a:lstStyle/>
@@ -15770,7 +16054,7 @@
               <a:buNone/>
             </a:pPr>
             <a:r>
-              <a:rPr lang="en-US" sz="1550" dirty="0">
+              <a:rPr lang="en-US" sz="1320" dirty="0">
                 <a:solidFill>
                   <a:srgbClr val="17364A"/>
                 </a:solidFill>
@@ -15778,9 +16062,9 @@
                 <a:ea typeface="Aptos" pitchFamily="34" charset="-122"/>
                 <a:cs typeface="Aptos" pitchFamily="34" charset="-120"/>
               </a:rPr>
-              <a:t>Connect the concept to data quality, model performance, validation evidence, monitoring measures, and decisions that remain under human control.</a:t>
-            </a:r>
-            <a:endParaRPr lang="en-US" sz="1550" dirty="0"/>
+              <a:t>Connect the concept to data quality, model performance, validation evidence, monitoring measures, and decisions that.</a:t>
+            </a:r>
+            <a:endParaRPr lang="en-US" sz="1320" dirty="0"/>
           </a:p>
         </p:txBody>
       </p:sp>
@@ -16081,49 +16365,58 @@
           <a:ln/>
         </p:spPr>
         <p:txBody>
-          <a:bodyPr wrap="square" lIns="635" tIns="635" rIns="635" bIns="635" rtlCol="0" anchor="t">
+          <a:bodyPr wrap="square" lIns="1016" tIns="1016" rIns="1016" bIns="1016" rtlCol="0" anchor="t">
             <a:normAutofit/>
           </a:bodyPr>
           <a:lstStyle/>
           <a:p>
+            <a:pPr indent="0" marL="0">
+              <a:buNone/>
+            </a:pPr>
             <a:r>
               <a:rPr lang="en-US" sz="2100" dirty="0">
                 <a:solidFill>
-                  <a:srgbClr val="17364A"/>
-                </a:solidFill>
-                <a:latin typeface="Aptos" pitchFamily="34" charset="0"/>
-                <a:ea typeface="Aptos" pitchFamily="34" charset="-122"/>
-                <a:cs typeface="Aptos" pitchFamily="34" charset="-120"/>
-              </a:rPr>
-              <a:t>Completeness.</a:t>
+                  <a:srgbClr val="003A63"/>
+                </a:solidFill>
+                <a:latin typeface="Aptos" pitchFamily="34" charset="0"/>
+                <a:ea typeface="Aptos" pitchFamily="34" charset="-122"/>
+                <a:cs typeface="Aptos" pitchFamily="34" charset="-120"/>
+              </a:rPr>
+              <a:t>• Completeness.</a:t>
             </a:r>
             <a:endParaRPr lang="en-US" sz="2100" dirty="0"/>
           </a:p>
           <a:p>
+            <a:pPr indent="0" marL="0">
+              <a:buNone/>
+            </a:pPr>
             <a:r>
               <a:rPr lang="en-US" sz="2100" dirty="0">
                 <a:solidFill>
-                  <a:srgbClr val="17364A"/>
-                </a:solidFill>
-                <a:latin typeface="Aptos" pitchFamily="34" charset="0"/>
-                <a:ea typeface="Aptos" pitchFamily="34" charset="-122"/>
-                <a:cs typeface="Aptos" pitchFamily="34" charset="-120"/>
-              </a:rPr>
-              <a:t>Completeness refers to whether required data fields are present.</a:t>
+                  <a:srgbClr val="003A63"/>
+                </a:solidFill>
+                <a:latin typeface="Aptos" pitchFamily="34" charset="0"/>
+                <a:ea typeface="Aptos" pitchFamily="34" charset="-122"/>
+                <a:cs typeface="Aptos" pitchFamily="34" charset="-120"/>
+              </a:rPr>
+              <a:t>• Completeness refers to whether required data fields are present.</a:t>
             </a:r>
             <a:endParaRPr lang="en-US" sz="2100" dirty="0"/>
           </a:p>
           <a:p>
+            <a:pPr indent="0" marL="0">
+              <a:buNone/>
+            </a:pPr>
             <a:r>
               <a:rPr lang="en-US" sz="2100" dirty="0">
                 <a:solidFill>
-                  <a:srgbClr val="17364A"/>
-                </a:solidFill>
-                <a:latin typeface="Aptos" pitchFamily="34" charset="0"/>
-                <a:ea typeface="Aptos" pitchFamily="34" charset="-122"/>
-                <a:cs typeface="Aptos" pitchFamily="34" charset="-120"/>
-              </a:rPr>
-              <a:t>Missing fields may affect case classification, risk prediction, subgroup analysis, and outreach planning.</a:t>
+                  <a:srgbClr val="003A63"/>
+                </a:solidFill>
+                <a:latin typeface="Aptos" pitchFamily="34" charset="0"/>
+                <a:ea typeface="Aptos" pitchFamily="34" charset="-122"/>
+                <a:cs typeface="Aptos" pitchFamily="34" charset="-120"/>
+              </a:rPr>
+              <a:t>• Missing fields may affect case classification, risk prediction, subgroup analysis, and.</a:t>
             </a:r>
             <a:endParaRPr lang="en-US" sz="2100" dirty="0"/>
           </a:p>
@@ -16203,17 +16496,17 @@
         </p:nvSpPr>
         <p:spPr>
           <a:xfrm>
-            <a:off x="7799832" y="1828800"/>
-            <a:ext cx="3145536" cy="685800"/>
-          </a:xfrm>
-          <a:prstGeom prst="rect">
-            <a:avLst/>
-          </a:prstGeom>
-          <a:noFill/>
-          <a:ln/>
-        </p:spPr>
-        <p:txBody>
-          <a:bodyPr wrap="square" lIns="0" tIns="0" rIns="0" bIns="0" rtlCol="0" anchor="t">
+            <a:off x="7799832" y="1801368"/>
+            <a:ext cx="3145536" cy="758952"/>
+          </a:xfrm>
+          <a:prstGeom prst="rect">
+            <a:avLst/>
+          </a:prstGeom>
+          <a:noFill/>
+          <a:ln/>
+        </p:spPr>
+        <p:txBody>
+          <a:bodyPr wrap="square" lIns="254" tIns="254" rIns="254" bIns="254" rtlCol="0" anchor="t">
             <a:normAutofit/>
           </a:bodyPr>
           <a:lstStyle/>
@@ -16222,7 +16515,7 @@
               <a:buNone/>
             </a:pPr>
             <a:r>
-              <a:rPr lang="en-US" sz="1550" dirty="0">
+              <a:rPr lang="en-US" sz="1320" dirty="0">
                 <a:solidFill>
                   <a:srgbClr val="17364A"/>
                 </a:solidFill>
@@ -16232,7 +16525,7 @@
               </a:rPr>
               <a:t>Completeness.</a:t>
             </a:r>
-            <a:endParaRPr lang="en-US" sz="1550" dirty="0"/>
+            <a:endParaRPr lang="en-US" sz="1320" dirty="0"/>
           </a:p>
         </p:txBody>
       </p:sp>
@@ -16320,13 +16613,16 @@
           <a:ln/>
         </p:spPr>
         <p:txBody>
-          <a:bodyPr wrap="square" lIns="254" tIns="254" rIns="254" bIns="254" rtlCol="0" anchor="t">
+          <a:bodyPr wrap="square" lIns="508" tIns="508" rIns="508" bIns="508" rtlCol="0" anchor="t">
             <a:normAutofit/>
           </a:bodyPr>
           <a:lstStyle/>
           <a:p>
-            <a:r>
-              <a:rPr lang="en-US" sz="1380" dirty="0">
+            <a:pPr indent="0" marL="0">
+              <a:buNone/>
+            </a:pPr>
+            <a:r>
+              <a:rPr lang="en-US" sz="1220" dirty="0">
                 <a:solidFill>
                   <a:srgbClr val="17364A"/>
                 </a:solidFill>
@@ -16336,11 +16632,14 @@
               </a:rPr>
               <a:t>Timeliness.</a:t>
             </a:r>
-            <a:endParaRPr lang="en-US" sz="1380" dirty="0"/>
-          </a:p>
-          <a:p>
-            <a:r>
-              <a:rPr lang="en-US" sz="1380" dirty="0">
+            <a:endParaRPr lang="en-US" sz="1220" dirty="0"/>
+          </a:p>
+          <a:p>
+            <a:pPr indent="0" marL="0">
+              <a:buNone/>
+            </a:pPr>
+            <a:r>
+              <a:rPr lang="en-US" sz="1220" dirty="0">
                 <a:solidFill>
                   <a:srgbClr val="17364A"/>
                 </a:solidFill>
@@ -16348,13 +16647,16 @@
                 <a:ea typeface="Aptos" pitchFamily="34" charset="-122"/>
                 <a:cs typeface="Aptos" pitchFamily="34" charset="-120"/>
               </a:rPr>
-              <a:t>Timeliness refers to whether data are available quickly enough for the intended use.</a:t>
-            </a:r>
-            <a:endParaRPr lang="en-US" sz="1380" dirty="0"/>
-          </a:p>
-          <a:p>
-            <a:r>
-              <a:rPr lang="en-US" sz="1380" dirty="0">
+              <a:t>Timeliness refers to whether data are available quickly enough for.</a:t>
+            </a:r>
+            <a:endParaRPr lang="en-US" sz="1220" dirty="0"/>
+          </a:p>
+          <a:p>
+            <a:pPr indent="0" marL="0">
+              <a:buNone/>
+            </a:pPr>
+            <a:r>
+              <a:rPr lang="en-US" sz="1220" dirty="0">
                 <a:solidFill>
                   <a:srgbClr val="17364A"/>
                 </a:solidFill>
@@ -16362,9 +16664,9 @@
                 <a:ea typeface="Aptos" pitchFamily="34" charset="-122"/>
                 <a:cs typeface="Aptos" pitchFamily="34" charset="-120"/>
               </a:rPr>
-              <a:t>Delayed data may be acceptable for retrospective analysis but unsafe for urgent response.</a:t>
-            </a:r>
-            <a:endParaRPr lang="en-US" sz="1380" dirty="0"/>
+              <a:t>Delayed data may be acceptable for retrospective analysis but.</a:t>
+            </a:r>
+            <a:endParaRPr lang="en-US" sz="1220" dirty="0"/>
           </a:p>
         </p:txBody>
       </p:sp>
@@ -16442,17 +16744,17 @@
         </p:nvSpPr>
         <p:spPr>
           <a:xfrm>
-            <a:off x="7799832" y="5001768"/>
-            <a:ext cx="3145536" cy="502920"/>
-          </a:xfrm>
-          <a:prstGeom prst="rect">
-            <a:avLst/>
-          </a:prstGeom>
-          <a:noFill/>
-          <a:ln/>
-        </p:spPr>
-        <p:txBody>
-          <a:bodyPr wrap="square" lIns="0" tIns="0" rIns="0" bIns="0" rtlCol="0" anchor="t">
+            <a:off x="7799832" y="4974336"/>
+            <a:ext cx="3145536" cy="576072"/>
+          </a:xfrm>
+          <a:prstGeom prst="rect">
+            <a:avLst/>
+          </a:prstGeom>
+          <a:noFill/>
+          <a:ln/>
+        </p:spPr>
+        <p:txBody>
+          <a:bodyPr wrap="square" lIns="254" tIns="254" rIns="254" bIns="254" rtlCol="0" anchor="t">
             <a:normAutofit/>
           </a:bodyPr>
           <a:lstStyle/>
@@ -16461,7 +16763,7 @@
               <a:buNone/>
             </a:pPr>
             <a:r>
-              <a:rPr lang="en-US" sz="1550" dirty="0">
+              <a:rPr lang="en-US" sz="1320" dirty="0">
                 <a:solidFill>
                   <a:srgbClr val="17364A"/>
                 </a:solidFill>
@@ -16469,9 +16771,9 @@
                 <a:ea typeface="Aptos" pitchFamily="34" charset="-122"/>
                 <a:cs typeface="Aptos" pitchFamily="34" charset="-120"/>
               </a:rPr>
-              <a:t>Connect the concept to data quality, model performance, validation evidence, monitoring measures, and decisions that remain under human control.</a:t>
-            </a:r>
-            <a:endParaRPr lang="en-US" sz="1550" dirty="0"/>
+              <a:t>Connect the concept to data quality, model performance, validation evidence, monitoring measures, and decisions that.</a:t>
+            </a:r>
+            <a:endParaRPr lang="en-US" sz="1320" dirty="0"/>
           </a:p>
         </p:txBody>
       </p:sp>
@@ -16772,49 +17074,58 @@
           <a:ln/>
         </p:spPr>
         <p:txBody>
-          <a:bodyPr wrap="square" lIns="635" tIns="635" rIns="635" bIns="635" rtlCol="0" anchor="t">
+          <a:bodyPr wrap="square" lIns="1016" tIns="1016" rIns="1016" bIns="1016" rtlCol="0" anchor="t">
             <a:normAutofit/>
           </a:bodyPr>
           <a:lstStyle/>
           <a:p>
+            <a:pPr indent="0" marL="0">
+              <a:buNone/>
+            </a:pPr>
             <a:r>
               <a:rPr lang="en-US" sz="2100" dirty="0">
                 <a:solidFill>
-                  <a:srgbClr val="17364A"/>
-                </a:solidFill>
-                <a:latin typeface="Aptos" pitchFamily="34" charset="0"/>
-                <a:ea typeface="Aptos" pitchFamily="34" charset="-122"/>
-                <a:cs typeface="Aptos" pitchFamily="34" charset="-120"/>
-              </a:rPr>
-              <a:t>Representativeness.</a:t>
+                  <a:srgbClr val="003A63"/>
+                </a:solidFill>
+                <a:latin typeface="Aptos" pitchFamily="34" charset="0"/>
+                <a:ea typeface="Aptos" pitchFamily="34" charset="-122"/>
+                <a:cs typeface="Aptos" pitchFamily="34" charset="-120"/>
+              </a:rPr>
+              <a:t>• Representativeness.</a:t>
             </a:r>
             <a:endParaRPr lang="en-US" sz="2100" dirty="0"/>
           </a:p>
           <a:p>
+            <a:pPr indent="0" marL="0">
+              <a:buNone/>
+            </a:pPr>
             <a:r>
               <a:rPr lang="en-US" sz="2100" dirty="0">
                 <a:solidFill>
-                  <a:srgbClr val="17364A"/>
-                </a:solidFill>
-                <a:latin typeface="Aptos" pitchFamily="34" charset="0"/>
-                <a:ea typeface="Aptos" pitchFamily="34" charset="-122"/>
-                <a:cs typeface="Aptos" pitchFamily="34" charset="-120"/>
-              </a:rPr>
-              <a:t>Representativeness refers to whether data reflect the population, events, or settings relevant to the.</a:t>
+                  <a:srgbClr val="003A63"/>
+                </a:solidFill>
+                <a:latin typeface="Aptos" pitchFamily="34" charset="0"/>
+                <a:ea typeface="Aptos" pitchFamily="34" charset="-122"/>
+                <a:cs typeface="Aptos" pitchFamily="34" charset="-120"/>
+              </a:rPr>
+              <a:t>• Representativeness refers to whether data reflect the population, events, or settings relevant.</a:t>
             </a:r>
             <a:endParaRPr lang="en-US" sz="2100" dirty="0"/>
           </a:p>
           <a:p>
+            <a:pPr indent="0" marL="0">
+              <a:buNone/>
+            </a:pPr>
             <a:r>
               <a:rPr lang="en-US" sz="2100" dirty="0">
                 <a:solidFill>
-                  <a:srgbClr val="17364A"/>
-                </a:solidFill>
-                <a:latin typeface="Aptos" pitchFamily="34" charset="0"/>
-                <a:ea typeface="Aptos" pitchFamily="34" charset="-122"/>
-                <a:cs typeface="Aptos" pitchFamily="34" charset="-120"/>
-              </a:rPr>
-              <a:t>Underrepresentation can produce biased or incomplete AI outputs.</a:t>
+                  <a:srgbClr val="003A63"/>
+                </a:solidFill>
+                <a:latin typeface="Aptos" pitchFamily="34" charset="0"/>
+                <a:ea typeface="Aptos" pitchFamily="34" charset="-122"/>
+                <a:cs typeface="Aptos" pitchFamily="34" charset="-120"/>
+              </a:rPr>
+              <a:t>• Underrepresentation can produce biased or incomplete AI outputs.</a:t>
             </a:r>
             <a:endParaRPr lang="en-US" sz="2100" dirty="0"/>
           </a:p>
@@ -16894,17 +17205,17 @@
         </p:nvSpPr>
         <p:spPr>
           <a:xfrm>
-            <a:off x="7799832" y="1828800"/>
-            <a:ext cx="3145536" cy="685800"/>
-          </a:xfrm>
-          <a:prstGeom prst="rect">
-            <a:avLst/>
-          </a:prstGeom>
-          <a:noFill/>
-          <a:ln/>
-        </p:spPr>
-        <p:txBody>
-          <a:bodyPr wrap="square" lIns="0" tIns="0" rIns="0" bIns="0" rtlCol="0" anchor="t">
+            <a:off x="7799832" y="1801368"/>
+            <a:ext cx="3145536" cy="758952"/>
+          </a:xfrm>
+          <a:prstGeom prst="rect">
+            <a:avLst/>
+          </a:prstGeom>
+          <a:noFill/>
+          <a:ln/>
+        </p:spPr>
+        <p:txBody>
+          <a:bodyPr wrap="square" lIns="254" tIns="254" rIns="254" bIns="254" rtlCol="0" anchor="t">
             <a:normAutofit/>
           </a:bodyPr>
           <a:lstStyle/>
@@ -16913,7 +17224,7 @@
               <a:buNone/>
             </a:pPr>
             <a:r>
-              <a:rPr lang="en-US" sz="1550" dirty="0">
+              <a:rPr lang="en-US" sz="1320" dirty="0">
                 <a:solidFill>
                   <a:srgbClr val="17364A"/>
                 </a:solidFill>
@@ -16923,7 +17234,7 @@
               </a:rPr>
               <a:t>Representativeness.</a:t>
             </a:r>
-            <a:endParaRPr lang="en-US" sz="1550" dirty="0"/>
+            <a:endParaRPr lang="en-US" sz="1320" dirty="0"/>
           </a:p>
         </p:txBody>
       </p:sp>
@@ -17011,13 +17322,16 @@
           <a:ln/>
         </p:spPr>
         <p:txBody>
-          <a:bodyPr wrap="square" lIns="254" tIns="254" rIns="254" bIns="254" rtlCol="0" anchor="t">
+          <a:bodyPr wrap="square" lIns="508" tIns="508" rIns="508" bIns="508" rtlCol="0" anchor="t">
             <a:normAutofit/>
           </a:bodyPr>
           <a:lstStyle/>
           <a:p>
-            <a:r>
-              <a:rPr lang="en-US" sz="1380" dirty="0">
+            <a:pPr indent="0" marL="0">
+              <a:buNone/>
+            </a:pPr>
+            <a:r>
+              <a:rPr lang="en-US" sz="1220" dirty="0">
                 <a:solidFill>
                   <a:srgbClr val="17364A"/>
                 </a:solidFill>
@@ -17025,13 +17339,16 @@
                 <a:ea typeface="Aptos" pitchFamily="34" charset="-122"/>
                 <a:cs typeface="Aptos" pitchFamily="34" charset="-120"/>
               </a:rPr>
-              <a:t>Representativeness refers to whether data reflect the population, events, or settings.</a:t>
-            </a:r>
-            <a:endParaRPr lang="en-US" sz="1380" dirty="0"/>
-          </a:p>
-          <a:p>
-            <a:r>
-              <a:rPr lang="en-US" sz="1380" dirty="0">
+              <a:t>Representativeness refers to whether data reflect the population,.</a:t>
+            </a:r>
+            <a:endParaRPr lang="en-US" sz="1220" dirty="0"/>
+          </a:p>
+          <a:p>
+            <a:pPr indent="0" marL="0">
+              <a:buNone/>
+            </a:pPr>
+            <a:r>
+              <a:rPr lang="en-US" sz="1220" dirty="0">
                 <a:solidFill>
                   <a:srgbClr val="17364A"/>
                 </a:solidFill>
@@ -17041,11 +17358,14 @@
               </a:rPr>
               <a:t>Data drift.</a:t>
             </a:r>
-            <a:endParaRPr lang="en-US" sz="1380" dirty="0"/>
-          </a:p>
-          <a:p>
-            <a:r>
-              <a:rPr lang="en-US" sz="1380" dirty="0">
+            <a:endParaRPr lang="en-US" sz="1220" dirty="0"/>
+          </a:p>
+          <a:p>
+            <a:pPr indent="0" marL="0">
+              <a:buNone/>
+            </a:pPr>
+            <a:r>
+              <a:rPr lang="en-US" sz="1220" dirty="0">
                 <a:solidFill>
                   <a:srgbClr val="17364A"/>
                 </a:solidFill>
@@ -17055,7 +17375,7 @@
               </a:rPr>
               <a:t>Data drift is a change in data patterns over time.</a:t>
             </a:r>
-            <a:endParaRPr lang="en-US" sz="1380" dirty="0"/>
+            <a:endParaRPr lang="en-US" sz="1220" dirty="0"/>
           </a:p>
         </p:txBody>
       </p:sp>
@@ -17133,17 +17453,17 @@
         </p:nvSpPr>
         <p:spPr>
           <a:xfrm>
-            <a:off x="7799832" y="5001768"/>
-            <a:ext cx="3145536" cy="502920"/>
-          </a:xfrm>
-          <a:prstGeom prst="rect">
-            <a:avLst/>
-          </a:prstGeom>
-          <a:noFill/>
-          <a:ln/>
-        </p:spPr>
-        <p:txBody>
-          <a:bodyPr wrap="square" lIns="0" tIns="0" rIns="0" bIns="0" rtlCol="0" anchor="t">
+            <a:off x="7799832" y="4974336"/>
+            <a:ext cx="3145536" cy="576072"/>
+          </a:xfrm>
+          <a:prstGeom prst="rect">
+            <a:avLst/>
+          </a:prstGeom>
+          <a:noFill/>
+          <a:ln/>
+        </p:spPr>
+        <p:txBody>
+          <a:bodyPr wrap="square" lIns="254" tIns="254" rIns="254" bIns="254" rtlCol="0" anchor="t">
             <a:normAutofit/>
           </a:bodyPr>
           <a:lstStyle/>
@@ -17152,7 +17472,7 @@
               <a:buNone/>
             </a:pPr>
             <a:r>
-              <a:rPr lang="en-US" sz="1550" dirty="0">
+              <a:rPr lang="en-US" sz="1320" dirty="0">
                 <a:solidFill>
                   <a:srgbClr val="17364A"/>
                 </a:solidFill>
@@ -17160,9 +17480,9 @@
                 <a:ea typeface="Aptos" pitchFamily="34" charset="-122"/>
                 <a:cs typeface="Aptos" pitchFamily="34" charset="-120"/>
               </a:rPr>
-              <a:t>Connect the concept to data quality, model performance, validation evidence, monitoring measures, and decisions that remain under human control.</a:t>
-            </a:r>
-            <a:endParaRPr lang="en-US" sz="1550" dirty="0"/>
+              <a:t>Connect the concept to data quality, model performance, validation evidence, monitoring measures, and decisions that.</a:t>
+            </a:r>
+            <a:endParaRPr lang="en-US" sz="1320" dirty="0"/>
           </a:p>
         </p:txBody>
       </p:sp>

--- a/downloads/presentations/modules/ops-200.pptx
+++ b/downloads/presentations/modules/ops-200.pptx
@@ -3417,11 +3417,11 @@
         <p:spPr>
           <a:xfrm>
             <a:off x="7635240" y="1325880"/>
-            <a:ext cx="3474720" cy="1325880"/>
+            <a:ext cx="3474720" cy="1207008"/>
           </a:xfrm>
           <a:prstGeom prst="roundRect">
             <a:avLst>
-              <a:gd name="adj" fmla="val 8276"/>
+              <a:gd name="adj" fmla="val 9091"/>
             </a:avLst>
           </a:prstGeom>
           <a:solidFill>
@@ -3483,7 +3483,7 @@
         <p:spPr>
           <a:xfrm>
             <a:off x="7799832" y="1801368"/>
-            <a:ext cx="3145536" cy="758952"/>
+            <a:ext cx="3145536" cy="640080"/>
           </a:xfrm>
           <a:prstGeom prst="rect">
             <a:avLst/>
@@ -3523,12 +3523,12 @@
         </p:nvSpPr>
         <p:spPr>
           <a:xfrm>
-            <a:off x="7635240" y="2788920"/>
-            <a:ext cx="3474720" cy="1536192"/>
+            <a:off x="7635240" y="2670048"/>
+            <a:ext cx="3474720" cy="1377086"/>
           </a:xfrm>
           <a:prstGeom prst="roundRect">
             <a:avLst>
-              <a:gd name="adj" fmla="val 7143"/>
+              <a:gd name="adj" fmla="val 7968"/>
             </a:avLst>
           </a:prstGeom>
           <a:solidFill>
@@ -3550,7 +3550,7 @@
         </p:nvSpPr>
         <p:spPr>
           <a:xfrm>
-            <a:off x="7799832" y="2935224"/>
+            <a:off x="7799832" y="2816352"/>
             <a:ext cx="3145536" cy="256032"/>
           </a:xfrm>
           <a:prstGeom prst="rect">
@@ -3589,8 +3589,8 @@
         </p:nvSpPr>
         <p:spPr>
           <a:xfrm>
-            <a:off x="7818120" y="3300984"/>
-            <a:ext cx="3090672" cy="877824"/>
+            <a:off x="7818120" y="3182112"/>
+            <a:ext cx="3090672" cy="718718"/>
           </a:xfrm>
           <a:prstGeom prst="rect">
             <a:avLst/>
@@ -3664,12 +3664,12 @@
         </p:nvSpPr>
         <p:spPr>
           <a:xfrm>
-            <a:off x="7635240" y="4498848"/>
-            <a:ext cx="3474720" cy="1143000"/>
+            <a:off x="7635240" y="4184294"/>
+            <a:ext cx="3474720" cy="1466698"/>
           </a:xfrm>
           <a:prstGeom prst="roundRect">
             <a:avLst>
-              <a:gd name="adj" fmla="val 9600"/>
+              <a:gd name="adj" fmla="val 7481"/>
             </a:avLst>
           </a:prstGeom>
           <a:solidFill>
@@ -3691,7 +3691,7 @@
         </p:nvSpPr>
         <p:spPr>
           <a:xfrm>
-            <a:off x="7799832" y="4645152"/>
+            <a:off x="7799832" y="4330598"/>
             <a:ext cx="3145536" cy="256032"/>
           </a:xfrm>
           <a:prstGeom prst="rect">
@@ -3730,8 +3730,8 @@
         </p:nvSpPr>
         <p:spPr>
           <a:xfrm>
-            <a:off x="7799832" y="4974336"/>
-            <a:ext cx="3145536" cy="576072"/>
+            <a:off x="7799832" y="4659782"/>
+            <a:ext cx="3145536" cy="899770"/>
           </a:xfrm>
           <a:prstGeom prst="rect">
             <a:avLst/>
@@ -3757,7 +3757,7 @@
                 <a:ea typeface="Aptos" pitchFamily="34" charset="-122"/>
                 <a:cs typeface="Aptos" pitchFamily="34" charset="-120"/>
               </a:rPr>
-              <a:t>Connect the concept to data quality, model performance, validation evidence, monitoring measures, and decisions that.</a:t>
+              <a:t>Connect the concept to data quality, model performance, validation evidence, monitoring measures, and decisions that remain under human control.</a:t>
             </a:r>
             <a:endParaRPr lang="en-US" sz="1320" dirty="0"/>
           </a:p>
@@ -4126,11 +4126,11 @@
         <p:spPr>
           <a:xfrm>
             <a:off x="7635240" y="1325880"/>
-            <a:ext cx="3474720" cy="1325880"/>
+            <a:ext cx="3474720" cy="1255471"/>
           </a:xfrm>
           <a:prstGeom prst="roundRect">
             <a:avLst>
-              <a:gd name="adj" fmla="val 8276"/>
+              <a:gd name="adj" fmla="val 8740"/>
             </a:avLst>
           </a:prstGeom>
           <a:solidFill>
@@ -4192,7 +4192,7 @@
         <p:spPr>
           <a:xfrm>
             <a:off x="7799832" y="1801368"/>
-            <a:ext cx="3145536" cy="758952"/>
+            <a:ext cx="3145536" cy="688543"/>
           </a:xfrm>
           <a:prstGeom prst="rect">
             <a:avLst/>
@@ -4232,12 +4232,12 @@
         </p:nvSpPr>
         <p:spPr>
           <a:xfrm>
-            <a:off x="7635240" y="2788920"/>
-            <a:ext cx="3474720" cy="1536192"/>
+            <a:off x="7635240" y="2718511"/>
+            <a:ext cx="3474720" cy="1328623"/>
           </a:xfrm>
           <a:prstGeom prst="roundRect">
             <a:avLst>
-              <a:gd name="adj" fmla="val 7143"/>
+              <a:gd name="adj" fmla="val 8259"/>
             </a:avLst>
           </a:prstGeom>
           <a:solidFill>
@@ -4259,8 +4259,8 @@
         </p:nvSpPr>
         <p:spPr>
           <a:xfrm>
-            <a:off x="7799832" y="2935224"/>
-            <a:ext cx="3145536" cy="256032"/>
+            <a:off x="7799832" y="2846527"/>
+            <a:ext cx="3145536" cy="237744"/>
           </a:xfrm>
           <a:prstGeom prst="rect">
             <a:avLst/>
@@ -4276,7 +4276,7 @@
               <a:buNone/>
             </a:pPr>
             <a:r>
-              <a:rPr lang="en-US" sz="1300" b="1" dirty="0">
+              <a:rPr lang="en-US" sz="1250" b="1" dirty="0">
                 <a:solidFill>
                   <a:srgbClr val="0068B7"/>
                 </a:solidFill>
@@ -4284,101 +4284,317 @@
                 <a:ea typeface="Aptos" pitchFamily="34" charset="-122"/>
                 <a:cs typeface="Aptos" pitchFamily="34" charset="-120"/>
               </a:rPr>
-              <a:t>Concept checkpoints</a:t>
-            </a:r>
-            <a:endParaRPr lang="en-US" sz="1300" dirty="0"/>
-          </a:p>
-        </p:txBody>
-      </p:sp>
-      <p:sp>
-        <p:nvSpPr>
-          <p:cNvPr id="15" name="Text 13"/>
-          <p:cNvSpPr/>
-          <p:nvPr/>
-        </p:nvSpPr>
-        <p:spPr>
-          <a:xfrm>
-            <a:off x="7818120" y="3300984"/>
-            <a:ext cx="3090672" cy="877824"/>
-          </a:xfrm>
-          <a:prstGeom prst="rect">
-            <a:avLst/>
-          </a:prstGeom>
-          <a:noFill/>
-          <a:ln/>
-        </p:spPr>
-        <p:txBody>
-          <a:bodyPr wrap="square" lIns="508" tIns="508" rIns="508" bIns="508" rtlCol="0" anchor="t">
+              <a:t>Data-to-decision flow</a:t>
+            </a:r>
+            <a:endParaRPr lang="en-US" sz="1250" dirty="0"/>
+          </a:p>
+        </p:txBody>
+      </p:sp>
+      <p:sp>
+        <p:nvSpPr>
+          <p:cNvPr id="15" name="Shape 13"/>
+          <p:cNvSpPr/>
+          <p:nvPr/>
+        </p:nvSpPr>
+        <p:spPr>
+          <a:xfrm>
+            <a:off x="8763000" y="3399739"/>
+            <a:ext cx="164592" cy="0"/>
+          </a:xfrm>
+          <a:prstGeom prst="line">
+            <a:avLst/>
+          </a:prstGeom>
+          <a:noFill/>
+          <a:ln w="15240">
+            <a:solidFill>
+              <a:srgbClr val="8ABBD8"/>
+            </a:solidFill>
+            <a:prstDash val="solid"/>
+          </a:ln>
+        </p:spPr>
+      </p:sp>
+      <p:sp>
+        <p:nvSpPr>
+          <p:cNvPr id="16" name="Shape 14"/>
+          <p:cNvSpPr/>
+          <p:nvPr/>
+        </p:nvSpPr>
+        <p:spPr>
+          <a:xfrm>
+            <a:off x="7872984" y="3248863"/>
+            <a:ext cx="890016" cy="301752"/>
+          </a:xfrm>
+          <a:prstGeom prst="roundRect">
+            <a:avLst>
+              <a:gd name="adj" fmla="val 24242"/>
+            </a:avLst>
+          </a:prstGeom>
+          <a:solidFill>
+            <a:srgbClr val="0068B7"/>
+          </a:solidFill>
+          <a:ln w="12700">
+            <a:solidFill>
+              <a:srgbClr val="0068B7"/>
+            </a:solidFill>
+            <a:prstDash val="solid"/>
+          </a:ln>
+        </p:spPr>
+      </p:sp>
+      <p:sp>
+        <p:nvSpPr>
+          <p:cNvPr id="17" name="Text 15"/>
+          <p:cNvSpPr/>
+          <p:nvPr/>
+        </p:nvSpPr>
+        <p:spPr>
+          <a:xfrm>
+            <a:off x="7909560" y="3322015"/>
+            <a:ext cx="816864" cy="146304"/>
+          </a:xfrm>
+          <a:prstGeom prst="rect">
+            <a:avLst/>
+          </a:prstGeom>
+          <a:noFill/>
+          <a:ln/>
+        </p:spPr>
+        <p:txBody>
+          <a:bodyPr wrap="square" lIns="0" tIns="0" rIns="0" bIns="0" rtlCol="0" anchor="ctr">
             <a:normAutofit/>
           </a:bodyPr>
           <a:lstStyle/>
           <a:p>
-            <a:pPr indent="0" marL="0">
-              <a:buNone/>
-            </a:pPr>
-            <a:r>
-              <a:rPr lang="en-US" sz="1220" dirty="0">
-                <a:solidFill>
-                  <a:srgbClr val="17364A"/>
-                </a:solidFill>
-                <a:latin typeface="Aptos" pitchFamily="34" charset="0"/>
-                <a:ea typeface="Aptos" pitchFamily="34" charset="-122"/>
-                <a:cs typeface="Aptos" pitchFamily="34" charset="-120"/>
-              </a:rPr>
-              <a:t>Data quality engineering begins by defining required fields and.</a:t>
-            </a:r>
-            <a:endParaRPr lang="en-US" sz="1220" dirty="0"/>
-          </a:p>
-          <a:p>
-            <a:pPr indent="0" marL="0">
-              <a:buNone/>
-            </a:pPr>
-            <a:r>
-              <a:rPr lang="en-US" sz="1220" dirty="0">
-                <a:solidFill>
-                  <a:srgbClr val="17364A"/>
-                </a:solidFill>
-                <a:latin typeface="Aptos" pitchFamily="34" charset="0"/>
-                <a:ea typeface="Aptos" pitchFamily="34" charset="-122"/>
-                <a:cs typeface="Aptos" pitchFamily="34" charset="-120"/>
-              </a:rPr>
-              <a:t>For an AI-supported case triage workflow, required fields may.</a:t>
-            </a:r>
-            <a:endParaRPr lang="en-US" sz="1220" dirty="0"/>
-          </a:p>
-          <a:p>
-            <a:pPr indent="0" marL="0">
-              <a:buNone/>
-            </a:pPr>
-            <a:r>
-              <a:rPr lang="en-US" sz="1220" dirty="0">
-                <a:solidFill>
-                  <a:srgbClr val="17364A"/>
-                </a:solidFill>
-                <a:latin typeface="Aptos" pitchFamily="34" charset="0"/>
-                <a:ea typeface="Aptos" pitchFamily="34" charset="-122"/>
-                <a:cs typeface="Aptos" pitchFamily="34" charset="-120"/>
-              </a:rPr>
-              <a:t>The agency should decide which missing fields stop automated.</a:t>
-            </a:r>
-            <a:endParaRPr lang="en-US" sz="1220" dirty="0"/>
-          </a:p>
-        </p:txBody>
-      </p:sp>
-      <p:sp>
-        <p:nvSpPr>
-          <p:cNvPr id="16" name="Shape 14"/>
-          <p:cNvSpPr/>
-          <p:nvPr/>
-        </p:nvSpPr>
-        <p:spPr>
-          <a:xfrm>
-            <a:off x="7635240" y="4498848"/>
-            <a:ext cx="3474720" cy="1143000"/>
+            <a:pPr algn="ctr" indent="0" marL="0">
+              <a:buNone/>
+            </a:pPr>
+            <a:r>
+              <a:rPr lang="en-US" sz="880" b="1" dirty="0">
+                <a:solidFill>
+                  <a:srgbClr val="FFFFFF"/>
+                </a:solidFill>
+                <a:latin typeface="Aptos" pitchFamily="34" charset="0"/>
+                <a:ea typeface="Aptos" pitchFamily="34" charset="-122"/>
+                <a:cs typeface="Aptos" pitchFamily="34" charset="-120"/>
+              </a:rPr>
+              <a:t>Data</a:t>
+            </a:r>
+            <a:endParaRPr lang="en-US" sz="880" dirty="0"/>
+          </a:p>
+        </p:txBody>
+      </p:sp>
+      <p:sp>
+        <p:nvSpPr>
+          <p:cNvPr id="18" name="Shape 16"/>
+          <p:cNvSpPr/>
+          <p:nvPr/>
+        </p:nvSpPr>
+        <p:spPr>
+          <a:xfrm>
+            <a:off x="9817608" y="3399739"/>
+            <a:ext cx="164592" cy="0"/>
+          </a:xfrm>
+          <a:prstGeom prst="line">
+            <a:avLst/>
+          </a:prstGeom>
+          <a:noFill/>
+          <a:ln w="15240">
+            <a:solidFill>
+              <a:srgbClr val="8ABBD8"/>
+            </a:solidFill>
+            <a:prstDash val="solid"/>
+          </a:ln>
+        </p:spPr>
+      </p:sp>
+      <p:sp>
+        <p:nvSpPr>
+          <p:cNvPr id="19" name="Shape 17"/>
+          <p:cNvSpPr/>
+          <p:nvPr/>
+        </p:nvSpPr>
+        <p:spPr>
+          <a:xfrm>
+            <a:off x="8927592" y="3248863"/>
+            <a:ext cx="890016" cy="301752"/>
           </a:xfrm>
           <a:prstGeom prst="roundRect">
             <a:avLst>
-              <a:gd name="adj" fmla="val 9600"/>
+              <a:gd name="adj" fmla="val 24242"/>
+            </a:avLst>
+          </a:prstGeom>
+          <a:solidFill>
+            <a:srgbClr val="2F8A28"/>
+          </a:solidFill>
+          <a:ln w="12700">
+            <a:solidFill>
+              <a:srgbClr val="2F8A28"/>
+            </a:solidFill>
+            <a:prstDash val="solid"/>
+          </a:ln>
+        </p:spPr>
+      </p:sp>
+      <p:sp>
+        <p:nvSpPr>
+          <p:cNvPr id="20" name="Text 18"/>
+          <p:cNvSpPr/>
+          <p:nvPr/>
+        </p:nvSpPr>
+        <p:spPr>
+          <a:xfrm>
+            <a:off x="8964168" y="3322015"/>
+            <a:ext cx="816864" cy="146304"/>
+          </a:xfrm>
+          <a:prstGeom prst="rect">
+            <a:avLst/>
+          </a:prstGeom>
+          <a:noFill/>
+          <a:ln/>
+        </p:spPr>
+        <p:txBody>
+          <a:bodyPr wrap="square" lIns="0" tIns="0" rIns="0" bIns="0" rtlCol="0" anchor="ctr">
+            <a:normAutofit/>
+          </a:bodyPr>
+          <a:lstStyle/>
+          <a:p>
+            <a:pPr algn="ctr" indent="0" marL="0">
+              <a:buNone/>
+            </a:pPr>
+            <a:r>
+              <a:rPr lang="en-US" sz="880" b="1" dirty="0">
+                <a:solidFill>
+                  <a:srgbClr val="FFFFFF"/>
+                </a:solidFill>
+                <a:latin typeface="Aptos" pitchFamily="34" charset="0"/>
+                <a:ea typeface="Aptos" pitchFamily="34" charset="-122"/>
+                <a:cs typeface="Aptos" pitchFamily="34" charset="-120"/>
+              </a:rPr>
+              <a:t>Analysis</a:t>
+            </a:r>
+            <a:endParaRPr lang="en-US" sz="880" dirty="0"/>
+          </a:p>
+        </p:txBody>
+      </p:sp>
+      <p:sp>
+        <p:nvSpPr>
+          <p:cNvPr id="21" name="Shape 19"/>
+          <p:cNvSpPr/>
+          <p:nvPr/>
+        </p:nvSpPr>
+        <p:spPr>
+          <a:xfrm>
+            <a:off x="9982200" y="3248863"/>
+            <a:ext cx="890016" cy="301752"/>
+          </a:xfrm>
+          <a:prstGeom prst="roundRect">
+            <a:avLst>
+              <a:gd name="adj" fmla="val 24242"/>
+            </a:avLst>
+          </a:prstGeom>
+          <a:solidFill>
+            <a:srgbClr val="6A4CA3"/>
+          </a:solidFill>
+          <a:ln w="12700">
+            <a:solidFill>
+              <a:srgbClr val="6A4CA3"/>
+            </a:solidFill>
+            <a:prstDash val="solid"/>
+          </a:ln>
+        </p:spPr>
+      </p:sp>
+      <p:sp>
+        <p:nvSpPr>
+          <p:cNvPr id="22" name="Text 20"/>
+          <p:cNvSpPr/>
+          <p:nvPr/>
+        </p:nvSpPr>
+        <p:spPr>
+          <a:xfrm>
+            <a:off x="10018776" y="3322015"/>
+            <a:ext cx="816864" cy="146304"/>
+          </a:xfrm>
+          <a:prstGeom prst="rect">
+            <a:avLst/>
+          </a:prstGeom>
+          <a:noFill/>
+          <a:ln/>
+        </p:spPr>
+        <p:txBody>
+          <a:bodyPr wrap="square" lIns="0" tIns="0" rIns="0" bIns="0" rtlCol="0" anchor="ctr">
+            <a:normAutofit/>
+          </a:bodyPr>
+          <a:lstStyle/>
+          <a:p>
+            <a:pPr algn="ctr" indent="0" marL="0">
+              <a:buNone/>
+            </a:pPr>
+            <a:r>
+              <a:rPr lang="en-US" sz="880" b="1" dirty="0">
+                <a:solidFill>
+                  <a:srgbClr val="FFFFFF"/>
+                </a:solidFill>
+                <a:latin typeface="Aptos" pitchFamily="34" charset="0"/>
+                <a:ea typeface="Aptos" pitchFamily="34" charset="-122"/>
+                <a:cs typeface="Aptos" pitchFamily="34" charset="-120"/>
+              </a:rPr>
+              <a:t>Review</a:t>
+            </a:r>
+            <a:endParaRPr lang="en-US" sz="880" dirty="0"/>
+          </a:p>
+        </p:txBody>
+      </p:sp>
+      <p:sp>
+        <p:nvSpPr>
+          <p:cNvPr id="23" name="Text 21"/>
+          <p:cNvSpPr/>
+          <p:nvPr/>
+        </p:nvSpPr>
+        <p:spPr>
+          <a:xfrm>
+            <a:off x="7854696" y="3742639"/>
+            <a:ext cx="3035808" cy="158191"/>
+          </a:xfrm>
+          <a:prstGeom prst="rect">
+            <a:avLst/>
+          </a:prstGeom>
+          <a:noFill/>
+          <a:ln/>
+        </p:spPr>
+        <p:txBody>
+          <a:bodyPr wrap="square" lIns="254" tIns="254" rIns="254" bIns="254" rtlCol="0" anchor="t">
+            <a:normAutofit/>
+          </a:bodyPr>
+          <a:lstStyle/>
+          <a:p>
+            <a:pPr indent="0" marL="0">
+              <a:buNone/>
+            </a:pPr>
+            <a:r>
+              <a:rPr lang="en-US" sz="1120" dirty="0">
+                <a:solidFill>
+                  <a:srgbClr val="17364A"/>
+                </a:solidFill>
+                <a:latin typeface="Aptos" pitchFamily="34" charset="0"/>
+                <a:ea typeface="Aptos" pitchFamily="34" charset="-122"/>
+                <a:cs typeface="Aptos" pitchFamily="34" charset="-120"/>
+              </a:rPr>
+              <a:t>The important handoff is not from data to AI; it is from analysis to accountable human review.</a:t>
+            </a:r>
+            <a:endParaRPr lang="en-US" sz="1120" dirty="0"/>
+          </a:p>
+        </p:txBody>
+      </p:sp>
+      <p:sp>
+        <p:nvSpPr>
+          <p:cNvPr id="24" name="Shape 22"/>
+          <p:cNvSpPr/>
+          <p:nvPr/>
+        </p:nvSpPr>
+        <p:spPr>
+          <a:xfrm>
+            <a:off x="7635240" y="4184294"/>
+            <a:ext cx="3474720" cy="1466698"/>
+          </a:xfrm>
+          <a:prstGeom prst="roundRect">
+            <a:avLst>
+              <a:gd name="adj" fmla="val 7481"/>
             </a:avLst>
           </a:prstGeom>
           <a:solidFill>
@@ -4394,13 +4610,13 @@
       </p:sp>
       <p:sp>
         <p:nvSpPr>
-          <p:cNvPr id="17" name="Text 15"/>
-          <p:cNvSpPr/>
-          <p:nvPr/>
-        </p:nvSpPr>
-        <p:spPr>
-          <a:xfrm>
-            <a:off x="7799832" y="4645152"/>
+          <p:cNvPr id="25" name="Text 23"/>
+          <p:cNvSpPr/>
+          <p:nvPr/>
+        </p:nvSpPr>
+        <p:spPr>
+          <a:xfrm>
+            <a:off x="7799832" y="4330598"/>
             <a:ext cx="3145536" cy="256032"/>
           </a:xfrm>
           <a:prstGeom prst="rect">
@@ -4433,14 +4649,14 @@
       </p:sp>
       <p:sp>
         <p:nvSpPr>
-          <p:cNvPr id="18" name="Text 16"/>
-          <p:cNvSpPr/>
-          <p:nvPr/>
-        </p:nvSpPr>
-        <p:spPr>
-          <a:xfrm>
-            <a:off x="7799832" y="4974336"/>
-            <a:ext cx="3145536" cy="576072"/>
+          <p:cNvPr id="26" name="Text 24"/>
+          <p:cNvSpPr/>
+          <p:nvPr/>
+        </p:nvSpPr>
+        <p:spPr>
+          <a:xfrm>
+            <a:off x="7799832" y="4659782"/>
+            <a:ext cx="3145536" cy="899770"/>
           </a:xfrm>
           <a:prstGeom prst="rect">
             <a:avLst/>
@@ -4466,7 +4682,7 @@
                 <a:ea typeface="Aptos" pitchFamily="34" charset="-122"/>
                 <a:cs typeface="Aptos" pitchFamily="34" charset="-120"/>
               </a:rPr>
-              <a:t>Connect the concept to data quality, model performance, validation evidence, monitoring measures, and decisions that.</a:t>
+              <a:t>Connect the concept to data quality, model performance, validation evidence, monitoring measures, and decisions that remain under human control.</a:t>
             </a:r>
             <a:endParaRPr lang="en-US" sz="1320" dirty="0"/>
           </a:p>
@@ -4835,11 +5051,11 @@
         <p:spPr>
           <a:xfrm>
             <a:off x="7635240" y="1325880"/>
-            <a:ext cx="3474720" cy="1325880"/>
+            <a:ext cx="3474720" cy="1207008"/>
           </a:xfrm>
           <a:prstGeom prst="roundRect">
             <a:avLst>
-              <a:gd name="adj" fmla="val 8276"/>
+              <a:gd name="adj" fmla="val 9091"/>
             </a:avLst>
           </a:prstGeom>
           <a:solidFill>
@@ -4901,7 +5117,7 @@
         <p:spPr>
           <a:xfrm>
             <a:off x="7799832" y="1801368"/>
-            <a:ext cx="3145536" cy="758952"/>
+            <a:ext cx="3145536" cy="640080"/>
           </a:xfrm>
           <a:prstGeom prst="rect">
             <a:avLst/>
@@ -4941,7 +5157,7 @@
         </p:nvSpPr>
         <p:spPr>
           <a:xfrm>
-            <a:off x="7635240" y="2788920"/>
+            <a:off x="7635240" y="2670048"/>
             <a:ext cx="3474720" cy="1536192"/>
           </a:xfrm>
           <a:prstGeom prst="roundRect">
@@ -4968,7 +5184,7 @@
         </p:nvSpPr>
         <p:spPr>
           <a:xfrm>
-            <a:off x="7799832" y="2935224"/>
+            <a:off x="7799832" y="2816352"/>
             <a:ext cx="3145536" cy="256032"/>
           </a:xfrm>
           <a:prstGeom prst="rect">
@@ -5007,7 +5223,7 @@
         </p:nvSpPr>
         <p:spPr>
           <a:xfrm>
-            <a:off x="7818120" y="3300984"/>
+            <a:off x="7818120" y="3182112"/>
             <a:ext cx="3090672" cy="877824"/>
           </a:xfrm>
           <a:prstGeom prst="rect">
@@ -5082,12 +5298,12 @@
         </p:nvSpPr>
         <p:spPr>
           <a:xfrm>
-            <a:off x="7635240" y="4498848"/>
-            <a:ext cx="3474720" cy="1143000"/>
+            <a:off x="7635240" y="4343400"/>
+            <a:ext cx="3474720" cy="1255471"/>
           </a:xfrm>
           <a:prstGeom prst="roundRect">
             <a:avLst>
-              <a:gd name="adj" fmla="val 9600"/>
+              <a:gd name="adj" fmla="val 8740"/>
             </a:avLst>
           </a:prstGeom>
           <a:solidFill>
@@ -5109,7 +5325,7 @@
         </p:nvSpPr>
         <p:spPr>
           <a:xfrm>
-            <a:off x="7799832" y="4645152"/>
+            <a:off x="7799832" y="4489704"/>
             <a:ext cx="3145536" cy="256032"/>
           </a:xfrm>
           <a:prstGeom prst="rect">
@@ -5148,8 +5364,8 @@
         </p:nvSpPr>
         <p:spPr>
           <a:xfrm>
-            <a:off x="7799832" y="4974336"/>
-            <a:ext cx="3145536" cy="576072"/>
+            <a:off x="7799832" y="4818888"/>
+            <a:ext cx="3145536" cy="688543"/>
           </a:xfrm>
           <a:prstGeom prst="rect">
             <a:avLst/>
@@ -5175,7 +5391,7 @@
                 <a:ea typeface="Aptos" pitchFamily="34" charset="-122"/>
                 <a:cs typeface="Aptos" pitchFamily="34" charset="-120"/>
               </a:rPr>
-              <a:t>Identify what could go wrong, who could be affected, what safeguards are needed, and what evidence should be reviewed.</a:t>
+              <a:t>Identify what could go wrong, who could be affected, what safeguards are needed, and what evidence should be reviewed before use.</a:t>
             </a:r>
             <a:endParaRPr lang="en-US" sz="1320" dirty="0"/>
           </a:p>
@@ -5544,11 +5760,11 @@
         <p:spPr>
           <a:xfrm>
             <a:off x="7635240" y="1325880"/>
-            <a:ext cx="3474720" cy="1325880"/>
+            <a:ext cx="3474720" cy="1207008"/>
           </a:xfrm>
           <a:prstGeom prst="roundRect">
             <a:avLst>
-              <a:gd name="adj" fmla="val 8276"/>
+              <a:gd name="adj" fmla="val 9091"/>
             </a:avLst>
           </a:prstGeom>
           <a:solidFill>
@@ -5610,7 +5826,7 @@
         <p:spPr>
           <a:xfrm>
             <a:off x="7799832" y="1801368"/>
-            <a:ext cx="3145536" cy="758952"/>
+            <a:ext cx="3145536" cy="640080"/>
           </a:xfrm>
           <a:prstGeom prst="rect">
             <a:avLst/>
@@ -5650,7 +5866,7 @@
         </p:nvSpPr>
         <p:spPr>
           <a:xfrm>
-            <a:off x="7635240" y="2788920"/>
+            <a:off x="7635240" y="2670048"/>
             <a:ext cx="3474720" cy="1536192"/>
           </a:xfrm>
           <a:prstGeom prst="roundRect">
@@ -5677,7 +5893,7 @@
         </p:nvSpPr>
         <p:spPr>
           <a:xfrm>
-            <a:off x="7799832" y="2935224"/>
+            <a:off x="7799832" y="2816352"/>
             <a:ext cx="3145536" cy="256032"/>
           </a:xfrm>
           <a:prstGeom prst="rect">
@@ -5716,7 +5932,7 @@
         </p:nvSpPr>
         <p:spPr>
           <a:xfrm>
-            <a:off x="7818120" y="3300984"/>
+            <a:off x="7818120" y="3182112"/>
             <a:ext cx="3090672" cy="877824"/>
           </a:xfrm>
           <a:prstGeom prst="rect">
@@ -5791,12 +6007,12 @@
         </p:nvSpPr>
         <p:spPr>
           <a:xfrm>
-            <a:off x="7635240" y="4498848"/>
-            <a:ext cx="3474720" cy="1143000"/>
+            <a:off x="7635240" y="4343400"/>
+            <a:ext cx="3474720" cy="1255471"/>
           </a:xfrm>
           <a:prstGeom prst="roundRect">
             <a:avLst>
-              <a:gd name="adj" fmla="val 9600"/>
+              <a:gd name="adj" fmla="val 8740"/>
             </a:avLst>
           </a:prstGeom>
           <a:solidFill>
@@ -5818,7 +6034,7 @@
         </p:nvSpPr>
         <p:spPr>
           <a:xfrm>
-            <a:off x="7799832" y="4645152"/>
+            <a:off x="7799832" y="4489704"/>
             <a:ext cx="3145536" cy="256032"/>
           </a:xfrm>
           <a:prstGeom prst="rect">
@@ -5857,8 +6073,8 @@
         </p:nvSpPr>
         <p:spPr>
           <a:xfrm>
-            <a:off x="7799832" y="4974336"/>
-            <a:ext cx="3145536" cy="576072"/>
+            <a:off x="7799832" y="4818888"/>
+            <a:ext cx="3145536" cy="688543"/>
           </a:xfrm>
           <a:prstGeom prst="rect">
             <a:avLst/>
@@ -5884,7 +6100,7 @@
                 <a:ea typeface="Aptos" pitchFamily="34" charset="-122"/>
                 <a:cs typeface="Aptos" pitchFamily="34" charset="-120"/>
               </a:rPr>
-              <a:t>Identify what could go wrong, who could be affected, what safeguards are needed, and what evidence should be reviewed.</a:t>
+              <a:t>Identify what could go wrong, who could be affected, what safeguards are needed, and what evidence should be reviewed before use.</a:t>
             </a:r>
             <a:endParaRPr lang="en-US" sz="1320" dirty="0"/>
           </a:p>
@@ -6253,11 +6469,11 @@
         <p:spPr>
           <a:xfrm>
             <a:off x="7635240" y="1325880"/>
-            <a:ext cx="3474720" cy="1325880"/>
+            <a:ext cx="3474720" cy="1255471"/>
           </a:xfrm>
           <a:prstGeom prst="roundRect">
             <a:avLst>
-              <a:gd name="adj" fmla="val 8276"/>
+              <a:gd name="adj" fmla="val 8740"/>
             </a:avLst>
           </a:prstGeom>
           <a:solidFill>
@@ -6319,7 +6535,7 @@
         <p:spPr>
           <a:xfrm>
             <a:off x="7799832" y="1801368"/>
-            <a:ext cx="3145536" cy="758952"/>
+            <a:ext cx="3145536" cy="688543"/>
           </a:xfrm>
           <a:prstGeom prst="rect">
             <a:avLst/>
@@ -6359,12 +6575,12 @@
         </p:nvSpPr>
         <p:spPr>
           <a:xfrm>
-            <a:off x="7635240" y="2788920"/>
-            <a:ext cx="3474720" cy="1536192"/>
+            <a:off x="7635240" y="2718511"/>
+            <a:ext cx="3474720" cy="1328623"/>
           </a:xfrm>
           <a:prstGeom prst="roundRect">
             <a:avLst>
-              <a:gd name="adj" fmla="val 7143"/>
+              <a:gd name="adj" fmla="val 8259"/>
             </a:avLst>
           </a:prstGeom>
           <a:solidFill>
@@ -6386,7 +6602,7 @@
         </p:nvSpPr>
         <p:spPr>
           <a:xfrm>
-            <a:off x="7799832" y="2935224"/>
+            <a:off x="7799832" y="2864815"/>
             <a:ext cx="3145536" cy="256032"/>
           </a:xfrm>
           <a:prstGeom prst="rect">
@@ -6425,8 +6641,8 @@
         </p:nvSpPr>
         <p:spPr>
           <a:xfrm>
-            <a:off x="7818120" y="3300984"/>
-            <a:ext cx="3090672" cy="877824"/>
+            <a:off x="7818120" y="3230575"/>
+            <a:ext cx="3090672" cy="670255"/>
           </a:xfrm>
           <a:prstGeom prst="rect">
             <a:avLst/>
@@ -6483,12 +6699,12 @@
         </p:nvSpPr>
         <p:spPr>
           <a:xfrm>
-            <a:off x="7635240" y="4498848"/>
-            <a:ext cx="3474720" cy="1143000"/>
+            <a:off x="7635240" y="4184294"/>
+            <a:ext cx="3474720" cy="1466698"/>
           </a:xfrm>
           <a:prstGeom prst="roundRect">
             <a:avLst>
-              <a:gd name="adj" fmla="val 9600"/>
+              <a:gd name="adj" fmla="val 7481"/>
             </a:avLst>
           </a:prstGeom>
           <a:solidFill>
@@ -6510,7 +6726,7 @@
         </p:nvSpPr>
         <p:spPr>
           <a:xfrm>
-            <a:off x="7799832" y="4645152"/>
+            <a:off x="7799832" y="4330598"/>
             <a:ext cx="3145536" cy="256032"/>
           </a:xfrm>
           <a:prstGeom prst="rect">
@@ -6549,8 +6765,8 @@
         </p:nvSpPr>
         <p:spPr>
           <a:xfrm>
-            <a:off x="7799832" y="4974336"/>
-            <a:ext cx="3145536" cy="576072"/>
+            <a:off x="7799832" y="4659782"/>
+            <a:ext cx="3145536" cy="899770"/>
           </a:xfrm>
           <a:prstGeom prst="rect">
             <a:avLst/>
@@ -6576,7 +6792,7 @@
                 <a:ea typeface="Aptos" pitchFamily="34" charset="-122"/>
                 <a:cs typeface="Aptos" pitchFamily="34" charset="-120"/>
               </a:rPr>
-              <a:t>Connect the concept to data quality, model performance, validation evidence, monitoring measures, and decisions that.</a:t>
+              <a:t>Connect the concept to data quality, model performance, validation evidence, monitoring measures, and decisions that remain under human control.</a:t>
             </a:r>
             <a:endParaRPr lang="en-US" sz="1320" dirty="0"/>
           </a:p>
@@ -6945,11 +7161,11 @@
         <p:spPr>
           <a:xfrm>
             <a:off x="7635240" y="1325880"/>
-            <a:ext cx="3474720" cy="1325880"/>
+            <a:ext cx="3474720" cy="1207008"/>
           </a:xfrm>
           <a:prstGeom prst="roundRect">
             <a:avLst>
-              <a:gd name="adj" fmla="val 8276"/>
+              <a:gd name="adj" fmla="val 9091"/>
             </a:avLst>
           </a:prstGeom>
           <a:solidFill>
@@ -7011,7 +7227,7 @@
         <p:spPr>
           <a:xfrm>
             <a:off x="7799832" y="1801368"/>
-            <a:ext cx="3145536" cy="758952"/>
+            <a:ext cx="3145536" cy="640080"/>
           </a:xfrm>
           <a:prstGeom prst="rect">
             <a:avLst/>
@@ -7051,12 +7267,12 @@
         </p:nvSpPr>
         <p:spPr>
           <a:xfrm>
-            <a:off x="7635240" y="2788920"/>
-            <a:ext cx="3474720" cy="1536192"/>
+            <a:off x="7635240" y="2670048"/>
+            <a:ext cx="3474720" cy="1377086"/>
           </a:xfrm>
           <a:prstGeom prst="roundRect">
             <a:avLst>
-              <a:gd name="adj" fmla="val 7143"/>
+              <a:gd name="adj" fmla="val 7968"/>
             </a:avLst>
           </a:prstGeom>
           <a:solidFill>
@@ -7078,7 +7294,7 @@
         </p:nvSpPr>
         <p:spPr>
           <a:xfrm>
-            <a:off x="7799832" y="2935224"/>
+            <a:off x="7799832" y="2816352"/>
             <a:ext cx="3145536" cy="256032"/>
           </a:xfrm>
           <a:prstGeom prst="rect">
@@ -7117,8 +7333,8 @@
         </p:nvSpPr>
         <p:spPr>
           <a:xfrm>
-            <a:off x="7818120" y="3300984"/>
-            <a:ext cx="3090672" cy="877824"/>
+            <a:off x="7818120" y="3182112"/>
+            <a:ext cx="3090672" cy="718718"/>
           </a:xfrm>
           <a:prstGeom prst="rect">
             <a:avLst/>
@@ -7192,12 +7408,12 @@
         </p:nvSpPr>
         <p:spPr>
           <a:xfrm>
-            <a:off x="7635240" y="4498848"/>
-            <a:ext cx="3474720" cy="1143000"/>
+            <a:off x="7635240" y="4184294"/>
+            <a:ext cx="3474720" cy="1466698"/>
           </a:xfrm>
           <a:prstGeom prst="roundRect">
             <a:avLst>
-              <a:gd name="adj" fmla="val 9600"/>
+              <a:gd name="adj" fmla="val 7481"/>
             </a:avLst>
           </a:prstGeom>
           <a:solidFill>
@@ -7219,7 +7435,7 @@
         </p:nvSpPr>
         <p:spPr>
           <a:xfrm>
-            <a:off x="7799832" y="4645152"/>
+            <a:off x="7799832" y="4330598"/>
             <a:ext cx="3145536" cy="256032"/>
           </a:xfrm>
           <a:prstGeom prst="rect">
@@ -7258,8 +7474,8 @@
         </p:nvSpPr>
         <p:spPr>
           <a:xfrm>
-            <a:off x="7799832" y="4974336"/>
-            <a:ext cx="3145536" cy="576072"/>
+            <a:off x="7799832" y="4659782"/>
+            <a:ext cx="3145536" cy="899770"/>
           </a:xfrm>
           <a:prstGeom prst="rect">
             <a:avLst/>
@@ -7285,7 +7501,7 @@
                 <a:ea typeface="Aptos" pitchFamily="34" charset="-122"/>
                 <a:cs typeface="Aptos" pitchFamily="34" charset="-120"/>
               </a:rPr>
-              <a:t>Connect the concept to data quality, model performance, validation evidence, monitoring measures, and decisions that.</a:t>
+              <a:t>Connect the concept to data quality, model performance, validation evidence, monitoring measures, and decisions that remain under human control.</a:t>
             </a:r>
             <a:endParaRPr lang="en-US" sz="1320" dirty="0"/>
           </a:p>
@@ -7637,11 +7853,11 @@
         <p:spPr>
           <a:xfrm>
             <a:off x="7635240" y="1325880"/>
-            <a:ext cx="3474720" cy="1325880"/>
+            <a:ext cx="3474720" cy="1207008"/>
           </a:xfrm>
           <a:prstGeom prst="roundRect">
             <a:avLst>
-              <a:gd name="adj" fmla="val 8276"/>
+              <a:gd name="adj" fmla="val 9091"/>
             </a:avLst>
           </a:prstGeom>
           <a:solidFill>
@@ -7703,7 +7919,7 @@
         <p:spPr>
           <a:xfrm>
             <a:off x="7799832" y="1801368"/>
-            <a:ext cx="3145536" cy="758952"/>
+            <a:ext cx="3145536" cy="640080"/>
           </a:xfrm>
           <a:prstGeom prst="rect">
             <a:avLst/>
@@ -7743,12 +7959,12 @@
         </p:nvSpPr>
         <p:spPr>
           <a:xfrm>
-            <a:off x="7635240" y="2788920"/>
-            <a:ext cx="3474720" cy="1536192"/>
+            <a:off x="7635240" y="2670048"/>
+            <a:ext cx="3474720" cy="1377086"/>
           </a:xfrm>
           <a:prstGeom prst="roundRect">
             <a:avLst>
-              <a:gd name="adj" fmla="val 7143"/>
+              <a:gd name="adj" fmla="val 7968"/>
             </a:avLst>
           </a:prstGeom>
           <a:solidFill>
@@ -7770,7 +7986,7 @@
         </p:nvSpPr>
         <p:spPr>
           <a:xfrm>
-            <a:off x="7799832" y="2935224"/>
+            <a:off x="7799832" y="2816352"/>
             <a:ext cx="3145536" cy="256032"/>
           </a:xfrm>
           <a:prstGeom prst="rect">
@@ -7809,8 +8025,8 @@
         </p:nvSpPr>
         <p:spPr>
           <a:xfrm>
-            <a:off x="7818120" y="3300984"/>
-            <a:ext cx="3090672" cy="877824"/>
+            <a:off x="7818120" y="3182112"/>
+            <a:ext cx="3090672" cy="718718"/>
           </a:xfrm>
           <a:prstGeom prst="rect">
             <a:avLst/>
@@ -7867,12 +8083,12 @@
         </p:nvSpPr>
         <p:spPr>
           <a:xfrm>
-            <a:off x="7635240" y="4498848"/>
-            <a:ext cx="3474720" cy="1143000"/>
+            <a:off x="7635240" y="4184294"/>
+            <a:ext cx="3474720" cy="1466698"/>
           </a:xfrm>
           <a:prstGeom prst="roundRect">
             <a:avLst>
-              <a:gd name="adj" fmla="val 9600"/>
+              <a:gd name="adj" fmla="val 7481"/>
             </a:avLst>
           </a:prstGeom>
           <a:solidFill>
@@ -7894,7 +8110,7 @@
         </p:nvSpPr>
         <p:spPr>
           <a:xfrm>
-            <a:off x="7799832" y="4645152"/>
+            <a:off x="7799832" y="4330598"/>
             <a:ext cx="3145536" cy="256032"/>
           </a:xfrm>
           <a:prstGeom prst="rect">
@@ -7933,8 +8149,8 @@
         </p:nvSpPr>
         <p:spPr>
           <a:xfrm>
-            <a:off x="7799832" y="4974336"/>
-            <a:ext cx="3145536" cy="576072"/>
+            <a:off x="7799832" y="4659782"/>
+            <a:ext cx="3145536" cy="899770"/>
           </a:xfrm>
           <a:prstGeom prst="rect">
             <a:avLst/>
@@ -7960,7 +8176,7 @@
                 <a:ea typeface="Aptos" pitchFamily="34" charset="-122"/>
                 <a:cs typeface="Aptos" pitchFamily="34" charset="-120"/>
               </a:rPr>
-              <a:t>Connect the concept to data quality, model performance, validation evidence, monitoring measures, and decisions that.</a:t>
+              <a:t>Connect the concept to data quality, model performance, validation evidence, monitoring measures, and decisions that remain under human control.</a:t>
             </a:r>
             <a:endParaRPr lang="en-US" sz="1320" dirty="0"/>
           </a:p>
@@ -8312,11 +8528,11 @@
         <p:spPr>
           <a:xfrm>
             <a:off x="7635240" y="1325880"/>
-            <a:ext cx="3474720" cy="1325880"/>
+            <a:ext cx="3474720" cy="1207008"/>
           </a:xfrm>
           <a:prstGeom prst="roundRect">
             <a:avLst>
-              <a:gd name="adj" fmla="val 8276"/>
+              <a:gd name="adj" fmla="val 9091"/>
             </a:avLst>
           </a:prstGeom>
           <a:solidFill>
@@ -8378,7 +8594,7 @@
         <p:spPr>
           <a:xfrm>
             <a:off x="7799832" y="1801368"/>
-            <a:ext cx="3145536" cy="758952"/>
+            <a:ext cx="3145536" cy="640080"/>
           </a:xfrm>
           <a:prstGeom prst="rect">
             <a:avLst/>
@@ -8418,12 +8634,12 @@
         </p:nvSpPr>
         <p:spPr>
           <a:xfrm>
-            <a:off x="7635240" y="2788920"/>
-            <a:ext cx="3474720" cy="1536192"/>
+            <a:off x="7635240" y="2670048"/>
+            <a:ext cx="3474720" cy="1377086"/>
           </a:xfrm>
           <a:prstGeom prst="roundRect">
             <a:avLst>
-              <a:gd name="adj" fmla="val 7143"/>
+              <a:gd name="adj" fmla="val 7968"/>
             </a:avLst>
           </a:prstGeom>
           <a:solidFill>
@@ -8445,7 +8661,7 @@
         </p:nvSpPr>
         <p:spPr>
           <a:xfrm>
-            <a:off x="7799832" y="2935224"/>
+            <a:off x="7799832" y="2816352"/>
             <a:ext cx="3145536" cy="256032"/>
           </a:xfrm>
           <a:prstGeom prst="rect">
@@ -8484,8 +8700,8 @@
         </p:nvSpPr>
         <p:spPr>
           <a:xfrm>
-            <a:off x="7818120" y="3300984"/>
-            <a:ext cx="3090672" cy="877824"/>
+            <a:off x="7818120" y="3182112"/>
+            <a:ext cx="3090672" cy="718718"/>
           </a:xfrm>
           <a:prstGeom prst="rect">
             <a:avLst/>
@@ -8542,12 +8758,12 @@
         </p:nvSpPr>
         <p:spPr>
           <a:xfrm>
-            <a:off x="7635240" y="4498848"/>
-            <a:ext cx="3474720" cy="1143000"/>
+            <a:off x="7635240" y="4184294"/>
+            <a:ext cx="3474720" cy="1466698"/>
           </a:xfrm>
           <a:prstGeom prst="roundRect">
             <a:avLst>
-              <a:gd name="adj" fmla="val 9600"/>
+              <a:gd name="adj" fmla="val 7481"/>
             </a:avLst>
           </a:prstGeom>
           <a:solidFill>
@@ -8569,7 +8785,7 @@
         </p:nvSpPr>
         <p:spPr>
           <a:xfrm>
-            <a:off x="7799832" y="4645152"/>
+            <a:off x="7799832" y="4330598"/>
             <a:ext cx="3145536" cy="256032"/>
           </a:xfrm>
           <a:prstGeom prst="rect">
@@ -8608,8 +8824,8 @@
         </p:nvSpPr>
         <p:spPr>
           <a:xfrm>
-            <a:off x="7799832" y="4974336"/>
-            <a:ext cx="3145536" cy="576072"/>
+            <a:off x="7799832" y="4659782"/>
+            <a:ext cx="3145536" cy="899770"/>
           </a:xfrm>
           <a:prstGeom prst="rect">
             <a:avLst/>
@@ -8635,7 +8851,7 @@
                 <a:ea typeface="Aptos" pitchFamily="34" charset="-122"/>
                 <a:cs typeface="Aptos" pitchFamily="34" charset="-120"/>
               </a:rPr>
-              <a:t>Use the assignment to test whether you can explain the concept, apply it to a realistic public health situation, and.</a:t>
+              <a:t>Use the assignment to test whether you can explain the concept, apply it to a realistic public health situation, and identify what would need review before the work moves forward.</a:t>
             </a:r>
             <a:endParaRPr lang="en-US" sz="1320" dirty="0"/>
           </a:p>
@@ -9004,11 +9220,11 @@
         <p:spPr>
           <a:xfrm>
             <a:off x="7635240" y="1325880"/>
-            <a:ext cx="3474720" cy="1325880"/>
+            <a:ext cx="3474720" cy="1207008"/>
           </a:xfrm>
           <a:prstGeom prst="roundRect">
             <a:avLst>
-              <a:gd name="adj" fmla="val 8276"/>
+              <a:gd name="adj" fmla="val 9091"/>
             </a:avLst>
           </a:prstGeom>
           <a:solidFill>
@@ -9070,7 +9286,7 @@
         <p:spPr>
           <a:xfrm>
             <a:off x="7799832" y="1801368"/>
-            <a:ext cx="3145536" cy="758952"/>
+            <a:ext cx="3145536" cy="640080"/>
           </a:xfrm>
           <a:prstGeom prst="rect">
             <a:avLst/>
@@ -9110,12 +9326,12 @@
         </p:nvSpPr>
         <p:spPr>
           <a:xfrm>
-            <a:off x="7635240" y="2788920"/>
-            <a:ext cx="3474720" cy="1536192"/>
+            <a:off x="7635240" y="2670048"/>
+            <a:ext cx="3474720" cy="1377086"/>
           </a:xfrm>
           <a:prstGeom prst="roundRect">
             <a:avLst>
-              <a:gd name="adj" fmla="val 7143"/>
+              <a:gd name="adj" fmla="val 7968"/>
             </a:avLst>
           </a:prstGeom>
           <a:solidFill>
@@ -9137,7 +9353,7 @@
         </p:nvSpPr>
         <p:spPr>
           <a:xfrm>
-            <a:off x="7799832" y="2935224"/>
+            <a:off x="7799832" y="2816352"/>
             <a:ext cx="3145536" cy="256032"/>
           </a:xfrm>
           <a:prstGeom prst="rect">
@@ -9176,8 +9392,8 @@
         </p:nvSpPr>
         <p:spPr>
           <a:xfrm>
-            <a:off x="7818120" y="3300984"/>
-            <a:ext cx="3090672" cy="877824"/>
+            <a:off x="7818120" y="3182112"/>
+            <a:ext cx="3090672" cy="718718"/>
           </a:xfrm>
           <a:prstGeom prst="rect">
             <a:avLst/>
@@ -9251,12 +9467,12 @@
         </p:nvSpPr>
         <p:spPr>
           <a:xfrm>
-            <a:off x="7635240" y="4498848"/>
-            <a:ext cx="3474720" cy="1143000"/>
+            <a:off x="7635240" y="4184294"/>
+            <a:ext cx="3474720" cy="1466698"/>
           </a:xfrm>
           <a:prstGeom prst="roundRect">
             <a:avLst>
-              <a:gd name="adj" fmla="val 9600"/>
+              <a:gd name="adj" fmla="val 7481"/>
             </a:avLst>
           </a:prstGeom>
           <a:solidFill>
@@ -9278,7 +9494,7 @@
         </p:nvSpPr>
         <p:spPr>
           <a:xfrm>
-            <a:off x="7799832" y="4645152"/>
+            <a:off x="7799832" y="4330598"/>
             <a:ext cx="3145536" cy="256032"/>
           </a:xfrm>
           <a:prstGeom prst="rect">
@@ -9317,8 +9533,8 @@
         </p:nvSpPr>
         <p:spPr>
           <a:xfrm>
-            <a:off x="7799832" y="4974336"/>
-            <a:ext cx="3145536" cy="576072"/>
+            <a:off x="7799832" y="4659782"/>
+            <a:ext cx="3145536" cy="899770"/>
           </a:xfrm>
           <a:prstGeom prst="rect">
             <a:avLst/>
@@ -9344,7 +9560,7 @@
                 <a:ea typeface="Aptos" pitchFamily="34" charset="-122"/>
                 <a:cs typeface="Aptos" pitchFamily="34" charset="-120"/>
               </a:rPr>
-              <a:t>Connect the concept to data quality, model performance, validation evidence, monitoring measures, and decisions that.</a:t>
+              <a:t>Connect the concept to data quality, model performance, validation evidence, monitoring measures, and decisions that remain under human control.</a:t>
             </a:r>
             <a:endParaRPr lang="en-US" sz="1320" dirty="0"/>
           </a:p>
@@ -9679,11 +9895,11 @@
         <p:spPr>
           <a:xfrm>
             <a:off x="7635240" y="1325880"/>
-            <a:ext cx="3474720" cy="1325880"/>
+            <a:ext cx="3474720" cy="1207008"/>
           </a:xfrm>
           <a:prstGeom prst="roundRect">
             <a:avLst>
-              <a:gd name="adj" fmla="val 8276"/>
+              <a:gd name="adj" fmla="val 9091"/>
             </a:avLst>
           </a:prstGeom>
           <a:solidFill>
@@ -9745,7 +9961,7 @@
         <p:spPr>
           <a:xfrm>
             <a:off x="7799832" y="1801368"/>
-            <a:ext cx="3145536" cy="758952"/>
+            <a:ext cx="3145536" cy="640080"/>
           </a:xfrm>
           <a:prstGeom prst="rect">
             <a:avLst/>
@@ -9785,12 +10001,12 @@
         </p:nvSpPr>
         <p:spPr>
           <a:xfrm>
-            <a:off x="7635240" y="2788920"/>
-            <a:ext cx="3474720" cy="1536192"/>
+            <a:off x="7635240" y="2670048"/>
+            <a:ext cx="3474720" cy="1377086"/>
           </a:xfrm>
           <a:prstGeom prst="roundRect">
             <a:avLst>
-              <a:gd name="adj" fmla="val 7143"/>
+              <a:gd name="adj" fmla="val 7968"/>
             </a:avLst>
           </a:prstGeom>
           <a:solidFill>
@@ -9812,7 +10028,7 @@
         </p:nvSpPr>
         <p:spPr>
           <a:xfrm>
-            <a:off x="7799832" y="2935224"/>
+            <a:off x="7799832" y="2816352"/>
             <a:ext cx="3145536" cy="256032"/>
           </a:xfrm>
           <a:prstGeom prst="rect">
@@ -9851,8 +10067,8 @@
         </p:nvSpPr>
         <p:spPr>
           <a:xfrm>
-            <a:off x="7818120" y="3300984"/>
-            <a:ext cx="3090672" cy="877824"/>
+            <a:off x="7818120" y="3182112"/>
+            <a:ext cx="3090672" cy="718718"/>
           </a:xfrm>
           <a:prstGeom prst="rect">
             <a:avLst/>
@@ -9892,12 +10108,12 @@
         </p:nvSpPr>
         <p:spPr>
           <a:xfrm>
-            <a:off x="7635240" y="4498848"/>
-            <a:ext cx="3474720" cy="1143000"/>
+            <a:off x="7635240" y="4184294"/>
+            <a:ext cx="3474720" cy="1466698"/>
           </a:xfrm>
           <a:prstGeom prst="roundRect">
             <a:avLst>
-              <a:gd name="adj" fmla="val 9600"/>
+              <a:gd name="adj" fmla="val 7481"/>
             </a:avLst>
           </a:prstGeom>
           <a:solidFill>
@@ -9919,7 +10135,7 @@
         </p:nvSpPr>
         <p:spPr>
           <a:xfrm>
-            <a:off x="7799832" y="4645152"/>
+            <a:off x="7799832" y="4330598"/>
             <a:ext cx="3145536" cy="256032"/>
           </a:xfrm>
           <a:prstGeom prst="rect">
@@ -9958,8 +10174,8 @@
         </p:nvSpPr>
         <p:spPr>
           <a:xfrm>
-            <a:off x="7799832" y="4974336"/>
-            <a:ext cx="3145536" cy="576072"/>
+            <a:off x="7799832" y="4659782"/>
+            <a:ext cx="3145536" cy="899770"/>
           </a:xfrm>
           <a:prstGeom prst="rect">
             <a:avLst/>
@@ -9985,7 +10201,7 @@
                 <a:ea typeface="Aptos" pitchFamily="34" charset="-122"/>
                 <a:cs typeface="Aptos" pitchFamily="34" charset="-120"/>
               </a:rPr>
-              <a:t>Connect the concept to data quality, model performance, validation evidence, monitoring measures, and decisions that.</a:t>
+              <a:t>Connect the concept to data quality, model performance, validation evidence, monitoring measures, and decisions that remain under human control.</a:t>
             </a:r>
             <a:endParaRPr lang="en-US" sz="1320" dirty="0"/>
           </a:p>
@@ -10956,11 +11172,11 @@
         <p:spPr>
           <a:xfrm>
             <a:off x="7635240" y="1325880"/>
-            <a:ext cx="3474720" cy="1325880"/>
+            <a:ext cx="3474720" cy="1207008"/>
           </a:xfrm>
           <a:prstGeom prst="roundRect">
             <a:avLst>
-              <a:gd name="adj" fmla="val 8276"/>
+              <a:gd name="adj" fmla="val 9091"/>
             </a:avLst>
           </a:prstGeom>
           <a:solidFill>
@@ -11022,7 +11238,7 @@
         <p:spPr>
           <a:xfrm>
             <a:off x="7799832" y="1801368"/>
-            <a:ext cx="3145536" cy="758952"/>
+            <a:ext cx="3145536" cy="640080"/>
           </a:xfrm>
           <a:prstGeom prst="rect">
             <a:avLst/>
@@ -11062,12 +11278,12 @@
         </p:nvSpPr>
         <p:spPr>
           <a:xfrm>
-            <a:off x="7635240" y="2788920"/>
-            <a:ext cx="3474720" cy="1536192"/>
+            <a:off x="7635240" y="2670048"/>
+            <a:ext cx="3474720" cy="1377086"/>
           </a:xfrm>
           <a:prstGeom prst="roundRect">
             <a:avLst>
-              <a:gd name="adj" fmla="val 7143"/>
+              <a:gd name="adj" fmla="val 7968"/>
             </a:avLst>
           </a:prstGeom>
           <a:solidFill>
@@ -11089,7 +11305,7 @@
         </p:nvSpPr>
         <p:spPr>
           <a:xfrm>
-            <a:off x="7799832" y="2935224"/>
+            <a:off x="7799832" y="2816352"/>
             <a:ext cx="3145536" cy="256032"/>
           </a:xfrm>
           <a:prstGeom prst="rect">
@@ -11128,8 +11344,8 @@
         </p:nvSpPr>
         <p:spPr>
           <a:xfrm>
-            <a:off x="7818120" y="3300984"/>
-            <a:ext cx="3090672" cy="877824"/>
+            <a:off x="7818120" y="3182112"/>
+            <a:ext cx="3090672" cy="718718"/>
           </a:xfrm>
           <a:prstGeom prst="rect">
             <a:avLst/>
@@ -11203,12 +11419,12 @@
         </p:nvSpPr>
         <p:spPr>
           <a:xfrm>
-            <a:off x="7635240" y="4498848"/>
-            <a:ext cx="3474720" cy="1143000"/>
+            <a:off x="7635240" y="4184294"/>
+            <a:ext cx="3474720" cy="1466698"/>
           </a:xfrm>
           <a:prstGeom prst="roundRect">
             <a:avLst>
-              <a:gd name="adj" fmla="val 9600"/>
+              <a:gd name="adj" fmla="val 7481"/>
             </a:avLst>
           </a:prstGeom>
           <a:solidFill>
@@ -11230,7 +11446,7 @@
         </p:nvSpPr>
         <p:spPr>
           <a:xfrm>
-            <a:off x="7799832" y="4645152"/>
+            <a:off x="7799832" y="4330598"/>
             <a:ext cx="3145536" cy="256032"/>
           </a:xfrm>
           <a:prstGeom prst="rect">
@@ -11269,8 +11485,8 @@
         </p:nvSpPr>
         <p:spPr>
           <a:xfrm>
-            <a:off x="7799832" y="4974336"/>
-            <a:ext cx="3145536" cy="576072"/>
+            <a:off x="7799832" y="4659782"/>
+            <a:ext cx="3145536" cy="899770"/>
           </a:xfrm>
           <a:prstGeom prst="rect">
             <a:avLst/>
@@ -11296,7 +11512,7 @@
                 <a:ea typeface="Aptos" pitchFamily="34" charset="-122"/>
                 <a:cs typeface="Aptos" pitchFamily="34" charset="-120"/>
               </a:rPr>
-              <a:t>Use the assignment to test whether you can explain the concept, apply it to a realistic public health situation, and.</a:t>
+              <a:t>Use the assignment to test whether you can explain the concept, apply it to a realistic public health situation, and identify what would need review before the work moves forward.</a:t>
             </a:r>
             <a:endParaRPr lang="en-US" sz="1320" dirty="0"/>
           </a:p>
@@ -11665,11 +11881,11 @@
         <p:spPr>
           <a:xfrm>
             <a:off x="7635240" y="1325880"/>
-            <a:ext cx="3474720" cy="1325880"/>
+            <a:ext cx="3474720" cy="1207008"/>
           </a:xfrm>
           <a:prstGeom prst="roundRect">
             <a:avLst>
-              <a:gd name="adj" fmla="val 8276"/>
+              <a:gd name="adj" fmla="val 9091"/>
             </a:avLst>
           </a:prstGeom>
           <a:solidFill>
@@ -11731,7 +11947,7 @@
         <p:spPr>
           <a:xfrm>
             <a:off x="7799832" y="1801368"/>
-            <a:ext cx="3145536" cy="758952"/>
+            <a:ext cx="3145536" cy="640080"/>
           </a:xfrm>
           <a:prstGeom prst="rect">
             <a:avLst/>
@@ -11771,12 +11987,12 @@
         </p:nvSpPr>
         <p:spPr>
           <a:xfrm>
-            <a:off x="7635240" y="2788920"/>
-            <a:ext cx="3474720" cy="1536192"/>
+            <a:off x="7635240" y="2670048"/>
+            <a:ext cx="3474720" cy="1377086"/>
           </a:xfrm>
           <a:prstGeom prst="roundRect">
             <a:avLst>
-              <a:gd name="adj" fmla="val 7143"/>
+              <a:gd name="adj" fmla="val 7968"/>
             </a:avLst>
           </a:prstGeom>
           <a:solidFill>
@@ -11798,7 +12014,7 @@
         </p:nvSpPr>
         <p:spPr>
           <a:xfrm>
-            <a:off x="7799832" y="2935224"/>
+            <a:off x="7799832" y="2816352"/>
             <a:ext cx="3145536" cy="256032"/>
           </a:xfrm>
           <a:prstGeom prst="rect">
@@ -11837,8 +12053,8 @@
         </p:nvSpPr>
         <p:spPr>
           <a:xfrm>
-            <a:off x="7818120" y="3300984"/>
-            <a:ext cx="3090672" cy="877824"/>
+            <a:off x="7818120" y="3182112"/>
+            <a:ext cx="3090672" cy="718718"/>
           </a:xfrm>
           <a:prstGeom prst="rect">
             <a:avLst/>
@@ -11912,12 +12128,12 @@
         </p:nvSpPr>
         <p:spPr>
           <a:xfrm>
-            <a:off x="7635240" y="4498848"/>
-            <a:ext cx="3474720" cy="1143000"/>
+            <a:off x="7635240" y="4184294"/>
+            <a:ext cx="3474720" cy="1466698"/>
           </a:xfrm>
           <a:prstGeom prst="roundRect">
             <a:avLst>
-              <a:gd name="adj" fmla="val 9600"/>
+              <a:gd name="adj" fmla="val 7481"/>
             </a:avLst>
           </a:prstGeom>
           <a:solidFill>
@@ -11939,7 +12155,7 @@
         </p:nvSpPr>
         <p:spPr>
           <a:xfrm>
-            <a:off x="7799832" y="4645152"/>
+            <a:off x="7799832" y="4330598"/>
             <a:ext cx="3145536" cy="256032"/>
           </a:xfrm>
           <a:prstGeom prst="rect">
@@ -11978,8 +12194,8 @@
         </p:nvSpPr>
         <p:spPr>
           <a:xfrm>
-            <a:off x="7799832" y="4974336"/>
-            <a:ext cx="3145536" cy="576072"/>
+            <a:off x="7799832" y="4659782"/>
+            <a:ext cx="3145536" cy="899770"/>
           </a:xfrm>
           <a:prstGeom prst="rect">
             <a:avLst/>
@@ -12005,7 +12221,7 @@
                 <a:ea typeface="Aptos" pitchFamily="34" charset="-122"/>
                 <a:cs typeface="Aptos" pitchFamily="34" charset="-120"/>
               </a:rPr>
-              <a:t>Use the assignment to test whether you can explain the concept, apply it to a realistic public health situation, and.</a:t>
+              <a:t>Use the assignment to test whether you can explain the concept, apply it to a realistic public health situation, and identify what would need review before the work moves forward.</a:t>
             </a:r>
             <a:endParaRPr lang="en-US" sz="1320" dirty="0"/>
           </a:p>
@@ -12374,11 +12590,11 @@
         <p:spPr>
           <a:xfrm>
             <a:off x="7635240" y="1325880"/>
-            <a:ext cx="3474720" cy="1325880"/>
+            <a:ext cx="3474720" cy="1207008"/>
           </a:xfrm>
           <a:prstGeom prst="roundRect">
             <a:avLst>
-              <a:gd name="adj" fmla="val 8276"/>
+              <a:gd name="adj" fmla="val 9091"/>
             </a:avLst>
           </a:prstGeom>
           <a:solidFill>
@@ -12440,7 +12656,7 @@
         <p:spPr>
           <a:xfrm>
             <a:off x="7799832" y="1801368"/>
-            <a:ext cx="3145536" cy="758952"/>
+            <a:ext cx="3145536" cy="640080"/>
           </a:xfrm>
           <a:prstGeom prst="rect">
             <a:avLst/>
@@ -12480,12 +12696,12 @@
         </p:nvSpPr>
         <p:spPr>
           <a:xfrm>
-            <a:off x="7635240" y="2788920"/>
-            <a:ext cx="3474720" cy="1536192"/>
+            <a:off x="7635240" y="2670048"/>
+            <a:ext cx="3474720" cy="1377086"/>
           </a:xfrm>
           <a:prstGeom prst="roundRect">
             <a:avLst>
-              <a:gd name="adj" fmla="val 7143"/>
+              <a:gd name="adj" fmla="val 7968"/>
             </a:avLst>
           </a:prstGeom>
           <a:solidFill>
@@ -12507,7 +12723,7 @@
         </p:nvSpPr>
         <p:spPr>
           <a:xfrm>
-            <a:off x="7799832" y="2935224"/>
+            <a:off x="7799832" y="2816352"/>
             <a:ext cx="3145536" cy="256032"/>
           </a:xfrm>
           <a:prstGeom prst="rect">
@@ -12546,8 +12762,8 @@
         </p:nvSpPr>
         <p:spPr>
           <a:xfrm>
-            <a:off x="7818120" y="3300984"/>
-            <a:ext cx="3090672" cy="877824"/>
+            <a:off x="7818120" y="3182112"/>
+            <a:ext cx="3090672" cy="718718"/>
           </a:xfrm>
           <a:prstGeom prst="rect">
             <a:avLst/>
@@ -12621,12 +12837,12 @@
         </p:nvSpPr>
         <p:spPr>
           <a:xfrm>
-            <a:off x="7635240" y="4498848"/>
-            <a:ext cx="3474720" cy="1143000"/>
+            <a:off x="7635240" y="4184294"/>
+            <a:ext cx="3474720" cy="1466698"/>
           </a:xfrm>
           <a:prstGeom prst="roundRect">
             <a:avLst>
-              <a:gd name="adj" fmla="val 9600"/>
+              <a:gd name="adj" fmla="val 7481"/>
             </a:avLst>
           </a:prstGeom>
           <a:solidFill>
@@ -12648,7 +12864,7 @@
         </p:nvSpPr>
         <p:spPr>
           <a:xfrm>
-            <a:off x="7799832" y="4645152"/>
+            <a:off x="7799832" y="4330598"/>
             <a:ext cx="3145536" cy="256032"/>
           </a:xfrm>
           <a:prstGeom prst="rect">
@@ -12687,8 +12903,8 @@
         </p:nvSpPr>
         <p:spPr>
           <a:xfrm>
-            <a:off x="7799832" y="4974336"/>
-            <a:ext cx="3145536" cy="576072"/>
+            <a:off x="7799832" y="4659782"/>
+            <a:ext cx="3145536" cy="899770"/>
           </a:xfrm>
           <a:prstGeom prst="rect">
             <a:avLst/>
@@ -12714,7 +12930,7 @@
                 <a:ea typeface="Aptos" pitchFamily="34" charset="-122"/>
                 <a:cs typeface="Aptos" pitchFamily="34" charset="-120"/>
               </a:rPr>
-              <a:t>Connect the concept to data quality, model performance, validation evidence, monitoring measures, and decisions that.</a:t>
+              <a:t>Connect the concept to data quality, model performance, validation evidence, monitoring measures, and decisions that remain under human control.</a:t>
             </a:r>
             <a:endParaRPr lang="en-US" sz="1320" dirty="0"/>
           </a:p>
@@ -13192,7 +13408,7 @@
                 <a:ea typeface="Aptos" pitchFamily="34" charset="-122"/>
                 <a:cs typeface="Aptos" pitchFamily="34" charset="-120"/>
               </a:rPr>
-              <a:t>Use the related plays to identify decisions, participants, timing, approvals, and documentation needed for responsible.</a:t>
+              <a:t>Use the related plays to identify decisions, participants, timing, approvals, and documentation needed for responsible implementation.</a:t>
             </a:r>
             <a:endParaRPr lang="en-US" sz="1320" dirty="0"/>
           </a:p>
@@ -13811,7 +14027,7 @@
                 <a:ea typeface="Aptos" pitchFamily="34" charset="-122"/>
                 <a:cs typeface="Aptos" pitchFamily="34" charset="-120"/>
               </a:rPr>
-              <a:t>Use linked tools when your department needs a structured worksheet, template, checklist, review process, or.</a:t>
+              <a:t>Use linked tools when your department needs a structured worksheet, template, checklist, review process, or documentation artifact.</a:t>
             </a:r>
             <a:endParaRPr lang="en-US" sz="1320" dirty="0"/>
           </a:p>
@@ -14321,11 +14537,11 @@
         <p:spPr>
           <a:xfrm>
             <a:off x="7635240" y="1325880"/>
-            <a:ext cx="3474720" cy="1325880"/>
+            <a:ext cx="3474720" cy="1207008"/>
           </a:xfrm>
           <a:prstGeom prst="roundRect">
             <a:avLst>
-              <a:gd name="adj" fmla="val 8276"/>
+              <a:gd name="adj" fmla="val 9091"/>
             </a:avLst>
           </a:prstGeom>
           <a:solidFill>
@@ -14387,7 +14603,7 @@
         <p:spPr>
           <a:xfrm>
             <a:off x="7799832" y="1801368"/>
-            <a:ext cx="3145536" cy="758952"/>
+            <a:ext cx="3145536" cy="640080"/>
           </a:xfrm>
           <a:prstGeom prst="rect">
             <a:avLst/>
@@ -14427,12 +14643,12 @@
         </p:nvSpPr>
         <p:spPr>
           <a:xfrm>
-            <a:off x="7635240" y="2788920"/>
-            <a:ext cx="3474720" cy="1536192"/>
+            <a:off x="7635240" y="2670048"/>
+            <a:ext cx="3474720" cy="1377086"/>
           </a:xfrm>
           <a:prstGeom prst="roundRect">
             <a:avLst>
-              <a:gd name="adj" fmla="val 7143"/>
+              <a:gd name="adj" fmla="val 7968"/>
             </a:avLst>
           </a:prstGeom>
           <a:solidFill>
@@ -14454,7 +14670,7 @@
         </p:nvSpPr>
         <p:spPr>
           <a:xfrm>
-            <a:off x="7799832" y="2935224"/>
+            <a:off x="7799832" y="2816352"/>
             <a:ext cx="3145536" cy="256032"/>
           </a:xfrm>
           <a:prstGeom prst="rect">
@@ -14493,8 +14709,8 @@
         </p:nvSpPr>
         <p:spPr>
           <a:xfrm>
-            <a:off x="7818120" y="3300984"/>
-            <a:ext cx="3090672" cy="877824"/>
+            <a:off x="7818120" y="3182112"/>
+            <a:ext cx="3090672" cy="718718"/>
           </a:xfrm>
           <a:prstGeom prst="rect">
             <a:avLst/>
@@ -14568,12 +14784,12 @@
         </p:nvSpPr>
         <p:spPr>
           <a:xfrm>
-            <a:off x="7635240" y="4498848"/>
-            <a:ext cx="3474720" cy="1143000"/>
+            <a:off x="7635240" y="4184294"/>
+            <a:ext cx="3474720" cy="1466698"/>
           </a:xfrm>
           <a:prstGeom prst="roundRect">
             <a:avLst>
-              <a:gd name="adj" fmla="val 9600"/>
+              <a:gd name="adj" fmla="val 7481"/>
             </a:avLst>
           </a:prstGeom>
           <a:solidFill>
@@ -14595,7 +14811,7 @@
         </p:nvSpPr>
         <p:spPr>
           <a:xfrm>
-            <a:off x="7799832" y="4645152"/>
+            <a:off x="7799832" y="4330598"/>
             <a:ext cx="3145536" cy="256032"/>
           </a:xfrm>
           <a:prstGeom prst="rect">
@@ -14634,8 +14850,8 @@
         </p:nvSpPr>
         <p:spPr>
           <a:xfrm>
-            <a:off x="7799832" y="4974336"/>
-            <a:ext cx="3145536" cy="576072"/>
+            <a:off x="7799832" y="4659782"/>
+            <a:ext cx="3145536" cy="899770"/>
           </a:xfrm>
           <a:prstGeom prst="rect">
             <a:avLst/>
@@ -14661,7 +14877,7 @@
                 <a:ea typeface="Aptos" pitchFamily="34" charset="-122"/>
                 <a:cs typeface="Aptos" pitchFamily="34" charset="-120"/>
               </a:rPr>
-              <a:t>Use the assignment to test whether you can explain the concept, apply it to a realistic public health situation, and.</a:t>
+              <a:t>Use the assignment to test whether you can explain the concept, apply it to a realistic public health situation, and identify what would need review before the work moves forward.</a:t>
             </a:r>
             <a:endParaRPr lang="en-US" sz="1320" dirty="0"/>
           </a:p>
@@ -15030,11 +15246,11 @@
         <p:spPr>
           <a:xfrm>
             <a:off x="7635240" y="1325880"/>
-            <a:ext cx="3474720" cy="1325880"/>
+            <a:ext cx="3474720" cy="1255471"/>
           </a:xfrm>
           <a:prstGeom prst="roundRect">
             <a:avLst>
-              <a:gd name="adj" fmla="val 8276"/>
+              <a:gd name="adj" fmla="val 8740"/>
             </a:avLst>
           </a:prstGeom>
           <a:solidFill>
@@ -15096,7 +15312,7 @@
         <p:spPr>
           <a:xfrm>
             <a:off x="7799832" y="1801368"/>
-            <a:ext cx="3145536" cy="758952"/>
+            <a:ext cx="3145536" cy="688543"/>
           </a:xfrm>
           <a:prstGeom prst="rect">
             <a:avLst/>
@@ -15136,12 +15352,12 @@
         </p:nvSpPr>
         <p:spPr>
           <a:xfrm>
-            <a:off x="7635240" y="2788920"/>
-            <a:ext cx="3474720" cy="1536192"/>
+            <a:off x="7635240" y="2718511"/>
+            <a:ext cx="3474720" cy="1328623"/>
           </a:xfrm>
           <a:prstGeom prst="roundRect">
             <a:avLst>
-              <a:gd name="adj" fmla="val 7143"/>
+              <a:gd name="adj" fmla="val 8259"/>
             </a:avLst>
           </a:prstGeom>
           <a:solidFill>
@@ -15163,8 +15379,8 @@
         </p:nvSpPr>
         <p:spPr>
           <a:xfrm>
-            <a:off x="7799832" y="2935224"/>
-            <a:ext cx="3145536" cy="256032"/>
+            <a:off x="7799832" y="2846527"/>
+            <a:ext cx="3145536" cy="237744"/>
           </a:xfrm>
           <a:prstGeom prst="rect">
             <a:avLst/>
@@ -15180,7 +15396,7 @@
               <a:buNone/>
             </a:pPr>
             <a:r>
-              <a:rPr lang="en-US" sz="1300" b="1" dirty="0">
+              <a:rPr lang="en-US" sz="1250" b="1" dirty="0">
                 <a:solidFill>
                   <a:srgbClr val="0068B7"/>
                 </a:solidFill>
@@ -15188,84 +15404,317 @@
                 <a:ea typeface="Aptos" pitchFamily="34" charset="-122"/>
                 <a:cs typeface="Aptos" pitchFamily="34" charset="-120"/>
               </a:rPr>
-              <a:t>Concept checkpoints</a:t>
-            </a:r>
-            <a:endParaRPr lang="en-US" sz="1300" dirty="0"/>
-          </a:p>
-        </p:txBody>
-      </p:sp>
-      <p:sp>
-        <p:nvSpPr>
-          <p:cNvPr id="15" name="Text 13"/>
-          <p:cNvSpPr/>
-          <p:nvPr/>
-        </p:nvSpPr>
-        <p:spPr>
-          <a:xfrm>
-            <a:off x="7818120" y="3300984"/>
-            <a:ext cx="3090672" cy="877824"/>
-          </a:xfrm>
-          <a:prstGeom prst="rect">
-            <a:avLst/>
-          </a:prstGeom>
-          <a:noFill/>
-          <a:ln/>
-        </p:spPr>
-        <p:txBody>
-          <a:bodyPr wrap="square" lIns="508" tIns="508" rIns="508" bIns="508" rtlCol="0" anchor="t">
+              <a:t>Data-to-decision flow</a:t>
+            </a:r>
+            <a:endParaRPr lang="en-US" sz="1250" dirty="0"/>
+          </a:p>
+        </p:txBody>
+      </p:sp>
+      <p:sp>
+        <p:nvSpPr>
+          <p:cNvPr id="15" name="Shape 13"/>
+          <p:cNvSpPr/>
+          <p:nvPr/>
+        </p:nvSpPr>
+        <p:spPr>
+          <a:xfrm>
+            <a:off x="8763000" y="3399739"/>
+            <a:ext cx="164592" cy="0"/>
+          </a:xfrm>
+          <a:prstGeom prst="line">
+            <a:avLst/>
+          </a:prstGeom>
+          <a:noFill/>
+          <a:ln w="15240">
+            <a:solidFill>
+              <a:srgbClr val="8ABBD8"/>
+            </a:solidFill>
+            <a:prstDash val="solid"/>
+          </a:ln>
+        </p:spPr>
+      </p:sp>
+      <p:sp>
+        <p:nvSpPr>
+          <p:cNvPr id="16" name="Shape 14"/>
+          <p:cNvSpPr/>
+          <p:nvPr/>
+        </p:nvSpPr>
+        <p:spPr>
+          <a:xfrm>
+            <a:off x="7872984" y="3248863"/>
+            <a:ext cx="890016" cy="301752"/>
+          </a:xfrm>
+          <a:prstGeom prst="roundRect">
+            <a:avLst>
+              <a:gd name="adj" fmla="val 24242"/>
+            </a:avLst>
+          </a:prstGeom>
+          <a:solidFill>
+            <a:srgbClr val="0068B7"/>
+          </a:solidFill>
+          <a:ln w="12700">
+            <a:solidFill>
+              <a:srgbClr val="0068B7"/>
+            </a:solidFill>
+            <a:prstDash val="solid"/>
+          </a:ln>
+        </p:spPr>
+      </p:sp>
+      <p:sp>
+        <p:nvSpPr>
+          <p:cNvPr id="17" name="Text 15"/>
+          <p:cNvSpPr/>
+          <p:nvPr/>
+        </p:nvSpPr>
+        <p:spPr>
+          <a:xfrm>
+            <a:off x="7909560" y="3322015"/>
+            <a:ext cx="816864" cy="146304"/>
+          </a:xfrm>
+          <a:prstGeom prst="rect">
+            <a:avLst/>
+          </a:prstGeom>
+          <a:noFill/>
+          <a:ln/>
+        </p:spPr>
+        <p:txBody>
+          <a:bodyPr wrap="square" lIns="0" tIns="0" rIns="0" bIns="0" rtlCol="0" anchor="ctr">
             <a:normAutofit/>
           </a:bodyPr>
           <a:lstStyle/>
           <a:p>
-            <a:pPr indent="0" marL="0">
-              <a:buNone/>
-            </a:pPr>
-            <a:r>
-              <a:rPr lang="en-US" sz="1220" dirty="0">
-                <a:solidFill>
-                  <a:srgbClr val="17364A"/>
-                </a:solidFill>
-                <a:latin typeface="Aptos" pitchFamily="34" charset="0"/>
-                <a:ea typeface="Aptos" pitchFamily="34" charset="-122"/>
-                <a:cs typeface="Aptos" pitchFamily="34" charset="-120"/>
-              </a:rPr>
-              <a:t>Data quality engineering is the practical work of defining,.</a:t>
-            </a:r>
-            <a:endParaRPr lang="en-US" sz="1220" dirty="0"/>
-          </a:p>
-          <a:p>
-            <a:pPr indent="0" marL="0">
-              <a:buNone/>
-            </a:pPr>
-            <a:r>
-              <a:rPr lang="en-US" sz="1220" dirty="0">
-                <a:solidFill>
-                  <a:srgbClr val="17364A"/>
-                </a:solidFill>
-                <a:latin typeface="Aptos" pitchFamily="34" charset="0"/>
-                <a:ea typeface="Aptos" pitchFamily="34" charset="-122"/>
-                <a:cs typeface="Aptos" pitchFamily="34" charset="-120"/>
-              </a:rPr>
-              <a:t>It directly affects whether AI outputs are accurate, equitable,.</a:t>
-            </a:r>
-            <a:endParaRPr lang="en-US" sz="1220" dirty="0"/>
-          </a:p>
-        </p:txBody>
-      </p:sp>
-      <p:sp>
-        <p:nvSpPr>
-          <p:cNvPr id="16" name="Shape 14"/>
-          <p:cNvSpPr/>
-          <p:nvPr/>
-        </p:nvSpPr>
-        <p:spPr>
-          <a:xfrm>
-            <a:off x="7635240" y="4498848"/>
-            <a:ext cx="3474720" cy="1143000"/>
+            <a:pPr algn="ctr" indent="0" marL="0">
+              <a:buNone/>
+            </a:pPr>
+            <a:r>
+              <a:rPr lang="en-US" sz="880" b="1" dirty="0">
+                <a:solidFill>
+                  <a:srgbClr val="FFFFFF"/>
+                </a:solidFill>
+                <a:latin typeface="Aptos" pitchFamily="34" charset="0"/>
+                <a:ea typeface="Aptos" pitchFamily="34" charset="-122"/>
+                <a:cs typeface="Aptos" pitchFamily="34" charset="-120"/>
+              </a:rPr>
+              <a:t>Data</a:t>
+            </a:r>
+            <a:endParaRPr lang="en-US" sz="880" dirty="0"/>
+          </a:p>
+        </p:txBody>
+      </p:sp>
+      <p:sp>
+        <p:nvSpPr>
+          <p:cNvPr id="18" name="Shape 16"/>
+          <p:cNvSpPr/>
+          <p:nvPr/>
+        </p:nvSpPr>
+        <p:spPr>
+          <a:xfrm>
+            <a:off x="9817608" y="3399739"/>
+            <a:ext cx="164592" cy="0"/>
+          </a:xfrm>
+          <a:prstGeom prst="line">
+            <a:avLst/>
+          </a:prstGeom>
+          <a:noFill/>
+          <a:ln w="15240">
+            <a:solidFill>
+              <a:srgbClr val="8ABBD8"/>
+            </a:solidFill>
+            <a:prstDash val="solid"/>
+          </a:ln>
+        </p:spPr>
+      </p:sp>
+      <p:sp>
+        <p:nvSpPr>
+          <p:cNvPr id="19" name="Shape 17"/>
+          <p:cNvSpPr/>
+          <p:nvPr/>
+        </p:nvSpPr>
+        <p:spPr>
+          <a:xfrm>
+            <a:off x="8927592" y="3248863"/>
+            <a:ext cx="890016" cy="301752"/>
           </a:xfrm>
           <a:prstGeom prst="roundRect">
             <a:avLst>
-              <a:gd name="adj" fmla="val 9600"/>
+              <a:gd name="adj" fmla="val 24242"/>
+            </a:avLst>
+          </a:prstGeom>
+          <a:solidFill>
+            <a:srgbClr val="2F8A28"/>
+          </a:solidFill>
+          <a:ln w="12700">
+            <a:solidFill>
+              <a:srgbClr val="2F8A28"/>
+            </a:solidFill>
+            <a:prstDash val="solid"/>
+          </a:ln>
+        </p:spPr>
+      </p:sp>
+      <p:sp>
+        <p:nvSpPr>
+          <p:cNvPr id="20" name="Text 18"/>
+          <p:cNvSpPr/>
+          <p:nvPr/>
+        </p:nvSpPr>
+        <p:spPr>
+          <a:xfrm>
+            <a:off x="8964168" y="3322015"/>
+            <a:ext cx="816864" cy="146304"/>
+          </a:xfrm>
+          <a:prstGeom prst="rect">
+            <a:avLst/>
+          </a:prstGeom>
+          <a:noFill/>
+          <a:ln/>
+        </p:spPr>
+        <p:txBody>
+          <a:bodyPr wrap="square" lIns="0" tIns="0" rIns="0" bIns="0" rtlCol="0" anchor="ctr">
+            <a:normAutofit/>
+          </a:bodyPr>
+          <a:lstStyle/>
+          <a:p>
+            <a:pPr algn="ctr" indent="0" marL="0">
+              <a:buNone/>
+            </a:pPr>
+            <a:r>
+              <a:rPr lang="en-US" sz="880" b="1" dirty="0">
+                <a:solidFill>
+                  <a:srgbClr val="FFFFFF"/>
+                </a:solidFill>
+                <a:latin typeface="Aptos" pitchFamily="34" charset="0"/>
+                <a:ea typeface="Aptos" pitchFamily="34" charset="-122"/>
+                <a:cs typeface="Aptos" pitchFamily="34" charset="-120"/>
+              </a:rPr>
+              <a:t>Analysis</a:t>
+            </a:r>
+            <a:endParaRPr lang="en-US" sz="880" dirty="0"/>
+          </a:p>
+        </p:txBody>
+      </p:sp>
+      <p:sp>
+        <p:nvSpPr>
+          <p:cNvPr id="21" name="Shape 19"/>
+          <p:cNvSpPr/>
+          <p:nvPr/>
+        </p:nvSpPr>
+        <p:spPr>
+          <a:xfrm>
+            <a:off x="9982200" y="3248863"/>
+            <a:ext cx="890016" cy="301752"/>
+          </a:xfrm>
+          <a:prstGeom prst="roundRect">
+            <a:avLst>
+              <a:gd name="adj" fmla="val 24242"/>
+            </a:avLst>
+          </a:prstGeom>
+          <a:solidFill>
+            <a:srgbClr val="6A4CA3"/>
+          </a:solidFill>
+          <a:ln w="12700">
+            <a:solidFill>
+              <a:srgbClr val="6A4CA3"/>
+            </a:solidFill>
+            <a:prstDash val="solid"/>
+          </a:ln>
+        </p:spPr>
+      </p:sp>
+      <p:sp>
+        <p:nvSpPr>
+          <p:cNvPr id="22" name="Text 20"/>
+          <p:cNvSpPr/>
+          <p:nvPr/>
+        </p:nvSpPr>
+        <p:spPr>
+          <a:xfrm>
+            <a:off x="10018776" y="3322015"/>
+            <a:ext cx="816864" cy="146304"/>
+          </a:xfrm>
+          <a:prstGeom prst="rect">
+            <a:avLst/>
+          </a:prstGeom>
+          <a:noFill/>
+          <a:ln/>
+        </p:spPr>
+        <p:txBody>
+          <a:bodyPr wrap="square" lIns="0" tIns="0" rIns="0" bIns="0" rtlCol="0" anchor="ctr">
+            <a:normAutofit/>
+          </a:bodyPr>
+          <a:lstStyle/>
+          <a:p>
+            <a:pPr algn="ctr" indent="0" marL="0">
+              <a:buNone/>
+            </a:pPr>
+            <a:r>
+              <a:rPr lang="en-US" sz="880" b="1" dirty="0">
+                <a:solidFill>
+                  <a:srgbClr val="FFFFFF"/>
+                </a:solidFill>
+                <a:latin typeface="Aptos" pitchFamily="34" charset="0"/>
+                <a:ea typeface="Aptos" pitchFamily="34" charset="-122"/>
+                <a:cs typeface="Aptos" pitchFamily="34" charset="-120"/>
+              </a:rPr>
+              <a:t>Review</a:t>
+            </a:r>
+            <a:endParaRPr lang="en-US" sz="880" dirty="0"/>
+          </a:p>
+        </p:txBody>
+      </p:sp>
+      <p:sp>
+        <p:nvSpPr>
+          <p:cNvPr id="23" name="Text 21"/>
+          <p:cNvSpPr/>
+          <p:nvPr/>
+        </p:nvSpPr>
+        <p:spPr>
+          <a:xfrm>
+            <a:off x="7854696" y="3742639"/>
+            <a:ext cx="3035808" cy="158191"/>
+          </a:xfrm>
+          <a:prstGeom prst="rect">
+            <a:avLst/>
+          </a:prstGeom>
+          <a:noFill/>
+          <a:ln/>
+        </p:spPr>
+        <p:txBody>
+          <a:bodyPr wrap="square" lIns="254" tIns="254" rIns="254" bIns="254" rtlCol="0" anchor="t">
+            <a:normAutofit/>
+          </a:bodyPr>
+          <a:lstStyle/>
+          <a:p>
+            <a:pPr indent="0" marL="0">
+              <a:buNone/>
+            </a:pPr>
+            <a:r>
+              <a:rPr lang="en-US" sz="1120" dirty="0">
+                <a:solidFill>
+                  <a:srgbClr val="17364A"/>
+                </a:solidFill>
+                <a:latin typeface="Aptos" pitchFamily="34" charset="0"/>
+                <a:ea typeface="Aptos" pitchFamily="34" charset="-122"/>
+                <a:cs typeface="Aptos" pitchFamily="34" charset="-120"/>
+              </a:rPr>
+              <a:t>The important handoff is not from data to AI; it is from analysis to accountable human review.</a:t>
+            </a:r>
+            <a:endParaRPr lang="en-US" sz="1120" dirty="0"/>
+          </a:p>
+        </p:txBody>
+      </p:sp>
+      <p:sp>
+        <p:nvSpPr>
+          <p:cNvPr id="24" name="Shape 22"/>
+          <p:cNvSpPr/>
+          <p:nvPr/>
+        </p:nvSpPr>
+        <p:spPr>
+          <a:xfrm>
+            <a:off x="7635240" y="4184294"/>
+            <a:ext cx="3474720" cy="1466698"/>
+          </a:xfrm>
+          <a:prstGeom prst="roundRect">
+            <a:avLst>
+              <a:gd name="adj" fmla="val 7481"/>
             </a:avLst>
           </a:prstGeom>
           <a:solidFill>
@@ -15281,13 +15730,13 @@
       </p:sp>
       <p:sp>
         <p:nvSpPr>
-          <p:cNvPr id="17" name="Text 15"/>
-          <p:cNvSpPr/>
-          <p:nvPr/>
-        </p:nvSpPr>
-        <p:spPr>
-          <a:xfrm>
-            <a:off x="7799832" y="4645152"/>
+          <p:cNvPr id="25" name="Text 23"/>
+          <p:cNvSpPr/>
+          <p:nvPr/>
+        </p:nvSpPr>
+        <p:spPr>
+          <a:xfrm>
+            <a:off x="7799832" y="4330598"/>
             <a:ext cx="3145536" cy="256032"/>
           </a:xfrm>
           <a:prstGeom prst="rect">
@@ -15320,14 +15769,14 @@
       </p:sp>
       <p:sp>
         <p:nvSpPr>
-          <p:cNvPr id="18" name="Text 16"/>
-          <p:cNvSpPr/>
-          <p:nvPr/>
-        </p:nvSpPr>
-        <p:spPr>
-          <a:xfrm>
-            <a:off x="7799832" y="4974336"/>
-            <a:ext cx="3145536" cy="576072"/>
+          <p:cNvPr id="26" name="Text 24"/>
+          <p:cNvSpPr/>
+          <p:nvPr/>
+        </p:nvSpPr>
+        <p:spPr>
+          <a:xfrm>
+            <a:off x="7799832" y="4659782"/>
+            <a:ext cx="3145536" cy="899770"/>
           </a:xfrm>
           <a:prstGeom prst="rect">
             <a:avLst/>
@@ -15353,7 +15802,7 @@
                 <a:ea typeface="Aptos" pitchFamily="34" charset="-122"/>
                 <a:cs typeface="Aptos" pitchFamily="34" charset="-120"/>
               </a:rPr>
-              <a:t>Connect the concept to data quality, model performance, validation evidence, monitoring measures, and decisions that.</a:t>
+              <a:t>Connect the concept to data quality, model performance, validation evidence, monitoring measures, and decisions that remain under human control.</a:t>
             </a:r>
             <a:endParaRPr lang="en-US" sz="1320" dirty="0"/>
           </a:p>
@@ -15722,11 +16171,11 @@
         <p:spPr>
           <a:xfrm>
             <a:off x="7635240" y="1325880"/>
-            <a:ext cx="3474720" cy="1325880"/>
+            <a:ext cx="3474720" cy="1255471"/>
           </a:xfrm>
           <a:prstGeom prst="roundRect">
             <a:avLst>
-              <a:gd name="adj" fmla="val 8276"/>
+              <a:gd name="adj" fmla="val 8740"/>
             </a:avLst>
           </a:prstGeom>
           <a:solidFill>
@@ -15788,7 +16237,7 @@
         <p:spPr>
           <a:xfrm>
             <a:off x="7799832" y="1801368"/>
-            <a:ext cx="3145536" cy="758952"/>
+            <a:ext cx="3145536" cy="688543"/>
           </a:xfrm>
           <a:prstGeom prst="rect">
             <a:avLst/>
@@ -15828,12 +16277,12 @@
         </p:nvSpPr>
         <p:spPr>
           <a:xfrm>
-            <a:off x="7635240" y="2788920"/>
-            <a:ext cx="3474720" cy="1536192"/>
+            <a:off x="7635240" y="2718511"/>
+            <a:ext cx="3474720" cy="1328623"/>
           </a:xfrm>
           <a:prstGeom prst="roundRect">
             <a:avLst>
-              <a:gd name="adj" fmla="val 7143"/>
+              <a:gd name="adj" fmla="val 8259"/>
             </a:avLst>
           </a:prstGeom>
           <a:solidFill>
@@ -15855,8 +16304,8 @@
         </p:nvSpPr>
         <p:spPr>
           <a:xfrm>
-            <a:off x="7799832" y="2935224"/>
-            <a:ext cx="3145536" cy="256032"/>
+            <a:off x="7799832" y="2846527"/>
+            <a:ext cx="3145536" cy="237744"/>
           </a:xfrm>
           <a:prstGeom prst="rect">
             <a:avLst/>
@@ -15872,7 +16321,7 @@
               <a:buNone/>
             </a:pPr>
             <a:r>
-              <a:rPr lang="en-US" sz="1300" b="1" dirty="0">
+              <a:rPr lang="en-US" sz="1250" b="1" dirty="0">
                 <a:solidFill>
                   <a:srgbClr val="0068B7"/>
                 </a:solidFill>
@@ -15880,101 +16329,317 @@
                 <a:ea typeface="Aptos" pitchFamily="34" charset="-122"/>
                 <a:cs typeface="Aptos" pitchFamily="34" charset="-120"/>
               </a:rPr>
-              <a:t>Concept checkpoints</a:t>
-            </a:r>
-            <a:endParaRPr lang="en-US" sz="1300" dirty="0"/>
-          </a:p>
-        </p:txBody>
-      </p:sp>
-      <p:sp>
-        <p:nvSpPr>
-          <p:cNvPr id="15" name="Text 13"/>
-          <p:cNvSpPr/>
-          <p:nvPr/>
-        </p:nvSpPr>
-        <p:spPr>
-          <a:xfrm>
-            <a:off x="7818120" y="3300984"/>
-            <a:ext cx="3090672" cy="877824"/>
-          </a:xfrm>
-          <a:prstGeom prst="rect">
-            <a:avLst/>
-          </a:prstGeom>
-          <a:noFill/>
-          <a:ln/>
-        </p:spPr>
-        <p:txBody>
-          <a:bodyPr wrap="square" lIns="508" tIns="508" rIns="508" bIns="508" rtlCol="0" anchor="t">
+              <a:t>Data-to-decision flow</a:t>
+            </a:r>
+            <a:endParaRPr lang="en-US" sz="1250" dirty="0"/>
+          </a:p>
+        </p:txBody>
+      </p:sp>
+      <p:sp>
+        <p:nvSpPr>
+          <p:cNvPr id="15" name="Shape 13"/>
+          <p:cNvSpPr/>
+          <p:nvPr/>
+        </p:nvSpPr>
+        <p:spPr>
+          <a:xfrm>
+            <a:off x="8763000" y="3399739"/>
+            <a:ext cx="164592" cy="0"/>
+          </a:xfrm>
+          <a:prstGeom prst="line">
+            <a:avLst/>
+          </a:prstGeom>
+          <a:noFill/>
+          <a:ln w="15240">
+            <a:solidFill>
+              <a:srgbClr val="8ABBD8"/>
+            </a:solidFill>
+            <a:prstDash val="solid"/>
+          </a:ln>
+        </p:spPr>
+      </p:sp>
+      <p:sp>
+        <p:nvSpPr>
+          <p:cNvPr id="16" name="Shape 14"/>
+          <p:cNvSpPr/>
+          <p:nvPr/>
+        </p:nvSpPr>
+        <p:spPr>
+          <a:xfrm>
+            <a:off x="7872984" y="3248863"/>
+            <a:ext cx="890016" cy="301752"/>
+          </a:xfrm>
+          <a:prstGeom prst="roundRect">
+            <a:avLst>
+              <a:gd name="adj" fmla="val 24242"/>
+            </a:avLst>
+          </a:prstGeom>
+          <a:solidFill>
+            <a:srgbClr val="0068B7"/>
+          </a:solidFill>
+          <a:ln w="12700">
+            <a:solidFill>
+              <a:srgbClr val="0068B7"/>
+            </a:solidFill>
+            <a:prstDash val="solid"/>
+          </a:ln>
+        </p:spPr>
+      </p:sp>
+      <p:sp>
+        <p:nvSpPr>
+          <p:cNvPr id="17" name="Text 15"/>
+          <p:cNvSpPr/>
+          <p:nvPr/>
+        </p:nvSpPr>
+        <p:spPr>
+          <a:xfrm>
+            <a:off x="7909560" y="3322015"/>
+            <a:ext cx="816864" cy="146304"/>
+          </a:xfrm>
+          <a:prstGeom prst="rect">
+            <a:avLst/>
+          </a:prstGeom>
+          <a:noFill/>
+          <a:ln/>
+        </p:spPr>
+        <p:txBody>
+          <a:bodyPr wrap="square" lIns="0" tIns="0" rIns="0" bIns="0" rtlCol="0" anchor="ctr">
             <a:normAutofit/>
           </a:bodyPr>
           <a:lstStyle/>
           <a:p>
-            <a:pPr indent="0" marL="0">
-              <a:buNone/>
-            </a:pPr>
-            <a:r>
-              <a:rPr lang="en-US" sz="1220" dirty="0">
-                <a:solidFill>
-                  <a:srgbClr val="17364A"/>
-                </a:solidFill>
-                <a:latin typeface="Aptos" pitchFamily="34" charset="0"/>
-                <a:ea typeface="Aptos" pitchFamily="34" charset="-122"/>
-                <a:cs typeface="Aptos" pitchFamily="34" charset="-120"/>
-              </a:rPr>
-              <a:t>A risk score may look objective even when the data underrepresent.</a:t>
-            </a:r>
-            <a:endParaRPr lang="en-US" sz="1220" dirty="0"/>
-          </a:p>
-          <a:p>
-            <a:pPr indent="0" marL="0">
-              <a:buNone/>
-            </a:pPr>
-            <a:r>
-              <a:rPr lang="en-US" sz="1220" dirty="0">
-                <a:solidFill>
-                  <a:srgbClr val="17364A"/>
-                </a:solidFill>
-                <a:latin typeface="Aptos" pitchFamily="34" charset="0"/>
-                <a:ea typeface="Aptos" pitchFamily="34" charset="-122"/>
-                <a:cs typeface="Aptos" pitchFamily="34" charset="-120"/>
-              </a:rPr>
-              <a:t>A classification model may appear efficient while encoding.</a:t>
-            </a:r>
-            <a:endParaRPr lang="en-US" sz="1220" dirty="0"/>
-          </a:p>
-          <a:p>
-            <a:pPr indent="0" marL="0">
-              <a:buNone/>
-            </a:pPr>
-            <a:r>
-              <a:rPr lang="en-US" sz="1220" dirty="0">
-                <a:solidFill>
-                  <a:srgbClr val="17364A"/>
-                </a:solidFill>
-                <a:latin typeface="Aptos" pitchFamily="34" charset="0"/>
-                <a:ea typeface="Aptos" pitchFamily="34" charset="-122"/>
-                <a:cs typeface="Aptos" pitchFamily="34" charset="-120"/>
-              </a:rPr>
-              <a:t>Data quality engineering helps agencies identify these problems.</a:t>
-            </a:r>
-            <a:endParaRPr lang="en-US" sz="1220" dirty="0"/>
-          </a:p>
-        </p:txBody>
-      </p:sp>
-      <p:sp>
-        <p:nvSpPr>
-          <p:cNvPr id="16" name="Shape 14"/>
-          <p:cNvSpPr/>
-          <p:nvPr/>
-        </p:nvSpPr>
-        <p:spPr>
-          <a:xfrm>
-            <a:off x="7635240" y="4498848"/>
-            <a:ext cx="3474720" cy="1143000"/>
+            <a:pPr algn="ctr" indent="0" marL="0">
+              <a:buNone/>
+            </a:pPr>
+            <a:r>
+              <a:rPr lang="en-US" sz="880" b="1" dirty="0">
+                <a:solidFill>
+                  <a:srgbClr val="FFFFFF"/>
+                </a:solidFill>
+                <a:latin typeface="Aptos" pitchFamily="34" charset="0"/>
+                <a:ea typeface="Aptos" pitchFamily="34" charset="-122"/>
+                <a:cs typeface="Aptos" pitchFamily="34" charset="-120"/>
+              </a:rPr>
+              <a:t>Data</a:t>
+            </a:r>
+            <a:endParaRPr lang="en-US" sz="880" dirty="0"/>
+          </a:p>
+        </p:txBody>
+      </p:sp>
+      <p:sp>
+        <p:nvSpPr>
+          <p:cNvPr id="18" name="Shape 16"/>
+          <p:cNvSpPr/>
+          <p:nvPr/>
+        </p:nvSpPr>
+        <p:spPr>
+          <a:xfrm>
+            <a:off x="9817608" y="3399739"/>
+            <a:ext cx="164592" cy="0"/>
+          </a:xfrm>
+          <a:prstGeom prst="line">
+            <a:avLst/>
+          </a:prstGeom>
+          <a:noFill/>
+          <a:ln w="15240">
+            <a:solidFill>
+              <a:srgbClr val="8ABBD8"/>
+            </a:solidFill>
+            <a:prstDash val="solid"/>
+          </a:ln>
+        </p:spPr>
+      </p:sp>
+      <p:sp>
+        <p:nvSpPr>
+          <p:cNvPr id="19" name="Shape 17"/>
+          <p:cNvSpPr/>
+          <p:nvPr/>
+        </p:nvSpPr>
+        <p:spPr>
+          <a:xfrm>
+            <a:off x="8927592" y="3248863"/>
+            <a:ext cx="890016" cy="301752"/>
           </a:xfrm>
           <a:prstGeom prst="roundRect">
             <a:avLst>
-              <a:gd name="adj" fmla="val 9600"/>
+              <a:gd name="adj" fmla="val 24242"/>
+            </a:avLst>
+          </a:prstGeom>
+          <a:solidFill>
+            <a:srgbClr val="2F8A28"/>
+          </a:solidFill>
+          <a:ln w="12700">
+            <a:solidFill>
+              <a:srgbClr val="2F8A28"/>
+            </a:solidFill>
+            <a:prstDash val="solid"/>
+          </a:ln>
+        </p:spPr>
+      </p:sp>
+      <p:sp>
+        <p:nvSpPr>
+          <p:cNvPr id="20" name="Text 18"/>
+          <p:cNvSpPr/>
+          <p:nvPr/>
+        </p:nvSpPr>
+        <p:spPr>
+          <a:xfrm>
+            <a:off x="8964168" y="3322015"/>
+            <a:ext cx="816864" cy="146304"/>
+          </a:xfrm>
+          <a:prstGeom prst="rect">
+            <a:avLst/>
+          </a:prstGeom>
+          <a:noFill/>
+          <a:ln/>
+        </p:spPr>
+        <p:txBody>
+          <a:bodyPr wrap="square" lIns="0" tIns="0" rIns="0" bIns="0" rtlCol="0" anchor="ctr">
+            <a:normAutofit/>
+          </a:bodyPr>
+          <a:lstStyle/>
+          <a:p>
+            <a:pPr algn="ctr" indent="0" marL="0">
+              <a:buNone/>
+            </a:pPr>
+            <a:r>
+              <a:rPr lang="en-US" sz="880" b="1" dirty="0">
+                <a:solidFill>
+                  <a:srgbClr val="FFFFFF"/>
+                </a:solidFill>
+                <a:latin typeface="Aptos" pitchFamily="34" charset="0"/>
+                <a:ea typeface="Aptos" pitchFamily="34" charset="-122"/>
+                <a:cs typeface="Aptos" pitchFamily="34" charset="-120"/>
+              </a:rPr>
+              <a:t>Analysis</a:t>
+            </a:r>
+            <a:endParaRPr lang="en-US" sz="880" dirty="0"/>
+          </a:p>
+        </p:txBody>
+      </p:sp>
+      <p:sp>
+        <p:nvSpPr>
+          <p:cNvPr id="21" name="Shape 19"/>
+          <p:cNvSpPr/>
+          <p:nvPr/>
+        </p:nvSpPr>
+        <p:spPr>
+          <a:xfrm>
+            <a:off x="9982200" y="3248863"/>
+            <a:ext cx="890016" cy="301752"/>
+          </a:xfrm>
+          <a:prstGeom prst="roundRect">
+            <a:avLst>
+              <a:gd name="adj" fmla="val 24242"/>
+            </a:avLst>
+          </a:prstGeom>
+          <a:solidFill>
+            <a:srgbClr val="6A4CA3"/>
+          </a:solidFill>
+          <a:ln w="12700">
+            <a:solidFill>
+              <a:srgbClr val="6A4CA3"/>
+            </a:solidFill>
+            <a:prstDash val="solid"/>
+          </a:ln>
+        </p:spPr>
+      </p:sp>
+      <p:sp>
+        <p:nvSpPr>
+          <p:cNvPr id="22" name="Text 20"/>
+          <p:cNvSpPr/>
+          <p:nvPr/>
+        </p:nvSpPr>
+        <p:spPr>
+          <a:xfrm>
+            <a:off x="10018776" y="3322015"/>
+            <a:ext cx="816864" cy="146304"/>
+          </a:xfrm>
+          <a:prstGeom prst="rect">
+            <a:avLst/>
+          </a:prstGeom>
+          <a:noFill/>
+          <a:ln/>
+        </p:spPr>
+        <p:txBody>
+          <a:bodyPr wrap="square" lIns="0" tIns="0" rIns="0" bIns="0" rtlCol="0" anchor="ctr">
+            <a:normAutofit/>
+          </a:bodyPr>
+          <a:lstStyle/>
+          <a:p>
+            <a:pPr algn="ctr" indent="0" marL="0">
+              <a:buNone/>
+            </a:pPr>
+            <a:r>
+              <a:rPr lang="en-US" sz="880" b="1" dirty="0">
+                <a:solidFill>
+                  <a:srgbClr val="FFFFFF"/>
+                </a:solidFill>
+                <a:latin typeface="Aptos" pitchFamily="34" charset="0"/>
+                <a:ea typeface="Aptos" pitchFamily="34" charset="-122"/>
+                <a:cs typeface="Aptos" pitchFamily="34" charset="-120"/>
+              </a:rPr>
+              <a:t>Review</a:t>
+            </a:r>
+            <a:endParaRPr lang="en-US" sz="880" dirty="0"/>
+          </a:p>
+        </p:txBody>
+      </p:sp>
+      <p:sp>
+        <p:nvSpPr>
+          <p:cNvPr id="23" name="Text 21"/>
+          <p:cNvSpPr/>
+          <p:nvPr/>
+        </p:nvSpPr>
+        <p:spPr>
+          <a:xfrm>
+            <a:off x="7854696" y="3742639"/>
+            <a:ext cx="3035808" cy="158191"/>
+          </a:xfrm>
+          <a:prstGeom prst="rect">
+            <a:avLst/>
+          </a:prstGeom>
+          <a:noFill/>
+          <a:ln/>
+        </p:spPr>
+        <p:txBody>
+          <a:bodyPr wrap="square" lIns="254" tIns="254" rIns="254" bIns="254" rtlCol="0" anchor="t">
+            <a:normAutofit/>
+          </a:bodyPr>
+          <a:lstStyle/>
+          <a:p>
+            <a:pPr indent="0" marL="0">
+              <a:buNone/>
+            </a:pPr>
+            <a:r>
+              <a:rPr lang="en-US" sz="1120" dirty="0">
+                <a:solidFill>
+                  <a:srgbClr val="17364A"/>
+                </a:solidFill>
+                <a:latin typeface="Aptos" pitchFamily="34" charset="0"/>
+                <a:ea typeface="Aptos" pitchFamily="34" charset="-122"/>
+                <a:cs typeface="Aptos" pitchFamily="34" charset="-120"/>
+              </a:rPr>
+              <a:t>The important handoff is not from data to AI; it is from analysis to accountable human review.</a:t>
+            </a:r>
+            <a:endParaRPr lang="en-US" sz="1120" dirty="0"/>
+          </a:p>
+        </p:txBody>
+      </p:sp>
+      <p:sp>
+        <p:nvSpPr>
+          <p:cNvPr id="24" name="Shape 22"/>
+          <p:cNvSpPr/>
+          <p:nvPr/>
+        </p:nvSpPr>
+        <p:spPr>
+          <a:xfrm>
+            <a:off x="7635240" y="4184294"/>
+            <a:ext cx="3474720" cy="1466698"/>
+          </a:xfrm>
+          <a:prstGeom prst="roundRect">
+            <a:avLst>
+              <a:gd name="adj" fmla="val 7481"/>
             </a:avLst>
           </a:prstGeom>
           <a:solidFill>
@@ -15990,13 +16655,13 @@
       </p:sp>
       <p:sp>
         <p:nvSpPr>
-          <p:cNvPr id="17" name="Text 15"/>
-          <p:cNvSpPr/>
-          <p:nvPr/>
-        </p:nvSpPr>
-        <p:spPr>
-          <a:xfrm>
-            <a:off x="7799832" y="4645152"/>
+          <p:cNvPr id="25" name="Text 23"/>
+          <p:cNvSpPr/>
+          <p:nvPr/>
+        </p:nvSpPr>
+        <p:spPr>
+          <a:xfrm>
+            <a:off x="7799832" y="4330598"/>
             <a:ext cx="3145536" cy="256032"/>
           </a:xfrm>
           <a:prstGeom prst="rect">
@@ -16029,14 +16694,14 @@
       </p:sp>
       <p:sp>
         <p:nvSpPr>
-          <p:cNvPr id="18" name="Text 16"/>
-          <p:cNvSpPr/>
-          <p:nvPr/>
-        </p:nvSpPr>
-        <p:spPr>
-          <a:xfrm>
-            <a:off x="7799832" y="4974336"/>
-            <a:ext cx="3145536" cy="576072"/>
+          <p:cNvPr id="26" name="Text 24"/>
+          <p:cNvSpPr/>
+          <p:nvPr/>
+        </p:nvSpPr>
+        <p:spPr>
+          <a:xfrm>
+            <a:off x="7799832" y="4659782"/>
+            <a:ext cx="3145536" cy="899770"/>
           </a:xfrm>
           <a:prstGeom prst="rect">
             <a:avLst/>
@@ -16062,7 +16727,7 @@
                 <a:ea typeface="Aptos" pitchFamily="34" charset="-122"/>
                 <a:cs typeface="Aptos" pitchFamily="34" charset="-120"/>
               </a:rPr>
-              <a:t>Connect the concept to data quality, model performance, validation evidence, monitoring measures, and decisions that.</a:t>
+              <a:t>Connect the concept to data quality, model performance, validation evidence, monitoring measures, and decisions that remain under human control.</a:t>
             </a:r>
             <a:endParaRPr lang="en-US" sz="1320" dirty="0"/>
           </a:p>
@@ -16431,11 +17096,11 @@
         <p:spPr>
           <a:xfrm>
             <a:off x="7635240" y="1325880"/>
-            <a:ext cx="3474720" cy="1325880"/>
+            <a:ext cx="3474720" cy="1207008"/>
           </a:xfrm>
           <a:prstGeom prst="roundRect">
             <a:avLst>
-              <a:gd name="adj" fmla="val 8276"/>
+              <a:gd name="adj" fmla="val 9091"/>
             </a:avLst>
           </a:prstGeom>
           <a:solidFill>
@@ -16497,7 +17162,7 @@
         <p:spPr>
           <a:xfrm>
             <a:off x="7799832" y="1801368"/>
-            <a:ext cx="3145536" cy="758952"/>
+            <a:ext cx="3145536" cy="640080"/>
           </a:xfrm>
           <a:prstGeom prst="rect">
             <a:avLst/>
@@ -16537,12 +17202,12 @@
         </p:nvSpPr>
         <p:spPr>
           <a:xfrm>
-            <a:off x="7635240" y="2788920"/>
-            <a:ext cx="3474720" cy="1536192"/>
+            <a:off x="7635240" y="2670048"/>
+            <a:ext cx="3474720" cy="1377086"/>
           </a:xfrm>
           <a:prstGeom prst="roundRect">
             <a:avLst>
-              <a:gd name="adj" fmla="val 7143"/>
+              <a:gd name="adj" fmla="val 7968"/>
             </a:avLst>
           </a:prstGeom>
           <a:solidFill>
@@ -16564,7 +17229,7 @@
         </p:nvSpPr>
         <p:spPr>
           <a:xfrm>
-            <a:off x="7799832" y="2935224"/>
+            <a:off x="7799832" y="2816352"/>
             <a:ext cx="3145536" cy="256032"/>
           </a:xfrm>
           <a:prstGeom prst="rect">
@@ -16603,8 +17268,8 @@
         </p:nvSpPr>
         <p:spPr>
           <a:xfrm>
-            <a:off x="7818120" y="3300984"/>
-            <a:ext cx="3090672" cy="877824"/>
+            <a:off x="7818120" y="3182112"/>
+            <a:ext cx="3090672" cy="718718"/>
           </a:xfrm>
           <a:prstGeom prst="rect">
             <a:avLst/>
@@ -16678,12 +17343,12 @@
         </p:nvSpPr>
         <p:spPr>
           <a:xfrm>
-            <a:off x="7635240" y="4498848"/>
-            <a:ext cx="3474720" cy="1143000"/>
+            <a:off x="7635240" y="4184294"/>
+            <a:ext cx="3474720" cy="1466698"/>
           </a:xfrm>
           <a:prstGeom prst="roundRect">
             <a:avLst>
-              <a:gd name="adj" fmla="val 9600"/>
+              <a:gd name="adj" fmla="val 7481"/>
             </a:avLst>
           </a:prstGeom>
           <a:solidFill>
@@ -16705,7 +17370,7 @@
         </p:nvSpPr>
         <p:spPr>
           <a:xfrm>
-            <a:off x="7799832" y="4645152"/>
+            <a:off x="7799832" y="4330598"/>
             <a:ext cx="3145536" cy="256032"/>
           </a:xfrm>
           <a:prstGeom prst="rect">
@@ -16744,8 +17409,8 @@
         </p:nvSpPr>
         <p:spPr>
           <a:xfrm>
-            <a:off x="7799832" y="4974336"/>
-            <a:ext cx="3145536" cy="576072"/>
+            <a:off x="7799832" y="4659782"/>
+            <a:ext cx="3145536" cy="899770"/>
           </a:xfrm>
           <a:prstGeom prst="rect">
             <a:avLst/>
@@ -16771,7 +17436,7 @@
                 <a:ea typeface="Aptos" pitchFamily="34" charset="-122"/>
                 <a:cs typeface="Aptos" pitchFamily="34" charset="-120"/>
               </a:rPr>
-              <a:t>Connect the concept to data quality, model performance, validation evidence, monitoring measures, and decisions that.</a:t>
+              <a:t>Connect the concept to data quality, model performance, validation evidence, monitoring measures, and decisions that remain under human control.</a:t>
             </a:r>
             <a:endParaRPr lang="en-US" sz="1320" dirty="0"/>
           </a:p>
@@ -17140,11 +17805,11 @@
         <p:spPr>
           <a:xfrm>
             <a:off x="7635240" y="1325880"/>
-            <a:ext cx="3474720" cy="1325880"/>
+            <a:ext cx="3474720" cy="1207008"/>
           </a:xfrm>
           <a:prstGeom prst="roundRect">
             <a:avLst>
-              <a:gd name="adj" fmla="val 8276"/>
+              <a:gd name="adj" fmla="val 9091"/>
             </a:avLst>
           </a:prstGeom>
           <a:solidFill>
@@ -17206,7 +17871,7 @@
         <p:spPr>
           <a:xfrm>
             <a:off x="7799832" y="1801368"/>
-            <a:ext cx="3145536" cy="758952"/>
+            <a:ext cx="3145536" cy="640080"/>
           </a:xfrm>
           <a:prstGeom prst="rect">
             <a:avLst/>
@@ -17246,12 +17911,12 @@
         </p:nvSpPr>
         <p:spPr>
           <a:xfrm>
-            <a:off x="7635240" y="2788920"/>
-            <a:ext cx="3474720" cy="1536192"/>
+            <a:off x="7635240" y="2670048"/>
+            <a:ext cx="3474720" cy="1377086"/>
           </a:xfrm>
           <a:prstGeom prst="roundRect">
             <a:avLst>
-              <a:gd name="adj" fmla="val 7143"/>
+              <a:gd name="adj" fmla="val 7968"/>
             </a:avLst>
           </a:prstGeom>
           <a:solidFill>
@@ -17273,7 +17938,7 @@
         </p:nvSpPr>
         <p:spPr>
           <a:xfrm>
-            <a:off x="7799832" y="2935224"/>
+            <a:off x="7799832" y="2816352"/>
             <a:ext cx="3145536" cy="256032"/>
           </a:xfrm>
           <a:prstGeom prst="rect">
@@ -17312,8 +17977,8 @@
         </p:nvSpPr>
         <p:spPr>
           <a:xfrm>
-            <a:off x="7818120" y="3300984"/>
-            <a:ext cx="3090672" cy="877824"/>
+            <a:off x="7818120" y="3182112"/>
+            <a:ext cx="3090672" cy="718718"/>
           </a:xfrm>
           <a:prstGeom prst="rect">
             <a:avLst/>
@@ -17387,12 +18052,12 @@
         </p:nvSpPr>
         <p:spPr>
           <a:xfrm>
-            <a:off x="7635240" y="4498848"/>
-            <a:ext cx="3474720" cy="1143000"/>
+            <a:off x="7635240" y="4184294"/>
+            <a:ext cx="3474720" cy="1466698"/>
           </a:xfrm>
           <a:prstGeom prst="roundRect">
             <a:avLst>
-              <a:gd name="adj" fmla="val 9600"/>
+              <a:gd name="adj" fmla="val 7481"/>
             </a:avLst>
           </a:prstGeom>
           <a:solidFill>
@@ -17414,7 +18079,7 @@
         </p:nvSpPr>
         <p:spPr>
           <a:xfrm>
-            <a:off x="7799832" y="4645152"/>
+            <a:off x="7799832" y="4330598"/>
             <a:ext cx="3145536" cy="256032"/>
           </a:xfrm>
           <a:prstGeom prst="rect">
@@ -17453,8 +18118,8 @@
         </p:nvSpPr>
         <p:spPr>
           <a:xfrm>
-            <a:off x="7799832" y="4974336"/>
-            <a:ext cx="3145536" cy="576072"/>
+            <a:off x="7799832" y="4659782"/>
+            <a:ext cx="3145536" cy="899770"/>
           </a:xfrm>
           <a:prstGeom prst="rect">
             <a:avLst/>
@@ -17480,7 +18145,7 @@
                 <a:ea typeface="Aptos" pitchFamily="34" charset="-122"/>
                 <a:cs typeface="Aptos" pitchFamily="34" charset="-120"/>
               </a:rPr>
-              <a:t>Connect the concept to data quality, model performance, validation evidence, monitoring measures, and decisions that.</a:t>
+              <a:t>Connect the concept to data quality, model performance, validation evidence, monitoring measures, and decisions that remain under human control.</a:t>
             </a:r>
             <a:endParaRPr lang="en-US" sz="1320" dirty="0"/>
           </a:p>

--- a/downloads/presentations/modules/ops-200.pptx
+++ b/downloads/presentations/modules/ops-200.pptx
@@ -3341,8 +3341,8 @@
         </p:nvSpPr>
         <p:spPr>
           <a:xfrm>
-            <a:off x="868680" y="1508760"/>
-            <a:ext cx="6309360" cy="4160520"/>
+            <a:off x="822960" y="1463040"/>
+            <a:ext cx="6565392" cy="4343400"/>
           </a:xfrm>
           <a:prstGeom prst="rect">
             <a:avLst/>
@@ -3360,7 +3360,7 @@
               <a:buNone/>
             </a:pPr>
             <a:r>
-              <a:rPr lang="en-US" sz="2100" dirty="0">
+              <a:rPr lang="en-US" sz="1920" dirty="0">
                 <a:solidFill>
                   <a:srgbClr val="003A63"/>
                 </a:solidFill>
@@ -3370,14 +3370,14 @@
               </a:rPr>
               <a:t>• A health department may use AI to identify cases needing rapid follow-up.</a:t>
             </a:r>
-            <a:endParaRPr lang="en-US" sz="2100" dirty="0"/>
-          </a:p>
-          <a:p>
-            <a:pPr indent="0" marL="0">
-              <a:buNone/>
-            </a:pPr>
-            <a:r>
-              <a:rPr lang="en-US" sz="2100" dirty="0">
+            <a:endParaRPr lang="en-US" sz="1920" dirty="0"/>
+          </a:p>
+          <a:p>
+            <a:pPr indent="0" marL="0">
+              <a:buNone/>
+            </a:pPr>
+            <a:r>
+              <a:rPr lang="en-US" sz="1920" dirty="0">
                 <a:solidFill>
                   <a:srgbClr val="003A63"/>
                 </a:solidFill>
@@ -3385,16 +3385,16 @@
                 <a:ea typeface="Aptos" pitchFamily="34" charset="-122"/>
                 <a:cs typeface="Aptos" pitchFamily="34" charset="-120"/>
               </a:rPr>
-              <a:t>• If demographic fields are missing more often for some populations, the model may be less.</a:t>
-            </a:r>
-            <a:endParaRPr lang="en-US" sz="2100" dirty="0"/>
-          </a:p>
-          <a:p>
-            <a:pPr indent="0" marL="0">
-              <a:buNone/>
-            </a:pPr>
-            <a:r>
-              <a:rPr lang="en-US" sz="2100" dirty="0">
+              <a:t>• If demographic fields are missing more often for some populations, the model.</a:t>
+            </a:r>
+            <a:endParaRPr lang="en-US" sz="1920" dirty="0"/>
+          </a:p>
+          <a:p>
+            <a:pPr indent="0" marL="0">
+              <a:buNone/>
+            </a:pPr>
+            <a:r>
+              <a:rPr lang="en-US" sz="1920" dirty="0">
                 <a:solidFill>
                   <a:srgbClr val="003A63"/>
                 </a:solidFill>
@@ -3402,9 +3402,9 @@
                 <a:ea typeface="Aptos" pitchFamily="34" charset="-122"/>
                 <a:cs typeface="Aptos" pitchFamily="34" charset="-120"/>
               </a:rPr>
-              <a:t>• If the data feed from certain clinics is delayed, the prioritization queue may reflect.</a:t>
-            </a:r>
-            <a:endParaRPr lang="en-US" sz="2100" dirty="0"/>
+              <a:t>• If the data feed from certain clinics is delayed, the prioritization queue.</a:t>
+            </a:r>
+            <a:endParaRPr lang="en-US" sz="1920" dirty="0"/>
           </a:p>
         </p:txBody>
       </p:sp>
@@ -3416,12 +3416,12 @@
         </p:nvSpPr>
         <p:spPr>
           <a:xfrm>
-            <a:off x="7635240" y="1325880"/>
-            <a:ext cx="3474720" cy="1207008"/>
+            <a:off x="7543800" y="1325880"/>
+            <a:ext cx="3611880" cy="1261872"/>
           </a:xfrm>
           <a:prstGeom prst="roundRect">
             <a:avLst>
-              <a:gd name="adj" fmla="val 9091"/>
+              <a:gd name="adj" fmla="val 8696"/>
             </a:avLst>
           </a:prstGeom>
           <a:solidFill>
@@ -3443,8 +3443,8 @@
         </p:nvSpPr>
         <p:spPr>
           <a:xfrm>
-            <a:off x="7799832" y="1472184"/>
-            <a:ext cx="3145536" cy="256032"/>
+            <a:off x="7708392" y="1453896"/>
+            <a:ext cx="3282696" cy="228600"/>
           </a:xfrm>
           <a:prstGeom prst="rect">
             <a:avLst/>
@@ -3460,7 +3460,7 @@
               <a:buNone/>
             </a:pPr>
             <a:r>
-              <a:rPr lang="en-US" sz="1300" b="1" dirty="0">
+              <a:rPr lang="en-US" sz="1220" b="1" dirty="0">
                 <a:solidFill>
                   <a:srgbClr val="0068B7"/>
                 </a:solidFill>
@@ -3470,7 +3470,7 @@
               </a:rPr>
               <a:t>Data decision</a:t>
             </a:r>
-            <a:endParaRPr lang="en-US" sz="1300" dirty="0"/>
+            <a:endParaRPr lang="en-US" sz="1220" dirty="0"/>
           </a:p>
         </p:txBody>
       </p:sp>
@@ -3482,8 +3482,8 @@
         </p:nvSpPr>
         <p:spPr>
           <a:xfrm>
-            <a:off x="7799832" y="1801368"/>
-            <a:ext cx="3145536" cy="640080"/>
+            <a:off x="7708392" y="1764792"/>
+            <a:ext cx="3282696" cy="749808"/>
           </a:xfrm>
           <a:prstGeom prst="rect">
             <a:avLst/>
@@ -3501,7 +3501,7 @@
               <a:buNone/>
             </a:pPr>
             <a:r>
-              <a:rPr lang="en-US" sz="1320" dirty="0">
+              <a:rPr lang="en-US" sz="1220" dirty="0">
                 <a:solidFill>
                   <a:srgbClr val="17364A"/>
                 </a:solidFill>
@@ -3511,7 +3511,7 @@
               </a:rPr>
               <a:t>A health department may use AI to identify cases needing rapid follow-up.</a:t>
             </a:r>
-            <a:endParaRPr lang="en-US" sz="1320" dirty="0"/>
+            <a:endParaRPr lang="en-US" sz="1220" dirty="0"/>
           </a:p>
         </p:txBody>
       </p:sp>
@@ -3523,12 +3523,12 @@
         </p:nvSpPr>
         <p:spPr>
           <a:xfrm>
-            <a:off x="7635240" y="2670048"/>
-            <a:ext cx="3474720" cy="1377086"/>
+            <a:off x="7543800" y="2724912"/>
+            <a:ext cx="3611880" cy="1527048"/>
           </a:xfrm>
           <a:prstGeom prst="roundRect">
             <a:avLst>
-              <a:gd name="adj" fmla="val 7968"/>
+              <a:gd name="adj" fmla="val 7186"/>
             </a:avLst>
           </a:prstGeom>
           <a:solidFill>
@@ -3550,8 +3550,8 @@
         </p:nvSpPr>
         <p:spPr>
           <a:xfrm>
-            <a:off x="7799832" y="2816352"/>
-            <a:ext cx="3145536" cy="256032"/>
+            <a:off x="7708392" y="2852928"/>
+            <a:ext cx="3282696" cy="228600"/>
           </a:xfrm>
           <a:prstGeom prst="rect">
             <a:avLst/>
@@ -3567,7 +3567,7 @@
               <a:buNone/>
             </a:pPr>
             <a:r>
-              <a:rPr lang="en-US" sz="1300" b="1" dirty="0">
+              <a:rPr lang="en-US" sz="1220" b="1" dirty="0">
                 <a:solidFill>
                   <a:srgbClr val="0068B7"/>
                 </a:solidFill>
@@ -3577,7 +3577,7 @@
               </a:rPr>
               <a:t>Concept checkpoints</a:t>
             </a:r>
-            <a:endParaRPr lang="en-US" sz="1300" dirty="0"/>
+            <a:endParaRPr lang="en-US" sz="1220" dirty="0"/>
           </a:p>
         </p:txBody>
       </p:sp>
@@ -3589,8 +3589,8 @@
         </p:nvSpPr>
         <p:spPr>
           <a:xfrm>
-            <a:off x="7818120" y="3182112"/>
-            <a:ext cx="3090672" cy="718718"/>
+            <a:off x="7726680" y="3182112"/>
+            <a:ext cx="3227832" cy="960120"/>
           </a:xfrm>
           <a:prstGeom prst="rect">
             <a:avLst/>
@@ -3608,7 +3608,7 @@
               <a:buNone/>
             </a:pPr>
             <a:r>
-              <a:rPr lang="en-US" sz="1220" dirty="0">
+              <a:rPr lang="en-US" sz="1140" dirty="0">
                 <a:solidFill>
                   <a:srgbClr val="17364A"/>
                 </a:solidFill>
@@ -3616,16 +3616,16 @@
                 <a:ea typeface="Aptos" pitchFamily="34" charset="-122"/>
                 <a:cs typeface="Aptos" pitchFamily="34" charset="-120"/>
               </a:rPr>
-              <a:t>If demographic fields are missing more often for some populations,.</a:t>
-            </a:r>
-            <a:endParaRPr lang="en-US" sz="1220" dirty="0"/>
-          </a:p>
-          <a:p>
-            <a:pPr indent="0" marL="0">
-              <a:buNone/>
-            </a:pPr>
-            <a:r>
-              <a:rPr lang="en-US" sz="1220" dirty="0">
+              <a:t>If demographic fields are missing more often for.</a:t>
+            </a:r>
+            <a:endParaRPr lang="en-US" sz="1140" dirty="0"/>
+          </a:p>
+          <a:p>
+            <a:pPr indent="0" marL="0">
+              <a:buNone/>
+            </a:pPr>
+            <a:r>
+              <a:rPr lang="en-US" sz="1140" dirty="0">
                 <a:solidFill>
                   <a:srgbClr val="17364A"/>
                 </a:solidFill>
@@ -3633,16 +3633,16 @@
                 <a:ea typeface="Aptos" pitchFamily="34" charset="-122"/>
                 <a:cs typeface="Aptos" pitchFamily="34" charset="-120"/>
               </a:rPr>
-              <a:t>If the data feed from certain clinics is delayed, the.</a:t>
-            </a:r>
-            <a:endParaRPr lang="en-US" sz="1220" dirty="0"/>
-          </a:p>
-          <a:p>
-            <a:pPr indent="0" marL="0">
-              <a:buNone/>
-            </a:pPr>
-            <a:r>
-              <a:rPr lang="en-US" sz="1220" dirty="0">
+              <a:t>If the data feed from certain clinics is delayed,.</a:t>
+            </a:r>
+            <a:endParaRPr lang="en-US" sz="1140" dirty="0"/>
+          </a:p>
+          <a:p>
+            <a:pPr indent="0" marL="0">
+              <a:buNone/>
+            </a:pPr>
+            <a:r>
+              <a:rPr lang="en-US" sz="1140" dirty="0">
                 <a:solidFill>
                   <a:srgbClr val="17364A"/>
                 </a:solidFill>
@@ -3650,9 +3650,9 @@
                 <a:ea typeface="Aptos" pitchFamily="34" charset="-122"/>
                 <a:cs typeface="Aptos" pitchFamily="34" charset="-120"/>
               </a:rPr>
-              <a:t>A data quality review can reveal these issues before the tool is.</a:t>
-            </a:r>
-            <a:endParaRPr lang="en-US" sz="1220" dirty="0"/>
+              <a:t>A data quality review can reveal these issues.</a:t>
+            </a:r>
+            <a:endParaRPr lang="en-US" sz="1140" dirty="0"/>
           </a:p>
         </p:txBody>
       </p:sp>
@@ -3664,12 +3664,12 @@
         </p:nvSpPr>
         <p:spPr>
           <a:xfrm>
-            <a:off x="7635240" y="4184294"/>
-            <a:ext cx="3474720" cy="1466698"/>
+            <a:off x="7543800" y="4389120"/>
+            <a:ext cx="3611880" cy="1261872"/>
           </a:xfrm>
           <a:prstGeom prst="roundRect">
             <a:avLst>
-              <a:gd name="adj" fmla="val 7481"/>
+              <a:gd name="adj" fmla="val 8696"/>
             </a:avLst>
           </a:prstGeom>
           <a:solidFill>
@@ -3691,8 +3691,8 @@
         </p:nvSpPr>
         <p:spPr>
           <a:xfrm>
-            <a:off x="7799832" y="4330598"/>
-            <a:ext cx="3145536" cy="256032"/>
+            <a:off x="7708392" y="4517136"/>
+            <a:ext cx="3282696" cy="228600"/>
           </a:xfrm>
           <a:prstGeom prst="rect">
             <a:avLst/>
@@ -3708,7 +3708,7 @@
               <a:buNone/>
             </a:pPr>
             <a:r>
-              <a:rPr lang="en-US" sz="1300" b="1" dirty="0">
+              <a:rPr lang="en-US" sz="1220" b="1" dirty="0">
                 <a:solidFill>
                   <a:srgbClr val="0068B7"/>
                 </a:solidFill>
@@ -3718,7 +3718,7 @@
               </a:rPr>
               <a:t>How to validate</a:t>
             </a:r>
-            <a:endParaRPr lang="en-US" sz="1300" dirty="0"/>
+            <a:endParaRPr lang="en-US" sz="1220" dirty="0"/>
           </a:p>
         </p:txBody>
       </p:sp>
@@ -3730,8 +3730,8 @@
         </p:nvSpPr>
         <p:spPr>
           <a:xfrm>
-            <a:off x="7799832" y="4659782"/>
-            <a:ext cx="3145536" cy="899770"/>
+            <a:off x="7708392" y="4828032"/>
+            <a:ext cx="3282696" cy="749808"/>
           </a:xfrm>
           <a:prstGeom prst="rect">
             <a:avLst/>
@@ -3749,7 +3749,7 @@
               <a:buNone/>
             </a:pPr>
             <a:r>
-              <a:rPr lang="en-US" sz="1320" dirty="0">
+              <a:rPr lang="en-US" sz="1220" dirty="0">
                 <a:solidFill>
                   <a:srgbClr val="17364A"/>
                 </a:solidFill>
@@ -3757,9 +3757,9 @@
                 <a:ea typeface="Aptos" pitchFamily="34" charset="-122"/>
                 <a:cs typeface="Aptos" pitchFamily="34" charset="-120"/>
               </a:rPr>
-              <a:t>Connect the concept to data quality, model performance, validation evidence, monitoring measures, and decisions that remain under human control.</a:t>
-            </a:r>
-            <a:endParaRPr lang="en-US" sz="1320" dirty="0"/>
+              <a:t>Connect the concept to data quality, model performance, validation evidence,.</a:t>
+            </a:r>
+            <a:endParaRPr lang="en-US" sz="1220" dirty="0"/>
           </a:p>
         </p:txBody>
       </p:sp>
@@ -4050,8 +4050,8 @@
         </p:nvSpPr>
         <p:spPr>
           <a:xfrm>
-            <a:off x="868680" y="1508760"/>
-            <a:ext cx="6309360" cy="4160520"/>
+            <a:off x="822960" y="1463040"/>
+            <a:ext cx="6565392" cy="4343400"/>
           </a:xfrm>
           <a:prstGeom prst="rect">
             <a:avLst/>
@@ -4069,7 +4069,7 @@
               <a:buNone/>
             </a:pPr>
             <a:r>
-              <a:rPr lang="en-US" sz="2100" dirty="0">
+              <a:rPr lang="en-US" sz="1920" dirty="0">
                 <a:solidFill>
                   <a:srgbClr val="003A63"/>
                 </a:solidFill>
@@ -4077,16 +4077,16 @@
                 <a:ea typeface="Aptos" pitchFamily="34" charset="-122"/>
                 <a:cs typeface="Aptos" pitchFamily="34" charset="-120"/>
               </a:rPr>
-              <a:t>• Data quality engineering begins by defining required fields and acceptable thresholds for the.</a:t>
-            </a:r>
-            <a:endParaRPr lang="en-US" sz="2100" dirty="0"/>
-          </a:p>
-          <a:p>
-            <a:pPr indent="0" marL="0">
-              <a:buNone/>
-            </a:pPr>
-            <a:r>
-              <a:rPr lang="en-US" sz="2100" dirty="0">
+              <a:t>• Data quality engineering begins by defining required fields and acceptable.</a:t>
+            </a:r>
+            <a:endParaRPr lang="en-US" sz="1920" dirty="0"/>
+          </a:p>
+          <a:p>
+            <a:pPr indent="0" marL="0">
+              <a:buNone/>
+            </a:pPr>
+            <a:r>
+              <a:rPr lang="en-US" sz="1920" dirty="0">
                 <a:solidFill>
                   <a:srgbClr val="003A63"/>
                 </a:solidFill>
@@ -4094,16 +4094,16 @@
                 <a:ea typeface="Aptos" pitchFamily="34" charset="-122"/>
                 <a:cs typeface="Aptos" pitchFamily="34" charset="-120"/>
               </a:rPr>
-              <a:t>• For an AI-supported case triage workflow, required fields may include condition, lab evidence,.</a:t>
-            </a:r>
-            <a:endParaRPr lang="en-US" sz="2100" dirty="0"/>
-          </a:p>
-          <a:p>
-            <a:pPr indent="0" marL="0">
-              <a:buNone/>
-            </a:pPr>
-            <a:r>
-              <a:rPr lang="en-US" sz="2100" dirty="0">
+              <a:t>• For an AI-supported case triage workflow, required fields may include.</a:t>
+            </a:r>
+            <a:endParaRPr lang="en-US" sz="1920" dirty="0"/>
+          </a:p>
+          <a:p>
+            <a:pPr indent="0" marL="0">
+              <a:buNone/>
+            </a:pPr>
+            <a:r>
+              <a:rPr lang="en-US" sz="1920" dirty="0">
                 <a:solidFill>
                   <a:srgbClr val="003A63"/>
                 </a:solidFill>
@@ -4111,9 +4111,9 @@
                 <a:ea typeface="Aptos" pitchFamily="34" charset="-122"/>
                 <a:cs typeface="Aptos" pitchFamily="34" charset="-120"/>
               </a:rPr>
-              <a:t>• The agency should decide which missing fields stop automated support, which trigger a warning,.</a:t>
-            </a:r>
-            <a:endParaRPr lang="en-US" sz="2100" dirty="0"/>
+              <a:t>• The agency should decide which missing fields stop automated support, which.</a:t>
+            </a:r>
+            <a:endParaRPr lang="en-US" sz="1920" dirty="0"/>
           </a:p>
         </p:txBody>
       </p:sp>
@@ -4125,12 +4125,12 @@
         </p:nvSpPr>
         <p:spPr>
           <a:xfrm>
-            <a:off x="7635240" y="1325880"/>
-            <a:ext cx="3474720" cy="1255471"/>
+            <a:off x="7543800" y="1325880"/>
+            <a:ext cx="3611880" cy="1261872"/>
           </a:xfrm>
           <a:prstGeom prst="roundRect">
             <a:avLst>
-              <a:gd name="adj" fmla="val 8740"/>
+              <a:gd name="adj" fmla="val 8696"/>
             </a:avLst>
           </a:prstGeom>
           <a:solidFill>
@@ -4152,8 +4152,8 @@
         </p:nvSpPr>
         <p:spPr>
           <a:xfrm>
-            <a:off x="7799832" y="1472184"/>
-            <a:ext cx="3145536" cy="256032"/>
+            <a:off x="7708392" y="1453896"/>
+            <a:ext cx="3282696" cy="228600"/>
           </a:xfrm>
           <a:prstGeom prst="rect">
             <a:avLst/>
@@ -4169,7 +4169,7 @@
               <a:buNone/>
             </a:pPr>
             <a:r>
-              <a:rPr lang="en-US" sz="1300" b="1" dirty="0">
+              <a:rPr lang="en-US" sz="1220" b="1" dirty="0">
                 <a:solidFill>
                   <a:srgbClr val="0068B7"/>
                 </a:solidFill>
@@ -4179,7 +4179,7 @@
               </a:rPr>
               <a:t>Data decision</a:t>
             </a:r>
-            <a:endParaRPr lang="en-US" sz="1300" dirty="0"/>
+            <a:endParaRPr lang="en-US" sz="1220" dirty="0"/>
           </a:p>
         </p:txBody>
       </p:sp>
@@ -4191,8 +4191,8 @@
         </p:nvSpPr>
         <p:spPr>
           <a:xfrm>
-            <a:off x="7799832" y="1801368"/>
-            <a:ext cx="3145536" cy="688543"/>
+            <a:off x="7708392" y="1764792"/>
+            <a:ext cx="3282696" cy="749808"/>
           </a:xfrm>
           <a:prstGeom prst="rect">
             <a:avLst/>
@@ -4210,7 +4210,7 @@
               <a:buNone/>
             </a:pPr>
             <a:r>
-              <a:rPr lang="en-US" sz="1320" dirty="0">
+              <a:rPr lang="en-US" sz="1220" dirty="0">
                 <a:solidFill>
                   <a:srgbClr val="17364A"/>
                 </a:solidFill>
@@ -4218,9 +4218,9 @@
                 <a:ea typeface="Aptos" pitchFamily="34" charset="-122"/>
                 <a:cs typeface="Aptos" pitchFamily="34" charset="-120"/>
               </a:rPr>
-              <a:t>Data quality engineering begins by defining required fields and acceptable thresholds for the intended.</a:t>
-            </a:r>
-            <a:endParaRPr lang="en-US" sz="1320" dirty="0"/>
+              <a:t>Data quality engineering begins by defining required fields and acceptable.</a:t>
+            </a:r>
+            <a:endParaRPr lang="en-US" sz="1220" dirty="0"/>
           </a:p>
         </p:txBody>
       </p:sp>
@@ -4232,12 +4232,12 @@
         </p:nvSpPr>
         <p:spPr>
           <a:xfrm>
-            <a:off x="7635240" y="2718511"/>
-            <a:ext cx="3474720" cy="1328623"/>
+            <a:off x="7543800" y="2724912"/>
+            <a:ext cx="3611880" cy="1527048"/>
           </a:xfrm>
           <a:prstGeom prst="roundRect">
             <a:avLst>
-              <a:gd name="adj" fmla="val 8259"/>
+              <a:gd name="adj" fmla="val 7186"/>
             </a:avLst>
           </a:prstGeom>
           <a:solidFill>
@@ -4259,24 +4259,26 @@
         </p:nvSpPr>
         <p:spPr>
           <a:xfrm>
-            <a:off x="7799832" y="2846527"/>
-            <a:ext cx="3145536" cy="237744"/>
-          </a:xfrm>
-          <a:prstGeom prst="rect">
-            <a:avLst/>
-          </a:prstGeom>
-          <a:noFill/>
-          <a:ln/>
-        </p:spPr>
-        <p:txBody>
-          <a:bodyPr wrap="square" lIns="0" tIns="0" rIns="0" bIns="0" rtlCol="0" anchor="ctr"/>
-          <a:lstStyle/>
-          <a:p>
-            <a:pPr indent="0" marL="0">
-              <a:buNone/>
-            </a:pPr>
-            <a:r>
-              <a:rPr lang="en-US" sz="1250" b="1" dirty="0">
+            <a:off x="7708392" y="2852928"/>
+            <a:ext cx="3282696" cy="219456"/>
+          </a:xfrm>
+          <a:prstGeom prst="rect">
+            <a:avLst/>
+          </a:prstGeom>
+          <a:noFill/>
+          <a:ln/>
+        </p:spPr>
+        <p:txBody>
+          <a:bodyPr wrap="square" lIns="0" tIns="0" rIns="0" bIns="0" rtlCol="0" anchor="ctr">
+            <a:normAutofit/>
+          </a:bodyPr>
+          <a:lstStyle/>
+          <a:p>
+            <a:pPr indent="0" marL="0">
+              <a:buNone/>
+            </a:pPr>
+            <a:r>
+              <a:rPr lang="en-US" sz="1160" b="1" dirty="0">
                 <a:solidFill>
                   <a:srgbClr val="0068B7"/>
                 </a:solidFill>
@@ -4286,7 +4288,7 @@
               </a:rPr>
               <a:t>Data-to-decision flow</a:t>
             </a:r>
-            <a:endParaRPr lang="en-US" sz="1250" dirty="0"/>
+            <a:endParaRPr lang="en-US" sz="1160" dirty="0"/>
           </a:p>
         </p:txBody>
       </p:sp>
@@ -4298,7 +4300,7 @@
         </p:nvSpPr>
         <p:spPr>
           <a:xfrm>
-            <a:off x="8763000" y="3399739"/>
+            <a:off x="8717280" y="3406140"/>
             <a:ext cx="164592" cy="0"/>
           </a:xfrm>
           <a:prstGeom prst="line">
@@ -4321,8 +4323,8 @@
         </p:nvSpPr>
         <p:spPr>
           <a:xfrm>
-            <a:off x="7872984" y="3248863"/>
-            <a:ext cx="890016" cy="301752"/>
+            <a:off x="7781544" y="3255264"/>
+            <a:ext cx="935736" cy="301752"/>
           </a:xfrm>
           <a:prstGeom prst="roundRect">
             <a:avLst>
@@ -4348,8 +4350,8 @@
         </p:nvSpPr>
         <p:spPr>
           <a:xfrm>
-            <a:off x="7909560" y="3322015"/>
-            <a:ext cx="816864" cy="146304"/>
+            <a:off x="7818120" y="3328416"/>
+            <a:ext cx="862584" cy="146304"/>
           </a:xfrm>
           <a:prstGeom prst="rect">
             <a:avLst/>
@@ -4389,7 +4391,7 @@
         </p:nvSpPr>
         <p:spPr>
           <a:xfrm>
-            <a:off x="9817608" y="3399739"/>
+            <a:off x="9817608" y="3406140"/>
             <a:ext cx="164592" cy="0"/>
           </a:xfrm>
           <a:prstGeom prst="line">
@@ -4412,8 +4414,8 @@
         </p:nvSpPr>
         <p:spPr>
           <a:xfrm>
-            <a:off x="8927592" y="3248863"/>
-            <a:ext cx="890016" cy="301752"/>
+            <a:off x="8881872" y="3255264"/>
+            <a:ext cx="935736" cy="301752"/>
           </a:xfrm>
           <a:prstGeom prst="roundRect">
             <a:avLst>
@@ -4439,8 +4441,8 @@
         </p:nvSpPr>
         <p:spPr>
           <a:xfrm>
-            <a:off x="8964168" y="3322015"/>
-            <a:ext cx="816864" cy="146304"/>
+            <a:off x="8918448" y="3328416"/>
+            <a:ext cx="862584" cy="146304"/>
           </a:xfrm>
           <a:prstGeom prst="rect">
             <a:avLst/>
@@ -4480,8 +4482,8 @@
         </p:nvSpPr>
         <p:spPr>
           <a:xfrm>
-            <a:off x="9982200" y="3248863"/>
-            <a:ext cx="890016" cy="301752"/>
+            <a:off x="9982200" y="3255264"/>
+            <a:ext cx="935736" cy="301752"/>
           </a:xfrm>
           <a:prstGeom prst="roundRect">
             <a:avLst>
@@ -4507,8 +4509,8 @@
         </p:nvSpPr>
         <p:spPr>
           <a:xfrm>
-            <a:off x="10018776" y="3322015"/>
-            <a:ext cx="816864" cy="146304"/>
+            <a:off x="10018776" y="3328416"/>
+            <a:ext cx="862584" cy="146304"/>
           </a:xfrm>
           <a:prstGeom prst="rect">
             <a:avLst/>
@@ -4548,8 +4550,8 @@
         </p:nvSpPr>
         <p:spPr>
           <a:xfrm>
-            <a:off x="7854696" y="3742639"/>
-            <a:ext cx="3035808" cy="158191"/>
+            <a:off x="7763256" y="3749040"/>
+            <a:ext cx="3172968" cy="356616"/>
           </a:xfrm>
           <a:prstGeom prst="rect">
             <a:avLst/>
@@ -4567,7 +4569,7 @@
               <a:buNone/>
             </a:pPr>
             <a:r>
-              <a:rPr lang="en-US" sz="1120" dirty="0">
+              <a:rPr lang="en-US" sz="1040" dirty="0">
                 <a:solidFill>
                   <a:srgbClr val="17364A"/>
                 </a:solidFill>
@@ -4575,9 +4577,9 @@
                 <a:ea typeface="Aptos" pitchFamily="34" charset="-122"/>
                 <a:cs typeface="Aptos" pitchFamily="34" charset="-120"/>
               </a:rPr>
-              <a:t>The important handoff is not from data to AI; it is from analysis to accountable human review.</a:t>
-            </a:r>
-            <a:endParaRPr lang="en-US" sz="1120" dirty="0"/>
+              <a:t>The important handoff is not from data to AI; it is from analysis to.</a:t>
+            </a:r>
+            <a:endParaRPr lang="en-US" sz="1040" dirty="0"/>
           </a:p>
         </p:txBody>
       </p:sp>
@@ -4589,12 +4591,12 @@
         </p:nvSpPr>
         <p:spPr>
           <a:xfrm>
-            <a:off x="7635240" y="4184294"/>
-            <a:ext cx="3474720" cy="1466698"/>
+            <a:off x="7543800" y="4389120"/>
+            <a:ext cx="3611880" cy="1261872"/>
           </a:xfrm>
           <a:prstGeom prst="roundRect">
             <a:avLst>
-              <a:gd name="adj" fmla="val 7481"/>
+              <a:gd name="adj" fmla="val 8696"/>
             </a:avLst>
           </a:prstGeom>
           <a:solidFill>
@@ -4616,8 +4618,8 @@
         </p:nvSpPr>
         <p:spPr>
           <a:xfrm>
-            <a:off x="7799832" y="4330598"/>
-            <a:ext cx="3145536" cy="256032"/>
+            <a:off x="7708392" y="4517136"/>
+            <a:ext cx="3282696" cy="228600"/>
           </a:xfrm>
           <a:prstGeom prst="rect">
             <a:avLst/>
@@ -4633,7 +4635,7 @@
               <a:buNone/>
             </a:pPr>
             <a:r>
-              <a:rPr lang="en-US" sz="1300" b="1" dirty="0">
+              <a:rPr lang="en-US" sz="1220" b="1" dirty="0">
                 <a:solidFill>
                   <a:srgbClr val="0068B7"/>
                 </a:solidFill>
@@ -4643,7 +4645,7 @@
               </a:rPr>
               <a:t>How to validate</a:t>
             </a:r>
-            <a:endParaRPr lang="en-US" sz="1300" dirty="0"/>
+            <a:endParaRPr lang="en-US" sz="1220" dirty="0"/>
           </a:p>
         </p:txBody>
       </p:sp>
@@ -4655,8 +4657,8 @@
         </p:nvSpPr>
         <p:spPr>
           <a:xfrm>
-            <a:off x="7799832" y="4659782"/>
-            <a:ext cx="3145536" cy="899770"/>
+            <a:off x="7708392" y="4828032"/>
+            <a:ext cx="3282696" cy="749808"/>
           </a:xfrm>
           <a:prstGeom prst="rect">
             <a:avLst/>
@@ -4674,7 +4676,7 @@
               <a:buNone/>
             </a:pPr>
             <a:r>
-              <a:rPr lang="en-US" sz="1320" dirty="0">
+              <a:rPr lang="en-US" sz="1220" dirty="0">
                 <a:solidFill>
                   <a:srgbClr val="17364A"/>
                 </a:solidFill>
@@ -4682,9 +4684,9 @@
                 <a:ea typeface="Aptos" pitchFamily="34" charset="-122"/>
                 <a:cs typeface="Aptos" pitchFamily="34" charset="-120"/>
               </a:rPr>
-              <a:t>Connect the concept to data quality, model performance, validation evidence, monitoring measures, and decisions that remain under human control.</a:t>
-            </a:r>
-            <a:endParaRPr lang="en-US" sz="1320" dirty="0"/>
+              <a:t>Connect the concept to data quality, model performance, validation evidence,.</a:t>
+            </a:r>
+            <a:endParaRPr lang="en-US" sz="1220" dirty="0"/>
           </a:p>
         </p:txBody>
       </p:sp>
@@ -4975,8 +4977,8 @@
         </p:nvSpPr>
         <p:spPr>
           <a:xfrm>
-            <a:off x="868680" y="1508760"/>
-            <a:ext cx="6309360" cy="4160520"/>
+            <a:off x="822960" y="1463040"/>
+            <a:ext cx="6565392" cy="4343400"/>
           </a:xfrm>
           <a:prstGeom prst="rect">
             <a:avLst/>
@@ -4994,7 +4996,7 @@
               <a:buNone/>
             </a:pPr>
             <a:r>
-              <a:rPr lang="en-US" sz="2100" dirty="0">
+              <a:rPr lang="en-US" sz="1920" dirty="0">
                 <a:solidFill>
                   <a:srgbClr val="003A63"/>
                 </a:solidFill>
@@ -5004,14 +5006,14 @@
               </a:rPr>
               <a:t>• Confident output from weak data.</a:t>
             </a:r>
-            <a:endParaRPr lang="en-US" sz="2100" dirty="0"/>
-          </a:p>
-          <a:p>
-            <a:pPr indent="0" marL="0">
-              <a:buNone/>
-            </a:pPr>
-            <a:r>
-              <a:rPr lang="en-US" sz="2100" dirty="0">
+            <a:endParaRPr lang="en-US" sz="1920" dirty="0"/>
+          </a:p>
+          <a:p>
+            <a:pPr indent="0" marL="0">
+              <a:buNone/>
+            </a:pPr>
+            <a:r>
+              <a:rPr lang="en-US" sz="1920" dirty="0">
                 <a:solidFill>
                   <a:srgbClr val="003A63"/>
                 </a:solidFill>
@@ -5021,14 +5023,14 @@
               </a:rPr>
               <a:t>• AI may produce polished outputs from incomplete or biased data.</a:t>
             </a:r>
-            <a:endParaRPr lang="en-US" sz="2100" dirty="0"/>
-          </a:p>
-          <a:p>
-            <a:pPr indent="0" marL="0">
-              <a:buNone/>
-            </a:pPr>
-            <a:r>
-              <a:rPr lang="en-US" sz="2100" dirty="0">
+            <a:endParaRPr lang="en-US" sz="1920" dirty="0"/>
+          </a:p>
+          <a:p>
+            <a:pPr indent="0" marL="0">
+              <a:buNone/>
+            </a:pPr>
+            <a:r>
+              <a:rPr lang="en-US" sz="1920" dirty="0">
                 <a:solidFill>
                   <a:srgbClr val="003A63"/>
                 </a:solidFill>
@@ -5038,7 +5040,7 @@
               </a:rPr>
               <a:t>• Guardrails include uncertainty labeling, source review, and limits on use.</a:t>
             </a:r>
-            <a:endParaRPr lang="en-US" sz="2100" dirty="0"/>
+            <a:endParaRPr lang="en-US" sz="1920" dirty="0"/>
           </a:p>
         </p:txBody>
       </p:sp>
@@ -5050,12 +5052,12 @@
         </p:nvSpPr>
         <p:spPr>
           <a:xfrm>
-            <a:off x="7635240" y="1325880"/>
-            <a:ext cx="3474720" cy="1207008"/>
+            <a:off x="7543800" y="1325880"/>
+            <a:ext cx="3611880" cy="1261872"/>
           </a:xfrm>
           <a:prstGeom prst="roundRect">
             <a:avLst>
-              <a:gd name="adj" fmla="val 9091"/>
+              <a:gd name="adj" fmla="val 8696"/>
             </a:avLst>
           </a:prstGeom>
           <a:solidFill>
@@ -5077,8 +5079,8 @@
         </p:nvSpPr>
         <p:spPr>
           <a:xfrm>
-            <a:off x="7799832" y="1472184"/>
-            <a:ext cx="3145536" cy="256032"/>
+            <a:off x="7708392" y="1453896"/>
+            <a:ext cx="3282696" cy="228600"/>
           </a:xfrm>
           <a:prstGeom prst="rect">
             <a:avLst/>
@@ -5094,7 +5096,7 @@
               <a:buNone/>
             </a:pPr>
             <a:r>
-              <a:rPr lang="en-US" sz="1300" b="1" dirty="0">
+              <a:rPr lang="en-US" sz="1220" b="1" dirty="0">
                 <a:solidFill>
                   <a:srgbClr val="0068B7"/>
                 </a:solidFill>
@@ -5104,7 +5106,7 @@
               </a:rPr>
               <a:t>Risk check</a:t>
             </a:r>
-            <a:endParaRPr lang="en-US" sz="1300" dirty="0"/>
+            <a:endParaRPr lang="en-US" sz="1220" dirty="0"/>
           </a:p>
         </p:txBody>
       </p:sp>
@@ -5116,8 +5118,8 @@
         </p:nvSpPr>
         <p:spPr>
           <a:xfrm>
-            <a:off x="7799832" y="1801368"/>
-            <a:ext cx="3145536" cy="640080"/>
+            <a:off x="7708392" y="1764792"/>
+            <a:ext cx="3282696" cy="749808"/>
           </a:xfrm>
           <a:prstGeom prst="rect">
             <a:avLst/>
@@ -5135,7 +5137,7 @@
               <a:buNone/>
             </a:pPr>
             <a:r>
-              <a:rPr lang="en-US" sz="1320" dirty="0">
+              <a:rPr lang="en-US" sz="1220" dirty="0">
                 <a:solidFill>
                   <a:srgbClr val="17364A"/>
                 </a:solidFill>
@@ -5145,7 +5147,7 @@
               </a:rPr>
               <a:t>Confident output from weak data.</a:t>
             </a:r>
-            <a:endParaRPr lang="en-US" sz="1320" dirty="0"/>
+            <a:endParaRPr lang="en-US" sz="1220" dirty="0"/>
           </a:p>
         </p:txBody>
       </p:sp>
@@ -5157,12 +5159,12 @@
         </p:nvSpPr>
         <p:spPr>
           <a:xfrm>
-            <a:off x="7635240" y="2670048"/>
-            <a:ext cx="3474720" cy="1536192"/>
+            <a:off x="7543800" y="2724912"/>
+            <a:ext cx="3611880" cy="1527048"/>
           </a:xfrm>
           <a:prstGeom prst="roundRect">
             <a:avLst>
-              <a:gd name="adj" fmla="val 7143"/>
+              <a:gd name="adj" fmla="val 7186"/>
             </a:avLst>
           </a:prstGeom>
           <a:solidFill>
@@ -5184,8 +5186,8 @@
         </p:nvSpPr>
         <p:spPr>
           <a:xfrm>
-            <a:off x="7799832" y="2816352"/>
-            <a:ext cx="3145536" cy="256032"/>
+            <a:off x="7708392" y="2852928"/>
+            <a:ext cx="3282696" cy="228600"/>
           </a:xfrm>
           <a:prstGeom prst="rect">
             <a:avLst/>
@@ -5201,7 +5203,7 @@
               <a:buNone/>
             </a:pPr>
             <a:r>
-              <a:rPr lang="en-US" sz="1300" b="1" dirty="0">
+              <a:rPr lang="en-US" sz="1220" b="1" dirty="0">
                 <a:solidFill>
                   <a:srgbClr val="0068B7"/>
                 </a:solidFill>
@@ -5211,7 +5213,7 @@
               </a:rPr>
               <a:t>Concept checkpoints</a:t>
             </a:r>
-            <a:endParaRPr lang="en-US" sz="1300" dirty="0"/>
+            <a:endParaRPr lang="en-US" sz="1220" dirty="0"/>
           </a:p>
         </p:txBody>
       </p:sp>
@@ -5223,8 +5225,8 @@
         </p:nvSpPr>
         <p:spPr>
           <a:xfrm>
-            <a:off x="7818120" y="3182112"/>
-            <a:ext cx="3090672" cy="877824"/>
+            <a:off x="7726680" y="3182112"/>
+            <a:ext cx="3227832" cy="960120"/>
           </a:xfrm>
           <a:prstGeom prst="rect">
             <a:avLst/>
@@ -5242,7 +5244,7 @@
               <a:buNone/>
             </a:pPr>
             <a:r>
-              <a:rPr lang="en-US" sz="1220" dirty="0">
+              <a:rPr lang="en-US" sz="1140" dirty="0">
                 <a:solidFill>
                   <a:srgbClr val="17364A"/>
                 </a:solidFill>
@@ -5252,14 +5254,14 @@
               </a:rPr>
               <a:t>Fitness-for-use mismatch.</a:t>
             </a:r>
-            <a:endParaRPr lang="en-US" sz="1220" dirty="0"/>
-          </a:p>
-          <a:p>
-            <a:pPr indent="0" marL="0">
-              <a:buNone/>
-            </a:pPr>
-            <a:r>
-              <a:rPr lang="en-US" sz="1220" dirty="0">
+            <a:endParaRPr lang="en-US" sz="1140" dirty="0"/>
+          </a:p>
+          <a:p>
+            <a:pPr indent="0" marL="0">
+              <a:buNone/>
+            </a:pPr>
+            <a:r>
+              <a:rPr lang="en-US" sz="1140" dirty="0">
                 <a:solidFill>
                   <a:srgbClr val="17364A"/>
                 </a:solidFill>
@@ -5267,16 +5269,16 @@
                 <a:ea typeface="Aptos" pitchFamily="34" charset="-122"/>
                 <a:cs typeface="Aptos" pitchFamily="34" charset="-120"/>
               </a:rPr>
-              <a:t>Data suitable for one purpose may be unsafe for another.</a:t>
-            </a:r>
-            <a:endParaRPr lang="en-US" sz="1220" dirty="0"/>
-          </a:p>
-          <a:p>
-            <a:pPr indent="0" marL="0">
-              <a:buNone/>
-            </a:pPr>
-            <a:r>
-              <a:rPr lang="en-US" sz="1220" dirty="0">
+              <a:t>Data suitable for one purpose may be unsafe for.</a:t>
+            </a:r>
+            <a:endParaRPr lang="en-US" sz="1140" dirty="0"/>
+          </a:p>
+          <a:p>
+            <a:pPr indent="0" marL="0">
+              <a:buNone/>
+            </a:pPr>
+            <a:r>
+              <a:rPr lang="en-US" sz="1140" dirty="0">
                 <a:solidFill>
                   <a:srgbClr val="17364A"/>
                 </a:solidFill>
@@ -5284,9 +5286,9 @@
                 <a:ea typeface="Aptos" pitchFamily="34" charset="-122"/>
                 <a:cs typeface="Aptos" pitchFamily="34" charset="-120"/>
               </a:rPr>
-              <a:t>Guardrails include use-case-specific quality criteria and approval.</a:t>
-            </a:r>
-            <a:endParaRPr lang="en-US" sz="1220" dirty="0"/>
+              <a:t>Guardrails include use-case-specific quality.</a:t>
+            </a:r>
+            <a:endParaRPr lang="en-US" sz="1140" dirty="0"/>
           </a:p>
         </p:txBody>
       </p:sp>
@@ -5298,12 +5300,12 @@
         </p:nvSpPr>
         <p:spPr>
           <a:xfrm>
-            <a:off x="7635240" y="4343400"/>
-            <a:ext cx="3474720" cy="1255471"/>
+            <a:off x="7543800" y="4389120"/>
+            <a:ext cx="3611880" cy="1261872"/>
           </a:xfrm>
           <a:prstGeom prst="roundRect">
             <a:avLst>
-              <a:gd name="adj" fmla="val 8740"/>
+              <a:gd name="adj" fmla="val 8696"/>
             </a:avLst>
           </a:prstGeom>
           <a:solidFill>
@@ -5325,8 +5327,8 @@
         </p:nvSpPr>
         <p:spPr>
           <a:xfrm>
-            <a:off x="7799832" y="4489704"/>
-            <a:ext cx="3145536" cy="256032"/>
+            <a:off x="7708392" y="4517136"/>
+            <a:ext cx="3282696" cy="228600"/>
           </a:xfrm>
           <a:prstGeom prst="rect">
             <a:avLst/>
@@ -5342,7 +5344,7 @@
               <a:buNone/>
             </a:pPr>
             <a:r>
-              <a:rPr lang="en-US" sz="1300" b="1" dirty="0">
+              <a:rPr lang="en-US" sz="1220" b="1" dirty="0">
                 <a:solidFill>
                   <a:srgbClr val="0068B7"/>
                 </a:solidFill>
@@ -5352,7 +5354,7 @@
               </a:rPr>
               <a:t>Safeguard to plan</a:t>
             </a:r>
-            <a:endParaRPr lang="en-US" sz="1300" dirty="0"/>
+            <a:endParaRPr lang="en-US" sz="1220" dirty="0"/>
           </a:p>
         </p:txBody>
       </p:sp>
@@ -5364,8 +5366,8 @@
         </p:nvSpPr>
         <p:spPr>
           <a:xfrm>
-            <a:off x="7799832" y="4818888"/>
-            <a:ext cx="3145536" cy="688543"/>
+            <a:off x="7708392" y="4828032"/>
+            <a:ext cx="3282696" cy="749808"/>
           </a:xfrm>
           <a:prstGeom prst="rect">
             <a:avLst/>
@@ -5383,7 +5385,7 @@
               <a:buNone/>
             </a:pPr>
             <a:r>
-              <a:rPr lang="en-US" sz="1320" dirty="0">
+              <a:rPr lang="en-US" sz="1220" dirty="0">
                 <a:solidFill>
                   <a:srgbClr val="17364A"/>
                 </a:solidFill>
@@ -5391,9 +5393,9 @@
                 <a:ea typeface="Aptos" pitchFamily="34" charset="-122"/>
                 <a:cs typeface="Aptos" pitchFamily="34" charset="-120"/>
               </a:rPr>
-              <a:t>Identify what could go wrong, who could be affected, what safeguards are needed, and what evidence should be reviewed before use.</a:t>
-            </a:r>
-            <a:endParaRPr lang="en-US" sz="1320" dirty="0"/>
+              <a:t>Identify what could go wrong, who could be affected, what safeguards are needed,.</a:t>
+            </a:r>
+            <a:endParaRPr lang="en-US" sz="1220" dirty="0"/>
           </a:p>
         </p:txBody>
       </p:sp>
@@ -5684,8 +5686,8 @@
         </p:nvSpPr>
         <p:spPr>
           <a:xfrm>
-            <a:off x="868680" y="1508760"/>
-            <a:ext cx="6309360" cy="4160520"/>
+            <a:off x="822960" y="1463040"/>
+            <a:ext cx="6565392" cy="4343400"/>
           </a:xfrm>
           <a:prstGeom prst="rect">
             <a:avLst/>
@@ -5703,7 +5705,7 @@
               <a:buNone/>
             </a:pPr>
             <a:r>
-              <a:rPr lang="en-US" sz="2100" dirty="0">
+              <a:rPr lang="en-US" sz="1920" dirty="0">
                 <a:solidFill>
                   <a:srgbClr val="003A63"/>
                 </a:solidFill>
@@ -5713,14 +5715,14 @@
               </a:rPr>
               <a:t>• Equity blind spots.</a:t>
             </a:r>
-            <a:endParaRPr lang="en-US" sz="2100" dirty="0"/>
-          </a:p>
-          <a:p>
-            <a:pPr indent="0" marL="0">
-              <a:buNone/>
-            </a:pPr>
-            <a:r>
-              <a:rPr lang="en-US" sz="2100" dirty="0">
+            <a:endParaRPr lang="en-US" sz="1920" dirty="0"/>
+          </a:p>
+          <a:p>
+            <a:pPr indent="0" marL="0">
+              <a:buNone/>
+            </a:pPr>
+            <a:r>
+              <a:rPr lang="en-US" sz="1920" dirty="0">
                 <a:solidFill>
                   <a:srgbClr val="003A63"/>
                 </a:solidFill>
@@ -5730,14 +5732,14 @@
               </a:rPr>
               <a:t>• Missingness and underrepresentation may affect some groups more than others.</a:t>
             </a:r>
-            <a:endParaRPr lang="en-US" sz="2100" dirty="0"/>
-          </a:p>
-          <a:p>
-            <a:pPr indent="0" marL="0">
-              <a:buNone/>
-            </a:pPr>
-            <a:r>
-              <a:rPr lang="en-US" sz="2100" dirty="0">
+            <a:endParaRPr lang="en-US" sz="1920" dirty="0"/>
+          </a:p>
+          <a:p>
+            <a:pPr indent="0" marL="0">
+              <a:buNone/>
+            </a:pPr>
+            <a:r>
+              <a:rPr lang="en-US" sz="1920" dirty="0">
                 <a:solidFill>
                   <a:srgbClr val="003A63"/>
                 </a:solidFill>
@@ -5745,9 +5747,9 @@
                 <a:ea typeface="Aptos" pitchFamily="34" charset="-122"/>
                 <a:cs typeface="Aptos" pitchFamily="34" charset="-120"/>
               </a:rPr>
-              <a:t>• Guardrails include subgroup review, community context, and documentation of limitations.</a:t>
-            </a:r>
-            <a:endParaRPr lang="en-US" sz="2100" dirty="0"/>
+              <a:t>• Guardrails include subgroup review, community context, and documentation of.</a:t>
+            </a:r>
+            <a:endParaRPr lang="en-US" sz="1920" dirty="0"/>
           </a:p>
         </p:txBody>
       </p:sp>
@@ -5759,12 +5761,12 @@
         </p:nvSpPr>
         <p:spPr>
           <a:xfrm>
-            <a:off x="7635240" y="1325880"/>
-            <a:ext cx="3474720" cy="1207008"/>
+            <a:off x="7543800" y="1325880"/>
+            <a:ext cx="3611880" cy="1261872"/>
           </a:xfrm>
           <a:prstGeom prst="roundRect">
             <a:avLst>
-              <a:gd name="adj" fmla="val 9091"/>
+              <a:gd name="adj" fmla="val 8696"/>
             </a:avLst>
           </a:prstGeom>
           <a:solidFill>
@@ -5786,8 +5788,8 @@
         </p:nvSpPr>
         <p:spPr>
           <a:xfrm>
-            <a:off x="7799832" y="1472184"/>
-            <a:ext cx="3145536" cy="256032"/>
+            <a:off x="7708392" y="1453896"/>
+            <a:ext cx="3282696" cy="228600"/>
           </a:xfrm>
           <a:prstGeom prst="rect">
             <a:avLst/>
@@ -5803,7 +5805,7 @@
               <a:buNone/>
             </a:pPr>
             <a:r>
-              <a:rPr lang="en-US" sz="1300" b="1" dirty="0">
+              <a:rPr lang="en-US" sz="1220" b="1" dirty="0">
                 <a:solidFill>
                   <a:srgbClr val="0068B7"/>
                 </a:solidFill>
@@ -5813,7 +5815,7 @@
               </a:rPr>
               <a:t>Risk check</a:t>
             </a:r>
-            <a:endParaRPr lang="en-US" sz="1300" dirty="0"/>
+            <a:endParaRPr lang="en-US" sz="1220" dirty="0"/>
           </a:p>
         </p:txBody>
       </p:sp>
@@ -5825,8 +5827,8 @@
         </p:nvSpPr>
         <p:spPr>
           <a:xfrm>
-            <a:off x="7799832" y="1801368"/>
-            <a:ext cx="3145536" cy="640080"/>
+            <a:off x="7708392" y="1764792"/>
+            <a:ext cx="3282696" cy="749808"/>
           </a:xfrm>
           <a:prstGeom prst="rect">
             <a:avLst/>
@@ -5844,7 +5846,7 @@
               <a:buNone/>
             </a:pPr>
             <a:r>
-              <a:rPr lang="en-US" sz="1320" dirty="0">
+              <a:rPr lang="en-US" sz="1220" dirty="0">
                 <a:solidFill>
                   <a:srgbClr val="17364A"/>
                 </a:solidFill>
@@ -5854,7 +5856,7 @@
               </a:rPr>
               <a:t>Equity blind spots.</a:t>
             </a:r>
-            <a:endParaRPr lang="en-US" sz="1320" dirty="0"/>
+            <a:endParaRPr lang="en-US" sz="1220" dirty="0"/>
           </a:p>
         </p:txBody>
       </p:sp>
@@ -5866,12 +5868,12 @@
         </p:nvSpPr>
         <p:spPr>
           <a:xfrm>
-            <a:off x="7635240" y="2670048"/>
-            <a:ext cx="3474720" cy="1536192"/>
+            <a:off x="7543800" y="2724912"/>
+            <a:ext cx="3611880" cy="1527048"/>
           </a:xfrm>
           <a:prstGeom prst="roundRect">
             <a:avLst>
-              <a:gd name="adj" fmla="val 7143"/>
+              <a:gd name="adj" fmla="val 7186"/>
             </a:avLst>
           </a:prstGeom>
           <a:solidFill>
@@ -5893,8 +5895,8 @@
         </p:nvSpPr>
         <p:spPr>
           <a:xfrm>
-            <a:off x="7799832" y="2816352"/>
-            <a:ext cx="3145536" cy="256032"/>
+            <a:off x="7708392" y="2852928"/>
+            <a:ext cx="3282696" cy="228600"/>
           </a:xfrm>
           <a:prstGeom prst="rect">
             <a:avLst/>
@@ -5910,7 +5912,7 @@
               <a:buNone/>
             </a:pPr>
             <a:r>
-              <a:rPr lang="en-US" sz="1300" b="1" dirty="0">
+              <a:rPr lang="en-US" sz="1220" b="1" dirty="0">
                 <a:solidFill>
                   <a:srgbClr val="0068B7"/>
                 </a:solidFill>
@@ -5920,7 +5922,7 @@
               </a:rPr>
               <a:t>Concept checkpoints</a:t>
             </a:r>
-            <a:endParaRPr lang="en-US" sz="1300" dirty="0"/>
+            <a:endParaRPr lang="en-US" sz="1220" dirty="0"/>
           </a:p>
         </p:txBody>
       </p:sp>
@@ -5932,8 +5934,8 @@
         </p:nvSpPr>
         <p:spPr>
           <a:xfrm>
-            <a:off x="7818120" y="3182112"/>
-            <a:ext cx="3090672" cy="877824"/>
+            <a:off x="7726680" y="3182112"/>
+            <a:ext cx="3227832" cy="960120"/>
           </a:xfrm>
           <a:prstGeom prst="rect">
             <a:avLst/>
@@ -5951,7 +5953,7 @@
               <a:buNone/>
             </a:pPr>
             <a:r>
-              <a:rPr lang="en-US" sz="1220" dirty="0">
+              <a:rPr lang="en-US" sz="1140" dirty="0">
                 <a:solidFill>
                   <a:srgbClr val="17364A"/>
                 </a:solidFill>
@@ -5961,14 +5963,14 @@
               </a:rPr>
               <a:t>Equity blind spots.</a:t>
             </a:r>
-            <a:endParaRPr lang="en-US" sz="1220" dirty="0"/>
-          </a:p>
-          <a:p>
-            <a:pPr indent="0" marL="0">
-              <a:buNone/>
-            </a:pPr>
-            <a:r>
-              <a:rPr lang="en-US" sz="1220" dirty="0">
+            <a:endParaRPr lang="en-US" sz="1140" dirty="0"/>
+          </a:p>
+          <a:p>
+            <a:pPr indent="0" marL="0">
+              <a:buNone/>
+            </a:pPr>
+            <a:r>
+              <a:rPr lang="en-US" sz="1140" dirty="0">
                 <a:solidFill>
                   <a:srgbClr val="17364A"/>
                 </a:solidFill>
@@ -5976,16 +5978,16 @@
                 <a:ea typeface="Aptos" pitchFamily="34" charset="-122"/>
                 <a:cs typeface="Aptos" pitchFamily="34" charset="-120"/>
               </a:rPr>
-              <a:t>Missingness and underrepresentation may affect some groups more.</a:t>
-            </a:r>
-            <a:endParaRPr lang="en-US" sz="1220" dirty="0"/>
-          </a:p>
-          <a:p>
-            <a:pPr indent="0" marL="0">
-              <a:buNone/>
-            </a:pPr>
-            <a:r>
-              <a:rPr lang="en-US" sz="1220" dirty="0">
+              <a:t>Missingness and underrepresentation may affect.</a:t>
+            </a:r>
+            <a:endParaRPr lang="en-US" sz="1140" dirty="0"/>
+          </a:p>
+          <a:p>
+            <a:pPr indent="0" marL="0">
+              <a:buNone/>
+            </a:pPr>
+            <a:r>
+              <a:rPr lang="en-US" sz="1140" dirty="0">
                 <a:solidFill>
                   <a:srgbClr val="17364A"/>
                 </a:solidFill>
@@ -5993,9 +5995,9 @@
                 <a:ea typeface="Aptos" pitchFamily="34" charset="-122"/>
                 <a:cs typeface="Aptos" pitchFamily="34" charset="-120"/>
               </a:rPr>
-              <a:t>Guardrails include subgroup review, community context, and.</a:t>
-            </a:r>
-            <a:endParaRPr lang="en-US" sz="1220" dirty="0"/>
+              <a:t>Guardrails include subgroup review, community.</a:t>
+            </a:r>
+            <a:endParaRPr lang="en-US" sz="1140" dirty="0"/>
           </a:p>
         </p:txBody>
       </p:sp>
@@ -6007,12 +6009,12 @@
         </p:nvSpPr>
         <p:spPr>
           <a:xfrm>
-            <a:off x="7635240" y="4343400"/>
-            <a:ext cx="3474720" cy="1255471"/>
+            <a:off x="7543800" y="4389120"/>
+            <a:ext cx="3611880" cy="1261872"/>
           </a:xfrm>
           <a:prstGeom prst="roundRect">
             <a:avLst>
-              <a:gd name="adj" fmla="val 8740"/>
+              <a:gd name="adj" fmla="val 8696"/>
             </a:avLst>
           </a:prstGeom>
           <a:solidFill>
@@ -6034,8 +6036,8 @@
         </p:nvSpPr>
         <p:spPr>
           <a:xfrm>
-            <a:off x="7799832" y="4489704"/>
-            <a:ext cx="3145536" cy="256032"/>
+            <a:off x="7708392" y="4517136"/>
+            <a:ext cx="3282696" cy="228600"/>
           </a:xfrm>
           <a:prstGeom prst="rect">
             <a:avLst/>
@@ -6051,7 +6053,7 @@
               <a:buNone/>
             </a:pPr>
             <a:r>
-              <a:rPr lang="en-US" sz="1300" b="1" dirty="0">
+              <a:rPr lang="en-US" sz="1220" b="1" dirty="0">
                 <a:solidFill>
                   <a:srgbClr val="0068B7"/>
                 </a:solidFill>
@@ -6061,7 +6063,7 @@
               </a:rPr>
               <a:t>Safeguard to plan</a:t>
             </a:r>
-            <a:endParaRPr lang="en-US" sz="1300" dirty="0"/>
+            <a:endParaRPr lang="en-US" sz="1220" dirty="0"/>
           </a:p>
         </p:txBody>
       </p:sp>
@@ -6073,8 +6075,8 @@
         </p:nvSpPr>
         <p:spPr>
           <a:xfrm>
-            <a:off x="7799832" y="4818888"/>
-            <a:ext cx="3145536" cy="688543"/>
+            <a:off x="7708392" y="4828032"/>
+            <a:ext cx="3282696" cy="749808"/>
           </a:xfrm>
           <a:prstGeom prst="rect">
             <a:avLst/>
@@ -6092,7 +6094,7 @@
               <a:buNone/>
             </a:pPr>
             <a:r>
-              <a:rPr lang="en-US" sz="1320" dirty="0">
+              <a:rPr lang="en-US" sz="1220" dirty="0">
                 <a:solidFill>
                   <a:srgbClr val="17364A"/>
                 </a:solidFill>
@@ -6100,9 +6102,9 @@
                 <a:ea typeface="Aptos" pitchFamily="34" charset="-122"/>
                 <a:cs typeface="Aptos" pitchFamily="34" charset="-120"/>
               </a:rPr>
-              <a:t>Identify what could go wrong, who could be affected, what safeguards are needed, and what evidence should be reviewed before use.</a:t>
-            </a:r>
-            <a:endParaRPr lang="en-US" sz="1320" dirty="0"/>
+              <a:t>Identify what could go wrong, who could be affected, what safeguards are needed,.</a:t>
+            </a:r>
+            <a:endParaRPr lang="en-US" sz="1220" dirty="0"/>
           </a:p>
         </p:txBody>
       </p:sp>
@@ -6393,8 +6395,8 @@
         </p:nvSpPr>
         <p:spPr>
           <a:xfrm>
-            <a:off x="868680" y="1508760"/>
-            <a:ext cx="6309360" cy="4160520"/>
+            <a:off x="822960" y="1463040"/>
+            <a:ext cx="6565392" cy="4343400"/>
           </a:xfrm>
           <a:prstGeom prst="rect">
             <a:avLst/>
@@ -6412,7 +6414,7 @@
               <a:buNone/>
             </a:pPr>
             <a:r>
-              <a:rPr lang="en-US" sz="2100" dirty="0">
+              <a:rPr lang="en-US" sz="1920" dirty="0">
                 <a:solidFill>
                   <a:srgbClr val="003A63"/>
                 </a:solidFill>
@@ -6420,16 +6422,16 @@
                 <a:ea typeface="Aptos" pitchFamily="34" charset="-122"/>
                 <a:cs typeface="Aptos" pitchFamily="34" charset="-120"/>
               </a:rPr>
-              <a:t>• Generative AI may summarize datasets or records, but the output must reflect missingness and.</a:t>
-            </a:r>
-            <a:endParaRPr lang="en-US" sz="2100" dirty="0"/>
-          </a:p>
-          <a:p>
-            <a:pPr indent="0" marL="0">
-              <a:buNone/>
-            </a:pPr>
-            <a:r>
-              <a:rPr lang="en-US" sz="2100" dirty="0">
+              <a:t>• Generative AI may summarize datasets or records, but the output must reflect.</a:t>
+            </a:r>
+            <a:endParaRPr lang="en-US" sz="1920" dirty="0"/>
+          </a:p>
+          <a:p>
+            <a:pPr indent="0" marL="0">
+              <a:buNone/>
+            </a:pPr>
+            <a:r>
+              <a:rPr lang="en-US" sz="1920" dirty="0">
                 <a:solidFill>
                   <a:srgbClr val="003A63"/>
                 </a:solidFill>
@@ -6437,16 +6439,16 @@
                 <a:ea typeface="Aptos" pitchFamily="34" charset="-122"/>
                 <a:cs typeface="Aptos" pitchFamily="34" charset="-120"/>
               </a:rPr>
-              <a:t>• Predictive analytics depend heavily on feature quality, label quality, and representative.</a:t>
-            </a:r>
-            <a:endParaRPr lang="en-US" sz="2100" dirty="0"/>
-          </a:p>
-          <a:p>
-            <a:pPr indent="0" marL="0">
-              <a:buNone/>
-            </a:pPr>
-            <a:r>
-              <a:rPr lang="en-US" sz="2100" dirty="0">
+              <a:t>• Predictive analytics depend heavily on feature quality, label quality, and.</a:t>
+            </a:r>
+            <a:endParaRPr lang="en-US" sz="1920" dirty="0"/>
+          </a:p>
+          <a:p>
+            <a:pPr indent="0" marL="0">
+              <a:buNone/>
+            </a:pPr>
+            <a:r>
+              <a:rPr lang="en-US" sz="1920" dirty="0">
                 <a:solidFill>
                   <a:srgbClr val="003A63"/>
                 </a:solidFill>
@@ -6454,9 +6456,9 @@
                 <a:ea typeface="Aptos" pitchFamily="34" charset="-122"/>
                 <a:cs typeface="Aptos" pitchFamily="34" charset="-120"/>
               </a:rPr>
-              <a:t>• NLP may be affected by language variation, abbreviations, and documentation practices.</a:t>
-            </a:r>
-            <a:endParaRPr lang="en-US" sz="2100" dirty="0"/>
+              <a:t>• NLP may be affected by language variation, abbreviations, and documentation.</a:t>
+            </a:r>
+            <a:endParaRPr lang="en-US" sz="1920" dirty="0"/>
           </a:p>
         </p:txBody>
       </p:sp>
@@ -6468,12 +6470,12 @@
         </p:nvSpPr>
         <p:spPr>
           <a:xfrm>
-            <a:off x="7635240" y="1325880"/>
-            <a:ext cx="3474720" cy="1255471"/>
+            <a:off x="7543800" y="1325880"/>
+            <a:ext cx="3611880" cy="1261872"/>
           </a:xfrm>
           <a:prstGeom prst="roundRect">
             <a:avLst>
-              <a:gd name="adj" fmla="val 8740"/>
+              <a:gd name="adj" fmla="val 8696"/>
             </a:avLst>
           </a:prstGeom>
           <a:solidFill>
@@ -6495,8 +6497,8 @@
         </p:nvSpPr>
         <p:spPr>
           <a:xfrm>
-            <a:off x="7799832" y="1472184"/>
-            <a:ext cx="3145536" cy="256032"/>
+            <a:off x="7708392" y="1453896"/>
+            <a:ext cx="3282696" cy="228600"/>
           </a:xfrm>
           <a:prstGeom prst="rect">
             <a:avLst/>
@@ -6512,7 +6514,7 @@
               <a:buNone/>
             </a:pPr>
             <a:r>
-              <a:rPr lang="en-US" sz="1300" b="1" dirty="0">
+              <a:rPr lang="en-US" sz="1220" b="1" dirty="0">
                 <a:solidFill>
                   <a:srgbClr val="0068B7"/>
                 </a:solidFill>
@@ -6522,7 +6524,7 @@
               </a:rPr>
               <a:t>Data decision</a:t>
             </a:r>
-            <a:endParaRPr lang="en-US" sz="1300" dirty="0"/>
+            <a:endParaRPr lang="en-US" sz="1220" dirty="0"/>
           </a:p>
         </p:txBody>
       </p:sp>
@@ -6534,8 +6536,8 @@
         </p:nvSpPr>
         <p:spPr>
           <a:xfrm>
-            <a:off x="7799832" y="1801368"/>
-            <a:ext cx="3145536" cy="688543"/>
+            <a:off x="7708392" y="1764792"/>
+            <a:ext cx="3282696" cy="749808"/>
           </a:xfrm>
           <a:prstGeom prst="rect">
             <a:avLst/>
@@ -6553,7 +6555,7 @@
               <a:buNone/>
             </a:pPr>
             <a:r>
-              <a:rPr lang="en-US" sz="1320" dirty="0">
+              <a:rPr lang="en-US" sz="1220" dirty="0">
                 <a:solidFill>
                   <a:srgbClr val="17364A"/>
                 </a:solidFill>
@@ -6561,9 +6563,9 @@
                 <a:ea typeface="Aptos" pitchFamily="34" charset="-122"/>
                 <a:cs typeface="Aptos" pitchFamily="34" charset="-120"/>
               </a:rPr>
-              <a:t>Generative AI may summarize datasets or records, but the output must reflect missingness and uncertainty.</a:t>
-            </a:r>
-            <a:endParaRPr lang="en-US" sz="1320" dirty="0"/>
+              <a:t>Generative AI may summarize datasets or records, but the output must reflect.</a:t>
+            </a:r>
+            <a:endParaRPr lang="en-US" sz="1220" dirty="0"/>
           </a:p>
         </p:txBody>
       </p:sp>
@@ -6575,12 +6577,12 @@
         </p:nvSpPr>
         <p:spPr>
           <a:xfrm>
-            <a:off x="7635240" y="2718511"/>
-            <a:ext cx="3474720" cy="1328623"/>
+            <a:off x="7543800" y="2724912"/>
+            <a:ext cx="3611880" cy="1527048"/>
           </a:xfrm>
           <a:prstGeom prst="roundRect">
             <a:avLst>
-              <a:gd name="adj" fmla="val 8259"/>
+              <a:gd name="adj" fmla="val 7186"/>
             </a:avLst>
           </a:prstGeom>
           <a:solidFill>
@@ -6602,8 +6604,8 @@
         </p:nvSpPr>
         <p:spPr>
           <a:xfrm>
-            <a:off x="7799832" y="2864815"/>
-            <a:ext cx="3145536" cy="256032"/>
+            <a:off x="7708392" y="2852928"/>
+            <a:ext cx="3282696" cy="228600"/>
           </a:xfrm>
           <a:prstGeom prst="rect">
             <a:avLst/>
@@ -6619,7 +6621,7 @@
               <a:buNone/>
             </a:pPr>
             <a:r>
-              <a:rPr lang="en-US" sz="1300" b="1" dirty="0">
+              <a:rPr lang="en-US" sz="1220" b="1" dirty="0">
                 <a:solidFill>
                   <a:srgbClr val="0068B7"/>
                 </a:solidFill>
@@ -6629,7 +6631,7 @@
               </a:rPr>
               <a:t>Concept checkpoints</a:t>
             </a:r>
-            <a:endParaRPr lang="en-US" sz="1300" dirty="0"/>
+            <a:endParaRPr lang="en-US" sz="1220" dirty="0"/>
           </a:p>
         </p:txBody>
       </p:sp>
@@ -6641,8 +6643,8 @@
         </p:nvSpPr>
         <p:spPr>
           <a:xfrm>
-            <a:off x="7818120" y="3230575"/>
-            <a:ext cx="3090672" cy="670255"/>
+            <a:off x="7726680" y="3182112"/>
+            <a:ext cx="3227832" cy="960120"/>
           </a:xfrm>
           <a:prstGeom prst="rect">
             <a:avLst/>
@@ -6660,7 +6662,7 @@
               <a:buNone/>
             </a:pPr>
             <a:r>
-              <a:rPr lang="en-US" sz="1220" dirty="0">
+              <a:rPr lang="en-US" sz="1140" dirty="0">
                 <a:solidFill>
                   <a:srgbClr val="17364A"/>
                 </a:solidFill>
@@ -6668,16 +6670,16 @@
                 <a:ea typeface="Aptos" pitchFamily="34" charset="-122"/>
                 <a:cs typeface="Aptos" pitchFamily="34" charset="-120"/>
               </a:rPr>
-              <a:t>RAG depends on document quality, metadata, and currency.</a:t>
-            </a:r>
-            <a:endParaRPr lang="en-US" sz="1220" dirty="0"/>
-          </a:p>
-          <a:p>
-            <a:pPr indent="0" marL="0">
-              <a:buNone/>
-            </a:pPr>
-            <a:r>
-              <a:rPr lang="en-US" sz="1220" dirty="0">
+              <a:t>RAG depends on document quality, metadata, and.</a:t>
+            </a:r>
+            <a:endParaRPr lang="en-US" sz="1140" dirty="0"/>
+          </a:p>
+          <a:p>
+            <a:pPr indent="0" marL="0">
+              <a:buNone/>
+            </a:pPr>
+            <a:r>
+              <a:rPr lang="en-US" sz="1140" dirty="0">
                 <a:solidFill>
                   <a:srgbClr val="17364A"/>
                 </a:solidFill>
@@ -6685,9 +6687,9 @@
                 <a:ea typeface="Aptos" pitchFamily="34" charset="-122"/>
                 <a:cs typeface="Aptos" pitchFamily="34" charset="-120"/>
               </a:rPr>
-              <a:t>Agentic AI should be blocked from acting automatically when.</a:t>
-            </a:r>
-            <a:endParaRPr lang="en-US" sz="1220" dirty="0"/>
+              <a:t>Agentic AI should be blocked from acting.</a:t>
+            </a:r>
+            <a:endParaRPr lang="en-US" sz="1140" dirty="0"/>
           </a:p>
         </p:txBody>
       </p:sp>
@@ -6699,12 +6701,12 @@
         </p:nvSpPr>
         <p:spPr>
           <a:xfrm>
-            <a:off x="7635240" y="4184294"/>
-            <a:ext cx="3474720" cy="1466698"/>
+            <a:off x="7543800" y="4389120"/>
+            <a:ext cx="3611880" cy="1261872"/>
           </a:xfrm>
           <a:prstGeom prst="roundRect">
             <a:avLst>
-              <a:gd name="adj" fmla="val 7481"/>
+              <a:gd name="adj" fmla="val 8696"/>
             </a:avLst>
           </a:prstGeom>
           <a:solidFill>
@@ -6726,8 +6728,8 @@
         </p:nvSpPr>
         <p:spPr>
           <a:xfrm>
-            <a:off x="7799832" y="4330598"/>
-            <a:ext cx="3145536" cy="256032"/>
+            <a:off x="7708392" y="4517136"/>
+            <a:ext cx="3282696" cy="228600"/>
           </a:xfrm>
           <a:prstGeom prst="rect">
             <a:avLst/>
@@ -6743,7 +6745,7 @@
               <a:buNone/>
             </a:pPr>
             <a:r>
-              <a:rPr lang="en-US" sz="1300" b="1" dirty="0">
+              <a:rPr lang="en-US" sz="1220" b="1" dirty="0">
                 <a:solidFill>
                   <a:srgbClr val="0068B7"/>
                 </a:solidFill>
@@ -6753,7 +6755,7 @@
               </a:rPr>
               <a:t>How to validate</a:t>
             </a:r>
-            <a:endParaRPr lang="en-US" sz="1300" dirty="0"/>
+            <a:endParaRPr lang="en-US" sz="1220" dirty="0"/>
           </a:p>
         </p:txBody>
       </p:sp>
@@ -6765,8 +6767,8 @@
         </p:nvSpPr>
         <p:spPr>
           <a:xfrm>
-            <a:off x="7799832" y="4659782"/>
-            <a:ext cx="3145536" cy="899770"/>
+            <a:off x="7708392" y="4828032"/>
+            <a:ext cx="3282696" cy="749808"/>
           </a:xfrm>
           <a:prstGeom prst="rect">
             <a:avLst/>
@@ -6784,7 +6786,7 @@
               <a:buNone/>
             </a:pPr>
             <a:r>
-              <a:rPr lang="en-US" sz="1320" dirty="0">
+              <a:rPr lang="en-US" sz="1220" dirty="0">
                 <a:solidFill>
                   <a:srgbClr val="17364A"/>
                 </a:solidFill>
@@ -6792,9 +6794,9 @@
                 <a:ea typeface="Aptos" pitchFamily="34" charset="-122"/>
                 <a:cs typeface="Aptos" pitchFamily="34" charset="-120"/>
               </a:rPr>
-              <a:t>Connect the concept to data quality, model performance, validation evidence, monitoring measures, and decisions that remain under human control.</a:t>
-            </a:r>
-            <a:endParaRPr lang="en-US" sz="1320" dirty="0"/>
+              <a:t>Connect the concept to data quality, model performance, validation evidence,.</a:t>
+            </a:r>
+            <a:endParaRPr lang="en-US" sz="1220" dirty="0"/>
           </a:p>
         </p:txBody>
       </p:sp>
@@ -7085,8 +7087,8 @@
         </p:nvSpPr>
         <p:spPr>
           <a:xfrm>
-            <a:off x="868680" y="1508760"/>
-            <a:ext cx="6309360" cy="4160520"/>
+            <a:off x="822960" y="1463040"/>
+            <a:ext cx="6565392" cy="4343400"/>
           </a:xfrm>
           <a:prstGeom prst="rect">
             <a:avLst/>
@@ -7104,7 +7106,7 @@
               <a:buNone/>
             </a:pPr>
             <a:r>
-              <a:rPr lang="en-US" sz="2100" dirty="0">
+              <a:rPr lang="en-US" sz="1920" dirty="0">
                 <a:solidFill>
                   <a:srgbClr val="003A63"/>
                 </a:solidFill>
@@ -7114,14 +7116,14 @@
               </a:rPr>
               <a:t>• Which data quality problems most often affect your program area?</a:t>
             </a:r>
-            <a:endParaRPr lang="en-US" sz="2100" dirty="0"/>
-          </a:p>
-          <a:p>
-            <a:pPr indent="0" marL="0">
-              <a:buNone/>
-            </a:pPr>
-            <a:r>
-              <a:rPr lang="en-US" sz="2100" dirty="0">
+            <a:endParaRPr lang="en-US" sz="1920" dirty="0"/>
+          </a:p>
+          <a:p>
+            <a:pPr indent="0" marL="0">
+              <a:buNone/>
+            </a:pPr>
+            <a:r>
+              <a:rPr lang="en-US" sz="1920" dirty="0">
                 <a:solidFill>
                   <a:srgbClr val="003A63"/>
                 </a:solidFill>
@@ -7131,14 +7133,14 @@
               </a:rPr>
               <a:t>• Which missing fields would make an AI output unsafe or unreliable?</a:t>
             </a:r>
-            <a:endParaRPr lang="en-US" sz="2100" dirty="0"/>
-          </a:p>
-          <a:p>
-            <a:pPr indent="0" marL="0">
-              <a:buNone/>
-            </a:pPr>
-            <a:r>
-              <a:rPr lang="en-US" sz="2100" dirty="0">
+            <a:endParaRPr lang="en-US" sz="1920" dirty="0"/>
+          </a:p>
+          <a:p>
+            <a:pPr indent="0" marL="0">
+              <a:buNone/>
+            </a:pPr>
+            <a:r>
+              <a:rPr lang="en-US" sz="1920" dirty="0">
                 <a:solidFill>
                   <a:srgbClr val="003A63"/>
                 </a:solidFill>
@@ -7148,7 +7150,7 @@
               </a:rPr>
               <a:t>• Which populations or settings may be underrepresented in the data?</a:t>
             </a:r>
-            <a:endParaRPr lang="en-US" sz="2100" dirty="0"/>
+            <a:endParaRPr lang="en-US" sz="1920" dirty="0"/>
           </a:p>
         </p:txBody>
       </p:sp>
@@ -7160,12 +7162,12 @@
         </p:nvSpPr>
         <p:spPr>
           <a:xfrm>
-            <a:off x="7635240" y="1325880"/>
-            <a:ext cx="3474720" cy="1207008"/>
+            <a:off x="7543800" y="1325880"/>
+            <a:ext cx="3611880" cy="1261872"/>
           </a:xfrm>
           <a:prstGeom prst="roundRect">
             <a:avLst>
-              <a:gd name="adj" fmla="val 9091"/>
+              <a:gd name="adj" fmla="val 8696"/>
             </a:avLst>
           </a:prstGeom>
           <a:solidFill>
@@ -7187,8 +7189,8 @@
         </p:nvSpPr>
         <p:spPr>
           <a:xfrm>
-            <a:off x="7799832" y="1472184"/>
-            <a:ext cx="3145536" cy="256032"/>
+            <a:off x="7708392" y="1453896"/>
+            <a:ext cx="3282696" cy="228600"/>
           </a:xfrm>
           <a:prstGeom prst="rect">
             <a:avLst/>
@@ -7204,7 +7206,7 @@
               <a:buNone/>
             </a:pPr>
             <a:r>
-              <a:rPr lang="en-US" sz="1300" b="1" dirty="0">
+              <a:rPr lang="en-US" sz="1220" b="1" dirty="0">
                 <a:solidFill>
                   <a:srgbClr val="0068B7"/>
                 </a:solidFill>
@@ -7214,7 +7216,7 @@
               </a:rPr>
               <a:t>Data decision</a:t>
             </a:r>
-            <a:endParaRPr lang="en-US" sz="1300" dirty="0"/>
+            <a:endParaRPr lang="en-US" sz="1220" dirty="0"/>
           </a:p>
         </p:txBody>
       </p:sp>
@@ -7226,8 +7228,8 @@
         </p:nvSpPr>
         <p:spPr>
           <a:xfrm>
-            <a:off x="7799832" y="1801368"/>
-            <a:ext cx="3145536" cy="640080"/>
+            <a:off x="7708392" y="1764792"/>
+            <a:ext cx="3282696" cy="749808"/>
           </a:xfrm>
           <a:prstGeom prst="rect">
             <a:avLst/>
@@ -7245,7 +7247,7 @@
               <a:buNone/>
             </a:pPr>
             <a:r>
-              <a:rPr lang="en-US" sz="1320" dirty="0">
+              <a:rPr lang="en-US" sz="1220" dirty="0">
                 <a:solidFill>
                   <a:srgbClr val="17364A"/>
                 </a:solidFill>
@@ -7255,7 +7257,7 @@
               </a:rPr>
               <a:t>Which data quality problems most often affect your program area?</a:t>
             </a:r>
-            <a:endParaRPr lang="en-US" sz="1320" dirty="0"/>
+            <a:endParaRPr lang="en-US" sz="1220" dirty="0"/>
           </a:p>
         </p:txBody>
       </p:sp>
@@ -7267,12 +7269,12 @@
         </p:nvSpPr>
         <p:spPr>
           <a:xfrm>
-            <a:off x="7635240" y="2670048"/>
-            <a:ext cx="3474720" cy="1377086"/>
+            <a:off x="7543800" y="2724912"/>
+            <a:ext cx="3611880" cy="1527048"/>
           </a:xfrm>
           <a:prstGeom prst="roundRect">
             <a:avLst>
-              <a:gd name="adj" fmla="val 7968"/>
+              <a:gd name="adj" fmla="val 7186"/>
             </a:avLst>
           </a:prstGeom>
           <a:solidFill>
@@ -7294,8 +7296,8 @@
         </p:nvSpPr>
         <p:spPr>
           <a:xfrm>
-            <a:off x="7799832" y="2816352"/>
-            <a:ext cx="3145536" cy="256032"/>
+            <a:off x="7708392" y="2852928"/>
+            <a:ext cx="3282696" cy="228600"/>
           </a:xfrm>
           <a:prstGeom prst="rect">
             <a:avLst/>
@@ -7311,7 +7313,7 @@
               <a:buNone/>
             </a:pPr>
             <a:r>
-              <a:rPr lang="en-US" sz="1300" b="1" dirty="0">
+              <a:rPr lang="en-US" sz="1220" b="1" dirty="0">
                 <a:solidFill>
                   <a:srgbClr val="0068B7"/>
                 </a:solidFill>
@@ -7321,7 +7323,7 @@
               </a:rPr>
               <a:t>Concept checkpoints</a:t>
             </a:r>
-            <a:endParaRPr lang="en-US" sz="1300" dirty="0"/>
+            <a:endParaRPr lang="en-US" sz="1220" dirty="0"/>
           </a:p>
         </p:txBody>
       </p:sp>
@@ -7333,8 +7335,8 @@
         </p:nvSpPr>
         <p:spPr>
           <a:xfrm>
-            <a:off x="7818120" y="3182112"/>
-            <a:ext cx="3090672" cy="718718"/>
+            <a:off x="7726680" y="3182112"/>
+            <a:ext cx="3227832" cy="960120"/>
           </a:xfrm>
           <a:prstGeom prst="rect">
             <a:avLst/>
@@ -7352,7 +7354,7 @@
               <a:buNone/>
             </a:pPr>
             <a:r>
-              <a:rPr lang="en-US" sz="1220" dirty="0">
+              <a:rPr lang="en-US" sz="1140" dirty="0">
                 <a:solidFill>
                   <a:srgbClr val="17364A"/>
                 </a:solidFill>
@@ -7360,16 +7362,16 @@
                 <a:ea typeface="Aptos" pitchFamily="34" charset="-122"/>
                 <a:cs typeface="Aptos" pitchFamily="34" charset="-120"/>
               </a:rPr>
-              <a:t>Which data quality problems most often affect your program area?</a:t>
-            </a:r>
-            <a:endParaRPr lang="en-US" sz="1220" dirty="0"/>
-          </a:p>
-          <a:p>
-            <a:pPr indent="0" marL="0">
-              <a:buNone/>
-            </a:pPr>
-            <a:r>
-              <a:rPr lang="en-US" sz="1220" dirty="0">
+              <a:t>Which data quality problems most often affect your.</a:t>
+            </a:r>
+            <a:endParaRPr lang="en-US" sz="1140" dirty="0"/>
+          </a:p>
+          <a:p>
+            <a:pPr indent="0" marL="0">
+              <a:buNone/>
+            </a:pPr>
+            <a:r>
+              <a:rPr lang="en-US" sz="1140" dirty="0">
                 <a:solidFill>
                   <a:srgbClr val="17364A"/>
                 </a:solidFill>
@@ -7377,16 +7379,16 @@
                 <a:ea typeface="Aptos" pitchFamily="34" charset="-122"/>
                 <a:cs typeface="Aptos" pitchFamily="34" charset="-120"/>
               </a:rPr>
-              <a:t>Which missing fields would make an AI output unsafe or unreliable?</a:t>
-            </a:r>
-            <a:endParaRPr lang="en-US" sz="1220" dirty="0"/>
-          </a:p>
-          <a:p>
-            <a:pPr indent="0" marL="0">
-              <a:buNone/>
-            </a:pPr>
-            <a:r>
-              <a:rPr lang="en-US" sz="1220" dirty="0">
+              <a:t>Which missing fields would make an AI output.</a:t>
+            </a:r>
+            <a:endParaRPr lang="en-US" sz="1140" dirty="0"/>
+          </a:p>
+          <a:p>
+            <a:pPr indent="0" marL="0">
+              <a:buNone/>
+            </a:pPr>
+            <a:r>
+              <a:rPr lang="en-US" sz="1140" dirty="0">
                 <a:solidFill>
                   <a:srgbClr val="17364A"/>
                 </a:solidFill>
@@ -7394,9 +7396,9 @@
                 <a:ea typeface="Aptos" pitchFamily="34" charset="-122"/>
                 <a:cs typeface="Aptos" pitchFamily="34" charset="-120"/>
               </a:rPr>
-              <a:t>Which populations or settings may be underrepresented in the data?</a:t>
-            </a:r>
-            <a:endParaRPr lang="en-US" sz="1220" dirty="0"/>
+              <a:t>Which populations or settings may be.</a:t>
+            </a:r>
+            <a:endParaRPr lang="en-US" sz="1140" dirty="0"/>
           </a:p>
         </p:txBody>
       </p:sp>
@@ -7408,12 +7410,12 @@
         </p:nvSpPr>
         <p:spPr>
           <a:xfrm>
-            <a:off x="7635240" y="4184294"/>
-            <a:ext cx="3474720" cy="1466698"/>
+            <a:off x="7543800" y="4389120"/>
+            <a:ext cx="3611880" cy="1261872"/>
           </a:xfrm>
           <a:prstGeom prst="roundRect">
             <a:avLst>
-              <a:gd name="adj" fmla="val 7481"/>
+              <a:gd name="adj" fmla="val 8696"/>
             </a:avLst>
           </a:prstGeom>
           <a:solidFill>
@@ -7435,8 +7437,8 @@
         </p:nvSpPr>
         <p:spPr>
           <a:xfrm>
-            <a:off x="7799832" y="4330598"/>
-            <a:ext cx="3145536" cy="256032"/>
+            <a:off x="7708392" y="4517136"/>
+            <a:ext cx="3282696" cy="228600"/>
           </a:xfrm>
           <a:prstGeom prst="rect">
             <a:avLst/>
@@ -7452,7 +7454,7 @@
               <a:buNone/>
             </a:pPr>
             <a:r>
-              <a:rPr lang="en-US" sz="1300" b="1" dirty="0">
+              <a:rPr lang="en-US" sz="1220" b="1" dirty="0">
                 <a:solidFill>
                   <a:srgbClr val="0068B7"/>
                 </a:solidFill>
@@ -7462,7 +7464,7 @@
               </a:rPr>
               <a:t>How to validate</a:t>
             </a:r>
-            <a:endParaRPr lang="en-US" sz="1300" dirty="0"/>
+            <a:endParaRPr lang="en-US" sz="1220" dirty="0"/>
           </a:p>
         </p:txBody>
       </p:sp>
@@ -7474,8 +7476,8 @@
         </p:nvSpPr>
         <p:spPr>
           <a:xfrm>
-            <a:off x="7799832" y="4659782"/>
-            <a:ext cx="3145536" cy="899770"/>
+            <a:off x="7708392" y="4828032"/>
+            <a:ext cx="3282696" cy="749808"/>
           </a:xfrm>
           <a:prstGeom prst="rect">
             <a:avLst/>
@@ -7493,7 +7495,7 @@
               <a:buNone/>
             </a:pPr>
             <a:r>
-              <a:rPr lang="en-US" sz="1320" dirty="0">
+              <a:rPr lang="en-US" sz="1220" dirty="0">
                 <a:solidFill>
                   <a:srgbClr val="17364A"/>
                 </a:solidFill>
@@ -7501,9 +7503,9 @@
                 <a:ea typeface="Aptos" pitchFamily="34" charset="-122"/>
                 <a:cs typeface="Aptos" pitchFamily="34" charset="-120"/>
               </a:rPr>
-              <a:t>Connect the concept to data quality, model performance, validation evidence, monitoring measures, and decisions that remain under human control.</a:t>
-            </a:r>
-            <a:endParaRPr lang="en-US" sz="1320" dirty="0"/>
+              <a:t>Connect the concept to data quality, model performance, validation evidence,.</a:t>
+            </a:r>
+            <a:endParaRPr lang="en-US" sz="1220" dirty="0"/>
           </a:p>
         </p:txBody>
       </p:sp>
@@ -7794,8 +7796,8 @@
         </p:nvSpPr>
         <p:spPr>
           <a:xfrm>
-            <a:off x="868680" y="1508760"/>
-            <a:ext cx="6309360" cy="4160520"/>
+            <a:off x="822960" y="1463040"/>
+            <a:ext cx="6565392" cy="4343400"/>
           </a:xfrm>
           <a:prstGeom prst="rect">
             <a:avLst/>
@@ -7813,7 +7815,7 @@
               <a:buNone/>
             </a:pPr>
             <a:r>
-              <a:rPr lang="en-US" sz="2100" dirty="0">
+              <a:rPr lang="en-US" sz="1920" dirty="0">
                 <a:solidFill>
                   <a:srgbClr val="003A63"/>
                 </a:solidFill>
@@ -7823,14 +7825,14 @@
               </a:rPr>
               <a:t>• How would staff detect data drift?</a:t>
             </a:r>
-            <a:endParaRPr lang="en-US" sz="2100" dirty="0"/>
-          </a:p>
-          <a:p>
-            <a:pPr indent="0" marL="0">
-              <a:buNone/>
-            </a:pPr>
-            <a:r>
-              <a:rPr lang="en-US" sz="2100" dirty="0">
+            <a:endParaRPr lang="en-US" sz="1920" dirty="0"/>
+          </a:p>
+          <a:p>
+            <a:pPr indent="0" marL="0">
+              <a:buNone/>
+            </a:pPr>
+            <a:r>
+              <a:rPr lang="en-US" sz="1920" dirty="0">
                 <a:solidFill>
                   <a:srgbClr val="003A63"/>
                 </a:solidFill>
@@ -7840,7 +7842,7 @@
               </a:rPr>
               <a:t>• Who has authority to pause or limit AI use when data quality is insufficient?</a:t>
             </a:r>
-            <a:endParaRPr lang="en-US" sz="2100" dirty="0"/>
+            <a:endParaRPr lang="en-US" sz="1920" dirty="0"/>
           </a:p>
         </p:txBody>
       </p:sp>
@@ -7852,12 +7854,12 @@
         </p:nvSpPr>
         <p:spPr>
           <a:xfrm>
-            <a:off x="7635240" y="1325880"/>
-            <a:ext cx="3474720" cy="1207008"/>
+            <a:off x="7543800" y="1325880"/>
+            <a:ext cx="3611880" cy="1261872"/>
           </a:xfrm>
           <a:prstGeom prst="roundRect">
             <a:avLst>
-              <a:gd name="adj" fmla="val 9091"/>
+              <a:gd name="adj" fmla="val 8696"/>
             </a:avLst>
           </a:prstGeom>
           <a:solidFill>
@@ -7879,8 +7881,8 @@
         </p:nvSpPr>
         <p:spPr>
           <a:xfrm>
-            <a:off x="7799832" y="1472184"/>
-            <a:ext cx="3145536" cy="256032"/>
+            <a:off x="7708392" y="1453896"/>
+            <a:ext cx="3282696" cy="228600"/>
           </a:xfrm>
           <a:prstGeom prst="rect">
             <a:avLst/>
@@ -7896,7 +7898,7 @@
               <a:buNone/>
             </a:pPr>
             <a:r>
-              <a:rPr lang="en-US" sz="1300" b="1" dirty="0">
+              <a:rPr lang="en-US" sz="1220" b="1" dirty="0">
                 <a:solidFill>
                   <a:srgbClr val="0068B7"/>
                 </a:solidFill>
@@ -7906,7 +7908,7 @@
               </a:rPr>
               <a:t>Data decision</a:t>
             </a:r>
-            <a:endParaRPr lang="en-US" sz="1300" dirty="0"/>
+            <a:endParaRPr lang="en-US" sz="1220" dirty="0"/>
           </a:p>
         </p:txBody>
       </p:sp>
@@ -7918,8 +7920,8 @@
         </p:nvSpPr>
         <p:spPr>
           <a:xfrm>
-            <a:off x="7799832" y="1801368"/>
-            <a:ext cx="3145536" cy="640080"/>
+            <a:off x="7708392" y="1764792"/>
+            <a:ext cx="3282696" cy="749808"/>
           </a:xfrm>
           <a:prstGeom prst="rect">
             <a:avLst/>
@@ -7937,7 +7939,7 @@
               <a:buNone/>
             </a:pPr>
             <a:r>
-              <a:rPr lang="en-US" sz="1320" dirty="0">
+              <a:rPr lang="en-US" sz="1220" dirty="0">
                 <a:solidFill>
                   <a:srgbClr val="17364A"/>
                 </a:solidFill>
@@ -7947,7 +7949,7 @@
               </a:rPr>
               <a:t>How would staff detect data drift?</a:t>
             </a:r>
-            <a:endParaRPr lang="en-US" sz="1320" dirty="0"/>
+            <a:endParaRPr lang="en-US" sz="1220" dirty="0"/>
           </a:p>
         </p:txBody>
       </p:sp>
@@ -7959,12 +7961,12 @@
         </p:nvSpPr>
         <p:spPr>
           <a:xfrm>
-            <a:off x="7635240" y="2670048"/>
-            <a:ext cx="3474720" cy="1377086"/>
+            <a:off x="7543800" y="2724912"/>
+            <a:ext cx="3611880" cy="1527048"/>
           </a:xfrm>
           <a:prstGeom prst="roundRect">
             <a:avLst>
-              <a:gd name="adj" fmla="val 7968"/>
+              <a:gd name="adj" fmla="val 7186"/>
             </a:avLst>
           </a:prstGeom>
           <a:solidFill>
@@ -7986,8 +7988,8 @@
         </p:nvSpPr>
         <p:spPr>
           <a:xfrm>
-            <a:off x="7799832" y="2816352"/>
-            <a:ext cx="3145536" cy="256032"/>
+            <a:off x="7708392" y="2852928"/>
+            <a:ext cx="3282696" cy="228600"/>
           </a:xfrm>
           <a:prstGeom prst="rect">
             <a:avLst/>
@@ -8003,7 +8005,7 @@
               <a:buNone/>
             </a:pPr>
             <a:r>
-              <a:rPr lang="en-US" sz="1300" b="1" dirty="0">
+              <a:rPr lang="en-US" sz="1220" b="1" dirty="0">
                 <a:solidFill>
                   <a:srgbClr val="0068B7"/>
                 </a:solidFill>
@@ -8013,7 +8015,7 @@
               </a:rPr>
               <a:t>Concept checkpoints</a:t>
             </a:r>
-            <a:endParaRPr lang="en-US" sz="1300" dirty="0"/>
+            <a:endParaRPr lang="en-US" sz="1220" dirty="0"/>
           </a:p>
         </p:txBody>
       </p:sp>
@@ -8025,8 +8027,8 @@
         </p:nvSpPr>
         <p:spPr>
           <a:xfrm>
-            <a:off x="7818120" y="3182112"/>
-            <a:ext cx="3090672" cy="718718"/>
+            <a:off x="7726680" y="3182112"/>
+            <a:ext cx="3227832" cy="960120"/>
           </a:xfrm>
           <a:prstGeom prst="rect">
             <a:avLst/>
@@ -8044,7 +8046,7 @@
               <a:buNone/>
             </a:pPr>
             <a:r>
-              <a:rPr lang="en-US" sz="1220" dirty="0">
+              <a:rPr lang="en-US" sz="1140" dirty="0">
                 <a:solidFill>
                   <a:srgbClr val="17364A"/>
                 </a:solidFill>
@@ -8054,14 +8056,14 @@
               </a:rPr>
               <a:t>How would staff detect data drift?</a:t>
             </a:r>
-            <a:endParaRPr lang="en-US" sz="1220" dirty="0"/>
-          </a:p>
-          <a:p>
-            <a:pPr indent="0" marL="0">
-              <a:buNone/>
-            </a:pPr>
-            <a:r>
-              <a:rPr lang="en-US" sz="1220" dirty="0">
+            <a:endParaRPr lang="en-US" sz="1140" dirty="0"/>
+          </a:p>
+          <a:p>
+            <a:pPr indent="0" marL="0">
+              <a:buNone/>
+            </a:pPr>
+            <a:r>
+              <a:rPr lang="en-US" sz="1140" dirty="0">
                 <a:solidFill>
                   <a:srgbClr val="17364A"/>
                 </a:solidFill>
@@ -8069,9 +8071,9 @@
                 <a:ea typeface="Aptos" pitchFamily="34" charset="-122"/>
                 <a:cs typeface="Aptos" pitchFamily="34" charset="-120"/>
               </a:rPr>
-              <a:t>Who has authority to pause or limit AI use when data quality is.</a:t>
-            </a:r>
-            <a:endParaRPr lang="en-US" sz="1220" dirty="0"/>
+              <a:t>Who has authority to pause or limit AI use when.</a:t>
+            </a:r>
+            <a:endParaRPr lang="en-US" sz="1140" dirty="0"/>
           </a:p>
         </p:txBody>
       </p:sp>
@@ -8083,12 +8085,12 @@
         </p:nvSpPr>
         <p:spPr>
           <a:xfrm>
-            <a:off x="7635240" y="4184294"/>
-            <a:ext cx="3474720" cy="1466698"/>
+            <a:off x="7543800" y="4389120"/>
+            <a:ext cx="3611880" cy="1261872"/>
           </a:xfrm>
           <a:prstGeom prst="roundRect">
             <a:avLst>
-              <a:gd name="adj" fmla="val 7481"/>
+              <a:gd name="adj" fmla="val 8696"/>
             </a:avLst>
           </a:prstGeom>
           <a:solidFill>
@@ -8110,8 +8112,8 @@
         </p:nvSpPr>
         <p:spPr>
           <a:xfrm>
-            <a:off x="7799832" y="4330598"/>
-            <a:ext cx="3145536" cy="256032"/>
+            <a:off x="7708392" y="4517136"/>
+            <a:ext cx="3282696" cy="228600"/>
           </a:xfrm>
           <a:prstGeom prst="rect">
             <a:avLst/>
@@ -8127,7 +8129,7 @@
               <a:buNone/>
             </a:pPr>
             <a:r>
-              <a:rPr lang="en-US" sz="1300" b="1" dirty="0">
+              <a:rPr lang="en-US" sz="1220" b="1" dirty="0">
                 <a:solidFill>
                   <a:srgbClr val="0068B7"/>
                 </a:solidFill>
@@ -8137,7 +8139,7 @@
               </a:rPr>
               <a:t>How to validate</a:t>
             </a:r>
-            <a:endParaRPr lang="en-US" sz="1300" dirty="0"/>
+            <a:endParaRPr lang="en-US" sz="1220" dirty="0"/>
           </a:p>
         </p:txBody>
       </p:sp>
@@ -8149,8 +8151,8 @@
         </p:nvSpPr>
         <p:spPr>
           <a:xfrm>
-            <a:off x="7799832" y="4659782"/>
-            <a:ext cx="3145536" cy="899770"/>
+            <a:off x="7708392" y="4828032"/>
+            <a:ext cx="3282696" cy="749808"/>
           </a:xfrm>
           <a:prstGeom prst="rect">
             <a:avLst/>
@@ -8168,7 +8170,7 @@
               <a:buNone/>
             </a:pPr>
             <a:r>
-              <a:rPr lang="en-US" sz="1320" dirty="0">
+              <a:rPr lang="en-US" sz="1220" dirty="0">
                 <a:solidFill>
                   <a:srgbClr val="17364A"/>
                 </a:solidFill>
@@ -8176,9 +8178,9 @@
                 <a:ea typeface="Aptos" pitchFamily="34" charset="-122"/>
                 <a:cs typeface="Aptos" pitchFamily="34" charset="-120"/>
               </a:rPr>
-              <a:t>Connect the concept to data quality, model performance, validation evidence, monitoring measures, and decisions that remain under human control.</a:t>
-            </a:r>
-            <a:endParaRPr lang="en-US" sz="1320" dirty="0"/>
+              <a:t>Connect the concept to data quality, model performance, validation evidence,.</a:t>
+            </a:r>
+            <a:endParaRPr lang="en-US" sz="1220" dirty="0"/>
           </a:p>
         </p:txBody>
       </p:sp>
@@ -8469,8 +8471,8 @@
         </p:nvSpPr>
         <p:spPr>
           <a:xfrm>
-            <a:off x="868680" y="1508760"/>
-            <a:ext cx="6309360" cy="4160520"/>
+            <a:off x="822960" y="1463040"/>
+            <a:ext cx="6565392" cy="4343400"/>
           </a:xfrm>
           <a:prstGeom prst="rect">
             <a:avLst/>
@@ -8488,7 +8490,7 @@
               <a:buNone/>
             </a:pPr>
             <a:r>
-              <a:rPr lang="en-US" sz="2100" dirty="0">
+              <a:rPr lang="en-US" sz="1920" dirty="0">
                 <a:solidFill>
                   <a:srgbClr val="003A63"/>
                 </a:solidFill>
@@ -8498,14 +8500,14 @@
               </a:rPr>
               <a:t>• Create a data quality review plan for one AI-supported workflow.</a:t>
             </a:r>
-            <a:endParaRPr lang="en-US" sz="2100" dirty="0"/>
-          </a:p>
-          <a:p>
-            <a:pPr indent="0" marL="0">
-              <a:buNone/>
-            </a:pPr>
-            <a:r>
-              <a:rPr lang="en-US" sz="2100" dirty="0">
+            <a:endParaRPr lang="en-US" sz="1920" dirty="0"/>
+          </a:p>
+          <a:p>
+            <a:pPr indent="0" marL="0">
+              <a:buNone/>
+            </a:pPr>
+            <a:r>
+              <a:rPr lang="en-US" sz="1920" dirty="0">
                 <a:solidFill>
                   <a:srgbClr val="003A63"/>
                 </a:solidFill>
@@ -8513,9 +8515,9 @@
                 <a:ea typeface="Aptos" pitchFamily="34" charset="-122"/>
                 <a:cs typeface="Aptos" pitchFamily="34" charset="-120"/>
               </a:rPr>
-              <a:t>• Include the use case, required fields, quality dimensions, thresholds or review rules, known.</a:t>
-            </a:r>
-            <a:endParaRPr lang="en-US" sz="2100" dirty="0"/>
+              <a:t>• Include the use case, required fields, quality dimensions, thresholds or.</a:t>
+            </a:r>
+            <a:endParaRPr lang="en-US" sz="1920" dirty="0"/>
           </a:p>
         </p:txBody>
       </p:sp>
@@ -8527,12 +8529,12 @@
         </p:nvSpPr>
         <p:spPr>
           <a:xfrm>
-            <a:off x="7635240" y="1325880"/>
-            <a:ext cx="3474720" cy="1207008"/>
+            <a:off x="7543800" y="1325880"/>
+            <a:ext cx="3611880" cy="1261872"/>
           </a:xfrm>
           <a:prstGeom prst="roundRect">
             <a:avLst>
-              <a:gd name="adj" fmla="val 9091"/>
+              <a:gd name="adj" fmla="val 8696"/>
             </a:avLst>
           </a:prstGeom>
           <a:solidFill>
@@ -8554,8 +8556,8 @@
         </p:nvSpPr>
         <p:spPr>
           <a:xfrm>
-            <a:off x="7799832" y="1472184"/>
-            <a:ext cx="3145536" cy="256032"/>
+            <a:off x="7708392" y="1453896"/>
+            <a:ext cx="3282696" cy="228600"/>
           </a:xfrm>
           <a:prstGeom prst="rect">
             <a:avLst/>
@@ -8571,7 +8573,7 @@
               <a:buNone/>
             </a:pPr>
             <a:r>
-              <a:rPr lang="en-US" sz="1300" b="1" dirty="0">
+              <a:rPr lang="en-US" sz="1220" b="1" dirty="0">
                 <a:solidFill>
                   <a:srgbClr val="0068B7"/>
                 </a:solidFill>
@@ -8581,7 +8583,7 @@
               </a:rPr>
               <a:t>Data decision</a:t>
             </a:r>
-            <a:endParaRPr lang="en-US" sz="1300" dirty="0"/>
+            <a:endParaRPr lang="en-US" sz="1220" dirty="0"/>
           </a:p>
         </p:txBody>
       </p:sp>
@@ -8593,8 +8595,8 @@
         </p:nvSpPr>
         <p:spPr>
           <a:xfrm>
-            <a:off x="7799832" y="1801368"/>
-            <a:ext cx="3145536" cy="640080"/>
+            <a:off x="7708392" y="1764792"/>
+            <a:ext cx="3282696" cy="749808"/>
           </a:xfrm>
           <a:prstGeom prst="rect">
             <a:avLst/>
@@ -8612,7 +8614,7 @@
               <a:buNone/>
             </a:pPr>
             <a:r>
-              <a:rPr lang="en-US" sz="1320" dirty="0">
+              <a:rPr lang="en-US" sz="1220" dirty="0">
                 <a:solidFill>
                   <a:srgbClr val="17364A"/>
                 </a:solidFill>
@@ -8622,7 +8624,7 @@
               </a:rPr>
               <a:t>Create a data quality review plan for one AI-supported workflow.</a:t>
             </a:r>
-            <a:endParaRPr lang="en-US" sz="1320" dirty="0"/>
+            <a:endParaRPr lang="en-US" sz="1220" dirty="0"/>
           </a:p>
         </p:txBody>
       </p:sp>
@@ -8634,12 +8636,12 @@
         </p:nvSpPr>
         <p:spPr>
           <a:xfrm>
-            <a:off x="7635240" y="2670048"/>
-            <a:ext cx="3474720" cy="1377086"/>
+            <a:off x="7543800" y="2724912"/>
+            <a:ext cx="3611880" cy="1527048"/>
           </a:xfrm>
           <a:prstGeom prst="roundRect">
             <a:avLst>
-              <a:gd name="adj" fmla="val 7968"/>
+              <a:gd name="adj" fmla="val 7186"/>
             </a:avLst>
           </a:prstGeom>
           <a:solidFill>
@@ -8661,8 +8663,8 @@
         </p:nvSpPr>
         <p:spPr>
           <a:xfrm>
-            <a:off x="7799832" y="2816352"/>
-            <a:ext cx="3145536" cy="256032"/>
+            <a:off x="7708392" y="2852928"/>
+            <a:ext cx="3282696" cy="228600"/>
           </a:xfrm>
           <a:prstGeom prst="rect">
             <a:avLst/>
@@ -8678,7 +8680,7 @@
               <a:buNone/>
             </a:pPr>
             <a:r>
-              <a:rPr lang="en-US" sz="1300" b="1" dirty="0">
+              <a:rPr lang="en-US" sz="1220" b="1" dirty="0">
                 <a:solidFill>
                   <a:srgbClr val="0068B7"/>
                 </a:solidFill>
@@ -8688,7 +8690,7 @@
               </a:rPr>
               <a:t>Concept checkpoints</a:t>
             </a:r>
-            <a:endParaRPr lang="en-US" sz="1300" dirty="0"/>
+            <a:endParaRPr lang="en-US" sz="1220" dirty="0"/>
           </a:p>
         </p:txBody>
       </p:sp>
@@ -8700,8 +8702,8 @@
         </p:nvSpPr>
         <p:spPr>
           <a:xfrm>
-            <a:off x="7818120" y="3182112"/>
-            <a:ext cx="3090672" cy="718718"/>
+            <a:off x="7726680" y="3182112"/>
+            <a:ext cx="3227832" cy="960120"/>
           </a:xfrm>
           <a:prstGeom prst="rect">
             <a:avLst/>
@@ -8719,7 +8721,7 @@
               <a:buNone/>
             </a:pPr>
             <a:r>
-              <a:rPr lang="en-US" sz="1220" dirty="0">
+              <a:rPr lang="en-US" sz="1140" dirty="0">
                 <a:solidFill>
                   <a:srgbClr val="17364A"/>
                 </a:solidFill>
@@ -8727,16 +8729,16 @@
                 <a:ea typeface="Aptos" pitchFamily="34" charset="-122"/>
                 <a:cs typeface="Aptos" pitchFamily="34" charset="-120"/>
               </a:rPr>
-              <a:t>Create a data quality review plan for one AI-supported workflow.</a:t>
-            </a:r>
-            <a:endParaRPr lang="en-US" sz="1220" dirty="0"/>
-          </a:p>
-          <a:p>
-            <a:pPr indent="0" marL="0">
-              <a:buNone/>
-            </a:pPr>
-            <a:r>
-              <a:rPr lang="en-US" sz="1220" dirty="0">
+              <a:t>Create a data quality review plan for one.</a:t>
+            </a:r>
+            <a:endParaRPr lang="en-US" sz="1140" dirty="0"/>
+          </a:p>
+          <a:p>
+            <a:pPr indent="0" marL="0">
+              <a:buNone/>
+            </a:pPr>
+            <a:r>
+              <a:rPr lang="en-US" sz="1140" dirty="0">
                 <a:solidFill>
                   <a:srgbClr val="17364A"/>
                 </a:solidFill>
@@ -8744,9 +8746,9 @@
                 <a:ea typeface="Aptos" pitchFamily="34" charset="-122"/>
                 <a:cs typeface="Aptos" pitchFamily="34" charset="-120"/>
               </a:rPr>
-              <a:t>Include the use case, required fields, quality dimensions,.</a:t>
-            </a:r>
-            <a:endParaRPr lang="en-US" sz="1220" dirty="0"/>
+              <a:t>Include the use case, required fields, quality.</a:t>
+            </a:r>
+            <a:endParaRPr lang="en-US" sz="1140" dirty="0"/>
           </a:p>
         </p:txBody>
       </p:sp>
@@ -8758,12 +8760,12 @@
         </p:nvSpPr>
         <p:spPr>
           <a:xfrm>
-            <a:off x="7635240" y="4184294"/>
-            <a:ext cx="3474720" cy="1466698"/>
+            <a:off x="7543800" y="4389120"/>
+            <a:ext cx="3611880" cy="1261872"/>
           </a:xfrm>
           <a:prstGeom prst="roundRect">
             <a:avLst>
-              <a:gd name="adj" fmla="val 7481"/>
+              <a:gd name="adj" fmla="val 8696"/>
             </a:avLst>
           </a:prstGeom>
           <a:solidFill>
@@ -8785,8 +8787,8 @@
         </p:nvSpPr>
         <p:spPr>
           <a:xfrm>
-            <a:off x="7799832" y="4330598"/>
-            <a:ext cx="3145536" cy="256032"/>
+            <a:off x="7708392" y="4517136"/>
+            <a:ext cx="3282696" cy="228600"/>
           </a:xfrm>
           <a:prstGeom prst="rect">
             <a:avLst/>
@@ -8802,7 +8804,7 @@
               <a:buNone/>
             </a:pPr>
             <a:r>
-              <a:rPr lang="en-US" sz="1300" b="1" dirty="0">
+              <a:rPr lang="en-US" sz="1220" b="1" dirty="0">
                 <a:solidFill>
                   <a:srgbClr val="0068B7"/>
                 </a:solidFill>
@@ -8812,7 +8814,7 @@
               </a:rPr>
               <a:t>How to validate</a:t>
             </a:r>
-            <a:endParaRPr lang="en-US" sz="1300" dirty="0"/>
+            <a:endParaRPr lang="en-US" sz="1220" dirty="0"/>
           </a:p>
         </p:txBody>
       </p:sp>
@@ -8824,8 +8826,8 @@
         </p:nvSpPr>
         <p:spPr>
           <a:xfrm>
-            <a:off x="7799832" y="4659782"/>
-            <a:ext cx="3145536" cy="899770"/>
+            <a:off x="7708392" y="4828032"/>
+            <a:ext cx="3282696" cy="749808"/>
           </a:xfrm>
           <a:prstGeom prst="rect">
             <a:avLst/>
@@ -8843,7 +8845,7 @@
               <a:buNone/>
             </a:pPr>
             <a:r>
-              <a:rPr lang="en-US" sz="1320" dirty="0">
+              <a:rPr lang="en-US" sz="1220" dirty="0">
                 <a:solidFill>
                   <a:srgbClr val="17364A"/>
                 </a:solidFill>
@@ -8851,9 +8853,9 @@
                 <a:ea typeface="Aptos" pitchFamily="34" charset="-122"/>
                 <a:cs typeface="Aptos" pitchFamily="34" charset="-120"/>
               </a:rPr>
-              <a:t>Use the assignment to test whether you can explain the concept, apply it to a realistic public health situation, and identify what would need review before the work moves forward.</a:t>
-            </a:r>
-            <a:endParaRPr lang="en-US" sz="1320" dirty="0"/>
+              <a:t>Use the assignment to test whether you can explain the concept, apply it to a.</a:t>
+            </a:r>
+            <a:endParaRPr lang="en-US" sz="1220" dirty="0"/>
           </a:p>
         </p:txBody>
       </p:sp>
@@ -9144,8 +9146,8 @@
         </p:nvSpPr>
         <p:spPr>
           <a:xfrm>
-            <a:off x="868680" y="1508760"/>
-            <a:ext cx="6309360" cy="4160520"/>
+            <a:off x="822960" y="1463040"/>
+            <a:ext cx="6565392" cy="4343400"/>
           </a:xfrm>
           <a:prstGeom prst="rect">
             <a:avLst/>
@@ -9163,7 +9165,7 @@
               <a:buNone/>
             </a:pPr>
             <a:r>
-              <a:rPr lang="en-US" sz="2100" dirty="0">
+              <a:rPr lang="en-US" sz="1920" dirty="0">
                 <a:solidFill>
                   <a:srgbClr val="003A63"/>
                 </a:solidFill>
@@ -9173,14 +9175,14 @@
               </a:rPr>
               <a:t>• Data quality review plan</a:t>
             </a:r>
-            <a:endParaRPr lang="en-US" sz="2100" dirty="0"/>
-          </a:p>
-          <a:p>
-            <a:pPr indent="0" marL="0">
-              <a:buNone/>
-            </a:pPr>
-            <a:r>
-              <a:rPr lang="en-US" sz="2100" dirty="0">
+            <a:endParaRPr lang="en-US" sz="1920" dirty="0"/>
+          </a:p>
+          <a:p>
+            <a:pPr indent="0" marL="0">
+              <a:buNone/>
+            </a:pPr>
+            <a:r>
+              <a:rPr lang="en-US" sz="1920" dirty="0">
                 <a:solidFill>
                   <a:srgbClr val="003A63"/>
                 </a:solidFill>
@@ -9190,14 +9192,14 @@
               </a:rPr>
               <a:t>• Data quality checklist</a:t>
             </a:r>
-            <a:endParaRPr lang="en-US" sz="2100" dirty="0"/>
-          </a:p>
-          <a:p>
-            <a:pPr indent="0" marL="0">
-              <a:buNone/>
-            </a:pPr>
-            <a:r>
-              <a:rPr lang="en-US" sz="2100" dirty="0">
+            <a:endParaRPr lang="en-US" sz="1920" dirty="0"/>
+          </a:p>
+          <a:p>
+            <a:pPr indent="0" marL="0">
+              <a:buNone/>
+            </a:pPr>
+            <a:r>
+              <a:rPr lang="en-US" sz="1920" dirty="0">
                 <a:solidFill>
                   <a:srgbClr val="003A63"/>
                 </a:solidFill>
@@ -9207,7 +9209,7 @@
               </a:rPr>
               <a:t>• Thresholds or review criteria</a:t>
             </a:r>
-            <a:endParaRPr lang="en-US" sz="2100" dirty="0"/>
+            <a:endParaRPr lang="en-US" sz="1920" dirty="0"/>
           </a:p>
         </p:txBody>
       </p:sp>
@@ -9219,12 +9221,12 @@
         </p:nvSpPr>
         <p:spPr>
           <a:xfrm>
-            <a:off x="7635240" y="1325880"/>
-            <a:ext cx="3474720" cy="1207008"/>
+            <a:off x="7543800" y="1325880"/>
+            <a:ext cx="3611880" cy="1261872"/>
           </a:xfrm>
           <a:prstGeom prst="roundRect">
             <a:avLst>
-              <a:gd name="adj" fmla="val 9091"/>
+              <a:gd name="adj" fmla="val 8696"/>
             </a:avLst>
           </a:prstGeom>
           <a:solidFill>
@@ -9246,8 +9248,8 @@
         </p:nvSpPr>
         <p:spPr>
           <a:xfrm>
-            <a:off x="7799832" y="1472184"/>
-            <a:ext cx="3145536" cy="256032"/>
+            <a:off x="7708392" y="1453896"/>
+            <a:ext cx="3282696" cy="228600"/>
           </a:xfrm>
           <a:prstGeom prst="rect">
             <a:avLst/>
@@ -9263,7 +9265,7 @@
               <a:buNone/>
             </a:pPr>
             <a:r>
-              <a:rPr lang="en-US" sz="1300" b="1" dirty="0">
+              <a:rPr lang="en-US" sz="1220" b="1" dirty="0">
                 <a:solidFill>
                   <a:srgbClr val="0068B7"/>
                 </a:solidFill>
@@ -9273,7 +9275,7 @@
               </a:rPr>
               <a:t>Data decision</a:t>
             </a:r>
-            <a:endParaRPr lang="en-US" sz="1300" dirty="0"/>
+            <a:endParaRPr lang="en-US" sz="1220" dirty="0"/>
           </a:p>
         </p:txBody>
       </p:sp>
@@ -9285,8 +9287,8 @@
         </p:nvSpPr>
         <p:spPr>
           <a:xfrm>
-            <a:off x="7799832" y="1801368"/>
-            <a:ext cx="3145536" cy="640080"/>
+            <a:off x="7708392" y="1764792"/>
+            <a:ext cx="3282696" cy="749808"/>
           </a:xfrm>
           <a:prstGeom prst="rect">
             <a:avLst/>
@@ -9304,7 +9306,7 @@
               <a:buNone/>
             </a:pPr>
             <a:r>
-              <a:rPr lang="en-US" sz="1320" dirty="0">
+              <a:rPr lang="en-US" sz="1220" dirty="0">
                 <a:solidFill>
                   <a:srgbClr val="17364A"/>
                 </a:solidFill>
@@ -9314,7 +9316,7 @@
               </a:rPr>
               <a:t>Data quality review plan</a:t>
             </a:r>
-            <a:endParaRPr lang="en-US" sz="1320" dirty="0"/>
+            <a:endParaRPr lang="en-US" sz="1220" dirty="0"/>
           </a:p>
         </p:txBody>
       </p:sp>
@@ -9326,12 +9328,12 @@
         </p:nvSpPr>
         <p:spPr>
           <a:xfrm>
-            <a:off x="7635240" y="2670048"/>
-            <a:ext cx="3474720" cy="1377086"/>
+            <a:off x="7543800" y="2724912"/>
+            <a:ext cx="3611880" cy="1527048"/>
           </a:xfrm>
           <a:prstGeom prst="roundRect">
             <a:avLst>
-              <a:gd name="adj" fmla="val 7968"/>
+              <a:gd name="adj" fmla="val 7186"/>
             </a:avLst>
           </a:prstGeom>
           <a:solidFill>
@@ -9353,8 +9355,8 @@
         </p:nvSpPr>
         <p:spPr>
           <a:xfrm>
-            <a:off x="7799832" y="2816352"/>
-            <a:ext cx="3145536" cy="256032"/>
+            <a:off x="7708392" y="2852928"/>
+            <a:ext cx="3282696" cy="228600"/>
           </a:xfrm>
           <a:prstGeom prst="rect">
             <a:avLst/>
@@ -9370,7 +9372,7 @@
               <a:buNone/>
             </a:pPr>
             <a:r>
-              <a:rPr lang="en-US" sz="1300" b="1" dirty="0">
+              <a:rPr lang="en-US" sz="1220" b="1" dirty="0">
                 <a:solidFill>
                   <a:srgbClr val="0068B7"/>
                 </a:solidFill>
@@ -9380,7 +9382,7 @@
               </a:rPr>
               <a:t>Concept checkpoints</a:t>
             </a:r>
-            <a:endParaRPr lang="en-US" sz="1300" dirty="0"/>
+            <a:endParaRPr lang="en-US" sz="1220" dirty="0"/>
           </a:p>
         </p:txBody>
       </p:sp>
@@ -9392,8 +9394,8 @@
         </p:nvSpPr>
         <p:spPr>
           <a:xfrm>
-            <a:off x="7818120" y="3182112"/>
-            <a:ext cx="3090672" cy="718718"/>
+            <a:off x="7726680" y="3182112"/>
+            <a:ext cx="3227832" cy="960120"/>
           </a:xfrm>
           <a:prstGeom prst="rect">
             <a:avLst/>
@@ -9411,7 +9413,7 @@
               <a:buNone/>
             </a:pPr>
             <a:r>
-              <a:rPr lang="en-US" sz="1220" dirty="0">
+              <a:rPr lang="en-US" sz="1140" dirty="0">
                 <a:solidFill>
                   <a:srgbClr val="17364A"/>
                 </a:solidFill>
@@ -9421,14 +9423,14 @@
               </a:rPr>
               <a:t>Data quality review plan</a:t>
             </a:r>
-            <a:endParaRPr lang="en-US" sz="1220" dirty="0"/>
-          </a:p>
-          <a:p>
-            <a:pPr indent="0" marL="0">
-              <a:buNone/>
-            </a:pPr>
-            <a:r>
-              <a:rPr lang="en-US" sz="1220" dirty="0">
+            <a:endParaRPr lang="en-US" sz="1140" dirty="0"/>
+          </a:p>
+          <a:p>
+            <a:pPr indent="0" marL="0">
+              <a:buNone/>
+            </a:pPr>
+            <a:r>
+              <a:rPr lang="en-US" sz="1140" dirty="0">
                 <a:solidFill>
                   <a:srgbClr val="17364A"/>
                 </a:solidFill>
@@ -9438,14 +9440,14 @@
               </a:rPr>
               <a:t>Data quality checklist</a:t>
             </a:r>
-            <a:endParaRPr lang="en-US" sz="1220" dirty="0"/>
-          </a:p>
-          <a:p>
-            <a:pPr indent="0" marL="0">
-              <a:buNone/>
-            </a:pPr>
-            <a:r>
-              <a:rPr lang="en-US" sz="1220" dirty="0">
+            <a:endParaRPr lang="en-US" sz="1140" dirty="0"/>
+          </a:p>
+          <a:p>
+            <a:pPr indent="0" marL="0">
+              <a:buNone/>
+            </a:pPr>
+            <a:r>
+              <a:rPr lang="en-US" sz="1140" dirty="0">
                 <a:solidFill>
                   <a:srgbClr val="17364A"/>
                 </a:solidFill>
@@ -9455,7 +9457,7 @@
               </a:rPr>
               <a:t>Thresholds or review criteria</a:t>
             </a:r>
-            <a:endParaRPr lang="en-US" sz="1220" dirty="0"/>
+            <a:endParaRPr lang="en-US" sz="1140" dirty="0"/>
           </a:p>
         </p:txBody>
       </p:sp>
@@ -9467,12 +9469,12 @@
         </p:nvSpPr>
         <p:spPr>
           <a:xfrm>
-            <a:off x="7635240" y="4184294"/>
-            <a:ext cx="3474720" cy="1466698"/>
+            <a:off x="7543800" y="4389120"/>
+            <a:ext cx="3611880" cy="1261872"/>
           </a:xfrm>
           <a:prstGeom prst="roundRect">
             <a:avLst>
-              <a:gd name="adj" fmla="val 7481"/>
+              <a:gd name="adj" fmla="val 8696"/>
             </a:avLst>
           </a:prstGeom>
           <a:solidFill>
@@ -9494,8 +9496,8 @@
         </p:nvSpPr>
         <p:spPr>
           <a:xfrm>
-            <a:off x="7799832" y="4330598"/>
-            <a:ext cx="3145536" cy="256032"/>
+            <a:off x="7708392" y="4517136"/>
+            <a:ext cx="3282696" cy="228600"/>
           </a:xfrm>
           <a:prstGeom prst="rect">
             <a:avLst/>
@@ -9511,7 +9513,7 @@
               <a:buNone/>
             </a:pPr>
             <a:r>
-              <a:rPr lang="en-US" sz="1300" b="1" dirty="0">
+              <a:rPr lang="en-US" sz="1220" b="1" dirty="0">
                 <a:solidFill>
                   <a:srgbClr val="0068B7"/>
                 </a:solidFill>
@@ -9521,7 +9523,7 @@
               </a:rPr>
               <a:t>How to validate</a:t>
             </a:r>
-            <a:endParaRPr lang="en-US" sz="1300" dirty="0"/>
+            <a:endParaRPr lang="en-US" sz="1220" dirty="0"/>
           </a:p>
         </p:txBody>
       </p:sp>
@@ -9533,8 +9535,8 @@
         </p:nvSpPr>
         <p:spPr>
           <a:xfrm>
-            <a:off x="7799832" y="4659782"/>
-            <a:ext cx="3145536" cy="899770"/>
+            <a:off x="7708392" y="4828032"/>
+            <a:ext cx="3282696" cy="749808"/>
           </a:xfrm>
           <a:prstGeom prst="rect">
             <a:avLst/>
@@ -9552,7 +9554,7 @@
               <a:buNone/>
             </a:pPr>
             <a:r>
-              <a:rPr lang="en-US" sz="1320" dirty="0">
+              <a:rPr lang="en-US" sz="1220" dirty="0">
                 <a:solidFill>
                   <a:srgbClr val="17364A"/>
                 </a:solidFill>
@@ -9560,9 +9562,9 @@
                 <a:ea typeface="Aptos" pitchFamily="34" charset="-122"/>
                 <a:cs typeface="Aptos" pitchFamily="34" charset="-120"/>
               </a:rPr>
-              <a:t>Connect the concept to data quality, model performance, validation evidence, monitoring measures, and decisions that remain under human control.</a:t>
-            </a:r>
-            <a:endParaRPr lang="en-US" sz="1320" dirty="0"/>
+              <a:t>Connect the concept to data quality, model performance, validation evidence,.</a:t>
+            </a:r>
+            <a:endParaRPr lang="en-US" sz="1220" dirty="0"/>
           </a:p>
         </p:txBody>
       </p:sp>
@@ -9853,8 +9855,8 @@
         </p:nvSpPr>
         <p:spPr>
           <a:xfrm>
-            <a:off x="868680" y="1508760"/>
-            <a:ext cx="6309360" cy="4160520"/>
+            <a:off x="822960" y="1463040"/>
+            <a:ext cx="6565392" cy="4343400"/>
           </a:xfrm>
           <a:prstGeom prst="rect">
             <a:avLst/>
@@ -9872,7 +9874,7 @@
               <a:buNone/>
             </a:pPr>
             <a:r>
-              <a:rPr lang="en-US" sz="2100" dirty="0">
+              <a:rPr lang="en-US" sz="1920" dirty="0">
                 <a:solidFill>
                   <a:srgbClr val="003A63"/>
                 </a:solidFill>
@@ -9882,7 +9884,7 @@
               </a:rPr>
               <a:t>• Known limitations statement</a:t>
             </a:r>
-            <a:endParaRPr lang="en-US" sz="2100" dirty="0"/>
+            <a:endParaRPr lang="en-US" sz="1920" dirty="0"/>
           </a:p>
         </p:txBody>
       </p:sp>
@@ -9894,12 +9896,12 @@
         </p:nvSpPr>
         <p:spPr>
           <a:xfrm>
-            <a:off x="7635240" y="1325880"/>
-            <a:ext cx="3474720" cy="1207008"/>
+            <a:off x="7543800" y="1325880"/>
+            <a:ext cx="3611880" cy="1261872"/>
           </a:xfrm>
           <a:prstGeom prst="roundRect">
             <a:avLst>
-              <a:gd name="adj" fmla="val 9091"/>
+              <a:gd name="adj" fmla="val 8696"/>
             </a:avLst>
           </a:prstGeom>
           <a:solidFill>
@@ -9921,8 +9923,8 @@
         </p:nvSpPr>
         <p:spPr>
           <a:xfrm>
-            <a:off x="7799832" y="1472184"/>
-            <a:ext cx="3145536" cy="256032"/>
+            <a:off x="7708392" y="1453896"/>
+            <a:ext cx="3282696" cy="228600"/>
           </a:xfrm>
           <a:prstGeom prst="rect">
             <a:avLst/>
@@ -9938,7 +9940,7 @@
               <a:buNone/>
             </a:pPr>
             <a:r>
-              <a:rPr lang="en-US" sz="1300" b="1" dirty="0">
+              <a:rPr lang="en-US" sz="1220" b="1" dirty="0">
                 <a:solidFill>
                   <a:srgbClr val="0068B7"/>
                 </a:solidFill>
@@ -9948,7 +9950,7 @@
               </a:rPr>
               <a:t>Data decision</a:t>
             </a:r>
-            <a:endParaRPr lang="en-US" sz="1300" dirty="0"/>
+            <a:endParaRPr lang="en-US" sz="1220" dirty="0"/>
           </a:p>
         </p:txBody>
       </p:sp>
@@ -9960,8 +9962,8 @@
         </p:nvSpPr>
         <p:spPr>
           <a:xfrm>
-            <a:off x="7799832" y="1801368"/>
-            <a:ext cx="3145536" cy="640080"/>
+            <a:off x="7708392" y="1764792"/>
+            <a:ext cx="3282696" cy="749808"/>
           </a:xfrm>
           <a:prstGeom prst="rect">
             <a:avLst/>
@@ -9979,7 +9981,7 @@
               <a:buNone/>
             </a:pPr>
             <a:r>
-              <a:rPr lang="en-US" sz="1320" dirty="0">
+              <a:rPr lang="en-US" sz="1220" dirty="0">
                 <a:solidFill>
                   <a:srgbClr val="17364A"/>
                 </a:solidFill>
@@ -9989,7 +9991,7 @@
               </a:rPr>
               <a:t>Known limitations statement</a:t>
             </a:r>
-            <a:endParaRPr lang="en-US" sz="1320" dirty="0"/>
+            <a:endParaRPr lang="en-US" sz="1220" dirty="0"/>
           </a:p>
         </p:txBody>
       </p:sp>
@@ -10001,12 +10003,12 @@
         </p:nvSpPr>
         <p:spPr>
           <a:xfrm>
-            <a:off x="7635240" y="2670048"/>
-            <a:ext cx="3474720" cy="1377086"/>
+            <a:off x="7543800" y="2724912"/>
+            <a:ext cx="3611880" cy="1527048"/>
           </a:xfrm>
           <a:prstGeom prst="roundRect">
             <a:avLst>
-              <a:gd name="adj" fmla="val 7968"/>
+              <a:gd name="adj" fmla="val 7186"/>
             </a:avLst>
           </a:prstGeom>
           <a:solidFill>
@@ -10028,8 +10030,8 @@
         </p:nvSpPr>
         <p:spPr>
           <a:xfrm>
-            <a:off x="7799832" y="2816352"/>
-            <a:ext cx="3145536" cy="256032"/>
+            <a:off x="7708392" y="2852928"/>
+            <a:ext cx="3282696" cy="228600"/>
           </a:xfrm>
           <a:prstGeom prst="rect">
             <a:avLst/>
@@ -10045,7 +10047,7 @@
               <a:buNone/>
             </a:pPr>
             <a:r>
-              <a:rPr lang="en-US" sz="1300" b="1" dirty="0">
+              <a:rPr lang="en-US" sz="1220" b="1" dirty="0">
                 <a:solidFill>
                   <a:srgbClr val="0068B7"/>
                 </a:solidFill>
@@ -10055,7 +10057,7 @@
               </a:rPr>
               <a:t>Concept checkpoints</a:t>
             </a:r>
-            <a:endParaRPr lang="en-US" sz="1300" dirty="0"/>
+            <a:endParaRPr lang="en-US" sz="1220" dirty="0"/>
           </a:p>
         </p:txBody>
       </p:sp>
@@ -10067,8 +10069,8 @@
         </p:nvSpPr>
         <p:spPr>
           <a:xfrm>
-            <a:off x="7818120" y="3182112"/>
-            <a:ext cx="3090672" cy="718718"/>
+            <a:off x="7726680" y="3182112"/>
+            <a:ext cx="3227832" cy="960120"/>
           </a:xfrm>
           <a:prstGeom prst="rect">
             <a:avLst/>
@@ -10086,7 +10088,7 @@
               <a:buNone/>
             </a:pPr>
             <a:r>
-              <a:rPr lang="en-US" sz="1220" dirty="0">
+              <a:rPr lang="en-US" sz="1140" dirty="0">
                 <a:solidFill>
                   <a:srgbClr val="17364A"/>
                 </a:solidFill>
@@ -10096,7 +10098,7 @@
               </a:rPr>
               <a:t>Known limitations statement</a:t>
             </a:r>
-            <a:endParaRPr lang="en-US" sz="1220" dirty="0"/>
+            <a:endParaRPr lang="en-US" sz="1140" dirty="0"/>
           </a:p>
         </p:txBody>
       </p:sp>
@@ -10108,12 +10110,12 @@
         </p:nvSpPr>
         <p:spPr>
           <a:xfrm>
-            <a:off x="7635240" y="4184294"/>
-            <a:ext cx="3474720" cy="1466698"/>
+            <a:off x="7543800" y="4389120"/>
+            <a:ext cx="3611880" cy="1261872"/>
           </a:xfrm>
           <a:prstGeom prst="roundRect">
             <a:avLst>
-              <a:gd name="adj" fmla="val 7481"/>
+              <a:gd name="adj" fmla="val 8696"/>
             </a:avLst>
           </a:prstGeom>
           <a:solidFill>
@@ -10135,8 +10137,8 @@
         </p:nvSpPr>
         <p:spPr>
           <a:xfrm>
-            <a:off x="7799832" y="4330598"/>
-            <a:ext cx="3145536" cy="256032"/>
+            <a:off x="7708392" y="4517136"/>
+            <a:ext cx="3282696" cy="228600"/>
           </a:xfrm>
           <a:prstGeom prst="rect">
             <a:avLst/>
@@ -10152,7 +10154,7 @@
               <a:buNone/>
             </a:pPr>
             <a:r>
-              <a:rPr lang="en-US" sz="1300" b="1" dirty="0">
+              <a:rPr lang="en-US" sz="1220" b="1" dirty="0">
                 <a:solidFill>
                   <a:srgbClr val="0068B7"/>
                 </a:solidFill>
@@ -10162,7 +10164,7 @@
               </a:rPr>
               <a:t>How to validate</a:t>
             </a:r>
-            <a:endParaRPr lang="en-US" sz="1300" dirty="0"/>
+            <a:endParaRPr lang="en-US" sz="1220" dirty="0"/>
           </a:p>
         </p:txBody>
       </p:sp>
@@ -10174,8 +10176,8 @@
         </p:nvSpPr>
         <p:spPr>
           <a:xfrm>
-            <a:off x="7799832" y="4659782"/>
-            <a:ext cx="3145536" cy="899770"/>
+            <a:off x="7708392" y="4828032"/>
+            <a:ext cx="3282696" cy="749808"/>
           </a:xfrm>
           <a:prstGeom prst="rect">
             <a:avLst/>
@@ -10193,7 +10195,7 @@
               <a:buNone/>
             </a:pPr>
             <a:r>
-              <a:rPr lang="en-US" sz="1320" dirty="0">
+              <a:rPr lang="en-US" sz="1220" dirty="0">
                 <a:solidFill>
                   <a:srgbClr val="17364A"/>
                 </a:solidFill>
@@ -10201,9 +10203,9 @@
                 <a:ea typeface="Aptos" pitchFamily="34" charset="-122"/>
                 <a:cs typeface="Aptos" pitchFamily="34" charset="-120"/>
               </a:rPr>
-              <a:t>Connect the concept to data quality, model performance, validation evidence, monitoring measures, and decisions that remain under human control.</a:t>
-            </a:r>
-            <a:endParaRPr lang="en-US" sz="1320" dirty="0"/>
+              <a:t>Connect the concept to data quality, model performance, validation evidence,.</a:t>
+            </a:r>
+            <a:endParaRPr lang="en-US" sz="1220" dirty="0"/>
           </a:p>
         </p:txBody>
       </p:sp>
@@ -10521,7 +10523,7 @@
                 <a:ea typeface="Aptos" pitchFamily="34" charset="-122"/>
                 <a:cs typeface="Aptos" pitchFamily="34" charset="-120"/>
               </a:rPr>
-              <a:t>• Data quality engineering is the practical work of defining, measuring, improving, and.</a:t>
+              <a:t>• Data quality engineering is the practical work of defining, measuring,.</a:t>
             </a:r>
             <a:endParaRPr lang="en-US" sz="2100" dirty="0"/>
           </a:p>
@@ -10555,7 +10557,7 @@
                 <a:ea typeface="Aptos" pitchFamily="34" charset="-122"/>
                 <a:cs typeface="Aptos" pitchFamily="34" charset="-120"/>
               </a:rPr>
-              <a:t>• It directly affects whether AI outputs are accurate, equitable, timely, and safe enough to.</a:t>
+              <a:t>• It directly affects whether AI outputs are accurate, equitable, timely, and.</a:t>
             </a:r>
             <a:endParaRPr lang="en-US" sz="2100" dirty="0"/>
           </a:p>
@@ -10596,8 +10598,8 @@
         </p:nvSpPr>
         <p:spPr>
           <a:xfrm>
-            <a:off x="8074152" y="1563624"/>
-            <a:ext cx="2825496" cy="256032"/>
+            <a:off x="8074152" y="1545336"/>
+            <a:ext cx="2825496" cy="228600"/>
           </a:xfrm>
           <a:prstGeom prst="rect">
             <a:avLst/>
@@ -10613,7 +10615,7 @@
               <a:buNone/>
             </a:pPr>
             <a:r>
-              <a:rPr lang="en-US" sz="1300" b="1" dirty="0">
+              <a:rPr lang="en-US" sz="1220" b="1" dirty="0">
                 <a:solidFill>
                   <a:srgbClr val="0068B7"/>
                 </a:solidFill>
@@ -10623,7 +10625,7 @@
               </a:rPr>
               <a:t>Module details</a:t>
             </a:r>
-            <a:endParaRPr lang="en-US" sz="1300" dirty="0"/>
+            <a:endParaRPr lang="en-US" sz="1220" dirty="0"/>
           </a:p>
         </p:txBody>
       </p:sp>
@@ -10635,8 +10637,8 @@
         </p:nvSpPr>
         <p:spPr>
           <a:xfrm>
-            <a:off x="8074152" y="1892808"/>
-            <a:ext cx="2825496" cy="1353312"/>
+            <a:off x="8074152" y="1856232"/>
+            <a:ext cx="2825496" cy="1408176"/>
           </a:xfrm>
           <a:prstGeom prst="rect">
             <a:avLst/>
@@ -10654,7 +10656,7 @@
               <a:buNone/>
             </a:pPr>
             <a:r>
-              <a:rPr lang="en-US" sz="1320" dirty="0">
+              <a:rPr lang="en-US" sz="1220" dirty="0">
                 <a:solidFill>
                   <a:srgbClr val="17364A"/>
                 </a:solidFill>
@@ -10662,9 +10664,9 @@
                 <a:ea typeface="Aptos" pitchFamily="34" charset="-122"/>
                 <a:cs typeface="Aptos" pitchFamily="34" charset="-120"/>
               </a:rPr>
-              <a:t>Level: applied/foundational Primary track: Operations and Data Quality Track Appears in tracks: technical-architecture</a:t>
-            </a:r>
-            <a:endParaRPr lang="en-US" sz="1320" dirty="0"/>
+              <a:t>Level: applied/foundational Primary track: Operations and Data Quality Track.</a:t>
+            </a:r>
+            <a:endParaRPr lang="en-US" sz="1220" dirty="0"/>
           </a:p>
         </p:txBody>
       </p:sp>
@@ -10703,8 +10705,8 @@
         </p:nvSpPr>
         <p:spPr>
           <a:xfrm>
-            <a:off x="8074152" y="3822192"/>
-            <a:ext cx="2825496" cy="256032"/>
+            <a:off x="8074152" y="3803904"/>
+            <a:ext cx="2825496" cy="228600"/>
           </a:xfrm>
           <a:prstGeom prst="rect">
             <a:avLst/>
@@ -10720,7 +10722,7 @@
               <a:buNone/>
             </a:pPr>
             <a:r>
-              <a:rPr lang="en-US" sz="1300" b="1" dirty="0">
+              <a:rPr lang="en-US" sz="1220" b="1" dirty="0">
                 <a:solidFill>
                   <a:srgbClr val="0068B7"/>
                 </a:solidFill>
@@ -10730,7 +10732,7 @@
               </a:rPr>
               <a:t>Learning sequence</a:t>
             </a:r>
-            <a:endParaRPr lang="en-US" sz="1300" dirty="0"/>
+            <a:endParaRPr lang="en-US" sz="1220" dirty="0"/>
           </a:p>
         </p:txBody>
       </p:sp>
@@ -10742,8 +10744,8 @@
         </p:nvSpPr>
         <p:spPr>
           <a:xfrm>
-            <a:off x="8092440" y="4187952"/>
-            <a:ext cx="2770632" cy="1033272"/>
+            <a:off x="8092440" y="4133088"/>
+            <a:ext cx="2770632" cy="1124712"/>
           </a:xfrm>
           <a:prstGeom prst="rect">
             <a:avLst/>
@@ -10761,7 +10763,7 @@
               <a:buNone/>
             </a:pPr>
             <a:r>
-              <a:rPr lang="en-US" sz="1220" dirty="0">
+              <a:rPr lang="en-US" sz="1140" dirty="0">
                 <a:solidFill>
                   <a:srgbClr val="17364A"/>
                 </a:solidFill>
@@ -10771,14 +10773,14 @@
               </a:rPr>
               <a:t>Read the module for shared vocabulary and context.</a:t>
             </a:r>
-            <a:endParaRPr lang="en-US" sz="1220" dirty="0"/>
-          </a:p>
-          <a:p>
-            <a:pPr indent="0" marL="0">
-              <a:buNone/>
-            </a:pPr>
-            <a:r>
-              <a:rPr lang="en-US" sz="1220" dirty="0">
+            <a:endParaRPr lang="en-US" sz="1140" dirty="0"/>
+          </a:p>
+          <a:p>
+            <a:pPr indent="0" marL="0">
+              <a:buNone/>
+            </a:pPr>
+            <a:r>
+              <a:rPr lang="en-US" sz="1140" dirty="0">
                 <a:solidFill>
                   <a:srgbClr val="17364A"/>
                 </a:solidFill>
@@ -10786,16 +10788,16 @@
                 <a:ea typeface="Aptos" pitchFamily="34" charset="-122"/>
                 <a:cs typeface="Aptos" pitchFamily="34" charset="-120"/>
               </a:rPr>
-              <a:t>Complete the practical exercise to apply the concept.</a:t>
-            </a:r>
-            <a:endParaRPr lang="en-US" sz="1220" dirty="0"/>
-          </a:p>
-          <a:p>
-            <a:pPr indent="0" marL="0">
-              <a:buNone/>
-            </a:pPr>
-            <a:r>
-              <a:rPr lang="en-US" sz="1220" dirty="0">
+              <a:t>Complete the practical exercise to apply the.</a:t>
+            </a:r>
+            <a:endParaRPr lang="en-US" sz="1140" dirty="0"/>
+          </a:p>
+          <a:p>
+            <a:pPr indent="0" marL="0">
+              <a:buNone/>
+            </a:pPr>
+            <a:r>
+              <a:rPr lang="en-US" sz="1140" dirty="0">
                 <a:solidFill>
                   <a:srgbClr val="17364A"/>
                 </a:solidFill>
@@ -10805,7 +10807,7 @@
               </a:rPr>
               <a:t>Use the notes and references for deeper review.</a:t>
             </a:r>
-            <a:endParaRPr lang="en-US" sz="1220" dirty="0"/>
+            <a:endParaRPr lang="en-US" sz="1140" dirty="0"/>
           </a:p>
         </p:txBody>
       </p:sp>
@@ -11096,8 +11098,8 @@
         </p:nvSpPr>
         <p:spPr>
           <a:xfrm>
-            <a:off x="868680" y="1508760"/>
-            <a:ext cx="6309360" cy="4160520"/>
+            <a:off x="822960" y="1463040"/>
+            <a:ext cx="6565392" cy="4343400"/>
           </a:xfrm>
           <a:prstGeom prst="rect">
             <a:avLst/>
@@ -11115,7 +11117,7 @@
               <a:buNone/>
             </a:pPr>
             <a:r>
-              <a:rPr lang="en-US" sz="2100" dirty="0">
+              <a:rPr lang="en-US" sz="1920" dirty="0">
                 <a:solidFill>
                   <a:srgbClr val="003A63"/>
                 </a:solidFill>
@@ -11125,14 +11127,14 @@
               </a:rPr>
               <a:t>• Data quality review plan</a:t>
             </a:r>
-            <a:endParaRPr lang="en-US" sz="2100" dirty="0"/>
-          </a:p>
-          <a:p>
-            <a:pPr indent="0" marL="0">
-              <a:buNone/>
-            </a:pPr>
-            <a:r>
-              <a:rPr lang="en-US" sz="2100" dirty="0">
+            <a:endParaRPr lang="en-US" sz="1920" dirty="0"/>
+          </a:p>
+          <a:p>
+            <a:pPr indent="0" marL="0">
+              <a:buNone/>
+            </a:pPr>
+            <a:r>
+              <a:rPr lang="en-US" sz="1920" dirty="0">
                 <a:solidFill>
                   <a:srgbClr val="003A63"/>
                 </a:solidFill>
@@ -11142,14 +11144,14 @@
               </a:rPr>
               <a:t>• Data quality checklist</a:t>
             </a:r>
-            <a:endParaRPr lang="en-US" sz="2100" dirty="0"/>
-          </a:p>
-          <a:p>
-            <a:pPr indent="0" marL="0">
-              <a:buNone/>
-            </a:pPr>
-            <a:r>
-              <a:rPr lang="en-US" sz="2100" dirty="0">
+            <a:endParaRPr lang="en-US" sz="1920" dirty="0"/>
+          </a:p>
+          <a:p>
+            <a:pPr indent="0" marL="0">
+              <a:buNone/>
+            </a:pPr>
+            <a:r>
+              <a:rPr lang="en-US" sz="1920" dirty="0">
                 <a:solidFill>
                   <a:srgbClr val="003A63"/>
                 </a:solidFill>
@@ -11159,7 +11161,7 @@
               </a:rPr>
               <a:t>• Thresholds or review criteria</a:t>
             </a:r>
-            <a:endParaRPr lang="en-US" sz="2100" dirty="0"/>
+            <a:endParaRPr lang="en-US" sz="1920" dirty="0"/>
           </a:p>
         </p:txBody>
       </p:sp>
@@ -11171,12 +11173,12 @@
         </p:nvSpPr>
         <p:spPr>
           <a:xfrm>
-            <a:off x="7635240" y="1325880"/>
-            <a:ext cx="3474720" cy="1207008"/>
+            <a:off x="7543800" y="1325880"/>
+            <a:ext cx="3611880" cy="1261872"/>
           </a:xfrm>
           <a:prstGeom prst="roundRect">
             <a:avLst>
-              <a:gd name="adj" fmla="val 9091"/>
+              <a:gd name="adj" fmla="val 8696"/>
             </a:avLst>
           </a:prstGeom>
           <a:solidFill>
@@ -11198,8 +11200,8 @@
         </p:nvSpPr>
         <p:spPr>
           <a:xfrm>
-            <a:off x="7799832" y="1472184"/>
-            <a:ext cx="3145536" cy="256032"/>
+            <a:off x="7708392" y="1453896"/>
+            <a:ext cx="3282696" cy="228600"/>
           </a:xfrm>
           <a:prstGeom prst="rect">
             <a:avLst/>
@@ -11215,7 +11217,7 @@
               <a:buNone/>
             </a:pPr>
             <a:r>
-              <a:rPr lang="en-US" sz="1300" b="1" dirty="0">
+              <a:rPr lang="en-US" sz="1220" b="1" dirty="0">
                 <a:solidFill>
                   <a:srgbClr val="0068B7"/>
                 </a:solidFill>
@@ -11225,7 +11227,7 @@
               </a:rPr>
               <a:t>Data decision</a:t>
             </a:r>
-            <a:endParaRPr lang="en-US" sz="1300" dirty="0"/>
+            <a:endParaRPr lang="en-US" sz="1220" dirty="0"/>
           </a:p>
         </p:txBody>
       </p:sp>
@@ -11237,8 +11239,8 @@
         </p:nvSpPr>
         <p:spPr>
           <a:xfrm>
-            <a:off x="7799832" y="1801368"/>
-            <a:ext cx="3145536" cy="640080"/>
+            <a:off x="7708392" y="1764792"/>
+            <a:ext cx="3282696" cy="749808"/>
           </a:xfrm>
           <a:prstGeom prst="rect">
             <a:avLst/>
@@ -11256,7 +11258,7 @@
               <a:buNone/>
             </a:pPr>
             <a:r>
-              <a:rPr lang="en-US" sz="1320" dirty="0">
+              <a:rPr lang="en-US" sz="1220" dirty="0">
                 <a:solidFill>
                   <a:srgbClr val="17364A"/>
                 </a:solidFill>
@@ -11266,7 +11268,7 @@
               </a:rPr>
               <a:t>Data quality review plan</a:t>
             </a:r>
-            <a:endParaRPr lang="en-US" sz="1320" dirty="0"/>
+            <a:endParaRPr lang="en-US" sz="1220" dirty="0"/>
           </a:p>
         </p:txBody>
       </p:sp>
@@ -11278,12 +11280,12 @@
         </p:nvSpPr>
         <p:spPr>
           <a:xfrm>
-            <a:off x="7635240" y="2670048"/>
-            <a:ext cx="3474720" cy="1377086"/>
+            <a:off x="7543800" y="2724912"/>
+            <a:ext cx="3611880" cy="1527048"/>
           </a:xfrm>
           <a:prstGeom prst="roundRect">
             <a:avLst>
-              <a:gd name="adj" fmla="val 7968"/>
+              <a:gd name="adj" fmla="val 7186"/>
             </a:avLst>
           </a:prstGeom>
           <a:solidFill>
@@ -11305,8 +11307,8 @@
         </p:nvSpPr>
         <p:spPr>
           <a:xfrm>
-            <a:off x="7799832" y="2816352"/>
-            <a:ext cx="3145536" cy="256032"/>
+            <a:off x="7708392" y="2852928"/>
+            <a:ext cx="3282696" cy="228600"/>
           </a:xfrm>
           <a:prstGeom prst="rect">
             <a:avLst/>
@@ -11322,7 +11324,7 @@
               <a:buNone/>
             </a:pPr>
             <a:r>
-              <a:rPr lang="en-US" sz="1300" b="1" dirty="0">
+              <a:rPr lang="en-US" sz="1220" b="1" dirty="0">
                 <a:solidFill>
                   <a:srgbClr val="0068B7"/>
                 </a:solidFill>
@@ -11332,7 +11334,7 @@
               </a:rPr>
               <a:t>Concept checkpoints</a:t>
             </a:r>
-            <a:endParaRPr lang="en-US" sz="1300" dirty="0"/>
+            <a:endParaRPr lang="en-US" sz="1220" dirty="0"/>
           </a:p>
         </p:txBody>
       </p:sp>
@@ -11344,8 +11346,8 @@
         </p:nvSpPr>
         <p:spPr>
           <a:xfrm>
-            <a:off x="7818120" y="3182112"/>
-            <a:ext cx="3090672" cy="718718"/>
+            <a:off x="7726680" y="3182112"/>
+            <a:ext cx="3227832" cy="960120"/>
           </a:xfrm>
           <a:prstGeom prst="rect">
             <a:avLst/>
@@ -11363,7 +11365,7 @@
               <a:buNone/>
             </a:pPr>
             <a:r>
-              <a:rPr lang="en-US" sz="1220" dirty="0">
+              <a:rPr lang="en-US" sz="1140" dirty="0">
                 <a:solidFill>
                   <a:srgbClr val="17364A"/>
                 </a:solidFill>
@@ -11373,14 +11375,14 @@
               </a:rPr>
               <a:t>Data quality review plan</a:t>
             </a:r>
-            <a:endParaRPr lang="en-US" sz="1220" dirty="0"/>
-          </a:p>
-          <a:p>
-            <a:pPr indent="0" marL="0">
-              <a:buNone/>
-            </a:pPr>
-            <a:r>
-              <a:rPr lang="en-US" sz="1220" dirty="0">
+            <a:endParaRPr lang="en-US" sz="1140" dirty="0"/>
+          </a:p>
+          <a:p>
+            <a:pPr indent="0" marL="0">
+              <a:buNone/>
+            </a:pPr>
+            <a:r>
+              <a:rPr lang="en-US" sz="1140" dirty="0">
                 <a:solidFill>
                   <a:srgbClr val="17364A"/>
                 </a:solidFill>
@@ -11390,14 +11392,14 @@
               </a:rPr>
               <a:t>Data quality checklist</a:t>
             </a:r>
-            <a:endParaRPr lang="en-US" sz="1220" dirty="0"/>
-          </a:p>
-          <a:p>
-            <a:pPr indent="0" marL="0">
-              <a:buNone/>
-            </a:pPr>
-            <a:r>
-              <a:rPr lang="en-US" sz="1220" dirty="0">
+            <a:endParaRPr lang="en-US" sz="1140" dirty="0"/>
+          </a:p>
+          <a:p>
+            <a:pPr indent="0" marL="0">
+              <a:buNone/>
+            </a:pPr>
+            <a:r>
+              <a:rPr lang="en-US" sz="1140" dirty="0">
                 <a:solidFill>
                   <a:srgbClr val="17364A"/>
                 </a:solidFill>
@@ -11407,7 +11409,7 @@
               </a:rPr>
               <a:t>Thresholds or review criteria</a:t>
             </a:r>
-            <a:endParaRPr lang="en-US" sz="1220" dirty="0"/>
+            <a:endParaRPr lang="en-US" sz="1140" dirty="0"/>
           </a:p>
         </p:txBody>
       </p:sp>
@@ -11419,12 +11421,12 @@
         </p:nvSpPr>
         <p:spPr>
           <a:xfrm>
-            <a:off x="7635240" y="4184294"/>
-            <a:ext cx="3474720" cy="1466698"/>
+            <a:off x="7543800" y="4389120"/>
+            <a:ext cx="3611880" cy="1261872"/>
           </a:xfrm>
           <a:prstGeom prst="roundRect">
             <a:avLst>
-              <a:gd name="adj" fmla="val 7481"/>
+              <a:gd name="adj" fmla="val 8696"/>
             </a:avLst>
           </a:prstGeom>
           <a:solidFill>
@@ -11446,8 +11448,8 @@
         </p:nvSpPr>
         <p:spPr>
           <a:xfrm>
-            <a:off x="7799832" y="4330598"/>
-            <a:ext cx="3145536" cy="256032"/>
+            <a:off x="7708392" y="4517136"/>
+            <a:ext cx="3282696" cy="228600"/>
           </a:xfrm>
           <a:prstGeom prst="rect">
             <a:avLst/>
@@ -11463,7 +11465,7 @@
               <a:buNone/>
             </a:pPr>
             <a:r>
-              <a:rPr lang="en-US" sz="1300" b="1" dirty="0">
+              <a:rPr lang="en-US" sz="1220" b="1" dirty="0">
                 <a:solidFill>
                   <a:srgbClr val="0068B7"/>
                 </a:solidFill>
@@ -11473,7 +11475,7 @@
               </a:rPr>
               <a:t>How to validate</a:t>
             </a:r>
-            <a:endParaRPr lang="en-US" sz="1300" dirty="0"/>
+            <a:endParaRPr lang="en-US" sz="1220" dirty="0"/>
           </a:p>
         </p:txBody>
       </p:sp>
@@ -11485,8 +11487,8 @@
         </p:nvSpPr>
         <p:spPr>
           <a:xfrm>
-            <a:off x="7799832" y="4659782"/>
-            <a:ext cx="3145536" cy="899770"/>
+            <a:off x="7708392" y="4828032"/>
+            <a:ext cx="3282696" cy="749808"/>
           </a:xfrm>
           <a:prstGeom prst="rect">
             <a:avLst/>
@@ -11504,7 +11506,7 @@
               <a:buNone/>
             </a:pPr>
             <a:r>
-              <a:rPr lang="en-US" sz="1320" dirty="0">
+              <a:rPr lang="en-US" sz="1220" dirty="0">
                 <a:solidFill>
                   <a:srgbClr val="17364A"/>
                 </a:solidFill>
@@ -11512,9 +11514,9 @@
                 <a:ea typeface="Aptos" pitchFamily="34" charset="-122"/>
                 <a:cs typeface="Aptos" pitchFamily="34" charset="-120"/>
               </a:rPr>
-              <a:t>Use the assignment to test whether you can explain the concept, apply it to a realistic public health situation, and identify what would need review before the work moves forward.</a:t>
-            </a:r>
-            <a:endParaRPr lang="en-US" sz="1320" dirty="0"/>
+              <a:t>Use the assignment to test whether you can explain the concept, apply it to a.</a:t>
+            </a:r>
+            <a:endParaRPr lang="en-US" sz="1220" dirty="0"/>
           </a:p>
         </p:txBody>
       </p:sp>
@@ -11805,8 +11807,8 @@
         </p:nvSpPr>
         <p:spPr>
           <a:xfrm>
-            <a:off x="868680" y="1508760"/>
-            <a:ext cx="6309360" cy="4160520"/>
+            <a:off x="822960" y="1463040"/>
+            <a:ext cx="6565392" cy="4343400"/>
           </a:xfrm>
           <a:prstGeom prst="rect">
             <a:avLst/>
@@ -11824,7 +11826,7 @@
               <a:buNone/>
             </a:pPr>
             <a:r>
-              <a:rPr lang="en-US" sz="2100" dirty="0">
+              <a:rPr lang="en-US" sz="1920" dirty="0">
                 <a:solidFill>
                   <a:srgbClr val="003A63"/>
                 </a:solidFill>
@@ -11834,14 +11836,14 @@
               </a:rPr>
               <a:t>• 1. What does fitness for use mean?</a:t>
             </a:r>
-            <a:endParaRPr lang="en-US" sz="2100" dirty="0"/>
-          </a:p>
-          <a:p>
-            <a:pPr indent="0" marL="0">
-              <a:buNone/>
-            </a:pPr>
-            <a:r>
-              <a:rPr lang="en-US" sz="2100" dirty="0">
+            <a:endParaRPr lang="en-US" sz="1920" dirty="0"/>
+          </a:p>
+          <a:p>
+            <a:pPr indent="0" marL="0">
+              <a:buNone/>
+            </a:pPr>
+            <a:r>
+              <a:rPr lang="en-US" sz="1920" dirty="0">
                 <a:solidFill>
                   <a:srgbClr val="003A63"/>
                 </a:solidFill>
@@ -11851,14 +11853,14 @@
               </a:rPr>
               <a:t>• 2. Why can poor data quality be dangerous in AI-supported workflows?</a:t>
             </a:r>
-            <a:endParaRPr lang="en-US" sz="2100" dirty="0"/>
-          </a:p>
-          <a:p>
-            <a:pPr indent="0" marL="0">
-              <a:buNone/>
-            </a:pPr>
-            <a:r>
-              <a:rPr lang="en-US" sz="2100" dirty="0">
+            <a:endParaRPr lang="en-US" sz="1920" dirty="0"/>
+          </a:p>
+          <a:p>
+            <a:pPr indent="0" marL="0">
+              <a:buNone/>
+            </a:pPr>
+            <a:r>
+              <a:rPr lang="en-US" sz="1920" dirty="0">
                 <a:solidFill>
                   <a:srgbClr val="003A63"/>
                 </a:solidFill>
@@ -11868,7 +11870,7 @@
               </a:rPr>
               <a:t>• 3. What is data drift?</a:t>
             </a:r>
-            <a:endParaRPr lang="en-US" sz="2100" dirty="0"/>
+            <a:endParaRPr lang="en-US" sz="1920" dirty="0"/>
           </a:p>
         </p:txBody>
       </p:sp>
@@ -11880,12 +11882,12 @@
         </p:nvSpPr>
         <p:spPr>
           <a:xfrm>
-            <a:off x="7635240" y="1325880"/>
-            <a:ext cx="3474720" cy="1207008"/>
+            <a:off x="7543800" y="1325880"/>
+            <a:ext cx="3611880" cy="1261872"/>
           </a:xfrm>
           <a:prstGeom prst="roundRect">
             <a:avLst>
-              <a:gd name="adj" fmla="val 9091"/>
+              <a:gd name="adj" fmla="val 8696"/>
             </a:avLst>
           </a:prstGeom>
           <a:solidFill>
@@ -11907,8 +11909,8 @@
         </p:nvSpPr>
         <p:spPr>
           <a:xfrm>
-            <a:off x="7799832" y="1472184"/>
-            <a:ext cx="3145536" cy="256032"/>
+            <a:off x="7708392" y="1453896"/>
+            <a:ext cx="3282696" cy="228600"/>
           </a:xfrm>
           <a:prstGeom prst="rect">
             <a:avLst/>
@@ -11924,7 +11926,7 @@
               <a:buNone/>
             </a:pPr>
             <a:r>
-              <a:rPr lang="en-US" sz="1300" b="1" dirty="0">
+              <a:rPr lang="en-US" sz="1220" b="1" dirty="0">
                 <a:solidFill>
                   <a:srgbClr val="0068B7"/>
                 </a:solidFill>
@@ -11934,7 +11936,7 @@
               </a:rPr>
               <a:t>Data decision</a:t>
             </a:r>
-            <a:endParaRPr lang="en-US" sz="1300" dirty="0"/>
+            <a:endParaRPr lang="en-US" sz="1220" dirty="0"/>
           </a:p>
         </p:txBody>
       </p:sp>
@@ -11946,8 +11948,8 @@
         </p:nvSpPr>
         <p:spPr>
           <a:xfrm>
-            <a:off x="7799832" y="1801368"/>
-            <a:ext cx="3145536" cy="640080"/>
+            <a:off x="7708392" y="1764792"/>
+            <a:ext cx="3282696" cy="749808"/>
           </a:xfrm>
           <a:prstGeom prst="rect">
             <a:avLst/>
@@ -11965,7 +11967,7 @@
               <a:buNone/>
             </a:pPr>
             <a:r>
-              <a:rPr lang="en-US" sz="1320" dirty="0">
+              <a:rPr lang="en-US" sz="1220" dirty="0">
                 <a:solidFill>
                   <a:srgbClr val="17364A"/>
                 </a:solidFill>
@@ -11975,7 +11977,7 @@
               </a:rPr>
               <a:t>1. What does fitness for use mean?</a:t>
             </a:r>
-            <a:endParaRPr lang="en-US" sz="1320" dirty="0"/>
+            <a:endParaRPr lang="en-US" sz="1220" dirty="0"/>
           </a:p>
         </p:txBody>
       </p:sp>
@@ -11987,12 +11989,12 @@
         </p:nvSpPr>
         <p:spPr>
           <a:xfrm>
-            <a:off x="7635240" y="2670048"/>
-            <a:ext cx="3474720" cy="1377086"/>
+            <a:off x="7543800" y="2724912"/>
+            <a:ext cx="3611880" cy="1527048"/>
           </a:xfrm>
           <a:prstGeom prst="roundRect">
             <a:avLst>
-              <a:gd name="adj" fmla="val 7968"/>
+              <a:gd name="adj" fmla="val 7186"/>
             </a:avLst>
           </a:prstGeom>
           <a:solidFill>
@@ -12014,8 +12016,8 @@
         </p:nvSpPr>
         <p:spPr>
           <a:xfrm>
-            <a:off x="7799832" y="2816352"/>
-            <a:ext cx="3145536" cy="256032"/>
+            <a:off x="7708392" y="2852928"/>
+            <a:ext cx="3282696" cy="228600"/>
           </a:xfrm>
           <a:prstGeom prst="rect">
             <a:avLst/>
@@ -12031,7 +12033,7 @@
               <a:buNone/>
             </a:pPr>
             <a:r>
-              <a:rPr lang="en-US" sz="1300" b="1" dirty="0">
+              <a:rPr lang="en-US" sz="1220" b="1" dirty="0">
                 <a:solidFill>
                   <a:srgbClr val="0068B7"/>
                 </a:solidFill>
@@ -12041,7 +12043,7 @@
               </a:rPr>
               <a:t>Concept checkpoints</a:t>
             </a:r>
-            <a:endParaRPr lang="en-US" sz="1300" dirty="0"/>
+            <a:endParaRPr lang="en-US" sz="1220" dirty="0"/>
           </a:p>
         </p:txBody>
       </p:sp>
@@ -12053,8 +12055,8 @@
         </p:nvSpPr>
         <p:spPr>
           <a:xfrm>
-            <a:off x="7818120" y="3182112"/>
-            <a:ext cx="3090672" cy="718718"/>
+            <a:off x="7726680" y="3182112"/>
+            <a:ext cx="3227832" cy="960120"/>
           </a:xfrm>
           <a:prstGeom prst="rect">
             <a:avLst/>
@@ -12072,7 +12074,7 @@
               <a:buNone/>
             </a:pPr>
             <a:r>
-              <a:rPr lang="en-US" sz="1220" dirty="0">
+              <a:rPr lang="en-US" sz="1140" dirty="0">
                 <a:solidFill>
                   <a:srgbClr val="17364A"/>
                 </a:solidFill>
@@ -12082,14 +12084,14 @@
               </a:rPr>
               <a:t>1.</a:t>
             </a:r>
-            <a:endParaRPr lang="en-US" sz="1220" dirty="0"/>
-          </a:p>
-          <a:p>
-            <a:pPr indent="0" marL="0">
-              <a:buNone/>
-            </a:pPr>
-            <a:r>
-              <a:rPr lang="en-US" sz="1220" dirty="0">
+            <a:endParaRPr lang="en-US" sz="1140" dirty="0"/>
+          </a:p>
+          <a:p>
+            <a:pPr indent="0" marL="0">
+              <a:buNone/>
+            </a:pPr>
+            <a:r>
+              <a:rPr lang="en-US" sz="1140" dirty="0">
                 <a:solidFill>
                   <a:srgbClr val="17364A"/>
                 </a:solidFill>
@@ -12099,14 +12101,14 @@
               </a:rPr>
               <a:t>What does fitness for use mean?</a:t>
             </a:r>
-            <a:endParaRPr lang="en-US" sz="1220" dirty="0"/>
-          </a:p>
-          <a:p>
-            <a:pPr indent="0" marL="0">
-              <a:buNone/>
-            </a:pPr>
-            <a:r>
-              <a:rPr lang="en-US" sz="1220" dirty="0">
+            <a:endParaRPr lang="en-US" sz="1140" dirty="0"/>
+          </a:p>
+          <a:p>
+            <a:pPr indent="0" marL="0">
+              <a:buNone/>
+            </a:pPr>
+            <a:r>
+              <a:rPr lang="en-US" sz="1140" dirty="0">
                 <a:solidFill>
                   <a:srgbClr val="17364A"/>
                 </a:solidFill>
@@ -12116,7 +12118,7 @@
               </a:rPr>
               <a:t>2.</a:t>
             </a:r>
-            <a:endParaRPr lang="en-US" sz="1220" dirty="0"/>
+            <a:endParaRPr lang="en-US" sz="1140" dirty="0"/>
           </a:p>
         </p:txBody>
       </p:sp>
@@ -12128,12 +12130,12 @@
         </p:nvSpPr>
         <p:spPr>
           <a:xfrm>
-            <a:off x="7635240" y="4184294"/>
-            <a:ext cx="3474720" cy="1466698"/>
+            <a:off x="7543800" y="4389120"/>
+            <a:ext cx="3611880" cy="1261872"/>
           </a:xfrm>
           <a:prstGeom prst="roundRect">
             <a:avLst>
-              <a:gd name="adj" fmla="val 7481"/>
+              <a:gd name="adj" fmla="val 8696"/>
             </a:avLst>
           </a:prstGeom>
           <a:solidFill>
@@ -12155,8 +12157,8 @@
         </p:nvSpPr>
         <p:spPr>
           <a:xfrm>
-            <a:off x="7799832" y="4330598"/>
-            <a:ext cx="3145536" cy="256032"/>
+            <a:off x="7708392" y="4517136"/>
+            <a:ext cx="3282696" cy="228600"/>
           </a:xfrm>
           <a:prstGeom prst="rect">
             <a:avLst/>
@@ -12172,7 +12174,7 @@
               <a:buNone/>
             </a:pPr>
             <a:r>
-              <a:rPr lang="en-US" sz="1300" b="1" dirty="0">
+              <a:rPr lang="en-US" sz="1220" b="1" dirty="0">
                 <a:solidFill>
                   <a:srgbClr val="0068B7"/>
                 </a:solidFill>
@@ -12182,7 +12184,7 @@
               </a:rPr>
               <a:t>How to validate</a:t>
             </a:r>
-            <a:endParaRPr lang="en-US" sz="1300" dirty="0"/>
+            <a:endParaRPr lang="en-US" sz="1220" dirty="0"/>
           </a:p>
         </p:txBody>
       </p:sp>
@@ -12194,8 +12196,8 @@
         </p:nvSpPr>
         <p:spPr>
           <a:xfrm>
-            <a:off x="7799832" y="4659782"/>
-            <a:ext cx="3145536" cy="899770"/>
+            <a:off x="7708392" y="4828032"/>
+            <a:ext cx="3282696" cy="749808"/>
           </a:xfrm>
           <a:prstGeom prst="rect">
             <a:avLst/>
@@ -12213,7 +12215,7 @@
               <a:buNone/>
             </a:pPr>
             <a:r>
-              <a:rPr lang="en-US" sz="1320" dirty="0">
+              <a:rPr lang="en-US" sz="1220" dirty="0">
                 <a:solidFill>
                   <a:srgbClr val="17364A"/>
                 </a:solidFill>
@@ -12221,9 +12223,9 @@
                 <a:ea typeface="Aptos" pitchFamily="34" charset="-122"/>
                 <a:cs typeface="Aptos" pitchFamily="34" charset="-120"/>
               </a:rPr>
-              <a:t>Use the assignment to test whether you can explain the concept, apply it to a realistic public health situation, and identify what would need review before the work moves forward.</a:t>
-            </a:r>
-            <a:endParaRPr lang="en-US" sz="1320" dirty="0"/>
+              <a:t>Use the assignment to test whether you can explain the concept, apply it to a.</a:t>
+            </a:r>
+            <a:endParaRPr lang="en-US" sz="1220" dirty="0"/>
           </a:p>
         </p:txBody>
       </p:sp>
@@ -12514,8 +12516,8 @@
         </p:nvSpPr>
         <p:spPr>
           <a:xfrm>
-            <a:off x="868680" y="1508760"/>
-            <a:ext cx="6309360" cy="4160520"/>
+            <a:off x="822960" y="1463040"/>
+            <a:ext cx="6565392" cy="4343400"/>
           </a:xfrm>
           <a:prstGeom prst="rect">
             <a:avLst/>
@@ -12533,7 +12535,7 @@
               <a:buNone/>
             </a:pPr>
             <a:r>
-              <a:rPr lang="en-US" sz="2100" dirty="0">
+              <a:rPr lang="en-US" sz="1920" dirty="0">
                 <a:solidFill>
                   <a:srgbClr val="003A63"/>
                 </a:solidFill>
@@ -12543,14 +12545,14 @@
               </a:rPr>
               <a:t>• CDC surveillance and data quality resources</a:t>
             </a:r>
-            <a:endParaRPr lang="en-US" sz="2100" dirty="0"/>
-          </a:p>
-          <a:p>
-            <a:pPr indent="0" marL="0">
-              <a:buNone/>
-            </a:pPr>
-            <a:r>
-              <a:rPr lang="en-US" sz="2100" dirty="0">
+            <a:endParaRPr lang="en-US" sz="1920" dirty="0"/>
+          </a:p>
+          <a:p>
+            <a:pPr indent="0" marL="0">
+              <a:buNone/>
+            </a:pPr>
+            <a:r>
+              <a:rPr lang="en-US" sz="1920" dirty="0">
                 <a:solidFill>
                   <a:srgbClr val="003A63"/>
                 </a:solidFill>
@@ -12560,14 +12562,14 @@
               </a:rPr>
               <a:t>• CDC Public Health Data Strategy:.</a:t>
             </a:r>
-            <a:endParaRPr lang="en-US" sz="2100" dirty="0"/>
-          </a:p>
-          <a:p>
-            <a:pPr indent="0" marL="0">
-              <a:buNone/>
-            </a:pPr>
-            <a:r>
-              <a:rPr lang="en-US" sz="2100" dirty="0">
+            <a:endParaRPr lang="en-US" sz="1920" dirty="0"/>
+          </a:p>
+          <a:p>
+            <a:pPr indent="0" marL="0">
+              <a:buNone/>
+            </a:pPr>
+            <a:r>
+              <a:rPr lang="en-US" sz="1920" dirty="0">
                 <a:solidFill>
                   <a:srgbClr val="003A63"/>
                 </a:solidFill>
@@ -12575,9 +12577,9 @@
                 <a:ea typeface="Aptos" pitchFamily="34" charset="-122"/>
                 <a:cs typeface="Aptos" pitchFamily="34" charset="-120"/>
               </a:rPr>
-              <a:t>• NIST AI Risk Management Framework: https://www.nist.gov/itl/ai-risk-management-framework</a:t>
-            </a:r>
-            <a:endParaRPr lang="en-US" sz="2100" dirty="0"/>
+              <a:t>• NIST AI Risk Management Framework:.</a:t>
+            </a:r>
+            <a:endParaRPr lang="en-US" sz="1920" dirty="0"/>
           </a:p>
         </p:txBody>
       </p:sp>
@@ -12589,12 +12591,12 @@
         </p:nvSpPr>
         <p:spPr>
           <a:xfrm>
-            <a:off x="7635240" y="1325880"/>
-            <a:ext cx="3474720" cy="1207008"/>
+            <a:off x="7543800" y="1325880"/>
+            <a:ext cx="3611880" cy="1261872"/>
           </a:xfrm>
           <a:prstGeom prst="roundRect">
             <a:avLst>
-              <a:gd name="adj" fmla="val 9091"/>
+              <a:gd name="adj" fmla="val 8696"/>
             </a:avLst>
           </a:prstGeom>
           <a:solidFill>
@@ -12616,8 +12618,8 @@
         </p:nvSpPr>
         <p:spPr>
           <a:xfrm>
-            <a:off x="7799832" y="1472184"/>
-            <a:ext cx="3145536" cy="256032"/>
+            <a:off x="7708392" y="1453896"/>
+            <a:ext cx="3282696" cy="228600"/>
           </a:xfrm>
           <a:prstGeom prst="rect">
             <a:avLst/>
@@ -12633,7 +12635,7 @@
               <a:buNone/>
             </a:pPr>
             <a:r>
-              <a:rPr lang="en-US" sz="1300" b="1" dirty="0">
+              <a:rPr lang="en-US" sz="1220" b="1" dirty="0">
                 <a:solidFill>
                   <a:srgbClr val="0068B7"/>
                 </a:solidFill>
@@ -12643,7 +12645,7 @@
               </a:rPr>
               <a:t>Data decision</a:t>
             </a:r>
-            <a:endParaRPr lang="en-US" sz="1300" dirty="0"/>
+            <a:endParaRPr lang="en-US" sz="1220" dirty="0"/>
           </a:p>
         </p:txBody>
       </p:sp>
@@ -12655,8 +12657,8 @@
         </p:nvSpPr>
         <p:spPr>
           <a:xfrm>
-            <a:off x="7799832" y="1801368"/>
-            <a:ext cx="3145536" cy="640080"/>
+            <a:off x="7708392" y="1764792"/>
+            <a:ext cx="3282696" cy="749808"/>
           </a:xfrm>
           <a:prstGeom prst="rect">
             <a:avLst/>
@@ -12674,7 +12676,7 @@
               <a:buNone/>
             </a:pPr>
             <a:r>
-              <a:rPr lang="en-US" sz="1320" dirty="0">
+              <a:rPr lang="en-US" sz="1220" dirty="0">
                 <a:solidFill>
                   <a:srgbClr val="17364A"/>
                 </a:solidFill>
@@ -12684,7 +12686,7 @@
               </a:rPr>
               <a:t>CDC surveillance and data quality resources</a:t>
             </a:r>
-            <a:endParaRPr lang="en-US" sz="1320" dirty="0"/>
+            <a:endParaRPr lang="en-US" sz="1220" dirty="0"/>
           </a:p>
         </p:txBody>
       </p:sp>
@@ -12696,12 +12698,12 @@
         </p:nvSpPr>
         <p:spPr>
           <a:xfrm>
-            <a:off x="7635240" y="2670048"/>
-            <a:ext cx="3474720" cy="1377086"/>
+            <a:off x="7543800" y="2724912"/>
+            <a:ext cx="3611880" cy="1527048"/>
           </a:xfrm>
           <a:prstGeom prst="roundRect">
             <a:avLst>
-              <a:gd name="adj" fmla="val 7968"/>
+              <a:gd name="adj" fmla="val 7186"/>
             </a:avLst>
           </a:prstGeom>
           <a:solidFill>
@@ -12723,8 +12725,8 @@
         </p:nvSpPr>
         <p:spPr>
           <a:xfrm>
-            <a:off x="7799832" y="2816352"/>
-            <a:ext cx="3145536" cy="256032"/>
+            <a:off x="7708392" y="2852928"/>
+            <a:ext cx="3282696" cy="228600"/>
           </a:xfrm>
           <a:prstGeom prst="rect">
             <a:avLst/>
@@ -12740,7 +12742,7 @@
               <a:buNone/>
             </a:pPr>
             <a:r>
-              <a:rPr lang="en-US" sz="1300" b="1" dirty="0">
+              <a:rPr lang="en-US" sz="1220" b="1" dirty="0">
                 <a:solidFill>
                   <a:srgbClr val="0068B7"/>
                 </a:solidFill>
@@ -12750,7 +12752,7 @@
               </a:rPr>
               <a:t>Concept checkpoints</a:t>
             </a:r>
-            <a:endParaRPr lang="en-US" sz="1300" dirty="0"/>
+            <a:endParaRPr lang="en-US" sz="1220" dirty="0"/>
           </a:p>
         </p:txBody>
       </p:sp>
@@ -12762,8 +12764,8 @@
         </p:nvSpPr>
         <p:spPr>
           <a:xfrm>
-            <a:off x="7818120" y="3182112"/>
-            <a:ext cx="3090672" cy="718718"/>
+            <a:off x="7726680" y="3182112"/>
+            <a:ext cx="3227832" cy="960120"/>
           </a:xfrm>
           <a:prstGeom prst="rect">
             <a:avLst/>
@@ -12781,7 +12783,7 @@
               <a:buNone/>
             </a:pPr>
             <a:r>
-              <a:rPr lang="en-US" sz="1220" dirty="0">
+              <a:rPr lang="en-US" sz="1140" dirty="0">
                 <a:solidFill>
                   <a:srgbClr val="17364A"/>
                 </a:solidFill>
@@ -12791,14 +12793,14 @@
               </a:rPr>
               <a:t>CDC surveillance and data quality resources</a:t>
             </a:r>
-            <a:endParaRPr lang="en-US" sz="1220" dirty="0"/>
-          </a:p>
-          <a:p>
-            <a:pPr indent="0" marL="0">
-              <a:buNone/>
-            </a:pPr>
-            <a:r>
-              <a:rPr lang="en-US" sz="1220" dirty="0">
+            <a:endParaRPr lang="en-US" sz="1140" dirty="0"/>
+          </a:p>
+          <a:p>
+            <a:pPr indent="0" marL="0">
+              <a:buNone/>
+            </a:pPr>
+            <a:r>
+              <a:rPr lang="en-US" sz="1140" dirty="0">
                 <a:solidFill>
                   <a:srgbClr val="17364A"/>
                 </a:solidFill>
@@ -12808,14 +12810,14 @@
               </a:rPr>
               <a:t>CDC Public Health Data Strategy:.</a:t>
             </a:r>
-            <a:endParaRPr lang="en-US" sz="1220" dirty="0"/>
-          </a:p>
-          <a:p>
-            <a:pPr indent="0" marL="0">
-              <a:buNone/>
-            </a:pPr>
-            <a:r>
-              <a:rPr lang="en-US" sz="1220" dirty="0">
+            <a:endParaRPr lang="en-US" sz="1140" dirty="0"/>
+          </a:p>
+          <a:p>
+            <a:pPr indent="0" marL="0">
+              <a:buNone/>
+            </a:pPr>
+            <a:r>
+              <a:rPr lang="en-US" sz="1140" dirty="0">
                 <a:solidFill>
                   <a:srgbClr val="17364A"/>
                 </a:solidFill>
@@ -12825,7 +12827,7 @@
               </a:rPr>
               <a:t>NIST AI Risk Management Framework:.</a:t>
             </a:r>
-            <a:endParaRPr lang="en-US" sz="1220" dirty="0"/>
+            <a:endParaRPr lang="en-US" sz="1140" dirty="0"/>
           </a:p>
         </p:txBody>
       </p:sp>
@@ -12837,12 +12839,12 @@
         </p:nvSpPr>
         <p:spPr>
           <a:xfrm>
-            <a:off x="7635240" y="4184294"/>
-            <a:ext cx="3474720" cy="1466698"/>
+            <a:off x="7543800" y="4389120"/>
+            <a:ext cx="3611880" cy="1261872"/>
           </a:xfrm>
           <a:prstGeom prst="roundRect">
             <a:avLst>
-              <a:gd name="adj" fmla="val 7481"/>
+              <a:gd name="adj" fmla="val 8696"/>
             </a:avLst>
           </a:prstGeom>
           <a:solidFill>
@@ -12864,8 +12866,8 @@
         </p:nvSpPr>
         <p:spPr>
           <a:xfrm>
-            <a:off x="7799832" y="4330598"/>
-            <a:ext cx="3145536" cy="256032"/>
+            <a:off x="7708392" y="4517136"/>
+            <a:ext cx="3282696" cy="228600"/>
           </a:xfrm>
           <a:prstGeom prst="rect">
             <a:avLst/>
@@ -12881,7 +12883,7 @@
               <a:buNone/>
             </a:pPr>
             <a:r>
-              <a:rPr lang="en-US" sz="1300" b="1" dirty="0">
+              <a:rPr lang="en-US" sz="1220" b="1" dirty="0">
                 <a:solidFill>
                   <a:srgbClr val="0068B7"/>
                 </a:solidFill>
@@ -12891,7 +12893,7 @@
               </a:rPr>
               <a:t>How to validate</a:t>
             </a:r>
-            <a:endParaRPr lang="en-US" sz="1300" dirty="0"/>
+            <a:endParaRPr lang="en-US" sz="1220" dirty="0"/>
           </a:p>
         </p:txBody>
       </p:sp>
@@ -12903,8 +12905,8 @@
         </p:nvSpPr>
         <p:spPr>
           <a:xfrm>
-            <a:off x="7799832" y="4659782"/>
-            <a:ext cx="3145536" cy="899770"/>
+            <a:off x="7708392" y="4828032"/>
+            <a:ext cx="3282696" cy="749808"/>
           </a:xfrm>
           <a:prstGeom prst="rect">
             <a:avLst/>
@@ -12922,7 +12924,7 @@
               <a:buNone/>
             </a:pPr>
             <a:r>
-              <a:rPr lang="en-US" sz="1320" dirty="0">
+              <a:rPr lang="en-US" sz="1220" dirty="0">
                 <a:solidFill>
                   <a:srgbClr val="17364A"/>
                 </a:solidFill>
@@ -12930,9 +12932,9 @@
                 <a:ea typeface="Aptos" pitchFamily="34" charset="-122"/>
                 <a:cs typeface="Aptos" pitchFamily="34" charset="-120"/>
               </a:rPr>
-              <a:t>Connect the concept to data quality, model performance, validation evidence, monitoring measures, and decisions that remain under human control.</a:t>
-            </a:r>
-            <a:endParaRPr lang="en-US" sz="1320" dirty="0"/>
+              <a:t>Connect the concept to data quality, model performance, validation evidence,.</a:t>
+            </a:r>
+            <a:endParaRPr lang="en-US" sz="1220" dirty="0"/>
           </a:p>
         </p:txBody>
       </p:sp>
@@ -13250,7 +13252,7 @@
                 <a:ea typeface="Aptos" pitchFamily="34" charset="-122"/>
                 <a:cs typeface="Aptos" pitchFamily="34" charset="-120"/>
               </a:rPr>
-              <a:t>• Play 11: Build and Deploy AI Solutions - This lesson informs Play 11 by helping learners.</a:t>
+              <a:t>• Play 11: Build and Deploy AI Solutions - This lesson informs Play 11 by.</a:t>
             </a:r>
             <a:endParaRPr lang="en-US" sz="1900" dirty="0"/>
           </a:p>
@@ -13267,7 +13269,7 @@
                 <a:ea typeface="Aptos" pitchFamily="34" charset="-122"/>
                 <a:cs typeface="Aptos" pitchFamily="34" charset="-120"/>
               </a:rPr>
-              <a:t>• Play 7: Prioritize Use Cases - This lesson informs Play 7 by helping learners connect the.</a:t>
+              <a:t>• Play 7: Prioritize Use Cases - This lesson informs Play 7 by helping.</a:t>
             </a:r>
             <a:endParaRPr lang="en-US" sz="1900" dirty="0"/>
           </a:p>
@@ -13284,7 +13286,7 @@
                 <a:ea typeface="Aptos" pitchFamily="34" charset="-122"/>
                 <a:cs typeface="Aptos" pitchFamily="34" charset="-120"/>
               </a:rPr>
-              <a:t>• Play 1: Vision &amp; Guardrails - This lesson informs Play 1 by helping learners connect the.</a:t>
+              <a:t>• Play 1: Vision &amp; Guardrails - This lesson informs Play 1 by helping learners.</a:t>
             </a:r>
             <a:endParaRPr lang="en-US" sz="1900" dirty="0"/>
           </a:p>
@@ -13301,7 +13303,7 @@
                 <a:ea typeface="Aptos" pitchFamily="34" charset="-122"/>
                 <a:cs typeface="Aptos" pitchFamily="34" charset="-120"/>
               </a:rPr>
-              <a:t>• Play 2: Readiness Assessment - This lesson informs Play 2 by helping learners connect the.</a:t>
+              <a:t>• Play 2: Readiness Assessment - This lesson informs Play 2 by helping.</a:t>
             </a:r>
             <a:endParaRPr lang="en-US" sz="1900" dirty="0"/>
           </a:p>
@@ -13342,8 +13344,8 @@
         </p:nvSpPr>
         <p:spPr>
           <a:xfrm>
-            <a:off x="8211312" y="1563624"/>
-            <a:ext cx="2734056" cy="256032"/>
+            <a:off x="8211312" y="1545336"/>
+            <a:ext cx="2734056" cy="228600"/>
           </a:xfrm>
           <a:prstGeom prst="rect">
             <a:avLst/>
@@ -13359,7 +13361,7 @@
               <a:buNone/>
             </a:pPr>
             <a:r>
-              <a:rPr lang="en-US" sz="1300" b="1" dirty="0">
+              <a:rPr lang="en-US" sz="1220" b="1" dirty="0">
                 <a:solidFill>
                   <a:srgbClr val="0068B7"/>
                 </a:solidFill>
@@ -13369,7 +13371,7 @@
               </a:rPr>
               <a:t>Apply the lesson</a:t>
             </a:r>
-            <a:endParaRPr lang="en-US" sz="1300" dirty="0"/>
+            <a:endParaRPr lang="en-US" sz="1220" dirty="0"/>
           </a:p>
         </p:txBody>
       </p:sp>
@@ -13381,8 +13383,8 @@
         </p:nvSpPr>
         <p:spPr>
           <a:xfrm>
-            <a:off x="8211312" y="1892808"/>
-            <a:ext cx="2734056" cy="1536192"/>
+            <a:off x="8211312" y="1856232"/>
+            <a:ext cx="2734056" cy="1591056"/>
           </a:xfrm>
           <a:prstGeom prst="rect">
             <a:avLst/>
@@ -13400,7 +13402,7 @@
               <a:buNone/>
             </a:pPr>
             <a:r>
-              <a:rPr lang="en-US" sz="1320" dirty="0">
+              <a:rPr lang="en-US" sz="1220" dirty="0">
                 <a:solidFill>
                   <a:srgbClr val="17364A"/>
                 </a:solidFill>
@@ -13408,9 +13410,9 @@
                 <a:ea typeface="Aptos" pitchFamily="34" charset="-122"/>
                 <a:cs typeface="Aptos" pitchFamily="34" charset="-120"/>
               </a:rPr>
-              <a:t>Use the related plays to identify decisions, participants, timing, approvals, and documentation needed for responsible implementation.</a:t>
-            </a:r>
-            <a:endParaRPr lang="en-US" sz="1320" dirty="0"/>
+              <a:t>Use the related plays to identify decisions, participants, timing, approvals,.</a:t>
+            </a:r>
+            <a:endParaRPr lang="en-US" sz="1220" dirty="0"/>
           </a:p>
         </p:txBody>
       </p:sp>
@@ -13449,8 +13451,8 @@
         </p:nvSpPr>
         <p:spPr>
           <a:xfrm>
-            <a:off x="8211312" y="3941064"/>
-            <a:ext cx="2734056" cy="256032"/>
+            <a:off x="8211312" y="3922776"/>
+            <a:ext cx="2734056" cy="228600"/>
           </a:xfrm>
           <a:prstGeom prst="rect">
             <a:avLst/>
@@ -13466,7 +13468,7 @@
               <a:buNone/>
             </a:pPr>
             <a:r>
-              <a:rPr lang="en-US" sz="1300" b="1" dirty="0">
+              <a:rPr lang="en-US" sz="1220" b="1" dirty="0">
                 <a:solidFill>
                   <a:srgbClr val="0068B7"/>
                 </a:solidFill>
@@ -13476,7 +13478,7 @@
               </a:rPr>
               <a:t>Use the play links to</a:t>
             </a:r>
-            <a:endParaRPr lang="en-US" sz="1300" dirty="0"/>
+            <a:endParaRPr lang="en-US" sz="1220" dirty="0"/>
           </a:p>
         </p:txBody>
       </p:sp>
@@ -13488,8 +13490,8 @@
         </p:nvSpPr>
         <p:spPr>
           <a:xfrm>
-            <a:off x="8229600" y="4306824"/>
-            <a:ext cx="2679192" cy="941832"/>
+            <a:off x="8229600" y="4251960"/>
+            <a:ext cx="2679192" cy="1033272"/>
           </a:xfrm>
           <a:prstGeom prst="rect">
             <a:avLst/>
@@ -13507,7 +13509,7 @@
               <a:buNone/>
             </a:pPr>
             <a:r>
-              <a:rPr lang="en-US" sz="1220" dirty="0">
+              <a:rPr lang="en-US" sz="1140" dirty="0">
                 <a:solidFill>
                   <a:srgbClr val="17364A"/>
                 </a:solidFill>
@@ -13517,14 +13519,14 @@
               </a:rPr>
               <a:t>Locate the decision point in the playbook sequence.</a:t>
             </a:r>
-            <a:endParaRPr lang="en-US" sz="1220" dirty="0"/>
-          </a:p>
-          <a:p>
-            <a:pPr indent="0" marL="0">
-              <a:buNone/>
-            </a:pPr>
-            <a:r>
-              <a:rPr lang="en-US" sz="1220" dirty="0">
+            <a:endParaRPr lang="en-US" sz="1140" dirty="0"/>
+          </a:p>
+          <a:p>
+            <a:pPr indent="0" marL="0">
+              <a:buNone/>
+            </a:pPr>
+            <a:r>
+              <a:rPr lang="en-US" sz="1140" dirty="0">
                 <a:solidFill>
                   <a:srgbClr val="17364A"/>
                 </a:solidFill>
@@ -13534,14 +13536,14 @@
               </a:rPr>
               <a:t>Identify who should participate in the work.</a:t>
             </a:r>
-            <a:endParaRPr lang="en-US" sz="1220" dirty="0"/>
-          </a:p>
-          <a:p>
-            <a:pPr indent="0" marL="0">
-              <a:buNone/>
-            </a:pPr>
-            <a:r>
-              <a:rPr lang="en-US" sz="1220" dirty="0">
+            <a:endParaRPr lang="en-US" sz="1140" dirty="0"/>
+          </a:p>
+          <a:p>
+            <a:pPr indent="0" marL="0">
+              <a:buNone/>
+            </a:pPr>
+            <a:r>
+              <a:rPr lang="en-US" sz="1140" dirty="0">
                 <a:solidFill>
                   <a:srgbClr val="17364A"/>
                 </a:solidFill>
@@ -13549,9 +13551,9 @@
                 <a:ea typeface="Aptos" pitchFamily="34" charset="-122"/>
                 <a:cs typeface="Aptos" pitchFamily="34" charset="-120"/>
               </a:rPr>
-              <a:t>Document the review, approval, or implementation step.</a:t>
-            </a:r>
-            <a:endParaRPr lang="en-US" sz="1220" dirty="0"/>
+              <a:t>Document the review, approval, or implementation.</a:t>
+            </a:r>
+            <a:endParaRPr lang="en-US" sz="1140" dirty="0"/>
           </a:p>
         </p:txBody>
       </p:sp>
@@ -13869,7 +13871,7 @@
                 <a:ea typeface="Aptos" pitchFamily="34" charset="-122"/>
                 <a:cs typeface="Aptos" pitchFamily="34" charset="-120"/>
               </a:rPr>
-              <a:t>• Tool 3: Equity Impact Assessment Checklist (Checklist) - Use this tool to complete or.</a:t>
+              <a:t>• Tool 3: Equity Impact Assessment Checklist (Checklist) - Use this tool to.</a:t>
             </a:r>
             <a:endParaRPr lang="en-US" sz="1850" dirty="0"/>
           </a:p>
@@ -13886,7 +13888,7 @@
                 <a:ea typeface="Aptos" pitchFamily="34" charset="-122"/>
                 <a:cs typeface="Aptos" pitchFamily="34" charset="-120"/>
               </a:rPr>
-              <a:t>• Tool 4: AI Policy Landscape Scan (Worksheet) - Use AI Policy Landscape Scan to translate this.</a:t>
+              <a:t>• Tool 4: AI Policy Landscape Scan (Worksheet) - Use AI Policy Landscape Scan.</a:t>
             </a:r>
             <a:endParaRPr lang="en-US" sz="1850" dirty="0"/>
           </a:p>
@@ -13903,7 +13905,7 @@
                 <a:ea typeface="Aptos" pitchFamily="34" charset="-122"/>
                 <a:cs typeface="Aptos" pitchFamily="34" charset="-120"/>
               </a:rPr>
-              <a:t>• Tool 5: AI Environmental and Resource Impact Review (Checklist) - Use AI Environmental and.</a:t>
+              <a:t>• Tool 5: AI Environmental and Resource Impact Review (Checklist) - Use AI.</a:t>
             </a:r>
             <a:endParaRPr lang="en-US" sz="1850" dirty="0"/>
           </a:p>
@@ -13920,7 +13922,7 @@
                 <a:ea typeface="Aptos" pitchFamily="34" charset="-122"/>
                 <a:cs typeface="Aptos" pitchFamily="34" charset="-120"/>
               </a:rPr>
-              <a:t>• Tool 6: Human-Centered AI Decision Rule Checklist (Checklist) - Use Human-Centered AI Decision.</a:t>
+              <a:t>• Tool 6: Human-Centered AI Decision Rule Checklist (Checklist) - Use.</a:t>
             </a:r>
             <a:endParaRPr lang="en-US" sz="1850" dirty="0"/>
           </a:p>
@@ -13961,8 +13963,8 @@
         </p:nvSpPr>
         <p:spPr>
           <a:xfrm>
-            <a:off x="8211312" y="1563624"/>
-            <a:ext cx="2734056" cy="256032"/>
+            <a:off x="8211312" y="1545336"/>
+            <a:ext cx="2734056" cy="228600"/>
           </a:xfrm>
           <a:prstGeom prst="rect">
             <a:avLst/>
@@ -13978,7 +13980,7 @@
               <a:buNone/>
             </a:pPr>
             <a:r>
-              <a:rPr lang="en-US" sz="1300" b="1" dirty="0">
+              <a:rPr lang="en-US" sz="1220" b="1" dirty="0">
                 <a:solidFill>
                   <a:srgbClr val="0068B7"/>
                 </a:solidFill>
@@ -13988,7 +13990,7 @@
               </a:rPr>
               <a:t>Use the tools</a:t>
             </a:r>
-            <a:endParaRPr lang="en-US" sz="1300" dirty="0"/>
+            <a:endParaRPr lang="en-US" sz="1220" dirty="0"/>
           </a:p>
         </p:txBody>
       </p:sp>
@@ -14000,8 +14002,8 @@
         </p:nvSpPr>
         <p:spPr>
           <a:xfrm>
-            <a:off x="8211312" y="1892808"/>
-            <a:ext cx="2734056" cy="1536192"/>
+            <a:off x="8211312" y="1856232"/>
+            <a:ext cx="2734056" cy="1591056"/>
           </a:xfrm>
           <a:prstGeom prst="rect">
             <a:avLst/>
@@ -14019,7 +14021,7 @@
               <a:buNone/>
             </a:pPr>
             <a:r>
-              <a:rPr lang="en-US" sz="1320" dirty="0">
+              <a:rPr lang="en-US" sz="1220" dirty="0">
                 <a:solidFill>
                   <a:srgbClr val="17364A"/>
                 </a:solidFill>
@@ -14027,9 +14029,9 @@
                 <a:ea typeface="Aptos" pitchFamily="34" charset="-122"/>
                 <a:cs typeface="Aptos" pitchFamily="34" charset="-120"/>
               </a:rPr>
-              <a:t>Use linked tools when your department needs a structured worksheet, template, checklist, review process, or documentation artifact.</a:t>
-            </a:r>
-            <a:endParaRPr lang="en-US" sz="1320" dirty="0"/>
+              <a:t>Use linked tools when your department needs a structured worksheet, template,.</a:t>
+            </a:r>
+            <a:endParaRPr lang="en-US" sz="1220" dirty="0"/>
           </a:p>
         </p:txBody>
       </p:sp>
@@ -14068,8 +14070,8 @@
         </p:nvSpPr>
         <p:spPr>
           <a:xfrm>
-            <a:off x="8211312" y="3941064"/>
-            <a:ext cx="2734056" cy="256032"/>
+            <a:off x="8211312" y="3922776"/>
+            <a:ext cx="2734056" cy="228600"/>
           </a:xfrm>
           <a:prstGeom prst="rect">
             <a:avLst/>
@@ -14085,7 +14087,7 @@
               <a:buNone/>
             </a:pPr>
             <a:r>
-              <a:rPr lang="en-US" sz="1300" b="1" dirty="0">
+              <a:rPr lang="en-US" sz="1220" b="1" dirty="0">
                 <a:solidFill>
                   <a:srgbClr val="0068B7"/>
                 </a:solidFill>
@@ -14095,7 +14097,7 @@
               </a:rPr>
               <a:t>Tool selection cues</a:t>
             </a:r>
-            <a:endParaRPr lang="en-US" sz="1300" dirty="0"/>
+            <a:endParaRPr lang="en-US" sz="1220" dirty="0"/>
           </a:p>
         </p:txBody>
       </p:sp>
@@ -14107,8 +14109,8 @@
         </p:nvSpPr>
         <p:spPr>
           <a:xfrm>
-            <a:off x="8229600" y="4306824"/>
-            <a:ext cx="2679192" cy="941832"/>
+            <a:off x="8229600" y="4251960"/>
+            <a:ext cx="2679192" cy="1033272"/>
           </a:xfrm>
           <a:prstGeom prst="rect">
             <a:avLst/>
@@ -14126,7 +14128,7 @@
               <a:buNone/>
             </a:pPr>
             <a:r>
-              <a:rPr lang="en-US" sz="1220" dirty="0">
+              <a:rPr lang="en-US" sz="1140" dirty="0">
                 <a:solidFill>
                   <a:srgbClr val="17364A"/>
                 </a:solidFill>
@@ -14136,14 +14138,14 @@
               </a:rPr>
               <a:t>Use a tool when no comparable local process exists.</a:t>
             </a:r>
-            <a:endParaRPr lang="en-US" sz="1220" dirty="0"/>
-          </a:p>
-          <a:p>
-            <a:pPr indent="0" marL="0">
-              <a:buNone/>
-            </a:pPr>
-            <a:r>
-              <a:rPr lang="en-US" sz="1220" dirty="0">
+            <a:endParaRPr lang="en-US" sz="1140" dirty="0"/>
+          </a:p>
+          <a:p>
+            <a:pPr indent="0" marL="0">
+              <a:buNone/>
+            </a:pPr>
+            <a:r>
+              <a:rPr lang="en-US" sz="1140" dirty="0">
                 <a:solidFill>
                   <a:srgbClr val="17364A"/>
                 </a:solidFill>
@@ -14151,16 +14153,16 @@
                 <a:ea typeface="Aptos" pitchFamily="34" charset="-122"/>
                 <a:cs typeface="Aptos" pitchFamily="34" charset="-120"/>
               </a:rPr>
-              <a:t>Adapt existing department templates when they already fit the.</a:t>
-            </a:r>
-            <a:endParaRPr lang="en-US" sz="1220" dirty="0"/>
-          </a:p>
-          <a:p>
-            <a:pPr indent="0" marL="0">
-              <a:buNone/>
-            </a:pPr>
-            <a:r>
-              <a:rPr lang="en-US" sz="1220" dirty="0">
+              <a:t>Adapt existing department templates when they.</a:t>
+            </a:r>
+            <a:endParaRPr lang="en-US" sz="1140" dirty="0"/>
+          </a:p>
+          <a:p>
+            <a:pPr indent="0" marL="0">
+              <a:buNone/>
+            </a:pPr>
+            <a:r>
+              <a:rPr lang="en-US" sz="1140" dirty="0">
                 <a:solidFill>
                   <a:srgbClr val="17364A"/>
                 </a:solidFill>
@@ -14168,9 +14170,9 @@
                 <a:ea typeface="Aptos" pitchFamily="34" charset="-122"/>
                 <a:cs typeface="Aptos" pitchFamily="34" charset="-120"/>
               </a:rPr>
-              <a:t>Save the completed artifact as evidence of the decision.</a:t>
-            </a:r>
-            <a:endParaRPr lang="en-US" sz="1220" dirty="0"/>
+              <a:t>Save the completed artifact as evidence of the.</a:t>
+            </a:r>
+            <a:endParaRPr lang="en-US" sz="1140" dirty="0"/>
           </a:p>
         </p:txBody>
       </p:sp>
@@ -14461,8 +14463,8 @@
         </p:nvSpPr>
         <p:spPr>
           <a:xfrm>
-            <a:off x="868680" y="1508760"/>
-            <a:ext cx="6309360" cy="4160520"/>
+            <a:off x="822960" y="1463040"/>
+            <a:ext cx="6565392" cy="4343400"/>
           </a:xfrm>
           <a:prstGeom prst="rect">
             <a:avLst/>
@@ -14480,7 +14482,7 @@
               <a:buNone/>
             </a:pPr>
             <a:r>
-              <a:rPr lang="en-US" sz="2100" dirty="0">
+              <a:rPr lang="en-US" sz="1920" dirty="0">
                 <a:solidFill>
                   <a:srgbClr val="003A63"/>
                 </a:solidFill>
@@ -14490,14 +14492,14 @@
               </a:rPr>
               <a:t>• Identify major data quality dimensions relevant to public health AI.</a:t>
             </a:r>
-            <a:endParaRPr lang="en-US" sz="2100" dirty="0"/>
-          </a:p>
-          <a:p>
-            <a:pPr indent="0" marL="0">
-              <a:buNone/>
-            </a:pPr>
-            <a:r>
-              <a:rPr lang="en-US" sz="2100" dirty="0">
+            <a:endParaRPr lang="en-US" sz="1920" dirty="0"/>
+          </a:p>
+          <a:p>
+            <a:pPr indent="0" marL="0">
+              <a:buNone/>
+            </a:pPr>
+            <a:r>
+              <a:rPr lang="en-US" sz="1920" dirty="0">
                 <a:solidFill>
                   <a:srgbClr val="003A63"/>
                 </a:solidFill>
@@ -14505,16 +14507,16 @@
                 <a:ea typeface="Aptos" pitchFamily="34" charset="-122"/>
                 <a:cs typeface="Aptos" pitchFamily="34" charset="-120"/>
               </a:rPr>
-              <a:t>• Explain the difference between general data quality and fitness for a specific use.</a:t>
-            </a:r>
-            <a:endParaRPr lang="en-US" sz="2100" dirty="0"/>
-          </a:p>
-          <a:p>
-            <a:pPr indent="0" marL="0">
-              <a:buNone/>
-            </a:pPr>
-            <a:r>
-              <a:rPr lang="en-US" sz="2100" dirty="0">
+              <a:t>• Explain the difference between general data quality and fitness for a.</a:t>
+            </a:r>
+            <a:endParaRPr lang="en-US" sz="1920" dirty="0"/>
+          </a:p>
+          <a:p>
+            <a:pPr indent="0" marL="0">
+              <a:buNone/>
+            </a:pPr>
+            <a:r>
+              <a:rPr lang="en-US" sz="1920" dirty="0">
                 <a:solidFill>
                   <a:srgbClr val="003A63"/>
                 </a:solidFill>
@@ -14522,9 +14524,9 @@
                 <a:ea typeface="Aptos" pitchFamily="34" charset="-122"/>
                 <a:cs typeface="Aptos" pitchFamily="34" charset="-120"/>
               </a:rPr>
-              <a:t>• Assess how missingness, timeliness, duplication, coding variation, and representativeness.</a:t>
-            </a:r>
-            <a:endParaRPr lang="en-US" sz="2100" dirty="0"/>
+              <a:t>• Assess how missingness, timeliness, duplication, coding variation, and.</a:t>
+            </a:r>
+            <a:endParaRPr lang="en-US" sz="1920" dirty="0"/>
           </a:p>
         </p:txBody>
       </p:sp>
@@ -14536,12 +14538,12 @@
         </p:nvSpPr>
         <p:spPr>
           <a:xfrm>
-            <a:off x="7635240" y="1325880"/>
-            <a:ext cx="3474720" cy="1207008"/>
+            <a:off x="7543800" y="1325880"/>
+            <a:ext cx="3611880" cy="1261872"/>
           </a:xfrm>
           <a:prstGeom prst="roundRect">
             <a:avLst>
-              <a:gd name="adj" fmla="val 9091"/>
+              <a:gd name="adj" fmla="val 8696"/>
             </a:avLst>
           </a:prstGeom>
           <a:solidFill>
@@ -14563,8 +14565,8 @@
         </p:nvSpPr>
         <p:spPr>
           <a:xfrm>
-            <a:off x="7799832" y="1472184"/>
-            <a:ext cx="3145536" cy="256032"/>
+            <a:off x="7708392" y="1453896"/>
+            <a:ext cx="3282696" cy="228600"/>
           </a:xfrm>
           <a:prstGeom prst="rect">
             <a:avLst/>
@@ -14580,7 +14582,7 @@
               <a:buNone/>
             </a:pPr>
             <a:r>
-              <a:rPr lang="en-US" sz="1300" b="1" dirty="0">
+              <a:rPr lang="en-US" sz="1220" b="1" dirty="0">
                 <a:solidFill>
                   <a:srgbClr val="0068B7"/>
                 </a:solidFill>
@@ -14590,7 +14592,7 @@
               </a:rPr>
               <a:t>Data decision</a:t>
             </a:r>
-            <a:endParaRPr lang="en-US" sz="1300" dirty="0"/>
+            <a:endParaRPr lang="en-US" sz="1220" dirty="0"/>
           </a:p>
         </p:txBody>
       </p:sp>
@@ -14602,8 +14604,8 @@
         </p:nvSpPr>
         <p:spPr>
           <a:xfrm>
-            <a:off x="7799832" y="1801368"/>
-            <a:ext cx="3145536" cy="640080"/>
+            <a:off x="7708392" y="1764792"/>
+            <a:ext cx="3282696" cy="749808"/>
           </a:xfrm>
           <a:prstGeom prst="rect">
             <a:avLst/>
@@ -14621,7 +14623,7 @@
               <a:buNone/>
             </a:pPr>
             <a:r>
-              <a:rPr lang="en-US" sz="1320" dirty="0">
+              <a:rPr lang="en-US" sz="1220" dirty="0">
                 <a:solidFill>
                   <a:srgbClr val="17364A"/>
                 </a:solidFill>
@@ -14631,7 +14633,7 @@
               </a:rPr>
               <a:t>Identify major data quality dimensions relevant to public health AI.</a:t>
             </a:r>
-            <a:endParaRPr lang="en-US" sz="1320" dirty="0"/>
+            <a:endParaRPr lang="en-US" sz="1220" dirty="0"/>
           </a:p>
         </p:txBody>
       </p:sp>
@@ -14643,12 +14645,12 @@
         </p:nvSpPr>
         <p:spPr>
           <a:xfrm>
-            <a:off x="7635240" y="2670048"/>
-            <a:ext cx="3474720" cy="1377086"/>
+            <a:off x="7543800" y="2724912"/>
+            <a:ext cx="3611880" cy="1527048"/>
           </a:xfrm>
           <a:prstGeom prst="roundRect">
             <a:avLst>
-              <a:gd name="adj" fmla="val 7968"/>
+              <a:gd name="adj" fmla="val 7186"/>
             </a:avLst>
           </a:prstGeom>
           <a:solidFill>
@@ -14670,8 +14672,8 @@
         </p:nvSpPr>
         <p:spPr>
           <a:xfrm>
-            <a:off x="7799832" y="2816352"/>
-            <a:ext cx="3145536" cy="256032"/>
+            <a:off x="7708392" y="2852928"/>
+            <a:ext cx="3282696" cy="228600"/>
           </a:xfrm>
           <a:prstGeom prst="rect">
             <a:avLst/>
@@ -14687,7 +14689,7 @@
               <a:buNone/>
             </a:pPr>
             <a:r>
-              <a:rPr lang="en-US" sz="1300" b="1" dirty="0">
+              <a:rPr lang="en-US" sz="1220" b="1" dirty="0">
                 <a:solidFill>
                   <a:srgbClr val="0068B7"/>
                 </a:solidFill>
@@ -14697,7 +14699,7 @@
               </a:rPr>
               <a:t>Concept checkpoints</a:t>
             </a:r>
-            <a:endParaRPr lang="en-US" sz="1300" dirty="0"/>
+            <a:endParaRPr lang="en-US" sz="1220" dirty="0"/>
           </a:p>
         </p:txBody>
       </p:sp>
@@ -14709,8 +14711,8 @@
         </p:nvSpPr>
         <p:spPr>
           <a:xfrm>
-            <a:off x="7818120" y="3182112"/>
-            <a:ext cx="3090672" cy="718718"/>
+            <a:off x="7726680" y="3182112"/>
+            <a:ext cx="3227832" cy="960120"/>
           </a:xfrm>
           <a:prstGeom prst="rect">
             <a:avLst/>
@@ -14728,7 +14730,7 @@
               <a:buNone/>
             </a:pPr>
             <a:r>
-              <a:rPr lang="en-US" sz="1220" dirty="0">
+              <a:rPr lang="en-US" sz="1140" dirty="0">
                 <a:solidFill>
                   <a:srgbClr val="17364A"/>
                 </a:solidFill>
@@ -14736,16 +14738,16 @@
                 <a:ea typeface="Aptos" pitchFamily="34" charset="-122"/>
                 <a:cs typeface="Aptos" pitchFamily="34" charset="-120"/>
               </a:rPr>
-              <a:t>Assess how missingness, timeliness, duplication, coding variation,.</a:t>
-            </a:r>
-            <a:endParaRPr lang="en-US" sz="1220" dirty="0"/>
-          </a:p>
-          <a:p>
-            <a:pPr indent="0" marL="0">
-              <a:buNone/>
-            </a:pPr>
-            <a:r>
-              <a:rPr lang="en-US" sz="1220" dirty="0">
+              <a:t>Assess how missingness, timeliness, duplication,.</a:t>
+            </a:r>
+            <a:endParaRPr lang="en-US" sz="1140" dirty="0"/>
+          </a:p>
+          <a:p>
+            <a:pPr indent="0" marL="0">
+              <a:buNone/>
+            </a:pPr>
+            <a:r>
+              <a:rPr lang="en-US" sz="1140" dirty="0">
                 <a:solidFill>
                   <a:srgbClr val="17364A"/>
                 </a:solidFill>
@@ -14753,16 +14755,16 @@
                 <a:ea typeface="Aptos" pitchFamily="34" charset="-122"/>
                 <a:cs typeface="Aptos" pitchFamily="34" charset="-120"/>
               </a:rPr>
-              <a:t>Define quality thresholds, review rules, and escalation criteria.</a:t>
-            </a:r>
-            <a:endParaRPr lang="en-US" sz="1220" dirty="0"/>
-          </a:p>
-          <a:p>
-            <a:pPr indent="0" marL="0">
-              <a:buNone/>
-            </a:pPr>
-            <a:r>
-              <a:rPr lang="en-US" sz="1220" dirty="0">
+              <a:t>Define quality thresholds, review rules, and.</a:t>
+            </a:r>
+            <a:endParaRPr lang="en-US" sz="1140" dirty="0"/>
+          </a:p>
+          <a:p>
+            <a:pPr indent="0" marL="0">
+              <a:buNone/>
+            </a:pPr>
+            <a:r>
+              <a:rPr lang="en-US" sz="1140" dirty="0">
                 <a:solidFill>
                   <a:srgbClr val="17364A"/>
                 </a:solidFill>
@@ -14770,9 +14772,9 @@
                 <a:ea typeface="Aptos" pitchFamily="34" charset="-122"/>
                 <a:cs typeface="Aptos" pitchFamily="34" charset="-120"/>
               </a:rPr>
-              <a:t>Produce a data quality review plan for an AI-supported use case.</a:t>
-            </a:r>
-            <a:endParaRPr lang="en-US" sz="1220" dirty="0"/>
+              <a:t>Produce a data quality review plan for an.</a:t>
+            </a:r>
+            <a:endParaRPr lang="en-US" sz="1140" dirty="0"/>
           </a:p>
         </p:txBody>
       </p:sp>
@@ -14784,12 +14786,12 @@
         </p:nvSpPr>
         <p:spPr>
           <a:xfrm>
-            <a:off x="7635240" y="4184294"/>
-            <a:ext cx="3474720" cy="1466698"/>
+            <a:off x="7543800" y="4389120"/>
+            <a:ext cx="3611880" cy="1261872"/>
           </a:xfrm>
           <a:prstGeom prst="roundRect">
             <a:avLst>
-              <a:gd name="adj" fmla="val 7481"/>
+              <a:gd name="adj" fmla="val 8696"/>
             </a:avLst>
           </a:prstGeom>
           <a:solidFill>
@@ -14811,8 +14813,8 @@
         </p:nvSpPr>
         <p:spPr>
           <a:xfrm>
-            <a:off x="7799832" y="4330598"/>
-            <a:ext cx="3145536" cy="256032"/>
+            <a:off x="7708392" y="4517136"/>
+            <a:ext cx="3282696" cy="228600"/>
           </a:xfrm>
           <a:prstGeom prst="rect">
             <a:avLst/>
@@ -14828,7 +14830,7 @@
               <a:buNone/>
             </a:pPr>
             <a:r>
-              <a:rPr lang="en-US" sz="1300" b="1" dirty="0">
+              <a:rPr lang="en-US" sz="1220" b="1" dirty="0">
                 <a:solidFill>
                   <a:srgbClr val="0068B7"/>
                 </a:solidFill>
@@ -14838,7 +14840,7 @@
               </a:rPr>
               <a:t>How to validate</a:t>
             </a:r>
-            <a:endParaRPr lang="en-US" sz="1300" dirty="0"/>
+            <a:endParaRPr lang="en-US" sz="1220" dirty="0"/>
           </a:p>
         </p:txBody>
       </p:sp>
@@ -14850,8 +14852,8 @@
         </p:nvSpPr>
         <p:spPr>
           <a:xfrm>
-            <a:off x="7799832" y="4659782"/>
-            <a:ext cx="3145536" cy="899770"/>
+            <a:off x="7708392" y="4828032"/>
+            <a:ext cx="3282696" cy="749808"/>
           </a:xfrm>
           <a:prstGeom prst="rect">
             <a:avLst/>
@@ -14869,7 +14871,7 @@
               <a:buNone/>
             </a:pPr>
             <a:r>
-              <a:rPr lang="en-US" sz="1320" dirty="0">
+              <a:rPr lang="en-US" sz="1220" dirty="0">
                 <a:solidFill>
                   <a:srgbClr val="17364A"/>
                 </a:solidFill>
@@ -14877,9 +14879,9 @@
                 <a:ea typeface="Aptos" pitchFamily="34" charset="-122"/>
                 <a:cs typeface="Aptos" pitchFamily="34" charset="-120"/>
               </a:rPr>
-              <a:t>Use the assignment to test whether you can explain the concept, apply it to a realistic public health situation, and identify what would need review before the work moves forward.</a:t>
-            </a:r>
-            <a:endParaRPr lang="en-US" sz="1320" dirty="0"/>
+              <a:t>Use the assignment to test whether you can explain the concept, apply it to a.</a:t>
+            </a:r>
+            <a:endParaRPr lang="en-US" sz="1220" dirty="0"/>
           </a:p>
         </p:txBody>
       </p:sp>
@@ -15170,8 +15172,8 @@
         </p:nvSpPr>
         <p:spPr>
           <a:xfrm>
-            <a:off x="868680" y="1508760"/>
-            <a:ext cx="6309360" cy="4160520"/>
+            <a:off x="822960" y="1463040"/>
+            <a:ext cx="6565392" cy="4343400"/>
           </a:xfrm>
           <a:prstGeom prst="rect">
             <a:avLst/>
@@ -15189,7 +15191,7 @@
               <a:buNone/>
             </a:pPr>
             <a:r>
-              <a:rPr lang="en-US" sz="2100" dirty="0">
+              <a:rPr lang="en-US" sz="1920" dirty="0">
                 <a:solidFill>
                   <a:srgbClr val="003A63"/>
                 </a:solidFill>
@@ -15197,16 +15199,16 @@
                 <a:ea typeface="Aptos" pitchFamily="34" charset="-122"/>
                 <a:cs typeface="Aptos" pitchFamily="34" charset="-120"/>
               </a:rPr>
-              <a:t>• Data quality engineering is the practical work of defining, measuring, improving, and.</a:t>
-            </a:r>
-            <a:endParaRPr lang="en-US" sz="2100" dirty="0"/>
-          </a:p>
-          <a:p>
-            <a:pPr indent="0" marL="0">
-              <a:buNone/>
-            </a:pPr>
-            <a:r>
-              <a:rPr lang="en-US" sz="2100" dirty="0">
+              <a:t>• Data quality engineering is the practical work of defining, measuring,.</a:t>
+            </a:r>
+            <a:endParaRPr lang="en-US" sz="1920" dirty="0"/>
+          </a:p>
+          <a:p>
+            <a:pPr indent="0" marL="0">
+              <a:buNone/>
+            </a:pPr>
+            <a:r>
+              <a:rPr lang="en-US" sz="1920" dirty="0">
                 <a:solidFill>
                   <a:srgbClr val="003A63"/>
                 </a:solidFill>
@@ -15216,14 +15218,14 @@
               </a:rPr>
               <a:t>• In public health AI, data quality is not a background concern.</a:t>
             </a:r>
-            <a:endParaRPr lang="en-US" sz="2100" dirty="0"/>
-          </a:p>
-          <a:p>
-            <a:pPr indent="0" marL="0">
-              <a:buNone/>
-            </a:pPr>
-            <a:r>
-              <a:rPr lang="en-US" sz="2100" dirty="0">
+            <a:endParaRPr lang="en-US" sz="1920" dirty="0"/>
+          </a:p>
+          <a:p>
+            <a:pPr indent="0" marL="0">
+              <a:buNone/>
+            </a:pPr>
+            <a:r>
+              <a:rPr lang="en-US" sz="1920" dirty="0">
                 <a:solidFill>
                   <a:srgbClr val="003A63"/>
                 </a:solidFill>
@@ -15231,9 +15233,9 @@
                 <a:ea typeface="Aptos" pitchFamily="34" charset="-122"/>
                 <a:cs typeface="Aptos" pitchFamily="34" charset="-120"/>
               </a:rPr>
-              <a:t>• It directly affects whether AI outputs are accurate, equitable, timely, and safe enough to.</a:t>
-            </a:r>
-            <a:endParaRPr lang="en-US" sz="2100" dirty="0"/>
+              <a:t>• It directly affects whether AI outputs are accurate, equitable, timely, and.</a:t>
+            </a:r>
+            <a:endParaRPr lang="en-US" sz="1920" dirty="0"/>
           </a:p>
         </p:txBody>
       </p:sp>
@@ -15245,12 +15247,12 @@
         </p:nvSpPr>
         <p:spPr>
           <a:xfrm>
-            <a:off x="7635240" y="1325880"/>
-            <a:ext cx="3474720" cy="1255471"/>
+            <a:off x="7543800" y="1325880"/>
+            <a:ext cx="3611880" cy="1261872"/>
           </a:xfrm>
           <a:prstGeom prst="roundRect">
             <a:avLst>
-              <a:gd name="adj" fmla="val 8740"/>
+              <a:gd name="adj" fmla="val 8696"/>
             </a:avLst>
           </a:prstGeom>
           <a:solidFill>
@@ -15272,8 +15274,8 @@
         </p:nvSpPr>
         <p:spPr>
           <a:xfrm>
-            <a:off x="7799832" y="1472184"/>
-            <a:ext cx="3145536" cy="256032"/>
+            <a:off x="7708392" y="1453896"/>
+            <a:ext cx="3282696" cy="228600"/>
           </a:xfrm>
           <a:prstGeom prst="rect">
             <a:avLst/>
@@ -15289,7 +15291,7 @@
               <a:buNone/>
             </a:pPr>
             <a:r>
-              <a:rPr lang="en-US" sz="1300" b="1" dirty="0">
+              <a:rPr lang="en-US" sz="1220" b="1" dirty="0">
                 <a:solidFill>
                   <a:srgbClr val="0068B7"/>
                 </a:solidFill>
@@ -15299,7 +15301,7 @@
               </a:rPr>
               <a:t>Data decision</a:t>
             </a:r>
-            <a:endParaRPr lang="en-US" sz="1300" dirty="0"/>
+            <a:endParaRPr lang="en-US" sz="1220" dirty="0"/>
           </a:p>
         </p:txBody>
       </p:sp>
@@ -15311,8 +15313,8 @@
         </p:nvSpPr>
         <p:spPr>
           <a:xfrm>
-            <a:off x="7799832" y="1801368"/>
-            <a:ext cx="3145536" cy="688543"/>
+            <a:off x="7708392" y="1764792"/>
+            <a:ext cx="3282696" cy="749808"/>
           </a:xfrm>
           <a:prstGeom prst="rect">
             <a:avLst/>
@@ -15330,7 +15332,7 @@
               <a:buNone/>
             </a:pPr>
             <a:r>
-              <a:rPr lang="en-US" sz="1320" dirty="0">
+              <a:rPr lang="en-US" sz="1220" dirty="0">
                 <a:solidFill>
                   <a:srgbClr val="17364A"/>
                 </a:solidFill>
@@ -15338,9 +15340,9 @@
                 <a:ea typeface="Aptos" pitchFamily="34" charset="-122"/>
                 <a:cs typeface="Aptos" pitchFamily="34" charset="-120"/>
               </a:rPr>
-              <a:t>Data quality engineering is the practical work of defining, measuring, improving, and monitoring data.</a:t>
-            </a:r>
-            <a:endParaRPr lang="en-US" sz="1320" dirty="0"/>
+              <a:t>Data quality engineering is the practical work of defining, measuring,.</a:t>
+            </a:r>
+            <a:endParaRPr lang="en-US" sz="1220" dirty="0"/>
           </a:p>
         </p:txBody>
       </p:sp>
@@ -15352,12 +15354,12 @@
         </p:nvSpPr>
         <p:spPr>
           <a:xfrm>
-            <a:off x="7635240" y="2718511"/>
-            <a:ext cx="3474720" cy="1328623"/>
+            <a:off x="7543800" y="2724912"/>
+            <a:ext cx="3611880" cy="1527048"/>
           </a:xfrm>
           <a:prstGeom prst="roundRect">
             <a:avLst>
-              <a:gd name="adj" fmla="val 8259"/>
+              <a:gd name="adj" fmla="val 7186"/>
             </a:avLst>
           </a:prstGeom>
           <a:solidFill>
@@ -15379,24 +15381,26 @@
         </p:nvSpPr>
         <p:spPr>
           <a:xfrm>
-            <a:off x="7799832" y="2846527"/>
-            <a:ext cx="3145536" cy="237744"/>
-          </a:xfrm>
-          <a:prstGeom prst="rect">
-            <a:avLst/>
-          </a:prstGeom>
-          <a:noFill/>
-          <a:ln/>
-        </p:spPr>
-        <p:txBody>
-          <a:bodyPr wrap="square" lIns="0" tIns="0" rIns="0" bIns="0" rtlCol="0" anchor="ctr"/>
-          <a:lstStyle/>
-          <a:p>
-            <a:pPr indent="0" marL="0">
-              <a:buNone/>
-            </a:pPr>
-            <a:r>
-              <a:rPr lang="en-US" sz="1250" b="1" dirty="0">
+            <a:off x="7708392" y="2852928"/>
+            <a:ext cx="3282696" cy="219456"/>
+          </a:xfrm>
+          <a:prstGeom prst="rect">
+            <a:avLst/>
+          </a:prstGeom>
+          <a:noFill/>
+          <a:ln/>
+        </p:spPr>
+        <p:txBody>
+          <a:bodyPr wrap="square" lIns="0" tIns="0" rIns="0" bIns="0" rtlCol="0" anchor="ctr">
+            <a:normAutofit/>
+          </a:bodyPr>
+          <a:lstStyle/>
+          <a:p>
+            <a:pPr indent="0" marL="0">
+              <a:buNone/>
+            </a:pPr>
+            <a:r>
+              <a:rPr lang="en-US" sz="1160" b="1" dirty="0">
                 <a:solidFill>
                   <a:srgbClr val="0068B7"/>
                 </a:solidFill>
@@ -15406,7 +15410,7 @@
               </a:rPr>
               <a:t>Data-to-decision flow</a:t>
             </a:r>
-            <a:endParaRPr lang="en-US" sz="1250" dirty="0"/>
+            <a:endParaRPr lang="en-US" sz="1160" dirty="0"/>
           </a:p>
         </p:txBody>
       </p:sp>
@@ -15418,7 +15422,7 @@
         </p:nvSpPr>
         <p:spPr>
           <a:xfrm>
-            <a:off x="8763000" y="3399739"/>
+            <a:off x="8717280" y="3406140"/>
             <a:ext cx="164592" cy="0"/>
           </a:xfrm>
           <a:prstGeom prst="line">
@@ -15441,8 +15445,8 @@
         </p:nvSpPr>
         <p:spPr>
           <a:xfrm>
-            <a:off x="7872984" y="3248863"/>
-            <a:ext cx="890016" cy="301752"/>
+            <a:off x="7781544" y="3255264"/>
+            <a:ext cx="935736" cy="301752"/>
           </a:xfrm>
           <a:prstGeom prst="roundRect">
             <a:avLst>
@@ -15468,8 +15472,8 @@
         </p:nvSpPr>
         <p:spPr>
           <a:xfrm>
-            <a:off x="7909560" y="3322015"/>
-            <a:ext cx="816864" cy="146304"/>
+            <a:off x="7818120" y="3328416"/>
+            <a:ext cx="862584" cy="146304"/>
           </a:xfrm>
           <a:prstGeom prst="rect">
             <a:avLst/>
@@ -15509,7 +15513,7 @@
         </p:nvSpPr>
         <p:spPr>
           <a:xfrm>
-            <a:off x="9817608" y="3399739"/>
+            <a:off x="9817608" y="3406140"/>
             <a:ext cx="164592" cy="0"/>
           </a:xfrm>
           <a:prstGeom prst="line">
@@ -15532,8 +15536,8 @@
         </p:nvSpPr>
         <p:spPr>
           <a:xfrm>
-            <a:off x="8927592" y="3248863"/>
-            <a:ext cx="890016" cy="301752"/>
+            <a:off x="8881872" y="3255264"/>
+            <a:ext cx="935736" cy="301752"/>
           </a:xfrm>
           <a:prstGeom prst="roundRect">
             <a:avLst>
@@ -15559,8 +15563,8 @@
         </p:nvSpPr>
         <p:spPr>
           <a:xfrm>
-            <a:off x="8964168" y="3322015"/>
-            <a:ext cx="816864" cy="146304"/>
+            <a:off x="8918448" y="3328416"/>
+            <a:ext cx="862584" cy="146304"/>
           </a:xfrm>
           <a:prstGeom prst="rect">
             <a:avLst/>
@@ -15600,8 +15604,8 @@
         </p:nvSpPr>
         <p:spPr>
           <a:xfrm>
-            <a:off x="9982200" y="3248863"/>
-            <a:ext cx="890016" cy="301752"/>
+            <a:off x="9982200" y="3255264"/>
+            <a:ext cx="935736" cy="301752"/>
           </a:xfrm>
           <a:prstGeom prst="roundRect">
             <a:avLst>
@@ -15627,8 +15631,8 @@
         </p:nvSpPr>
         <p:spPr>
           <a:xfrm>
-            <a:off x="10018776" y="3322015"/>
-            <a:ext cx="816864" cy="146304"/>
+            <a:off x="10018776" y="3328416"/>
+            <a:ext cx="862584" cy="146304"/>
           </a:xfrm>
           <a:prstGeom prst="rect">
             <a:avLst/>
@@ -15668,8 +15672,8 @@
         </p:nvSpPr>
         <p:spPr>
           <a:xfrm>
-            <a:off x="7854696" y="3742639"/>
-            <a:ext cx="3035808" cy="158191"/>
+            <a:off x="7763256" y="3749040"/>
+            <a:ext cx="3172968" cy="356616"/>
           </a:xfrm>
           <a:prstGeom prst="rect">
             <a:avLst/>
@@ -15687,7 +15691,7 @@
               <a:buNone/>
             </a:pPr>
             <a:r>
-              <a:rPr lang="en-US" sz="1120" dirty="0">
+              <a:rPr lang="en-US" sz="1040" dirty="0">
                 <a:solidFill>
                   <a:srgbClr val="17364A"/>
                 </a:solidFill>
@@ -15695,9 +15699,9 @@
                 <a:ea typeface="Aptos" pitchFamily="34" charset="-122"/>
                 <a:cs typeface="Aptos" pitchFamily="34" charset="-120"/>
               </a:rPr>
-              <a:t>The important handoff is not from data to AI; it is from analysis to accountable human review.</a:t>
-            </a:r>
-            <a:endParaRPr lang="en-US" sz="1120" dirty="0"/>
+              <a:t>The important handoff is not from data to AI; it is from analysis to.</a:t>
+            </a:r>
+            <a:endParaRPr lang="en-US" sz="1040" dirty="0"/>
           </a:p>
         </p:txBody>
       </p:sp>
@@ -15709,12 +15713,12 @@
         </p:nvSpPr>
         <p:spPr>
           <a:xfrm>
-            <a:off x="7635240" y="4184294"/>
-            <a:ext cx="3474720" cy="1466698"/>
+            <a:off x="7543800" y="4389120"/>
+            <a:ext cx="3611880" cy="1261872"/>
           </a:xfrm>
           <a:prstGeom prst="roundRect">
             <a:avLst>
-              <a:gd name="adj" fmla="val 7481"/>
+              <a:gd name="adj" fmla="val 8696"/>
             </a:avLst>
           </a:prstGeom>
           <a:solidFill>
@@ -15736,8 +15740,8 @@
         </p:nvSpPr>
         <p:spPr>
           <a:xfrm>
-            <a:off x="7799832" y="4330598"/>
-            <a:ext cx="3145536" cy="256032"/>
+            <a:off x="7708392" y="4517136"/>
+            <a:ext cx="3282696" cy="228600"/>
           </a:xfrm>
           <a:prstGeom prst="rect">
             <a:avLst/>
@@ -15753,7 +15757,7 @@
               <a:buNone/>
             </a:pPr>
             <a:r>
-              <a:rPr lang="en-US" sz="1300" b="1" dirty="0">
+              <a:rPr lang="en-US" sz="1220" b="1" dirty="0">
                 <a:solidFill>
                   <a:srgbClr val="0068B7"/>
                 </a:solidFill>
@@ -15763,7 +15767,7 @@
               </a:rPr>
               <a:t>How to validate</a:t>
             </a:r>
-            <a:endParaRPr lang="en-US" sz="1300" dirty="0"/>
+            <a:endParaRPr lang="en-US" sz="1220" dirty="0"/>
           </a:p>
         </p:txBody>
       </p:sp>
@@ -15775,8 +15779,8 @@
         </p:nvSpPr>
         <p:spPr>
           <a:xfrm>
-            <a:off x="7799832" y="4659782"/>
-            <a:ext cx="3145536" cy="899770"/>
+            <a:off x="7708392" y="4828032"/>
+            <a:ext cx="3282696" cy="749808"/>
           </a:xfrm>
           <a:prstGeom prst="rect">
             <a:avLst/>
@@ -15794,7 +15798,7 @@
               <a:buNone/>
             </a:pPr>
             <a:r>
-              <a:rPr lang="en-US" sz="1320" dirty="0">
+              <a:rPr lang="en-US" sz="1220" dirty="0">
                 <a:solidFill>
                   <a:srgbClr val="17364A"/>
                 </a:solidFill>
@@ -15802,9 +15806,9 @@
                 <a:ea typeface="Aptos" pitchFamily="34" charset="-122"/>
                 <a:cs typeface="Aptos" pitchFamily="34" charset="-120"/>
               </a:rPr>
-              <a:t>Connect the concept to data quality, model performance, validation evidence, monitoring measures, and decisions that remain under human control.</a:t>
-            </a:r>
-            <a:endParaRPr lang="en-US" sz="1320" dirty="0"/>
+              <a:t>Connect the concept to data quality, model performance, validation evidence,.</a:t>
+            </a:r>
+            <a:endParaRPr lang="en-US" sz="1220" dirty="0"/>
           </a:p>
         </p:txBody>
       </p:sp>
@@ -16095,8 +16099,8 @@
         </p:nvSpPr>
         <p:spPr>
           <a:xfrm>
-            <a:off x="868680" y="1508760"/>
-            <a:ext cx="6309360" cy="4160520"/>
+            <a:off x="822960" y="1463040"/>
+            <a:ext cx="6565392" cy="4343400"/>
           </a:xfrm>
           <a:prstGeom prst="rect">
             <a:avLst/>
@@ -16114,7 +16118,7 @@
               <a:buNone/>
             </a:pPr>
             <a:r>
-              <a:rPr lang="en-US" sz="2100" dirty="0">
+              <a:rPr lang="en-US" sz="1920" dirty="0">
                 <a:solidFill>
                   <a:srgbClr val="003A63"/>
                 </a:solidFill>
@@ -16122,16 +16126,16 @@
                 <a:ea typeface="Aptos" pitchFamily="34" charset="-122"/>
                 <a:cs typeface="Aptos" pitchFamily="34" charset="-120"/>
               </a:rPr>
-              <a:t>• AI systems can create a false sense of precision when they produce polished outputs from weak.</a:t>
-            </a:r>
-            <a:endParaRPr lang="en-US" sz="2100" dirty="0"/>
-          </a:p>
-          <a:p>
-            <a:pPr indent="0" marL="0">
-              <a:buNone/>
-            </a:pPr>
-            <a:r>
-              <a:rPr lang="en-US" sz="2100" dirty="0">
+              <a:t>• AI systems can create a false sense of precision when they produce polished.</a:t>
+            </a:r>
+            <a:endParaRPr lang="en-US" sz="1920" dirty="0"/>
+          </a:p>
+          <a:p>
+            <a:pPr indent="0" marL="0">
+              <a:buNone/>
+            </a:pPr>
+            <a:r>
+              <a:rPr lang="en-US" sz="1920" dirty="0">
                 <a:solidFill>
                   <a:srgbClr val="003A63"/>
                 </a:solidFill>
@@ -16141,14 +16145,14 @@
               </a:rPr>
               <a:t>• A summary may sound authoritative even when key fields are missing.</a:t>
             </a:r>
-            <a:endParaRPr lang="en-US" sz="2100" dirty="0"/>
-          </a:p>
-          <a:p>
-            <a:pPr indent="0" marL="0">
-              <a:buNone/>
-            </a:pPr>
-            <a:r>
-              <a:rPr lang="en-US" sz="2100" dirty="0">
+            <a:endParaRPr lang="en-US" sz="1920" dirty="0"/>
+          </a:p>
+          <a:p>
+            <a:pPr indent="0" marL="0">
+              <a:buNone/>
+            </a:pPr>
+            <a:r>
+              <a:rPr lang="en-US" sz="1920" dirty="0">
                 <a:solidFill>
                   <a:srgbClr val="003A63"/>
                 </a:solidFill>
@@ -16156,9 +16160,9 @@
                 <a:ea typeface="Aptos" pitchFamily="34" charset="-122"/>
                 <a:cs typeface="Aptos" pitchFamily="34" charset="-120"/>
               </a:rPr>
-              <a:t>• A risk score may look objective even when the data underrepresent communities with limited.</a:t>
-            </a:r>
-            <a:endParaRPr lang="en-US" sz="2100" dirty="0"/>
+              <a:t>• A risk score may look objective even when the data underrepresent.</a:t>
+            </a:r>
+            <a:endParaRPr lang="en-US" sz="1920" dirty="0"/>
           </a:p>
         </p:txBody>
       </p:sp>
@@ -16170,12 +16174,12 @@
         </p:nvSpPr>
         <p:spPr>
           <a:xfrm>
-            <a:off x="7635240" y="1325880"/>
-            <a:ext cx="3474720" cy="1255471"/>
+            <a:off x="7543800" y="1325880"/>
+            <a:ext cx="3611880" cy="1261872"/>
           </a:xfrm>
           <a:prstGeom prst="roundRect">
             <a:avLst>
-              <a:gd name="adj" fmla="val 8740"/>
+              <a:gd name="adj" fmla="val 8696"/>
             </a:avLst>
           </a:prstGeom>
           <a:solidFill>
@@ -16197,8 +16201,8 @@
         </p:nvSpPr>
         <p:spPr>
           <a:xfrm>
-            <a:off x="7799832" y="1472184"/>
-            <a:ext cx="3145536" cy="256032"/>
+            <a:off x="7708392" y="1453896"/>
+            <a:ext cx="3282696" cy="228600"/>
           </a:xfrm>
           <a:prstGeom prst="rect">
             <a:avLst/>
@@ -16214,7 +16218,7 @@
               <a:buNone/>
             </a:pPr>
             <a:r>
-              <a:rPr lang="en-US" sz="1300" b="1" dirty="0">
+              <a:rPr lang="en-US" sz="1220" b="1" dirty="0">
                 <a:solidFill>
                   <a:srgbClr val="0068B7"/>
                 </a:solidFill>
@@ -16224,7 +16228,7 @@
               </a:rPr>
               <a:t>Data decision</a:t>
             </a:r>
-            <a:endParaRPr lang="en-US" sz="1300" dirty="0"/>
+            <a:endParaRPr lang="en-US" sz="1220" dirty="0"/>
           </a:p>
         </p:txBody>
       </p:sp>
@@ -16236,8 +16240,8 @@
         </p:nvSpPr>
         <p:spPr>
           <a:xfrm>
-            <a:off x="7799832" y="1801368"/>
-            <a:ext cx="3145536" cy="688543"/>
+            <a:off x="7708392" y="1764792"/>
+            <a:ext cx="3282696" cy="749808"/>
           </a:xfrm>
           <a:prstGeom prst="rect">
             <a:avLst/>
@@ -16255,7 +16259,7 @@
               <a:buNone/>
             </a:pPr>
             <a:r>
-              <a:rPr lang="en-US" sz="1320" dirty="0">
+              <a:rPr lang="en-US" sz="1220" dirty="0">
                 <a:solidFill>
                   <a:srgbClr val="17364A"/>
                 </a:solidFill>
@@ -16263,9 +16267,9 @@
                 <a:ea typeface="Aptos" pitchFamily="34" charset="-122"/>
                 <a:cs typeface="Aptos" pitchFamily="34" charset="-120"/>
               </a:rPr>
-              <a:t>AI systems can create a false sense of precision when they produce polished outputs from weak data.</a:t>
-            </a:r>
-            <a:endParaRPr lang="en-US" sz="1320" dirty="0"/>
+              <a:t>AI systems can create a false sense of precision when they produce polished.</a:t>
+            </a:r>
+            <a:endParaRPr lang="en-US" sz="1220" dirty="0"/>
           </a:p>
         </p:txBody>
       </p:sp>
@@ -16277,12 +16281,12 @@
         </p:nvSpPr>
         <p:spPr>
           <a:xfrm>
-            <a:off x="7635240" y="2718511"/>
-            <a:ext cx="3474720" cy="1328623"/>
+            <a:off x="7543800" y="2724912"/>
+            <a:ext cx="3611880" cy="1527048"/>
           </a:xfrm>
           <a:prstGeom prst="roundRect">
             <a:avLst>
-              <a:gd name="adj" fmla="val 8259"/>
+              <a:gd name="adj" fmla="val 7186"/>
             </a:avLst>
           </a:prstGeom>
           <a:solidFill>
@@ -16304,24 +16308,26 @@
         </p:nvSpPr>
         <p:spPr>
           <a:xfrm>
-            <a:off x="7799832" y="2846527"/>
-            <a:ext cx="3145536" cy="237744"/>
-          </a:xfrm>
-          <a:prstGeom prst="rect">
-            <a:avLst/>
-          </a:prstGeom>
-          <a:noFill/>
-          <a:ln/>
-        </p:spPr>
-        <p:txBody>
-          <a:bodyPr wrap="square" lIns="0" tIns="0" rIns="0" bIns="0" rtlCol="0" anchor="ctr"/>
-          <a:lstStyle/>
-          <a:p>
-            <a:pPr indent="0" marL="0">
-              <a:buNone/>
-            </a:pPr>
-            <a:r>
-              <a:rPr lang="en-US" sz="1250" b="1" dirty="0">
+            <a:off x="7708392" y="2852928"/>
+            <a:ext cx="3282696" cy="219456"/>
+          </a:xfrm>
+          <a:prstGeom prst="rect">
+            <a:avLst/>
+          </a:prstGeom>
+          <a:noFill/>
+          <a:ln/>
+        </p:spPr>
+        <p:txBody>
+          <a:bodyPr wrap="square" lIns="0" tIns="0" rIns="0" bIns="0" rtlCol="0" anchor="ctr">
+            <a:normAutofit/>
+          </a:bodyPr>
+          <a:lstStyle/>
+          <a:p>
+            <a:pPr indent="0" marL="0">
+              <a:buNone/>
+            </a:pPr>
+            <a:r>
+              <a:rPr lang="en-US" sz="1160" b="1" dirty="0">
                 <a:solidFill>
                   <a:srgbClr val="0068B7"/>
                 </a:solidFill>
@@ -16331,7 +16337,7 @@
               </a:rPr>
               <a:t>Data-to-decision flow</a:t>
             </a:r>
-            <a:endParaRPr lang="en-US" sz="1250" dirty="0"/>
+            <a:endParaRPr lang="en-US" sz="1160" dirty="0"/>
           </a:p>
         </p:txBody>
       </p:sp>
@@ -16343,7 +16349,7 @@
         </p:nvSpPr>
         <p:spPr>
           <a:xfrm>
-            <a:off x="8763000" y="3399739"/>
+            <a:off x="8717280" y="3406140"/>
             <a:ext cx="164592" cy="0"/>
           </a:xfrm>
           <a:prstGeom prst="line">
@@ -16366,8 +16372,8 @@
         </p:nvSpPr>
         <p:spPr>
           <a:xfrm>
-            <a:off x="7872984" y="3248863"/>
-            <a:ext cx="890016" cy="301752"/>
+            <a:off x="7781544" y="3255264"/>
+            <a:ext cx="935736" cy="301752"/>
           </a:xfrm>
           <a:prstGeom prst="roundRect">
             <a:avLst>
@@ -16393,8 +16399,8 @@
         </p:nvSpPr>
         <p:spPr>
           <a:xfrm>
-            <a:off x="7909560" y="3322015"/>
-            <a:ext cx="816864" cy="146304"/>
+            <a:off x="7818120" y="3328416"/>
+            <a:ext cx="862584" cy="146304"/>
           </a:xfrm>
           <a:prstGeom prst="rect">
             <a:avLst/>
@@ -16434,7 +16440,7 @@
         </p:nvSpPr>
         <p:spPr>
           <a:xfrm>
-            <a:off x="9817608" y="3399739"/>
+            <a:off x="9817608" y="3406140"/>
             <a:ext cx="164592" cy="0"/>
           </a:xfrm>
           <a:prstGeom prst="line">
@@ -16457,8 +16463,8 @@
         </p:nvSpPr>
         <p:spPr>
           <a:xfrm>
-            <a:off x="8927592" y="3248863"/>
-            <a:ext cx="890016" cy="301752"/>
+            <a:off x="8881872" y="3255264"/>
+            <a:ext cx="935736" cy="301752"/>
           </a:xfrm>
           <a:prstGeom prst="roundRect">
             <a:avLst>
@@ -16484,8 +16490,8 @@
         </p:nvSpPr>
         <p:spPr>
           <a:xfrm>
-            <a:off x="8964168" y="3322015"/>
-            <a:ext cx="816864" cy="146304"/>
+            <a:off x="8918448" y="3328416"/>
+            <a:ext cx="862584" cy="146304"/>
           </a:xfrm>
           <a:prstGeom prst="rect">
             <a:avLst/>
@@ -16525,8 +16531,8 @@
         </p:nvSpPr>
         <p:spPr>
           <a:xfrm>
-            <a:off x="9982200" y="3248863"/>
-            <a:ext cx="890016" cy="301752"/>
+            <a:off x="9982200" y="3255264"/>
+            <a:ext cx="935736" cy="301752"/>
           </a:xfrm>
           <a:prstGeom prst="roundRect">
             <a:avLst>
@@ -16552,8 +16558,8 @@
         </p:nvSpPr>
         <p:spPr>
           <a:xfrm>
-            <a:off x="10018776" y="3322015"/>
-            <a:ext cx="816864" cy="146304"/>
+            <a:off x="10018776" y="3328416"/>
+            <a:ext cx="862584" cy="146304"/>
           </a:xfrm>
           <a:prstGeom prst="rect">
             <a:avLst/>
@@ -16593,8 +16599,8 @@
         </p:nvSpPr>
         <p:spPr>
           <a:xfrm>
-            <a:off x="7854696" y="3742639"/>
-            <a:ext cx="3035808" cy="158191"/>
+            <a:off x="7763256" y="3749040"/>
+            <a:ext cx="3172968" cy="356616"/>
           </a:xfrm>
           <a:prstGeom prst="rect">
             <a:avLst/>
@@ -16612,7 +16618,7 @@
               <a:buNone/>
             </a:pPr>
             <a:r>
-              <a:rPr lang="en-US" sz="1120" dirty="0">
+              <a:rPr lang="en-US" sz="1040" dirty="0">
                 <a:solidFill>
                   <a:srgbClr val="17364A"/>
                 </a:solidFill>
@@ -16620,9 +16626,9 @@
                 <a:ea typeface="Aptos" pitchFamily="34" charset="-122"/>
                 <a:cs typeface="Aptos" pitchFamily="34" charset="-120"/>
               </a:rPr>
-              <a:t>The important handoff is not from data to AI; it is from analysis to accountable human review.</a:t>
-            </a:r>
-            <a:endParaRPr lang="en-US" sz="1120" dirty="0"/>
+              <a:t>The important handoff is not from data to AI; it is from analysis to.</a:t>
+            </a:r>
+            <a:endParaRPr lang="en-US" sz="1040" dirty="0"/>
           </a:p>
         </p:txBody>
       </p:sp>
@@ -16634,12 +16640,12 @@
         </p:nvSpPr>
         <p:spPr>
           <a:xfrm>
-            <a:off x="7635240" y="4184294"/>
-            <a:ext cx="3474720" cy="1466698"/>
+            <a:off x="7543800" y="4389120"/>
+            <a:ext cx="3611880" cy="1261872"/>
           </a:xfrm>
           <a:prstGeom prst="roundRect">
             <a:avLst>
-              <a:gd name="adj" fmla="val 7481"/>
+              <a:gd name="adj" fmla="val 8696"/>
             </a:avLst>
           </a:prstGeom>
           <a:solidFill>
@@ -16661,8 +16667,8 @@
         </p:nvSpPr>
         <p:spPr>
           <a:xfrm>
-            <a:off x="7799832" y="4330598"/>
-            <a:ext cx="3145536" cy="256032"/>
+            <a:off x="7708392" y="4517136"/>
+            <a:ext cx="3282696" cy="228600"/>
           </a:xfrm>
           <a:prstGeom prst="rect">
             <a:avLst/>
@@ -16678,7 +16684,7 @@
               <a:buNone/>
             </a:pPr>
             <a:r>
-              <a:rPr lang="en-US" sz="1300" b="1" dirty="0">
+              <a:rPr lang="en-US" sz="1220" b="1" dirty="0">
                 <a:solidFill>
                   <a:srgbClr val="0068B7"/>
                 </a:solidFill>
@@ -16688,7 +16694,7 @@
               </a:rPr>
               <a:t>How to validate</a:t>
             </a:r>
-            <a:endParaRPr lang="en-US" sz="1300" dirty="0"/>
+            <a:endParaRPr lang="en-US" sz="1220" dirty="0"/>
           </a:p>
         </p:txBody>
       </p:sp>
@@ -16700,8 +16706,8 @@
         </p:nvSpPr>
         <p:spPr>
           <a:xfrm>
-            <a:off x="7799832" y="4659782"/>
-            <a:ext cx="3145536" cy="899770"/>
+            <a:off x="7708392" y="4828032"/>
+            <a:ext cx="3282696" cy="749808"/>
           </a:xfrm>
           <a:prstGeom prst="rect">
             <a:avLst/>
@@ -16719,7 +16725,7 @@
               <a:buNone/>
             </a:pPr>
             <a:r>
-              <a:rPr lang="en-US" sz="1320" dirty="0">
+              <a:rPr lang="en-US" sz="1220" dirty="0">
                 <a:solidFill>
                   <a:srgbClr val="17364A"/>
                 </a:solidFill>
@@ -16727,9 +16733,9 @@
                 <a:ea typeface="Aptos" pitchFamily="34" charset="-122"/>
                 <a:cs typeface="Aptos" pitchFamily="34" charset="-120"/>
               </a:rPr>
-              <a:t>Connect the concept to data quality, model performance, validation evidence, monitoring measures, and decisions that remain under human control.</a:t>
-            </a:r>
-            <a:endParaRPr lang="en-US" sz="1320" dirty="0"/>
+              <a:t>Connect the concept to data quality, model performance, validation evidence,.</a:t>
+            </a:r>
+            <a:endParaRPr lang="en-US" sz="1220" dirty="0"/>
           </a:p>
         </p:txBody>
       </p:sp>
@@ -17020,8 +17026,8 @@
         </p:nvSpPr>
         <p:spPr>
           <a:xfrm>
-            <a:off x="868680" y="1508760"/>
-            <a:ext cx="6309360" cy="4160520"/>
+            <a:off x="822960" y="1463040"/>
+            <a:ext cx="6565392" cy="4343400"/>
           </a:xfrm>
           <a:prstGeom prst="rect">
             <a:avLst/>
@@ -17039,7 +17045,7 @@
               <a:buNone/>
             </a:pPr>
             <a:r>
-              <a:rPr lang="en-US" sz="2100" dirty="0">
+              <a:rPr lang="en-US" sz="1920" dirty="0">
                 <a:solidFill>
                   <a:srgbClr val="003A63"/>
                 </a:solidFill>
@@ -17049,14 +17055,14 @@
               </a:rPr>
               <a:t>• Completeness.</a:t>
             </a:r>
-            <a:endParaRPr lang="en-US" sz="2100" dirty="0"/>
-          </a:p>
-          <a:p>
-            <a:pPr indent="0" marL="0">
-              <a:buNone/>
-            </a:pPr>
-            <a:r>
-              <a:rPr lang="en-US" sz="2100" dirty="0">
+            <a:endParaRPr lang="en-US" sz="1920" dirty="0"/>
+          </a:p>
+          <a:p>
+            <a:pPr indent="0" marL="0">
+              <a:buNone/>
+            </a:pPr>
+            <a:r>
+              <a:rPr lang="en-US" sz="1920" dirty="0">
                 <a:solidFill>
                   <a:srgbClr val="003A63"/>
                 </a:solidFill>
@@ -17066,14 +17072,14 @@
               </a:rPr>
               <a:t>• Completeness refers to whether required data fields are present.</a:t>
             </a:r>
-            <a:endParaRPr lang="en-US" sz="2100" dirty="0"/>
-          </a:p>
-          <a:p>
-            <a:pPr indent="0" marL="0">
-              <a:buNone/>
-            </a:pPr>
-            <a:r>
-              <a:rPr lang="en-US" sz="2100" dirty="0">
+            <a:endParaRPr lang="en-US" sz="1920" dirty="0"/>
+          </a:p>
+          <a:p>
+            <a:pPr indent="0" marL="0">
+              <a:buNone/>
+            </a:pPr>
+            <a:r>
+              <a:rPr lang="en-US" sz="1920" dirty="0">
                 <a:solidFill>
                   <a:srgbClr val="003A63"/>
                 </a:solidFill>
@@ -17081,9 +17087,9 @@
                 <a:ea typeface="Aptos" pitchFamily="34" charset="-122"/>
                 <a:cs typeface="Aptos" pitchFamily="34" charset="-120"/>
               </a:rPr>
-              <a:t>• Missing fields may affect case classification, risk prediction, subgroup analysis, and.</a:t>
-            </a:r>
-            <a:endParaRPr lang="en-US" sz="2100" dirty="0"/>
+              <a:t>• Missing fields may affect case classification, risk prediction, subgroup.</a:t>
+            </a:r>
+            <a:endParaRPr lang="en-US" sz="1920" dirty="0"/>
           </a:p>
         </p:txBody>
       </p:sp>
@@ -17095,12 +17101,12 @@
         </p:nvSpPr>
         <p:spPr>
           <a:xfrm>
-            <a:off x="7635240" y="1325880"/>
-            <a:ext cx="3474720" cy="1207008"/>
+            <a:off x="7543800" y="1325880"/>
+            <a:ext cx="3611880" cy="1261872"/>
           </a:xfrm>
           <a:prstGeom prst="roundRect">
             <a:avLst>
-              <a:gd name="adj" fmla="val 9091"/>
+              <a:gd name="adj" fmla="val 8696"/>
             </a:avLst>
           </a:prstGeom>
           <a:solidFill>
@@ -17122,8 +17128,8 @@
         </p:nvSpPr>
         <p:spPr>
           <a:xfrm>
-            <a:off x="7799832" y="1472184"/>
-            <a:ext cx="3145536" cy="256032"/>
+            <a:off x="7708392" y="1453896"/>
+            <a:ext cx="3282696" cy="228600"/>
           </a:xfrm>
           <a:prstGeom prst="rect">
             <a:avLst/>
@@ -17139,7 +17145,7 @@
               <a:buNone/>
             </a:pPr>
             <a:r>
-              <a:rPr lang="en-US" sz="1300" b="1" dirty="0">
+              <a:rPr lang="en-US" sz="1220" b="1" dirty="0">
                 <a:solidFill>
                   <a:srgbClr val="0068B7"/>
                 </a:solidFill>
@@ -17149,7 +17155,7 @@
               </a:rPr>
               <a:t>Data decision</a:t>
             </a:r>
-            <a:endParaRPr lang="en-US" sz="1300" dirty="0"/>
+            <a:endParaRPr lang="en-US" sz="1220" dirty="0"/>
           </a:p>
         </p:txBody>
       </p:sp>
@@ -17161,8 +17167,8 @@
         </p:nvSpPr>
         <p:spPr>
           <a:xfrm>
-            <a:off x="7799832" y="1801368"/>
-            <a:ext cx="3145536" cy="640080"/>
+            <a:off x="7708392" y="1764792"/>
+            <a:ext cx="3282696" cy="749808"/>
           </a:xfrm>
           <a:prstGeom prst="rect">
             <a:avLst/>
@@ -17180,7 +17186,7 @@
               <a:buNone/>
             </a:pPr>
             <a:r>
-              <a:rPr lang="en-US" sz="1320" dirty="0">
+              <a:rPr lang="en-US" sz="1220" dirty="0">
                 <a:solidFill>
                   <a:srgbClr val="17364A"/>
                 </a:solidFill>
@@ -17190,7 +17196,7 @@
               </a:rPr>
               <a:t>Completeness.</a:t>
             </a:r>
-            <a:endParaRPr lang="en-US" sz="1320" dirty="0"/>
+            <a:endParaRPr lang="en-US" sz="1220" dirty="0"/>
           </a:p>
         </p:txBody>
       </p:sp>
@@ -17202,12 +17208,12 @@
         </p:nvSpPr>
         <p:spPr>
           <a:xfrm>
-            <a:off x="7635240" y="2670048"/>
-            <a:ext cx="3474720" cy="1377086"/>
+            <a:off x="7543800" y="2724912"/>
+            <a:ext cx="3611880" cy="1527048"/>
           </a:xfrm>
           <a:prstGeom prst="roundRect">
             <a:avLst>
-              <a:gd name="adj" fmla="val 7968"/>
+              <a:gd name="adj" fmla="val 7186"/>
             </a:avLst>
           </a:prstGeom>
           <a:solidFill>
@@ -17229,8 +17235,8 @@
         </p:nvSpPr>
         <p:spPr>
           <a:xfrm>
-            <a:off x="7799832" y="2816352"/>
-            <a:ext cx="3145536" cy="256032"/>
+            <a:off x="7708392" y="2852928"/>
+            <a:ext cx="3282696" cy="228600"/>
           </a:xfrm>
           <a:prstGeom prst="rect">
             <a:avLst/>
@@ -17246,7 +17252,7 @@
               <a:buNone/>
             </a:pPr>
             <a:r>
-              <a:rPr lang="en-US" sz="1300" b="1" dirty="0">
+              <a:rPr lang="en-US" sz="1220" b="1" dirty="0">
                 <a:solidFill>
                   <a:srgbClr val="0068B7"/>
                 </a:solidFill>
@@ -17256,7 +17262,7 @@
               </a:rPr>
               <a:t>Concept checkpoints</a:t>
             </a:r>
-            <a:endParaRPr lang="en-US" sz="1300" dirty="0"/>
+            <a:endParaRPr lang="en-US" sz="1220" dirty="0"/>
           </a:p>
         </p:txBody>
       </p:sp>
@@ -17268,8 +17274,8 @@
         </p:nvSpPr>
         <p:spPr>
           <a:xfrm>
-            <a:off x="7818120" y="3182112"/>
-            <a:ext cx="3090672" cy="718718"/>
+            <a:off x="7726680" y="3182112"/>
+            <a:ext cx="3227832" cy="960120"/>
           </a:xfrm>
           <a:prstGeom prst="rect">
             <a:avLst/>
@@ -17287,7 +17293,7 @@
               <a:buNone/>
             </a:pPr>
             <a:r>
-              <a:rPr lang="en-US" sz="1220" dirty="0">
+              <a:rPr lang="en-US" sz="1140" dirty="0">
                 <a:solidFill>
                   <a:srgbClr val="17364A"/>
                 </a:solidFill>
@@ -17297,14 +17303,14 @@
               </a:rPr>
               <a:t>Timeliness.</a:t>
             </a:r>
-            <a:endParaRPr lang="en-US" sz="1220" dirty="0"/>
-          </a:p>
-          <a:p>
-            <a:pPr indent="0" marL="0">
-              <a:buNone/>
-            </a:pPr>
-            <a:r>
-              <a:rPr lang="en-US" sz="1220" dirty="0">
+            <a:endParaRPr lang="en-US" sz="1140" dirty="0"/>
+          </a:p>
+          <a:p>
+            <a:pPr indent="0" marL="0">
+              <a:buNone/>
+            </a:pPr>
+            <a:r>
+              <a:rPr lang="en-US" sz="1140" dirty="0">
                 <a:solidFill>
                   <a:srgbClr val="17364A"/>
                 </a:solidFill>
@@ -17312,16 +17318,16 @@
                 <a:ea typeface="Aptos" pitchFamily="34" charset="-122"/>
                 <a:cs typeface="Aptos" pitchFamily="34" charset="-120"/>
               </a:rPr>
-              <a:t>Timeliness refers to whether data are available quickly enough for.</a:t>
-            </a:r>
-            <a:endParaRPr lang="en-US" sz="1220" dirty="0"/>
-          </a:p>
-          <a:p>
-            <a:pPr indent="0" marL="0">
-              <a:buNone/>
-            </a:pPr>
-            <a:r>
-              <a:rPr lang="en-US" sz="1220" dirty="0">
+              <a:t>Timeliness refers to whether data are available.</a:t>
+            </a:r>
+            <a:endParaRPr lang="en-US" sz="1140" dirty="0"/>
+          </a:p>
+          <a:p>
+            <a:pPr indent="0" marL="0">
+              <a:buNone/>
+            </a:pPr>
+            <a:r>
+              <a:rPr lang="en-US" sz="1140" dirty="0">
                 <a:solidFill>
                   <a:srgbClr val="17364A"/>
                 </a:solidFill>
@@ -17329,9 +17335,9 @@
                 <a:ea typeface="Aptos" pitchFamily="34" charset="-122"/>
                 <a:cs typeface="Aptos" pitchFamily="34" charset="-120"/>
               </a:rPr>
-              <a:t>Delayed data may be acceptable for retrospective analysis but.</a:t>
-            </a:r>
-            <a:endParaRPr lang="en-US" sz="1220" dirty="0"/>
+              <a:t>Delayed data may be acceptable for retrospective.</a:t>
+            </a:r>
+            <a:endParaRPr lang="en-US" sz="1140" dirty="0"/>
           </a:p>
         </p:txBody>
       </p:sp>
@@ -17343,12 +17349,12 @@
         </p:nvSpPr>
         <p:spPr>
           <a:xfrm>
-            <a:off x="7635240" y="4184294"/>
-            <a:ext cx="3474720" cy="1466698"/>
+            <a:off x="7543800" y="4389120"/>
+            <a:ext cx="3611880" cy="1261872"/>
           </a:xfrm>
           <a:prstGeom prst="roundRect">
             <a:avLst>
-              <a:gd name="adj" fmla="val 7481"/>
+              <a:gd name="adj" fmla="val 8696"/>
             </a:avLst>
           </a:prstGeom>
           <a:solidFill>
@@ -17370,8 +17376,8 @@
         </p:nvSpPr>
         <p:spPr>
           <a:xfrm>
-            <a:off x="7799832" y="4330598"/>
-            <a:ext cx="3145536" cy="256032"/>
+            <a:off x="7708392" y="4517136"/>
+            <a:ext cx="3282696" cy="228600"/>
           </a:xfrm>
           <a:prstGeom prst="rect">
             <a:avLst/>
@@ -17387,7 +17393,7 @@
               <a:buNone/>
             </a:pPr>
             <a:r>
-              <a:rPr lang="en-US" sz="1300" b="1" dirty="0">
+              <a:rPr lang="en-US" sz="1220" b="1" dirty="0">
                 <a:solidFill>
                   <a:srgbClr val="0068B7"/>
                 </a:solidFill>
@@ -17397,7 +17403,7 @@
               </a:rPr>
               <a:t>How to validate</a:t>
             </a:r>
-            <a:endParaRPr lang="en-US" sz="1300" dirty="0"/>
+            <a:endParaRPr lang="en-US" sz="1220" dirty="0"/>
           </a:p>
         </p:txBody>
       </p:sp>
@@ -17409,8 +17415,8 @@
         </p:nvSpPr>
         <p:spPr>
           <a:xfrm>
-            <a:off x="7799832" y="4659782"/>
-            <a:ext cx="3145536" cy="899770"/>
+            <a:off x="7708392" y="4828032"/>
+            <a:ext cx="3282696" cy="749808"/>
           </a:xfrm>
           <a:prstGeom prst="rect">
             <a:avLst/>
@@ -17428,7 +17434,7 @@
               <a:buNone/>
             </a:pPr>
             <a:r>
-              <a:rPr lang="en-US" sz="1320" dirty="0">
+              <a:rPr lang="en-US" sz="1220" dirty="0">
                 <a:solidFill>
                   <a:srgbClr val="17364A"/>
                 </a:solidFill>
@@ -17436,9 +17442,9 @@
                 <a:ea typeface="Aptos" pitchFamily="34" charset="-122"/>
                 <a:cs typeface="Aptos" pitchFamily="34" charset="-120"/>
               </a:rPr>
-              <a:t>Connect the concept to data quality, model performance, validation evidence, monitoring measures, and decisions that remain under human control.</a:t>
-            </a:r>
-            <a:endParaRPr lang="en-US" sz="1320" dirty="0"/>
+              <a:t>Connect the concept to data quality, model performance, validation evidence,.</a:t>
+            </a:r>
+            <a:endParaRPr lang="en-US" sz="1220" dirty="0"/>
           </a:p>
         </p:txBody>
       </p:sp>
@@ -17729,8 +17735,8 @@
         </p:nvSpPr>
         <p:spPr>
           <a:xfrm>
-            <a:off x="868680" y="1508760"/>
-            <a:ext cx="6309360" cy="4160520"/>
+            <a:off x="822960" y="1463040"/>
+            <a:ext cx="6565392" cy="4343400"/>
           </a:xfrm>
           <a:prstGeom prst="rect">
             <a:avLst/>
@@ -17748,7 +17754,7 @@
               <a:buNone/>
             </a:pPr>
             <a:r>
-              <a:rPr lang="en-US" sz="2100" dirty="0">
+              <a:rPr lang="en-US" sz="1920" dirty="0">
                 <a:solidFill>
                   <a:srgbClr val="003A63"/>
                 </a:solidFill>
@@ -17758,14 +17764,14 @@
               </a:rPr>
               <a:t>• Representativeness.</a:t>
             </a:r>
-            <a:endParaRPr lang="en-US" sz="2100" dirty="0"/>
-          </a:p>
-          <a:p>
-            <a:pPr indent="0" marL="0">
-              <a:buNone/>
-            </a:pPr>
-            <a:r>
-              <a:rPr lang="en-US" sz="2100" dirty="0">
+            <a:endParaRPr lang="en-US" sz="1920" dirty="0"/>
+          </a:p>
+          <a:p>
+            <a:pPr indent="0" marL="0">
+              <a:buNone/>
+            </a:pPr>
+            <a:r>
+              <a:rPr lang="en-US" sz="1920" dirty="0">
                 <a:solidFill>
                   <a:srgbClr val="003A63"/>
                 </a:solidFill>
@@ -17773,16 +17779,16 @@
                 <a:ea typeface="Aptos" pitchFamily="34" charset="-122"/>
                 <a:cs typeface="Aptos" pitchFamily="34" charset="-120"/>
               </a:rPr>
-              <a:t>• Representativeness refers to whether data reflect the population, events, or settings relevant.</a:t>
-            </a:r>
-            <a:endParaRPr lang="en-US" sz="2100" dirty="0"/>
-          </a:p>
-          <a:p>
-            <a:pPr indent="0" marL="0">
-              <a:buNone/>
-            </a:pPr>
-            <a:r>
-              <a:rPr lang="en-US" sz="2100" dirty="0">
+              <a:t>• Representativeness refers to whether data reflect the population, events, or.</a:t>
+            </a:r>
+            <a:endParaRPr lang="en-US" sz="1920" dirty="0"/>
+          </a:p>
+          <a:p>
+            <a:pPr indent="0" marL="0">
+              <a:buNone/>
+            </a:pPr>
+            <a:r>
+              <a:rPr lang="en-US" sz="1920" dirty="0">
                 <a:solidFill>
                   <a:srgbClr val="003A63"/>
                 </a:solidFill>
@@ -17792,7 +17798,7 @@
               </a:rPr>
               <a:t>• Underrepresentation can produce biased or incomplete AI outputs.</a:t>
             </a:r>
-            <a:endParaRPr lang="en-US" sz="2100" dirty="0"/>
+            <a:endParaRPr lang="en-US" sz="1920" dirty="0"/>
           </a:p>
         </p:txBody>
       </p:sp>
@@ -17804,12 +17810,12 @@
         </p:nvSpPr>
         <p:spPr>
           <a:xfrm>
-            <a:off x="7635240" y="1325880"/>
-            <a:ext cx="3474720" cy="1207008"/>
+            <a:off x="7543800" y="1325880"/>
+            <a:ext cx="3611880" cy="1261872"/>
           </a:xfrm>
           <a:prstGeom prst="roundRect">
             <a:avLst>
-              <a:gd name="adj" fmla="val 9091"/>
+              <a:gd name="adj" fmla="val 8696"/>
             </a:avLst>
           </a:prstGeom>
           <a:solidFill>
@@ -17831,8 +17837,8 @@
         </p:nvSpPr>
         <p:spPr>
           <a:xfrm>
-            <a:off x="7799832" y="1472184"/>
-            <a:ext cx="3145536" cy="256032"/>
+            <a:off x="7708392" y="1453896"/>
+            <a:ext cx="3282696" cy="228600"/>
           </a:xfrm>
           <a:prstGeom prst="rect">
             <a:avLst/>
@@ -17848,7 +17854,7 @@
               <a:buNone/>
             </a:pPr>
             <a:r>
-              <a:rPr lang="en-US" sz="1300" b="1" dirty="0">
+              <a:rPr lang="en-US" sz="1220" b="1" dirty="0">
                 <a:solidFill>
                   <a:srgbClr val="0068B7"/>
                 </a:solidFill>
@@ -17858,7 +17864,7 @@
               </a:rPr>
               <a:t>Data decision</a:t>
             </a:r>
-            <a:endParaRPr lang="en-US" sz="1300" dirty="0"/>
+            <a:endParaRPr lang="en-US" sz="1220" dirty="0"/>
           </a:p>
         </p:txBody>
       </p:sp>
@@ -17870,8 +17876,8 @@
         </p:nvSpPr>
         <p:spPr>
           <a:xfrm>
-            <a:off x="7799832" y="1801368"/>
-            <a:ext cx="3145536" cy="640080"/>
+            <a:off x="7708392" y="1764792"/>
+            <a:ext cx="3282696" cy="749808"/>
           </a:xfrm>
           <a:prstGeom prst="rect">
             <a:avLst/>
@@ -17889,7 +17895,7 @@
               <a:buNone/>
             </a:pPr>
             <a:r>
-              <a:rPr lang="en-US" sz="1320" dirty="0">
+              <a:rPr lang="en-US" sz="1220" dirty="0">
                 <a:solidFill>
                   <a:srgbClr val="17364A"/>
                 </a:solidFill>
@@ -17899,7 +17905,7 @@
               </a:rPr>
               <a:t>Representativeness.</a:t>
             </a:r>
-            <a:endParaRPr lang="en-US" sz="1320" dirty="0"/>
+            <a:endParaRPr lang="en-US" sz="1220" dirty="0"/>
           </a:p>
         </p:txBody>
       </p:sp>
@@ -17911,12 +17917,12 @@
         </p:nvSpPr>
         <p:spPr>
           <a:xfrm>
-            <a:off x="7635240" y="2670048"/>
-            <a:ext cx="3474720" cy="1377086"/>
+            <a:off x="7543800" y="2724912"/>
+            <a:ext cx="3611880" cy="1527048"/>
           </a:xfrm>
           <a:prstGeom prst="roundRect">
             <a:avLst>
-              <a:gd name="adj" fmla="val 7968"/>
+              <a:gd name="adj" fmla="val 7186"/>
             </a:avLst>
           </a:prstGeom>
           <a:solidFill>
@@ -17938,8 +17944,8 @@
         </p:nvSpPr>
         <p:spPr>
           <a:xfrm>
-            <a:off x="7799832" y="2816352"/>
-            <a:ext cx="3145536" cy="256032"/>
+            <a:off x="7708392" y="2852928"/>
+            <a:ext cx="3282696" cy="228600"/>
           </a:xfrm>
           <a:prstGeom prst="rect">
             <a:avLst/>
@@ -17955,7 +17961,7 @@
               <a:buNone/>
             </a:pPr>
             <a:r>
-              <a:rPr lang="en-US" sz="1300" b="1" dirty="0">
+              <a:rPr lang="en-US" sz="1220" b="1" dirty="0">
                 <a:solidFill>
                   <a:srgbClr val="0068B7"/>
                 </a:solidFill>
@@ -17965,7 +17971,7 @@
               </a:rPr>
               <a:t>Concept checkpoints</a:t>
             </a:r>
-            <a:endParaRPr lang="en-US" sz="1300" dirty="0"/>
+            <a:endParaRPr lang="en-US" sz="1220" dirty="0"/>
           </a:p>
         </p:txBody>
       </p:sp>
@@ -17977,8 +17983,8 @@
         </p:nvSpPr>
         <p:spPr>
           <a:xfrm>
-            <a:off x="7818120" y="3182112"/>
-            <a:ext cx="3090672" cy="718718"/>
+            <a:off x="7726680" y="3182112"/>
+            <a:ext cx="3227832" cy="960120"/>
           </a:xfrm>
           <a:prstGeom prst="rect">
             <a:avLst/>
@@ -17996,7 +18002,7 @@
               <a:buNone/>
             </a:pPr>
             <a:r>
-              <a:rPr lang="en-US" sz="1220" dirty="0">
+              <a:rPr lang="en-US" sz="1140" dirty="0">
                 <a:solidFill>
                   <a:srgbClr val="17364A"/>
                 </a:solidFill>
@@ -18004,16 +18010,16 @@
                 <a:ea typeface="Aptos" pitchFamily="34" charset="-122"/>
                 <a:cs typeface="Aptos" pitchFamily="34" charset="-120"/>
               </a:rPr>
-              <a:t>Representativeness refers to whether data reflect the population,.</a:t>
-            </a:r>
-            <a:endParaRPr lang="en-US" sz="1220" dirty="0"/>
-          </a:p>
-          <a:p>
-            <a:pPr indent="0" marL="0">
-              <a:buNone/>
-            </a:pPr>
-            <a:r>
-              <a:rPr lang="en-US" sz="1220" dirty="0">
+              <a:t>Representativeness refers to whether data reflect.</a:t>
+            </a:r>
+            <a:endParaRPr lang="en-US" sz="1140" dirty="0"/>
+          </a:p>
+          <a:p>
+            <a:pPr indent="0" marL="0">
+              <a:buNone/>
+            </a:pPr>
+            <a:r>
+              <a:rPr lang="en-US" sz="1140" dirty="0">
                 <a:solidFill>
                   <a:srgbClr val="17364A"/>
                 </a:solidFill>
@@ -18023,14 +18029,14 @@
               </a:rPr>
               <a:t>Data drift.</a:t>
             </a:r>
-            <a:endParaRPr lang="en-US" sz="1220" dirty="0"/>
-          </a:p>
-          <a:p>
-            <a:pPr indent="0" marL="0">
-              <a:buNone/>
-            </a:pPr>
-            <a:r>
-              <a:rPr lang="en-US" sz="1220" dirty="0">
+            <a:endParaRPr lang="en-US" sz="1140" dirty="0"/>
+          </a:p>
+          <a:p>
+            <a:pPr indent="0" marL="0">
+              <a:buNone/>
+            </a:pPr>
+            <a:r>
+              <a:rPr lang="en-US" sz="1140" dirty="0">
                 <a:solidFill>
                   <a:srgbClr val="17364A"/>
                 </a:solidFill>
@@ -18040,7 +18046,7 @@
               </a:rPr>
               <a:t>Data drift is a change in data patterns over time.</a:t>
             </a:r>
-            <a:endParaRPr lang="en-US" sz="1220" dirty="0"/>
+            <a:endParaRPr lang="en-US" sz="1140" dirty="0"/>
           </a:p>
         </p:txBody>
       </p:sp>
@@ -18052,12 +18058,12 @@
         </p:nvSpPr>
         <p:spPr>
           <a:xfrm>
-            <a:off x="7635240" y="4184294"/>
-            <a:ext cx="3474720" cy="1466698"/>
+            <a:off x="7543800" y="4389120"/>
+            <a:ext cx="3611880" cy="1261872"/>
           </a:xfrm>
           <a:prstGeom prst="roundRect">
             <a:avLst>
-              <a:gd name="adj" fmla="val 7481"/>
+              <a:gd name="adj" fmla="val 8696"/>
             </a:avLst>
           </a:prstGeom>
           <a:solidFill>
@@ -18079,8 +18085,8 @@
         </p:nvSpPr>
         <p:spPr>
           <a:xfrm>
-            <a:off x="7799832" y="4330598"/>
-            <a:ext cx="3145536" cy="256032"/>
+            <a:off x="7708392" y="4517136"/>
+            <a:ext cx="3282696" cy="228600"/>
           </a:xfrm>
           <a:prstGeom prst="rect">
             <a:avLst/>
@@ -18096,7 +18102,7 @@
               <a:buNone/>
             </a:pPr>
             <a:r>
-              <a:rPr lang="en-US" sz="1300" b="1" dirty="0">
+              <a:rPr lang="en-US" sz="1220" b="1" dirty="0">
                 <a:solidFill>
                   <a:srgbClr val="0068B7"/>
                 </a:solidFill>
@@ -18106,7 +18112,7 @@
               </a:rPr>
               <a:t>How to validate</a:t>
             </a:r>
-            <a:endParaRPr lang="en-US" sz="1300" dirty="0"/>
+            <a:endParaRPr lang="en-US" sz="1220" dirty="0"/>
           </a:p>
         </p:txBody>
       </p:sp>
@@ -18118,8 +18124,8 @@
         </p:nvSpPr>
         <p:spPr>
           <a:xfrm>
-            <a:off x="7799832" y="4659782"/>
-            <a:ext cx="3145536" cy="899770"/>
+            <a:off x="7708392" y="4828032"/>
+            <a:ext cx="3282696" cy="749808"/>
           </a:xfrm>
           <a:prstGeom prst="rect">
             <a:avLst/>
@@ -18137,7 +18143,7 @@
               <a:buNone/>
             </a:pPr>
             <a:r>
-              <a:rPr lang="en-US" sz="1320" dirty="0">
+              <a:rPr lang="en-US" sz="1220" dirty="0">
                 <a:solidFill>
                   <a:srgbClr val="17364A"/>
                 </a:solidFill>
@@ -18145,9 +18151,9 @@
                 <a:ea typeface="Aptos" pitchFamily="34" charset="-122"/>
                 <a:cs typeface="Aptos" pitchFamily="34" charset="-120"/>
               </a:rPr>
-              <a:t>Connect the concept to data quality, model performance, validation evidence, monitoring measures, and decisions that remain under human control.</a:t>
-            </a:r>
-            <a:endParaRPr lang="en-US" sz="1320" dirty="0"/>
+              <a:t>Connect the concept to data quality, model performance, validation evidence,.</a:t>
+            </a:r>
+            <a:endParaRPr lang="en-US" sz="1220" dirty="0"/>
           </a:p>
         </p:txBody>
       </p:sp>

--- a/downloads/presentations/modules/ops-200.pptx
+++ b/downloads/presentations/modules/ops-200.pptx
@@ -11834,7 +11834,7 @@
                 <a:ea typeface="Aptos" pitchFamily="34" charset="-122"/>
                 <a:cs typeface="Aptos" pitchFamily="34" charset="-120"/>
               </a:rPr>
-              <a:t>• 1. What does fitness for use mean?</a:t>
+              <a:t>1. What does fitness for use mean?</a:t>
             </a:r>
             <a:endParaRPr lang="en-US" sz="1920" dirty="0"/>
           </a:p>
@@ -11851,7 +11851,7 @@
                 <a:ea typeface="Aptos" pitchFamily="34" charset="-122"/>
                 <a:cs typeface="Aptos" pitchFamily="34" charset="-120"/>
               </a:rPr>
-              <a:t>• 2. Why can poor data quality be dangerous in AI-supported workflows?</a:t>
+              <a:t>2. Why can poor data quality be dangerous in AI-supported workflows?</a:t>
             </a:r>
             <a:endParaRPr lang="en-US" sz="1920" dirty="0"/>
           </a:p>
@@ -11868,7 +11868,7 @@
                 <a:ea typeface="Aptos" pitchFamily="34" charset="-122"/>
                 <a:cs typeface="Aptos" pitchFamily="34" charset="-120"/>
               </a:rPr>
-              <a:t>• 3. What is data drift?</a:t>
+              <a:t>3. What is data drift?</a:t>
             </a:r>
             <a:endParaRPr lang="en-US" sz="1920" dirty="0"/>
           </a:p>
@@ -11975,7 +11975,7 @@
                 <a:ea typeface="Aptos" pitchFamily="34" charset="-122"/>
                 <a:cs typeface="Aptos" pitchFamily="34" charset="-120"/>
               </a:rPr>
-              <a:t>1. What does fitness for use mean?</a:t>
+              <a:t>What does fitness for use mean?</a:t>
             </a:r>
             <a:endParaRPr lang="en-US" sz="1220" dirty="0"/>
           </a:p>
@@ -12082,41 +12082,7 @@
                 <a:ea typeface="Aptos" pitchFamily="34" charset="-122"/>
                 <a:cs typeface="Aptos" pitchFamily="34" charset="-120"/>
               </a:rPr>
-              <a:t>1.</a:t>
-            </a:r>
-            <a:endParaRPr lang="en-US" sz="1140" dirty="0"/>
-          </a:p>
-          <a:p>
-            <a:pPr indent="0" marL="0">
-              <a:buNone/>
-            </a:pPr>
-            <a:r>
-              <a:rPr lang="en-US" sz="1140" dirty="0">
-                <a:solidFill>
-                  <a:srgbClr val="17364A"/>
-                </a:solidFill>
-                <a:latin typeface="Aptos" pitchFamily="34" charset="0"/>
-                <a:ea typeface="Aptos" pitchFamily="34" charset="-122"/>
-                <a:cs typeface="Aptos" pitchFamily="34" charset="-120"/>
-              </a:rPr>
               <a:t>What does fitness for use mean?</a:t>
-            </a:r>
-            <a:endParaRPr lang="en-US" sz="1140" dirty="0"/>
-          </a:p>
-          <a:p>
-            <a:pPr indent="0" marL="0">
-              <a:buNone/>
-            </a:pPr>
-            <a:r>
-              <a:rPr lang="en-US" sz="1140" dirty="0">
-                <a:solidFill>
-                  <a:srgbClr val="17364A"/>
-                </a:solidFill>
-                <a:latin typeface="Aptos" pitchFamily="34" charset="0"/>
-                <a:ea typeface="Aptos" pitchFamily="34" charset="-122"/>
-                <a:cs typeface="Aptos" pitchFamily="34" charset="-120"/>
-              </a:rPr>
-              <a:t>2.</a:t>
             </a:r>
             <a:endParaRPr lang="en-US" sz="1140" dirty="0"/>
           </a:p>
